--- a/docs/ppt/위례_공급가능용량_최종발표.pptx
+++ b/docs/ppt/위례_공급가능용량_최종발표.pptx
@@ -9697,26 +9697,26 @@
         <p:spPr>
           <a:xfrm>
             <a:off x="685800" y="914400"/>
-            <a:ext cx="10287000" cy="360045"/>
-          </a:xfrm>
-          <a:prstGeom prst="rect">
-            <a:avLst/>
-          </a:prstGeom>
-          <a:noFill/>
-          <a:ln/>
-        </p:spPr>
-        <p:txBody>
-          <a:bodyPr wrap="square" lIns="0" tIns="0" rIns="0" bIns="0" rtlCol="0" anchor="t"/>
-          <a:lstStyle/>
-          <a:p>
-            <a:pPr algn="l" indent="0" marL="0">
-              <a:lnSpc>
-                <a:spcPts val="2835"/>
-              </a:lnSpc>
-              <a:buNone/>
-            </a:pPr>
-            <a:r>
-              <a:rPr lang="en-US" sz="2250" b="1" dirty="0">
+            <a:ext cx="10287000" cy="888111"/>
+          </a:xfrm>
+          <a:prstGeom prst="rect">
+            <a:avLst/>
+          </a:prstGeom>
+          <a:noFill/>
+          <a:ln/>
+        </p:spPr>
+        <p:txBody>
+          <a:bodyPr wrap="square" lIns="0" tIns="0" rIns="0" bIns="0" rtlCol="0" anchor="t"/>
+          <a:lstStyle/>
+          <a:p>
+            <a:pPr algn="l" indent="0" marL="0">
+              <a:lnSpc>
+                <a:spcPts val="3496"/>
+              </a:lnSpc>
+              <a:buNone/>
+            </a:pPr>
+            <a:r>
+              <a:rPr lang="en-US" sz="2775" b="1" dirty="0">
                 <a:solidFill>
                   <a:srgbClr val="EAE7E0"/>
                 </a:solidFill>
@@ -9724,78 +9724,166 @@
                 <a:ea typeface="Malgun Gothic" pitchFamily="34" charset="-122"/>
                 <a:cs typeface="Malgun Gothic" pitchFamily="34" charset="-120"/>
               </a:rPr>
-              <a:t>매주 신고하는 숫자, 틀리면 양방향으로 손실이 납니다</a:t>
-            </a:r>
-            <a:endParaRPr lang="en-US" sz="2250" dirty="0"/>
-          </a:p>
-        </p:txBody>
-      </p:sp>
-      <p:sp>
-        <p:nvSpPr>
-          <p:cNvPr id="12" name="Shape 10"/>
-          <p:cNvSpPr/>
-          <p:nvPr/>
-        </p:nvSpPr>
-        <p:spPr>
-          <a:xfrm>
-            <a:off x="685800" y="2857500"/>
-            <a:ext cx="10820400" cy="2095500"/>
-          </a:xfrm>
-          <a:prstGeom prst="rect">
-            <a:avLst/>
-          </a:prstGeom>
-          <a:solidFill>
-            <a:srgbClr val="0A1320"/>
-          </a:solidFill>
-          <a:ln w="19050">
-            <a:solidFill>
-              <a:srgbClr val="22354A"/>
-            </a:solidFill>
-            <a:prstDash val="dash"/>
-          </a:ln>
-        </p:spPr>
-      </p:sp>
-      <p:sp>
-        <p:nvSpPr>
-          <p:cNvPr id="13" name="Text 11"/>
-          <p:cNvSpPr txBox="1"/>
-          <p:nvPr/>
-        </p:nvSpPr>
-        <p:spPr>
-          <a:xfrm>
-            <a:off x="685800" y="3695700"/>
-            <a:ext cx="10820400" cy="226695"/>
-          </a:xfrm>
-          <a:prstGeom prst="rect">
-            <a:avLst/>
-          </a:prstGeom>
-          <a:noFill/>
-          <a:ln/>
-        </p:spPr>
-        <p:txBody>
-          <a:bodyPr wrap="square" lIns="0" tIns="0" rIns="0" bIns="0" rtlCol="0" anchor="t"/>
-          <a:lstStyle/>
-          <a:p>
-            <a:pPr algn="ctr" indent="0" marL="0">
-              <a:lnSpc>
-                <a:spcPts val="1785"/>
-              </a:lnSpc>
-              <a:buNone/>
-            </a:pPr>
-            <a:r>
-              <a:rPr lang="en-US" sz="1275" dirty="0">
-                <a:solidFill>
-                  <a:srgbClr val="63798F"/>
+              <a:t>매주 신고하는 숫자입니다,</a:t>
+            </a:r>
+            <a:endParaRPr lang="en-US" sz="2775" dirty="0"/>
+          </a:p>
+          <a:p>
+            <a:pPr algn="l" indent="0" marL="0">
+              <a:lnSpc>
+                <a:spcPts val="3496"/>
+              </a:lnSpc>
+              <a:buNone/>
+            </a:pPr>
+            <a:r>
+              <a:rPr lang="en-US" sz="2775" b="1" dirty="0">
+                <a:solidFill>
+                  <a:srgbClr val="EAE7E0"/>
                 </a:solidFill>
                 <a:latin typeface="Malgun Gothic" pitchFamily="34" charset="0"/>
                 <a:ea typeface="Malgun Gothic" pitchFamily="34" charset="-122"/>
                 <a:cs typeface="Malgun Gothic" pitchFamily="34" charset="-120"/>
               </a:rPr>
-              <a:t>작성 예정 — 이 장은 아직 만들지 않았습니다.</a:t>
-            </a:r>
-            <a:endParaRPr lang="en-US" sz="1275" dirty="0"/>
-          </a:p>
-        </p:txBody>
+              <a:t>틀리면 </a:t>
+            </a:r>
+            <a:pPr algn="l" indent="0" marL="0">
+              <a:lnSpc>
+                <a:spcPts val="3496"/>
+              </a:lnSpc>
+              <a:buNone/>
+            </a:pPr>
+            <a:r>
+              <a:rPr lang="en-US" sz="2775" b="1" dirty="0">
+                <a:solidFill>
+                  <a:srgbClr val="EFB13C"/>
+                </a:solidFill>
+                <a:latin typeface="Malgun Gothic" pitchFamily="34" charset="0"/>
+                <a:ea typeface="Malgun Gothic" pitchFamily="34" charset="-122"/>
+                <a:cs typeface="Malgun Gothic" pitchFamily="34" charset="-120"/>
+              </a:rPr>
+              <a:t>양쪽으로 손실</a:t>
+            </a:r>
+            <a:pPr algn="l" indent="0" marL="0">
+              <a:lnSpc>
+                <a:spcPts val="3496"/>
+              </a:lnSpc>
+              <a:buNone/>
+            </a:pPr>
+            <a:r>
+              <a:rPr lang="en-US" sz="2775" b="1" dirty="0">
+                <a:solidFill>
+                  <a:srgbClr val="EAE7E0"/>
+                </a:solidFill>
+                <a:latin typeface="Malgun Gothic" pitchFamily="34" charset="0"/>
+                <a:ea typeface="Malgun Gothic" pitchFamily="34" charset="-122"/>
+                <a:cs typeface="Malgun Gothic" pitchFamily="34" charset="-120"/>
+              </a:rPr>
+              <a:t>이 납니다</a:t>
+            </a:r>
+            <a:endParaRPr lang="en-US" sz="2775" dirty="0"/>
+          </a:p>
+        </p:txBody>
+      </p:sp>
+      <p:sp>
+        <p:nvSpPr>
+          <p:cNvPr id="12" name="Text 10"/>
+          <p:cNvSpPr txBox="1"/>
+          <p:nvPr/>
+        </p:nvSpPr>
+        <p:spPr>
+          <a:xfrm>
+            <a:off x="685800" y="2000250"/>
+            <a:ext cx="10287000" cy="569214"/>
+          </a:xfrm>
+          <a:prstGeom prst="rect">
+            <a:avLst/>
+          </a:prstGeom>
+          <a:noFill/>
+          <a:ln/>
+        </p:spPr>
+        <p:txBody>
+          <a:bodyPr wrap="square" lIns="0" tIns="0" rIns="0" bIns="0" rtlCol="0" anchor="t"/>
+          <a:lstStyle/>
+          <a:p>
+            <a:pPr algn="l" indent="0" marL="0">
+              <a:lnSpc>
+                <a:spcPts val="2241"/>
+              </a:lnSpc>
+              <a:buNone/>
+            </a:pPr>
+            <a:r>
+              <a:rPr lang="en-US" sz="1350" dirty="0">
+                <a:solidFill>
+                  <a:srgbClr val="BCC9D6"/>
+                </a:solidFill>
+                <a:latin typeface="Malgun Gothic" pitchFamily="34" charset="0"/>
+                <a:ea typeface="Malgun Gothic" pitchFamily="34" charset="-122"/>
+                <a:cs typeface="Malgun Gothic" pitchFamily="34" charset="-120"/>
+              </a:rPr>
+              <a:t>다음 주에 낼 수 있는 최대 출력을 매주 신고합니다. 그 숫자가 그대로 입찰이 되므로, 실제와 어긋나면 </a:t>
+            </a:r>
+            <a:pPr algn="l" indent="0" marL="0">
+              <a:lnSpc>
+                <a:spcPts val="2241"/>
+              </a:lnSpc>
+              <a:buNone/>
+            </a:pPr>
+            <a:r>
+              <a:rPr lang="en-US" sz="1350" b="1" dirty="0">
+                <a:solidFill>
+                  <a:srgbClr val="EAE7E0"/>
+                </a:solidFill>
+                <a:latin typeface="Malgun Gothic" pitchFamily="34" charset="0"/>
+                <a:ea typeface="Malgun Gothic" pitchFamily="34" charset="-122"/>
+                <a:cs typeface="Malgun Gothic" pitchFamily="34" charset="-120"/>
+              </a:rPr>
+              <a:t>어긋난 방향에 따라</a:t>
+            </a:r>
+            <a:pPr algn="l" indent="0" marL="0">
+              <a:lnSpc>
+                <a:spcPts val="2241"/>
+              </a:lnSpc>
+              <a:buNone/>
+            </a:pPr>
+            <a:r>
+              <a:rPr lang="en-US" sz="1350" dirty="0">
+                <a:solidFill>
+                  <a:srgbClr val="BCC9D6"/>
+                </a:solidFill>
+                <a:latin typeface="Malgun Gothic" pitchFamily="34" charset="0"/>
+                <a:ea typeface="Malgun Gothic" pitchFamily="34" charset="-122"/>
+                <a:cs typeface="Malgun Gothic" pitchFamily="34" charset="-120"/>
+              </a:rPr>
+              <a:t> 다른 손실이 생깁니다.</a:t>
+            </a:r>
+            <a:endParaRPr lang="en-US" sz="1350" dirty="0"/>
+          </a:p>
+        </p:txBody>
+      </p:sp>
+      <p:sp>
+        <p:nvSpPr>
+          <p:cNvPr id="13" name="Shape 11"/>
+          <p:cNvSpPr/>
+          <p:nvPr/>
+        </p:nvSpPr>
+        <p:spPr>
+          <a:xfrm>
+            <a:off x="685800" y="2743200"/>
+            <a:ext cx="10820400" cy="742950"/>
+          </a:xfrm>
+          <a:prstGeom prst="rect">
+            <a:avLst/>
+          </a:prstGeom>
+          <a:solidFill>
+            <a:srgbClr val="0A1320"/>
+          </a:solidFill>
+          <a:ln w="12700">
+            <a:solidFill>
+              <a:srgbClr val="182838"/>
+            </a:solidFill>
+            <a:prstDash val="solid"/>
+          </a:ln>
+        </p:spPr>
       </p:sp>
       <p:sp>
         <p:nvSpPr>
@@ -9805,8 +9893,8 @@
         </p:nvSpPr>
         <p:spPr>
           <a:xfrm>
-            <a:off x="685800" y="4038600"/>
-            <a:ext cx="10820400" cy="125016"/>
+            <a:off x="914400" y="2857500"/>
+            <a:ext cx="3810000" cy="125016"/>
           </a:xfrm>
           <a:prstGeom prst="rect">
             <a:avLst/>
@@ -9827,13 +9915,13 @@
             <a:r>
               <a:rPr lang="en-US" sz="788" b="1" spc="150" kern="0" dirty="0">
                 <a:solidFill>
-                  <a:srgbClr val="7E2333"/>
+                  <a:srgbClr val="63798F"/>
                 </a:solidFill>
                 <a:latin typeface="Consolas" pitchFamily="34" charset="0"/>
                 <a:ea typeface="Consolas" pitchFamily="34" charset="-122"/>
                 <a:cs typeface="Consolas" pitchFamily="34" charset="-120"/>
               </a:rPr>
-              <a:t>SLIDE 03  ·  TODO</a:t>
+              <a:t>주간 신고 절차</a:t>
             </a:r>
             <a:endParaRPr lang="en-US" sz="788" dirty="0"/>
           </a:p>
@@ -9847,13 +9935,12 @@
         </p:nvSpPr>
         <p:spPr>
           <a:xfrm>
-            <a:off x="685800" y="6057900"/>
-            <a:ext cx="10820400" cy="0"/>
-          </a:xfrm>
-          <a:prstGeom prst="line">
-            <a:avLst/>
-          </a:prstGeom>
-          <a:noFill/>
+            <a:off x="914400" y="3067050"/>
+            <a:ext cx="952500" cy="285750"/>
+          </a:xfrm>
+          <a:prstGeom prst="rect">
+            <a:avLst/>
+          </a:prstGeom>
           <a:ln w="12700">
             <a:solidFill>
               <a:srgbClr val="22354A"/>
@@ -9861,6 +9948,1243 @@
             <a:prstDash val="solid"/>
           </a:ln>
         </p:spPr>
+      </p:sp>
+      <p:sp>
+        <p:nvSpPr>
+          <p:cNvPr id="16" name="Text 14"/>
+          <p:cNvSpPr txBox="1"/>
+          <p:nvPr/>
+        </p:nvSpPr>
+        <p:spPr>
+          <a:xfrm>
+            <a:off x="1009650" y="3133725"/>
+            <a:ext cx="762000" cy="148590"/>
+          </a:xfrm>
+          <a:prstGeom prst="rect">
+            <a:avLst/>
+          </a:prstGeom>
+          <a:noFill/>
+          <a:ln/>
+        </p:spPr>
+        <p:txBody>
+          <a:bodyPr wrap="square" lIns="0" tIns="0" rIns="0" bIns="0" rtlCol="0" anchor="t"/>
+          <a:lstStyle/>
+          <a:p>
+            <a:pPr algn="l" indent="0" marL="0">
+              <a:lnSpc>
+                <a:spcPts val="1170"/>
+              </a:lnSpc>
+              <a:buNone/>
+            </a:pPr>
+            <a:r>
+              <a:rPr lang="en-US" sz="975" dirty="0">
+                <a:solidFill>
+                  <a:srgbClr val="93A6BA"/>
+                </a:solidFill>
+                <a:latin typeface="Malgun Gothic" pitchFamily="34" charset="0"/>
+                <a:ea typeface="Malgun Gothic" pitchFamily="34" charset="-122"/>
+                <a:cs typeface="Malgun Gothic" pitchFamily="34" charset="-120"/>
+              </a:rPr>
+              <a:t>기상 예보</a:t>
+            </a:r>
+            <a:endParaRPr lang="en-US" sz="975" dirty="0"/>
+          </a:p>
+        </p:txBody>
+      </p:sp>
+      <p:sp>
+        <p:nvSpPr>
+          <p:cNvPr id="17" name="Shape 15"/>
+          <p:cNvSpPr/>
+          <p:nvPr/>
+        </p:nvSpPr>
+        <p:spPr>
+          <a:xfrm>
+            <a:off x="3448050" y="3067050"/>
+            <a:ext cx="1905000" cy="285750"/>
+          </a:xfrm>
+          <a:prstGeom prst="rect">
+            <a:avLst/>
+          </a:prstGeom>
+          <a:ln w="12700">
+            <a:solidFill>
+              <a:srgbClr val="22354A"/>
+            </a:solidFill>
+            <a:prstDash val="solid"/>
+          </a:ln>
+        </p:spPr>
+      </p:sp>
+      <p:sp>
+        <p:nvSpPr>
+          <p:cNvPr id="18" name="Text 16"/>
+          <p:cNvSpPr txBox="1"/>
+          <p:nvPr/>
+        </p:nvSpPr>
+        <p:spPr>
+          <a:xfrm>
+            <a:off x="3543300" y="3133725"/>
+            <a:ext cx="1714500" cy="148590"/>
+          </a:xfrm>
+          <a:prstGeom prst="rect">
+            <a:avLst/>
+          </a:prstGeom>
+          <a:noFill/>
+          <a:ln/>
+        </p:spPr>
+        <p:txBody>
+          <a:bodyPr wrap="square" lIns="0" tIns="0" rIns="0" bIns="0" rtlCol="0" anchor="t"/>
+          <a:lstStyle/>
+          <a:p>
+            <a:pPr algn="l" indent="0" marL="0">
+              <a:lnSpc>
+                <a:spcPts val="1170"/>
+              </a:lnSpc>
+              <a:buNone/>
+            </a:pPr>
+            <a:r>
+              <a:rPr lang="en-US" sz="975" dirty="0">
+                <a:solidFill>
+                  <a:srgbClr val="93A6BA"/>
+                </a:solidFill>
+                <a:latin typeface="Malgun Gothic" pitchFamily="34" charset="0"/>
+                <a:ea typeface="Malgun Gothic" pitchFamily="34" charset="-122"/>
+                <a:cs typeface="Malgun Gothic" pitchFamily="34" charset="-120"/>
+              </a:rPr>
+              <a:t>온도별 이론 출력 계산</a:t>
+            </a:r>
+            <a:endParaRPr lang="en-US" sz="975" dirty="0"/>
+          </a:p>
+        </p:txBody>
+      </p:sp>
+      <p:sp>
+        <p:nvSpPr>
+          <p:cNvPr id="19" name="Shape 17"/>
+          <p:cNvSpPr/>
+          <p:nvPr/>
+        </p:nvSpPr>
+        <p:spPr>
+          <a:xfrm>
+            <a:off x="6934200" y="3067050"/>
+            <a:ext cx="1238250" cy="285750"/>
+          </a:xfrm>
+          <a:prstGeom prst="rect">
+            <a:avLst/>
+          </a:prstGeom>
+          <a:ln w="12700">
+            <a:solidFill>
+              <a:srgbClr val="6B5220"/>
+            </a:solidFill>
+            <a:prstDash val="solid"/>
+          </a:ln>
+        </p:spPr>
+      </p:sp>
+      <p:sp>
+        <p:nvSpPr>
+          <p:cNvPr id="20" name="Text 18"/>
+          <p:cNvSpPr txBox="1"/>
+          <p:nvPr/>
+        </p:nvSpPr>
+        <p:spPr>
+          <a:xfrm>
+            <a:off x="7029450" y="3133725"/>
+            <a:ext cx="1047750" cy="148590"/>
+          </a:xfrm>
+          <a:prstGeom prst="rect">
+            <a:avLst/>
+          </a:prstGeom>
+          <a:noFill/>
+          <a:ln/>
+        </p:spPr>
+        <p:txBody>
+          <a:bodyPr wrap="square" lIns="0" tIns="0" rIns="0" bIns="0" rtlCol="0" anchor="t"/>
+          <a:lstStyle/>
+          <a:p>
+            <a:pPr algn="l" indent="0" marL="0">
+              <a:lnSpc>
+                <a:spcPts val="1170"/>
+              </a:lnSpc>
+              <a:buNone/>
+            </a:pPr>
+            <a:r>
+              <a:rPr lang="en-US" sz="975" dirty="0">
+                <a:solidFill>
+                  <a:srgbClr val="EFB13C"/>
+                </a:solidFill>
+                <a:latin typeface="Malgun Gothic" pitchFamily="34" charset="0"/>
+                <a:ea typeface="Malgun Gothic" pitchFamily="34" charset="-122"/>
+                <a:cs typeface="Malgun Gothic" pitchFamily="34" charset="-120"/>
+              </a:rPr>
+              <a:t>보정값 적용</a:t>
+            </a:r>
+            <a:endParaRPr lang="en-US" sz="975" dirty="0"/>
+          </a:p>
+        </p:txBody>
+      </p:sp>
+      <p:sp>
+        <p:nvSpPr>
+          <p:cNvPr id="21" name="Shape 19"/>
+          <p:cNvSpPr/>
+          <p:nvPr/>
+        </p:nvSpPr>
+        <p:spPr>
+          <a:xfrm>
+            <a:off x="9753600" y="3067050"/>
+            <a:ext cx="1476375" cy="285750"/>
+          </a:xfrm>
+          <a:prstGeom prst="rect">
+            <a:avLst/>
+          </a:prstGeom>
+          <a:ln w="12700">
+            <a:solidFill>
+              <a:srgbClr val="22354A"/>
+            </a:solidFill>
+            <a:prstDash val="solid"/>
+          </a:ln>
+        </p:spPr>
+      </p:sp>
+      <p:sp>
+        <p:nvSpPr>
+          <p:cNvPr id="22" name="Text 20"/>
+          <p:cNvSpPr txBox="1"/>
+          <p:nvPr/>
+        </p:nvSpPr>
+        <p:spPr>
+          <a:xfrm>
+            <a:off x="9848850" y="3133725"/>
+            <a:ext cx="1285875" cy="148590"/>
+          </a:xfrm>
+          <a:prstGeom prst="rect">
+            <a:avLst/>
+          </a:prstGeom>
+          <a:noFill/>
+          <a:ln/>
+        </p:spPr>
+        <p:txBody>
+          <a:bodyPr wrap="square" lIns="0" tIns="0" rIns="0" bIns="0" rtlCol="0" anchor="t"/>
+          <a:lstStyle/>
+          <a:p>
+            <a:pPr algn="l" indent="0" marL="0">
+              <a:lnSpc>
+                <a:spcPts val="1170"/>
+              </a:lnSpc>
+              <a:buNone/>
+            </a:pPr>
+            <a:r>
+              <a:rPr lang="en-US" sz="975" dirty="0">
+                <a:solidFill>
+                  <a:srgbClr val="93A6BA"/>
+                </a:solidFill>
+                <a:latin typeface="Malgun Gothic" pitchFamily="34" charset="0"/>
+                <a:ea typeface="Malgun Gothic" pitchFamily="34" charset="-122"/>
+                <a:cs typeface="Malgun Gothic" pitchFamily="34" charset="-120"/>
+              </a:rPr>
+              <a:t>주간 신고 확정</a:t>
+            </a:r>
+            <a:endParaRPr lang="en-US" sz="975" dirty="0"/>
+          </a:p>
+        </p:txBody>
+      </p:sp>
+      <p:sp>
+        <p:nvSpPr>
+          <p:cNvPr id="23" name="Text 21"/>
+          <p:cNvSpPr txBox="1"/>
+          <p:nvPr/>
+        </p:nvSpPr>
+        <p:spPr>
+          <a:xfrm>
+            <a:off x="2562225" y="3133725"/>
+            <a:ext cx="190500" cy="148590"/>
+          </a:xfrm>
+          <a:prstGeom prst="rect">
+            <a:avLst/>
+          </a:prstGeom>
+          <a:noFill/>
+          <a:ln/>
+        </p:spPr>
+        <p:txBody>
+          <a:bodyPr wrap="square" lIns="0" tIns="0" rIns="0" bIns="0" rtlCol="0" anchor="t"/>
+          <a:lstStyle/>
+          <a:p>
+            <a:pPr algn="ctr" indent="0" marL="0">
+              <a:lnSpc>
+                <a:spcPts val="1170"/>
+              </a:lnSpc>
+              <a:buNone/>
+            </a:pPr>
+            <a:r>
+              <a:rPr lang="en-US" sz="975" dirty="0">
+                <a:solidFill>
+                  <a:srgbClr val="63798F"/>
+                </a:solidFill>
+                <a:latin typeface="Malgun Gothic" pitchFamily="34" charset="0"/>
+                <a:ea typeface="Malgun Gothic" pitchFamily="34" charset="-122"/>
+                <a:cs typeface="Malgun Gothic" pitchFamily="34" charset="-120"/>
+              </a:rPr>
+              <a:t>→</a:t>
+            </a:r>
+            <a:endParaRPr lang="en-US" sz="975" dirty="0"/>
+          </a:p>
+        </p:txBody>
+      </p:sp>
+      <p:sp>
+        <p:nvSpPr>
+          <p:cNvPr id="24" name="Text 22"/>
+          <p:cNvSpPr txBox="1"/>
+          <p:nvPr/>
+        </p:nvSpPr>
+        <p:spPr>
+          <a:xfrm>
+            <a:off x="6048375" y="3133725"/>
+            <a:ext cx="190500" cy="148590"/>
+          </a:xfrm>
+          <a:prstGeom prst="rect">
+            <a:avLst/>
+          </a:prstGeom>
+          <a:noFill/>
+          <a:ln/>
+        </p:spPr>
+        <p:txBody>
+          <a:bodyPr wrap="square" lIns="0" tIns="0" rIns="0" bIns="0" rtlCol="0" anchor="t"/>
+          <a:lstStyle/>
+          <a:p>
+            <a:pPr algn="ctr" indent="0" marL="0">
+              <a:lnSpc>
+                <a:spcPts val="1170"/>
+              </a:lnSpc>
+              <a:buNone/>
+            </a:pPr>
+            <a:r>
+              <a:rPr lang="en-US" sz="975" dirty="0">
+                <a:solidFill>
+                  <a:srgbClr val="63798F"/>
+                </a:solidFill>
+                <a:latin typeface="Malgun Gothic" pitchFamily="34" charset="0"/>
+                <a:ea typeface="Malgun Gothic" pitchFamily="34" charset="-122"/>
+                <a:cs typeface="Malgun Gothic" pitchFamily="34" charset="-120"/>
+              </a:rPr>
+              <a:t>→</a:t>
+            </a:r>
+            <a:endParaRPr lang="en-US" sz="975" dirty="0"/>
+          </a:p>
+        </p:txBody>
+      </p:sp>
+      <p:sp>
+        <p:nvSpPr>
+          <p:cNvPr id="25" name="Text 23"/>
+          <p:cNvSpPr txBox="1"/>
+          <p:nvPr/>
+        </p:nvSpPr>
+        <p:spPr>
+          <a:xfrm>
+            <a:off x="8867775" y="3133725"/>
+            <a:ext cx="190500" cy="148590"/>
+          </a:xfrm>
+          <a:prstGeom prst="rect">
+            <a:avLst/>
+          </a:prstGeom>
+          <a:noFill/>
+          <a:ln/>
+        </p:spPr>
+        <p:txBody>
+          <a:bodyPr wrap="square" lIns="0" tIns="0" rIns="0" bIns="0" rtlCol="0" anchor="t"/>
+          <a:lstStyle/>
+          <a:p>
+            <a:pPr algn="ctr" indent="0" marL="0">
+              <a:lnSpc>
+                <a:spcPts val="1170"/>
+              </a:lnSpc>
+              <a:buNone/>
+            </a:pPr>
+            <a:r>
+              <a:rPr lang="en-US" sz="975" dirty="0">
+                <a:solidFill>
+                  <a:srgbClr val="63798F"/>
+                </a:solidFill>
+                <a:latin typeface="Malgun Gothic" pitchFamily="34" charset="0"/>
+                <a:ea typeface="Malgun Gothic" pitchFamily="34" charset="-122"/>
+                <a:cs typeface="Malgun Gothic" pitchFamily="34" charset="-120"/>
+              </a:rPr>
+              <a:t>→</a:t>
+            </a:r>
+            <a:endParaRPr lang="en-US" sz="975" dirty="0"/>
+          </a:p>
+        </p:txBody>
+      </p:sp>
+      <p:sp>
+        <p:nvSpPr>
+          <p:cNvPr id="26" name="Shape 24"/>
+          <p:cNvSpPr/>
+          <p:nvPr/>
+        </p:nvSpPr>
+        <p:spPr>
+          <a:xfrm>
+            <a:off x="685800" y="3771900"/>
+            <a:ext cx="5295900" cy="19050"/>
+          </a:xfrm>
+          <a:prstGeom prst="rect">
+            <a:avLst/>
+          </a:prstGeom>
+          <a:solidFill>
+            <a:srgbClr val="7E2333"/>
+          </a:solidFill>
+          <a:ln/>
+        </p:spPr>
+      </p:sp>
+      <p:sp>
+        <p:nvSpPr>
+          <p:cNvPr id="27" name="Text 25"/>
+          <p:cNvSpPr txBox="1"/>
+          <p:nvPr/>
+        </p:nvSpPr>
+        <p:spPr>
+          <a:xfrm>
+            <a:off x="685800" y="3905250"/>
+            <a:ext cx="5295900" cy="125016"/>
+          </a:xfrm>
+          <a:prstGeom prst="rect">
+            <a:avLst/>
+          </a:prstGeom>
+          <a:noFill/>
+          <a:ln/>
+        </p:spPr>
+        <p:txBody>
+          <a:bodyPr wrap="square" lIns="0" tIns="0" rIns="0" bIns="0" rtlCol="0" anchor="t"/>
+          <a:lstStyle/>
+          <a:p>
+            <a:pPr algn="l" indent="0" marL="0">
+              <a:lnSpc>
+                <a:spcPts val="984"/>
+              </a:lnSpc>
+              <a:buNone/>
+            </a:pPr>
+            <a:r>
+              <a:rPr lang="en-US" sz="788" b="1" spc="150" kern="0" dirty="0">
+                <a:solidFill>
+                  <a:srgbClr val="FF4D63"/>
+                </a:solidFill>
+                <a:latin typeface="Consolas" pitchFamily="34" charset="0"/>
+                <a:ea typeface="Consolas" pitchFamily="34" charset="-122"/>
+                <a:cs typeface="Consolas" pitchFamily="34" charset="-120"/>
+              </a:rPr>
+              <a:t>낮게 신고하면  ·  기회손실</a:t>
+            </a:r>
+            <a:endParaRPr lang="en-US" sz="788" dirty="0"/>
+          </a:p>
+        </p:txBody>
+      </p:sp>
+      <p:sp>
+        <p:nvSpPr>
+          <p:cNvPr id="28" name="Text 26"/>
+          <p:cNvSpPr txBox="1"/>
+          <p:nvPr/>
+        </p:nvSpPr>
+        <p:spPr>
+          <a:xfrm>
+            <a:off x="685800" y="4114800"/>
+            <a:ext cx="5295900" cy="568071"/>
+          </a:xfrm>
+          <a:prstGeom prst="rect">
+            <a:avLst/>
+          </a:prstGeom>
+          <a:noFill/>
+          <a:ln/>
+        </p:spPr>
+        <p:txBody>
+          <a:bodyPr wrap="square" lIns="0" tIns="0" rIns="0" bIns="0" rtlCol="0" anchor="t"/>
+          <a:lstStyle/>
+          <a:p>
+            <a:pPr algn="l" indent="0" marL="0">
+              <a:lnSpc>
+                <a:spcPts val="2237"/>
+              </a:lnSpc>
+              <a:buNone/>
+            </a:pPr>
+            <a:r>
+              <a:rPr lang="en-US" sz="1575" b="1" dirty="0">
+                <a:solidFill>
+                  <a:srgbClr val="EAE7E0"/>
+                </a:solidFill>
+                <a:latin typeface="Malgun Gothic" pitchFamily="34" charset="0"/>
+                <a:ea typeface="Malgun Gothic" pitchFamily="34" charset="-122"/>
+                <a:cs typeface="Malgun Gothic" pitchFamily="34" charset="-120"/>
+              </a:rPr>
+              <a:t>팔 수 있었는데 </a:t>
+            </a:r>
+            <a:pPr algn="l" indent="0" marL="0">
+              <a:lnSpc>
+                <a:spcPts val="2237"/>
+              </a:lnSpc>
+              <a:buNone/>
+            </a:pPr>
+            <a:r>
+              <a:rPr lang="en-US" sz="1575" b="1" dirty="0">
+                <a:solidFill>
+                  <a:srgbClr val="EFB13C"/>
+                </a:solidFill>
+                <a:latin typeface="Malgun Gothic" pitchFamily="34" charset="0"/>
+                <a:ea typeface="Malgun Gothic" pitchFamily="34" charset="-122"/>
+                <a:cs typeface="Malgun Gothic" pitchFamily="34" charset="-120"/>
+              </a:rPr>
+              <a:t>못 팝니다</a:t>
+            </a:r>
+            <a:endParaRPr lang="en-US" sz="1575" dirty="0"/>
+          </a:p>
+        </p:txBody>
+      </p:sp>
+      <p:sp>
+        <p:nvSpPr>
+          <p:cNvPr id="29" name="Text 27"/>
+          <p:cNvSpPr txBox="1"/>
+          <p:nvPr/>
+        </p:nvSpPr>
+        <p:spPr>
+          <a:xfrm>
+            <a:off x="685800" y="4781550"/>
+            <a:ext cx="5295900" cy="480060"/>
+          </a:xfrm>
+          <a:prstGeom prst="rect">
+            <a:avLst/>
+          </a:prstGeom>
+          <a:noFill/>
+          <a:ln/>
+        </p:spPr>
+        <p:txBody>
+          <a:bodyPr wrap="square" lIns="0" tIns="0" rIns="0" bIns="0" rtlCol="0" anchor="t"/>
+          <a:lstStyle/>
+          <a:p>
+            <a:pPr algn="l" indent="0" marL="0">
+              <a:lnSpc>
+                <a:spcPts val="1890"/>
+              </a:lnSpc>
+              <a:buNone/>
+            </a:pPr>
+            <a:r>
+              <a:rPr lang="en-US" sz="1125" dirty="0">
+                <a:solidFill>
+                  <a:srgbClr val="BCC9D6"/>
+                </a:solidFill>
+                <a:latin typeface="Malgun Gothic" pitchFamily="34" charset="0"/>
+                <a:ea typeface="Malgun Gothic" pitchFamily="34" charset="-122"/>
+                <a:cs typeface="Malgun Gothic" pitchFamily="34" charset="-120"/>
+              </a:rPr>
+              <a:t>실제로 낼 수 있는 출력보다 낮게 신고하면 그만큼 입찰에서 빠집니다. 종전 방식은 </a:t>
+            </a:r>
+            <a:pPr algn="l" indent="0" marL="0">
+              <a:lnSpc>
+                <a:spcPts val="1890"/>
+              </a:lnSpc>
+              <a:buNone/>
+            </a:pPr>
+            <a:r>
+              <a:rPr lang="en-US" sz="1125" b="1" dirty="0">
+                <a:solidFill>
+                  <a:srgbClr val="EAE7E0"/>
+                </a:solidFill>
+                <a:latin typeface="Malgun Gothic" pitchFamily="34" charset="0"/>
+                <a:ea typeface="Malgun Gothic" pitchFamily="34" charset="-122"/>
+                <a:cs typeface="Malgun Gothic" pitchFamily="34" charset="-120"/>
+              </a:rPr>
+              <a:t>겨울에</a:t>
+            </a:r>
+            <a:pPr algn="l" indent="0" marL="0">
+              <a:lnSpc>
+                <a:spcPts val="1890"/>
+              </a:lnSpc>
+              <a:buNone/>
+            </a:pPr>
+            <a:r>
+              <a:rPr lang="en-US" sz="1125" dirty="0">
+                <a:solidFill>
+                  <a:srgbClr val="BCC9D6"/>
+                </a:solidFill>
+                <a:latin typeface="Malgun Gothic" pitchFamily="34" charset="0"/>
+                <a:ea typeface="Malgun Gothic" pitchFamily="34" charset="-122"/>
+                <a:cs typeface="Malgun Gothic" pitchFamily="34" charset="-120"/>
+              </a:rPr>
+              <a:t> 이 방향으로 치우쳤습니다.</a:t>
+            </a:r>
+            <a:endParaRPr lang="en-US" sz="1125" dirty="0"/>
+          </a:p>
+        </p:txBody>
+      </p:sp>
+      <p:sp>
+        <p:nvSpPr>
+          <p:cNvPr id="30" name="Shape 28"/>
+          <p:cNvSpPr/>
+          <p:nvPr/>
+        </p:nvSpPr>
+        <p:spPr>
+          <a:xfrm>
+            <a:off x="685800" y="5391150"/>
+            <a:ext cx="5295900" cy="514350"/>
+          </a:xfrm>
+          <a:prstGeom prst="rect">
+            <a:avLst/>
+          </a:prstGeom>
+          <a:solidFill>
+            <a:srgbClr val="0A1320"/>
+          </a:solidFill>
+          <a:ln w="12700">
+            <a:solidFill>
+              <a:srgbClr val="182838"/>
+            </a:solidFill>
+            <a:prstDash val="solid"/>
+          </a:ln>
+        </p:spPr>
+      </p:sp>
+      <p:sp>
+        <p:nvSpPr>
+          <p:cNvPr id="31" name="Text 29"/>
+          <p:cNvSpPr txBox="1"/>
+          <p:nvPr/>
+        </p:nvSpPr>
+        <p:spPr>
+          <a:xfrm>
+            <a:off x="838200" y="5486400"/>
+            <a:ext cx="1047750" cy="260033"/>
+          </a:xfrm>
+          <a:prstGeom prst="rect">
+            <a:avLst/>
+          </a:prstGeom>
+          <a:noFill/>
+          <a:ln/>
+        </p:spPr>
+        <p:txBody>
+          <a:bodyPr wrap="square" lIns="0" tIns="0" rIns="0" bIns="0" rtlCol="0" anchor="t"/>
+          <a:lstStyle/>
+          <a:p>
+            <a:pPr algn="l" indent="0" marL="0">
+              <a:lnSpc>
+                <a:spcPts val="2048"/>
+              </a:lnSpc>
+              <a:buNone/>
+            </a:pPr>
+            <a:r>
+              <a:rPr lang="en-US" sz="1950" b="1" dirty="0">
+                <a:solidFill>
+                  <a:srgbClr val="FF4D63"/>
+                </a:solidFill>
+                <a:latin typeface="Consolas" pitchFamily="34" charset="0"/>
+                <a:ea typeface="Consolas" pitchFamily="34" charset="-122"/>
+                <a:cs typeface="Consolas" pitchFamily="34" charset="-120"/>
+              </a:rPr>
+              <a:t>4.7</a:t>
+            </a:r>
+            <a:endParaRPr lang="en-US" sz="1950" dirty="0"/>
+          </a:p>
+        </p:txBody>
+      </p:sp>
+      <p:sp>
+        <p:nvSpPr>
+          <p:cNvPr id="32" name="Text 30"/>
+          <p:cNvSpPr txBox="1"/>
+          <p:nvPr/>
+        </p:nvSpPr>
+        <p:spPr>
+          <a:xfrm>
+            <a:off x="1323975" y="5562600"/>
+            <a:ext cx="571500" cy="148590"/>
+          </a:xfrm>
+          <a:prstGeom prst="rect">
+            <a:avLst/>
+          </a:prstGeom>
+          <a:noFill/>
+          <a:ln/>
+        </p:spPr>
+        <p:txBody>
+          <a:bodyPr wrap="square" lIns="0" tIns="0" rIns="0" bIns="0" rtlCol="0" anchor="t"/>
+          <a:lstStyle/>
+          <a:p>
+            <a:pPr algn="l" indent="0" marL="0">
+              <a:lnSpc>
+                <a:spcPts val="1170"/>
+              </a:lnSpc>
+              <a:buNone/>
+            </a:pPr>
+            <a:r>
+              <a:rPr lang="en-US" sz="975" dirty="0">
+                <a:solidFill>
+                  <a:srgbClr val="93A6BA"/>
+                </a:solidFill>
+                <a:latin typeface="Malgun Gothic" pitchFamily="34" charset="0"/>
+                <a:ea typeface="Malgun Gothic" pitchFamily="34" charset="-122"/>
+                <a:cs typeface="Malgun Gothic" pitchFamily="34" charset="-120"/>
+              </a:rPr>
+              <a:t>MW</a:t>
+            </a:r>
+            <a:endParaRPr lang="en-US" sz="975" dirty="0"/>
+          </a:p>
+        </p:txBody>
+      </p:sp>
+      <p:sp>
+        <p:nvSpPr>
+          <p:cNvPr id="33" name="Text 31"/>
+          <p:cNvSpPr txBox="1"/>
+          <p:nvPr/>
+        </p:nvSpPr>
+        <p:spPr>
+          <a:xfrm>
+            <a:off x="2114550" y="5467350"/>
+            <a:ext cx="3714750" cy="328613"/>
+          </a:xfrm>
+          <a:prstGeom prst="rect">
+            <a:avLst/>
+          </a:prstGeom>
+          <a:noFill/>
+          <a:ln/>
+        </p:spPr>
+        <p:txBody>
+          <a:bodyPr wrap="square" lIns="0" tIns="0" rIns="0" bIns="0" rtlCol="0" anchor="t"/>
+          <a:lstStyle/>
+          <a:p>
+            <a:pPr algn="l" indent="0" marL="0">
+              <a:lnSpc>
+                <a:spcPts val="1294"/>
+              </a:lnSpc>
+              <a:buNone/>
+            </a:pPr>
+            <a:r>
+              <a:rPr lang="en-US" sz="863" dirty="0">
+                <a:solidFill>
+                  <a:srgbClr val="63798F"/>
+                </a:solidFill>
+                <a:latin typeface="Consolas" pitchFamily="34" charset="0"/>
+                <a:ea typeface="Consolas" pitchFamily="34" charset="-122"/>
+                <a:cs typeface="Consolas" pitchFamily="34" charset="-120"/>
+              </a:rPr>
+              <a:t>겨울 0℃ 에서 낮게 잡힌 폭</a:t>
+            </a:r>
+            <a:endParaRPr lang="en-US" sz="863" dirty="0"/>
+          </a:p>
+          <a:p>
+            <a:pPr algn="l" indent="0" marL="0">
+              <a:lnSpc>
+                <a:spcPts val="1294"/>
+              </a:lnSpc>
+              <a:buNone/>
+            </a:pPr>
+            <a:r>
+              <a:rPr lang="en-US" sz="863" dirty="0">
+                <a:solidFill>
+                  <a:srgbClr val="63798F"/>
+                </a:solidFill>
+                <a:latin typeface="Consolas" pitchFamily="34" charset="0"/>
+                <a:ea typeface="Consolas" pitchFamily="34" charset="-122"/>
+                <a:cs typeface="Consolas" pitchFamily="34" charset="-120"/>
+              </a:rPr>
+              <a:t>종전 +2.84 vs 실제 +7.50</a:t>
+            </a:r>
+            <a:endParaRPr lang="en-US" sz="863" dirty="0"/>
+          </a:p>
+        </p:txBody>
+      </p:sp>
+      <p:sp>
+        <p:nvSpPr>
+          <p:cNvPr id="34" name="Shape 32"/>
+          <p:cNvSpPr/>
+          <p:nvPr/>
+        </p:nvSpPr>
+        <p:spPr>
+          <a:xfrm>
+            <a:off x="6210300" y="3771900"/>
+            <a:ext cx="5295900" cy="19050"/>
+          </a:xfrm>
+          <a:prstGeom prst="rect">
+            <a:avLst/>
+          </a:prstGeom>
+          <a:solidFill>
+            <a:srgbClr val="7E2333"/>
+          </a:solidFill>
+          <a:ln/>
+        </p:spPr>
+      </p:sp>
+      <p:sp>
+        <p:nvSpPr>
+          <p:cNvPr id="35" name="Text 33"/>
+          <p:cNvSpPr txBox="1"/>
+          <p:nvPr/>
+        </p:nvSpPr>
+        <p:spPr>
+          <a:xfrm>
+            <a:off x="6210300" y="3905250"/>
+            <a:ext cx="5295900" cy="125016"/>
+          </a:xfrm>
+          <a:prstGeom prst="rect">
+            <a:avLst/>
+          </a:prstGeom>
+          <a:noFill/>
+          <a:ln/>
+        </p:spPr>
+        <p:txBody>
+          <a:bodyPr wrap="square" lIns="0" tIns="0" rIns="0" bIns="0" rtlCol="0" anchor="t"/>
+          <a:lstStyle/>
+          <a:p>
+            <a:pPr algn="l" indent="0" marL="0">
+              <a:lnSpc>
+                <a:spcPts val="984"/>
+              </a:lnSpc>
+              <a:buNone/>
+            </a:pPr>
+            <a:r>
+              <a:rPr lang="en-US" sz="788" b="1" spc="150" kern="0" dirty="0">
+                <a:solidFill>
+                  <a:srgbClr val="FF4D63"/>
+                </a:solidFill>
+                <a:latin typeface="Consolas" pitchFamily="34" charset="0"/>
+                <a:ea typeface="Consolas" pitchFamily="34" charset="-122"/>
+                <a:cs typeface="Consolas" pitchFamily="34" charset="-120"/>
+              </a:rPr>
+              <a:t>높게 신고하면  ·  페널티</a:t>
+            </a:r>
+            <a:endParaRPr lang="en-US" sz="788" dirty="0"/>
+          </a:p>
+        </p:txBody>
+      </p:sp>
+      <p:sp>
+        <p:nvSpPr>
+          <p:cNvPr id="36" name="Text 34"/>
+          <p:cNvSpPr txBox="1"/>
+          <p:nvPr/>
+        </p:nvSpPr>
+        <p:spPr>
+          <a:xfrm>
+            <a:off x="6210300" y="4114800"/>
+            <a:ext cx="5295900" cy="568071"/>
+          </a:xfrm>
+          <a:prstGeom prst="rect">
+            <a:avLst/>
+          </a:prstGeom>
+          <a:noFill/>
+          <a:ln/>
+        </p:spPr>
+        <p:txBody>
+          <a:bodyPr wrap="square" lIns="0" tIns="0" rIns="0" bIns="0" rtlCol="0" anchor="t"/>
+          <a:lstStyle/>
+          <a:p>
+            <a:pPr algn="l" indent="0" marL="0">
+              <a:lnSpc>
+                <a:spcPts val="2237"/>
+              </a:lnSpc>
+              <a:buNone/>
+            </a:pPr>
+            <a:r>
+              <a:rPr lang="en-US" sz="1575" b="1" dirty="0">
+                <a:solidFill>
+                  <a:srgbClr val="EAE7E0"/>
+                </a:solidFill>
+                <a:latin typeface="Malgun Gothic" pitchFamily="34" charset="0"/>
+                <a:ea typeface="Malgun Gothic" pitchFamily="34" charset="-122"/>
+                <a:cs typeface="Malgun Gothic" pitchFamily="34" charset="-120"/>
+              </a:rPr>
+              <a:t>기준 미달로 </a:t>
+            </a:r>
+            <a:pPr algn="l" indent="0" marL="0">
+              <a:lnSpc>
+                <a:spcPts val="2237"/>
+              </a:lnSpc>
+              <a:buNone/>
+            </a:pPr>
+            <a:r>
+              <a:rPr lang="en-US" sz="1575" b="1" dirty="0">
+                <a:solidFill>
+                  <a:srgbClr val="EFB13C"/>
+                </a:solidFill>
+                <a:latin typeface="Malgun Gothic" pitchFamily="34" charset="0"/>
+                <a:ea typeface="Malgun Gothic" pitchFamily="34" charset="-122"/>
+                <a:cs typeface="Malgun Gothic" pitchFamily="34" charset="-120"/>
+              </a:rPr>
+              <a:t>벌점이 걸립니다</a:t>
+            </a:r>
+            <a:endParaRPr lang="en-US" sz="1575" dirty="0"/>
+          </a:p>
+        </p:txBody>
+      </p:sp>
+      <p:sp>
+        <p:nvSpPr>
+          <p:cNvPr id="37" name="Text 35"/>
+          <p:cNvSpPr txBox="1"/>
+          <p:nvPr/>
+        </p:nvSpPr>
+        <p:spPr>
+          <a:xfrm>
+            <a:off x="6210300" y="4781550"/>
+            <a:ext cx="5295900" cy="480060"/>
+          </a:xfrm>
+          <a:prstGeom prst="rect">
+            <a:avLst/>
+          </a:prstGeom>
+          <a:noFill/>
+          <a:ln/>
+        </p:spPr>
+        <p:txBody>
+          <a:bodyPr wrap="square" lIns="0" tIns="0" rIns="0" bIns="0" rtlCol="0" anchor="t"/>
+          <a:lstStyle/>
+          <a:p>
+            <a:pPr algn="l" indent="0" marL="0">
+              <a:lnSpc>
+                <a:spcPts val="1890"/>
+              </a:lnSpc>
+              <a:buNone/>
+            </a:pPr>
+            <a:r>
+              <a:rPr lang="en-US" sz="1125" dirty="0">
+                <a:solidFill>
+                  <a:srgbClr val="BCC9D6"/>
+                </a:solidFill>
+                <a:latin typeface="Malgun Gothic" pitchFamily="34" charset="0"/>
+                <a:ea typeface="Malgun Gothic" pitchFamily="34" charset="-122"/>
+                <a:cs typeface="Malgun Gothic" pitchFamily="34" charset="-120"/>
+              </a:rPr>
+              <a:t>신고값에 실제가 못 미치면 미달입니다. 종전 방식은 </a:t>
+            </a:r>
+            <a:pPr algn="l" indent="0" marL="0">
+              <a:lnSpc>
+                <a:spcPts val="1890"/>
+              </a:lnSpc>
+              <a:buNone/>
+            </a:pPr>
+            <a:r>
+              <a:rPr lang="en-US" sz="1125" b="1" dirty="0">
+                <a:solidFill>
+                  <a:srgbClr val="EAE7E0"/>
+                </a:solidFill>
+                <a:latin typeface="Malgun Gothic" pitchFamily="34" charset="0"/>
+                <a:ea typeface="Malgun Gothic" pitchFamily="34" charset="-122"/>
+                <a:cs typeface="Malgun Gothic" pitchFamily="34" charset="-120"/>
+              </a:rPr>
+              <a:t>여름에</a:t>
+            </a:r>
+            <a:pPr algn="l" indent="0" marL="0">
+              <a:lnSpc>
+                <a:spcPts val="1890"/>
+              </a:lnSpc>
+              <a:buNone/>
+            </a:pPr>
+            <a:r>
+              <a:rPr lang="en-US" sz="1125" dirty="0">
+                <a:solidFill>
+                  <a:srgbClr val="BCC9D6"/>
+                </a:solidFill>
+                <a:latin typeface="Malgun Gothic" pitchFamily="34" charset="0"/>
+                <a:ea typeface="Malgun Gothic" pitchFamily="34" charset="-122"/>
+                <a:cs typeface="Malgun Gothic" pitchFamily="34" charset="-120"/>
+              </a:rPr>
+              <a:t> 이 방향으로 치우쳤습니다.</a:t>
+            </a:r>
+            <a:endParaRPr lang="en-US" sz="1125" dirty="0"/>
+          </a:p>
+        </p:txBody>
+      </p:sp>
+      <p:sp>
+        <p:nvSpPr>
+          <p:cNvPr id="38" name="Shape 36"/>
+          <p:cNvSpPr/>
+          <p:nvPr/>
+        </p:nvSpPr>
+        <p:spPr>
+          <a:xfrm>
+            <a:off x="6210300" y="5391150"/>
+            <a:ext cx="5295900" cy="514350"/>
+          </a:xfrm>
+          <a:prstGeom prst="rect">
+            <a:avLst/>
+          </a:prstGeom>
+          <a:solidFill>
+            <a:srgbClr val="0A1320"/>
+          </a:solidFill>
+          <a:ln w="12700">
+            <a:solidFill>
+              <a:srgbClr val="182838"/>
+            </a:solidFill>
+            <a:prstDash val="solid"/>
+          </a:ln>
+        </p:spPr>
+      </p:sp>
+      <p:sp>
+        <p:nvSpPr>
+          <p:cNvPr id="39" name="Text 37"/>
+          <p:cNvSpPr txBox="1"/>
+          <p:nvPr/>
+        </p:nvSpPr>
+        <p:spPr>
+          <a:xfrm>
+            <a:off x="6362700" y="5486400"/>
+            <a:ext cx="1047750" cy="260033"/>
+          </a:xfrm>
+          <a:prstGeom prst="rect">
+            <a:avLst/>
+          </a:prstGeom>
+          <a:noFill/>
+          <a:ln/>
+        </p:spPr>
+        <p:txBody>
+          <a:bodyPr wrap="square" lIns="0" tIns="0" rIns="0" bIns="0" rtlCol="0" anchor="t"/>
+          <a:lstStyle/>
+          <a:p>
+            <a:pPr algn="l" indent="0" marL="0">
+              <a:lnSpc>
+                <a:spcPts val="2048"/>
+              </a:lnSpc>
+              <a:buNone/>
+            </a:pPr>
+            <a:r>
+              <a:rPr lang="en-US" sz="1950" b="1" dirty="0">
+                <a:solidFill>
+                  <a:srgbClr val="FF4D63"/>
+                </a:solidFill>
+                <a:latin typeface="Consolas" pitchFamily="34" charset="0"/>
+                <a:ea typeface="Consolas" pitchFamily="34" charset="-122"/>
+                <a:cs typeface="Consolas" pitchFamily="34" charset="-120"/>
+              </a:rPr>
+              <a:t>14</a:t>
+            </a:r>
+            <a:endParaRPr lang="en-US" sz="1950" dirty="0"/>
+          </a:p>
+        </p:txBody>
+      </p:sp>
+      <p:sp>
+        <p:nvSpPr>
+          <p:cNvPr id="40" name="Text 38"/>
+          <p:cNvSpPr txBox="1"/>
+          <p:nvPr/>
+        </p:nvSpPr>
+        <p:spPr>
+          <a:xfrm>
+            <a:off x="6686550" y="5562600"/>
+            <a:ext cx="571500" cy="148590"/>
+          </a:xfrm>
+          <a:prstGeom prst="rect">
+            <a:avLst/>
+          </a:prstGeom>
+          <a:noFill/>
+          <a:ln/>
+        </p:spPr>
+        <p:txBody>
+          <a:bodyPr wrap="square" lIns="0" tIns="0" rIns="0" bIns="0" rtlCol="0" anchor="t"/>
+          <a:lstStyle/>
+          <a:p>
+            <a:pPr algn="l" indent="0" marL="0">
+              <a:lnSpc>
+                <a:spcPts val="1170"/>
+              </a:lnSpc>
+              <a:buNone/>
+            </a:pPr>
+            <a:r>
+              <a:rPr lang="en-US" sz="975" dirty="0">
+                <a:solidFill>
+                  <a:srgbClr val="93A6BA"/>
+                </a:solidFill>
+                <a:latin typeface="Malgun Gothic" pitchFamily="34" charset="0"/>
+                <a:ea typeface="Malgun Gothic" pitchFamily="34" charset="-122"/>
+                <a:cs typeface="Malgun Gothic" pitchFamily="34" charset="-120"/>
+              </a:rPr>
+              <a:t>회차</a:t>
+            </a:r>
+            <a:endParaRPr lang="en-US" sz="975" dirty="0"/>
+          </a:p>
+        </p:txBody>
+      </p:sp>
+      <p:sp>
+        <p:nvSpPr>
+          <p:cNvPr id="41" name="Text 39"/>
+          <p:cNvSpPr txBox="1"/>
+          <p:nvPr/>
+        </p:nvSpPr>
+        <p:spPr>
+          <a:xfrm>
+            <a:off x="7639050" y="5467350"/>
+            <a:ext cx="3714750" cy="328613"/>
+          </a:xfrm>
+          <a:prstGeom prst="rect">
+            <a:avLst/>
+          </a:prstGeom>
+          <a:noFill/>
+          <a:ln/>
+        </p:spPr>
+        <p:txBody>
+          <a:bodyPr wrap="square" lIns="0" tIns="0" rIns="0" bIns="0" rtlCol="0" anchor="t"/>
+          <a:lstStyle/>
+          <a:p>
+            <a:pPr algn="l" indent="0" marL="0">
+              <a:lnSpc>
+                <a:spcPts val="1294"/>
+              </a:lnSpc>
+              <a:buNone/>
+            </a:pPr>
+            <a:r>
+              <a:rPr lang="en-US" sz="863" dirty="0">
+                <a:solidFill>
+                  <a:srgbClr val="63798F"/>
+                </a:solidFill>
+                <a:latin typeface="Consolas" pitchFamily="34" charset="0"/>
+                <a:ea typeface="Consolas" pitchFamily="34" charset="-122"/>
+                <a:cs typeface="Consolas" pitchFamily="34" charset="-120"/>
+              </a:rPr>
+              <a:t>종전 방식의 기준 미달 회차</a:t>
+            </a:r>
+            <a:endParaRPr lang="en-US" sz="863" dirty="0"/>
+          </a:p>
+          <a:p>
+            <a:pPr algn="l" indent="0" marL="0">
+              <a:lnSpc>
+                <a:spcPts val="1294"/>
+              </a:lnSpc>
+              <a:buNone/>
+            </a:pPr>
+            <a:r>
+              <a:rPr lang="en-US" sz="863" dirty="0">
+                <a:solidFill>
+                  <a:srgbClr val="63798F"/>
+                </a:solidFill>
+                <a:latin typeface="Consolas" pitchFamily="34" charset="0"/>
+                <a:ea typeface="Consolas" pitchFamily="34" charset="-122"/>
+                <a:cs typeface="Consolas" pitchFamily="34" charset="-120"/>
+              </a:rPr>
+              <a:t>누적 36회차 가운데</a:t>
+            </a:r>
+            <a:endParaRPr lang="en-US" sz="863" dirty="0"/>
+          </a:p>
+        </p:txBody>
+      </p:sp>
+      <p:sp>
+        <p:nvSpPr>
+          <p:cNvPr id="42" name="Shape 40"/>
+          <p:cNvSpPr/>
+          <p:nvPr/>
+        </p:nvSpPr>
+        <p:spPr>
+          <a:xfrm>
+            <a:off x="685800" y="6057900"/>
+            <a:ext cx="10820400" cy="0"/>
+          </a:xfrm>
+          <a:prstGeom prst="line">
+            <a:avLst/>
+          </a:prstGeom>
+          <a:noFill/>
+          <a:ln w="12700">
+            <a:solidFill>
+              <a:srgbClr val="22354A"/>
+            </a:solidFill>
+            <a:prstDash val="solid"/>
+          </a:ln>
+        </p:spPr>
+      </p:sp>
+      <p:sp>
+        <p:nvSpPr>
+          <p:cNvPr id="43" name="Text 41"/>
+          <p:cNvSpPr txBox="1"/>
+          <p:nvPr/>
+        </p:nvSpPr>
+        <p:spPr>
+          <a:xfrm>
+            <a:off x="685800" y="6267450"/>
+            <a:ext cx="476250" cy="120015"/>
+          </a:xfrm>
+          <a:prstGeom prst="rect">
+            <a:avLst/>
+          </a:prstGeom>
+          <a:noFill/>
+          <a:ln/>
+        </p:spPr>
+        <p:txBody>
+          <a:bodyPr wrap="square" lIns="0" tIns="0" rIns="0" bIns="0" rtlCol="0" anchor="t"/>
+          <a:lstStyle/>
+          <a:p>
+            <a:pPr algn="l" indent="0" marL="0">
+              <a:lnSpc>
+                <a:spcPts val="945"/>
+              </a:lnSpc>
+              <a:buNone/>
+            </a:pPr>
+            <a:r>
+              <a:rPr lang="en-US" sz="788" b="1" spc="180" kern="0" dirty="0">
+                <a:solidFill>
+                  <a:srgbClr val="EFB13C"/>
+                </a:solidFill>
+                <a:latin typeface="Consolas" pitchFamily="34" charset="0"/>
+                <a:ea typeface="Consolas" pitchFamily="34" charset="-122"/>
+                <a:cs typeface="Consolas" pitchFamily="34" charset="-120"/>
+              </a:rPr>
+              <a:t>결론</a:t>
+            </a:r>
+            <a:endParaRPr lang="en-US" sz="788" dirty="0"/>
+          </a:p>
+        </p:txBody>
+      </p:sp>
+      <p:sp>
+        <p:nvSpPr>
+          <p:cNvPr id="44" name="Text 42"/>
+          <p:cNvSpPr txBox="1"/>
+          <p:nvPr/>
+        </p:nvSpPr>
+        <p:spPr>
+          <a:xfrm>
+            <a:off x="1219200" y="6229350"/>
+            <a:ext cx="10287000" cy="220027"/>
+          </a:xfrm>
+          <a:prstGeom prst="rect">
+            <a:avLst/>
+          </a:prstGeom>
+          <a:noFill/>
+          <a:ln/>
+        </p:spPr>
+        <p:txBody>
+          <a:bodyPr wrap="square" lIns="0" tIns="0" rIns="0" bIns="0" rtlCol="0" anchor="t"/>
+          <a:lstStyle/>
+          <a:p>
+            <a:pPr algn="l" indent="0" marL="0">
+              <a:lnSpc>
+                <a:spcPts val="1733"/>
+              </a:lnSpc>
+              <a:buNone/>
+            </a:pPr>
+            <a:r>
+              <a:rPr lang="en-US" sz="1238" dirty="0">
+                <a:solidFill>
+                  <a:srgbClr val="BCC9D6"/>
+                </a:solidFill>
+                <a:latin typeface="Malgun Gothic" pitchFamily="34" charset="0"/>
+                <a:ea typeface="Malgun Gothic" pitchFamily="34" charset="-122"/>
+                <a:cs typeface="Malgun Gothic" pitchFamily="34" charset="-120"/>
+              </a:rPr>
+              <a:t>어느 쪽으로 틀려도 손실입니다 — 그래서 </a:t>
+            </a:r>
+            <a:pPr algn="l" indent="0" marL="0">
+              <a:lnSpc>
+                <a:spcPts val="1733"/>
+              </a:lnSpc>
+              <a:buNone/>
+            </a:pPr>
+            <a:r>
+              <a:rPr lang="en-US" sz="1238" b="1" dirty="0">
+                <a:solidFill>
+                  <a:srgbClr val="EFB13C"/>
+                </a:solidFill>
+                <a:latin typeface="Malgun Gothic" pitchFamily="34" charset="0"/>
+                <a:ea typeface="Malgun Gothic" pitchFamily="34" charset="-122"/>
+                <a:cs typeface="Malgun Gothic" pitchFamily="34" charset="-120"/>
+              </a:rPr>
+              <a:t>정확도가 곧 수익</a:t>
+            </a:r>
+            <a:pPr algn="l" indent="0" marL="0">
+              <a:lnSpc>
+                <a:spcPts val="1733"/>
+              </a:lnSpc>
+              <a:buNone/>
+            </a:pPr>
+            <a:r>
+              <a:rPr lang="en-US" sz="1238" dirty="0">
+                <a:solidFill>
+                  <a:srgbClr val="BCC9D6"/>
+                </a:solidFill>
+                <a:latin typeface="Malgun Gothic" pitchFamily="34" charset="0"/>
+                <a:ea typeface="Malgun Gothic" pitchFamily="34" charset="-122"/>
+                <a:cs typeface="Malgun Gothic" pitchFamily="34" charset="-120"/>
+              </a:rPr>
+              <a:t>입니다.</a:t>
+            </a:r>
+            <a:endParaRPr lang="en-US" sz="1238" dirty="0"/>
+          </a:p>
+        </p:txBody>
       </p:sp>
     </p:spTree>
   </p:cSld>
@@ -10125,26 +11449,26 @@
         <p:spPr>
           <a:xfrm>
             <a:off x="685800" y="914400"/>
-            <a:ext cx="10287000" cy="360045"/>
-          </a:xfrm>
-          <a:prstGeom prst="rect">
-            <a:avLst/>
-          </a:prstGeom>
-          <a:noFill/>
-          <a:ln/>
-        </p:spPr>
-        <p:txBody>
-          <a:bodyPr wrap="square" lIns="0" tIns="0" rIns="0" bIns="0" rtlCol="0" anchor="t"/>
-          <a:lstStyle/>
-          <a:p>
-            <a:pPr algn="l" indent="0" marL="0">
-              <a:lnSpc>
-                <a:spcPts val="2835"/>
-              </a:lnSpc>
-              <a:buNone/>
-            </a:pPr>
-            <a:r>
-              <a:rPr lang="en-US" sz="2250" b="1" dirty="0">
+            <a:ext cx="10287000" cy="888111"/>
+          </a:xfrm>
+          <a:prstGeom prst="rect">
+            <a:avLst/>
+          </a:prstGeom>
+          <a:noFill/>
+          <a:ln/>
+        </p:spPr>
+        <p:txBody>
+          <a:bodyPr wrap="square" lIns="0" tIns="0" rIns="0" bIns="0" rtlCol="0" anchor="t"/>
+          <a:lstStyle/>
+          <a:p>
+            <a:pPr algn="l" indent="0" marL="0">
+              <a:lnSpc>
+                <a:spcPts val="3496"/>
+              </a:lnSpc>
+              <a:buNone/>
+            </a:pPr>
+            <a:r>
+              <a:rPr lang="en-US" sz="2775" b="1" dirty="0">
                 <a:solidFill>
                   <a:srgbClr val="EAE7E0"/>
                 </a:solidFill>
@@ -10152,78 +11476,144 @@
                 <a:ea typeface="Malgun Gothic" pitchFamily="34" charset="-122"/>
                 <a:cs typeface="Malgun Gothic" pitchFamily="34" charset="-120"/>
               </a:rPr>
-              <a:t>지금까지는 하나의 숫자로 맞춰 왔습니다</a:t>
-            </a:r>
-            <a:endParaRPr lang="en-US" sz="2250" dirty="0"/>
-          </a:p>
-        </p:txBody>
-      </p:sp>
-      <p:sp>
-        <p:nvSpPr>
-          <p:cNvPr id="12" name="Shape 10"/>
-          <p:cNvSpPr/>
-          <p:nvPr/>
-        </p:nvSpPr>
-        <p:spPr>
-          <a:xfrm>
-            <a:off x="685800" y="2857500"/>
-            <a:ext cx="10820400" cy="2095500"/>
-          </a:xfrm>
-          <a:prstGeom prst="rect">
-            <a:avLst/>
-          </a:prstGeom>
-          <a:solidFill>
-            <a:srgbClr val="0A1320"/>
-          </a:solidFill>
-          <a:ln w="19050">
-            <a:solidFill>
-              <a:srgbClr val="22354A"/>
-            </a:solidFill>
-            <a:prstDash val="dash"/>
-          </a:ln>
-        </p:spPr>
-      </p:sp>
-      <p:sp>
-        <p:nvSpPr>
-          <p:cNvPr id="13" name="Text 11"/>
-          <p:cNvSpPr txBox="1"/>
-          <p:nvPr/>
-        </p:nvSpPr>
-        <p:spPr>
-          <a:xfrm>
-            <a:off x="685800" y="3695700"/>
-            <a:ext cx="10820400" cy="226695"/>
-          </a:xfrm>
-          <a:prstGeom prst="rect">
-            <a:avLst/>
-          </a:prstGeom>
-          <a:noFill/>
-          <a:ln/>
-        </p:spPr>
-        <p:txBody>
-          <a:bodyPr wrap="square" lIns="0" tIns="0" rIns="0" bIns="0" rtlCol="0" anchor="t"/>
-          <a:lstStyle/>
-          <a:p>
-            <a:pPr algn="ctr" indent="0" marL="0">
-              <a:lnSpc>
-                <a:spcPts val="1785"/>
-              </a:lnSpc>
-              <a:buNone/>
-            </a:pPr>
-            <a:r>
-              <a:rPr lang="en-US" sz="1275" dirty="0">
-                <a:solidFill>
-                  <a:srgbClr val="63798F"/>
+              <a:t>이론값과 실적의 차이를,</a:t>
+            </a:r>
+            <a:endParaRPr lang="en-US" sz="2775" dirty="0"/>
+          </a:p>
+          <a:p>
+            <a:pPr algn="l" indent="0" marL="0">
+              <a:lnSpc>
+                <a:spcPts val="3496"/>
+              </a:lnSpc>
+              <a:buNone/>
+            </a:pPr>
+            <a:r>
+              <a:rPr lang="en-US" sz="2775" b="1" dirty="0">
+                <a:solidFill>
+                  <a:srgbClr val="EFB13C"/>
                 </a:solidFill>
                 <a:latin typeface="Malgun Gothic" pitchFamily="34" charset="0"/>
                 <a:ea typeface="Malgun Gothic" pitchFamily="34" charset="-122"/>
                 <a:cs typeface="Malgun Gothic" pitchFamily="34" charset="-120"/>
               </a:rPr>
-              <a:t>작성 예정 — 이 장은 아직 만들지 않았습니다.</a:t>
-            </a:r>
-            <a:endParaRPr lang="en-US" sz="1275" dirty="0"/>
-          </a:p>
-        </p:txBody>
+              <a:t>정수 하나</a:t>
+            </a:r>
+            <a:pPr algn="l" indent="0" marL="0">
+              <a:lnSpc>
+                <a:spcPts val="3496"/>
+              </a:lnSpc>
+              <a:buNone/>
+            </a:pPr>
+            <a:r>
+              <a:rPr lang="en-US" sz="2775" b="1" dirty="0">
+                <a:solidFill>
+                  <a:srgbClr val="EAE7E0"/>
+                </a:solidFill>
+                <a:latin typeface="Malgun Gothic" pitchFamily="34" charset="0"/>
+                <a:ea typeface="Malgun Gothic" pitchFamily="34" charset="-122"/>
+                <a:cs typeface="Malgun Gothic" pitchFamily="34" charset="-120"/>
+              </a:rPr>
+              <a:t>로 메워 왔습니다</a:t>
+            </a:r>
+            <a:endParaRPr lang="en-US" sz="2775" dirty="0"/>
+          </a:p>
+        </p:txBody>
+      </p:sp>
+      <p:sp>
+        <p:nvSpPr>
+          <p:cNvPr id="12" name="Text 10"/>
+          <p:cNvSpPr txBox="1"/>
+          <p:nvPr/>
+        </p:nvSpPr>
+        <p:spPr>
+          <a:xfrm>
+            <a:off x="685800" y="2000250"/>
+            <a:ext cx="10287000" cy="569214"/>
+          </a:xfrm>
+          <a:prstGeom prst="rect">
+            <a:avLst/>
+          </a:prstGeom>
+          <a:noFill/>
+          <a:ln/>
+        </p:spPr>
+        <p:txBody>
+          <a:bodyPr wrap="square" lIns="0" tIns="0" rIns="0" bIns="0" rtlCol="0" anchor="t"/>
+          <a:lstStyle/>
+          <a:p>
+            <a:pPr algn="l" indent="0" marL="0">
+              <a:lnSpc>
+                <a:spcPts val="2241"/>
+              </a:lnSpc>
+              <a:buNone/>
+            </a:pPr>
+            <a:r>
+              <a:rPr lang="en-US" sz="1350" dirty="0">
+                <a:solidFill>
+                  <a:srgbClr val="BCC9D6"/>
+                </a:solidFill>
+                <a:latin typeface="Malgun Gothic" pitchFamily="34" charset="0"/>
+                <a:ea typeface="Malgun Gothic" pitchFamily="34" charset="-122"/>
+                <a:cs typeface="Malgun Gothic" pitchFamily="34" charset="-120"/>
+              </a:rPr>
+              <a:t>이론 계산값과 실제 발전량의 차이를 담당자가 판단해 정수 하나로 정하고, </a:t>
+            </a:r>
+            <a:pPr algn="l" indent="0" marL="0">
+              <a:lnSpc>
+                <a:spcPts val="2241"/>
+              </a:lnSpc>
+              <a:buNone/>
+            </a:pPr>
+            <a:r>
+              <a:rPr lang="en-US" sz="1350" b="1" dirty="0">
+                <a:solidFill>
+                  <a:srgbClr val="EAE7E0"/>
+                </a:solidFill>
+                <a:latin typeface="Malgun Gothic" pitchFamily="34" charset="0"/>
+                <a:ea typeface="Malgun Gothic" pitchFamily="34" charset="-122"/>
+                <a:cs typeface="Malgun Gothic" pitchFamily="34" charset="-120"/>
+              </a:rPr>
+              <a:t>온도와 무관하게</a:t>
+            </a:r>
+            <a:pPr algn="l" indent="0" marL="0">
+              <a:lnSpc>
+                <a:spcPts val="2241"/>
+              </a:lnSpc>
+              <a:buNone/>
+            </a:pPr>
+            <a:r>
+              <a:rPr lang="en-US" sz="1350" dirty="0">
+                <a:solidFill>
+                  <a:srgbClr val="BCC9D6"/>
+                </a:solidFill>
+                <a:latin typeface="Malgun Gothic" pitchFamily="34" charset="0"/>
+                <a:ea typeface="Malgun Gothic" pitchFamily="34" charset="-122"/>
+                <a:cs typeface="Malgun Gothic" pitchFamily="34" charset="-120"/>
+              </a:rPr>
+              <a:t> 그 값을 그대로 적용해 왔습니다.</a:t>
+            </a:r>
+            <a:endParaRPr lang="en-US" sz="1350" dirty="0"/>
+          </a:p>
+        </p:txBody>
+      </p:sp>
+      <p:sp>
+        <p:nvSpPr>
+          <p:cNvPr id="13" name="Shape 11"/>
+          <p:cNvSpPr/>
+          <p:nvPr/>
+        </p:nvSpPr>
+        <p:spPr>
+          <a:xfrm>
+            <a:off x="685800" y="2743200"/>
+            <a:ext cx="4000500" cy="19050"/>
+          </a:xfrm>
+          <a:prstGeom prst="rect">
+            <a:avLst/>
+          </a:prstGeom>
+          <a:solidFill>
+            <a:srgbClr val="22354A"/>
+          </a:solidFill>
+          <a:ln/>
+        </p:spPr>
       </p:sp>
       <p:sp>
         <p:nvSpPr>
@@ -10233,8 +11623,8 @@
         </p:nvSpPr>
         <p:spPr>
           <a:xfrm>
-            <a:off x="685800" y="4038600"/>
-            <a:ext cx="10820400" cy="125016"/>
+            <a:off x="685800" y="2876550"/>
+            <a:ext cx="4000500" cy="125016"/>
           </a:xfrm>
           <a:prstGeom prst="rect">
             <a:avLst/>
@@ -10255,13 +11645,13 @@
             <a:r>
               <a:rPr lang="en-US" sz="788" b="1" spc="150" kern="0" dirty="0">
                 <a:solidFill>
-                  <a:srgbClr val="7E2333"/>
+                  <a:srgbClr val="63798F"/>
                 </a:solidFill>
                 <a:latin typeface="Consolas" pitchFamily="34" charset="0"/>
                 <a:ea typeface="Consolas" pitchFamily="34" charset="-122"/>
                 <a:cs typeface="Consolas" pitchFamily="34" charset="-120"/>
               </a:rPr>
-              <a:t>SLIDE 04  ·  TODO</a:t>
+              <a:t>종전 절차  ·  엑셀 3개</a:t>
             </a:r>
             <a:endParaRPr lang="en-US" sz="788" dirty="0"/>
           </a:p>
@@ -10275,13 +11665,12 @@
         </p:nvSpPr>
         <p:spPr>
           <a:xfrm>
-            <a:off x="685800" y="6057900"/>
-            <a:ext cx="10820400" cy="0"/>
-          </a:xfrm>
-          <a:prstGeom prst="line">
-            <a:avLst/>
-          </a:prstGeom>
-          <a:noFill/>
+            <a:off x="685800" y="3124200"/>
+            <a:ext cx="2381250" cy="285750"/>
+          </a:xfrm>
+          <a:prstGeom prst="rect">
+            <a:avLst/>
+          </a:prstGeom>
           <a:ln w="12700">
             <a:solidFill>
               <a:srgbClr val="22354A"/>
@@ -10289,6 +11678,2435 @@
             <a:prstDash val="solid"/>
           </a:ln>
         </p:spPr>
+      </p:sp>
+      <p:sp>
+        <p:nvSpPr>
+          <p:cNvPr id="16" name="Text 14"/>
+          <p:cNvSpPr txBox="1"/>
+          <p:nvPr/>
+        </p:nvSpPr>
+        <p:spPr>
+          <a:xfrm>
+            <a:off x="781050" y="3190875"/>
+            <a:ext cx="2190750" cy="148590"/>
+          </a:xfrm>
+          <a:prstGeom prst="rect">
+            <a:avLst/>
+          </a:prstGeom>
+          <a:noFill/>
+          <a:ln/>
+        </p:spPr>
+        <p:txBody>
+          <a:bodyPr wrap="square" lIns="0" tIns="0" rIns="0" bIns="0" rtlCol="0" anchor="t"/>
+          <a:lstStyle/>
+          <a:p>
+            <a:pPr algn="l" indent="0" marL="0">
+              <a:lnSpc>
+                <a:spcPts val="1170"/>
+              </a:lnSpc>
+              <a:buNone/>
+            </a:pPr>
+            <a:r>
+              <a:rPr lang="en-US" sz="975" dirty="0">
+                <a:solidFill>
+                  <a:srgbClr val="93A6BA"/>
+                </a:solidFill>
+                <a:latin typeface="Malgun Gothic" pitchFamily="34" charset="0"/>
+                <a:ea typeface="Malgun Gothic" pitchFamily="34" charset="-122"/>
+                <a:cs typeface="Malgun Gothic" pitchFamily="34" charset="-120"/>
+              </a:rPr>
+              <a:t>온도별 이론 출력표</a:t>
+            </a:r>
+            <a:endParaRPr lang="en-US" sz="975" dirty="0"/>
+          </a:p>
+        </p:txBody>
+      </p:sp>
+      <p:sp>
+        <p:nvSpPr>
+          <p:cNvPr id="17" name="Shape 15"/>
+          <p:cNvSpPr/>
+          <p:nvPr/>
+        </p:nvSpPr>
+        <p:spPr>
+          <a:xfrm>
+            <a:off x="685800" y="3638550"/>
+            <a:ext cx="2381250" cy="285750"/>
+          </a:xfrm>
+          <a:prstGeom prst="rect">
+            <a:avLst/>
+          </a:prstGeom>
+          <a:ln w="12700">
+            <a:solidFill>
+              <a:srgbClr val="22354A"/>
+            </a:solidFill>
+            <a:prstDash val="solid"/>
+          </a:ln>
+        </p:spPr>
+      </p:sp>
+      <p:sp>
+        <p:nvSpPr>
+          <p:cNvPr id="18" name="Text 16"/>
+          <p:cNvSpPr txBox="1"/>
+          <p:nvPr/>
+        </p:nvSpPr>
+        <p:spPr>
+          <a:xfrm>
+            <a:off x="781050" y="3705225"/>
+            <a:ext cx="2190750" cy="148590"/>
+          </a:xfrm>
+          <a:prstGeom prst="rect">
+            <a:avLst/>
+          </a:prstGeom>
+          <a:noFill/>
+          <a:ln/>
+        </p:spPr>
+        <p:txBody>
+          <a:bodyPr wrap="square" lIns="0" tIns="0" rIns="0" bIns="0" rtlCol="0" anchor="t"/>
+          <a:lstStyle/>
+          <a:p>
+            <a:pPr algn="l" indent="0" marL="0">
+              <a:lnSpc>
+                <a:spcPts val="1170"/>
+              </a:lnSpc>
+              <a:buNone/>
+            </a:pPr>
+            <a:r>
+              <a:rPr lang="en-US" sz="975" dirty="0">
+                <a:solidFill>
+                  <a:srgbClr val="93A6BA"/>
+                </a:solidFill>
+                <a:latin typeface="Malgun Gothic" pitchFamily="34" charset="0"/>
+                <a:ea typeface="Malgun Gothic" pitchFamily="34" charset="-122"/>
+                <a:cs typeface="Malgun Gothic" pitchFamily="34" charset="-120"/>
+              </a:rPr>
+              <a:t>주간 실적과 대조</a:t>
+            </a:r>
+            <a:endParaRPr lang="en-US" sz="975" dirty="0"/>
+          </a:p>
+        </p:txBody>
+      </p:sp>
+      <p:sp>
+        <p:nvSpPr>
+          <p:cNvPr id="19" name="Shape 17"/>
+          <p:cNvSpPr/>
+          <p:nvPr/>
+        </p:nvSpPr>
+        <p:spPr>
+          <a:xfrm>
+            <a:off x="685800" y="4152900"/>
+            <a:ext cx="2381250" cy="285750"/>
+          </a:xfrm>
+          <a:prstGeom prst="rect">
+            <a:avLst/>
+          </a:prstGeom>
+          <a:ln w="12700">
+            <a:solidFill>
+              <a:srgbClr val="22354A"/>
+            </a:solidFill>
+            <a:prstDash val="solid"/>
+          </a:ln>
+        </p:spPr>
+      </p:sp>
+      <p:sp>
+        <p:nvSpPr>
+          <p:cNvPr id="20" name="Text 18"/>
+          <p:cNvSpPr txBox="1"/>
+          <p:nvPr/>
+        </p:nvSpPr>
+        <p:spPr>
+          <a:xfrm>
+            <a:off x="781050" y="4219575"/>
+            <a:ext cx="2190750" cy="148590"/>
+          </a:xfrm>
+          <a:prstGeom prst="rect">
+            <a:avLst/>
+          </a:prstGeom>
+          <a:noFill/>
+          <a:ln/>
+        </p:spPr>
+        <p:txBody>
+          <a:bodyPr wrap="square" lIns="0" tIns="0" rIns="0" bIns="0" rtlCol="0" anchor="t"/>
+          <a:lstStyle/>
+          <a:p>
+            <a:pPr algn="l" indent="0" marL="0">
+              <a:lnSpc>
+                <a:spcPts val="1170"/>
+              </a:lnSpc>
+              <a:buNone/>
+            </a:pPr>
+            <a:r>
+              <a:rPr lang="en-US" sz="975" dirty="0">
+                <a:solidFill>
+                  <a:srgbClr val="93A6BA"/>
+                </a:solidFill>
+                <a:latin typeface="Malgun Gothic" pitchFamily="34" charset="0"/>
+                <a:ea typeface="Malgun Gothic" pitchFamily="34" charset="-122"/>
+                <a:cs typeface="Malgun Gothic" pitchFamily="34" charset="-120"/>
+              </a:rPr>
+              <a:t>신고서 작성·제출</a:t>
+            </a:r>
+            <a:endParaRPr lang="en-US" sz="975" dirty="0"/>
+          </a:p>
+        </p:txBody>
+      </p:sp>
+      <p:sp>
+        <p:nvSpPr>
+          <p:cNvPr id="21" name="Text 19"/>
+          <p:cNvSpPr txBox="1"/>
+          <p:nvPr/>
+        </p:nvSpPr>
+        <p:spPr>
+          <a:xfrm>
+            <a:off x="819150" y="3448050"/>
+            <a:ext cx="190500" cy="160020"/>
+          </a:xfrm>
+          <a:prstGeom prst="rect">
+            <a:avLst/>
+          </a:prstGeom>
+          <a:noFill/>
+          <a:ln/>
+        </p:spPr>
+        <p:txBody>
+          <a:bodyPr wrap="square" lIns="0" tIns="0" rIns="0" bIns="0" rtlCol="0" anchor="t"/>
+          <a:lstStyle/>
+          <a:p>
+            <a:pPr algn="l" indent="0" marL="0">
+              <a:lnSpc>
+                <a:spcPts val="1260"/>
+              </a:lnSpc>
+              <a:buNone/>
+            </a:pPr>
+            <a:r>
+              <a:rPr lang="en-US" sz="1050" dirty="0">
+                <a:solidFill>
+                  <a:srgbClr val="63798F"/>
+                </a:solidFill>
+                <a:latin typeface="Malgun Gothic" pitchFamily="34" charset="0"/>
+                <a:ea typeface="Malgun Gothic" pitchFamily="34" charset="-122"/>
+                <a:cs typeface="Malgun Gothic" pitchFamily="34" charset="-120"/>
+              </a:rPr>
+              <a:t>↓</a:t>
+            </a:r>
+            <a:endParaRPr lang="en-US" sz="1050" dirty="0"/>
+          </a:p>
+        </p:txBody>
+      </p:sp>
+      <p:sp>
+        <p:nvSpPr>
+          <p:cNvPr id="22" name="Text 20"/>
+          <p:cNvSpPr txBox="1"/>
+          <p:nvPr/>
+        </p:nvSpPr>
+        <p:spPr>
+          <a:xfrm>
+            <a:off x="819150" y="3962400"/>
+            <a:ext cx="190500" cy="160020"/>
+          </a:xfrm>
+          <a:prstGeom prst="rect">
+            <a:avLst/>
+          </a:prstGeom>
+          <a:noFill/>
+          <a:ln/>
+        </p:spPr>
+        <p:txBody>
+          <a:bodyPr wrap="square" lIns="0" tIns="0" rIns="0" bIns="0" rtlCol="0" anchor="t"/>
+          <a:lstStyle/>
+          <a:p>
+            <a:pPr algn="l" indent="0" marL="0">
+              <a:lnSpc>
+                <a:spcPts val="1260"/>
+              </a:lnSpc>
+              <a:buNone/>
+            </a:pPr>
+            <a:r>
+              <a:rPr lang="en-US" sz="1050" dirty="0">
+                <a:solidFill>
+                  <a:srgbClr val="63798F"/>
+                </a:solidFill>
+                <a:latin typeface="Malgun Gothic" pitchFamily="34" charset="0"/>
+                <a:ea typeface="Malgun Gothic" pitchFamily="34" charset="-122"/>
+                <a:cs typeface="Malgun Gothic" pitchFamily="34" charset="-120"/>
+              </a:rPr>
+              <a:t>↓</a:t>
+            </a:r>
+            <a:endParaRPr lang="en-US" sz="1050" dirty="0"/>
+          </a:p>
+        </p:txBody>
+      </p:sp>
+      <p:sp>
+        <p:nvSpPr>
+          <p:cNvPr id="23" name="Text 21"/>
+          <p:cNvSpPr txBox="1"/>
+          <p:nvPr/>
+        </p:nvSpPr>
+        <p:spPr>
+          <a:xfrm>
+            <a:off x="685800" y="4629150"/>
+            <a:ext cx="4000500" cy="720090"/>
+          </a:xfrm>
+          <a:prstGeom prst="rect">
+            <a:avLst/>
+          </a:prstGeom>
+          <a:noFill/>
+          <a:ln/>
+        </p:spPr>
+        <p:txBody>
+          <a:bodyPr wrap="square" lIns="0" tIns="0" rIns="0" bIns="0" rtlCol="0" anchor="t"/>
+          <a:lstStyle/>
+          <a:p>
+            <a:pPr algn="l" indent="0" marL="0">
+              <a:lnSpc>
+                <a:spcPts val="1890"/>
+              </a:lnSpc>
+              <a:buNone/>
+            </a:pPr>
+            <a:r>
+              <a:rPr lang="en-US" sz="1125" dirty="0">
+                <a:solidFill>
+                  <a:srgbClr val="BCC9D6"/>
+                </a:solidFill>
+                <a:latin typeface="Malgun Gothic" pitchFamily="34" charset="0"/>
+                <a:ea typeface="Malgun Gothic" pitchFamily="34" charset="-122"/>
+                <a:cs typeface="Malgun Gothic" pitchFamily="34" charset="-120"/>
+              </a:rPr>
+              <a:t>가운데 </a:t>
+            </a:r>
+            <a:pPr algn="l" indent="0" marL="0">
+              <a:lnSpc>
+                <a:spcPts val="1890"/>
+              </a:lnSpc>
+              <a:buNone/>
+            </a:pPr>
+            <a:r>
+              <a:rPr lang="en-US" sz="1125" b="1" dirty="0">
+                <a:solidFill>
+                  <a:srgbClr val="EAE7E0"/>
+                </a:solidFill>
+                <a:latin typeface="Malgun Gothic" pitchFamily="34" charset="0"/>
+                <a:ea typeface="Malgun Gothic" pitchFamily="34" charset="-122"/>
+                <a:cs typeface="Malgun Gothic" pitchFamily="34" charset="-120"/>
+              </a:rPr>
+              <a:t>대조</a:t>
+            </a:r>
+            <a:pPr algn="l" indent="0" marL="0">
+              <a:lnSpc>
+                <a:spcPts val="1890"/>
+              </a:lnSpc>
+              <a:buNone/>
+            </a:pPr>
+            <a:r>
+              <a:rPr lang="en-US" sz="1125" dirty="0">
+                <a:solidFill>
+                  <a:srgbClr val="BCC9D6"/>
+                </a:solidFill>
+                <a:latin typeface="Malgun Gothic" pitchFamily="34" charset="0"/>
+                <a:ea typeface="Malgun Gothic" pitchFamily="34" charset="-122"/>
+                <a:cs typeface="Malgun Gothic" pitchFamily="34" charset="-120"/>
+              </a:rPr>
+              <a:t> 단계에서 보정값이 정해집니다. 계산이 아니라 담당자의 판단이었고, 근거는 문서로 남지 않았습니다.</a:t>
+            </a:r>
+            <a:endParaRPr lang="en-US" sz="1125" dirty="0"/>
+          </a:p>
+        </p:txBody>
+      </p:sp>
+      <p:sp>
+        <p:nvSpPr>
+          <p:cNvPr id="24" name="Shape 22"/>
+          <p:cNvSpPr/>
+          <p:nvPr/>
+        </p:nvSpPr>
+        <p:spPr>
+          <a:xfrm>
+            <a:off x="4914900" y="2743200"/>
+            <a:ext cx="6591300" cy="19050"/>
+          </a:xfrm>
+          <a:prstGeom prst="rect">
+            <a:avLst/>
+          </a:prstGeom>
+          <a:solidFill>
+            <a:srgbClr val="22354A"/>
+          </a:solidFill>
+          <a:ln/>
+        </p:spPr>
+      </p:sp>
+      <p:sp>
+        <p:nvSpPr>
+          <p:cNvPr id="25" name="Text 23"/>
+          <p:cNvSpPr txBox="1"/>
+          <p:nvPr/>
+        </p:nvSpPr>
+        <p:spPr>
+          <a:xfrm>
+            <a:off x="4914900" y="2876550"/>
+            <a:ext cx="6591300" cy="125016"/>
+          </a:xfrm>
+          <a:prstGeom prst="rect">
+            <a:avLst/>
+          </a:prstGeom>
+          <a:noFill/>
+          <a:ln/>
+        </p:spPr>
+        <p:txBody>
+          <a:bodyPr wrap="square" lIns="0" tIns="0" rIns="0" bIns="0" rtlCol="0" anchor="t"/>
+          <a:lstStyle/>
+          <a:p>
+            <a:pPr algn="l" indent="0" marL="0">
+              <a:lnSpc>
+                <a:spcPts val="984"/>
+              </a:lnSpc>
+              <a:buNone/>
+            </a:pPr>
+            <a:r>
+              <a:rPr lang="en-US" sz="788" b="1" spc="150" kern="0" dirty="0">
+                <a:solidFill>
+                  <a:srgbClr val="63798F"/>
+                </a:solidFill>
+                <a:latin typeface="Consolas" pitchFamily="34" charset="0"/>
+                <a:ea typeface="Consolas" pitchFamily="34" charset="-122"/>
+                <a:cs typeface="Consolas" pitchFamily="34" charset="-120"/>
+              </a:rPr>
+              <a:t>담당자가 적용한 보정값  ·  2025 상반기 16회차  ·  단위 MW</a:t>
+            </a:r>
+            <a:endParaRPr lang="en-US" sz="788" dirty="0"/>
+          </a:p>
+        </p:txBody>
+      </p:sp>
+      <p:sp>
+        <p:nvSpPr>
+          <p:cNvPr id="26" name="Shape 24"/>
+          <p:cNvSpPr/>
+          <p:nvPr/>
+        </p:nvSpPr>
+        <p:spPr>
+          <a:xfrm>
+            <a:off x="4914900" y="3048000"/>
+            <a:ext cx="6591300" cy="990600"/>
+          </a:xfrm>
+          <a:prstGeom prst="rect">
+            <a:avLst/>
+          </a:prstGeom>
+          <a:solidFill>
+            <a:srgbClr val="0A1320"/>
+          </a:solidFill>
+          <a:ln w="12700">
+            <a:solidFill>
+              <a:srgbClr val="182838"/>
+            </a:solidFill>
+            <a:prstDash val="solid"/>
+          </a:ln>
+        </p:spPr>
+      </p:sp>
+      <p:sp>
+        <p:nvSpPr>
+          <p:cNvPr id="27" name="Text 25"/>
+          <p:cNvSpPr txBox="1"/>
+          <p:nvPr/>
+        </p:nvSpPr>
+        <p:spPr>
+          <a:xfrm>
+            <a:off x="5067300" y="3181350"/>
+            <a:ext cx="392906" cy="218599"/>
+          </a:xfrm>
+          <a:prstGeom prst="rect">
+            <a:avLst/>
+          </a:prstGeom>
+          <a:noFill/>
+          <a:ln/>
+        </p:spPr>
+        <p:txBody>
+          <a:bodyPr wrap="square" lIns="0" tIns="0" rIns="0" bIns="0" rtlCol="0" anchor="t"/>
+          <a:lstStyle/>
+          <a:p>
+            <a:pPr algn="ctr" indent="0" marL="0">
+              <a:lnSpc>
+                <a:spcPts val="1721"/>
+              </a:lnSpc>
+              <a:buNone/>
+            </a:pPr>
+            <a:r>
+              <a:rPr lang="en-US" sz="1275" b="1" dirty="0">
+                <a:solidFill>
+                  <a:srgbClr val="EAE7E0"/>
+                </a:solidFill>
+                <a:latin typeface="Consolas" pitchFamily="34" charset="0"/>
+                <a:ea typeface="Consolas" pitchFamily="34" charset="-122"/>
+                <a:cs typeface="Consolas" pitchFamily="34" charset="-120"/>
+              </a:rPr>
+              <a:t>4</a:t>
+            </a:r>
+            <a:endParaRPr lang="en-US" sz="1275" dirty="0"/>
+          </a:p>
+        </p:txBody>
+      </p:sp>
+      <p:sp>
+        <p:nvSpPr>
+          <p:cNvPr id="28" name="Text 26"/>
+          <p:cNvSpPr txBox="1"/>
+          <p:nvPr/>
+        </p:nvSpPr>
+        <p:spPr>
+          <a:xfrm>
+            <a:off x="5067300" y="3543300"/>
+            <a:ext cx="392906" cy="123825"/>
+          </a:xfrm>
+          <a:prstGeom prst="rect">
+            <a:avLst/>
+          </a:prstGeom>
+          <a:noFill/>
+          <a:ln/>
+        </p:spPr>
+        <p:txBody>
+          <a:bodyPr wrap="square" lIns="0" tIns="0" rIns="0" bIns="0" rtlCol="0" anchor="t"/>
+          <a:lstStyle/>
+          <a:p>
+            <a:pPr algn="ctr" indent="0" marL="0">
+              <a:lnSpc>
+                <a:spcPts val="975"/>
+              </a:lnSpc>
+              <a:buNone/>
+            </a:pPr>
+            <a:r>
+              <a:rPr lang="en-US" sz="750" dirty="0">
+                <a:solidFill>
+                  <a:srgbClr val="63798F"/>
+                </a:solidFill>
+                <a:latin typeface="Consolas" pitchFamily="34" charset="0"/>
+                <a:ea typeface="Consolas" pitchFamily="34" charset="-122"/>
+                <a:cs typeface="Consolas" pitchFamily="34" charset="-120"/>
+              </a:rPr>
+              <a:t>12.5</a:t>
+            </a:r>
+            <a:endParaRPr lang="en-US" sz="750" dirty="0"/>
+          </a:p>
+        </p:txBody>
+      </p:sp>
+      <p:sp>
+        <p:nvSpPr>
+          <p:cNvPr id="29" name="Text 27"/>
+          <p:cNvSpPr txBox="1"/>
+          <p:nvPr/>
+        </p:nvSpPr>
+        <p:spPr>
+          <a:xfrm>
+            <a:off x="5460206" y="3181350"/>
+            <a:ext cx="392906" cy="218599"/>
+          </a:xfrm>
+          <a:prstGeom prst="rect">
+            <a:avLst/>
+          </a:prstGeom>
+          <a:noFill/>
+          <a:ln/>
+        </p:spPr>
+        <p:txBody>
+          <a:bodyPr wrap="square" lIns="0" tIns="0" rIns="0" bIns="0" rtlCol="0" anchor="t"/>
+          <a:lstStyle/>
+          <a:p>
+            <a:pPr algn="ctr" indent="0" marL="0">
+              <a:lnSpc>
+                <a:spcPts val="1721"/>
+              </a:lnSpc>
+              <a:buNone/>
+            </a:pPr>
+            <a:r>
+              <a:rPr lang="en-US" sz="1275" b="1" dirty="0">
+                <a:solidFill>
+                  <a:srgbClr val="FF4D63"/>
+                </a:solidFill>
+                <a:latin typeface="Consolas" pitchFamily="34" charset="0"/>
+                <a:ea typeface="Consolas" pitchFamily="34" charset="-122"/>
+                <a:cs typeface="Consolas" pitchFamily="34" charset="-120"/>
+              </a:rPr>
+              <a:t>5</a:t>
+            </a:r>
+            <a:endParaRPr lang="en-US" sz="1275" dirty="0"/>
+          </a:p>
+        </p:txBody>
+      </p:sp>
+      <p:sp>
+        <p:nvSpPr>
+          <p:cNvPr id="30" name="Text 28"/>
+          <p:cNvSpPr txBox="1"/>
+          <p:nvPr/>
+        </p:nvSpPr>
+        <p:spPr>
+          <a:xfrm>
+            <a:off x="5460206" y="3543300"/>
+            <a:ext cx="392906" cy="123825"/>
+          </a:xfrm>
+          <a:prstGeom prst="rect">
+            <a:avLst/>
+          </a:prstGeom>
+          <a:noFill/>
+          <a:ln/>
+        </p:spPr>
+        <p:txBody>
+          <a:bodyPr wrap="square" lIns="0" tIns="0" rIns="0" bIns="0" rtlCol="0" anchor="t"/>
+          <a:lstStyle/>
+          <a:p>
+            <a:pPr algn="ctr" indent="0" marL="0">
+              <a:lnSpc>
+                <a:spcPts val="975"/>
+              </a:lnSpc>
+              <a:buNone/>
+            </a:pPr>
+            <a:r>
+              <a:rPr lang="en-US" sz="750" dirty="0">
+                <a:solidFill>
+                  <a:srgbClr val="FF4D63"/>
+                </a:solidFill>
+                <a:latin typeface="Consolas" pitchFamily="34" charset="0"/>
+                <a:ea typeface="Consolas" pitchFamily="34" charset="-122"/>
+                <a:cs typeface="Consolas" pitchFamily="34" charset="-120"/>
+              </a:rPr>
+              <a:t>7.3</a:t>
+            </a:r>
+            <a:endParaRPr lang="en-US" sz="750" dirty="0"/>
+          </a:p>
+        </p:txBody>
+      </p:sp>
+      <p:sp>
+        <p:nvSpPr>
+          <p:cNvPr id="31" name="Text 29"/>
+          <p:cNvSpPr txBox="1"/>
+          <p:nvPr/>
+        </p:nvSpPr>
+        <p:spPr>
+          <a:xfrm>
+            <a:off x="5853113" y="3181350"/>
+            <a:ext cx="392906" cy="218599"/>
+          </a:xfrm>
+          <a:prstGeom prst="rect">
+            <a:avLst/>
+          </a:prstGeom>
+          <a:noFill/>
+          <a:ln/>
+        </p:spPr>
+        <p:txBody>
+          <a:bodyPr wrap="square" lIns="0" tIns="0" rIns="0" bIns="0" rtlCol="0" anchor="t"/>
+          <a:lstStyle/>
+          <a:p>
+            <a:pPr algn="ctr" indent="0" marL="0">
+              <a:lnSpc>
+                <a:spcPts val="1721"/>
+              </a:lnSpc>
+              <a:buNone/>
+            </a:pPr>
+            <a:r>
+              <a:rPr lang="en-US" sz="1275" b="1" dirty="0">
+                <a:solidFill>
+                  <a:srgbClr val="FF4D63"/>
+                </a:solidFill>
+                <a:latin typeface="Consolas" pitchFamily="34" charset="0"/>
+                <a:ea typeface="Consolas" pitchFamily="34" charset="-122"/>
+                <a:cs typeface="Consolas" pitchFamily="34" charset="-120"/>
+              </a:rPr>
+              <a:t>5</a:t>
+            </a:r>
+            <a:endParaRPr lang="en-US" sz="1275" dirty="0"/>
+          </a:p>
+        </p:txBody>
+      </p:sp>
+      <p:sp>
+        <p:nvSpPr>
+          <p:cNvPr id="32" name="Text 30"/>
+          <p:cNvSpPr txBox="1"/>
+          <p:nvPr/>
+        </p:nvSpPr>
+        <p:spPr>
+          <a:xfrm>
+            <a:off x="5853113" y="3543300"/>
+            <a:ext cx="392906" cy="123825"/>
+          </a:xfrm>
+          <a:prstGeom prst="rect">
+            <a:avLst/>
+          </a:prstGeom>
+          <a:noFill/>
+          <a:ln/>
+        </p:spPr>
+        <p:txBody>
+          <a:bodyPr wrap="square" lIns="0" tIns="0" rIns="0" bIns="0" rtlCol="0" anchor="t"/>
+          <a:lstStyle/>
+          <a:p>
+            <a:pPr algn="ctr" indent="0" marL="0">
+              <a:lnSpc>
+                <a:spcPts val="975"/>
+              </a:lnSpc>
+              <a:buNone/>
+            </a:pPr>
+            <a:r>
+              <a:rPr lang="en-US" sz="750" dirty="0">
+                <a:solidFill>
+                  <a:srgbClr val="FF4D63"/>
+                </a:solidFill>
+                <a:latin typeface="Consolas" pitchFamily="34" charset="0"/>
+                <a:ea typeface="Consolas" pitchFamily="34" charset="-122"/>
+                <a:cs typeface="Consolas" pitchFamily="34" charset="-120"/>
+              </a:rPr>
+              <a:t>25.7</a:t>
+            </a:r>
+            <a:endParaRPr lang="en-US" sz="750" dirty="0"/>
+          </a:p>
+        </p:txBody>
+      </p:sp>
+      <p:sp>
+        <p:nvSpPr>
+          <p:cNvPr id="33" name="Text 31"/>
+          <p:cNvSpPr txBox="1"/>
+          <p:nvPr/>
+        </p:nvSpPr>
+        <p:spPr>
+          <a:xfrm>
+            <a:off x="6246019" y="3181350"/>
+            <a:ext cx="392906" cy="218599"/>
+          </a:xfrm>
+          <a:prstGeom prst="rect">
+            <a:avLst/>
+          </a:prstGeom>
+          <a:noFill/>
+          <a:ln/>
+        </p:spPr>
+        <p:txBody>
+          <a:bodyPr wrap="square" lIns="0" tIns="0" rIns="0" bIns="0" rtlCol="0" anchor="t"/>
+          <a:lstStyle/>
+          <a:p>
+            <a:pPr algn="ctr" indent="0" marL="0">
+              <a:lnSpc>
+                <a:spcPts val="1721"/>
+              </a:lnSpc>
+              <a:buNone/>
+            </a:pPr>
+            <a:r>
+              <a:rPr lang="en-US" sz="1275" b="1" dirty="0">
+                <a:solidFill>
+                  <a:srgbClr val="EAE7E0"/>
+                </a:solidFill>
+                <a:latin typeface="Consolas" pitchFamily="34" charset="0"/>
+                <a:ea typeface="Consolas" pitchFamily="34" charset="-122"/>
+                <a:cs typeface="Consolas" pitchFamily="34" charset="-120"/>
+              </a:rPr>
+              <a:t>5</a:t>
+            </a:r>
+            <a:endParaRPr lang="en-US" sz="1275" dirty="0"/>
+          </a:p>
+        </p:txBody>
+      </p:sp>
+      <p:sp>
+        <p:nvSpPr>
+          <p:cNvPr id="34" name="Text 32"/>
+          <p:cNvSpPr txBox="1"/>
+          <p:nvPr/>
+        </p:nvSpPr>
+        <p:spPr>
+          <a:xfrm>
+            <a:off x="6246019" y="3543300"/>
+            <a:ext cx="392906" cy="123825"/>
+          </a:xfrm>
+          <a:prstGeom prst="rect">
+            <a:avLst/>
+          </a:prstGeom>
+          <a:noFill/>
+          <a:ln/>
+        </p:spPr>
+        <p:txBody>
+          <a:bodyPr wrap="square" lIns="0" tIns="0" rIns="0" bIns="0" rtlCol="0" anchor="t"/>
+          <a:lstStyle/>
+          <a:p>
+            <a:pPr algn="ctr" indent="0" marL="0">
+              <a:lnSpc>
+                <a:spcPts val="975"/>
+              </a:lnSpc>
+              <a:buNone/>
+            </a:pPr>
+            <a:r>
+              <a:rPr lang="en-US" sz="750" dirty="0">
+                <a:solidFill>
+                  <a:srgbClr val="63798F"/>
+                </a:solidFill>
+                <a:latin typeface="Consolas" pitchFamily="34" charset="0"/>
+                <a:ea typeface="Consolas" pitchFamily="34" charset="-122"/>
+                <a:cs typeface="Consolas" pitchFamily="34" charset="-120"/>
+              </a:rPr>
+              <a:t>16.0</a:t>
+            </a:r>
+            <a:endParaRPr lang="en-US" sz="750" dirty="0"/>
+          </a:p>
+        </p:txBody>
+      </p:sp>
+      <p:sp>
+        <p:nvSpPr>
+          <p:cNvPr id="35" name="Text 33"/>
+          <p:cNvSpPr txBox="1"/>
+          <p:nvPr/>
+        </p:nvSpPr>
+        <p:spPr>
+          <a:xfrm>
+            <a:off x="6638925" y="3181350"/>
+            <a:ext cx="392906" cy="218599"/>
+          </a:xfrm>
+          <a:prstGeom prst="rect">
+            <a:avLst/>
+          </a:prstGeom>
+          <a:noFill/>
+          <a:ln/>
+        </p:spPr>
+        <p:txBody>
+          <a:bodyPr wrap="square" lIns="0" tIns="0" rIns="0" bIns="0" rtlCol="0" anchor="t"/>
+          <a:lstStyle/>
+          <a:p>
+            <a:pPr algn="ctr" indent="0" marL="0">
+              <a:lnSpc>
+                <a:spcPts val="1721"/>
+              </a:lnSpc>
+              <a:buNone/>
+            </a:pPr>
+            <a:r>
+              <a:rPr lang="en-US" sz="1275" b="1" dirty="0">
+                <a:solidFill>
+                  <a:srgbClr val="EAE7E0"/>
+                </a:solidFill>
+                <a:latin typeface="Consolas" pitchFamily="34" charset="0"/>
+                <a:ea typeface="Consolas" pitchFamily="34" charset="-122"/>
+                <a:cs typeface="Consolas" pitchFamily="34" charset="-120"/>
+              </a:rPr>
+              <a:t>5</a:t>
+            </a:r>
+            <a:endParaRPr lang="en-US" sz="1275" dirty="0"/>
+          </a:p>
+        </p:txBody>
+      </p:sp>
+      <p:sp>
+        <p:nvSpPr>
+          <p:cNvPr id="36" name="Text 34"/>
+          <p:cNvSpPr txBox="1"/>
+          <p:nvPr/>
+        </p:nvSpPr>
+        <p:spPr>
+          <a:xfrm>
+            <a:off x="6638925" y="3543300"/>
+            <a:ext cx="392906" cy="123825"/>
+          </a:xfrm>
+          <a:prstGeom prst="rect">
+            <a:avLst/>
+          </a:prstGeom>
+          <a:noFill/>
+          <a:ln/>
+        </p:spPr>
+        <p:txBody>
+          <a:bodyPr wrap="square" lIns="0" tIns="0" rIns="0" bIns="0" rtlCol="0" anchor="t"/>
+          <a:lstStyle/>
+          <a:p>
+            <a:pPr algn="ctr" indent="0" marL="0">
+              <a:lnSpc>
+                <a:spcPts val="975"/>
+              </a:lnSpc>
+              <a:buNone/>
+            </a:pPr>
+            <a:r>
+              <a:rPr lang="en-US" sz="750" dirty="0">
+                <a:solidFill>
+                  <a:srgbClr val="63798F"/>
+                </a:solidFill>
+                <a:latin typeface="Consolas" pitchFamily="34" charset="0"/>
+                <a:ea typeface="Consolas" pitchFamily="34" charset="-122"/>
+                <a:cs typeface="Consolas" pitchFamily="34" charset="-120"/>
+              </a:rPr>
+              <a:t>18.8</a:t>
+            </a:r>
+            <a:endParaRPr lang="en-US" sz="750" dirty="0"/>
+          </a:p>
+        </p:txBody>
+      </p:sp>
+      <p:sp>
+        <p:nvSpPr>
+          <p:cNvPr id="37" name="Text 35"/>
+          <p:cNvSpPr txBox="1"/>
+          <p:nvPr/>
+        </p:nvSpPr>
+        <p:spPr>
+          <a:xfrm>
+            <a:off x="7031831" y="3181350"/>
+            <a:ext cx="392906" cy="218599"/>
+          </a:xfrm>
+          <a:prstGeom prst="rect">
+            <a:avLst/>
+          </a:prstGeom>
+          <a:noFill/>
+          <a:ln/>
+        </p:spPr>
+        <p:txBody>
+          <a:bodyPr wrap="square" lIns="0" tIns="0" rIns="0" bIns="0" rtlCol="0" anchor="t"/>
+          <a:lstStyle/>
+          <a:p>
+            <a:pPr algn="ctr" indent="0" marL="0">
+              <a:lnSpc>
+                <a:spcPts val="1721"/>
+              </a:lnSpc>
+              <a:buNone/>
+            </a:pPr>
+            <a:r>
+              <a:rPr lang="en-US" sz="1275" b="1" dirty="0">
+                <a:solidFill>
+                  <a:srgbClr val="EAE7E0"/>
+                </a:solidFill>
+                <a:latin typeface="Consolas" pitchFamily="34" charset="0"/>
+                <a:ea typeface="Consolas" pitchFamily="34" charset="-122"/>
+                <a:cs typeface="Consolas" pitchFamily="34" charset="-120"/>
+              </a:rPr>
+              <a:t>5</a:t>
+            </a:r>
+            <a:endParaRPr lang="en-US" sz="1275" dirty="0"/>
+          </a:p>
+        </p:txBody>
+      </p:sp>
+      <p:sp>
+        <p:nvSpPr>
+          <p:cNvPr id="38" name="Text 36"/>
+          <p:cNvSpPr txBox="1"/>
+          <p:nvPr/>
+        </p:nvSpPr>
+        <p:spPr>
+          <a:xfrm>
+            <a:off x="7031831" y="3543300"/>
+            <a:ext cx="392906" cy="123825"/>
+          </a:xfrm>
+          <a:prstGeom prst="rect">
+            <a:avLst/>
+          </a:prstGeom>
+          <a:noFill/>
+          <a:ln/>
+        </p:spPr>
+        <p:txBody>
+          <a:bodyPr wrap="square" lIns="0" tIns="0" rIns="0" bIns="0" rtlCol="0" anchor="t"/>
+          <a:lstStyle/>
+          <a:p>
+            <a:pPr algn="ctr" indent="0" marL="0">
+              <a:lnSpc>
+                <a:spcPts val="975"/>
+              </a:lnSpc>
+              <a:buNone/>
+            </a:pPr>
+            <a:r>
+              <a:rPr lang="en-US" sz="750" dirty="0">
+                <a:solidFill>
+                  <a:srgbClr val="63798F"/>
+                </a:solidFill>
+                <a:latin typeface="Consolas" pitchFamily="34" charset="0"/>
+                <a:ea typeface="Consolas" pitchFamily="34" charset="-122"/>
+                <a:cs typeface="Consolas" pitchFamily="34" charset="-120"/>
+              </a:rPr>
+              <a:t>13.7</a:t>
+            </a:r>
+            <a:endParaRPr lang="en-US" sz="750" dirty="0"/>
+          </a:p>
+        </p:txBody>
+      </p:sp>
+      <p:sp>
+        <p:nvSpPr>
+          <p:cNvPr id="39" name="Text 37"/>
+          <p:cNvSpPr txBox="1"/>
+          <p:nvPr/>
+        </p:nvSpPr>
+        <p:spPr>
+          <a:xfrm>
+            <a:off x="7424737" y="3181350"/>
+            <a:ext cx="392906" cy="218599"/>
+          </a:xfrm>
+          <a:prstGeom prst="rect">
+            <a:avLst/>
+          </a:prstGeom>
+          <a:noFill/>
+          <a:ln/>
+        </p:spPr>
+        <p:txBody>
+          <a:bodyPr wrap="square" lIns="0" tIns="0" rIns="0" bIns="0" rtlCol="0" anchor="t"/>
+          <a:lstStyle/>
+          <a:p>
+            <a:pPr algn="ctr" indent="0" marL="0">
+              <a:lnSpc>
+                <a:spcPts val="1721"/>
+              </a:lnSpc>
+              <a:buNone/>
+            </a:pPr>
+            <a:r>
+              <a:rPr lang="en-US" sz="1275" b="1" dirty="0">
+                <a:solidFill>
+                  <a:srgbClr val="EAE7E0"/>
+                </a:solidFill>
+                <a:latin typeface="Consolas" pitchFamily="34" charset="0"/>
+                <a:ea typeface="Consolas" pitchFamily="34" charset="-122"/>
+                <a:cs typeface="Consolas" pitchFamily="34" charset="-120"/>
+              </a:rPr>
+              <a:t>1</a:t>
+            </a:r>
+            <a:endParaRPr lang="en-US" sz="1275" dirty="0"/>
+          </a:p>
+        </p:txBody>
+      </p:sp>
+      <p:sp>
+        <p:nvSpPr>
+          <p:cNvPr id="40" name="Text 38"/>
+          <p:cNvSpPr txBox="1"/>
+          <p:nvPr/>
+        </p:nvSpPr>
+        <p:spPr>
+          <a:xfrm>
+            <a:off x="7424737" y="3543300"/>
+            <a:ext cx="392906" cy="123825"/>
+          </a:xfrm>
+          <a:prstGeom prst="rect">
+            <a:avLst/>
+          </a:prstGeom>
+          <a:noFill/>
+          <a:ln/>
+        </p:spPr>
+        <p:txBody>
+          <a:bodyPr wrap="square" lIns="0" tIns="0" rIns="0" bIns="0" rtlCol="0" anchor="t"/>
+          <a:lstStyle/>
+          <a:p>
+            <a:pPr algn="ctr" indent="0" marL="0">
+              <a:lnSpc>
+                <a:spcPts val="975"/>
+              </a:lnSpc>
+              <a:buNone/>
+            </a:pPr>
+            <a:r>
+              <a:rPr lang="en-US" sz="750" dirty="0">
+                <a:solidFill>
+                  <a:srgbClr val="63798F"/>
+                </a:solidFill>
+                <a:latin typeface="Consolas" pitchFamily="34" charset="0"/>
+                <a:ea typeface="Consolas" pitchFamily="34" charset="-122"/>
+                <a:cs typeface="Consolas" pitchFamily="34" charset="-120"/>
+              </a:rPr>
+              <a:t>23.5</a:t>
+            </a:r>
+            <a:endParaRPr lang="en-US" sz="750" dirty="0"/>
+          </a:p>
+        </p:txBody>
+      </p:sp>
+      <p:sp>
+        <p:nvSpPr>
+          <p:cNvPr id="41" name="Text 39"/>
+          <p:cNvSpPr txBox="1"/>
+          <p:nvPr/>
+        </p:nvSpPr>
+        <p:spPr>
+          <a:xfrm>
+            <a:off x="7817644" y="3181350"/>
+            <a:ext cx="392906" cy="218599"/>
+          </a:xfrm>
+          <a:prstGeom prst="rect">
+            <a:avLst/>
+          </a:prstGeom>
+          <a:noFill/>
+          <a:ln/>
+        </p:spPr>
+        <p:txBody>
+          <a:bodyPr wrap="square" lIns="0" tIns="0" rIns="0" bIns="0" rtlCol="0" anchor="t"/>
+          <a:lstStyle/>
+          <a:p>
+            <a:pPr algn="ctr" indent="0" marL="0">
+              <a:lnSpc>
+                <a:spcPts val="1721"/>
+              </a:lnSpc>
+              <a:buNone/>
+            </a:pPr>
+            <a:r>
+              <a:rPr lang="en-US" sz="1275" b="1" dirty="0">
+                <a:solidFill>
+                  <a:srgbClr val="EAE7E0"/>
+                </a:solidFill>
+                <a:latin typeface="Consolas" pitchFamily="34" charset="0"/>
+                <a:ea typeface="Consolas" pitchFamily="34" charset="-122"/>
+                <a:cs typeface="Consolas" pitchFamily="34" charset="-120"/>
+              </a:rPr>
+              <a:t>3</a:t>
+            </a:r>
+            <a:endParaRPr lang="en-US" sz="1275" dirty="0"/>
+          </a:p>
+        </p:txBody>
+      </p:sp>
+      <p:sp>
+        <p:nvSpPr>
+          <p:cNvPr id="42" name="Text 40"/>
+          <p:cNvSpPr txBox="1"/>
+          <p:nvPr/>
+        </p:nvSpPr>
+        <p:spPr>
+          <a:xfrm>
+            <a:off x="7817644" y="3543300"/>
+            <a:ext cx="392906" cy="123825"/>
+          </a:xfrm>
+          <a:prstGeom prst="rect">
+            <a:avLst/>
+          </a:prstGeom>
+          <a:noFill/>
+          <a:ln/>
+        </p:spPr>
+        <p:txBody>
+          <a:bodyPr wrap="square" lIns="0" tIns="0" rIns="0" bIns="0" rtlCol="0" anchor="t"/>
+          <a:lstStyle/>
+          <a:p>
+            <a:pPr algn="ctr" indent="0" marL="0">
+              <a:lnSpc>
+                <a:spcPts val="975"/>
+              </a:lnSpc>
+              <a:buNone/>
+            </a:pPr>
+            <a:r>
+              <a:rPr lang="en-US" sz="750" dirty="0">
+                <a:solidFill>
+                  <a:srgbClr val="63798F"/>
+                </a:solidFill>
+                <a:latin typeface="Consolas" pitchFamily="34" charset="0"/>
+                <a:ea typeface="Consolas" pitchFamily="34" charset="-122"/>
+                <a:cs typeface="Consolas" pitchFamily="34" charset="-120"/>
+              </a:rPr>
+              <a:t>21.4</a:t>
+            </a:r>
+            <a:endParaRPr lang="en-US" sz="750" dirty="0"/>
+          </a:p>
+        </p:txBody>
+      </p:sp>
+      <p:sp>
+        <p:nvSpPr>
+          <p:cNvPr id="43" name="Text 41"/>
+          <p:cNvSpPr txBox="1"/>
+          <p:nvPr/>
+        </p:nvSpPr>
+        <p:spPr>
+          <a:xfrm>
+            <a:off x="8210550" y="3181350"/>
+            <a:ext cx="392906" cy="218599"/>
+          </a:xfrm>
+          <a:prstGeom prst="rect">
+            <a:avLst/>
+          </a:prstGeom>
+          <a:noFill/>
+          <a:ln/>
+        </p:spPr>
+        <p:txBody>
+          <a:bodyPr wrap="square" lIns="0" tIns="0" rIns="0" bIns="0" rtlCol="0" anchor="t"/>
+          <a:lstStyle/>
+          <a:p>
+            <a:pPr algn="ctr" indent="0" marL="0">
+              <a:lnSpc>
+                <a:spcPts val="1721"/>
+              </a:lnSpc>
+              <a:buNone/>
+            </a:pPr>
+            <a:r>
+              <a:rPr lang="en-US" sz="1275" b="1" dirty="0">
+                <a:solidFill>
+                  <a:srgbClr val="EAE7E0"/>
+                </a:solidFill>
+                <a:latin typeface="Consolas" pitchFamily="34" charset="0"/>
+                <a:ea typeface="Consolas" pitchFamily="34" charset="-122"/>
+                <a:cs typeface="Consolas" pitchFamily="34" charset="-120"/>
+              </a:rPr>
+              <a:t>6</a:t>
+            </a:r>
+            <a:endParaRPr lang="en-US" sz="1275" dirty="0"/>
+          </a:p>
+        </p:txBody>
+      </p:sp>
+      <p:sp>
+        <p:nvSpPr>
+          <p:cNvPr id="44" name="Text 42"/>
+          <p:cNvSpPr txBox="1"/>
+          <p:nvPr/>
+        </p:nvSpPr>
+        <p:spPr>
+          <a:xfrm>
+            <a:off x="8210550" y="3543300"/>
+            <a:ext cx="392906" cy="123825"/>
+          </a:xfrm>
+          <a:prstGeom prst="rect">
+            <a:avLst/>
+          </a:prstGeom>
+          <a:noFill/>
+          <a:ln/>
+        </p:spPr>
+        <p:txBody>
+          <a:bodyPr wrap="square" lIns="0" tIns="0" rIns="0" bIns="0" rtlCol="0" anchor="t"/>
+          <a:lstStyle/>
+          <a:p>
+            <a:pPr algn="ctr" indent="0" marL="0">
+              <a:lnSpc>
+                <a:spcPts val="975"/>
+              </a:lnSpc>
+              <a:buNone/>
+            </a:pPr>
+            <a:r>
+              <a:rPr lang="en-US" sz="750" dirty="0">
+                <a:solidFill>
+                  <a:srgbClr val="63798F"/>
+                </a:solidFill>
+                <a:latin typeface="Consolas" pitchFamily="34" charset="0"/>
+                <a:ea typeface="Consolas" pitchFamily="34" charset="-122"/>
+                <a:cs typeface="Consolas" pitchFamily="34" charset="-120"/>
+              </a:rPr>
+              <a:t>20.0</a:t>
+            </a:r>
+            <a:endParaRPr lang="en-US" sz="750" dirty="0"/>
+          </a:p>
+        </p:txBody>
+      </p:sp>
+      <p:sp>
+        <p:nvSpPr>
+          <p:cNvPr id="45" name="Text 43"/>
+          <p:cNvSpPr txBox="1"/>
+          <p:nvPr/>
+        </p:nvSpPr>
+        <p:spPr>
+          <a:xfrm>
+            <a:off x="8603456" y="3181350"/>
+            <a:ext cx="392906" cy="218599"/>
+          </a:xfrm>
+          <a:prstGeom prst="rect">
+            <a:avLst/>
+          </a:prstGeom>
+          <a:noFill/>
+          <a:ln/>
+        </p:spPr>
+        <p:txBody>
+          <a:bodyPr wrap="square" lIns="0" tIns="0" rIns="0" bIns="0" rtlCol="0" anchor="t"/>
+          <a:lstStyle/>
+          <a:p>
+            <a:pPr algn="ctr" indent="0" marL="0">
+              <a:lnSpc>
+                <a:spcPts val="1721"/>
+              </a:lnSpc>
+              <a:buNone/>
+            </a:pPr>
+            <a:r>
+              <a:rPr lang="en-US" sz="1275" b="1" dirty="0">
+                <a:solidFill>
+                  <a:srgbClr val="EAE7E0"/>
+                </a:solidFill>
+                <a:latin typeface="Consolas" pitchFamily="34" charset="0"/>
+                <a:ea typeface="Consolas" pitchFamily="34" charset="-122"/>
+                <a:cs typeface="Consolas" pitchFamily="34" charset="-120"/>
+              </a:rPr>
+              <a:t>6</a:t>
+            </a:r>
+            <a:endParaRPr lang="en-US" sz="1275" dirty="0"/>
+          </a:p>
+        </p:txBody>
+      </p:sp>
+      <p:sp>
+        <p:nvSpPr>
+          <p:cNvPr id="46" name="Text 44"/>
+          <p:cNvSpPr txBox="1"/>
+          <p:nvPr/>
+        </p:nvSpPr>
+        <p:spPr>
+          <a:xfrm>
+            <a:off x="8603456" y="3543300"/>
+            <a:ext cx="392906" cy="123825"/>
+          </a:xfrm>
+          <a:prstGeom prst="rect">
+            <a:avLst/>
+          </a:prstGeom>
+          <a:noFill/>
+          <a:ln/>
+        </p:spPr>
+        <p:txBody>
+          <a:bodyPr wrap="square" lIns="0" tIns="0" rIns="0" bIns="0" rtlCol="0" anchor="t"/>
+          <a:lstStyle/>
+          <a:p>
+            <a:pPr algn="ctr" indent="0" marL="0">
+              <a:lnSpc>
+                <a:spcPts val="975"/>
+              </a:lnSpc>
+              <a:buNone/>
+            </a:pPr>
+            <a:r>
+              <a:rPr lang="en-US" sz="750" dirty="0">
+                <a:solidFill>
+                  <a:srgbClr val="63798F"/>
+                </a:solidFill>
+                <a:latin typeface="Consolas" pitchFamily="34" charset="0"/>
+                <a:ea typeface="Consolas" pitchFamily="34" charset="-122"/>
+                <a:cs typeface="Consolas" pitchFamily="34" charset="-120"/>
+              </a:rPr>
+              <a:t>27.4</a:t>
+            </a:r>
+            <a:endParaRPr lang="en-US" sz="750" dirty="0"/>
+          </a:p>
+        </p:txBody>
+      </p:sp>
+      <p:sp>
+        <p:nvSpPr>
+          <p:cNvPr id="47" name="Text 45"/>
+          <p:cNvSpPr txBox="1"/>
+          <p:nvPr/>
+        </p:nvSpPr>
+        <p:spPr>
+          <a:xfrm>
+            <a:off x="8996363" y="3181350"/>
+            <a:ext cx="392906" cy="218599"/>
+          </a:xfrm>
+          <a:prstGeom prst="rect">
+            <a:avLst/>
+          </a:prstGeom>
+          <a:noFill/>
+          <a:ln/>
+        </p:spPr>
+        <p:txBody>
+          <a:bodyPr wrap="square" lIns="0" tIns="0" rIns="0" bIns="0" rtlCol="0" anchor="t"/>
+          <a:lstStyle/>
+          <a:p>
+            <a:pPr algn="ctr" indent="0" marL="0">
+              <a:lnSpc>
+                <a:spcPts val="1721"/>
+              </a:lnSpc>
+              <a:buNone/>
+            </a:pPr>
+            <a:r>
+              <a:rPr lang="en-US" sz="1275" b="1" dirty="0">
+                <a:solidFill>
+                  <a:srgbClr val="EAE7E0"/>
+                </a:solidFill>
+                <a:latin typeface="Consolas" pitchFamily="34" charset="0"/>
+                <a:ea typeface="Consolas" pitchFamily="34" charset="-122"/>
+                <a:cs typeface="Consolas" pitchFamily="34" charset="-120"/>
+              </a:rPr>
+              <a:t>5</a:t>
+            </a:r>
+            <a:endParaRPr lang="en-US" sz="1275" dirty="0"/>
+          </a:p>
+        </p:txBody>
+      </p:sp>
+      <p:sp>
+        <p:nvSpPr>
+          <p:cNvPr id="48" name="Text 46"/>
+          <p:cNvSpPr txBox="1"/>
+          <p:nvPr/>
+        </p:nvSpPr>
+        <p:spPr>
+          <a:xfrm>
+            <a:off x="8996363" y="3543300"/>
+            <a:ext cx="392906" cy="123825"/>
+          </a:xfrm>
+          <a:prstGeom prst="rect">
+            <a:avLst/>
+          </a:prstGeom>
+          <a:noFill/>
+          <a:ln/>
+        </p:spPr>
+        <p:txBody>
+          <a:bodyPr wrap="square" lIns="0" tIns="0" rIns="0" bIns="0" rtlCol="0" anchor="t"/>
+          <a:lstStyle/>
+          <a:p>
+            <a:pPr algn="ctr" indent="0" marL="0">
+              <a:lnSpc>
+                <a:spcPts val="975"/>
+              </a:lnSpc>
+              <a:buNone/>
+            </a:pPr>
+            <a:r>
+              <a:rPr lang="en-US" sz="750" dirty="0">
+                <a:solidFill>
+                  <a:srgbClr val="63798F"/>
+                </a:solidFill>
+                <a:latin typeface="Consolas" pitchFamily="34" charset="0"/>
+                <a:ea typeface="Consolas" pitchFamily="34" charset="-122"/>
+                <a:cs typeface="Consolas" pitchFamily="34" charset="-120"/>
+              </a:rPr>
+              <a:t>25.5</a:t>
+            </a:r>
+            <a:endParaRPr lang="en-US" sz="750" dirty="0"/>
+          </a:p>
+        </p:txBody>
+      </p:sp>
+      <p:sp>
+        <p:nvSpPr>
+          <p:cNvPr id="49" name="Text 47"/>
+          <p:cNvSpPr txBox="1"/>
+          <p:nvPr/>
+        </p:nvSpPr>
+        <p:spPr>
+          <a:xfrm>
+            <a:off x="9389269" y="3181350"/>
+            <a:ext cx="392906" cy="218599"/>
+          </a:xfrm>
+          <a:prstGeom prst="rect">
+            <a:avLst/>
+          </a:prstGeom>
+          <a:noFill/>
+          <a:ln/>
+        </p:spPr>
+        <p:txBody>
+          <a:bodyPr wrap="square" lIns="0" tIns="0" rIns="0" bIns="0" rtlCol="0" anchor="t"/>
+          <a:lstStyle/>
+          <a:p>
+            <a:pPr algn="ctr" indent="0" marL="0">
+              <a:lnSpc>
+                <a:spcPts val="1721"/>
+              </a:lnSpc>
+              <a:buNone/>
+            </a:pPr>
+            <a:r>
+              <a:rPr lang="en-US" sz="1275" b="1" dirty="0">
+                <a:solidFill>
+                  <a:srgbClr val="EAE7E0"/>
+                </a:solidFill>
+                <a:latin typeface="Consolas" pitchFamily="34" charset="0"/>
+                <a:ea typeface="Consolas" pitchFamily="34" charset="-122"/>
+                <a:cs typeface="Consolas" pitchFamily="34" charset="-120"/>
+              </a:rPr>
+              <a:t>5</a:t>
+            </a:r>
+            <a:endParaRPr lang="en-US" sz="1275" dirty="0"/>
+          </a:p>
+        </p:txBody>
+      </p:sp>
+      <p:sp>
+        <p:nvSpPr>
+          <p:cNvPr id="50" name="Text 48"/>
+          <p:cNvSpPr txBox="1"/>
+          <p:nvPr/>
+        </p:nvSpPr>
+        <p:spPr>
+          <a:xfrm>
+            <a:off x="9389269" y="3543300"/>
+            <a:ext cx="392906" cy="123825"/>
+          </a:xfrm>
+          <a:prstGeom prst="rect">
+            <a:avLst/>
+          </a:prstGeom>
+          <a:noFill/>
+          <a:ln/>
+        </p:spPr>
+        <p:txBody>
+          <a:bodyPr wrap="square" lIns="0" tIns="0" rIns="0" bIns="0" rtlCol="0" anchor="t"/>
+          <a:lstStyle/>
+          <a:p>
+            <a:pPr algn="ctr" indent="0" marL="0">
+              <a:lnSpc>
+                <a:spcPts val="975"/>
+              </a:lnSpc>
+              <a:buNone/>
+            </a:pPr>
+            <a:r>
+              <a:rPr lang="en-US" sz="750" dirty="0">
+                <a:solidFill>
+                  <a:srgbClr val="63798F"/>
+                </a:solidFill>
+                <a:latin typeface="Consolas" pitchFamily="34" charset="0"/>
+                <a:ea typeface="Consolas" pitchFamily="34" charset="-122"/>
+                <a:cs typeface="Consolas" pitchFamily="34" charset="-120"/>
+              </a:rPr>
+              <a:t>28.9</a:t>
+            </a:r>
+            <a:endParaRPr lang="en-US" sz="750" dirty="0"/>
+          </a:p>
+        </p:txBody>
+      </p:sp>
+      <p:sp>
+        <p:nvSpPr>
+          <p:cNvPr id="51" name="Text 49"/>
+          <p:cNvSpPr txBox="1"/>
+          <p:nvPr/>
+        </p:nvSpPr>
+        <p:spPr>
+          <a:xfrm>
+            <a:off x="9782175" y="3181350"/>
+            <a:ext cx="392906" cy="218599"/>
+          </a:xfrm>
+          <a:prstGeom prst="rect">
+            <a:avLst/>
+          </a:prstGeom>
+          <a:noFill/>
+          <a:ln/>
+        </p:spPr>
+        <p:txBody>
+          <a:bodyPr wrap="square" lIns="0" tIns="0" rIns="0" bIns="0" rtlCol="0" anchor="t"/>
+          <a:lstStyle/>
+          <a:p>
+            <a:pPr algn="ctr" indent="0" marL="0">
+              <a:lnSpc>
+                <a:spcPts val="1721"/>
+              </a:lnSpc>
+              <a:buNone/>
+            </a:pPr>
+            <a:r>
+              <a:rPr lang="en-US" sz="1275" b="1" dirty="0">
+                <a:solidFill>
+                  <a:srgbClr val="EAE7E0"/>
+                </a:solidFill>
+                <a:latin typeface="Consolas" pitchFamily="34" charset="0"/>
+                <a:ea typeface="Consolas" pitchFamily="34" charset="-122"/>
+                <a:cs typeface="Consolas" pitchFamily="34" charset="-120"/>
+              </a:rPr>
+              <a:t>2</a:t>
+            </a:r>
+            <a:endParaRPr lang="en-US" sz="1275" dirty="0"/>
+          </a:p>
+        </p:txBody>
+      </p:sp>
+      <p:sp>
+        <p:nvSpPr>
+          <p:cNvPr id="52" name="Text 50"/>
+          <p:cNvSpPr txBox="1"/>
+          <p:nvPr/>
+        </p:nvSpPr>
+        <p:spPr>
+          <a:xfrm>
+            <a:off x="9782175" y="3543300"/>
+            <a:ext cx="392906" cy="123825"/>
+          </a:xfrm>
+          <a:prstGeom prst="rect">
+            <a:avLst/>
+          </a:prstGeom>
+          <a:noFill/>
+          <a:ln/>
+        </p:spPr>
+        <p:txBody>
+          <a:bodyPr wrap="square" lIns="0" tIns="0" rIns="0" bIns="0" rtlCol="0" anchor="t"/>
+          <a:lstStyle/>
+          <a:p>
+            <a:pPr algn="ctr" indent="0" marL="0">
+              <a:lnSpc>
+                <a:spcPts val="975"/>
+              </a:lnSpc>
+              <a:buNone/>
+            </a:pPr>
+            <a:r>
+              <a:rPr lang="en-US" sz="750" dirty="0">
+                <a:solidFill>
+                  <a:srgbClr val="63798F"/>
+                </a:solidFill>
+                <a:latin typeface="Consolas" pitchFamily="34" charset="0"/>
+                <a:ea typeface="Consolas" pitchFamily="34" charset="-122"/>
+                <a:cs typeface="Consolas" pitchFamily="34" charset="-120"/>
+              </a:rPr>
+              <a:t>29.9</a:t>
+            </a:r>
+            <a:endParaRPr lang="en-US" sz="750" dirty="0"/>
+          </a:p>
+        </p:txBody>
+      </p:sp>
+      <p:sp>
+        <p:nvSpPr>
+          <p:cNvPr id="53" name="Text 51"/>
+          <p:cNvSpPr txBox="1"/>
+          <p:nvPr/>
+        </p:nvSpPr>
+        <p:spPr>
+          <a:xfrm>
+            <a:off x="10175081" y="3181350"/>
+            <a:ext cx="392906" cy="218599"/>
+          </a:xfrm>
+          <a:prstGeom prst="rect">
+            <a:avLst/>
+          </a:prstGeom>
+          <a:noFill/>
+          <a:ln/>
+        </p:spPr>
+        <p:txBody>
+          <a:bodyPr wrap="square" lIns="0" tIns="0" rIns="0" bIns="0" rtlCol="0" anchor="t"/>
+          <a:lstStyle/>
+          <a:p>
+            <a:pPr algn="ctr" indent="0" marL="0">
+              <a:lnSpc>
+                <a:spcPts val="1721"/>
+              </a:lnSpc>
+              <a:buNone/>
+            </a:pPr>
+            <a:r>
+              <a:rPr lang="en-US" sz="1275" b="1" dirty="0">
+                <a:solidFill>
+                  <a:srgbClr val="EAE7E0"/>
+                </a:solidFill>
+                <a:latin typeface="Consolas" pitchFamily="34" charset="0"/>
+                <a:ea typeface="Consolas" pitchFamily="34" charset="-122"/>
+                <a:cs typeface="Consolas" pitchFamily="34" charset="-120"/>
+              </a:rPr>
+              <a:t>2</a:t>
+            </a:r>
+            <a:endParaRPr lang="en-US" sz="1275" dirty="0"/>
+          </a:p>
+        </p:txBody>
+      </p:sp>
+      <p:sp>
+        <p:nvSpPr>
+          <p:cNvPr id="54" name="Text 52"/>
+          <p:cNvSpPr txBox="1"/>
+          <p:nvPr/>
+        </p:nvSpPr>
+        <p:spPr>
+          <a:xfrm>
+            <a:off x="10175081" y="3543300"/>
+            <a:ext cx="392906" cy="123825"/>
+          </a:xfrm>
+          <a:prstGeom prst="rect">
+            <a:avLst/>
+          </a:prstGeom>
+          <a:noFill/>
+          <a:ln/>
+        </p:spPr>
+        <p:txBody>
+          <a:bodyPr wrap="square" lIns="0" tIns="0" rIns="0" bIns="0" rtlCol="0" anchor="t"/>
+          <a:lstStyle/>
+          <a:p>
+            <a:pPr algn="ctr" indent="0" marL="0">
+              <a:lnSpc>
+                <a:spcPts val="975"/>
+              </a:lnSpc>
+              <a:buNone/>
+            </a:pPr>
+            <a:r>
+              <a:rPr lang="en-US" sz="750" dirty="0">
+                <a:solidFill>
+                  <a:srgbClr val="63798F"/>
+                </a:solidFill>
+                <a:latin typeface="Consolas" pitchFamily="34" charset="0"/>
+                <a:ea typeface="Consolas" pitchFamily="34" charset="-122"/>
+                <a:cs typeface="Consolas" pitchFamily="34" charset="-120"/>
+              </a:rPr>
+              <a:t>27.6</a:t>
+            </a:r>
+            <a:endParaRPr lang="en-US" sz="750" dirty="0"/>
+          </a:p>
+        </p:txBody>
+      </p:sp>
+      <p:sp>
+        <p:nvSpPr>
+          <p:cNvPr id="55" name="Text 53"/>
+          <p:cNvSpPr txBox="1"/>
+          <p:nvPr/>
+        </p:nvSpPr>
+        <p:spPr>
+          <a:xfrm>
+            <a:off x="10567988" y="3181350"/>
+            <a:ext cx="392906" cy="218599"/>
+          </a:xfrm>
+          <a:prstGeom prst="rect">
+            <a:avLst/>
+          </a:prstGeom>
+          <a:noFill/>
+          <a:ln/>
+        </p:spPr>
+        <p:txBody>
+          <a:bodyPr wrap="square" lIns="0" tIns="0" rIns="0" bIns="0" rtlCol="0" anchor="t"/>
+          <a:lstStyle/>
+          <a:p>
+            <a:pPr algn="ctr" indent="0" marL="0">
+              <a:lnSpc>
+                <a:spcPts val="1721"/>
+              </a:lnSpc>
+              <a:buNone/>
+            </a:pPr>
+            <a:r>
+              <a:rPr lang="en-US" sz="1275" b="1" dirty="0">
+                <a:solidFill>
+                  <a:srgbClr val="EAE7E0"/>
+                </a:solidFill>
+                <a:latin typeface="Consolas" pitchFamily="34" charset="0"/>
+                <a:ea typeface="Consolas" pitchFamily="34" charset="-122"/>
+                <a:cs typeface="Consolas" pitchFamily="34" charset="-120"/>
+              </a:rPr>
+              <a:t>1</a:t>
+            </a:r>
+            <a:endParaRPr lang="en-US" sz="1275" dirty="0"/>
+          </a:p>
+        </p:txBody>
+      </p:sp>
+      <p:sp>
+        <p:nvSpPr>
+          <p:cNvPr id="56" name="Text 54"/>
+          <p:cNvSpPr txBox="1"/>
+          <p:nvPr/>
+        </p:nvSpPr>
+        <p:spPr>
+          <a:xfrm>
+            <a:off x="10567988" y="3543300"/>
+            <a:ext cx="392906" cy="123825"/>
+          </a:xfrm>
+          <a:prstGeom prst="rect">
+            <a:avLst/>
+          </a:prstGeom>
+          <a:noFill/>
+          <a:ln/>
+        </p:spPr>
+        <p:txBody>
+          <a:bodyPr wrap="square" lIns="0" tIns="0" rIns="0" bIns="0" rtlCol="0" anchor="t"/>
+          <a:lstStyle/>
+          <a:p>
+            <a:pPr algn="ctr" indent="0" marL="0">
+              <a:lnSpc>
+                <a:spcPts val="975"/>
+              </a:lnSpc>
+              <a:buNone/>
+            </a:pPr>
+            <a:r>
+              <a:rPr lang="en-US" sz="750" dirty="0">
+                <a:solidFill>
+                  <a:srgbClr val="63798F"/>
+                </a:solidFill>
+                <a:latin typeface="Consolas" pitchFamily="34" charset="0"/>
+                <a:ea typeface="Consolas" pitchFamily="34" charset="-122"/>
+                <a:cs typeface="Consolas" pitchFamily="34" charset="-120"/>
+              </a:rPr>
+              <a:t>31.9</a:t>
+            </a:r>
+            <a:endParaRPr lang="en-US" sz="750" dirty="0"/>
+          </a:p>
+        </p:txBody>
+      </p:sp>
+      <p:sp>
+        <p:nvSpPr>
+          <p:cNvPr id="57" name="Text 55"/>
+          <p:cNvSpPr txBox="1"/>
+          <p:nvPr/>
+        </p:nvSpPr>
+        <p:spPr>
+          <a:xfrm>
+            <a:off x="10960894" y="3181350"/>
+            <a:ext cx="392906" cy="218599"/>
+          </a:xfrm>
+          <a:prstGeom prst="rect">
+            <a:avLst/>
+          </a:prstGeom>
+          <a:noFill/>
+          <a:ln/>
+        </p:spPr>
+        <p:txBody>
+          <a:bodyPr wrap="square" lIns="0" tIns="0" rIns="0" bIns="0" rtlCol="0" anchor="t"/>
+          <a:lstStyle/>
+          <a:p>
+            <a:pPr algn="ctr" indent="0" marL="0">
+              <a:lnSpc>
+                <a:spcPts val="1721"/>
+              </a:lnSpc>
+              <a:buNone/>
+            </a:pPr>
+            <a:r>
+              <a:rPr lang="en-US" sz="1275" b="1" dirty="0">
+                <a:solidFill>
+                  <a:srgbClr val="EAE7E0"/>
+                </a:solidFill>
+                <a:latin typeface="Consolas" pitchFamily="34" charset="0"/>
+                <a:ea typeface="Consolas" pitchFamily="34" charset="-122"/>
+                <a:cs typeface="Consolas" pitchFamily="34" charset="-120"/>
+              </a:rPr>
+              <a:t>-1</a:t>
+            </a:r>
+            <a:endParaRPr lang="en-US" sz="1275" dirty="0"/>
+          </a:p>
+        </p:txBody>
+      </p:sp>
+      <p:sp>
+        <p:nvSpPr>
+          <p:cNvPr id="58" name="Text 56"/>
+          <p:cNvSpPr txBox="1"/>
+          <p:nvPr/>
+        </p:nvSpPr>
+        <p:spPr>
+          <a:xfrm>
+            <a:off x="10960894" y="3543300"/>
+            <a:ext cx="392906" cy="123825"/>
+          </a:xfrm>
+          <a:prstGeom prst="rect">
+            <a:avLst/>
+          </a:prstGeom>
+          <a:noFill/>
+          <a:ln/>
+        </p:spPr>
+        <p:txBody>
+          <a:bodyPr wrap="square" lIns="0" tIns="0" rIns="0" bIns="0" rtlCol="0" anchor="t"/>
+          <a:lstStyle/>
+          <a:p>
+            <a:pPr algn="ctr" indent="0" marL="0">
+              <a:lnSpc>
+                <a:spcPts val="975"/>
+              </a:lnSpc>
+              <a:buNone/>
+            </a:pPr>
+            <a:r>
+              <a:rPr lang="en-US" sz="750" dirty="0">
+                <a:solidFill>
+                  <a:srgbClr val="63798F"/>
+                </a:solidFill>
+                <a:latin typeface="Consolas" pitchFamily="34" charset="0"/>
+                <a:ea typeface="Consolas" pitchFamily="34" charset="-122"/>
+                <a:cs typeface="Consolas" pitchFamily="34" charset="-120"/>
+              </a:rPr>
+              <a:t>36.6</a:t>
+            </a:r>
+            <a:endParaRPr lang="en-US" sz="750" dirty="0"/>
+          </a:p>
+        </p:txBody>
+      </p:sp>
+      <p:sp>
+        <p:nvSpPr>
+          <p:cNvPr id="59" name="Shape 57"/>
+          <p:cNvSpPr/>
+          <p:nvPr/>
+        </p:nvSpPr>
+        <p:spPr>
+          <a:xfrm>
+            <a:off x="5067300" y="3467100"/>
+            <a:ext cx="6286500" cy="0"/>
+          </a:xfrm>
+          <a:prstGeom prst="line">
+            <a:avLst/>
+          </a:prstGeom>
+          <a:noFill/>
+          <a:ln w="12700">
+            <a:solidFill>
+              <a:srgbClr val="22354A"/>
+            </a:solidFill>
+            <a:prstDash val="solid"/>
+          </a:ln>
+        </p:spPr>
+      </p:sp>
+      <p:sp>
+        <p:nvSpPr>
+          <p:cNvPr id="60" name="Text 58"/>
+          <p:cNvSpPr txBox="1"/>
+          <p:nvPr/>
+        </p:nvSpPr>
+        <p:spPr>
+          <a:xfrm>
+            <a:off x="5067300" y="3733800"/>
+            <a:ext cx="3810000" cy="125016"/>
+          </a:xfrm>
+          <a:prstGeom prst="rect">
+            <a:avLst/>
+          </a:prstGeom>
+          <a:noFill/>
+          <a:ln/>
+        </p:spPr>
+        <p:txBody>
+          <a:bodyPr wrap="square" lIns="0" tIns="0" rIns="0" bIns="0" rtlCol="0" anchor="t"/>
+          <a:lstStyle/>
+          <a:p>
+            <a:pPr algn="l" indent="0" marL="0">
+              <a:lnSpc>
+                <a:spcPts val="984"/>
+              </a:lnSpc>
+              <a:buNone/>
+            </a:pPr>
+            <a:r>
+              <a:rPr lang="en-US" sz="788" b="1" spc="150" kern="0" dirty="0">
+                <a:solidFill>
+                  <a:srgbClr val="63798F"/>
+                </a:solidFill>
+                <a:latin typeface="Consolas" pitchFamily="34" charset="0"/>
+                <a:ea typeface="Consolas" pitchFamily="34" charset="-122"/>
+                <a:cs typeface="Consolas" pitchFamily="34" charset="-120"/>
+              </a:rPr>
+              <a:t>아래 줄은 그 회차의 외기온도 ℃</a:t>
+            </a:r>
+            <a:endParaRPr lang="en-US" sz="788" dirty="0"/>
+          </a:p>
+        </p:txBody>
+      </p:sp>
+      <p:sp>
+        <p:nvSpPr>
+          <p:cNvPr id="61" name="Text 59"/>
+          <p:cNvSpPr txBox="1"/>
+          <p:nvPr/>
+        </p:nvSpPr>
+        <p:spPr>
+          <a:xfrm>
+            <a:off x="4914900" y="4171950"/>
+            <a:ext cx="6591300" cy="284036"/>
+          </a:xfrm>
+          <a:prstGeom prst="rect">
+            <a:avLst/>
+          </a:prstGeom>
+          <a:noFill/>
+          <a:ln/>
+        </p:spPr>
+        <p:txBody>
+          <a:bodyPr wrap="square" lIns="0" tIns="0" rIns="0" bIns="0" rtlCol="0" anchor="t"/>
+          <a:lstStyle/>
+          <a:p>
+            <a:pPr algn="l" indent="0" marL="0">
+              <a:lnSpc>
+                <a:spcPts val="2237"/>
+              </a:lnSpc>
+              <a:buNone/>
+            </a:pPr>
+            <a:r>
+              <a:rPr lang="en-US" sz="1575" b="1" dirty="0">
+                <a:solidFill>
+                  <a:srgbClr val="EFB13C"/>
+                </a:solidFill>
+                <a:latin typeface="Malgun Gothic" pitchFamily="34" charset="0"/>
+                <a:ea typeface="Malgun Gothic" pitchFamily="34" charset="-122"/>
+                <a:cs typeface="Malgun Gothic" pitchFamily="34" charset="-120"/>
+              </a:rPr>
+              <a:t>7.3℃ 와 25.7℃ 에 똑같이 5</a:t>
+            </a:r>
+            <a:pPr algn="l" indent="0" marL="0">
+              <a:lnSpc>
+                <a:spcPts val="2237"/>
+              </a:lnSpc>
+              <a:buNone/>
+            </a:pPr>
+            <a:r>
+              <a:rPr lang="en-US" sz="1575" b="1" dirty="0">
+                <a:solidFill>
+                  <a:srgbClr val="EAE7E0"/>
+                </a:solidFill>
+                <a:latin typeface="Malgun Gothic" pitchFamily="34" charset="0"/>
+                <a:ea typeface="Malgun Gothic" pitchFamily="34" charset="-122"/>
+                <a:cs typeface="Malgun Gothic" pitchFamily="34" charset="-120"/>
+              </a:rPr>
+              <a:t> — 온도가 18℃ 달라도 같은 값입니다</a:t>
+            </a:r>
+            <a:endParaRPr lang="en-US" sz="1575" dirty="0"/>
+          </a:p>
+        </p:txBody>
+      </p:sp>
+      <p:sp>
+        <p:nvSpPr>
+          <p:cNvPr id="62" name="Shape 60"/>
+          <p:cNvSpPr/>
+          <p:nvPr/>
+        </p:nvSpPr>
+        <p:spPr>
+          <a:xfrm>
+            <a:off x="4914900" y="4610100"/>
+            <a:ext cx="6591300" cy="723900"/>
+          </a:xfrm>
+          <a:prstGeom prst="rect">
+            <a:avLst/>
+          </a:prstGeom>
+          <a:solidFill>
+            <a:srgbClr val="0A1320"/>
+          </a:solidFill>
+          <a:ln w="12700">
+            <a:solidFill>
+              <a:srgbClr val="182838"/>
+            </a:solidFill>
+            <a:prstDash val="solid"/>
+          </a:ln>
+        </p:spPr>
+      </p:sp>
+      <p:sp>
+        <p:nvSpPr>
+          <p:cNvPr id="63" name="Text 61"/>
+          <p:cNvSpPr txBox="1"/>
+          <p:nvPr/>
+        </p:nvSpPr>
+        <p:spPr>
+          <a:xfrm>
+            <a:off x="5105400" y="4724400"/>
+            <a:ext cx="1905000" cy="125016"/>
+          </a:xfrm>
+          <a:prstGeom prst="rect">
+            <a:avLst/>
+          </a:prstGeom>
+          <a:noFill/>
+          <a:ln/>
+        </p:spPr>
+        <p:txBody>
+          <a:bodyPr wrap="square" lIns="0" tIns="0" rIns="0" bIns="0" rtlCol="0" anchor="t"/>
+          <a:lstStyle/>
+          <a:p>
+            <a:pPr algn="l" indent="0" marL="0">
+              <a:lnSpc>
+                <a:spcPts val="984"/>
+              </a:lnSpc>
+              <a:buNone/>
+            </a:pPr>
+            <a:r>
+              <a:rPr lang="en-US" sz="788" b="1" spc="150" kern="0" dirty="0">
+                <a:solidFill>
+                  <a:srgbClr val="63798F"/>
+                </a:solidFill>
+                <a:latin typeface="Consolas" pitchFamily="34" charset="0"/>
+                <a:ea typeface="Consolas" pitchFamily="34" charset="-122"/>
+                <a:cs typeface="Consolas" pitchFamily="34" charset="-120"/>
+              </a:rPr>
+              <a:t>평균</a:t>
+            </a:r>
+            <a:endParaRPr lang="en-US" sz="788" dirty="0"/>
+          </a:p>
+        </p:txBody>
+      </p:sp>
+      <p:sp>
+        <p:nvSpPr>
+          <p:cNvPr id="64" name="Text 62"/>
+          <p:cNvSpPr txBox="1"/>
+          <p:nvPr/>
+        </p:nvSpPr>
+        <p:spPr>
+          <a:xfrm>
+            <a:off x="5105400" y="4933950"/>
+            <a:ext cx="1905000" cy="240030"/>
+          </a:xfrm>
+          <a:prstGeom prst="rect">
+            <a:avLst/>
+          </a:prstGeom>
+          <a:noFill/>
+          <a:ln/>
+        </p:spPr>
+        <p:txBody>
+          <a:bodyPr wrap="square" lIns="0" tIns="0" rIns="0" bIns="0" rtlCol="0" anchor="t"/>
+          <a:lstStyle/>
+          <a:p>
+            <a:pPr algn="l" indent="0" marL="0">
+              <a:lnSpc>
+                <a:spcPts val="1890"/>
+              </a:lnSpc>
+              <a:buNone/>
+            </a:pPr>
+            <a:r>
+              <a:rPr lang="en-US" sz="1800" b="1" dirty="0">
+                <a:solidFill>
+                  <a:srgbClr val="EFB13C"/>
+                </a:solidFill>
+                <a:latin typeface="Consolas" pitchFamily="34" charset="0"/>
+                <a:ea typeface="Consolas" pitchFamily="34" charset="-122"/>
+                <a:cs typeface="Consolas" pitchFamily="34" charset="-120"/>
+              </a:rPr>
+              <a:t>+3.69</a:t>
+            </a:r>
+            <a:endParaRPr lang="en-US" sz="1800" dirty="0"/>
+          </a:p>
+        </p:txBody>
+      </p:sp>
+      <p:sp>
+        <p:nvSpPr>
+          <p:cNvPr id="65" name="Text 63"/>
+          <p:cNvSpPr txBox="1"/>
+          <p:nvPr/>
+        </p:nvSpPr>
+        <p:spPr>
+          <a:xfrm>
+            <a:off x="5876925" y="5010150"/>
+            <a:ext cx="381000" cy="137160"/>
+          </a:xfrm>
+          <a:prstGeom prst="rect">
+            <a:avLst/>
+          </a:prstGeom>
+          <a:noFill/>
+          <a:ln/>
+        </p:spPr>
+        <p:txBody>
+          <a:bodyPr wrap="square" lIns="0" tIns="0" rIns="0" bIns="0" rtlCol="0" anchor="t"/>
+          <a:lstStyle/>
+          <a:p>
+            <a:pPr algn="l" indent="0" marL="0">
+              <a:lnSpc>
+                <a:spcPts val="1080"/>
+              </a:lnSpc>
+              <a:buNone/>
+            </a:pPr>
+            <a:r>
+              <a:rPr lang="en-US" sz="900" dirty="0">
+                <a:solidFill>
+                  <a:srgbClr val="63798F"/>
+                </a:solidFill>
+                <a:latin typeface="Malgun Gothic" pitchFamily="34" charset="0"/>
+                <a:ea typeface="Malgun Gothic" pitchFamily="34" charset="-122"/>
+                <a:cs typeface="Malgun Gothic" pitchFamily="34" charset="-120"/>
+              </a:rPr>
+              <a:t>MW</a:t>
+            </a:r>
+            <a:endParaRPr lang="en-US" sz="900" dirty="0"/>
+          </a:p>
+        </p:txBody>
+      </p:sp>
+      <p:sp>
+        <p:nvSpPr>
+          <p:cNvPr id="66" name="Text 64"/>
+          <p:cNvSpPr txBox="1"/>
+          <p:nvPr/>
+        </p:nvSpPr>
+        <p:spPr>
+          <a:xfrm>
+            <a:off x="7239000" y="4724400"/>
+            <a:ext cx="1905000" cy="125016"/>
+          </a:xfrm>
+          <a:prstGeom prst="rect">
+            <a:avLst/>
+          </a:prstGeom>
+          <a:noFill/>
+          <a:ln/>
+        </p:spPr>
+        <p:txBody>
+          <a:bodyPr wrap="square" lIns="0" tIns="0" rIns="0" bIns="0" rtlCol="0" anchor="t"/>
+          <a:lstStyle/>
+          <a:p>
+            <a:pPr algn="l" indent="0" marL="0">
+              <a:lnSpc>
+                <a:spcPts val="984"/>
+              </a:lnSpc>
+              <a:buNone/>
+            </a:pPr>
+            <a:r>
+              <a:rPr lang="en-US" sz="788" b="1" spc="150" kern="0" dirty="0">
+                <a:solidFill>
+                  <a:srgbClr val="63798F"/>
+                </a:solidFill>
+                <a:latin typeface="Consolas" pitchFamily="34" charset="0"/>
+                <a:ea typeface="Consolas" pitchFamily="34" charset="-122"/>
+                <a:cs typeface="Consolas" pitchFamily="34" charset="-120"/>
+              </a:rPr>
+              <a:t>범위</a:t>
+            </a:r>
+            <a:endParaRPr lang="en-US" sz="788" dirty="0"/>
+          </a:p>
+        </p:txBody>
+      </p:sp>
+      <p:sp>
+        <p:nvSpPr>
+          <p:cNvPr id="67" name="Text 65"/>
+          <p:cNvSpPr txBox="1"/>
+          <p:nvPr/>
+        </p:nvSpPr>
+        <p:spPr>
+          <a:xfrm>
+            <a:off x="7239000" y="4933950"/>
+            <a:ext cx="1905000" cy="240030"/>
+          </a:xfrm>
+          <a:prstGeom prst="rect">
+            <a:avLst/>
+          </a:prstGeom>
+          <a:noFill/>
+          <a:ln/>
+        </p:spPr>
+        <p:txBody>
+          <a:bodyPr wrap="square" lIns="0" tIns="0" rIns="0" bIns="0" rtlCol="0" anchor="t"/>
+          <a:lstStyle/>
+          <a:p>
+            <a:pPr algn="l" indent="0" marL="0">
+              <a:lnSpc>
+                <a:spcPts val="1890"/>
+              </a:lnSpc>
+              <a:buNone/>
+            </a:pPr>
+            <a:r>
+              <a:rPr lang="en-US" sz="1800" b="1" dirty="0">
+                <a:solidFill>
+                  <a:srgbClr val="EFB13C"/>
+                </a:solidFill>
+                <a:latin typeface="Consolas" pitchFamily="34" charset="0"/>
+                <a:ea typeface="Consolas" pitchFamily="34" charset="-122"/>
+                <a:cs typeface="Consolas" pitchFamily="34" charset="-120"/>
+              </a:rPr>
+              <a:t>−1 ~ +6</a:t>
+            </a:r>
+            <a:endParaRPr lang="en-US" sz="1800" dirty="0"/>
+          </a:p>
+        </p:txBody>
+      </p:sp>
+      <p:sp>
+        <p:nvSpPr>
+          <p:cNvPr id="68" name="Text 66"/>
+          <p:cNvSpPr txBox="1"/>
+          <p:nvPr/>
+        </p:nvSpPr>
+        <p:spPr>
+          <a:xfrm>
+            <a:off x="8296275" y="5010150"/>
+            <a:ext cx="381000" cy="137160"/>
+          </a:xfrm>
+          <a:prstGeom prst="rect">
+            <a:avLst/>
+          </a:prstGeom>
+          <a:noFill/>
+          <a:ln/>
+        </p:spPr>
+        <p:txBody>
+          <a:bodyPr wrap="square" lIns="0" tIns="0" rIns="0" bIns="0" rtlCol="0" anchor="t"/>
+          <a:lstStyle/>
+          <a:p>
+            <a:pPr algn="l" indent="0" marL="0">
+              <a:lnSpc>
+                <a:spcPts val="1080"/>
+              </a:lnSpc>
+              <a:buNone/>
+            </a:pPr>
+            <a:r>
+              <a:rPr lang="en-US" sz="900" dirty="0">
+                <a:solidFill>
+                  <a:srgbClr val="63798F"/>
+                </a:solidFill>
+                <a:latin typeface="Malgun Gothic" pitchFamily="34" charset="0"/>
+                <a:ea typeface="Malgun Gothic" pitchFamily="34" charset="-122"/>
+                <a:cs typeface="Malgun Gothic" pitchFamily="34" charset="-120"/>
+              </a:rPr>
+              <a:t>MW</a:t>
+            </a:r>
+            <a:endParaRPr lang="en-US" sz="900" dirty="0"/>
+          </a:p>
+        </p:txBody>
+      </p:sp>
+      <p:sp>
+        <p:nvSpPr>
+          <p:cNvPr id="69" name="Text 67"/>
+          <p:cNvSpPr txBox="1"/>
+          <p:nvPr/>
+        </p:nvSpPr>
+        <p:spPr>
+          <a:xfrm>
+            <a:off x="9372600" y="4724400"/>
+            <a:ext cx="1905000" cy="125016"/>
+          </a:xfrm>
+          <a:prstGeom prst="rect">
+            <a:avLst/>
+          </a:prstGeom>
+          <a:noFill/>
+          <a:ln/>
+        </p:spPr>
+        <p:txBody>
+          <a:bodyPr wrap="square" lIns="0" tIns="0" rIns="0" bIns="0" rtlCol="0" anchor="t"/>
+          <a:lstStyle/>
+          <a:p>
+            <a:pPr algn="l" indent="0" marL="0">
+              <a:lnSpc>
+                <a:spcPts val="984"/>
+              </a:lnSpc>
+              <a:buNone/>
+            </a:pPr>
+            <a:r>
+              <a:rPr lang="en-US" sz="788" b="1" spc="150" kern="0" dirty="0">
+                <a:solidFill>
+                  <a:srgbClr val="63798F"/>
+                </a:solidFill>
+                <a:latin typeface="Consolas" pitchFamily="34" charset="0"/>
+                <a:ea typeface="Consolas" pitchFamily="34" charset="-122"/>
+                <a:cs typeface="Consolas" pitchFamily="34" charset="-120"/>
+              </a:rPr>
+              <a:t>적용 온도 폭</a:t>
+            </a:r>
+            <a:endParaRPr lang="en-US" sz="788" dirty="0"/>
+          </a:p>
+        </p:txBody>
+      </p:sp>
+      <p:sp>
+        <p:nvSpPr>
+          <p:cNvPr id="70" name="Text 68"/>
+          <p:cNvSpPr txBox="1"/>
+          <p:nvPr/>
+        </p:nvSpPr>
+        <p:spPr>
+          <a:xfrm>
+            <a:off x="9372600" y="4933950"/>
+            <a:ext cx="1905000" cy="240030"/>
+          </a:xfrm>
+          <a:prstGeom prst="rect">
+            <a:avLst/>
+          </a:prstGeom>
+          <a:noFill/>
+          <a:ln/>
+        </p:spPr>
+        <p:txBody>
+          <a:bodyPr wrap="square" lIns="0" tIns="0" rIns="0" bIns="0" rtlCol="0" anchor="t"/>
+          <a:lstStyle/>
+          <a:p>
+            <a:pPr algn="l" indent="0" marL="0">
+              <a:lnSpc>
+                <a:spcPts val="1890"/>
+              </a:lnSpc>
+              <a:buNone/>
+            </a:pPr>
+            <a:r>
+              <a:rPr lang="en-US" sz="1800" b="1" dirty="0">
+                <a:solidFill>
+                  <a:srgbClr val="EFB13C"/>
+                </a:solidFill>
+                <a:latin typeface="Consolas" pitchFamily="34" charset="0"/>
+                <a:ea typeface="Consolas" pitchFamily="34" charset="-122"/>
+                <a:cs typeface="Consolas" pitchFamily="34" charset="-120"/>
+              </a:rPr>
+              <a:t>7.3 ~ 36.6</a:t>
+            </a:r>
+            <a:endParaRPr lang="en-US" sz="1800" dirty="0"/>
+          </a:p>
+        </p:txBody>
+      </p:sp>
+      <p:sp>
+        <p:nvSpPr>
+          <p:cNvPr id="71" name="Text 69"/>
+          <p:cNvSpPr txBox="1"/>
+          <p:nvPr/>
+        </p:nvSpPr>
+        <p:spPr>
+          <a:xfrm>
+            <a:off x="10858500" y="5010150"/>
+            <a:ext cx="381000" cy="137160"/>
+          </a:xfrm>
+          <a:prstGeom prst="rect">
+            <a:avLst/>
+          </a:prstGeom>
+          <a:noFill/>
+          <a:ln/>
+        </p:spPr>
+        <p:txBody>
+          <a:bodyPr wrap="square" lIns="0" tIns="0" rIns="0" bIns="0" rtlCol="0" anchor="t"/>
+          <a:lstStyle/>
+          <a:p>
+            <a:pPr algn="l" indent="0" marL="0">
+              <a:lnSpc>
+                <a:spcPts val="1080"/>
+              </a:lnSpc>
+              <a:buNone/>
+            </a:pPr>
+            <a:r>
+              <a:rPr lang="en-US" sz="900" dirty="0">
+                <a:solidFill>
+                  <a:srgbClr val="63798F"/>
+                </a:solidFill>
+                <a:latin typeface="Malgun Gothic" pitchFamily="34" charset="0"/>
+                <a:ea typeface="Malgun Gothic" pitchFamily="34" charset="-122"/>
+                <a:cs typeface="Malgun Gothic" pitchFamily="34" charset="-120"/>
+              </a:rPr>
+              <a:t>℃</a:t>
+            </a:r>
+            <a:endParaRPr lang="en-US" sz="900" dirty="0"/>
+          </a:p>
+        </p:txBody>
+      </p:sp>
+      <p:sp>
+        <p:nvSpPr>
+          <p:cNvPr id="72" name="Shape 70"/>
+          <p:cNvSpPr/>
+          <p:nvPr/>
+        </p:nvSpPr>
+        <p:spPr>
+          <a:xfrm>
+            <a:off x="685800" y="6057900"/>
+            <a:ext cx="10820400" cy="0"/>
+          </a:xfrm>
+          <a:prstGeom prst="line">
+            <a:avLst/>
+          </a:prstGeom>
+          <a:noFill/>
+          <a:ln w="12700">
+            <a:solidFill>
+              <a:srgbClr val="22354A"/>
+            </a:solidFill>
+            <a:prstDash val="solid"/>
+          </a:ln>
+        </p:spPr>
+      </p:sp>
+      <p:sp>
+        <p:nvSpPr>
+          <p:cNvPr id="73" name="Text 71"/>
+          <p:cNvSpPr txBox="1"/>
+          <p:nvPr/>
+        </p:nvSpPr>
+        <p:spPr>
+          <a:xfrm>
+            <a:off x="685800" y="6267450"/>
+            <a:ext cx="476250" cy="120015"/>
+          </a:xfrm>
+          <a:prstGeom prst="rect">
+            <a:avLst/>
+          </a:prstGeom>
+          <a:noFill/>
+          <a:ln/>
+        </p:spPr>
+        <p:txBody>
+          <a:bodyPr wrap="square" lIns="0" tIns="0" rIns="0" bIns="0" rtlCol="0" anchor="t"/>
+          <a:lstStyle/>
+          <a:p>
+            <a:pPr algn="l" indent="0" marL="0">
+              <a:lnSpc>
+                <a:spcPts val="945"/>
+              </a:lnSpc>
+              <a:buNone/>
+            </a:pPr>
+            <a:r>
+              <a:rPr lang="en-US" sz="788" b="1" spc="180" kern="0" dirty="0">
+                <a:solidFill>
+                  <a:srgbClr val="EFB13C"/>
+                </a:solidFill>
+                <a:latin typeface="Consolas" pitchFamily="34" charset="0"/>
+                <a:ea typeface="Consolas" pitchFamily="34" charset="-122"/>
+                <a:cs typeface="Consolas" pitchFamily="34" charset="-120"/>
+              </a:rPr>
+              <a:t>결론</a:t>
+            </a:r>
+            <a:endParaRPr lang="en-US" sz="788" dirty="0"/>
+          </a:p>
+        </p:txBody>
+      </p:sp>
+      <p:sp>
+        <p:nvSpPr>
+          <p:cNvPr id="74" name="Text 72"/>
+          <p:cNvSpPr txBox="1"/>
+          <p:nvPr/>
+        </p:nvSpPr>
+        <p:spPr>
+          <a:xfrm>
+            <a:off x="1219200" y="6229350"/>
+            <a:ext cx="10287000" cy="220027"/>
+          </a:xfrm>
+          <a:prstGeom prst="rect">
+            <a:avLst/>
+          </a:prstGeom>
+          <a:noFill/>
+          <a:ln/>
+        </p:spPr>
+        <p:txBody>
+          <a:bodyPr wrap="square" lIns="0" tIns="0" rIns="0" bIns="0" rtlCol="0" anchor="t"/>
+          <a:lstStyle/>
+          <a:p>
+            <a:pPr algn="l" indent="0" marL="0">
+              <a:lnSpc>
+                <a:spcPts val="1733"/>
+              </a:lnSpc>
+              <a:buNone/>
+            </a:pPr>
+            <a:r>
+              <a:rPr lang="en-US" sz="1238" dirty="0">
+                <a:solidFill>
+                  <a:srgbClr val="BCC9D6"/>
+                </a:solidFill>
+                <a:latin typeface="Malgun Gothic" pitchFamily="34" charset="0"/>
+                <a:ea typeface="Malgun Gothic" pitchFamily="34" charset="-122"/>
+                <a:cs typeface="Malgun Gothic" pitchFamily="34" charset="-120"/>
+              </a:rPr>
+              <a:t>온도가 달라져도 값이 거의 그대로입니다 — </a:t>
+            </a:r>
+            <a:pPr algn="l" indent="0" marL="0">
+              <a:lnSpc>
+                <a:spcPts val="1733"/>
+              </a:lnSpc>
+              <a:buNone/>
+            </a:pPr>
+            <a:r>
+              <a:rPr lang="en-US" sz="1238" b="1" dirty="0">
+                <a:solidFill>
+                  <a:srgbClr val="EFB13C"/>
+                </a:solidFill>
+                <a:latin typeface="Malgun Gothic" pitchFamily="34" charset="0"/>
+                <a:ea typeface="Malgun Gothic" pitchFamily="34" charset="-122"/>
+                <a:cs typeface="Malgun Gothic" pitchFamily="34" charset="-120"/>
+              </a:rPr>
+              <a:t>온도를 보지 않는 값</a:t>
+            </a:r>
+            <a:pPr algn="l" indent="0" marL="0">
+              <a:lnSpc>
+                <a:spcPts val="1733"/>
+              </a:lnSpc>
+              <a:buNone/>
+            </a:pPr>
+            <a:r>
+              <a:rPr lang="en-US" sz="1238" dirty="0">
+                <a:solidFill>
+                  <a:srgbClr val="BCC9D6"/>
+                </a:solidFill>
+                <a:latin typeface="Malgun Gothic" pitchFamily="34" charset="0"/>
+                <a:ea typeface="Malgun Gothic" pitchFamily="34" charset="-122"/>
+                <a:cs typeface="Malgun Gothic" pitchFamily="34" charset="-120"/>
+              </a:rPr>
+              <a:t>이었습니다.</a:t>
+            </a:r>
+            <a:endParaRPr lang="en-US" sz="1238" dirty="0"/>
+          </a:p>
+        </p:txBody>
       </p:sp>
     </p:spTree>
   </p:cSld>
@@ -10553,26 +14371,26 @@
         <p:spPr>
           <a:xfrm>
             <a:off x="685800" y="914400"/>
-            <a:ext cx="10287000" cy="360045"/>
-          </a:xfrm>
-          <a:prstGeom prst="rect">
-            <a:avLst/>
-          </a:prstGeom>
-          <a:noFill/>
-          <a:ln/>
-        </p:spPr>
-        <p:txBody>
-          <a:bodyPr wrap="square" lIns="0" tIns="0" rIns="0" bIns="0" rtlCol="0" anchor="t"/>
-          <a:lstStyle/>
-          <a:p>
-            <a:pPr algn="l" indent="0" marL="0">
-              <a:lnSpc>
-                <a:spcPts val="2835"/>
-              </a:lnSpc>
-              <a:buNone/>
-            </a:pPr>
-            <a:r>
-              <a:rPr lang="en-US" sz="2250" b="1" dirty="0">
+            <a:ext cx="10287000" cy="888111"/>
+          </a:xfrm>
+          <a:prstGeom prst="rect">
+            <a:avLst/>
+          </a:prstGeom>
+          <a:noFill/>
+          <a:ln/>
+        </p:spPr>
+        <p:txBody>
+          <a:bodyPr wrap="square" lIns="0" tIns="0" rIns="0" bIns="0" rtlCol="0" anchor="t"/>
+          <a:lstStyle/>
+          <a:p>
+            <a:pPr algn="l" indent="0" marL="0">
+              <a:lnSpc>
+                <a:spcPts val="3496"/>
+              </a:lnSpc>
+              <a:buNone/>
+            </a:pPr>
+            <a:r>
+              <a:rPr lang="en-US" sz="2775" b="1" dirty="0">
                 <a:solidFill>
                   <a:srgbClr val="EAE7E0"/>
                 </a:solidFill>
@@ -10580,78 +14398,166 @@
                 <a:ea typeface="Malgun Gothic" pitchFamily="34" charset="-122"/>
                 <a:cs typeface="Malgun Gothic" pitchFamily="34" charset="-120"/>
               </a:rPr>
-              <a:t>하나로는 맞출 수 없습니다 — 온도에 따라 갈립니다</a:t>
-            </a:r>
-            <a:endParaRPr lang="en-US" sz="2250" dirty="0"/>
-          </a:p>
-        </p:txBody>
-      </p:sp>
-      <p:sp>
-        <p:nvSpPr>
-          <p:cNvPr id="12" name="Shape 10"/>
-          <p:cNvSpPr/>
-          <p:nvPr/>
-        </p:nvSpPr>
-        <p:spPr>
-          <a:xfrm>
-            <a:off x="685800" y="2857500"/>
-            <a:ext cx="10820400" cy="2095500"/>
-          </a:xfrm>
-          <a:prstGeom prst="rect">
-            <a:avLst/>
-          </a:prstGeom>
-          <a:solidFill>
-            <a:srgbClr val="0A1320"/>
-          </a:solidFill>
-          <a:ln w="19050">
-            <a:solidFill>
-              <a:srgbClr val="22354A"/>
-            </a:solidFill>
-            <a:prstDash val="dash"/>
-          </a:ln>
-        </p:spPr>
-      </p:sp>
-      <p:sp>
-        <p:nvSpPr>
-          <p:cNvPr id="13" name="Text 11"/>
-          <p:cNvSpPr txBox="1"/>
-          <p:nvPr/>
-        </p:nvSpPr>
-        <p:spPr>
-          <a:xfrm>
-            <a:off x="685800" y="3695700"/>
-            <a:ext cx="10820400" cy="226695"/>
-          </a:xfrm>
-          <a:prstGeom prst="rect">
-            <a:avLst/>
-          </a:prstGeom>
-          <a:noFill/>
-          <a:ln/>
-        </p:spPr>
-        <p:txBody>
-          <a:bodyPr wrap="square" lIns="0" tIns="0" rIns="0" bIns="0" rtlCol="0" anchor="t"/>
-          <a:lstStyle/>
-          <a:p>
-            <a:pPr algn="ctr" indent="0" marL="0">
-              <a:lnSpc>
-                <a:spcPts val="1785"/>
-              </a:lnSpc>
-              <a:buNone/>
-            </a:pPr>
-            <a:r>
-              <a:rPr lang="en-US" sz="1275" dirty="0">
-                <a:solidFill>
-                  <a:srgbClr val="63798F"/>
+              <a:t>하나로는 맞출 수 없습니다 —</a:t>
+            </a:r>
+            <a:endParaRPr lang="en-US" sz="2775" dirty="0"/>
+          </a:p>
+          <a:p>
+            <a:pPr algn="l" indent="0" marL="0">
+              <a:lnSpc>
+                <a:spcPts val="3496"/>
+              </a:lnSpc>
+              <a:buNone/>
+            </a:pPr>
+            <a:r>
+              <a:rPr lang="en-US" sz="2775" b="1" dirty="0">
+                <a:solidFill>
+                  <a:srgbClr val="EAE7E0"/>
                 </a:solidFill>
                 <a:latin typeface="Malgun Gothic" pitchFamily="34" charset="0"/>
                 <a:ea typeface="Malgun Gothic" pitchFamily="34" charset="-122"/>
                 <a:cs typeface="Malgun Gothic" pitchFamily="34" charset="-120"/>
               </a:rPr>
-              <a:t>작성 예정 — 이 장은 아직 만들지 않았습니다.</a:t>
-            </a:r>
-            <a:endParaRPr lang="en-US" sz="1275" dirty="0"/>
-          </a:p>
-        </p:txBody>
+              <a:t>온도에 따라 </a:t>
+            </a:r>
+            <a:pPr algn="l" indent="0" marL="0">
+              <a:lnSpc>
+                <a:spcPts val="3496"/>
+              </a:lnSpc>
+              <a:buNone/>
+            </a:pPr>
+            <a:r>
+              <a:rPr lang="en-US" sz="2775" b="1" dirty="0">
+                <a:solidFill>
+                  <a:srgbClr val="EFB13C"/>
+                </a:solidFill>
+                <a:latin typeface="Malgun Gothic" pitchFamily="34" charset="0"/>
+                <a:ea typeface="Malgun Gothic" pitchFamily="34" charset="-122"/>
+                <a:cs typeface="Malgun Gothic" pitchFamily="34" charset="-120"/>
+              </a:rPr>
+              <a:t>−4.9 에서 +12.9 까지</a:t>
+            </a:r>
+            <a:pPr algn="l" indent="0" marL="0">
+              <a:lnSpc>
+                <a:spcPts val="3496"/>
+              </a:lnSpc>
+              <a:buNone/>
+            </a:pPr>
+            <a:r>
+              <a:rPr lang="en-US" sz="2775" b="1" dirty="0">
+                <a:solidFill>
+                  <a:srgbClr val="EAE7E0"/>
+                </a:solidFill>
+                <a:latin typeface="Malgun Gothic" pitchFamily="34" charset="0"/>
+                <a:ea typeface="Malgun Gothic" pitchFamily="34" charset="-122"/>
+                <a:cs typeface="Malgun Gothic" pitchFamily="34" charset="-120"/>
+              </a:rPr>
+              <a:t> 갈립니다</a:t>
+            </a:r>
+            <a:endParaRPr lang="en-US" sz="2775" dirty="0"/>
+          </a:p>
+        </p:txBody>
+      </p:sp>
+      <p:sp>
+        <p:nvSpPr>
+          <p:cNvPr id="12" name="Text 10"/>
+          <p:cNvSpPr txBox="1"/>
+          <p:nvPr/>
+        </p:nvSpPr>
+        <p:spPr>
+          <a:xfrm>
+            <a:off x="685800" y="2000250"/>
+            <a:ext cx="10287000" cy="569214"/>
+          </a:xfrm>
+          <a:prstGeom prst="rect">
+            <a:avLst/>
+          </a:prstGeom>
+          <a:noFill/>
+          <a:ln/>
+        </p:spPr>
+        <p:txBody>
+          <a:bodyPr wrap="square" lIns="0" tIns="0" rIns="0" bIns="0" rtlCol="0" anchor="t"/>
+          <a:lstStyle/>
+          <a:p>
+            <a:pPr algn="l" indent="0" marL="0">
+              <a:lnSpc>
+                <a:spcPts val="2241"/>
+              </a:lnSpc>
+              <a:buNone/>
+            </a:pPr>
+            <a:r>
+              <a:rPr lang="en-US" sz="1350" dirty="0">
+                <a:solidFill>
+                  <a:srgbClr val="BCC9D6"/>
+                </a:solidFill>
+                <a:latin typeface="Malgun Gothic" pitchFamily="34" charset="0"/>
+                <a:ea typeface="Malgun Gothic" pitchFamily="34" charset="-122"/>
+                <a:cs typeface="Malgun Gothic" pitchFamily="34" charset="-120"/>
+              </a:rPr>
+              <a:t>36회차의 실제 보정값을 온도 축에 찍었습니다. 값이 흩어진 것이 아닙니다. </a:t>
+            </a:r>
+            <a:pPr algn="l" indent="0" marL="0">
+              <a:lnSpc>
+                <a:spcPts val="2241"/>
+              </a:lnSpc>
+              <a:buNone/>
+            </a:pPr>
+            <a:r>
+              <a:rPr lang="en-US" sz="1350" b="1" dirty="0">
+                <a:solidFill>
+                  <a:srgbClr val="EAE7E0"/>
+                </a:solidFill>
+                <a:latin typeface="Malgun Gothic" pitchFamily="34" charset="0"/>
+                <a:ea typeface="Malgun Gothic" pitchFamily="34" charset="-122"/>
+                <a:cs typeface="Malgun Gothic" pitchFamily="34" charset="-120"/>
+              </a:rPr>
+              <a:t>한 방향으로 내려가는 기울기</a:t>
+            </a:r>
+            <a:pPr algn="l" indent="0" marL="0">
+              <a:lnSpc>
+                <a:spcPts val="2241"/>
+              </a:lnSpc>
+              <a:buNone/>
+            </a:pPr>
+            <a:r>
+              <a:rPr lang="en-US" sz="1350" dirty="0">
+                <a:solidFill>
+                  <a:srgbClr val="BCC9D6"/>
+                </a:solidFill>
+                <a:latin typeface="Malgun Gothic" pitchFamily="34" charset="0"/>
+                <a:ea typeface="Malgun Gothic" pitchFamily="34" charset="-122"/>
+                <a:cs typeface="Malgun Gothic" pitchFamily="34" charset="-120"/>
+              </a:rPr>
+              <a:t> 가 있습니다.</a:t>
+            </a:r>
+            <a:endParaRPr lang="en-US" sz="1350" dirty="0"/>
+          </a:p>
+        </p:txBody>
+      </p:sp>
+      <p:sp>
+        <p:nvSpPr>
+          <p:cNvPr id="13" name="Shape 11"/>
+          <p:cNvSpPr/>
+          <p:nvPr/>
+        </p:nvSpPr>
+        <p:spPr>
+          <a:xfrm>
+            <a:off x="685800" y="2705100"/>
+            <a:ext cx="7239000" cy="3200400"/>
+          </a:xfrm>
+          <a:prstGeom prst="rect">
+            <a:avLst/>
+          </a:prstGeom>
+          <a:solidFill>
+            <a:srgbClr val="0A1320"/>
+          </a:solidFill>
+          <a:ln w="12700">
+            <a:solidFill>
+              <a:srgbClr val="182838"/>
+            </a:solidFill>
+            <a:prstDash val="solid"/>
+          </a:ln>
+        </p:spPr>
       </p:sp>
       <p:sp>
         <p:nvSpPr>
@@ -10661,8 +14567,8 @@
         </p:nvSpPr>
         <p:spPr>
           <a:xfrm>
-            <a:off x="685800" y="4038600"/>
-            <a:ext cx="10820400" cy="125016"/>
+            <a:off x="838200" y="2838450"/>
+            <a:ext cx="6667500" cy="125016"/>
           </a:xfrm>
           <a:prstGeom prst="rect">
             <a:avLst/>
@@ -10683,13 +14589,13 @@
             <a:r>
               <a:rPr lang="en-US" sz="788" b="1" spc="150" kern="0" dirty="0">
                 <a:solidFill>
-                  <a:srgbClr val="7E2333"/>
+                  <a:srgbClr val="63798F"/>
                 </a:solidFill>
                 <a:latin typeface="Consolas" pitchFamily="34" charset="0"/>
                 <a:ea typeface="Consolas" pitchFamily="34" charset="-122"/>
                 <a:cs typeface="Consolas" pitchFamily="34" charset="-120"/>
               </a:rPr>
-              <a:t>SLIDE 05  ·  TODO</a:t>
+              <a:t>회차별 실제 보정값  ·  누적 36회차  ·  가로 외기온도 ℃ / 세로 MW</a:t>
             </a:r>
             <a:endParaRPr lang="en-US" sz="788" dirty="0"/>
           </a:p>
@@ -10703,8 +14609,100 @@
         </p:nvSpPr>
         <p:spPr>
           <a:xfrm>
-            <a:off x="685800" y="6057900"/>
-            <a:ext cx="10820400" cy="0"/>
+            <a:off x="1162050" y="3362325"/>
+            <a:ext cx="6610350" cy="0"/>
+          </a:xfrm>
+          <a:prstGeom prst="line">
+            <a:avLst/>
+          </a:prstGeom>
+          <a:noFill/>
+          <a:ln w="12700">
+            <a:solidFill>
+              <a:srgbClr val="182838"/>
+            </a:solidFill>
+            <a:prstDash val="solid"/>
+          </a:ln>
+        </p:spPr>
+      </p:sp>
+      <p:sp>
+        <p:nvSpPr>
+          <p:cNvPr id="16" name="Shape 14"/>
+          <p:cNvSpPr/>
+          <p:nvPr/>
+        </p:nvSpPr>
+        <p:spPr>
+          <a:xfrm>
+            <a:off x="1162050" y="3800475"/>
+            <a:ext cx="6610350" cy="0"/>
+          </a:xfrm>
+          <a:prstGeom prst="line">
+            <a:avLst/>
+          </a:prstGeom>
+          <a:noFill/>
+          <a:ln w="12700">
+            <a:solidFill>
+              <a:srgbClr val="182838"/>
+            </a:solidFill>
+            <a:prstDash val="solid"/>
+          </a:ln>
+        </p:spPr>
+      </p:sp>
+      <p:sp>
+        <p:nvSpPr>
+          <p:cNvPr id="17" name="Shape 15"/>
+          <p:cNvSpPr/>
+          <p:nvPr/>
+        </p:nvSpPr>
+        <p:spPr>
+          <a:xfrm>
+            <a:off x="1162050" y="4238625"/>
+            <a:ext cx="6610350" cy="0"/>
+          </a:xfrm>
+          <a:prstGeom prst="line">
+            <a:avLst/>
+          </a:prstGeom>
+          <a:noFill/>
+          <a:ln w="12700">
+            <a:solidFill>
+              <a:srgbClr val="182838"/>
+            </a:solidFill>
+            <a:prstDash val="solid"/>
+          </a:ln>
+        </p:spPr>
+      </p:sp>
+      <p:sp>
+        <p:nvSpPr>
+          <p:cNvPr id="18" name="Shape 16"/>
+          <p:cNvSpPr/>
+          <p:nvPr/>
+        </p:nvSpPr>
+        <p:spPr>
+          <a:xfrm>
+            <a:off x="1162050" y="5114925"/>
+            <a:ext cx="6610350" cy="0"/>
+          </a:xfrm>
+          <a:prstGeom prst="line">
+            <a:avLst/>
+          </a:prstGeom>
+          <a:noFill/>
+          <a:ln w="12700">
+            <a:solidFill>
+              <a:srgbClr val="182838"/>
+            </a:solidFill>
+            <a:prstDash val="solid"/>
+          </a:ln>
+        </p:spPr>
+      </p:sp>
+      <p:sp>
+        <p:nvSpPr>
+          <p:cNvPr id="19" name="Shape 17"/>
+          <p:cNvSpPr/>
+          <p:nvPr/>
+        </p:nvSpPr>
+        <p:spPr>
+          <a:xfrm>
+            <a:off x="1162050" y="4676775"/>
+            <a:ext cx="6610350" cy="0"/>
           </a:xfrm>
           <a:prstGeom prst="line">
             <a:avLst/>
@@ -10717,6 +14715,2237 @@
             <a:prstDash val="solid"/>
           </a:ln>
         </p:spPr>
+      </p:sp>
+      <p:sp>
+        <p:nvSpPr>
+          <p:cNvPr id="20" name="Shape 18"/>
+          <p:cNvSpPr/>
+          <p:nvPr/>
+        </p:nvSpPr>
+        <p:spPr>
+          <a:xfrm>
+            <a:off x="1162050" y="3143250"/>
+            <a:ext cx="0" cy="2190750"/>
+          </a:xfrm>
+          <a:prstGeom prst="line">
+            <a:avLst/>
+          </a:prstGeom>
+          <a:noFill/>
+          <a:ln w="12700">
+            <a:solidFill>
+              <a:srgbClr val="22354A"/>
+            </a:solidFill>
+            <a:prstDash val="solid"/>
+          </a:ln>
+        </p:spPr>
+      </p:sp>
+      <p:sp>
+        <p:nvSpPr>
+          <p:cNvPr id="21" name="Text 19"/>
+          <p:cNvSpPr txBox="1"/>
+          <p:nvPr/>
+        </p:nvSpPr>
+        <p:spPr>
+          <a:xfrm>
+            <a:off x="800100" y="3286125"/>
+            <a:ext cx="304800" cy="123825"/>
+          </a:xfrm>
+          <a:prstGeom prst="rect">
+            <a:avLst/>
+          </a:prstGeom>
+          <a:noFill/>
+          <a:ln/>
+        </p:spPr>
+        <p:txBody>
+          <a:bodyPr wrap="square" lIns="0" tIns="0" rIns="0" bIns="0" rtlCol="0" anchor="t"/>
+          <a:lstStyle/>
+          <a:p>
+            <a:pPr algn="r" indent="0" marL="0">
+              <a:lnSpc>
+                <a:spcPts val="975"/>
+              </a:lnSpc>
+              <a:buNone/>
+            </a:pPr>
+            <a:r>
+              <a:rPr lang="en-US" sz="750" dirty="0">
+                <a:solidFill>
+                  <a:srgbClr val="63798F"/>
+                </a:solidFill>
+                <a:latin typeface="Consolas" pitchFamily="34" charset="0"/>
+                <a:ea typeface="Consolas" pitchFamily="34" charset="-122"/>
+                <a:cs typeface="Consolas" pitchFamily="34" charset="-120"/>
+              </a:rPr>
+              <a:t>+12</a:t>
+            </a:r>
+            <a:endParaRPr lang="en-US" sz="750" dirty="0"/>
+          </a:p>
+        </p:txBody>
+      </p:sp>
+      <p:sp>
+        <p:nvSpPr>
+          <p:cNvPr id="22" name="Text 20"/>
+          <p:cNvSpPr txBox="1"/>
+          <p:nvPr/>
+        </p:nvSpPr>
+        <p:spPr>
+          <a:xfrm>
+            <a:off x="800100" y="3724275"/>
+            <a:ext cx="304800" cy="123825"/>
+          </a:xfrm>
+          <a:prstGeom prst="rect">
+            <a:avLst/>
+          </a:prstGeom>
+          <a:noFill/>
+          <a:ln/>
+        </p:spPr>
+        <p:txBody>
+          <a:bodyPr wrap="square" lIns="0" tIns="0" rIns="0" bIns="0" rtlCol="0" anchor="t"/>
+          <a:lstStyle/>
+          <a:p>
+            <a:pPr algn="r" indent="0" marL="0">
+              <a:lnSpc>
+                <a:spcPts val="975"/>
+              </a:lnSpc>
+              <a:buNone/>
+            </a:pPr>
+            <a:r>
+              <a:rPr lang="en-US" sz="750" dirty="0">
+                <a:solidFill>
+                  <a:srgbClr val="63798F"/>
+                </a:solidFill>
+                <a:latin typeface="Consolas" pitchFamily="34" charset="0"/>
+                <a:ea typeface="Consolas" pitchFamily="34" charset="-122"/>
+                <a:cs typeface="Consolas" pitchFamily="34" charset="-120"/>
+              </a:rPr>
+              <a:t>+8</a:t>
+            </a:r>
+            <a:endParaRPr lang="en-US" sz="750" dirty="0"/>
+          </a:p>
+        </p:txBody>
+      </p:sp>
+      <p:sp>
+        <p:nvSpPr>
+          <p:cNvPr id="23" name="Text 21"/>
+          <p:cNvSpPr txBox="1"/>
+          <p:nvPr/>
+        </p:nvSpPr>
+        <p:spPr>
+          <a:xfrm>
+            <a:off x="800100" y="4162425"/>
+            <a:ext cx="304800" cy="123825"/>
+          </a:xfrm>
+          <a:prstGeom prst="rect">
+            <a:avLst/>
+          </a:prstGeom>
+          <a:noFill/>
+          <a:ln/>
+        </p:spPr>
+        <p:txBody>
+          <a:bodyPr wrap="square" lIns="0" tIns="0" rIns="0" bIns="0" rtlCol="0" anchor="t"/>
+          <a:lstStyle/>
+          <a:p>
+            <a:pPr algn="r" indent="0" marL="0">
+              <a:lnSpc>
+                <a:spcPts val="975"/>
+              </a:lnSpc>
+              <a:buNone/>
+            </a:pPr>
+            <a:r>
+              <a:rPr lang="en-US" sz="750" dirty="0">
+                <a:solidFill>
+                  <a:srgbClr val="63798F"/>
+                </a:solidFill>
+                <a:latin typeface="Consolas" pitchFamily="34" charset="0"/>
+                <a:ea typeface="Consolas" pitchFamily="34" charset="-122"/>
+                <a:cs typeface="Consolas" pitchFamily="34" charset="-120"/>
+              </a:rPr>
+              <a:t>+4</a:t>
+            </a:r>
+            <a:endParaRPr lang="en-US" sz="750" dirty="0"/>
+          </a:p>
+        </p:txBody>
+      </p:sp>
+      <p:sp>
+        <p:nvSpPr>
+          <p:cNvPr id="24" name="Text 22"/>
+          <p:cNvSpPr txBox="1"/>
+          <p:nvPr/>
+        </p:nvSpPr>
+        <p:spPr>
+          <a:xfrm>
+            <a:off x="800100" y="4600575"/>
+            <a:ext cx="304800" cy="123825"/>
+          </a:xfrm>
+          <a:prstGeom prst="rect">
+            <a:avLst/>
+          </a:prstGeom>
+          <a:noFill/>
+          <a:ln/>
+        </p:spPr>
+        <p:txBody>
+          <a:bodyPr wrap="square" lIns="0" tIns="0" rIns="0" bIns="0" rtlCol="0" anchor="t"/>
+          <a:lstStyle/>
+          <a:p>
+            <a:pPr algn="r" indent="0" marL="0">
+              <a:lnSpc>
+                <a:spcPts val="975"/>
+              </a:lnSpc>
+              <a:buNone/>
+            </a:pPr>
+            <a:r>
+              <a:rPr lang="en-US" sz="750" dirty="0">
+                <a:solidFill>
+                  <a:srgbClr val="63798F"/>
+                </a:solidFill>
+                <a:latin typeface="Consolas" pitchFamily="34" charset="0"/>
+                <a:ea typeface="Consolas" pitchFamily="34" charset="-122"/>
+                <a:cs typeface="Consolas" pitchFamily="34" charset="-120"/>
+              </a:rPr>
+              <a:t>0</a:t>
+            </a:r>
+            <a:endParaRPr lang="en-US" sz="750" dirty="0"/>
+          </a:p>
+        </p:txBody>
+      </p:sp>
+      <p:sp>
+        <p:nvSpPr>
+          <p:cNvPr id="25" name="Text 23"/>
+          <p:cNvSpPr txBox="1"/>
+          <p:nvPr/>
+        </p:nvSpPr>
+        <p:spPr>
+          <a:xfrm>
+            <a:off x="800100" y="5038725"/>
+            <a:ext cx="304800" cy="123825"/>
+          </a:xfrm>
+          <a:prstGeom prst="rect">
+            <a:avLst/>
+          </a:prstGeom>
+          <a:noFill/>
+          <a:ln/>
+        </p:spPr>
+        <p:txBody>
+          <a:bodyPr wrap="square" lIns="0" tIns="0" rIns="0" bIns="0" rtlCol="0" anchor="t"/>
+          <a:lstStyle/>
+          <a:p>
+            <a:pPr algn="r" indent="0" marL="0">
+              <a:lnSpc>
+                <a:spcPts val="975"/>
+              </a:lnSpc>
+              <a:buNone/>
+            </a:pPr>
+            <a:r>
+              <a:rPr lang="en-US" sz="750" dirty="0">
+                <a:solidFill>
+                  <a:srgbClr val="63798F"/>
+                </a:solidFill>
+                <a:latin typeface="Consolas" pitchFamily="34" charset="0"/>
+                <a:ea typeface="Consolas" pitchFamily="34" charset="-122"/>
+                <a:cs typeface="Consolas" pitchFamily="34" charset="-120"/>
+              </a:rPr>
+              <a:t>-4</a:t>
+            </a:r>
+            <a:endParaRPr lang="en-US" sz="750" dirty="0"/>
+          </a:p>
+        </p:txBody>
+      </p:sp>
+      <p:sp>
+        <p:nvSpPr>
+          <p:cNvPr id="26" name="Shape 24"/>
+          <p:cNvSpPr/>
+          <p:nvPr/>
+        </p:nvSpPr>
+        <p:spPr>
+          <a:xfrm>
+            <a:off x="1501045" y="5334000"/>
+            <a:ext cx="0" cy="47625"/>
+          </a:xfrm>
+          <a:prstGeom prst="line">
+            <a:avLst/>
+          </a:prstGeom>
+          <a:noFill/>
+          <a:ln w="12700">
+            <a:solidFill>
+              <a:srgbClr val="63798F"/>
+            </a:solidFill>
+            <a:prstDash val="solid"/>
+          </a:ln>
+        </p:spPr>
+      </p:sp>
+      <p:sp>
+        <p:nvSpPr>
+          <p:cNvPr id="27" name="Text 25"/>
+          <p:cNvSpPr txBox="1"/>
+          <p:nvPr/>
+        </p:nvSpPr>
+        <p:spPr>
+          <a:xfrm>
+            <a:off x="1272445" y="5410200"/>
+            <a:ext cx="457200" cy="123825"/>
+          </a:xfrm>
+          <a:prstGeom prst="rect">
+            <a:avLst/>
+          </a:prstGeom>
+          <a:noFill/>
+          <a:ln/>
+        </p:spPr>
+        <p:txBody>
+          <a:bodyPr wrap="square" lIns="0" tIns="0" rIns="0" bIns="0" rtlCol="0" anchor="t"/>
+          <a:lstStyle/>
+          <a:p>
+            <a:pPr algn="ctr" indent="0" marL="0">
+              <a:lnSpc>
+                <a:spcPts val="975"/>
+              </a:lnSpc>
+              <a:buNone/>
+            </a:pPr>
+            <a:r>
+              <a:rPr lang="en-US" sz="750" dirty="0">
+                <a:solidFill>
+                  <a:srgbClr val="63798F"/>
+                </a:solidFill>
+                <a:latin typeface="Consolas" pitchFamily="34" charset="0"/>
+                <a:ea typeface="Consolas" pitchFamily="34" charset="-122"/>
+                <a:cs typeface="Consolas" pitchFamily="34" charset="-120"/>
+              </a:rPr>
+              <a:t>0℃</a:t>
+            </a:r>
+            <a:endParaRPr lang="en-US" sz="750" dirty="0"/>
+          </a:p>
+        </p:txBody>
+      </p:sp>
+      <p:sp>
+        <p:nvSpPr>
+          <p:cNvPr id="28" name="Shape 26"/>
+          <p:cNvSpPr/>
+          <p:nvPr/>
+        </p:nvSpPr>
+        <p:spPr>
+          <a:xfrm>
+            <a:off x="3196019" y="5334000"/>
+            <a:ext cx="0" cy="47625"/>
+          </a:xfrm>
+          <a:prstGeom prst="line">
+            <a:avLst/>
+          </a:prstGeom>
+          <a:noFill/>
+          <a:ln w="12700">
+            <a:solidFill>
+              <a:srgbClr val="63798F"/>
+            </a:solidFill>
+            <a:prstDash val="solid"/>
+          </a:ln>
+        </p:spPr>
+      </p:sp>
+      <p:sp>
+        <p:nvSpPr>
+          <p:cNvPr id="29" name="Text 27"/>
+          <p:cNvSpPr txBox="1"/>
+          <p:nvPr/>
+        </p:nvSpPr>
+        <p:spPr>
+          <a:xfrm>
+            <a:off x="2967419" y="5410200"/>
+            <a:ext cx="457200" cy="123825"/>
+          </a:xfrm>
+          <a:prstGeom prst="rect">
+            <a:avLst/>
+          </a:prstGeom>
+          <a:noFill/>
+          <a:ln/>
+        </p:spPr>
+        <p:txBody>
+          <a:bodyPr wrap="square" lIns="0" tIns="0" rIns="0" bIns="0" rtlCol="0" anchor="t"/>
+          <a:lstStyle/>
+          <a:p>
+            <a:pPr algn="ctr" indent="0" marL="0">
+              <a:lnSpc>
+                <a:spcPts val="975"/>
+              </a:lnSpc>
+              <a:buNone/>
+            </a:pPr>
+            <a:r>
+              <a:rPr lang="en-US" sz="750" dirty="0">
+                <a:solidFill>
+                  <a:srgbClr val="63798F"/>
+                </a:solidFill>
+                <a:latin typeface="Consolas" pitchFamily="34" charset="0"/>
+                <a:ea typeface="Consolas" pitchFamily="34" charset="-122"/>
+                <a:cs typeface="Consolas" pitchFamily="34" charset="-120"/>
+              </a:rPr>
+              <a:t>10</a:t>
+            </a:r>
+            <a:endParaRPr lang="en-US" sz="750" dirty="0"/>
+          </a:p>
+        </p:txBody>
+      </p:sp>
+      <p:sp>
+        <p:nvSpPr>
+          <p:cNvPr id="30" name="Shape 28"/>
+          <p:cNvSpPr/>
+          <p:nvPr/>
+        </p:nvSpPr>
+        <p:spPr>
+          <a:xfrm>
+            <a:off x="4890992" y="5334000"/>
+            <a:ext cx="0" cy="47625"/>
+          </a:xfrm>
+          <a:prstGeom prst="line">
+            <a:avLst/>
+          </a:prstGeom>
+          <a:noFill/>
+          <a:ln w="12700">
+            <a:solidFill>
+              <a:srgbClr val="63798F"/>
+            </a:solidFill>
+            <a:prstDash val="solid"/>
+          </a:ln>
+        </p:spPr>
+      </p:sp>
+      <p:sp>
+        <p:nvSpPr>
+          <p:cNvPr id="31" name="Text 29"/>
+          <p:cNvSpPr txBox="1"/>
+          <p:nvPr/>
+        </p:nvSpPr>
+        <p:spPr>
+          <a:xfrm>
+            <a:off x="4662392" y="5410200"/>
+            <a:ext cx="457200" cy="123825"/>
+          </a:xfrm>
+          <a:prstGeom prst="rect">
+            <a:avLst/>
+          </a:prstGeom>
+          <a:noFill/>
+          <a:ln/>
+        </p:spPr>
+        <p:txBody>
+          <a:bodyPr wrap="square" lIns="0" tIns="0" rIns="0" bIns="0" rtlCol="0" anchor="t"/>
+          <a:lstStyle/>
+          <a:p>
+            <a:pPr algn="ctr" indent="0" marL="0">
+              <a:lnSpc>
+                <a:spcPts val="975"/>
+              </a:lnSpc>
+              <a:buNone/>
+            </a:pPr>
+            <a:r>
+              <a:rPr lang="en-US" sz="750" dirty="0">
+                <a:solidFill>
+                  <a:srgbClr val="63798F"/>
+                </a:solidFill>
+                <a:latin typeface="Consolas" pitchFamily="34" charset="0"/>
+                <a:ea typeface="Consolas" pitchFamily="34" charset="-122"/>
+                <a:cs typeface="Consolas" pitchFamily="34" charset="-120"/>
+              </a:rPr>
+              <a:t>20</a:t>
+            </a:r>
+            <a:endParaRPr lang="en-US" sz="750" dirty="0"/>
+          </a:p>
+        </p:txBody>
+      </p:sp>
+      <p:sp>
+        <p:nvSpPr>
+          <p:cNvPr id="32" name="Shape 30"/>
+          <p:cNvSpPr/>
+          <p:nvPr/>
+        </p:nvSpPr>
+        <p:spPr>
+          <a:xfrm>
+            <a:off x="6585966" y="5334000"/>
+            <a:ext cx="0" cy="47625"/>
+          </a:xfrm>
+          <a:prstGeom prst="line">
+            <a:avLst/>
+          </a:prstGeom>
+          <a:noFill/>
+          <a:ln w="12700">
+            <a:solidFill>
+              <a:srgbClr val="63798F"/>
+            </a:solidFill>
+            <a:prstDash val="solid"/>
+          </a:ln>
+        </p:spPr>
+      </p:sp>
+      <p:sp>
+        <p:nvSpPr>
+          <p:cNvPr id="33" name="Text 31"/>
+          <p:cNvSpPr txBox="1"/>
+          <p:nvPr/>
+        </p:nvSpPr>
+        <p:spPr>
+          <a:xfrm>
+            <a:off x="6357366" y="5410200"/>
+            <a:ext cx="457200" cy="123825"/>
+          </a:xfrm>
+          <a:prstGeom prst="rect">
+            <a:avLst/>
+          </a:prstGeom>
+          <a:noFill/>
+          <a:ln/>
+        </p:spPr>
+        <p:txBody>
+          <a:bodyPr wrap="square" lIns="0" tIns="0" rIns="0" bIns="0" rtlCol="0" anchor="t"/>
+          <a:lstStyle/>
+          <a:p>
+            <a:pPr algn="ctr" indent="0" marL="0">
+              <a:lnSpc>
+                <a:spcPts val="975"/>
+              </a:lnSpc>
+              <a:buNone/>
+            </a:pPr>
+            <a:r>
+              <a:rPr lang="en-US" sz="750" dirty="0">
+                <a:solidFill>
+                  <a:srgbClr val="63798F"/>
+                </a:solidFill>
+                <a:latin typeface="Consolas" pitchFamily="34" charset="0"/>
+                <a:ea typeface="Consolas" pitchFamily="34" charset="-122"/>
+                <a:cs typeface="Consolas" pitchFamily="34" charset="-120"/>
+              </a:rPr>
+              <a:t>30</a:t>
+            </a:r>
+            <a:endParaRPr lang="en-US" sz="750" dirty="0"/>
+          </a:p>
+        </p:txBody>
+      </p:sp>
+      <p:sp>
+        <p:nvSpPr>
+          <p:cNvPr id="34" name="Shape 32"/>
+          <p:cNvSpPr/>
+          <p:nvPr/>
+        </p:nvSpPr>
+        <p:spPr>
+          <a:xfrm>
+            <a:off x="1162050" y="4365689"/>
+            <a:ext cx="6610350" cy="0"/>
+          </a:xfrm>
+          <a:prstGeom prst="line">
+            <a:avLst/>
+          </a:prstGeom>
+          <a:noFill/>
+          <a:ln w="33020">
+            <a:solidFill>
+              <a:srgbClr val="8CA3BC"/>
+            </a:solidFill>
+            <a:prstDash val="dash"/>
+          </a:ln>
+        </p:spPr>
+      </p:sp>
+      <p:sp>
+        <p:nvSpPr>
+          <p:cNvPr id="35" name="Text 33"/>
+          <p:cNvSpPr txBox="1"/>
+          <p:nvPr/>
+        </p:nvSpPr>
+        <p:spPr>
+          <a:xfrm>
+            <a:off x="5905500" y="4156139"/>
+            <a:ext cx="1866900" cy="142399"/>
+          </a:xfrm>
+          <a:prstGeom prst="rect">
+            <a:avLst/>
+          </a:prstGeom>
+          <a:noFill/>
+          <a:ln/>
+        </p:spPr>
+        <p:txBody>
+          <a:bodyPr wrap="square" lIns="0" tIns="0" rIns="0" bIns="0" rtlCol="0" anchor="t"/>
+          <a:lstStyle/>
+          <a:p>
+            <a:pPr algn="r" indent="0" marL="0">
+              <a:lnSpc>
+                <a:spcPts val="1121"/>
+              </a:lnSpc>
+              <a:buNone/>
+            </a:pPr>
+            <a:r>
+              <a:rPr lang="en-US" sz="863" b="1" dirty="0">
+                <a:solidFill>
+                  <a:srgbClr val="8CA3BC"/>
+                </a:solidFill>
+                <a:latin typeface="Consolas" pitchFamily="34" charset="0"/>
+                <a:ea typeface="Consolas" pitchFamily="34" charset="-122"/>
+                <a:cs typeface="Consolas" pitchFamily="34" charset="-120"/>
+              </a:rPr>
+              <a:t>종전 · 하나의 값 +2.84</a:t>
+            </a:r>
+            <a:endParaRPr lang="en-US" sz="863" dirty="0"/>
+          </a:p>
+        </p:txBody>
+      </p:sp>
+      <p:sp>
+        <p:nvSpPr>
+          <p:cNvPr id="36" name="Shape 34"/>
+          <p:cNvSpPr/>
+          <p:nvPr/>
+        </p:nvSpPr>
+        <p:spPr>
+          <a:xfrm>
+            <a:off x="1131375" y="3210639"/>
+            <a:ext cx="95250" cy="95250"/>
+          </a:xfrm>
+          <a:prstGeom prst="ellipse">
+            <a:avLst/>
+          </a:prstGeom>
+          <a:solidFill>
+            <a:srgbClr val="FF4D63"/>
+          </a:solidFill>
+          <a:ln/>
+        </p:spPr>
+      </p:sp>
+      <p:sp>
+        <p:nvSpPr>
+          <p:cNvPr id="37" name="Shape 35"/>
+          <p:cNvSpPr/>
+          <p:nvPr/>
+        </p:nvSpPr>
+        <p:spPr>
+          <a:xfrm>
+            <a:off x="1216123" y="3263217"/>
+            <a:ext cx="95250" cy="95250"/>
+          </a:xfrm>
+          <a:prstGeom prst="ellipse">
+            <a:avLst/>
+          </a:prstGeom>
+          <a:solidFill>
+            <a:srgbClr val="FF4D63"/>
+          </a:solidFill>
+          <a:ln/>
+        </p:spPr>
+      </p:sp>
+      <p:sp>
+        <p:nvSpPr>
+          <p:cNvPr id="38" name="Shape 36"/>
+          <p:cNvSpPr/>
+          <p:nvPr/>
+        </p:nvSpPr>
+        <p:spPr>
+          <a:xfrm>
+            <a:off x="1788800" y="3680746"/>
+            <a:ext cx="68580" cy="68580"/>
+          </a:xfrm>
+          <a:prstGeom prst="ellipse">
+            <a:avLst/>
+          </a:prstGeom>
+          <a:solidFill>
+            <a:srgbClr val="BCC9D6"/>
+          </a:solidFill>
+          <a:ln/>
+        </p:spPr>
+      </p:sp>
+      <p:sp>
+        <p:nvSpPr>
+          <p:cNvPr id="39" name="Shape 37"/>
+          <p:cNvSpPr/>
+          <p:nvPr/>
+        </p:nvSpPr>
+        <p:spPr>
+          <a:xfrm>
+            <a:off x="2127795" y="4017026"/>
+            <a:ext cx="68580" cy="68580"/>
+          </a:xfrm>
+          <a:prstGeom prst="ellipse">
+            <a:avLst/>
+          </a:prstGeom>
+          <a:solidFill>
+            <a:srgbClr val="BCC9D6"/>
+          </a:solidFill>
+          <a:ln/>
+        </p:spPr>
+      </p:sp>
+      <p:sp>
+        <p:nvSpPr>
+          <p:cNvPr id="40" name="Shape 38"/>
+          <p:cNvSpPr/>
+          <p:nvPr/>
+        </p:nvSpPr>
+        <p:spPr>
+          <a:xfrm>
+            <a:off x="2483739" y="4047696"/>
+            <a:ext cx="68580" cy="68580"/>
+          </a:xfrm>
+          <a:prstGeom prst="ellipse">
+            <a:avLst/>
+          </a:prstGeom>
+          <a:solidFill>
+            <a:srgbClr val="BCC9D6"/>
+          </a:solidFill>
+          <a:ln/>
+        </p:spPr>
+      </p:sp>
+      <p:sp>
+        <p:nvSpPr>
+          <p:cNvPr id="41" name="Shape 39"/>
+          <p:cNvSpPr/>
+          <p:nvPr/>
+        </p:nvSpPr>
+        <p:spPr>
+          <a:xfrm>
+            <a:off x="2653236" y="4096988"/>
+            <a:ext cx="68580" cy="68580"/>
+          </a:xfrm>
+          <a:prstGeom prst="ellipse">
+            <a:avLst/>
+          </a:prstGeom>
+          <a:solidFill>
+            <a:srgbClr val="BCC9D6"/>
+          </a:solidFill>
+          <a:ln/>
+        </p:spPr>
+      </p:sp>
+      <p:sp>
+        <p:nvSpPr>
+          <p:cNvPr id="42" name="Shape 40"/>
+          <p:cNvSpPr/>
+          <p:nvPr/>
+        </p:nvSpPr>
+        <p:spPr>
+          <a:xfrm>
+            <a:off x="2822734" y="4144089"/>
+            <a:ext cx="68580" cy="68580"/>
+          </a:xfrm>
+          <a:prstGeom prst="ellipse">
+            <a:avLst/>
+          </a:prstGeom>
+          <a:solidFill>
+            <a:srgbClr val="BCC9D6"/>
+          </a:solidFill>
+          <a:ln/>
+        </p:spPr>
+      </p:sp>
+      <p:sp>
+        <p:nvSpPr>
+          <p:cNvPr id="43" name="Shape 41"/>
+          <p:cNvSpPr/>
+          <p:nvPr/>
+        </p:nvSpPr>
+        <p:spPr>
+          <a:xfrm>
+            <a:off x="2975281" y="3958971"/>
+            <a:ext cx="68580" cy="68580"/>
+          </a:xfrm>
+          <a:prstGeom prst="ellipse">
+            <a:avLst/>
+          </a:prstGeom>
+          <a:solidFill>
+            <a:srgbClr val="BCC9D6"/>
+          </a:solidFill>
+          <a:ln/>
+        </p:spPr>
+      </p:sp>
+      <p:sp>
+        <p:nvSpPr>
+          <p:cNvPr id="44" name="Shape 42"/>
+          <p:cNvSpPr/>
+          <p:nvPr/>
+        </p:nvSpPr>
+        <p:spPr>
+          <a:xfrm>
+            <a:off x="3076980" y="4241578"/>
+            <a:ext cx="68580" cy="68580"/>
+          </a:xfrm>
+          <a:prstGeom prst="ellipse">
+            <a:avLst/>
+          </a:prstGeom>
+          <a:solidFill>
+            <a:srgbClr val="BCC9D6"/>
+          </a:solidFill>
+          <a:ln/>
+        </p:spPr>
+      </p:sp>
+      <p:sp>
+        <p:nvSpPr>
+          <p:cNvPr id="45" name="Shape 43"/>
+          <p:cNvSpPr/>
+          <p:nvPr/>
+        </p:nvSpPr>
+        <p:spPr>
+          <a:xfrm>
+            <a:off x="3365125" y="4079462"/>
+            <a:ext cx="68580" cy="68580"/>
+          </a:xfrm>
+          <a:prstGeom prst="ellipse">
+            <a:avLst/>
+          </a:prstGeom>
+          <a:solidFill>
+            <a:srgbClr val="BCC9D6"/>
+          </a:solidFill>
+          <a:ln/>
+        </p:spPr>
+      </p:sp>
+      <p:sp>
+        <p:nvSpPr>
+          <p:cNvPr id="46" name="Shape 44"/>
+          <p:cNvSpPr/>
+          <p:nvPr/>
+        </p:nvSpPr>
+        <p:spPr>
+          <a:xfrm>
+            <a:off x="3619371" y="4113419"/>
+            <a:ext cx="68580" cy="68580"/>
+          </a:xfrm>
+          <a:prstGeom prst="ellipse">
+            <a:avLst/>
+          </a:prstGeom>
+          <a:solidFill>
+            <a:srgbClr val="BCC9D6"/>
+          </a:solidFill>
+          <a:ln/>
+        </p:spPr>
+      </p:sp>
+      <p:sp>
+        <p:nvSpPr>
+          <p:cNvPr id="47" name="Shape 45"/>
+          <p:cNvSpPr/>
+          <p:nvPr/>
+        </p:nvSpPr>
+        <p:spPr>
+          <a:xfrm>
+            <a:off x="3670221" y="3884486"/>
+            <a:ext cx="68580" cy="68580"/>
+          </a:xfrm>
+          <a:prstGeom prst="ellipse">
+            <a:avLst/>
+          </a:prstGeom>
+          <a:solidFill>
+            <a:srgbClr val="BCC9D6"/>
+          </a:solidFill>
+          <a:ln/>
+        </p:spPr>
+      </p:sp>
+      <p:sp>
+        <p:nvSpPr>
+          <p:cNvPr id="48" name="Shape 46"/>
+          <p:cNvSpPr/>
+          <p:nvPr/>
+        </p:nvSpPr>
+        <p:spPr>
+          <a:xfrm>
+            <a:off x="3721070" y="3932682"/>
+            <a:ext cx="68580" cy="68580"/>
+          </a:xfrm>
+          <a:prstGeom prst="ellipse">
+            <a:avLst/>
+          </a:prstGeom>
+          <a:solidFill>
+            <a:srgbClr val="BCC9D6"/>
+          </a:solidFill>
+          <a:ln/>
+        </p:spPr>
+      </p:sp>
+      <p:sp>
+        <p:nvSpPr>
+          <p:cNvPr id="49" name="Shape 47"/>
+          <p:cNvSpPr/>
+          <p:nvPr/>
+        </p:nvSpPr>
+        <p:spPr>
+          <a:xfrm>
+            <a:off x="3907517" y="3837384"/>
+            <a:ext cx="68580" cy="68580"/>
+          </a:xfrm>
+          <a:prstGeom prst="ellipse">
+            <a:avLst/>
+          </a:prstGeom>
+          <a:solidFill>
+            <a:srgbClr val="BCC9D6"/>
+          </a:solidFill>
+          <a:ln/>
+        </p:spPr>
+      </p:sp>
+      <p:sp>
+        <p:nvSpPr>
+          <p:cNvPr id="50" name="Shape 48"/>
+          <p:cNvSpPr/>
+          <p:nvPr/>
+        </p:nvSpPr>
+        <p:spPr>
+          <a:xfrm>
+            <a:off x="3924467" y="3984165"/>
+            <a:ext cx="68580" cy="68580"/>
+          </a:xfrm>
+          <a:prstGeom prst="ellipse">
+            <a:avLst/>
+          </a:prstGeom>
+          <a:solidFill>
+            <a:srgbClr val="BCC9D6"/>
+          </a:solidFill>
+          <a:ln/>
+        </p:spPr>
+      </p:sp>
+      <p:sp>
+        <p:nvSpPr>
+          <p:cNvPr id="51" name="Shape 49"/>
+          <p:cNvSpPr/>
+          <p:nvPr/>
+        </p:nvSpPr>
+        <p:spPr>
+          <a:xfrm>
+            <a:off x="4026165" y="4030170"/>
+            <a:ext cx="68580" cy="68580"/>
+          </a:xfrm>
+          <a:prstGeom prst="ellipse">
+            <a:avLst/>
+          </a:prstGeom>
+          <a:solidFill>
+            <a:srgbClr val="BCC9D6"/>
+          </a:solidFill>
+          <a:ln/>
+        </p:spPr>
+      </p:sp>
+      <p:sp>
+        <p:nvSpPr>
+          <p:cNvPr id="52" name="Shape 50"/>
+          <p:cNvSpPr/>
+          <p:nvPr/>
+        </p:nvSpPr>
+        <p:spPr>
+          <a:xfrm>
+            <a:off x="4280411" y="4054269"/>
+            <a:ext cx="68580" cy="68580"/>
+          </a:xfrm>
+          <a:prstGeom prst="ellipse">
+            <a:avLst/>
+          </a:prstGeom>
+          <a:solidFill>
+            <a:srgbClr val="BCC9D6"/>
+          </a:solidFill>
+          <a:ln/>
+        </p:spPr>
+      </p:sp>
+      <p:sp>
+        <p:nvSpPr>
+          <p:cNvPr id="53" name="Shape 51"/>
+          <p:cNvSpPr/>
+          <p:nvPr/>
+        </p:nvSpPr>
+        <p:spPr>
+          <a:xfrm>
+            <a:off x="4297361" y="4018121"/>
+            <a:ext cx="68580" cy="68580"/>
+          </a:xfrm>
+          <a:prstGeom prst="ellipse">
+            <a:avLst/>
+          </a:prstGeom>
+          <a:solidFill>
+            <a:srgbClr val="BCC9D6"/>
+          </a:solidFill>
+          <a:ln/>
+        </p:spPr>
+      </p:sp>
+      <p:sp>
+        <p:nvSpPr>
+          <p:cNvPr id="54" name="Shape 52"/>
+          <p:cNvSpPr/>
+          <p:nvPr/>
+        </p:nvSpPr>
+        <p:spPr>
+          <a:xfrm>
+            <a:off x="5077049" y="4355497"/>
+            <a:ext cx="68580" cy="68580"/>
+          </a:xfrm>
+          <a:prstGeom prst="ellipse">
+            <a:avLst/>
+          </a:prstGeom>
+          <a:solidFill>
+            <a:srgbClr val="BCC9D6"/>
+          </a:solidFill>
+          <a:ln/>
+        </p:spPr>
+      </p:sp>
+      <p:sp>
+        <p:nvSpPr>
+          <p:cNvPr id="55" name="Shape 53"/>
+          <p:cNvSpPr/>
+          <p:nvPr/>
+        </p:nvSpPr>
+        <p:spPr>
+          <a:xfrm>
+            <a:off x="5721139" y="4873609"/>
+            <a:ext cx="68580" cy="68580"/>
+          </a:xfrm>
+          <a:prstGeom prst="ellipse">
+            <a:avLst/>
+          </a:prstGeom>
+          <a:solidFill>
+            <a:srgbClr val="BCC9D6"/>
+          </a:solidFill>
+          <a:ln/>
+        </p:spPr>
+      </p:sp>
+      <p:sp>
+        <p:nvSpPr>
+          <p:cNvPr id="56" name="Shape 54"/>
+          <p:cNvSpPr/>
+          <p:nvPr/>
+        </p:nvSpPr>
+        <p:spPr>
+          <a:xfrm>
+            <a:off x="5755038" y="5001768"/>
+            <a:ext cx="68580" cy="68580"/>
+          </a:xfrm>
+          <a:prstGeom prst="ellipse">
+            <a:avLst/>
+          </a:prstGeom>
+          <a:solidFill>
+            <a:srgbClr val="BCC9D6"/>
+          </a:solidFill>
+          <a:ln/>
+        </p:spPr>
+      </p:sp>
+      <p:sp>
+        <p:nvSpPr>
+          <p:cNvPr id="57" name="Shape 55"/>
+          <p:cNvSpPr/>
+          <p:nvPr/>
+        </p:nvSpPr>
+        <p:spPr>
+          <a:xfrm>
+            <a:off x="5771988" y="4706017"/>
+            <a:ext cx="68580" cy="68580"/>
+          </a:xfrm>
+          <a:prstGeom prst="ellipse">
+            <a:avLst/>
+          </a:prstGeom>
+          <a:solidFill>
+            <a:srgbClr val="BCC9D6"/>
+          </a:solidFill>
+          <a:ln/>
+        </p:spPr>
+      </p:sp>
+      <p:sp>
+        <p:nvSpPr>
+          <p:cNvPr id="58" name="Shape 56"/>
+          <p:cNvSpPr/>
+          <p:nvPr/>
+        </p:nvSpPr>
+        <p:spPr>
+          <a:xfrm>
+            <a:off x="5822837" y="4719161"/>
+            <a:ext cx="68580" cy="68580"/>
+          </a:xfrm>
+          <a:prstGeom prst="ellipse">
+            <a:avLst/>
+          </a:prstGeom>
+          <a:solidFill>
+            <a:srgbClr val="BCC9D6"/>
+          </a:solidFill>
+          <a:ln/>
+        </p:spPr>
+      </p:sp>
+      <p:sp>
+        <p:nvSpPr>
+          <p:cNvPr id="59" name="Shape 57"/>
+          <p:cNvSpPr/>
+          <p:nvPr/>
+        </p:nvSpPr>
+        <p:spPr>
+          <a:xfrm>
+            <a:off x="6110983" y="4934950"/>
+            <a:ext cx="68580" cy="68580"/>
+          </a:xfrm>
+          <a:prstGeom prst="ellipse">
+            <a:avLst/>
+          </a:prstGeom>
+          <a:solidFill>
+            <a:srgbClr val="BCC9D6"/>
+          </a:solidFill>
+          <a:ln/>
+        </p:spPr>
+      </p:sp>
+      <p:sp>
+        <p:nvSpPr>
+          <p:cNvPr id="60" name="Shape 58"/>
+          <p:cNvSpPr/>
+          <p:nvPr/>
+        </p:nvSpPr>
+        <p:spPr>
+          <a:xfrm>
+            <a:off x="6317994" y="5161502"/>
+            <a:ext cx="95250" cy="95250"/>
+          </a:xfrm>
+          <a:prstGeom prst="ellipse">
+            <a:avLst/>
+          </a:prstGeom>
+          <a:solidFill>
+            <a:srgbClr val="FF4D63"/>
+          </a:solidFill>
+          <a:ln/>
+        </p:spPr>
+      </p:sp>
+      <p:sp>
+        <p:nvSpPr>
+          <p:cNvPr id="61" name="Shape 59"/>
+          <p:cNvSpPr/>
+          <p:nvPr/>
+        </p:nvSpPr>
+        <p:spPr>
+          <a:xfrm>
+            <a:off x="6585575" y="4817745"/>
+            <a:ext cx="68580" cy="68580"/>
+          </a:xfrm>
+          <a:prstGeom prst="ellipse">
+            <a:avLst/>
+          </a:prstGeom>
+          <a:solidFill>
+            <a:srgbClr val="BCC9D6"/>
+          </a:solidFill>
+          <a:ln/>
+        </p:spPr>
+      </p:sp>
+      <p:sp>
+        <p:nvSpPr>
+          <p:cNvPr id="62" name="Shape 60"/>
+          <p:cNvSpPr/>
+          <p:nvPr/>
+        </p:nvSpPr>
+        <p:spPr>
+          <a:xfrm>
+            <a:off x="6656989" y="5007054"/>
+            <a:ext cx="95250" cy="95250"/>
+          </a:xfrm>
+          <a:prstGeom prst="ellipse">
+            <a:avLst/>
+          </a:prstGeom>
+          <a:solidFill>
+            <a:srgbClr val="FF4D63"/>
+          </a:solidFill>
+          <a:ln/>
+        </p:spPr>
+      </p:sp>
+      <p:sp>
+        <p:nvSpPr>
+          <p:cNvPr id="63" name="Shape 61"/>
+          <p:cNvSpPr/>
+          <p:nvPr/>
+        </p:nvSpPr>
+        <p:spPr>
+          <a:xfrm>
+            <a:off x="6839822" y="4737783"/>
+            <a:ext cx="68580" cy="68580"/>
+          </a:xfrm>
+          <a:prstGeom prst="ellipse">
+            <a:avLst/>
+          </a:prstGeom>
+          <a:solidFill>
+            <a:srgbClr val="BCC9D6"/>
+          </a:solidFill>
+          <a:ln/>
+        </p:spPr>
+      </p:sp>
+      <p:sp>
+        <p:nvSpPr>
+          <p:cNvPr id="64" name="Shape 62"/>
+          <p:cNvSpPr/>
+          <p:nvPr/>
+        </p:nvSpPr>
+        <p:spPr>
+          <a:xfrm>
+            <a:off x="6958470" y="4710398"/>
+            <a:ext cx="68580" cy="68580"/>
+          </a:xfrm>
+          <a:prstGeom prst="ellipse">
+            <a:avLst/>
+          </a:prstGeom>
+          <a:solidFill>
+            <a:srgbClr val="BCC9D6"/>
+          </a:solidFill>
+          <a:ln/>
+        </p:spPr>
+      </p:sp>
+      <p:sp>
+        <p:nvSpPr>
+          <p:cNvPr id="65" name="Shape 63"/>
+          <p:cNvSpPr/>
+          <p:nvPr/>
+        </p:nvSpPr>
+        <p:spPr>
+          <a:xfrm>
+            <a:off x="7009319" y="4920710"/>
+            <a:ext cx="68580" cy="68580"/>
+          </a:xfrm>
+          <a:prstGeom prst="ellipse">
+            <a:avLst/>
+          </a:prstGeom>
+          <a:solidFill>
+            <a:srgbClr val="BCC9D6"/>
+          </a:solidFill>
+          <a:ln/>
+        </p:spPr>
+      </p:sp>
+      <p:sp>
+        <p:nvSpPr>
+          <p:cNvPr id="66" name="Shape 64"/>
+          <p:cNvSpPr/>
+          <p:nvPr/>
+        </p:nvSpPr>
+        <p:spPr>
+          <a:xfrm>
+            <a:off x="7026269" y="4490228"/>
+            <a:ext cx="68580" cy="68580"/>
+          </a:xfrm>
+          <a:prstGeom prst="ellipse">
+            <a:avLst/>
+          </a:prstGeom>
+          <a:solidFill>
+            <a:srgbClr val="BCC9D6"/>
+          </a:solidFill>
+          <a:ln/>
+        </p:spPr>
+      </p:sp>
+      <p:sp>
+        <p:nvSpPr>
+          <p:cNvPr id="67" name="Shape 65"/>
+          <p:cNvSpPr/>
+          <p:nvPr/>
+        </p:nvSpPr>
+        <p:spPr>
+          <a:xfrm>
+            <a:off x="7026269" y="4411361"/>
+            <a:ext cx="68580" cy="68580"/>
+          </a:xfrm>
+          <a:prstGeom prst="ellipse">
+            <a:avLst/>
+          </a:prstGeom>
+          <a:solidFill>
+            <a:srgbClr val="BCC9D6"/>
+          </a:solidFill>
+          <a:ln/>
+        </p:spPr>
+      </p:sp>
+      <p:sp>
+        <p:nvSpPr>
+          <p:cNvPr id="68" name="Shape 66"/>
+          <p:cNvSpPr/>
+          <p:nvPr/>
+        </p:nvSpPr>
+        <p:spPr>
+          <a:xfrm>
+            <a:off x="7161867" y="4568000"/>
+            <a:ext cx="68580" cy="68580"/>
+          </a:xfrm>
+          <a:prstGeom prst="ellipse">
+            <a:avLst/>
+          </a:prstGeom>
+          <a:solidFill>
+            <a:srgbClr val="BCC9D6"/>
+          </a:solidFill>
+          <a:ln/>
+        </p:spPr>
+      </p:sp>
+      <p:sp>
+        <p:nvSpPr>
+          <p:cNvPr id="69" name="Shape 67"/>
+          <p:cNvSpPr/>
+          <p:nvPr/>
+        </p:nvSpPr>
+        <p:spPr>
+          <a:xfrm>
+            <a:off x="7195766" y="4897707"/>
+            <a:ext cx="68580" cy="68580"/>
+          </a:xfrm>
+          <a:prstGeom prst="ellipse">
+            <a:avLst/>
+          </a:prstGeom>
+          <a:solidFill>
+            <a:srgbClr val="BCC9D6"/>
+          </a:solidFill>
+          <a:ln/>
+        </p:spPr>
+      </p:sp>
+      <p:sp>
+        <p:nvSpPr>
+          <p:cNvPr id="70" name="Shape 68"/>
+          <p:cNvSpPr/>
+          <p:nvPr/>
+        </p:nvSpPr>
+        <p:spPr>
+          <a:xfrm>
+            <a:off x="7331364" y="4561427"/>
+            <a:ext cx="68580" cy="68580"/>
+          </a:xfrm>
+          <a:prstGeom prst="ellipse">
+            <a:avLst/>
+          </a:prstGeom>
+          <a:solidFill>
+            <a:srgbClr val="BCC9D6"/>
+          </a:solidFill>
+          <a:ln/>
+        </p:spPr>
+      </p:sp>
+      <p:sp>
+        <p:nvSpPr>
+          <p:cNvPr id="71" name="Shape 69"/>
+          <p:cNvSpPr/>
+          <p:nvPr/>
+        </p:nvSpPr>
+        <p:spPr>
+          <a:xfrm>
+            <a:off x="7585610" y="4412456"/>
+            <a:ext cx="68580" cy="68580"/>
+          </a:xfrm>
+          <a:prstGeom prst="ellipse">
+            <a:avLst/>
+          </a:prstGeom>
+          <a:solidFill>
+            <a:srgbClr val="BCC9D6"/>
+          </a:solidFill>
+          <a:ln/>
+        </p:spPr>
+      </p:sp>
+      <p:sp>
+        <p:nvSpPr>
+          <p:cNvPr id="72" name="Text 70"/>
+          <p:cNvSpPr txBox="1"/>
+          <p:nvPr/>
+        </p:nvSpPr>
+        <p:spPr>
+          <a:xfrm>
+            <a:off x="1428750" y="3276600"/>
+            <a:ext cx="2381250" cy="166688"/>
+          </a:xfrm>
+          <a:prstGeom prst="rect">
+            <a:avLst/>
+          </a:prstGeom>
+          <a:noFill/>
+          <a:ln/>
+        </p:spPr>
+        <p:txBody>
+          <a:bodyPr wrap="square" lIns="0" tIns="0" rIns="0" bIns="0" rtlCol="0" anchor="t"/>
+          <a:lstStyle/>
+          <a:p>
+            <a:pPr algn="l" indent="0" marL="0">
+              <a:lnSpc>
+                <a:spcPts val="1313"/>
+              </a:lnSpc>
+              <a:buNone/>
+            </a:pPr>
+            <a:r>
+              <a:rPr lang="en-US" sz="938" dirty="0">
+                <a:solidFill>
+                  <a:srgbClr val="93A6BA"/>
+                </a:solidFill>
+                <a:latin typeface="Malgun Gothic" pitchFamily="34" charset="0"/>
+                <a:ea typeface="Malgun Gothic" pitchFamily="34" charset="-122"/>
+                <a:cs typeface="Malgun Gothic" pitchFamily="34" charset="-120"/>
+              </a:rPr>
+              <a:t>추울수록 크게 더해야 하고</a:t>
+            </a:r>
+            <a:endParaRPr lang="en-US" sz="938" dirty="0"/>
+          </a:p>
+        </p:txBody>
+      </p:sp>
+      <p:sp>
+        <p:nvSpPr>
+          <p:cNvPr id="73" name="Text 71"/>
+          <p:cNvSpPr txBox="1"/>
+          <p:nvPr/>
+        </p:nvSpPr>
+        <p:spPr>
+          <a:xfrm>
+            <a:off x="5676900" y="4876800"/>
+            <a:ext cx="2095500" cy="166688"/>
+          </a:xfrm>
+          <a:prstGeom prst="rect">
+            <a:avLst/>
+          </a:prstGeom>
+          <a:noFill/>
+          <a:ln/>
+        </p:spPr>
+        <p:txBody>
+          <a:bodyPr wrap="square" lIns="0" tIns="0" rIns="0" bIns="0" rtlCol="0" anchor="t"/>
+          <a:lstStyle/>
+          <a:p>
+            <a:pPr algn="r" indent="0" marL="0">
+              <a:lnSpc>
+                <a:spcPts val="1313"/>
+              </a:lnSpc>
+              <a:buNone/>
+            </a:pPr>
+            <a:r>
+              <a:rPr lang="en-US" sz="938" dirty="0">
+                <a:solidFill>
+                  <a:srgbClr val="93A6BA"/>
+                </a:solidFill>
+                <a:latin typeface="Malgun Gothic" pitchFamily="34" charset="0"/>
+                <a:ea typeface="Malgun Gothic" pitchFamily="34" charset="-122"/>
+                <a:cs typeface="Malgun Gothic" pitchFamily="34" charset="-120"/>
+              </a:rPr>
+              <a:t>더울수록 빼야 합니다</a:t>
+            </a:r>
+            <a:endParaRPr lang="en-US" sz="938" dirty="0"/>
+          </a:p>
+        </p:txBody>
+      </p:sp>
+      <p:sp>
+        <p:nvSpPr>
+          <p:cNvPr id="74" name="Shape 72"/>
+          <p:cNvSpPr/>
+          <p:nvPr/>
+        </p:nvSpPr>
+        <p:spPr>
+          <a:xfrm>
+            <a:off x="8115300" y="2705100"/>
+            <a:ext cx="3390900" cy="19050"/>
+          </a:xfrm>
+          <a:prstGeom prst="rect">
+            <a:avLst/>
+          </a:prstGeom>
+          <a:solidFill>
+            <a:srgbClr val="7E2333"/>
+          </a:solidFill>
+          <a:ln/>
+        </p:spPr>
+      </p:sp>
+      <p:sp>
+        <p:nvSpPr>
+          <p:cNvPr id="75" name="Text 73"/>
+          <p:cNvSpPr txBox="1"/>
+          <p:nvPr/>
+        </p:nvSpPr>
+        <p:spPr>
+          <a:xfrm>
+            <a:off x="8115300" y="2838450"/>
+            <a:ext cx="3390900" cy="125016"/>
+          </a:xfrm>
+          <a:prstGeom prst="rect">
+            <a:avLst/>
+          </a:prstGeom>
+          <a:noFill/>
+          <a:ln/>
+        </p:spPr>
+        <p:txBody>
+          <a:bodyPr wrap="square" lIns="0" tIns="0" rIns="0" bIns="0" rtlCol="0" anchor="t"/>
+          <a:lstStyle/>
+          <a:p>
+            <a:pPr algn="l" indent="0" marL="0">
+              <a:lnSpc>
+                <a:spcPts val="984"/>
+              </a:lnSpc>
+              <a:buNone/>
+            </a:pPr>
+            <a:r>
+              <a:rPr lang="en-US" sz="788" b="1" spc="150" kern="0" dirty="0">
+                <a:solidFill>
+                  <a:srgbClr val="63798F"/>
+                </a:solidFill>
+                <a:latin typeface="Consolas" pitchFamily="34" charset="0"/>
+                <a:ea typeface="Consolas" pitchFamily="34" charset="-122"/>
+                <a:cs typeface="Consolas" pitchFamily="34" charset="-120"/>
+              </a:rPr>
+              <a:t>종전 방식의 오차 상위 4회차  ·  MW</a:t>
+            </a:r>
+            <a:endParaRPr lang="en-US" sz="788" dirty="0"/>
+          </a:p>
+        </p:txBody>
+      </p:sp>
+      <p:sp>
+        <p:nvSpPr>
+          <p:cNvPr id="76" name="Shape 74"/>
+          <p:cNvSpPr/>
+          <p:nvPr/>
+        </p:nvSpPr>
+        <p:spPr>
+          <a:xfrm>
+            <a:off x="8115300" y="3009900"/>
+            <a:ext cx="3390900" cy="1790700"/>
+          </a:xfrm>
+          <a:prstGeom prst="rect">
+            <a:avLst/>
+          </a:prstGeom>
+          <a:solidFill>
+            <a:srgbClr val="0A1320"/>
+          </a:solidFill>
+          <a:ln w="12700">
+            <a:solidFill>
+              <a:srgbClr val="182838"/>
+            </a:solidFill>
+            <a:prstDash val="solid"/>
+          </a:ln>
+        </p:spPr>
+      </p:sp>
+      <p:sp>
+        <p:nvSpPr>
+          <p:cNvPr id="77" name="Shape 75"/>
+          <p:cNvSpPr/>
+          <p:nvPr/>
+        </p:nvSpPr>
+        <p:spPr>
+          <a:xfrm>
+            <a:off x="10239375" y="3124200"/>
+            <a:ext cx="0" cy="1543050"/>
+          </a:xfrm>
+          <a:prstGeom prst="line">
+            <a:avLst/>
+          </a:prstGeom>
+          <a:noFill/>
+          <a:ln w="12700">
+            <a:solidFill>
+              <a:srgbClr val="22354A"/>
+            </a:solidFill>
+            <a:prstDash val="solid"/>
+          </a:ln>
+        </p:spPr>
+      </p:sp>
+      <p:sp>
+        <p:nvSpPr>
+          <p:cNvPr id="78" name="Text 76"/>
+          <p:cNvSpPr txBox="1"/>
+          <p:nvPr/>
+        </p:nvSpPr>
+        <p:spPr>
+          <a:xfrm>
+            <a:off x="8267700" y="3171825"/>
+            <a:ext cx="800100" cy="142399"/>
+          </a:xfrm>
+          <a:prstGeom prst="rect">
+            <a:avLst/>
+          </a:prstGeom>
+          <a:noFill/>
+          <a:ln/>
+        </p:spPr>
+        <p:txBody>
+          <a:bodyPr wrap="square" lIns="0" tIns="0" rIns="0" bIns="0" rtlCol="0" anchor="t"/>
+          <a:lstStyle/>
+          <a:p>
+            <a:pPr algn="l" indent="0" marL="0">
+              <a:lnSpc>
+                <a:spcPts val="1121"/>
+              </a:lnSpc>
+              <a:buNone/>
+            </a:pPr>
+            <a:r>
+              <a:rPr lang="en-US" sz="863" dirty="0">
+                <a:solidFill>
+                  <a:srgbClr val="93A6BA"/>
+                </a:solidFill>
+                <a:latin typeface="Consolas" pitchFamily="34" charset="0"/>
+                <a:ea typeface="Consolas" pitchFamily="34" charset="-122"/>
+                <a:cs typeface="Consolas" pitchFamily="34" charset="-120"/>
+              </a:rPr>
+              <a:t>26-01-13</a:t>
+            </a:r>
+            <a:endParaRPr lang="en-US" sz="863" dirty="0"/>
+          </a:p>
+        </p:txBody>
+      </p:sp>
+      <p:sp>
+        <p:nvSpPr>
+          <p:cNvPr id="79" name="Shape 77"/>
+          <p:cNvSpPr/>
+          <p:nvPr/>
+        </p:nvSpPr>
+        <p:spPr>
+          <a:xfrm>
+            <a:off x="9124950" y="3162300"/>
+            <a:ext cx="1114425" cy="152400"/>
+          </a:xfrm>
+          <a:prstGeom prst="rect">
+            <a:avLst/>
+          </a:prstGeom>
+          <a:solidFill>
+            <a:srgbClr val="5E7793"/>
+          </a:solidFill>
+          <a:ln/>
+        </p:spPr>
+      </p:sp>
+      <p:sp>
+        <p:nvSpPr>
+          <p:cNvPr id="80" name="Text 78"/>
+          <p:cNvSpPr txBox="1"/>
+          <p:nvPr/>
+        </p:nvSpPr>
+        <p:spPr>
+          <a:xfrm>
+            <a:off x="8534400" y="3181350"/>
+            <a:ext cx="533400" cy="137160"/>
+          </a:xfrm>
+          <a:prstGeom prst="rect">
+            <a:avLst/>
+          </a:prstGeom>
+          <a:noFill/>
+          <a:ln/>
+        </p:spPr>
+        <p:txBody>
+          <a:bodyPr wrap="square" lIns="0" tIns="0" rIns="0" bIns="0" rtlCol="0" anchor="t"/>
+          <a:lstStyle/>
+          <a:p>
+            <a:pPr algn="r" indent="0" marL="0">
+              <a:lnSpc>
+                <a:spcPts val="1080"/>
+              </a:lnSpc>
+              <a:buNone/>
+            </a:pPr>
+            <a:r>
+              <a:rPr lang="en-US" sz="900" b="1" dirty="0">
+                <a:solidFill>
+                  <a:srgbClr val="8CA3BC"/>
+                </a:solidFill>
+                <a:latin typeface="Consolas" pitchFamily="34" charset="0"/>
+                <a:ea typeface="Consolas" pitchFamily="34" charset="-122"/>
+                <a:cs typeface="Consolas" pitchFamily="34" charset="-120"/>
+              </a:rPr>
+              <a:t>-10.40</a:t>
+            </a:r>
+            <a:endParaRPr lang="en-US" sz="900" dirty="0"/>
+          </a:p>
+        </p:txBody>
+      </p:sp>
+      <p:sp>
+        <p:nvSpPr>
+          <p:cNvPr id="81" name="Text 79"/>
+          <p:cNvSpPr txBox="1"/>
+          <p:nvPr/>
+        </p:nvSpPr>
+        <p:spPr>
+          <a:xfrm>
+            <a:off x="8267700" y="3533775"/>
+            <a:ext cx="800100" cy="142399"/>
+          </a:xfrm>
+          <a:prstGeom prst="rect">
+            <a:avLst/>
+          </a:prstGeom>
+          <a:noFill/>
+          <a:ln/>
+        </p:spPr>
+        <p:txBody>
+          <a:bodyPr wrap="square" lIns="0" tIns="0" rIns="0" bIns="0" rtlCol="0" anchor="t"/>
+          <a:lstStyle/>
+          <a:p>
+            <a:pPr algn="l" indent="0" marL="0">
+              <a:lnSpc>
+                <a:spcPts val="1121"/>
+              </a:lnSpc>
+              <a:buNone/>
+            </a:pPr>
+            <a:r>
+              <a:rPr lang="en-US" sz="863" dirty="0">
+                <a:solidFill>
+                  <a:srgbClr val="93A6BA"/>
+                </a:solidFill>
+                <a:latin typeface="Consolas" pitchFamily="34" charset="0"/>
+                <a:ea typeface="Consolas" pitchFamily="34" charset="-122"/>
+                <a:cs typeface="Consolas" pitchFamily="34" charset="-120"/>
+              </a:rPr>
+              <a:t>26-01-08</a:t>
+            </a:r>
+            <a:endParaRPr lang="en-US" sz="863" dirty="0"/>
+          </a:p>
+        </p:txBody>
+      </p:sp>
+      <p:sp>
+        <p:nvSpPr>
+          <p:cNvPr id="82" name="Shape 80"/>
+          <p:cNvSpPr/>
+          <p:nvPr/>
+        </p:nvSpPr>
+        <p:spPr>
+          <a:xfrm>
+            <a:off x="9177457" y="3524250"/>
+            <a:ext cx="1061918" cy="152400"/>
+          </a:xfrm>
+          <a:prstGeom prst="rect">
+            <a:avLst/>
+          </a:prstGeom>
+          <a:solidFill>
+            <a:srgbClr val="5E7793"/>
+          </a:solidFill>
+          <a:ln/>
+        </p:spPr>
+      </p:sp>
+      <p:sp>
+        <p:nvSpPr>
+          <p:cNvPr id="83" name="Text 81"/>
+          <p:cNvSpPr txBox="1"/>
+          <p:nvPr/>
+        </p:nvSpPr>
+        <p:spPr>
+          <a:xfrm>
+            <a:off x="8586907" y="3543300"/>
+            <a:ext cx="533400" cy="137160"/>
+          </a:xfrm>
+          <a:prstGeom prst="rect">
+            <a:avLst/>
+          </a:prstGeom>
+          <a:noFill/>
+          <a:ln/>
+        </p:spPr>
+        <p:txBody>
+          <a:bodyPr wrap="square" lIns="0" tIns="0" rIns="0" bIns="0" rtlCol="0" anchor="t"/>
+          <a:lstStyle/>
+          <a:p>
+            <a:pPr algn="r" indent="0" marL="0">
+              <a:lnSpc>
+                <a:spcPts val="1080"/>
+              </a:lnSpc>
+              <a:buNone/>
+            </a:pPr>
+            <a:r>
+              <a:rPr lang="en-US" sz="900" b="1" dirty="0">
+                <a:solidFill>
+                  <a:srgbClr val="8CA3BC"/>
+                </a:solidFill>
+                <a:latin typeface="Consolas" pitchFamily="34" charset="0"/>
+                <a:ea typeface="Consolas" pitchFamily="34" charset="-122"/>
+                <a:cs typeface="Consolas" pitchFamily="34" charset="-120"/>
+              </a:rPr>
+              <a:t>-9.91</a:t>
+            </a:r>
+            <a:endParaRPr lang="en-US" sz="900" dirty="0"/>
+          </a:p>
+        </p:txBody>
+      </p:sp>
+      <p:sp>
+        <p:nvSpPr>
+          <p:cNvPr id="84" name="Text 82"/>
+          <p:cNvSpPr txBox="1"/>
+          <p:nvPr/>
+        </p:nvSpPr>
+        <p:spPr>
+          <a:xfrm>
+            <a:off x="8267700" y="3895725"/>
+            <a:ext cx="800100" cy="142399"/>
+          </a:xfrm>
+          <a:prstGeom prst="rect">
+            <a:avLst/>
+          </a:prstGeom>
+          <a:noFill/>
+          <a:ln/>
+        </p:spPr>
+        <p:txBody>
+          <a:bodyPr wrap="square" lIns="0" tIns="0" rIns="0" bIns="0" rtlCol="0" anchor="t"/>
+          <a:lstStyle/>
+          <a:p>
+            <a:pPr algn="l" indent="0" marL="0">
+              <a:lnSpc>
+                <a:spcPts val="1121"/>
+              </a:lnSpc>
+              <a:buNone/>
+            </a:pPr>
+            <a:r>
+              <a:rPr lang="en-US" sz="863" dirty="0">
+                <a:solidFill>
+                  <a:srgbClr val="93A6BA"/>
+                </a:solidFill>
+                <a:latin typeface="Consolas" pitchFamily="34" charset="0"/>
+                <a:ea typeface="Consolas" pitchFamily="34" charset="-122"/>
+                <a:cs typeface="Consolas" pitchFamily="34" charset="-120"/>
+              </a:rPr>
+              <a:t>26-07-22</a:t>
+            </a:r>
+            <a:endParaRPr lang="en-US" sz="863" dirty="0"/>
+          </a:p>
+        </p:txBody>
+      </p:sp>
+      <p:sp>
+        <p:nvSpPr>
+          <p:cNvPr id="85" name="Shape 83"/>
+          <p:cNvSpPr/>
+          <p:nvPr/>
+        </p:nvSpPr>
+        <p:spPr>
+          <a:xfrm>
+            <a:off x="10239375" y="3886200"/>
+            <a:ext cx="847606" cy="152400"/>
+          </a:xfrm>
+          <a:prstGeom prst="rect">
+            <a:avLst/>
+          </a:prstGeom>
+          <a:solidFill>
+            <a:srgbClr val="FF4D63"/>
+          </a:solidFill>
+          <a:ln/>
+        </p:spPr>
+      </p:sp>
+      <p:sp>
+        <p:nvSpPr>
+          <p:cNvPr id="86" name="Text 84"/>
+          <p:cNvSpPr txBox="1"/>
+          <p:nvPr/>
+        </p:nvSpPr>
+        <p:spPr>
+          <a:xfrm>
+            <a:off x="11144131" y="3905250"/>
+            <a:ext cx="533400" cy="137160"/>
+          </a:xfrm>
+          <a:prstGeom prst="rect">
+            <a:avLst/>
+          </a:prstGeom>
+          <a:noFill/>
+          <a:ln/>
+        </p:spPr>
+        <p:txBody>
+          <a:bodyPr wrap="square" lIns="0" tIns="0" rIns="0" bIns="0" rtlCol="0" anchor="t"/>
+          <a:lstStyle/>
+          <a:p>
+            <a:pPr algn="l" indent="0" marL="0">
+              <a:lnSpc>
+                <a:spcPts val="1080"/>
+              </a:lnSpc>
+              <a:buNone/>
+            </a:pPr>
+            <a:r>
+              <a:rPr lang="en-US" sz="900" b="1" dirty="0">
+                <a:solidFill>
+                  <a:srgbClr val="FF4D63"/>
+                </a:solidFill>
+                <a:latin typeface="Consolas" pitchFamily="34" charset="0"/>
+                <a:ea typeface="Consolas" pitchFamily="34" charset="-122"/>
+                <a:cs typeface="Consolas" pitchFamily="34" charset="-120"/>
+              </a:rPr>
+              <a:t>+7.91</a:t>
+            </a:r>
+            <a:endParaRPr lang="en-US" sz="900" dirty="0"/>
+          </a:p>
+        </p:txBody>
+      </p:sp>
+      <p:sp>
+        <p:nvSpPr>
+          <p:cNvPr id="87" name="Text 85"/>
+          <p:cNvSpPr txBox="1"/>
+          <p:nvPr/>
+        </p:nvSpPr>
+        <p:spPr>
+          <a:xfrm>
+            <a:off x="8267700" y="4257675"/>
+            <a:ext cx="800100" cy="142399"/>
+          </a:xfrm>
+          <a:prstGeom prst="rect">
+            <a:avLst/>
+          </a:prstGeom>
+          <a:noFill/>
+          <a:ln/>
+        </p:spPr>
+        <p:txBody>
+          <a:bodyPr wrap="square" lIns="0" tIns="0" rIns="0" bIns="0" rtlCol="0" anchor="t"/>
+          <a:lstStyle/>
+          <a:p>
+            <a:pPr algn="l" indent="0" marL="0">
+              <a:lnSpc>
+                <a:spcPts val="1121"/>
+              </a:lnSpc>
+              <a:buNone/>
+            </a:pPr>
+            <a:r>
+              <a:rPr lang="en-US" sz="863" dirty="0">
+                <a:solidFill>
+                  <a:srgbClr val="93A6BA"/>
+                </a:solidFill>
+                <a:latin typeface="Consolas" pitchFamily="34" charset="0"/>
+                <a:ea typeface="Consolas" pitchFamily="34" charset="-122"/>
+                <a:cs typeface="Consolas" pitchFamily="34" charset="-120"/>
+              </a:rPr>
+              <a:t>25-09-02</a:t>
+            </a:r>
+            <a:endParaRPr lang="en-US" sz="863" dirty="0"/>
+          </a:p>
+        </p:txBody>
+      </p:sp>
+      <p:sp>
+        <p:nvSpPr>
+          <p:cNvPr id="88" name="Shape 86"/>
+          <p:cNvSpPr/>
+          <p:nvPr/>
+        </p:nvSpPr>
+        <p:spPr>
+          <a:xfrm>
+            <a:off x="10239375" y="4248150"/>
+            <a:ext cx="693301" cy="152400"/>
+          </a:xfrm>
+          <a:prstGeom prst="rect">
+            <a:avLst/>
+          </a:prstGeom>
+          <a:solidFill>
+            <a:srgbClr val="FF4D63"/>
+          </a:solidFill>
+          <a:ln/>
+        </p:spPr>
+      </p:sp>
+      <p:sp>
+        <p:nvSpPr>
+          <p:cNvPr id="89" name="Text 87"/>
+          <p:cNvSpPr txBox="1"/>
+          <p:nvPr/>
+        </p:nvSpPr>
+        <p:spPr>
+          <a:xfrm>
+            <a:off x="10989826" y="4267200"/>
+            <a:ext cx="533400" cy="137160"/>
+          </a:xfrm>
+          <a:prstGeom prst="rect">
+            <a:avLst/>
+          </a:prstGeom>
+          <a:noFill/>
+          <a:ln/>
+        </p:spPr>
+        <p:txBody>
+          <a:bodyPr wrap="square" lIns="0" tIns="0" rIns="0" bIns="0" rtlCol="0" anchor="t"/>
+          <a:lstStyle/>
+          <a:p>
+            <a:pPr algn="l" indent="0" marL="0">
+              <a:lnSpc>
+                <a:spcPts val="1080"/>
+              </a:lnSpc>
+              <a:buNone/>
+            </a:pPr>
+            <a:r>
+              <a:rPr lang="en-US" sz="900" b="1" dirty="0">
+                <a:solidFill>
+                  <a:srgbClr val="FF4D63"/>
+                </a:solidFill>
+                <a:latin typeface="Consolas" pitchFamily="34" charset="0"/>
+                <a:ea typeface="Consolas" pitchFamily="34" charset="-122"/>
+                <a:cs typeface="Consolas" pitchFamily="34" charset="-120"/>
+              </a:rPr>
+              <a:t>+6.47</a:t>
+            </a:r>
+            <a:endParaRPr lang="en-US" sz="900" dirty="0"/>
+          </a:p>
+        </p:txBody>
+      </p:sp>
+      <p:sp>
+        <p:nvSpPr>
+          <p:cNvPr id="90" name="Text 88"/>
+          <p:cNvSpPr txBox="1"/>
+          <p:nvPr/>
+        </p:nvSpPr>
+        <p:spPr>
+          <a:xfrm>
+            <a:off x="9163050" y="4533900"/>
+            <a:ext cx="1047750" cy="136208"/>
+          </a:xfrm>
+          <a:prstGeom prst="rect">
+            <a:avLst/>
+          </a:prstGeom>
+          <a:noFill/>
+          <a:ln/>
+        </p:spPr>
+        <p:txBody>
+          <a:bodyPr wrap="square" lIns="0" tIns="0" rIns="0" bIns="0" rtlCol="0" anchor="t"/>
+          <a:lstStyle/>
+          <a:p>
+            <a:pPr algn="r" indent="0" marL="0">
+              <a:lnSpc>
+                <a:spcPts val="1073"/>
+              </a:lnSpc>
+              <a:buNone/>
+            </a:pPr>
+            <a:r>
+              <a:rPr lang="en-US" sz="825" dirty="0">
+                <a:solidFill>
+                  <a:srgbClr val="8CA3BC"/>
+                </a:solidFill>
+                <a:latin typeface="Malgun Gothic" pitchFamily="34" charset="0"/>
+                <a:ea typeface="Malgun Gothic" pitchFamily="34" charset="-122"/>
+                <a:cs typeface="Malgun Gothic" pitchFamily="34" charset="-120"/>
+              </a:rPr>
+              <a:t>← 낮게 신고</a:t>
+            </a:r>
+            <a:endParaRPr lang="en-US" sz="825" dirty="0"/>
+          </a:p>
+        </p:txBody>
+      </p:sp>
+      <p:sp>
+        <p:nvSpPr>
+          <p:cNvPr id="91" name="Text 89"/>
+          <p:cNvSpPr txBox="1"/>
+          <p:nvPr/>
+        </p:nvSpPr>
+        <p:spPr>
+          <a:xfrm>
+            <a:off x="10287000" y="4533900"/>
+            <a:ext cx="1047750" cy="136208"/>
+          </a:xfrm>
+          <a:prstGeom prst="rect">
+            <a:avLst/>
+          </a:prstGeom>
+          <a:noFill/>
+          <a:ln/>
+        </p:spPr>
+        <p:txBody>
+          <a:bodyPr wrap="square" lIns="0" tIns="0" rIns="0" bIns="0" rtlCol="0" anchor="t"/>
+          <a:lstStyle/>
+          <a:p>
+            <a:pPr algn="l" indent="0" marL="0">
+              <a:lnSpc>
+                <a:spcPts val="1073"/>
+              </a:lnSpc>
+              <a:buNone/>
+            </a:pPr>
+            <a:r>
+              <a:rPr lang="en-US" sz="825" dirty="0">
+                <a:solidFill>
+                  <a:srgbClr val="FF4D63"/>
+                </a:solidFill>
+                <a:latin typeface="Malgun Gothic" pitchFamily="34" charset="0"/>
+                <a:ea typeface="Malgun Gothic" pitchFamily="34" charset="-122"/>
+                <a:cs typeface="Malgun Gothic" pitchFamily="34" charset="-120"/>
+              </a:rPr>
+              <a:t>높게 신고 →</a:t>
+            </a:r>
+            <a:endParaRPr lang="en-US" sz="825" dirty="0"/>
+          </a:p>
+        </p:txBody>
+      </p:sp>
+      <p:sp>
+        <p:nvSpPr>
+          <p:cNvPr id="92" name="Text 90"/>
+          <p:cNvSpPr txBox="1"/>
+          <p:nvPr/>
+        </p:nvSpPr>
+        <p:spPr>
+          <a:xfrm>
+            <a:off x="8115300" y="4953000"/>
+            <a:ext cx="3390900" cy="284036"/>
+          </a:xfrm>
+          <a:prstGeom prst="rect">
+            <a:avLst/>
+          </a:prstGeom>
+          <a:noFill/>
+          <a:ln/>
+        </p:spPr>
+        <p:txBody>
+          <a:bodyPr wrap="square" lIns="0" tIns="0" rIns="0" bIns="0" rtlCol="0" anchor="t"/>
+          <a:lstStyle/>
+          <a:p>
+            <a:pPr algn="l" indent="0" marL="0">
+              <a:lnSpc>
+                <a:spcPts val="2237"/>
+              </a:lnSpc>
+              <a:buNone/>
+            </a:pPr>
+            <a:r>
+              <a:rPr lang="en-US" sz="1575" b="1" dirty="0">
+                <a:solidFill>
+                  <a:srgbClr val="EAE7E0"/>
+                </a:solidFill>
+                <a:latin typeface="Malgun Gothic" pitchFamily="34" charset="0"/>
+                <a:ea typeface="Malgun Gothic" pitchFamily="34" charset="-122"/>
+                <a:cs typeface="Malgun Gothic" pitchFamily="34" charset="-120"/>
+              </a:rPr>
+              <a:t>겨울과 여름이 </a:t>
+            </a:r>
+            <a:pPr algn="l" indent="0" marL="0">
+              <a:lnSpc>
+                <a:spcPts val="2237"/>
+              </a:lnSpc>
+              <a:buNone/>
+            </a:pPr>
+            <a:r>
+              <a:rPr lang="en-US" sz="1575" b="1" dirty="0">
+                <a:solidFill>
+                  <a:srgbClr val="EFB13C"/>
+                </a:solidFill>
+                <a:latin typeface="Malgun Gothic" pitchFamily="34" charset="0"/>
+                <a:ea typeface="Malgun Gothic" pitchFamily="34" charset="-122"/>
+                <a:cs typeface="Malgun Gothic" pitchFamily="34" charset="-120"/>
+              </a:rPr>
+              <a:t>반대로</a:t>
+            </a:r>
+            <a:pPr algn="l" indent="0" marL="0">
+              <a:lnSpc>
+                <a:spcPts val="2237"/>
+              </a:lnSpc>
+              <a:buNone/>
+            </a:pPr>
+            <a:r>
+              <a:rPr lang="en-US" sz="1575" b="1" dirty="0">
+                <a:solidFill>
+                  <a:srgbClr val="EAE7E0"/>
+                </a:solidFill>
+                <a:latin typeface="Malgun Gothic" pitchFamily="34" charset="0"/>
+                <a:ea typeface="Malgun Gothic" pitchFamily="34" charset="-122"/>
+                <a:cs typeface="Malgun Gothic" pitchFamily="34" charset="-120"/>
+              </a:rPr>
+              <a:t> 틀립니다</a:t>
+            </a:r>
+            <a:endParaRPr lang="en-US" sz="1575" dirty="0"/>
+          </a:p>
+        </p:txBody>
+      </p:sp>
+      <p:sp>
+        <p:nvSpPr>
+          <p:cNvPr id="93" name="Text 91"/>
+          <p:cNvSpPr txBox="1"/>
+          <p:nvPr/>
+        </p:nvSpPr>
+        <p:spPr>
+          <a:xfrm>
+            <a:off x="8115300" y="5334000"/>
+            <a:ext cx="3390900" cy="240030"/>
+          </a:xfrm>
+          <a:prstGeom prst="rect">
+            <a:avLst/>
+          </a:prstGeom>
+          <a:noFill/>
+          <a:ln/>
+        </p:spPr>
+        <p:txBody>
+          <a:bodyPr wrap="square" lIns="0" tIns="0" rIns="0" bIns="0" rtlCol="0" anchor="t"/>
+          <a:lstStyle/>
+          <a:p>
+            <a:pPr algn="l" indent="0" marL="0">
+              <a:lnSpc>
+                <a:spcPts val="1890"/>
+              </a:lnSpc>
+              <a:buNone/>
+            </a:pPr>
+            <a:r>
+              <a:rPr lang="en-US" sz="1125" dirty="0">
+                <a:solidFill>
+                  <a:srgbClr val="BCC9D6"/>
+                </a:solidFill>
+                <a:latin typeface="Malgun Gothic" pitchFamily="34" charset="0"/>
+                <a:ea typeface="Malgun Gothic" pitchFamily="34" charset="-122"/>
+                <a:cs typeface="Malgun Gothic" pitchFamily="34" charset="-120"/>
+              </a:rPr>
+              <a:t>그래서 상수를 올리거나 내려서는 못 고칩니다.</a:t>
+            </a:r>
+            <a:endParaRPr lang="en-US" sz="1125" dirty="0"/>
+          </a:p>
+        </p:txBody>
+      </p:sp>
+      <p:sp>
+        <p:nvSpPr>
+          <p:cNvPr id="94" name="Shape 92"/>
+          <p:cNvSpPr/>
+          <p:nvPr/>
+        </p:nvSpPr>
+        <p:spPr>
+          <a:xfrm>
+            <a:off x="685800" y="6057900"/>
+            <a:ext cx="10820400" cy="0"/>
+          </a:xfrm>
+          <a:prstGeom prst="line">
+            <a:avLst/>
+          </a:prstGeom>
+          <a:noFill/>
+          <a:ln w="12700">
+            <a:solidFill>
+              <a:srgbClr val="22354A"/>
+            </a:solidFill>
+            <a:prstDash val="solid"/>
+          </a:ln>
+        </p:spPr>
+      </p:sp>
+      <p:sp>
+        <p:nvSpPr>
+          <p:cNvPr id="95" name="Text 93"/>
+          <p:cNvSpPr txBox="1"/>
+          <p:nvPr/>
+        </p:nvSpPr>
+        <p:spPr>
+          <a:xfrm>
+            <a:off x="685800" y="6267450"/>
+            <a:ext cx="476250" cy="120015"/>
+          </a:xfrm>
+          <a:prstGeom prst="rect">
+            <a:avLst/>
+          </a:prstGeom>
+          <a:noFill/>
+          <a:ln/>
+        </p:spPr>
+        <p:txBody>
+          <a:bodyPr wrap="square" lIns="0" tIns="0" rIns="0" bIns="0" rtlCol="0" anchor="t"/>
+          <a:lstStyle/>
+          <a:p>
+            <a:pPr algn="l" indent="0" marL="0">
+              <a:lnSpc>
+                <a:spcPts val="945"/>
+              </a:lnSpc>
+              <a:buNone/>
+            </a:pPr>
+            <a:r>
+              <a:rPr lang="en-US" sz="788" b="1" spc="180" kern="0" dirty="0">
+                <a:solidFill>
+                  <a:srgbClr val="EFB13C"/>
+                </a:solidFill>
+                <a:latin typeface="Consolas" pitchFamily="34" charset="0"/>
+                <a:ea typeface="Consolas" pitchFamily="34" charset="-122"/>
+                <a:cs typeface="Consolas" pitchFamily="34" charset="-120"/>
+              </a:rPr>
+              <a:t>결론</a:t>
+            </a:r>
+            <a:endParaRPr lang="en-US" sz="788" dirty="0"/>
+          </a:p>
+        </p:txBody>
+      </p:sp>
+      <p:sp>
+        <p:nvSpPr>
+          <p:cNvPr id="96" name="Text 94"/>
+          <p:cNvSpPr txBox="1"/>
+          <p:nvPr/>
+        </p:nvSpPr>
+        <p:spPr>
+          <a:xfrm>
+            <a:off x="1219200" y="6229350"/>
+            <a:ext cx="10287000" cy="220027"/>
+          </a:xfrm>
+          <a:prstGeom prst="rect">
+            <a:avLst/>
+          </a:prstGeom>
+          <a:noFill/>
+          <a:ln/>
+        </p:spPr>
+        <p:txBody>
+          <a:bodyPr wrap="square" lIns="0" tIns="0" rIns="0" bIns="0" rtlCol="0" anchor="t"/>
+          <a:lstStyle/>
+          <a:p>
+            <a:pPr algn="l" indent="0" marL="0">
+              <a:lnSpc>
+                <a:spcPts val="1733"/>
+              </a:lnSpc>
+              <a:buNone/>
+            </a:pPr>
+            <a:r>
+              <a:rPr lang="en-US" sz="1238" dirty="0">
+                <a:solidFill>
+                  <a:srgbClr val="BCC9D6"/>
+                </a:solidFill>
+                <a:latin typeface="Malgun Gothic" pitchFamily="34" charset="0"/>
+                <a:ea typeface="Malgun Gothic" pitchFamily="34" charset="-122"/>
+                <a:cs typeface="Malgun Gothic" pitchFamily="34" charset="-120"/>
+              </a:rPr>
+              <a:t>고쳐야 할 것은 값의 크기가 아니라 </a:t>
+            </a:r>
+            <a:pPr algn="l" indent="0" marL="0">
+              <a:lnSpc>
+                <a:spcPts val="1733"/>
+              </a:lnSpc>
+              <a:buNone/>
+            </a:pPr>
+            <a:r>
+              <a:rPr lang="en-US" sz="1238" b="1" dirty="0">
+                <a:solidFill>
+                  <a:srgbClr val="EFB13C"/>
+                </a:solidFill>
+                <a:latin typeface="Malgun Gothic" pitchFamily="34" charset="0"/>
+                <a:ea typeface="Malgun Gothic" pitchFamily="34" charset="-122"/>
+                <a:cs typeface="Malgun Gothic" pitchFamily="34" charset="-120"/>
+              </a:rPr>
+              <a:t>온도를 따라가는 기울기</a:t>
+            </a:r>
+            <a:pPr algn="l" indent="0" marL="0">
+              <a:lnSpc>
+                <a:spcPts val="1733"/>
+              </a:lnSpc>
+              <a:buNone/>
+            </a:pPr>
+            <a:r>
+              <a:rPr lang="en-US" sz="1238" dirty="0">
+                <a:solidFill>
+                  <a:srgbClr val="BCC9D6"/>
+                </a:solidFill>
+                <a:latin typeface="Malgun Gothic" pitchFamily="34" charset="0"/>
+                <a:ea typeface="Malgun Gothic" pitchFamily="34" charset="-122"/>
+                <a:cs typeface="Malgun Gothic" pitchFamily="34" charset="-120"/>
+              </a:rPr>
+              <a:t>입니다.</a:t>
+            </a:r>
+            <a:endParaRPr lang="en-US" sz="1238" dirty="0"/>
+          </a:p>
+        </p:txBody>
       </p:sp>
     </p:spTree>
   </p:cSld>

--- a/docs/ppt/위례_공급가능용량_최종발표.pptx
+++ b/docs/ppt/위례_공급가능용량_최종발표.pptx
@@ -4663,26 +4663,26 @@
         <p:spPr>
           <a:xfrm>
             <a:off x="685800" y="914400"/>
-            <a:ext cx="10287000" cy="360045"/>
-          </a:xfrm>
-          <a:prstGeom prst="rect">
-            <a:avLst/>
-          </a:prstGeom>
-          <a:noFill/>
-          <a:ln/>
-        </p:spPr>
-        <p:txBody>
-          <a:bodyPr wrap="square" lIns="0" tIns="0" rIns="0" bIns="0" rtlCol="0" anchor="t"/>
-          <a:lstStyle/>
-          <a:p>
-            <a:pPr algn="l" indent="0" marL="0">
-              <a:lnSpc>
-                <a:spcPts val="2835"/>
-              </a:lnSpc>
-              <a:buNone/>
-            </a:pPr>
-            <a:r>
-              <a:rPr lang="en-US" sz="2250" b="1" dirty="0">
+            <a:ext cx="10287000" cy="888111"/>
+          </a:xfrm>
+          <a:prstGeom prst="rect">
+            <a:avLst/>
+          </a:prstGeom>
+          <a:noFill/>
+          <a:ln/>
+        </p:spPr>
+        <p:txBody>
+          <a:bodyPr wrap="square" lIns="0" tIns="0" rIns="0" bIns="0" rtlCol="0" anchor="t"/>
+          <a:lstStyle/>
+          <a:p>
+            <a:pPr algn="l" indent="0" marL="0">
+              <a:lnSpc>
+                <a:spcPts val="3496"/>
+              </a:lnSpc>
+              <a:buNone/>
+            </a:pPr>
+            <a:r>
+              <a:rPr lang="en-US" sz="2775" b="1" dirty="0">
                 <a:solidFill>
                   <a:srgbClr val="EAE7E0"/>
                 </a:solidFill>
@@ -4690,22 +4690,231 @@
                 <a:ea typeface="Malgun Gothic" pitchFamily="34" charset="-122"/>
                 <a:cs typeface="Malgun Gothic" pitchFamily="34" charset="-120"/>
               </a:rPr>
-              <a:t>잇는 방식 7가지를 똑같은 조건에서 겨뤄 가장 잘 맞히는 하나를 골랐습니다</a:t>
-            </a:r>
-            <a:endParaRPr lang="en-US" sz="2250" dirty="0"/>
-          </a:p>
-        </p:txBody>
-      </p:sp>
-      <p:sp>
-        <p:nvSpPr>
-          <p:cNvPr id="12" name="Shape 10"/>
-          <p:cNvSpPr/>
-          <p:nvPr/>
-        </p:nvSpPr>
-        <p:spPr>
-          <a:xfrm>
-            <a:off x="685800" y="2857500"/>
-            <a:ext cx="10820400" cy="2095500"/>
+              <a:t>잇는 방식 7가지를 똑같은 조건에서 겨뤄</a:t>
+            </a:r>
+            <a:endParaRPr lang="en-US" sz="2775" dirty="0"/>
+          </a:p>
+          <a:p>
+            <a:pPr algn="l" indent="0" marL="0">
+              <a:lnSpc>
+                <a:spcPts val="3496"/>
+              </a:lnSpc>
+              <a:buNone/>
+            </a:pPr>
+            <a:r>
+              <a:rPr lang="en-US" sz="2775" b="1" dirty="0">
+                <a:solidFill>
+                  <a:srgbClr val="EFB13C"/>
+                </a:solidFill>
+                <a:latin typeface="Malgun Gothic" pitchFamily="34" charset="0"/>
+                <a:ea typeface="Malgun Gothic" pitchFamily="34" charset="-122"/>
+                <a:cs typeface="Malgun Gothic" pitchFamily="34" charset="-120"/>
+              </a:rPr>
+              <a:t>가장 잘 맞히는 하나</a:t>
+            </a:r>
+            <a:pPr algn="l" indent="0" marL="0">
+              <a:lnSpc>
+                <a:spcPts val="3496"/>
+              </a:lnSpc>
+              <a:buNone/>
+            </a:pPr>
+            <a:r>
+              <a:rPr lang="en-US" sz="2775" b="1" dirty="0">
+                <a:solidFill>
+                  <a:srgbClr val="EAE7E0"/>
+                </a:solidFill>
+                <a:latin typeface="Malgun Gothic" pitchFamily="34" charset="0"/>
+                <a:ea typeface="Malgun Gothic" pitchFamily="34" charset="-122"/>
+                <a:cs typeface="Malgun Gothic" pitchFamily="34" charset="-120"/>
+              </a:rPr>
+              <a:t>를 골랐습니다</a:t>
+            </a:r>
+            <a:endParaRPr lang="en-US" sz="2775" dirty="0"/>
+          </a:p>
+        </p:txBody>
+      </p:sp>
+      <p:sp>
+        <p:nvSpPr>
+          <p:cNvPr id="12" name="Text 10"/>
+          <p:cNvSpPr txBox="1"/>
+          <p:nvPr/>
+        </p:nvSpPr>
+        <p:spPr>
+          <a:xfrm>
+            <a:off x="685800" y="2000250"/>
+            <a:ext cx="10287000" cy="569214"/>
+          </a:xfrm>
+          <a:prstGeom prst="rect">
+            <a:avLst/>
+          </a:prstGeom>
+          <a:noFill/>
+          <a:ln/>
+        </p:spPr>
+        <p:txBody>
+          <a:bodyPr wrap="square" lIns="0" tIns="0" rIns="0" bIns="0" rtlCol="0" anchor="t"/>
+          <a:lstStyle/>
+          <a:p>
+            <a:pPr algn="l" indent="0" marL="0">
+              <a:lnSpc>
+                <a:spcPts val="2241"/>
+              </a:lnSpc>
+              <a:buNone/>
+            </a:pPr>
+            <a:r>
+              <a:rPr lang="en-US" sz="1350" dirty="0">
+                <a:solidFill>
+                  <a:srgbClr val="BCC9D6"/>
+                </a:solidFill>
+                <a:latin typeface="Malgun Gothic" pitchFamily="34" charset="0"/>
+                <a:ea typeface="Malgun Gothic" pitchFamily="34" charset="-122"/>
+                <a:cs typeface="Malgun Gothic" pitchFamily="34" charset="-120"/>
+              </a:rPr>
+              <a:t>정답을 </a:t>
+            </a:r>
+            <a:pPr algn="l" indent="0" marL="0">
+              <a:lnSpc>
+                <a:spcPts val="2241"/>
+              </a:lnSpc>
+              <a:buNone/>
+            </a:pPr>
+            <a:r>
+              <a:rPr lang="en-US" sz="1350" b="1" dirty="0">
+                <a:solidFill>
+                  <a:srgbClr val="EAE7E0"/>
+                </a:solidFill>
+                <a:latin typeface="Malgun Gothic" pitchFamily="34" charset="0"/>
+                <a:ea typeface="Malgun Gothic" pitchFamily="34" charset="-122"/>
+                <a:cs typeface="Malgun Gothic" pitchFamily="34" charset="-120"/>
+              </a:rPr>
+              <a:t>한 건씩 가리고 나머지로 맞혀보는 방식</a:t>
+            </a:r>
+            <a:pPr algn="l" indent="0" marL="0">
+              <a:lnSpc>
+                <a:spcPts val="2241"/>
+              </a:lnSpc>
+              <a:buNone/>
+            </a:pPr>
+            <a:r>
+              <a:rPr lang="en-US" sz="1350" dirty="0">
+                <a:solidFill>
+                  <a:srgbClr val="BCC9D6"/>
+                </a:solidFill>
+                <a:latin typeface="Malgun Gothic" pitchFamily="34" charset="0"/>
+                <a:ea typeface="Malgun Gothic" pitchFamily="34" charset="-122"/>
+                <a:cs typeface="Malgun Gothic" pitchFamily="34" charset="-120"/>
+              </a:rPr>
+              <a:t> 으로 36번 채점했습니다. </a:t>
+            </a:r>
+            <a:pPr algn="l" indent="0" marL="0">
+              <a:lnSpc>
+                <a:spcPts val="2241"/>
+              </a:lnSpc>
+              <a:buNone/>
+            </a:pPr>
+            <a:r>
+              <a:rPr lang="en-US" sz="1350" b="1" dirty="0">
+                <a:solidFill>
+                  <a:srgbClr val="EFB13C"/>
+                </a:solidFill>
+                <a:latin typeface="Malgun Gothic" pitchFamily="34" charset="0"/>
+                <a:ea typeface="Malgun Gothic" pitchFamily="34" charset="-122"/>
+                <a:cs typeface="Malgun Gothic" pitchFamily="34" charset="-120"/>
+              </a:rPr>
+              <a:t>GP · RBF</a:t>
+            </a:r>
+            <a:pPr algn="l" indent="0" marL="0">
+              <a:lnSpc>
+                <a:spcPts val="2241"/>
+              </a:lnSpc>
+              <a:buNone/>
+            </a:pPr>
+            <a:r>
+              <a:rPr lang="en-US" sz="1350" dirty="0">
+                <a:solidFill>
+                  <a:srgbClr val="BCC9D6"/>
+                </a:solidFill>
+                <a:latin typeface="Malgun Gothic" pitchFamily="34" charset="0"/>
+                <a:ea typeface="Malgun Gothic" pitchFamily="34" charset="-122"/>
+                <a:cs typeface="Malgun Gothic" pitchFamily="34" charset="-120"/>
+              </a:rPr>
+              <a:t> 가 평균 오차·큰 오차·설명력 세 지표 모두 1위였습니다.</a:t>
+            </a:r>
+            <a:endParaRPr lang="en-US" sz="1350" dirty="0"/>
+          </a:p>
+        </p:txBody>
+      </p:sp>
+      <p:sp>
+        <p:nvSpPr>
+          <p:cNvPr id="13" name="Shape 11"/>
+          <p:cNvSpPr/>
+          <p:nvPr/>
+        </p:nvSpPr>
+        <p:spPr>
+          <a:xfrm>
+            <a:off x="685800" y="2705100"/>
+            <a:ext cx="6286500" cy="19050"/>
+          </a:xfrm>
+          <a:prstGeom prst="rect">
+            <a:avLst/>
+          </a:prstGeom>
+          <a:solidFill>
+            <a:srgbClr val="22354A"/>
+          </a:solidFill>
+          <a:ln/>
+        </p:spPr>
+      </p:sp>
+      <p:sp>
+        <p:nvSpPr>
+          <p:cNvPr id="14" name="Text 12"/>
+          <p:cNvSpPr txBox="1"/>
+          <p:nvPr/>
+        </p:nvSpPr>
+        <p:spPr>
+          <a:xfrm>
+            <a:off x="685800" y="2838450"/>
+            <a:ext cx="6286500" cy="125016"/>
+          </a:xfrm>
+          <a:prstGeom prst="rect">
+            <a:avLst/>
+          </a:prstGeom>
+          <a:noFill/>
+          <a:ln/>
+        </p:spPr>
+        <p:txBody>
+          <a:bodyPr wrap="square" lIns="0" tIns="0" rIns="0" bIns="0" rtlCol="0" anchor="t"/>
+          <a:lstStyle/>
+          <a:p>
+            <a:pPr algn="l" indent="0" marL="0">
+              <a:lnSpc>
+                <a:spcPts val="984"/>
+              </a:lnSpc>
+              <a:buNone/>
+            </a:pPr>
+            <a:r>
+              <a:rPr lang="en-US" sz="788" b="1" spc="150" kern="0" dirty="0">
+                <a:solidFill>
+                  <a:srgbClr val="63798F"/>
+                </a:solidFill>
+                <a:latin typeface="Consolas" pitchFamily="34" charset="0"/>
+                <a:ea typeface="Consolas" pitchFamily="34" charset="-122"/>
+                <a:cs typeface="Consolas" pitchFamily="34" charset="-120"/>
+              </a:rPr>
+              <a:t>평균 오차  ·  단위 MW  ·  낮을수록 좋음</a:t>
+            </a:r>
+            <a:endParaRPr lang="en-US" sz="788" dirty="0"/>
+          </a:p>
+        </p:txBody>
+      </p:sp>
+      <p:sp>
+        <p:nvSpPr>
+          <p:cNvPr id="15" name="Shape 13"/>
+          <p:cNvSpPr/>
+          <p:nvPr/>
+        </p:nvSpPr>
+        <p:spPr>
+          <a:xfrm>
+            <a:off x="685800" y="3067050"/>
+            <a:ext cx="6286500" cy="1009650"/>
           </a:xfrm>
           <a:prstGeom prst="rect">
             <a:avLst/>
@@ -4713,93 +4922,1309 @@
           <a:solidFill>
             <a:srgbClr val="0A1320"/>
           </a:solidFill>
-          <a:ln w="19050">
+          <a:ln w="12700">
             <a:solidFill>
-              <a:srgbClr val="22354A"/>
+              <a:srgbClr val="182838"/>
             </a:solidFill>
-            <a:prstDash val="dash"/>
+            <a:prstDash val="solid"/>
           </a:ln>
         </p:spPr>
       </p:sp>
       <p:sp>
         <p:nvSpPr>
-          <p:cNvPr id="13" name="Text 11"/>
-          <p:cNvSpPr txBox="1"/>
-          <p:nvPr/>
-        </p:nvSpPr>
-        <p:spPr>
-          <a:xfrm>
-            <a:off x="685800" y="3695700"/>
-            <a:ext cx="10820400" cy="226695"/>
-          </a:xfrm>
-          <a:prstGeom prst="rect">
-            <a:avLst/>
-          </a:prstGeom>
-          <a:noFill/>
-          <a:ln/>
-        </p:spPr>
-        <p:txBody>
-          <a:bodyPr wrap="square" lIns="0" tIns="0" rIns="0" bIns="0" rtlCol="0" anchor="t"/>
-          <a:lstStyle/>
-          <a:p>
-            <a:pPr algn="ctr" indent="0" marL="0">
-              <a:lnSpc>
-                <a:spcPts val="1785"/>
-              </a:lnSpc>
-              <a:buNone/>
-            </a:pPr>
-            <a:r>
-              <a:rPr lang="en-US" sz="1275" dirty="0">
+          <p:cNvPr id="16" name="Text 14"/>
+          <p:cNvSpPr txBox="1"/>
+          <p:nvPr/>
+        </p:nvSpPr>
+        <p:spPr>
+          <a:xfrm>
+            <a:off x="838200" y="3200400"/>
+            <a:ext cx="1905000" cy="142399"/>
+          </a:xfrm>
+          <a:prstGeom prst="rect">
+            <a:avLst/>
+          </a:prstGeom>
+          <a:noFill/>
+          <a:ln/>
+        </p:spPr>
+        <p:txBody>
+          <a:bodyPr wrap="square" lIns="0" tIns="0" rIns="0" bIns="0" rtlCol="0" anchor="t"/>
+          <a:lstStyle/>
+          <a:p>
+            <a:pPr algn="l" indent="0" marL="0">
+              <a:lnSpc>
+                <a:spcPts val="1121"/>
+              </a:lnSpc>
+              <a:buNone/>
+            </a:pPr>
+            <a:r>
+              <a:rPr lang="en-US" sz="863" b="1" dirty="0">
+                <a:solidFill>
+                  <a:srgbClr val="8CA3BC"/>
+                </a:solidFill>
+                <a:latin typeface="Consolas" pitchFamily="34" charset="0"/>
+                <a:ea typeface="Consolas" pitchFamily="34" charset="-122"/>
+                <a:cs typeface="Consolas" pitchFamily="34" charset="-120"/>
+              </a:rPr>
+              <a:t>종전 · 하나의 값</a:t>
+            </a:r>
+            <a:endParaRPr lang="en-US" sz="863" dirty="0"/>
+          </a:p>
+        </p:txBody>
+      </p:sp>
+      <p:sp>
+        <p:nvSpPr>
+          <p:cNvPr id="17" name="Shape 15"/>
+          <p:cNvSpPr/>
+          <p:nvPr/>
+        </p:nvSpPr>
+        <p:spPr>
+          <a:xfrm>
+            <a:off x="838200" y="3371850"/>
+            <a:ext cx="5337663" cy="142875"/>
+          </a:xfrm>
+          <a:prstGeom prst="rect">
+            <a:avLst/>
+          </a:prstGeom>
+          <a:solidFill>
+            <a:srgbClr val="5E7793"/>
+          </a:solidFill>
+          <a:ln/>
+        </p:spPr>
+      </p:sp>
+      <p:sp>
+        <p:nvSpPr>
+          <p:cNvPr id="18" name="Text 16"/>
+          <p:cNvSpPr txBox="1"/>
+          <p:nvPr/>
+        </p:nvSpPr>
+        <p:spPr>
+          <a:xfrm>
+            <a:off x="6286500" y="3333750"/>
+            <a:ext cx="666750" cy="205740"/>
+          </a:xfrm>
+          <a:prstGeom prst="rect">
+            <a:avLst/>
+          </a:prstGeom>
+          <a:noFill/>
+          <a:ln/>
+        </p:spPr>
+        <p:txBody>
+          <a:bodyPr wrap="square" lIns="0" tIns="0" rIns="0" bIns="0" rtlCol="0" anchor="t"/>
+          <a:lstStyle/>
+          <a:p>
+            <a:pPr algn="l" indent="0" marL="0">
+              <a:lnSpc>
+                <a:spcPts val="1620"/>
+              </a:lnSpc>
+              <a:buNone/>
+            </a:pPr>
+            <a:r>
+              <a:rPr lang="en-US" sz="1350" b="1" dirty="0">
+                <a:solidFill>
+                  <a:srgbClr val="8CA3BC"/>
+                </a:solidFill>
+                <a:latin typeface="Consolas" pitchFamily="34" charset="0"/>
+                <a:ea typeface="Consolas" pitchFamily="34" charset="-122"/>
+                <a:cs typeface="Consolas" pitchFamily="34" charset="-120"/>
+              </a:rPr>
+              <a:t>3.83</a:t>
+            </a:r>
+            <a:endParaRPr lang="en-US" sz="1350" dirty="0"/>
+          </a:p>
+        </p:txBody>
+      </p:sp>
+      <p:sp>
+        <p:nvSpPr>
+          <p:cNvPr id="19" name="Text 17"/>
+          <p:cNvSpPr txBox="1"/>
+          <p:nvPr/>
+        </p:nvSpPr>
+        <p:spPr>
+          <a:xfrm>
+            <a:off x="838200" y="3619500"/>
+            <a:ext cx="1905000" cy="142399"/>
+          </a:xfrm>
+          <a:prstGeom prst="rect">
+            <a:avLst/>
+          </a:prstGeom>
+          <a:noFill/>
+          <a:ln/>
+        </p:spPr>
+        <p:txBody>
+          <a:bodyPr wrap="square" lIns="0" tIns="0" rIns="0" bIns="0" rtlCol="0" anchor="t"/>
+          <a:lstStyle/>
+          <a:p>
+            <a:pPr algn="l" indent="0" marL="0">
+              <a:lnSpc>
+                <a:spcPts val="1121"/>
+              </a:lnSpc>
+              <a:buNone/>
+            </a:pPr>
+            <a:r>
+              <a:rPr lang="en-US" sz="863" b="1" dirty="0">
+                <a:solidFill>
+                  <a:srgbClr val="EFB13C"/>
+                </a:solidFill>
+                <a:latin typeface="Consolas" pitchFamily="34" charset="0"/>
+                <a:ea typeface="Consolas" pitchFamily="34" charset="-122"/>
+                <a:cs typeface="Consolas" pitchFamily="34" charset="-120"/>
+              </a:rPr>
+              <a:t>개선 · GP · RBF</a:t>
+            </a:r>
+            <a:endParaRPr lang="en-US" sz="863" dirty="0"/>
+          </a:p>
+        </p:txBody>
+      </p:sp>
+      <p:sp>
+        <p:nvSpPr>
+          <p:cNvPr id="20" name="Shape 18"/>
+          <p:cNvSpPr/>
+          <p:nvPr/>
+        </p:nvSpPr>
+        <p:spPr>
+          <a:xfrm>
+            <a:off x="838200" y="3790950"/>
+            <a:ext cx="1827032" cy="142875"/>
+          </a:xfrm>
+          <a:prstGeom prst="rect">
+            <a:avLst/>
+          </a:prstGeom>
+          <a:solidFill>
+            <a:srgbClr val="EFB13C"/>
+          </a:solidFill>
+          <a:ln/>
+        </p:spPr>
+      </p:sp>
+      <p:sp>
+        <p:nvSpPr>
+          <p:cNvPr id="21" name="Text 19"/>
+          <p:cNvSpPr txBox="1"/>
+          <p:nvPr/>
+        </p:nvSpPr>
+        <p:spPr>
+          <a:xfrm>
+            <a:off x="2781300" y="3743325"/>
+            <a:ext cx="857250" cy="285750"/>
+          </a:xfrm>
+          <a:prstGeom prst="rect">
+            <a:avLst/>
+          </a:prstGeom>
+          <a:noFill/>
+          <a:ln/>
+        </p:spPr>
+        <p:txBody>
+          <a:bodyPr wrap="square" lIns="0" tIns="0" rIns="0" bIns="0" rtlCol="0" anchor="t"/>
+          <a:lstStyle/>
+          <a:p>
+            <a:pPr algn="l" indent="0" marL="0">
+              <a:lnSpc>
+                <a:spcPts val="2250"/>
+              </a:lnSpc>
+              <a:buNone/>
+            </a:pPr>
+            <a:r>
+              <a:rPr lang="en-US" sz="1875" b="1" dirty="0">
+                <a:solidFill>
+                  <a:srgbClr val="EFB13C"/>
+                </a:solidFill>
+                <a:latin typeface="Consolas" pitchFamily="34" charset="0"/>
+                <a:ea typeface="Consolas" pitchFamily="34" charset="-122"/>
+                <a:cs typeface="Consolas" pitchFamily="34" charset="-120"/>
+              </a:rPr>
+              <a:t>1.31</a:t>
+            </a:r>
+            <a:endParaRPr lang="en-US" sz="1875" dirty="0"/>
+          </a:p>
+        </p:txBody>
+      </p:sp>
+      <p:sp>
+        <p:nvSpPr>
+          <p:cNvPr id="22" name="Text 20"/>
+          <p:cNvSpPr txBox="1"/>
+          <p:nvPr/>
+        </p:nvSpPr>
+        <p:spPr>
+          <a:xfrm>
+            <a:off x="685800" y="4210050"/>
+            <a:ext cx="6286500" cy="125016"/>
+          </a:xfrm>
+          <a:prstGeom prst="rect">
+            <a:avLst/>
+          </a:prstGeom>
+          <a:noFill/>
+          <a:ln/>
+        </p:spPr>
+        <p:txBody>
+          <a:bodyPr wrap="square" lIns="0" tIns="0" rIns="0" bIns="0" rtlCol="0" anchor="t"/>
+          <a:lstStyle/>
+          <a:p>
+            <a:pPr algn="l" indent="0" marL="0">
+              <a:lnSpc>
+                <a:spcPts val="984"/>
+              </a:lnSpc>
+              <a:buNone/>
+            </a:pPr>
+            <a:r>
+              <a:rPr lang="en-US" sz="788" b="1" spc="150" kern="0" dirty="0">
                 <a:solidFill>
                   <a:srgbClr val="63798F"/>
+                </a:solidFill>
+                <a:latin typeface="Consolas" pitchFamily="34" charset="0"/>
+                <a:ea typeface="Consolas" pitchFamily="34" charset="-122"/>
+                <a:cs typeface="Consolas" pitchFamily="34" charset="-120"/>
+              </a:rPr>
+              <a:t>후보 7가지 정밀 비교  ·  1.30 ~ 1.50 구간만 확대</a:t>
+            </a:r>
+            <a:endParaRPr lang="en-US" sz="788" dirty="0"/>
+          </a:p>
+        </p:txBody>
+      </p:sp>
+      <p:sp>
+        <p:nvSpPr>
+          <p:cNvPr id="23" name="Shape 21"/>
+          <p:cNvSpPr/>
+          <p:nvPr/>
+        </p:nvSpPr>
+        <p:spPr>
+          <a:xfrm>
+            <a:off x="2476500" y="4400550"/>
+            <a:ext cx="0" cy="1333500"/>
+          </a:xfrm>
+          <a:prstGeom prst="line">
+            <a:avLst/>
+          </a:prstGeom>
+          <a:noFill/>
+          <a:ln w="12700">
+            <a:solidFill>
+              <a:srgbClr val="182838"/>
+            </a:solidFill>
+            <a:prstDash val="solid"/>
+          </a:ln>
+        </p:spPr>
+      </p:sp>
+      <p:sp>
+        <p:nvSpPr>
+          <p:cNvPr id="24" name="Shape 22"/>
+          <p:cNvSpPr/>
+          <p:nvPr/>
+        </p:nvSpPr>
+        <p:spPr>
+          <a:xfrm>
+            <a:off x="3543300" y="4400550"/>
+            <a:ext cx="0" cy="1333500"/>
+          </a:xfrm>
+          <a:prstGeom prst="line">
+            <a:avLst/>
+          </a:prstGeom>
+          <a:noFill/>
+          <a:ln w="12700">
+            <a:solidFill>
+              <a:srgbClr val="182838"/>
+            </a:solidFill>
+            <a:prstDash val="solid"/>
+          </a:ln>
+        </p:spPr>
+      </p:sp>
+      <p:sp>
+        <p:nvSpPr>
+          <p:cNvPr id="25" name="Shape 23"/>
+          <p:cNvSpPr/>
+          <p:nvPr/>
+        </p:nvSpPr>
+        <p:spPr>
+          <a:xfrm>
+            <a:off x="4610100" y="4400550"/>
+            <a:ext cx="0" cy="1333500"/>
+          </a:xfrm>
+          <a:prstGeom prst="line">
+            <a:avLst/>
+          </a:prstGeom>
+          <a:noFill/>
+          <a:ln w="12700">
+            <a:solidFill>
+              <a:srgbClr val="182838"/>
+            </a:solidFill>
+            <a:prstDash val="solid"/>
+          </a:ln>
+        </p:spPr>
+      </p:sp>
+      <p:sp>
+        <p:nvSpPr>
+          <p:cNvPr id="26" name="Shape 24"/>
+          <p:cNvSpPr/>
+          <p:nvPr/>
+        </p:nvSpPr>
+        <p:spPr>
+          <a:xfrm>
+            <a:off x="5676900" y="4400550"/>
+            <a:ext cx="0" cy="1333500"/>
+          </a:xfrm>
+          <a:prstGeom prst="line">
+            <a:avLst/>
+          </a:prstGeom>
+          <a:noFill/>
+          <a:ln w="12700">
+            <a:solidFill>
+              <a:srgbClr val="182838"/>
+            </a:solidFill>
+            <a:prstDash val="solid"/>
+          </a:ln>
+        </p:spPr>
+      </p:sp>
+      <p:sp>
+        <p:nvSpPr>
+          <p:cNvPr id="27" name="Text 25"/>
+          <p:cNvSpPr txBox="1"/>
+          <p:nvPr/>
+        </p:nvSpPr>
+        <p:spPr>
+          <a:xfrm>
+            <a:off x="685800" y="4429125"/>
+            <a:ext cx="1733550" cy="154781"/>
+          </a:xfrm>
+          <a:prstGeom prst="rect">
+            <a:avLst/>
+          </a:prstGeom>
+          <a:noFill/>
+          <a:ln/>
+        </p:spPr>
+        <p:txBody>
+          <a:bodyPr wrap="square" lIns="0" tIns="0" rIns="0" bIns="0" rtlCol="0" anchor="t"/>
+          <a:lstStyle/>
+          <a:p>
+            <a:pPr algn="l" indent="0" marL="0">
+              <a:lnSpc>
+                <a:spcPts val="1219"/>
+              </a:lnSpc>
+              <a:buNone/>
+            </a:pPr>
+            <a:r>
+              <a:rPr lang="en-US" sz="938" b="1" dirty="0">
+                <a:solidFill>
+                  <a:srgbClr val="EFB13C"/>
                 </a:solidFill>
                 <a:latin typeface="Malgun Gothic" pitchFamily="34" charset="0"/>
                 <a:ea typeface="Malgun Gothic" pitchFamily="34" charset="-122"/>
                 <a:cs typeface="Malgun Gothic" pitchFamily="34" charset="-120"/>
               </a:rPr>
-              <a:t>작성 예정 — 이 장은 아직 만들지 않았습니다.</a:t>
-            </a:r>
-            <a:endParaRPr lang="en-US" sz="1275" dirty="0"/>
-          </a:p>
-        </p:txBody>
-      </p:sp>
-      <p:sp>
-        <p:nvSpPr>
-          <p:cNvPr id="14" name="Text 12"/>
-          <p:cNvSpPr txBox="1"/>
-          <p:nvPr/>
-        </p:nvSpPr>
-        <p:spPr>
-          <a:xfrm>
-            <a:off x="685800" y="4038600"/>
-            <a:ext cx="10820400" cy="125016"/>
-          </a:xfrm>
-          <a:prstGeom prst="rect">
-            <a:avLst/>
-          </a:prstGeom>
-          <a:noFill/>
-          <a:ln/>
-        </p:spPr>
-        <p:txBody>
-          <a:bodyPr wrap="square" lIns="0" tIns="0" rIns="0" bIns="0" rtlCol="0" anchor="t"/>
-          <a:lstStyle/>
-          <a:p>
-            <a:pPr algn="l" indent="0" marL="0">
-              <a:lnSpc>
-                <a:spcPts val="984"/>
-              </a:lnSpc>
-              <a:buNone/>
-            </a:pPr>
-            <a:r>
-              <a:rPr lang="en-US" sz="788" b="1" spc="150" kern="0" dirty="0">
-                <a:solidFill>
-                  <a:srgbClr val="7E2333"/>
+              <a:t>GP · RBF</a:t>
+            </a:r>
+            <a:endParaRPr lang="en-US" sz="938" dirty="0"/>
+          </a:p>
+        </p:txBody>
+      </p:sp>
+      <p:sp>
+        <p:nvSpPr>
+          <p:cNvPr id="28" name="Shape 26"/>
+          <p:cNvSpPr/>
+          <p:nvPr/>
+        </p:nvSpPr>
+        <p:spPr>
+          <a:xfrm>
+            <a:off x="2476500" y="4438650"/>
+            <a:ext cx="256032" cy="123825"/>
+          </a:xfrm>
+          <a:prstGeom prst="rect">
+            <a:avLst/>
+          </a:prstGeom>
+          <a:solidFill>
+            <a:srgbClr val="EFB13C"/>
+          </a:solidFill>
+          <a:ln/>
+        </p:spPr>
+      </p:sp>
+      <p:sp>
+        <p:nvSpPr>
+          <p:cNvPr id="29" name="Text 27"/>
+          <p:cNvSpPr txBox="1"/>
+          <p:nvPr/>
+        </p:nvSpPr>
+        <p:spPr>
+          <a:xfrm>
+            <a:off x="2808732" y="4429125"/>
+            <a:ext cx="571500" cy="167164"/>
+          </a:xfrm>
+          <a:prstGeom prst="rect">
+            <a:avLst/>
+          </a:prstGeom>
+          <a:noFill/>
+          <a:ln/>
+        </p:spPr>
+        <p:txBody>
+          <a:bodyPr wrap="square" lIns="0" tIns="0" rIns="0" bIns="0" rtlCol="0" anchor="t"/>
+          <a:lstStyle/>
+          <a:p>
+            <a:pPr algn="l" indent="0" marL="0">
+              <a:lnSpc>
+                <a:spcPts val="1316"/>
+              </a:lnSpc>
+              <a:buNone/>
+            </a:pPr>
+            <a:r>
+              <a:rPr lang="en-US" sz="1013" b="1" dirty="0">
+                <a:solidFill>
+                  <a:srgbClr val="EFB13C"/>
                 </a:solidFill>
                 <a:latin typeface="Consolas" pitchFamily="34" charset="0"/>
                 <a:ea typeface="Consolas" pitchFamily="34" charset="-122"/>
                 <a:cs typeface="Consolas" pitchFamily="34" charset="-120"/>
               </a:rPr>
-              <a:t>SLIDE 10  ·  TODO</a:t>
+              <a:t>1.312</a:t>
+            </a:r>
+            <a:endParaRPr lang="en-US" sz="1013" dirty="0"/>
+          </a:p>
+        </p:txBody>
+      </p:sp>
+      <p:sp>
+        <p:nvSpPr>
+          <p:cNvPr id="30" name="Text 28"/>
+          <p:cNvSpPr txBox="1"/>
+          <p:nvPr/>
+        </p:nvSpPr>
+        <p:spPr>
+          <a:xfrm>
+            <a:off x="685800" y="4619625"/>
+            <a:ext cx="1733550" cy="154781"/>
+          </a:xfrm>
+          <a:prstGeom prst="rect">
+            <a:avLst/>
+          </a:prstGeom>
+          <a:noFill/>
+          <a:ln/>
+        </p:spPr>
+        <p:txBody>
+          <a:bodyPr wrap="square" lIns="0" tIns="0" rIns="0" bIns="0" rtlCol="0" anchor="t"/>
+          <a:lstStyle/>
+          <a:p>
+            <a:pPr algn="l" indent="0" marL="0">
+              <a:lnSpc>
+                <a:spcPts val="1219"/>
+              </a:lnSpc>
+              <a:buNone/>
+            </a:pPr>
+            <a:r>
+              <a:rPr lang="en-US" sz="938" dirty="0">
+                <a:solidFill>
+                  <a:srgbClr val="93A6BA"/>
+                </a:solidFill>
+                <a:latin typeface="Malgun Gothic" pitchFamily="34" charset="0"/>
+                <a:ea typeface="Malgun Gothic" pitchFamily="34" charset="-122"/>
+                <a:cs typeface="Malgun Gothic" pitchFamily="34" charset="-120"/>
+              </a:rPr>
+              <a:t>Rational Quadratic</a:t>
+            </a:r>
+            <a:endParaRPr lang="en-US" sz="938" dirty="0"/>
+          </a:p>
+        </p:txBody>
+      </p:sp>
+      <p:sp>
+        <p:nvSpPr>
+          <p:cNvPr id="31" name="Shape 29"/>
+          <p:cNvSpPr/>
+          <p:nvPr/>
+        </p:nvSpPr>
+        <p:spPr>
+          <a:xfrm>
+            <a:off x="2476500" y="4629150"/>
+            <a:ext cx="597408" cy="123825"/>
+          </a:xfrm>
+          <a:prstGeom prst="rect">
+            <a:avLst/>
+          </a:prstGeom>
+          <a:solidFill>
+            <a:srgbClr val="8A6620"/>
+          </a:solidFill>
+          <a:ln/>
+        </p:spPr>
+      </p:sp>
+      <p:sp>
+        <p:nvSpPr>
+          <p:cNvPr id="32" name="Text 30"/>
+          <p:cNvSpPr txBox="1"/>
+          <p:nvPr/>
+        </p:nvSpPr>
+        <p:spPr>
+          <a:xfrm>
+            <a:off x="3150108" y="4619625"/>
+            <a:ext cx="571500" cy="154781"/>
+          </a:xfrm>
+          <a:prstGeom prst="rect">
+            <a:avLst/>
+          </a:prstGeom>
+          <a:noFill/>
+          <a:ln/>
+        </p:spPr>
+        <p:txBody>
+          <a:bodyPr wrap="square" lIns="0" tIns="0" rIns="0" bIns="0" rtlCol="0" anchor="t"/>
+          <a:lstStyle/>
+          <a:p>
+            <a:pPr algn="l" indent="0" marL="0">
+              <a:lnSpc>
+                <a:spcPts val="1219"/>
+              </a:lnSpc>
+              <a:buNone/>
+            </a:pPr>
+            <a:r>
+              <a:rPr lang="en-US" sz="938" dirty="0">
+                <a:solidFill>
+                  <a:srgbClr val="93A6BA"/>
+                </a:solidFill>
+                <a:latin typeface="Consolas" pitchFamily="34" charset="0"/>
+                <a:ea typeface="Consolas" pitchFamily="34" charset="-122"/>
+                <a:cs typeface="Consolas" pitchFamily="34" charset="-120"/>
+              </a:rPr>
+              <a:t>1.328</a:t>
+            </a:r>
+            <a:endParaRPr lang="en-US" sz="938" dirty="0"/>
+          </a:p>
+        </p:txBody>
+      </p:sp>
+      <p:sp>
+        <p:nvSpPr>
+          <p:cNvPr id="33" name="Text 31"/>
+          <p:cNvSpPr txBox="1"/>
+          <p:nvPr/>
+        </p:nvSpPr>
+        <p:spPr>
+          <a:xfrm>
+            <a:off x="685800" y="4810125"/>
+            <a:ext cx="1733550" cy="154781"/>
+          </a:xfrm>
+          <a:prstGeom prst="rect">
+            <a:avLst/>
+          </a:prstGeom>
+          <a:noFill/>
+          <a:ln/>
+        </p:spPr>
+        <p:txBody>
+          <a:bodyPr wrap="square" lIns="0" tIns="0" rIns="0" bIns="0" rtlCol="0" anchor="t"/>
+          <a:lstStyle/>
+          <a:p>
+            <a:pPr algn="l" indent="0" marL="0">
+              <a:lnSpc>
+                <a:spcPts val="1219"/>
+              </a:lnSpc>
+              <a:buNone/>
+            </a:pPr>
+            <a:r>
+              <a:rPr lang="en-US" sz="938" dirty="0">
+                <a:solidFill>
+                  <a:srgbClr val="93A6BA"/>
+                </a:solidFill>
+                <a:latin typeface="Malgun Gothic" pitchFamily="34" charset="0"/>
+                <a:ea typeface="Malgun Gothic" pitchFamily="34" charset="-122"/>
+                <a:cs typeface="Malgun Gothic" pitchFamily="34" charset="-120"/>
+              </a:rPr>
+              <a:t>Matérn 5/2</a:t>
+            </a:r>
+            <a:endParaRPr lang="en-US" sz="938" dirty="0"/>
+          </a:p>
+        </p:txBody>
+      </p:sp>
+      <p:sp>
+        <p:nvSpPr>
+          <p:cNvPr id="34" name="Shape 32"/>
+          <p:cNvSpPr/>
+          <p:nvPr/>
+        </p:nvSpPr>
+        <p:spPr>
+          <a:xfrm>
+            <a:off x="2476500" y="4819650"/>
+            <a:ext cx="704088" cy="123825"/>
+          </a:xfrm>
+          <a:prstGeom prst="rect">
+            <a:avLst/>
+          </a:prstGeom>
+          <a:solidFill>
+            <a:srgbClr val="8A6620"/>
+          </a:solidFill>
+          <a:ln/>
+        </p:spPr>
+      </p:sp>
+      <p:sp>
+        <p:nvSpPr>
+          <p:cNvPr id="35" name="Text 33"/>
+          <p:cNvSpPr txBox="1"/>
+          <p:nvPr/>
+        </p:nvSpPr>
+        <p:spPr>
+          <a:xfrm>
+            <a:off x="3256788" y="4810125"/>
+            <a:ext cx="571500" cy="154781"/>
+          </a:xfrm>
+          <a:prstGeom prst="rect">
+            <a:avLst/>
+          </a:prstGeom>
+          <a:noFill/>
+          <a:ln/>
+        </p:spPr>
+        <p:txBody>
+          <a:bodyPr wrap="square" lIns="0" tIns="0" rIns="0" bIns="0" rtlCol="0" anchor="t"/>
+          <a:lstStyle/>
+          <a:p>
+            <a:pPr algn="l" indent="0" marL="0">
+              <a:lnSpc>
+                <a:spcPts val="1219"/>
+              </a:lnSpc>
+              <a:buNone/>
+            </a:pPr>
+            <a:r>
+              <a:rPr lang="en-US" sz="938" dirty="0">
+                <a:solidFill>
+                  <a:srgbClr val="93A6BA"/>
+                </a:solidFill>
+                <a:latin typeface="Consolas" pitchFamily="34" charset="0"/>
+                <a:ea typeface="Consolas" pitchFamily="34" charset="-122"/>
+                <a:cs typeface="Consolas" pitchFamily="34" charset="-120"/>
+              </a:rPr>
+              <a:t>1.333</a:t>
+            </a:r>
+            <a:endParaRPr lang="en-US" sz="938" dirty="0"/>
+          </a:p>
+        </p:txBody>
+      </p:sp>
+      <p:sp>
+        <p:nvSpPr>
+          <p:cNvPr id="36" name="Text 34"/>
+          <p:cNvSpPr txBox="1"/>
+          <p:nvPr/>
+        </p:nvSpPr>
+        <p:spPr>
+          <a:xfrm>
+            <a:off x="685800" y="5000625"/>
+            <a:ext cx="1733550" cy="154781"/>
+          </a:xfrm>
+          <a:prstGeom prst="rect">
+            <a:avLst/>
+          </a:prstGeom>
+          <a:noFill/>
+          <a:ln/>
+        </p:spPr>
+        <p:txBody>
+          <a:bodyPr wrap="square" lIns="0" tIns="0" rIns="0" bIns="0" rtlCol="0" anchor="t"/>
+          <a:lstStyle/>
+          <a:p>
+            <a:pPr algn="l" indent="0" marL="0">
+              <a:lnSpc>
+                <a:spcPts val="1219"/>
+              </a:lnSpc>
+              <a:buNone/>
+            </a:pPr>
+            <a:r>
+              <a:rPr lang="en-US" sz="938" dirty="0">
+                <a:solidFill>
+                  <a:srgbClr val="93A6BA"/>
+                </a:solidFill>
+                <a:latin typeface="Malgun Gothic" pitchFamily="34" charset="0"/>
+                <a:ea typeface="Malgun Gothic" pitchFamily="34" charset="-122"/>
+                <a:cs typeface="Malgun Gothic" pitchFamily="34" charset="-120"/>
+              </a:rPr>
+              <a:t>Matérn 3/2</a:t>
+            </a:r>
+            <a:endParaRPr lang="en-US" sz="938" dirty="0"/>
+          </a:p>
+        </p:txBody>
+      </p:sp>
+      <p:sp>
+        <p:nvSpPr>
+          <p:cNvPr id="37" name="Shape 35"/>
+          <p:cNvSpPr/>
+          <p:nvPr/>
+        </p:nvSpPr>
+        <p:spPr>
+          <a:xfrm>
+            <a:off x="2476500" y="5010150"/>
+            <a:ext cx="1045464" cy="123825"/>
+          </a:xfrm>
+          <a:prstGeom prst="rect">
+            <a:avLst/>
+          </a:prstGeom>
+          <a:solidFill>
+            <a:srgbClr val="8A6620"/>
+          </a:solidFill>
+          <a:ln/>
+        </p:spPr>
+      </p:sp>
+      <p:sp>
+        <p:nvSpPr>
+          <p:cNvPr id="38" name="Text 36"/>
+          <p:cNvSpPr txBox="1"/>
+          <p:nvPr/>
+        </p:nvSpPr>
+        <p:spPr>
+          <a:xfrm>
+            <a:off x="3598164" y="5000625"/>
+            <a:ext cx="571500" cy="154781"/>
+          </a:xfrm>
+          <a:prstGeom prst="rect">
+            <a:avLst/>
+          </a:prstGeom>
+          <a:noFill/>
+          <a:ln/>
+        </p:spPr>
+        <p:txBody>
+          <a:bodyPr wrap="square" lIns="0" tIns="0" rIns="0" bIns="0" rtlCol="0" anchor="t"/>
+          <a:lstStyle/>
+          <a:p>
+            <a:pPr algn="l" indent="0" marL="0">
+              <a:lnSpc>
+                <a:spcPts val="1219"/>
+              </a:lnSpc>
+              <a:buNone/>
+            </a:pPr>
+            <a:r>
+              <a:rPr lang="en-US" sz="938" dirty="0">
+                <a:solidFill>
+                  <a:srgbClr val="93A6BA"/>
+                </a:solidFill>
+                <a:latin typeface="Consolas" pitchFamily="34" charset="0"/>
+                <a:ea typeface="Consolas" pitchFamily="34" charset="-122"/>
+                <a:cs typeface="Consolas" pitchFamily="34" charset="-120"/>
+              </a:rPr>
+              <a:t>1.349</a:t>
+            </a:r>
+            <a:endParaRPr lang="en-US" sz="938" dirty="0"/>
+          </a:p>
+        </p:txBody>
+      </p:sp>
+      <p:sp>
+        <p:nvSpPr>
+          <p:cNvPr id="39" name="Text 37"/>
+          <p:cNvSpPr txBox="1"/>
+          <p:nvPr/>
+        </p:nvSpPr>
+        <p:spPr>
+          <a:xfrm>
+            <a:off x="685800" y="5191125"/>
+            <a:ext cx="1733550" cy="154781"/>
+          </a:xfrm>
+          <a:prstGeom prst="rect">
+            <a:avLst/>
+          </a:prstGeom>
+          <a:noFill/>
+          <a:ln/>
+        </p:spPr>
+        <p:txBody>
+          <a:bodyPr wrap="square" lIns="0" tIns="0" rIns="0" bIns="0" rtlCol="0" anchor="t"/>
+          <a:lstStyle/>
+          <a:p>
+            <a:pPr algn="l" indent="0" marL="0">
+              <a:lnSpc>
+                <a:spcPts val="1219"/>
+              </a:lnSpc>
+              <a:buNone/>
+            </a:pPr>
+            <a:r>
+              <a:rPr lang="en-US" sz="938" dirty="0">
+                <a:solidFill>
+                  <a:srgbClr val="93A6BA"/>
+                </a:solidFill>
+                <a:latin typeface="Malgun Gothic" pitchFamily="34" charset="0"/>
+                <a:ea typeface="Malgun Gothic" pitchFamily="34" charset="-122"/>
+                <a:cs typeface="Malgun Gothic" pitchFamily="34" charset="-120"/>
+              </a:rPr>
+              <a:t>지수형</a:t>
+            </a:r>
+            <a:endParaRPr lang="en-US" sz="938" dirty="0"/>
+          </a:p>
+        </p:txBody>
+      </p:sp>
+      <p:sp>
+        <p:nvSpPr>
+          <p:cNvPr id="40" name="Shape 38"/>
+          <p:cNvSpPr/>
+          <p:nvPr/>
+        </p:nvSpPr>
+        <p:spPr>
+          <a:xfrm>
+            <a:off x="2476500" y="5200650"/>
+            <a:ext cx="2112264" cy="123825"/>
+          </a:xfrm>
+          <a:prstGeom prst="rect">
+            <a:avLst/>
+          </a:prstGeom>
+          <a:solidFill>
+            <a:srgbClr val="3F5468"/>
+          </a:solidFill>
+          <a:ln/>
+        </p:spPr>
+      </p:sp>
+      <p:sp>
+        <p:nvSpPr>
+          <p:cNvPr id="41" name="Text 39"/>
+          <p:cNvSpPr txBox="1"/>
+          <p:nvPr/>
+        </p:nvSpPr>
+        <p:spPr>
+          <a:xfrm>
+            <a:off x="4664964" y="5191125"/>
+            <a:ext cx="571500" cy="154781"/>
+          </a:xfrm>
+          <a:prstGeom prst="rect">
+            <a:avLst/>
+          </a:prstGeom>
+          <a:noFill/>
+          <a:ln/>
+        </p:spPr>
+        <p:txBody>
+          <a:bodyPr wrap="square" lIns="0" tIns="0" rIns="0" bIns="0" rtlCol="0" anchor="t"/>
+          <a:lstStyle/>
+          <a:p>
+            <a:pPr algn="l" indent="0" marL="0">
+              <a:lnSpc>
+                <a:spcPts val="1219"/>
+              </a:lnSpc>
+              <a:buNone/>
+            </a:pPr>
+            <a:r>
+              <a:rPr lang="en-US" sz="938" dirty="0">
+                <a:solidFill>
+                  <a:srgbClr val="93A6BA"/>
+                </a:solidFill>
+                <a:latin typeface="Consolas" pitchFamily="34" charset="0"/>
+                <a:ea typeface="Consolas" pitchFamily="34" charset="-122"/>
+                <a:cs typeface="Consolas" pitchFamily="34" charset="-120"/>
+              </a:rPr>
+              <a:t>1.399</a:t>
+            </a:r>
+            <a:endParaRPr lang="en-US" sz="938" dirty="0"/>
+          </a:p>
+        </p:txBody>
+      </p:sp>
+      <p:sp>
+        <p:nvSpPr>
+          <p:cNvPr id="42" name="Text 40"/>
+          <p:cNvSpPr txBox="1"/>
+          <p:nvPr/>
+        </p:nvSpPr>
+        <p:spPr>
+          <a:xfrm>
+            <a:off x="685800" y="5381625"/>
+            <a:ext cx="1733550" cy="154781"/>
+          </a:xfrm>
+          <a:prstGeom prst="rect">
+            <a:avLst/>
+          </a:prstGeom>
+          <a:noFill/>
+          <a:ln/>
+        </p:spPr>
+        <p:txBody>
+          <a:bodyPr wrap="square" lIns="0" tIns="0" rIns="0" bIns="0" rtlCol="0" anchor="t"/>
+          <a:lstStyle/>
+          <a:p>
+            <a:pPr algn="l" indent="0" marL="0">
+              <a:lnSpc>
+                <a:spcPts val="1219"/>
+              </a:lnSpc>
+              <a:buNone/>
+            </a:pPr>
+            <a:r>
+              <a:rPr lang="en-US" sz="938" dirty="0">
+                <a:solidFill>
+                  <a:srgbClr val="93A6BA"/>
+                </a:solidFill>
+                <a:latin typeface="Malgun Gothic" pitchFamily="34" charset="0"/>
+                <a:ea typeface="Malgun Gothic" pitchFamily="34" charset="-122"/>
+                <a:cs typeface="Malgun Gothic" pitchFamily="34" charset="-120"/>
+              </a:rPr>
+              <a:t>거리가중 평균</a:t>
+            </a:r>
+            <a:endParaRPr lang="en-US" sz="938" dirty="0"/>
+          </a:p>
+        </p:txBody>
+      </p:sp>
+      <p:sp>
+        <p:nvSpPr>
+          <p:cNvPr id="43" name="Shape 41"/>
+          <p:cNvSpPr/>
+          <p:nvPr/>
+        </p:nvSpPr>
+        <p:spPr>
+          <a:xfrm>
+            <a:off x="2476500" y="5391150"/>
+            <a:ext cx="2645664" cy="123825"/>
+          </a:xfrm>
+          <a:prstGeom prst="rect">
+            <a:avLst/>
+          </a:prstGeom>
+          <a:solidFill>
+            <a:srgbClr val="3F5468"/>
+          </a:solidFill>
+          <a:ln/>
+        </p:spPr>
+      </p:sp>
+      <p:sp>
+        <p:nvSpPr>
+          <p:cNvPr id="44" name="Text 42"/>
+          <p:cNvSpPr txBox="1"/>
+          <p:nvPr/>
+        </p:nvSpPr>
+        <p:spPr>
+          <a:xfrm>
+            <a:off x="5198364" y="5381625"/>
+            <a:ext cx="571500" cy="154781"/>
+          </a:xfrm>
+          <a:prstGeom prst="rect">
+            <a:avLst/>
+          </a:prstGeom>
+          <a:noFill/>
+          <a:ln/>
+        </p:spPr>
+        <p:txBody>
+          <a:bodyPr wrap="square" lIns="0" tIns="0" rIns="0" bIns="0" rtlCol="0" anchor="t"/>
+          <a:lstStyle/>
+          <a:p>
+            <a:pPr algn="l" indent="0" marL="0">
+              <a:lnSpc>
+                <a:spcPts val="1219"/>
+              </a:lnSpc>
+              <a:buNone/>
+            </a:pPr>
+            <a:r>
+              <a:rPr lang="en-US" sz="938" dirty="0">
+                <a:solidFill>
+                  <a:srgbClr val="93A6BA"/>
+                </a:solidFill>
+                <a:latin typeface="Consolas" pitchFamily="34" charset="0"/>
+                <a:ea typeface="Consolas" pitchFamily="34" charset="-122"/>
+                <a:cs typeface="Consolas" pitchFamily="34" charset="-120"/>
+              </a:rPr>
+              <a:t>1.424</a:t>
+            </a:r>
+            <a:endParaRPr lang="en-US" sz="938" dirty="0"/>
+          </a:p>
+        </p:txBody>
+      </p:sp>
+      <p:sp>
+        <p:nvSpPr>
+          <p:cNvPr id="45" name="Text 43"/>
+          <p:cNvSpPr txBox="1"/>
+          <p:nvPr/>
+        </p:nvSpPr>
+        <p:spPr>
+          <a:xfrm>
+            <a:off x="685800" y="5572125"/>
+            <a:ext cx="1733550" cy="154781"/>
+          </a:xfrm>
+          <a:prstGeom prst="rect">
+            <a:avLst/>
+          </a:prstGeom>
+          <a:noFill/>
+          <a:ln/>
+        </p:spPr>
+        <p:txBody>
+          <a:bodyPr wrap="square" lIns="0" tIns="0" rIns="0" bIns="0" rtlCol="0" anchor="t"/>
+          <a:lstStyle/>
+          <a:p>
+            <a:pPr algn="l" indent="0" marL="0">
+              <a:lnSpc>
+                <a:spcPts val="1219"/>
+              </a:lnSpc>
+              <a:buNone/>
+            </a:pPr>
+            <a:r>
+              <a:rPr lang="en-US" sz="938" dirty="0">
+                <a:solidFill>
+                  <a:srgbClr val="93A6BA"/>
+                </a:solidFill>
+                <a:latin typeface="Malgun Gothic" pitchFamily="34" charset="0"/>
+                <a:ea typeface="Malgun Gothic" pitchFamily="34" charset="-122"/>
+                <a:cs typeface="Malgun Gothic" pitchFamily="34" charset="-120"/>
+              </a:rPr>
+              <a:t>온도구간 평균</a:t>
+            </a:r>
+            <a:endParaRPr lang="en-US" sz="938" dirty="0"/>
+          </a:p>
+        </p:txBody>
+      </p:sp>
+      <p:sp>
+        <p:nvSpPr>
+          <p:cNvPr id="46" name="Shape 44"/>
+          <p:cNvSpPr/>
+          <p:nvPr/>
+        </p:nvSpPr>
+        <p:spPr>
+          <a:xfrm>
+            <a:off x="2476500" y="5581650"/>
+            <a:ext cx="3904488" cy="123825"/>
+          </a:xfrm>
+          <a:prstGeom prst="rect">
+            <a:avLst/>
+          </a:prstGeom>
+          <a:solidFill>
+            <a:srgbClr val="5E7793"/>
+          </a:solidFill>
+          <a:ln/>
+        </p:spPr>
+      </p:sp>
+      <p:sp>
+        <p:nvSpPr>
+          <p:cNvPr id="47" name="Text 45"/>
+          <p:cNvSpPr txBox="1"/>
+          <p:nvPr/>
+        </p:nvSpPr>
+        <p:spPr>
+          <a:xfrm>
+            <a:off x="6457188" y="5572125"/>
+            <a:ext cx="571500" cy="154781"/>
+          </a:xfrm>
+          <a:prstGeom prst="rect">
+            <a:avLst/>
+          </a:prstGeom>
+          <a:noFill/>
+          <a:ln/>
+        </p:spPr>
+        <p:txBody>
+          <a:bodyPr wrap="square" lIns="0" tIns="0" rIns="0" bIns="0" rtlCol="0" anchor="t"/>
+          <a:lstStyle/>
+          <a:p>
+            <a:pPr algn="l" indent="0" marL="0">
+              <a:lnSpc>
+                <a:spcPts val="1219"/>
+              </a:lnSpc>
+              <a:buNone/>
+            </a:pPr>
+            <a:r>
+              <a:rPr lang="en-US" sz="938" dirty="0">
+                <a:solidFill>
+                  <a:srgbClr val="93A6BA"/>
+                </a:solidFill>
+                <a:latin typeface="Consolas" pitchFamily="34" charset="0"/>
+                <a:ea typeface="Consolas" pitchFamily="34" charset="-122"/>
+                <a:cs typeface="Consolas" pitchFamily="34" charset="-120"/>
+              </a:rPr>
+              <a:t>1.483</a:t>
+            </a:r>
+            <a:endParaRPr lang="en-US" sz="938" dirty="0"/>
+          </a:p>
+        </p:txBody>
+      </p:sp>
+      <p:sp>
+        <p:nvSpPr>
+          <p:cNvPr id="48" name="Text 46"/>
+          <p:cNvSpPr txBox="1"/>
+          <p:nvPr/>
+        </p:nvSpPr>
+        <p:spPr>
+          <a:xfrm>
+            <a:off x="2247900" y="5791200"/>
+            <a:ext cx="457200" cy="117634"/>
+          </a:xfrm>
+          <a:prstGeom prst="rect">
+            <a:avLst/>
+          </a:prstGeom>
+          <a:noFill/>
+          <a:ln/>
+        </p:spPr>
+        <p:txBody>
+          <a:bodyPr wrap="square" lIns="0" tIns="0" rIns="0" bIns="0" rtlCol="0" anchor="t"/>
+          <a:lstStyle/>
+          <a:p>
+            <a:pPr algn="ctr" indent="0" marL="0">
+              <a:lnSpc>
+                <a:spcPts val="926"/>
+              </a:lnSpc>
+              <a:buNone/>
+            </a:pPr>
+            <a:r>
+              <a:rPr lang="en-US" sz="713" dirty="0">
+                <a:solidFill>
+                  <a:srgbClr val="63798F"/>
+                </a:solidFill>
+                <a:latin typeface="Consolas" pitchFamily="34" charset="0"/>
+                <a:ea typeface="Consolas" pitchFamily="34" charset="-122"/>
+                <a:cs typeface="Consolas" pitchFamily="34" charset="-120"/>
+              </a:rPr>
+              <a:t>1.30</a:t>
+            </a:r>
+            <a:endParaRPr lang="en-US" sz="713" dirty="0"/>
+          </a:p>
+        </p:txBody>
+      </p:sp>
+      <p:sp>
+        <p:nvSpPr>
+          <p:cNvPr id="49" name="Text 47"/>
+          <p:cNvSpPr txBox="1"/>
+          <p:nvPr/>
+        </p:nvSpPr>
+        <p:spPr>
+          <a:xfrm>
+            <a:off x="3314700" y="5791200"/>
+            <a:ext cx="457200" cy="117634"/>
+          </a:xfrm>
+          <a:prstGeom prst="rect">
+            <a:avLst/>
+          </a:prstGeom>
+          <a:noFill/>
+          <a:ln/>
+        </p:spPr>
+        <p:txBody>
+          <a:bodyPr wrap="square" lIns="0" tIns="0" rIns="0" bIns="0" rtlCol="0" anchor="t"/>
+          <a:lstStyle/>
+          <a:p>
+            <a:pPr algn="ctr" indent="0" marL="0">
+              <a:lnSpc>
+                <a:spcPts val="926"/>
+              </a:lnSpc>
+              <a:buNone/>
+            </a:pPr>
+            <a:r>
+              <a:rPr lang="en-US" sz="713" dirty="0">
+                <a:solidFill>
+                  <a:srgbClr val="63798F"/>
+                </a:solidFill>
+                <a:latin typeface="Consolas" pitchFamily="34" charset="0"/>
+                <a:ea typeface="Consolas" pitchFamily="34" charset="-122"/>
+                <a:cs typeface="Consolas" pitchFamily="34" charset="-120"/>
+              </a:rPr>
+              <a:t>1.35</a:t>
+            </a:r>
+            <a:endParaRPr lang="en-US" sz="713" dirty="0"/>
+          </a:p>
+        </p:txBody>
+      </p:sp>
+      <p:sp>
+        <p:nvSpPr>
+          <p:cNvPr id="50" name="Text 48"/>
+          <p:cNvSpPr txBox="1"/>
+          <p:nvPr/>
+        </p:nvSpPr>
+        <p:spPr>
+          <a:xfrm>
+            <a:off x="4381500" y="5791200"/>
+            <a:ext cx="457200" cy="117634"/>
+          </a:xfrm>
+          <a:prstGeom prst="rect">
+            <a:avLst/>
+          </a:prstGeom>
+          <a:noFill/>
+          <a:ln/>
+        </p:spPr>
+        <p:txBody>
+          <a:bodyPr wrap="square" lIns="0" tIns="0" rIns="0" bIns="0" rtlCol="0" anchor="t"/>
+          <a:lstStyle/>
+          <a:p>
+            <a:pPr algn="ctr" indent="0" marL="0">
+              <a:lnSpc>
+                <a:spcPts val="926"/>
+              </a:lnSpc>
+              <a:buNone/>
+            </a:pPr>
+            <a:r>
+              <a:rPr lang="en-US" sz="713" dirty="0">
+                <a:solidFill>
+                  <a:srgbClr val="63798F"/>
+                </a:solidFill>
+                <a:latin typeface="Consolas" pitchFamily="34" charset="0"/>
+                <a:ea typeface="Consolas" pitchFamily="34" charset="-122"/>
+                <a:cs typeface="Consolas" pitchFamily="34" charset="-120"/>
+              </a:rPr>
+              <a:t>1.40</a:t>
+            </a:r>
+            <a:endParaRPr lang="en-US" sz="713" dirty="0"/>
+          </a:p>
+        </p:txBody>
+      </p:sp>
+      <p:sp>
+        <p:nvSpPr>
+          <p:cNvPr id="51" name="Text 49"/>
+          <p:cNvSpPr txBox="1"/>
+          <p:nvPr/>
+        </p:nvSpPr>
+        <p:spPr>
+          <a:xfrm>
+            <a:off x="5448300" y="5791200"/>
+            <a:ext cx="457200" cy="117634"/>
+          </a:xfrm>
+          <a:prstGeom prst="rect">
+            <a:avLst/>
+          </a:prstGeom>
+          <a:noFill/>
+          <a:ln/>
+        </p:spPr>
+        <p:txBody>
+          <a:bodyPr wrap="square" lIns="0" tIns="0" rIns="0" bIns="0" rtlCol="0" anchor="t"/>
+          <a:lstStyle/>
+          <a:p>
+            <a:pPr algn="ctr" indent="0" marL="0">
+              <a:lnSpc>
+                <a:spcPts val="926"/>
+              </a:lnSpc>
+              <a:buNone/>
+            </a:pPr>
+            <a:r>
+              <a:rPr lang="en-US" sz="713" dirty="0">
+                <a:solidFill>
+                  <a:srgbClr val="63798F"/>
+                </a:solidFill>
+                <a:latin typeface="Consolas" pitchFamily="34" charset="0"/>
+                <a:ea typeface="Consolas" pitchFamily="34" charset="-122"/>
+                <a:cs typeface="Consolas" pitchFamily="34" charset="-120"/>
+              </a:rPr>
+              <a:t>1.45</a:t>
+            </a:r>
+            <a:endParaRPr lang="en-US" sz="713" dirty="0"/>
+          </a:p>
+        </p:txBody>
+      </p:sp>
+      <p:sp>
+        <p:nvSpPr>
+          <p:cNvPr id="52" name="Shape 50"/>
+          <p:cNvSpPr/>
+          <p:nvPr/>
+        </p:nvSpPr>
+        <p:spPr>
+          <a:xfrm>
+            <a:off x="7353300" y="2705100"/>
+            <a:ext cx="4152900" cy="19050"/>
+          </a:xfrm>
+          <a:prstGeom prst="rect">
+            <a:avLst/>
+          </a:prstGeom>
+          <a:solidFill>
+            <a:srgbClr val="EFB13C"/>
+          </a:solidFill>
+          <a:ln/>
+        </p:spPr>
+      </p:sp>
+      <p:sp>
+        <p:nvSpPr>
+          <p:cNvPr id="53" name="Text 51"/>
+          <p:cNvSpPr txBox="1"/>
+          <p:nvPr/>
+        </p:nvSpPr>
+        <p:spPr>
+          <a:xfrm>
+            <a:off x="7353300" y="2838450"/>
+            <a:ext cx="4152900" cy="125016"/>
+          </a:xfrm>
+          <a:prstGeom prst="rect">
+            <a:avLst/>
+          </a:prstGeom>
+          <a:noFill/>
+          <a:ln/>
+        </p:spPr>
+        <p:txBody>
+          <a:bodyPr wrap="square" lIns="0" tIns="0" rIns="0" bIns="0" rtlCol="0" anchor="t"/>
+          <a:lstStyle/>
+          <a:p>
+            <a:pPr algn="l" indent="0" marL="0">
+              <a:lnSpc>
+                <a:spcPts val="984"/>
+              </a:lnSpc>
+              <a:buNone/>
+            </a:pPr>
+            <a:r>
+              <a:rPr lang="en-US" sz="788" b="1" spc="150" kern="0" dirty="0">
+                <a:solidFill>
+                  <a:srgbClr val="63798F"/>
+                </a:solidFill>
+                <a:latin typeface="Consolas" pitchFamily="34" charset="0"/>
+                <a:ea typeface="Consolas" pitchFamily="34" charset="-122"/>
+                <a:cs typeface="Consolas" pitchFamily="34" charset="-120"/>
+              </a:rPr>
+              <a:t>방식별 보정 곡선  ·  0 ~ 30℃  ·  MW</a:t>
             </a:r>
             <a:endParaRPr lang="en-US" sz="788" dirty="0"/>
           </a:p>
@@ -4807,14 +6232,62 @@
       </p:sp>
       <p:sp>
         <p:nvSpPr>
-          <p:cNvPr id="15" name="Shape 13"/>
-          <p:cNvSpPr/>
-          <p:nvPr/>
-        </p:nvSpPr>
-        <p:spPr>
-          <a:xfrm>
-            <a:off x="685800" y="6057900"/>
-            <a:ext cx="10820400" cy="0"/>
+          <p:cNvPr id="54" name="Shape 52"/>
+          <p:cNvSpPr/>
+          <p:nvPr/>
+        </p:nvSpPr>
+        <p:spPr>
+          <a:xfrm>
+            <a:off x="7353300" y="3067050"/>
+            <a:ext cx="4152900" cy="2057400"/>
+          </a:xfrm>
+          <a:prstGeom prst="rect">
+            <a:avLst/>
+          </a:prstGeom>
+          <a:solidFill>
+            <a:srgbClr val="0A1320"/>
+          </a:solidFill>
+          <a:ln w="12700">
+            <a:solidFill>
+              <a:srgbClr val="182838"/>
+            </a:solidFill>
+            <a:prstDash val="solid"/>
+          </a:ln>
+        </p:spPr>
+      </p:sp>
+      <p:sp>
+        <p:nvSpPr>
+          <p:cNvPr id="55" name="Shape 53"/>
+          <p:cNvSpPr/>
+          <p:nvPr/>
+        </p:nvSpPr>
+        <p:spPr>
+          <a:xfrm>
+            <a:off x="7772400" y="3333750"/>
+            <a:ext cx="3543300" cy="0"/>
+          </a:xfrm>
+          <a:prstGeom prst="line">
+            <a:avLst/>
+          </a:prstGeom>
+          <a:noFill/>
+          <a:ln w="12700">
+            <a:solidFill>
+              <a:srgbClr val="182838"/>
+            </a:solidFill>
+            <a:prstDash val="solid"/>
+          </a:ln>
+        </p:spPr>
+      </p:sp>
+      <p:sp>
+        <p:nvSpPr>
+          <p:cNvPr id="56" name="Shape 54"/>
+          <p:cNvSpPr/>
+          <p:nvPr/>
+        </p:nvSpPr>
+        <p:spPr>
+          <a:xfrm>
+            <a:off x="7772400" y="4095750"/>
+            <a:ext cx="3543300" cy="0"/>
           </a:xfrm>
           <a:prstGeom prst="line">
             <a:avLst/>
@@ -4827,6 +6300,1063 @@
             <a:prstDash val="solid"/>
           </a:ln>
         </p:spPr>
+      </p:sp>
+      <p:sp>
+        <p:nvSpPr>
+          <p:cNvPr id="57" name="Shape 55"/>
+          <p:cNvSpPr/>
+          <p:nvPr/>
+        </p:nvSpPr>
+        <p:spPr>
+          <a:xfrm>
+            <a:off x="7772400" y="4476750"/>
+            <a:ext cx="3543300" cy="0"/>
+          </a:xfrm>
+          <a:prstGeom prst="line">
+            <a:avLst/>
+          </a:prstGeom>
+          <a:noFill/>
+          <a:ln w="12700">
+            <a:solidFill>
+              <a:srgbClr val="182838"/>
+            </a:solidFill>
+            <a:prstDash val="solid"/>
+          </a:ln>
+        </p:spPr>
+      </p:sp>
+      <p:sp>
+        <p:nvSpPr>
+          <p:cNvPr id="58" name="Text 56"/>
+          <p:cNvSpPr txBox="1"/>
+          <p:nvPr/>
+        </p:nvSpPr>
+        <p:spPr>
+          <a:xfrm>
+            <a:off x="7505700" y="3257550"/>
+            <a:ext cx="247650" cy="117634"/>
+          </a:xfrm>
+          <a:prstGeom prst="rect">
+            <a:avLst/>
+          </a:prstGeom>
+          <a:noFill/>
+          <a:ln/>
+        </p:spPr>
+        <p:txBody>
+          <a:bodyPr wrap="square" lIns="0" tIns="0" rIns="0" bIns="0" rtlCol="0" anchor="t"/>
+          <a:lstStyle/>
+          <a:p>
+            <a:pPr algn="r" indent="0" marL="0">
+              <a:lnSpc>
+                <a:spcPts val="926"/>
+              </a:lnSpc>
+              <a:buNone/>
+            </a:pPr>
+            <a:r>
+              <a:rPr lang="en-US" sz="713" dirty="0">
+                <a:solidFill>
+                  <a:srgbClr val="63798F"/>
+                </a:solidFill>
+                <a:latin typeface="Consolas" pitchFamily="34" charset="0"/>
+                <a:ea typeface="Consolas" pitchFamily="34" charset="-122"/>
+                <a:cs typeface="Consolas" pitchFamily="34" charset="-120"/>
+              </a:rPr>
+              <a:t>+8</a:t>
+            </a:r>
+            <a:endParaRPr lang="en-US" sz="713" dirty="0"/>
+          </a:p>
+        </p:txBody>
+      </p:sp>
+      <p:sp>
+        <p:nvSpPr>
+          <p:cNvPr id="59" name="Text 57"/>
+          <p:cNvSpPr txBox="1"/>
+          <p:nvPr/>
+        </p:nvSpPr>
+        <p:spPr>
+          <a:xfrm>
+            <a:off x="7505700" y="4019550"/>
+            <a:ext cx="247650" cy="117634"/>
+          </a:xfrm>
+          <a:prstGeom prst="rect">
+            <a:avLst/>
+          </a:prstGeom>
+          <a:noFill/>
+          <a:ln/>
+        </p:spPr>
+        <p:txBody>
+          <a:bodyPr wrap="square" lIns="0" tIns="0" rIns="0" bIns="0" rtlCol="0" anchor="t"/>
+          <a:lstStyle/>
+          <a:p>
+            <a:pPr algn="r" indent="0" marL="0">
+              <a:lnSpc>
+                <a:spcPts val="926"/>
+              </a:lnSpc>
+              <a:buNone/>
+            </a:pPr>
+            <a:r>
+              <a:rPr lang="en-US" sz="713" dirty="0">
+                <a:solidFill>
+                  <a:srgbClr val="63798F"/>
+                </a:solidFill>
+                <a:latin typeface="Consolas" pitchFamily="34" charset="0"/>
+                <a:ea typeface="Consolas" pitchFamily="34" charset="-122"/>
+                <a:cs typeface="Consolas" pitchFamily="34" charset="-120"/>
+              </a:rPr>
+              <a:t>0</a:t>
+            </a:r>
+            <a:endParaRPr lang="en-US" sz="713" dirty="0"/>
+          </a:p>
+        </p:txBody>
+      </p:sp>
+      <p:sp>
+        <p:nvSpPr>
+          <p:cNvPr id="60" name="Text 58"/>
+          <p:cNvSpPr txBox="1"/>
+          <p:nvPr/>
+        </p:nvSpPr>
+        <p:spPr>
+          <a:xfrm>
+            <a:off x="7505700" y="4400550"/>
+            <a:ext cx="247650" cy="117634"/>
+          </a:xfrm>
+          <a:prstGeom prst="rect">
+            <a:avLst/>
+          </a:prstGeom>
+          <a:noFill/>
+          <a:ln/>
+        </p:spPr>
+        <p:txBody>
+          <a:bodyPr wrap="square" lIns="0" tIns="0" rIns="0" bIns="0" rtlCol="0" anchor="t"/>
+          <a:lstStyle/>
+          <a:p>
+            <a:pPr algn="r" indent="0" marL="0">
+              <a:lnSpc>
+                <a:spcPts val="926"/>
+              </a:lnSpc>
+              <a:buNone/>
+            </a:pPr>
+            <a:r>
+              <a:rPr lang="en-US" sz="713" dirty="0">
+                <a:solidFill>
+                  <a:srgbClr val="63798F"/>
+                </a:solidFill>
+                <a:latin typeface="Consolas" pitchFamily="34" charset="0"/>
+                <a:ea typeface="Consolas" pitchFamily="34" charset="-122"/>
+                <a:cs typeface="Consolas" pitchFamily="34" charset="-120"/>
+              </a:rPr>
+              <a:t>−4</a:t>
+            </a:r>
+            <a:endParaRPr lang="en-US" sz="713" dirty="0"/>
+          </a:p>
+        </p:txBody>
+      </p:sp>
+      <p:sp>
+        <p:nvSpPr>
+          <p:cNvPr id="61" name="Text 59"/>
+          <p:cNvSpPr txBox="1"/>
+          <p:nvPr/>
+        </p:nvSpPr>
+        <p:spPr>
+          <a:xfrm>
+            <a:off x="7620000" y="4629150"/>
+            <a:ext cx="457200" cy="117634"/>
+          </a:xfrm>
+          <a:prstGeom prst="rect">
+            <a:avLst/>
+          </a:prstGeom>
+          <a:noFill/>
+          <a:ln/>
+        </p:spPr>
+        <p:txBody>
+          <a:bodyPr wrap="square" lIns="0" tIns="0" rIns="0" bIns="0" rtlCol="0" anchor="t"/>
+          <a:lstStyle/>
+          <a:p>
+            <a:pPr algn="ctr" indent="0" marL="0">
+              <a:lnSpc>
+                <a:spcPts val="926"/>
+              </a:lnSpc>
+              <a:buNone/>
+            </a:pPr>
+            <a:r>
+              <a:rPr lang="en-US" sz="713" dirty="0">
+                <a:solidFill>
+                  <a:srgbClr val="63798F"/>
+                </a:solidFill>
+                <a:latin typeface="Consolas" pitchFamily="34" charset="0"/>
+                <a:ea typeface="Consolas" pitchFamily="34" charset="-122"/>
+                <a:cs typeface="Consolas" pitchFamily="34" charset="-120"/>
+              </a:rPr>
+              <a:t>0℃</a:t>
+            </a:r>
+            <a:endParaRPr lang="en-US" sz="713" dirty="0"/>
+          </a:p>
+        </p:txBody>
+      </p:sp>
+      <p:sp>
+        <p:nvSpPr>
+          <p:cNvPr id="62" name="Text 60"/>
+          <p:cNvSpPr txBox="1"/>
+          <p:nvPr/>
+        </p:nvSpPr>
+        <p:spPr>
+          <a:xfrm>
+            <a:off x="8750618" y="4629150"/>
+            <a:ext cx="457200" cy="117634"/>
+          </a:xfrm>
+          <a:prstGeom prst="rect">
+            <a:avLst/>
+          </a:prstGeom>
+          <a:noFill/>
+          <a:ln/>
+        </p:spPr>
+        <p:txBody>
+          <a:bodyPr wrap="square" lIns="0" tIns="0" rIns="0" bIns="0" rtlCol="0" anchor="t"/>
+          <a:lstStyle/>
+          <a:p>
+            <a:pPr algn="ctr" indent="0" marL="0">
+              <a:lnSpc>
+                <a:spcPts val="926"/>
+              </a:lnSpc>
+              <a:buNone/>
+            </a:pPr>
+            <a:r>
+              <a:rPr lang="en-US" sz="713" dirty="0">
+                <a:solidFill>
+                  <a:srgbClr val="63798F"/>
+                </a:solidFill>
+                <a:latin typeface="Consolas" pitchFamily="34" charset="0"/>
+                <a:ea typeface="Consolas" pitchFamily="34" charset="-122"/>
+                <a:cs typeface="Consolas" pitchFamily="34" charset="-120"/>
+              </a:rPr>
+              <a:t>10</a:t>
+            </a:r>
+            <a:endParaRPr lang="en-US" sz="713" dirty="0"/>
+          </a:p>
+        </p:txBody>
+      </p:sp>
+      <p:sp>
+        <p:nvSpPr>
+          <p:cNvPr id="63" name="Text 61"/>
+          <p:cNvSpPr txBox="1"/>
+          <p:nvPr/>
+        </p:nvSpPr>
+        <p:spPr>
+          <a:xfrm>
+            <a:off x="9881235" y="4629150"/>
+            <a:ext cx="457200" cy="117634"/>
+          </a:xfrm>
+          <a:prstGeom prst="rect">
+            <a:avLst/>
+          </a:prstGeom>
+          <a:noFill/>
+          <a:ln/>
+        </p:spPr>
+        <p:txBody>
+          <a:bodyPr wrap="square" lIns="0" tIns="0" rIns="0" bIns="0" rtlCol="0" anchor="t"/>
+          <a:lstStyle/>
+          <a:p>
+            <a:pPr algn="ctr" indent="0" marL="0">
+              <a:lnSpc>
+                <a:spcPts val="926"/>
+              </a:lnSpc>
+              <a:buNone/>
+            </a:pPr>
+            <a:r>
+              <a:rPr lang="en-US" sz="713" dirty="0">
+                <a:solidFill>
+                  <a:srgbClr val="63798F"/>
+                </a:solidFill>
+                <a:latin typeface="Consolas" pitchFamily="34" charset="0"/>
+                <a:ea typeface="Consolas" pitchFamily="34" charset="-122"/>
+                <a:cs typeface="Consolas" pitchFamily="34" charset="-120"/>
+              </a:rPr>
+              <a:t>20</a:t>
+            </a:r>
+            <a:endParaRPr lang="en-US" sz="713" dirty="0"/>
+          </a:p>
+        </p:txBody>
+      </p:sp>
+      <p:sp>
+        <p:nvSpPr>
+          <p:cNvPr id="64" name="Text 62"/>
+          <p:cNvSpPr txBox="1"/>
+          <p:nvPr/>
+        </p:nvSpPr>
+        <p:spPr>
+          <a:xfrm>
+            <a:off x="11011852" y="4629150"/>
+            <a:ext cx="457200" cy="117634"/>
+          </a:xfrm>
+          <a:prstGeom prst="rect">
+            <a:avLst/>
+          </a:prstGeom>
+          <a:noFill/>
+          <a:ln/>
+        </p:spPr>
+        <p:txBody>
+          <a:bodyPr wrap="square" lIns="0" tIns="0" rIns="0" bIns="0" rtlCol="0" anchor="t"/>
+          <a:lstStyle/>
+          <a:p>
+            <a:pPr algn="ctr" indent="0" marL="0">
+              <a:lnSpc>
+                <a:spcPts val="926"/>
+              </a:lnSpc>
+              <a:buNone/>
+            </a:pPr>
+            <a:r>
+              <a:rPr lang="en-US" sz="713" dirty="0">
+                <a:solidFill>
+                  <a:srgbClr val="63798F"/>
+                </a:solidFill>
+                <a:latin typeface="Consolas" pitchFamily="34" charset="0"/>
+                <a:ea typeface="Consolas" pitchFamily="34" charset="-122"/>
+                <a:cs typeface="Consolas" pitchFamily="34" charset="-120"/>
+              </a:rPr>
+              <a:t>30</a:t>
+            </a:r>
+            <a:endParaRPr lang="en-US" sz="713" dirty="0"/>
+          </a:p>
+        </p:txBody>
+      </p:sp>
+      <p:sp>
+        <p:nvSpPr>
+          <p:cNvPr id="65" name="Shape 63"/>
+          <p:cNvSpPr/>
+          <p:nvPr/>
+        </p:nvSpPr>
+        <p:spPr>
+          <a:xfrm>
+            <a:off x="7848600" y="3372803"/>
+            <a:ext cx="1130618" cy="238125"/>
+          </a:xfrm>
+          <a:prstGeom prst="line">
+            <a:avLst/>
+          </a:prstGeom>
+          <a:noFill/>
+          <a:ln w="19050">
+            <a:solidFill>
+              <a:srgbClr val="3F5468"/>
+            </a:solidFill>
+            <a:prstDash val="solid"/>
+          </a:ln>
+        </p:spPr>
+      </p:sp>
+      <p:sp>
+        <p:nvSpPr>
+          <p:cNvPr id="66" name="Shape 64"/>
+          <p:cNvSpPr/>
+          <p:nvPr/>
+        </p:nvSpPr>
+        <p:spPr>
+          <a:xfrm>
+            <a:off x="8979218" y="3610928"/>
+            <a:ext cx="1130618" cy="157163"/>
+          </a:xfrm>
+          <a:prstGeom prst="line">
+            <a:avLst/>
+          </a:prstGeom>
+          <a:noFill/>
+          <a:ln w="19050">
+            <a:solidFill>
+              <a:srgbClr val="3F5468"/>
+            </a:solidFill>
+            <a:prstDash val="solid"/>
+          </a:ln>
+        </p:spPr>
+      </p:sp>
+      <p:sp>
+        <p:nvSpPr>
+          <p:cNvPr id="67" name="Shape 65"/>
+          <p:cNvSpPr/>
+          <p:nvPr/>
+        </p:nvSpPr>
+        <p:spPr>
+          <a:xfrm>
+            <a:off x="10109835" y="3768090"/>
+            <a:ext cx="1130617" cy="563880"/>
+          </a:xfrm>
+          <a:prstGeom prst="line">
+            <a:avLst/>
+          </a:prstGeom>
+          <a:noFill/>
+          <a:ln w="19050">
+            <a:solidFill>
+              <a:srgbClr val="3F5468"/>
+            </a:solidFill>
+            <a:prstDash val="solid"/>
+          </a:ln>
+        </p:spPr>
+      </p:sp>
+      <p:sp>
+        <p:nvSpPr>
+          <p:cNvPr id="68" name="Shape 66"/>
+          <p:cNvSpPr/>
+          <p:nvPr/>
+        </p:nvSpPr>
+        <p:spPr>
+          <a:xfrm>
+            <a:off x="7848600" y="3380423"/>
+            <a:ext cx="1130618" cy="228600"/>
+          </a:xfrm>
+          <a:prstGeom prst="line">
+            <a:avLst/>
+          </a:prstGeom>
+          <a:noFill/>
+          <a:ln w="19050">
+            <a:solidFill>
+              <a:srgbClr val="3F5468"/>
+            </a:solidFill>
+            <a:prstDash val="solid"/>
+          </a:ln>
+        </p:spPr>
+      </p:sp>
+      <p:sp>
+        <p:nvSpPr>
+          <p:cNvPr id="69" name="Shape 67"/>
+          <p:cNvSpPr/>
+          <p:nvPr/>
+        </p:nvSpPr>
+        <p:spPr>
+          <a:xfrm>
+            <a:off x="8979218" y="3609023"/>
+            <a:ext cx="1130618" cy="171450"/>
+          </a:xfrm>
+          <a:prstGeom prst="line">
+            <a:avLst/>
+          </a:prstGeom>
+          <a:noFill/>
+          <a:ln w="19050">
+            <a:solidFill>
+              <a:srgbClr val="3F5468"/>
+            </a:solidFill>
+            <a:prstDash val="solid"/>
+          </a:ln>
+        </p:spPr>
+      </p:sp>
+      <p:sp>
+        <p:nvSpPr>
+          <p:cNvPr id="70" name="Shape 68"/>
+          <p:cNvSpPr/>
+          <p:nvPr/>
+        </p:nvSpPr>
+        <p:spPr>
+          <a:xfrm>
+            <a:off x="10109835" y="3780472"/>
+            <a:ext cx="1130617" cy="550545"/>
+          </a:xfrm>
+          <a:prstGeom prst="line">
+            <a:avLst/>
+          </a:prstGeom>
+          <a:noFill/>
+          <a:ln w="19050">
+            <a:solidFill>
+              <a:srgbClr val="3F5468"/>
+            </a:solidFill>
+            <a:prstDash val="solid"/>
+          </a:ln>
+        </p:spPr>
+      </p:sp>
+      <p:sp>
+        <p:nvSpPr>
+          <p:cNvPr id="71" name="Shape 69"/>
+          <p:cNvSpPr/>
+          <p:nvPr/>
+        </p:nvSpPr>
+        <p:spPr>
+          <a:xfrm>
+            <a:off x="7848600" y="3378518"/>
+            <a:ext cx="1130618" cy="253365"/>
+          </a:xfrm>
+          <a:prstGeom prst="line">
+            <a:avLst/>
+          </a:prstGeom>
+          <a:noFill/>
+          <a:ln w="19050">
+            <a:solidFill>
+              <a:srgbClr val="3F5468"/>
+            </a:solidFill>
+            <a:prstDash val="solid"/>
+          </a:ln>
+        </p:spPr>
+      </p:sp>
+      <p:sp>
+        <p:nvSpPr>
+          <p:cNvPr id="72" name="Shape 70"/>
+          <p:cNvSpPr/>
+          <p:nvPr/>
+        </p:nvSpPr>
+        <p:spPr>
+          <a:xfrm>
+            <a:off x="8979218" y="3631883"/>
+            <a:ext cx="1130618" cy="168592"/>
+          </a:xfrm>
+          <a:prstGeom prst="line">
+            <a:avLst/>
+          </a:prstGeom>
+          <a:noFill/>
+          <a:ln w="19050">
+            <a:solidFill>
+              <a:srgbClr val="3F5468"/>
+            </a:solidFill>
+            <a:prstDash val="solid"/>
+          </a:ln>
+        </p:spPr>
+      </p:sp>
+      <p:sp>
+        <p:nvSpPr>
+          <p:cNvPr id="73" name="Shape 71"/>
+          <p:cNvSpPr/>
+          <p:nvPr/>
+        </p:nvSpPr>
+        <p:spPr>
+          <a:xfrm>
+            <a:off x="10109835" y="3800475"/>
+            <a:ext cx="1130617" cy="526733"/>
+          </a:xfrm>
+          <a:prstGeom prst="line">
+            <a:avLst/>
+          </a:prstGeom>
+          <a:noFill/>
+          <a:ln w="19050">
+            <a:solidFill>
+              <a:srgbClr val="3F5468"/>
+            </a:solidFill>
+            <a:prstDash val="solid"/>
+          </a:ln>
+        </p:spPr>
+      </p:sp>
+      <p:sp>
+        <p:nvSpPr>
+          <p:cNvPr id="74" name="Shape 72"/>
+          <p:cNvSpPr/>
+          <p:nvPr/>
+        </p:nvSpPr>
+        <p:spPr>
+          <a:xfrm>
+            <a:off x="7848600" y="3370897"/>
+            <a:ext cx="1130618" cy="240030"/>
+          </a:xfrm>
+          <a:prstGeom prst="line">
+            <a:avLst/>
+          </a:prstGeom>
+          <a:noFill/>
+          <a:ln w="19050">
+            <a:solidFill>
+              <a:srgbClr val="3F5468"/>
+            </a:solidFill>
+            <a:prstDash val="solid"/>
+          </a:ln>
+        </p:spPr>
+      </p:sp>
+      <p:sp>
+        <p:nvSpPr>
+          <p:cNvPr id="75" name="Shape 73"/>
+          <p:cNvSpPr/>
+          <p:nvPr/>
+        </p:nvSpPr>
+        <p:spPr>
+          <a:xfrm>
+            <a:off x="8979218" y="3610928"/>
+            <a:ext cx="1130618" cy="153352"/>
+          </a:xfrm>
+          <a:prstGeom prst="line">
+            <a:avLst/>
+          </a:prstGeom>
+          <a:noFill/>
+          <a:ln w="19050">
+            <a:solidFill>
+              <a:srgbClr val="3F5468"/>
+            </a:solidFill>
+            <a:prstDash val="solid"/>
+          </a:ln>
+        </p:spPr>
+      </p:sp>
+      <p:sp>
+        <p:nvSpPr>
+          <p:cNvPr id="76" name="Shape 74"/>
+          <p:cNvSpPr/>
+          <p:nvPr/>
+        </p:nvSpPr>
+        <p:spPr>
+          <a:xfrm>
+            <a:off x="10109835" y="3764280"/>
+            <a:ext cx="1130617" cy="565785"/>
+          </a:xfrm>
+          <a:prstGeom prst="line">
+            <a:avLst/>
+          </a:prstGeom>
+          <a:noFill/>
+          <a:ln w="19050">
+            <a:solidFill>
+              <a:srgbClr val="3F5468"/>
+            </a:solidFill>
+            <a:prstDash val="solid"/>
+          </a:ln>
+        </p:spPr>
+      </p:sp>
+      <p:sp>
+        <p:nvSpPr>
+          <p:cNvPr id="77" name="Shape 75"/>
+          <p:cNvSpPr/>
+          <p:nvPr/>
+        </p:nvSpPr>
+        <p:spPr>
+          <a:xfrm>
+            <a:off x="7848600" y="3381375"/>
+            <a:ext cx="1130618" cy="221933"/>
+          </a:xfrm>
+          <a:prstGeom prst="line">
+            <a:avLst/>
+          </a:prstGeom>
+          <a:noFill/>
+          <a:ln w="33020">
+            <a:solidFill>
+              <a:srgbClr val="EFB13C"/>
+            </a:solidFill>
+            <a:prstDash val="solid"/>
+          </a:ln>
+        </p:spPr>
+      </p:sp>
+      <p:sp>
+        <p:nvSpPr>
+          <p:cNvPr id="78" name="Shape 76"/>
+          <p:cNvSpPr/>
+          <p:nvPr/>
+        </p:nvSpPr>
+        <p:spPr>
+          <a:xfrm>
+            <a:off x="8979218" y="3603308"/>
+            <a:ext cx="1130618" cy="161925"/>
+          </a:xfrm>
+          <a:prstGeom prst="line">
+            <a:avLst/>
+          </a:prstGeom>
+          <a:noFill/>
+          <a:ln w="33020">
+            <a:solidFill>
+              <a:srgbClr val="EFB13C"/>
+            </a:solidFill>
+            <a:prstDash val="solid"/>
+          </a:ln>
+        </p:spPr>
+      </p:sp>
+      <p:sp>
+        <p:nvSpPr>
+          <p:cNvPr id="79" name="Shape 77"/>
+          <p:cNvSpPr/>
+          <p:nvPr/>
+        </p:nvSpPr>
+        <p:spPr>
+          <a:xfrm>
+            <a:off x="10109835" y="3765233"/>
+            <a:ext cx="1130617" cy="557213"/>
+          </a:xfrm>
+          <a:prstGeom prst="line">
+            <a:avLst/>
+          </a:prstGeom>
+          <a:noFill/>
+          <a:ln w="33020">
+            <a:solidFill>
+              <a:srgbClr val="EFB13C"/>
+            </a:solidFill>
+            <a:prstDash val="solid"/>
+          </a:ln>
+        </p:spPr>
+      </p:sp>
+      <p:sp>
+        <p:nvSpPr>
+          <p:cNvPr id="80" name="Shape 78"/>
+          <p:cNvSpPr/>
+          <p:nvPr/>
+        </p:nvSpPr>
+        <p:spPr>
+          <a:xfrm>
+            <a:off x="10109835" y="3726180"/>
+            <a:ext cx="0" cy="112395"/>
+          </a:xfrm>
+          <a:prstGeom prst="line">
+            <a:avLst/>
+          </a:prstGeom>
+          <a:noFill/>
+          <a:ln w="20320">
+            <a:solidFill>
+              <a:srgbClr val="FF4D63"/>
+            </a:solidFill>
+            <a:prstDash val="solid"/>
+          </a:ln>
+        </p:spPr>
+      </p:sp>
+      <p:sp>
+        <p:nvSpPr>
+          <p:cNvPr id="81" name="Shape 79"/>
+          <p:cNvSpPr/>
+          <p:nvPr/>
+        </p:nvSpPr>
+        <p:spPr>
+          <a:xfrm>
+            <a:off x="10052685" y="3726180"/>
+            <a:ext cx="114300" cy="0"/>
+          </a:xfrm>
+          <a:prstGeom prst="line">
+            <a:avLst/>
+          </a:prstGeom>
+          <a:noFill/>
+          <a:ln w="20320">
+            <a:solidFill>
+              <a:srgbClr val="FF4D63"/>
+            </a:solidFill>
+            <a:prstDash val="solid"/>
+          </a:ln>
+        </p:spPr>
+      </p:sp>
+      <p:sp>
+        <p:nvSpPr>
+          <p:cNvPr id="82" name="Shape 80"/>
+          <p:cNvSpPr/>
+          <p:nvPr/>
+        </p:nvSpPr>
+        <p:spPr>
+          <a:xfrm>
+            <a:off x="10052685" y="3838575"/>
+            <a:ext cx="114300" cy="0"/>
+          </a:xfrm>
+          <a:prstGeom prst="line">
+            <a:avLst/>
+          </a:prstGeom>
+          <a:noFill/>
+          <a:ln w="20320">
+            <a:solidFill>
+              <a:srgbClr val="FF4D63"/>
+            </a:solidFill>
+            <a:prstDash val="solid"/>
+          </a:ln>
+        </p:spPr>
+      </p:sp>
+      <p:sp>
+        <p:nvSpPr>
+          <p:cNvPr id="83" name="Text 81"/>
+          <p:cNvSpPr txBox="1"/>
+          <p:nvPr/>
+        </p:nvSpPr>
+        <p:spPr>
+          <a:xfrm>
+            <a:off x="10205085" y="3705225"/>
+            <a:ext cx="1238250" cy="130016"/>
+          </a:xfrm>
+          <a:prstGeom prst="rect">
+            <a:avLst/>
+          </a:prstGeom>
+          <a:noFill/>
+          <a:ln/>
+        </p:spPr>
+        <p:txBody>
+          <a:bodyPr wrap="square" lIns="0" tIns="0" rIns="0" bIns="0" rtlCol="0" anchor="t"/>
+          <a:lstStyle/>
+          <a:p>
+            <a:pPr algn="l" indent="0" marL="0">
+              <a:lnSpc>
+                <a:spcPts val="1024"/>
+              </a:lnSpc>
+              <a:buNone/>
+            </a:pPr>
+            <a:r>
+              <a:rPr lang="en-US" sz="788" dirty="0">
+                <a:solidFill>
+                  <a:srgbClr val="FF4D63"/>
+                </a:solidFill>
+                <a:latin typeface="Malgun Gothic" pitchFamily="34" charset="0"/>
+                <a:ea typeface="Malgun Gothic" pitchFamily="34" charset="-122"/>
+                <a:cs typeface="Malgun Gothic" pitchFamily="34" charset="-120"/>
+              </a:rPr>
+              <a:t>여기서 0.38 갈림</a:t>
+            </a:r>
+            <a:endParaRPr lang="en-US" sz="788" dirty="0"/>
+          </a:p>
+        </p:txBody>
+      </p:sp>
+      <p:sp>
+        <p:nvSpPr>
+          <p:cNvPr id="84" name="Text 82"/>
+          <p:cNvSpPr txBox="1"/>
+          <p:nvPr/>
+        </p:nvSpPr>
+        <p:spPr>
+          <a:xfrm>
+            <a:off x="10382250" y="4438650"/>
+            <a:ext cx="933450" cy="130016"/>
+          </a:xfrm>
+          <a:prstGeom prst="rect">
+            <a:avLst/>
+          </a:prstGeom>
+          <a:noFill/>
+          <a:ln/>
+        </p:spPr>
+        <p:txBody>
+          <a:bodyPr wrap="square" lIns="0" tIns="0" rIns="0" bIns="0" rtlCol="0" anchor="t"/>
+          <a:lstStyle/>
+          <a:p>
+            <a:pPr algn="r" indent="0" marL="0">
+              <a:lnSpc>
+                <a:spcPts val="1024"/>
+              </a:lnSpc>
+              <a:buNone/>
+            </a:pPr>
+            <a:r>
+              <a:rPr lang="en-US" sz="788" dirty="0">
+                <a:solidFill>
+                  <a:srgbClr val="63798F"/>
+                </a:solidFill>
+                <a:latin typeface="Malgun Gothic" pitchFamily="34" charset="0"/>
+                <a:ea typeface="Malgun Gothic" pitchFamily="34" charset="-122"/>
+                <a:cs typeface="Malgun Gothic" pitchFamily="34" charset="-120"/>
+              </a:rPr>
+              <a:t>양 끝은 0.10</a:t>
+            </a:r>
+            <a:endParaRPr lang="en-US" sz="788" dirty="0"/>
+          </a:p>
+        </p:txBody>
+      </p:sp>
+      <p:sp>
+        <p:nvSpPr>
+          <p:cNvPr id="85" name="Text 83"/>
+          <p:cNvSpPr txBox="1"/>
+          <p:nvPr/>
+        </p:nvSpPr>
+        <p:spPr>
+          <a:xfrm>
+            <a:off x="7353300" y="5257800"/>
+            <a:ext cx="4152900" cy="284036"/>
+          </a:xfrm>
+          <a:prstGeom prst="rect">
+            <a:avLst/>
+          </a:prstGeom>
+          <a:noFill/>
+          <a:ln/>
+        </p:spPr>
+        <p:txBody>
+          <a:bodyPr wrap="square" lIns="0" tIns="0" rIns="0" bIns="0" rtlCol="0" anchor="t"/>
+          <a:lstStyle/>
+          <a:p>
+            <a:pPr algn="l" indent="0" marL="0">
+              <a:lnSpc>
+                <a:spcPts val="2237"/>
+              </a:lnSpc>
+              <a:buNone/>
+            </a:pPr>
+            <a:r>
+              <a:rPr lang="en-US" sz="1575" b="1" dirty="0">
+                <a:solidFill>
+                  <a:srgbClr val="EFB13C"/>
+                </a:solidFill>
+                <a:latin typeface="Malgun Gothic" pitchFamily="34" charset="0"/>
+                <a:ea typeface="Malgun Gothic" pitchFamily="34" charset="-122"/>
+                <a:cs typeface="Malgun Gothic" pitchFamily="34" charset="-120"/>
+              </a:rPr>
+              <a:t>가운데에서</a:t>
+            </a:r>
+            <a:pPr algn="l" indent="0" marL="0">
+              <a:lnSpc>
+                <a:spcPts val="2237"/>
+              </a:lnSpc>
+              <a:buNone/>
+            </a:pPr>
+            <a:r>
+              <a:rPr lang="en-US" sz="1575" b="1" dirty="0">
+                <a:solidFill>
+                  <a:srgbClr val="EAE7E0"/>
+                </a:solidFill>
+                <a:latin typeface="Malgun Gothic" pitchFamily="34" charset="0"/>
+                <a:ea typeface="Malgun Gothic" pitchFamily="34" charset="-122"/>
+                <a:cs typeface="Malgun Gothic" pitchFamily="34" charset="-120"/>
+              </a:rPr>
+              <a:t> 갈립니다</a:t>
+            </a:r>
+            <a:endParaRPr lang="en-US" sz="1575" dirty="0"/>
+          </a:p>
+        </p:txBody>
+      </p:sp>
+      <p:sp>
+        <p:nvSpPr>
+          <p:cNvPr id="86" name="Text 84"/>
+          <p:cNvSpPr txBox="1"/>
+          <p:nvPr/>
+        </p:nvSpPr>
+        <p:spPr>
+          <a:xfrm>
+            <a:off x="7353300" y="5619750"/>
+            <a:ext cx="4152900" cy="480060"/>
+          </a:xfrm>
+          <a:prstGeom prst="rect">
+            <a:avLst/>
+          </a:prstGeom>
+          <a:noFill/>
+          <a:ln/>
+        </p:spPr>
+        <p:txBody>
+          <a:bodyPr wrap="square" lIns="0" tIns="0" rIns="0" bIns="0" rtlCol="0" anchor="t"/>
+          <a:lstStyle/>
+          <a:p>
+            <a:pPr algn="l" indent="0" marL="0">
+              <a:lnSpc>
+                <a:spcPts val="1890"/>
+              </a:lnSpc>
+              <a:buNone/>
+            </a:pPr>
+            <a:r>
+              <a:rPr lang="en-US" sz="1125" dirty="0">
+                <a:solidFill>
+                  <a:srgbClr val="BCC9D6"/>
+                </a:solidFill>
+                <a:latin typeface="Malgun Gothic" pitchFamily="34" charset="0"/>
+                <a:ea typeface="Malgun Gothic" pitchFamily="34" charset="-122"/>
+                <a:cs typeface="Malgun Gothic" pitchFamily="34" charset="-120"/>
+              </a:rPr>
+              <a:t>0℃ 와 30℃ 는 어느 방식이나 거의 같고, 10~20℃ 에서 벌어집니다. 눈으로는 고를 수 없습니다.</a:t>
+            </a:r>
+            <a:endParaRPr lang="en-US" sz="1125" dirty="0"/>
+          </a:p>
+        </p:txBody>
+      </p:sp>
+      <p:sp>
+        <p:nvSpPr>
+          <p:cNvPr id="87" name="Shape 85"/>
+          <p:cNvSpPr/>
+          <p:nvPr/>
+        </p:nvSpPr>
+        <p:spPr>
+          <a:xfrm>
+            <a:off x="685800" y="6057900"/>
+            <a:ext cx="10820400" cy="0"/>
+          </a:xfrm>
+          <a:prstGeom prst="line">
+            <a:avLst/>
+          </a:prstGeom>
+          <a:noFill/>
+          <a:ln w="12700">
+            <a:solidFill>
+              <a:srgbClr val="22354A"/>
+            </a:solidFill>
+            <a:prstDash val="solid"/>
+          </a:ln>
+        </p:spPr>
+      </p:sp>
+      <p:sp>
+        <p:nvSpPr>
+          <p:cNvPr id="88" name="Text 86"/>
+          <p:cNvSpPr txBox="1"/>
+          <p:nvPr/>
+        </p:nvSpPr>
+        <p:spPr>
+          <a:xfrm>
+            <a:off x="685800" y="6267450"/>
+            <a:ext cx="476250" cy="120015"/>
+          </a:xfrm>
+          <a:prstGeom prst="rect">
+            <a:avLst/>
+          </a:prstGeom>
+          <a:noFill/>
+          <a:ln/>
+        </p:spPr>
+        <p:txBody>
+          <a:bodyPr wrap="square" lIns="0" tIns="0" rIns="0" bIns="0" rtlCol="0" anchor="t"/>
+          <a:lstStyle/>
+          <a:p>
+            <a:pPr algn="l" indent="0" marL="0">
+              <a:lnSpc>
+                <a:spcPts val="945"/>
+              </a:lnSpc>
+              <a:buNone/>
+            </a:pPr>
+            <a:r>
+              <a:rPr lang="en-US" sz="788" b="1" spc="180" kern="0" dirty="0">
+                <a:solidFill>
+                  <a:srgbClr val="EFB13C"/>
+                </a:solidFill>
+                <a:latin typeface="Consolas" pitchFamily="34" charset="0"/>
+                <a:ea typeface="Consolas" pitchFamily="34" charset="-122"/>
+                <a:cs typeface="Consolas" pitchFamily="34" charset="-120"/>
+              </a:rPr>
+              <a:t>결론</a:t>
+            </a:r>
+            <a:endParaRPr lang="en-US" sz="788" dirty="0"/>
+          </a:p>
+        </p:txBody>
+      </p:sp>
+      <p:sp>
+        <p:nvSpPr>
+          <p:cNvPr id="89" name="Text 87"/>
+          <p:cNvSpPr txBox="1"/>
+          <p:nvPr/>
+        </p:nvSpPr>
+        <p:spPr>
+          <a:xfrm>
+            <a:off x="1219200" y="6229350"/>
+            <a:ext cx="10287000" cy="220027"/>
+          </a:xfrm>
+          <a:prstGeom prst="rect">
+            <a:avLst/>
+          </a:prstGeom>
+          <a:noFill/>
+          <a:ln/>
+        </p:spPr>
+        <p:txBody>
+          <a:bodyPr wrap="square" lIns="0" tIns="0" rIns="0" bIns="0" rtlCol="0" anchor="t"/>
+          <a:lstStyle/>
+          <a:p>
+            <a:pPr algn="l" indent="0" marL="0">
+              <a:lnSpc>
+                <a:spcPts val="1733"/>
+              </a:lnSpc>
+              <a:buNone/>
+            </a:pPr>
+            <a:r>
+              <a:rPr lang="en-US" sz="1238" dirty="0">
+                <a:solidFill>
+                  <a:srgbClr val="BCC9D6"/>
+                </a:solidFill>
+                <a:latin typeface="Malgun Gothic" pitchFamily="34" charset="0"/>
+                <a:ea typeface="Malgun Gothic" pitchFamily="34" charset="-122"/>
+                <a:cs typeface="Malgun Gothic" pitchFamily="34" charset="-120"/>
+              </a:rPr>
+              <a:t>방식을 </a:t>
+            </a:r>
+            <a:pPr algn="l" indent="0" marL="0">
+              <a:lnSpc>
+                <a:spcPts val="1733"/>
+              </a:lnSpc>
+              <a:buNone/>
+            </a:pPr>
+            <a:r>
+              <a:rPr lang="en-US" sz="1238" b="1" dirty="0">
+                <a:solidFill>
+                  <a:srgbClr val="EFB13C"/>
+                </a:solidFill>
+                <a:latin typeface="Malgun Gothic" pitchFamily="34" charset="0"/>
+                <a:ea typeface="Malgun Gothic" pitchFamily="34" charset="-122"/>
+                <a:cs typeface="Malgun Gothic" pitchFamily="34" charset="-120"/>
+              </a:rPr>
+              <a:t>감으로 정하지 않았습니다</a:t>
+            </a:r>
+            <a:pPr algn="l" indent="0" marL="0">
+              <a:lnSpc>
+                <a:spcPts val="1733"/>
+              </a:lnSpc>
+              <a:buNone/>
+            </a:pPr>
+            <a:r>
+              <a:rPr lang="en-US" sz="1238" dirty="0">
+                <a:solidFill>
+                  <a:srgbClr val="BCC9D6"/>
+                </a:solidFill>
+                <a:latin typeface="Malgun Gothic" pitchFamily="34" charset="0"/>
+                <a:ea typeface="Malgun Gothic" pitchFamily="34" charset="-122"/>
+                <a:cs typeface="Malgun Gothic" pitchFamily="34" charset="-120"/>
+              </a:rPr>
+              <a:t> — 같은 조건에서 채점해 1위를 데이터가 지목했습니다.</a:t>
+            </a:r>
+            <a:endParaRPr lang="en-US" sz="1238" dirty="0"/>
+          </a:p>
+        </p:txBody>
       </p:sp>
     </p:spTree>
   </p:cSld>
@@ -17210,26 +19740,26 @@
         <p:spPr>
           <a:xfrm>
             <a:off x="685800" y="914400"/>
-            <a:ext cx="10287000" cy="360045"/>
-          </a:xfrm>
-          <a:prstGeom prst="rect">
-            <a:avLst/>
-          </a:prstGeom>
-          <a:noFill/>
-          <a:ln/>
-        </p:spPr>
-        <p:txBody>
-          <a:bodyPr wrap="square" lIns="0" tIns="0" rIns="0" bIns="0" rtlCol="0" anchor="t"/>
-          <a:lstStyle/>
-          <a:p>
-            <a:pPr algn="l" indent="0" marL="0">
-              <a:lnSpc>
-                <a:spcPts val="2835"/>
-              </a:lnSpc>
-              <a:buNone/>
-            </a:pPr>
-            <a:r>
-              <a:rPr lang="en-US" sz="2250" b="1" dirty="0">
+            <a:ext cx="10287000" cy="888111"/>
+          </a:xfrm>
+          <a:prstGeom prst="rect">
+            <a:avLst/>
+          </a:prstGeom>
+          <a:noFill/>
+          <a:ln/>
+        </p:spPr>
+        <p:txBody>
+          <a:bodyPr wrap="square" lIns="0" tIns="0" rIns="0" bIns="0" rtlCol="0" anchor="t"/>
+          <a:lstStyle/>
+          <a:p>
+            <a:pPr algn="l" indent="0" marL="0">
+              <a:lnSpc>
+                <a:spcPts val="3496"/>
+              </a:lnSpc>
+              <a:buNone/>
+            </a:pPr>
+            <a:r>
+              <a:rPr lang="en-US" sz="2775" b="1" dirty="0">
                 <a:solidFill>
                   <a:srgbClr val="EAE7E0"/>
                 </a:solidFill>
@@ -17237,22 +19767,1411 @@
                 <a:ea typeface="Malgun Gothic" pitchFamily="34" charset="-122"/>
                 <a:cs typeface="Malgun Gothic" pitchFamily="34" charset="-120"/>
               </a:rPr>
-              <a:t>숫자를 사람 손을 거치지 않고 가져옵니다</a:t>
-            </a:r>
-            <a:endParaRPr lang="en-US" sz="2250" dirty="0"/>
-          </a:p>
-        </p:txBody>
-      </p:sp>
-      <p:sp>
-        <p:nvSpPr>
-          <p:cNvPr id="12" name="Shape 10"/>
-          <p:cNvSpPr/>
-          <p:nvPr/>
-        </p:nvSpPr>
-        <p:spPr>
-          <a:xfrm>
-            <a:off x="685800" y="2857500"/>
-            <a:ext cx="10820400" cy="2095500"/>
+              <a:t>숫자를 사람 손을 거치지 않고,</a:t>
+            </a:r>
+            <a:endParaRPr lang="en-US" sz="2775" dirty="0"/>
+          </a:p>
+          <a:p>
+            <a:pPr algn="l" indent="0" marL="0">
+              <a:lnSpc>
+                <a:spcPts val="3496"/>
+              </a:lnSpc>
+              <a:buNone/>
+            </a:pPr>
+            <a:r>
+              <a:rPr lang="en-US" sz="2775" b="1" dirty="0">
+                <a:solidFill>
+                  <a:srgbClr val="EFB13C"/>
+                </a:solidFill>
+                <a:latin typeface="Malgun Gothic" pitchFamily="34" charset="0"/>
+                <a:ea typeface="Malgun Gothic" pitchFamily="34" charset="-122"/>
+                <a:cs typeface="Malgun Gothic" pitchFamily="34" charset="-120"/>
+              </a:rPr>
+              <a:t>설비에서 바로</a:t>
+            </a:r>
+            <a:pPr algn="l" indent="0" marL="0">
+              <a:lnSpc>
+                <a:spcPts val="3496"/>
+              </a:lnSpc>
+              <a:buNone/>
+            </a:pPr>
+            <a:r>
+              <a:rPr lang="en-US" sz="2775" b="1" dirty="0">
+                <a:solidFill>
+                  <a:srgbClr val="EAE7E0"/>
+                </a:solidFill>
+                <a:latin typeface="Malgun Gothic" pitchFamily="34" charset="0"/>
+                <a:ea typeface="Malgun Gothic" pitchFamily="34" charset="-122"/>
+                <a:cs typeface="Malgun Gothic" pitchFamily="34" charset="-120"/>
+              </a:rPr>
+              <a:t> 가져옵니다</a:t>
+            </a:r>
+            <a:endParaRPr lang="en-US" sz="2775" dirty="0"/>
+          </a:p>
+        </p:txBody>
+      </p:sp>
+      <p:sp>
+        <p:nvSpPr>
+          <p:cNvPr id="12" name="Text 10"/>
+          <p:cNvSpPr txBox="1"/>
+          <p:nvPr/>
+        </p:nvSpPr>
+        <p:spPr>
+          <a:xfrm>
+            <a:off x="685800" y="2000250"/>
+            <a:ext cx="10287000" cy="569214"/>
+          </a:xfrm>
+          <a:prstGeom prst="rect">
+            <a:avLst/>
+          </a:prstGeom>
+          <a:noFill/>
+          <a:ln/>
+        </p:spPr>
+        <p:txBody>
+          <a:bodyPr wrap="square" lIns="0" tIns="0" rIns="0" bIns="0" rtlCol="0" anchor="t"/>
+          <a:lstStyle/>
+          <a:p>
+            <a:pPr algn="l" indent="0" marL="0">
+              <a:lnSpc>
+                <a:spcPts val="2241"/>
+              </a:lnSpc>
+              <a:buNone/>
+            </a:pPr>
+            <a:r>
+              <a:rPr lang="en-US" sz="1350" dirty="0">
+                <a:solidFill>
+                  <a:srgbClr val="BCC9D6"/>
+                </a:solidFill>
+                <a:latin typeface="Malgun Gothic" pitchFamily="34" charset="0"/>
+                <a:ea typeface="Malgun Gothic" pitchFamily="34" charset="-122"/>
+                <a:cs typeface="Malgun Gothic" pitchFamily="34" charset="-120"/>
+              </a:rPr>
+              <a:t>운전 서버와 표준 통신으로 직접 연결해 6가지 값을 </a:t>
+            </a:r>
+            <a:pPr algn="l" indent="0" marL="0">
+              <a:lnSpc>
+                <a:spcPts val="2241"/>
+              </a:lnSpc>
+              <a:buNone/>
+            </a:pPr>
+            <a:r>
+              <a:rPr lang="en-US" sz="1350" b="1" dirty="0">
+                <a:solidFill>
+                  <a:srgbClr val="EAE7E0"/>
+                </a:solidFill>
+                <a:latin typeface="Malgun Gothic" pitchFamily="34" charset="0"/>
+                <a:ea typeface="Malgun Gothic" pitchFamily="34" charset="-122"/>
+                <a:cs typeface="Malgun Gothic" pitchFamily="34" charset="-120"/>
+              </a:rPr>
+              <a:t>1시간 시간가중평균</a:t>
+            </a:r>
+            <a:pPr algn="l" indent="0" marL="0">
+              <a:lnSpc>
+                <a:spcPts val="2241"/>
+              </a:lnSpc>
+              <a:buNone/>
+            </a:pPr>
+            <a:r>
+              <a:rPr lang="en-US" sz="1350" dirty="0">
+                <a:solidFill>
+                  <a:srgbClr val="BCC9D6"/>
+                </a:solidFill>
+                <a:latin typeface="Malgun Gothic" pitchFamily="34" charset="0"/>
+                <a:ea typeface="Malgun Gothic" pitchFamily="34" charset="-122"/>
+                <a:cs typeface="Malgun Gothic" pitchFamily="34" charset="-120"/>
+              </a:rPr>
+              <a:t> 으로 받습니다. 옮겨 적는 단계가 없으니 오타도 없습니다.</a:t>
+            </a:r>
+            <a:endParaRPr lang="en-US" sz="1350" dirty="0"/>
+          </a:p>
+        </p:txBody>
+      </p:sp>
+      <p:sp>
+        <p:nvSpPr>
+          <p:cNvPr id="13" name="Shape 11"/>
+          <p:cNvSpPr/>
+          <p:nvPr/>
+        </p:nvSpPr>
+        <p:spPr>
+          <a:xfrm>
+            <a:off x="685800" y="2743200"/>
+            <a:ext cx="10820400" cy="742950"/>
+          </a:xfrm>
+          <a:prstGeom prst="rect">
+            <a:avLst/>
+          </a:prstGeom>
+          <a:solidFill>
+            <a:srgbClr val="0A1320"/>
+          </a:solidFill>
+          <a:ln w="12700">
+            <a:solidFill>
+              <a:srgbClr val="182838"/>
+            </a:solidFill>
+            <a:prstDash val="solid"/>
+          </a:ln>
+        </p:spPr>
+      </p:sp>
+      <p:sp>
+        <p:nvSpPr>
+          <p:cNvPr id="14" name="Text 12"/>
+          <p:cNvSpPr txBox="1"/>
+          <p:nvPr/>
+        </p:nvSpPr>
+        <p:spPr>
+          <a:xfrm>
+            <a:off x="914400" y="2857500"/>
+            <a:ext cx="3810000" cy="125016"/>
+          </a:xfrm>
+          <a:prstGeom prst="rect">
+            <a:avLst/>
+          </a:prstGeom>
+          <a:noFill/>
+          <a:ln/>
+        </p:spPr>
+        <p:txBody>
+          <a:bodyPr wrap="square" lIns="0" tIns="0" rIns="0" bIns="0" rtlCol="0" anchor="t"/>
+          <a:lstStyle/>
+          <a:p>
+            <a:pPr algn="l" indent="0" marL="0">
+              <a:lnSpc>
+                <a:spcPts val="984"/>
+              </a:lnSpc>
+              <a:buNone/>
+            </a:pPr>
+            <a:r>
+              <a:rPr lang="en-US" sz="788" b="1" spc="150" kern="0" dirty="0">
+                <a:solidFill>
+                  <a:srgbClr val="63798F"/>
+                </a:solidFill>
+                <a:latin typeface="Consolas" pitchFamily="34" charset="0"/>
+                <a:ea typeface="Consolas" pitchFamily="34" charset="-122"/>
+                <a:cs typeface="Consolas" pitchFamily="34" charset="-120"/>
+              </a:rPr>
+              <a:t>취득 경로</a:t>
+            </a:r>
+            <a:endParaRPr lang="en-US" sz="788" dirty="0"/>
+          </a:p>
+        </p:txBody>
+      </p:sp>
+      <p:sp>
+        <p:nvSpPr>
+          <p:cNvPr id="15" name="Shape 13"/>
+          <p:cNvSpPr/>
+          <p:nvPr/>
+        </p:nvSpPr>
+        <p:spPr>
+          <a:xfrm>
+            <a:off x="914400" y="3067050"/>
+            <a:ext cx="1047750" cy="285750"/>
+          </a:xfrm>
+          <a:prstGeom prst="rect">
+            <a:avLst/>
+          </a:prstGeom>
+          <a:ln w="12700">
+            <a:solidFill>
+              <a:srgbClr val="22354A"/>
+            </a:solidFill>
+            <a:prstDash val="solid"/>
+          </a:ln>
+        </p:spPr>
+      </p:sp>
+      <p:sp>
+        <p:nvSpPr>
+          <p:cNvPr id="16" name="Text 14"/>
+          <p:cNvSpPr txBox="1"/>
+          <p:nvPr/>
+        </p:nvSpPr>
+        <p:spPr>
+          <a:xfrm>
+            <a:off x="1009650" y="3133725"/>
+            <a:ext cx="857250" cy="148590"/>
+          </a:xfrm>
+          <a:prstGeom prst="rect">
+            <a:avLst/>
+          </a:prstGeom>
+          <a:noFill/>
+          <a:ln/>
+        </p:spPr>
+        <p:txBody>
+          <a:bodyPr wrap="square" lIns="0" tIns="0" rIns="0" bIns="0" rtlCol="0" anchor="t"/>
+          <a:lstStyle/>
+          <a:p>
+            <a:pPr algn="l" indent="0" marL="0">
+              <a:lnSpc>
+                <a:spcPts val="1170"/>
+              </a:lnSpc>
+              <a:buNone/>
+            </a:pPr>
+            <a:r>
+              <a:rPr lang="en-US" sz="975" dirty="0">
+                <a:solidFill>
+                  <a:srgbClr val="93A6BA"/>
+                </a:solidFill>
+                <a:latin typeface="Malgun Gothic" pitchFamily="34" charset="0"/>
+                <a:ea typeface="Malgun Gothic" pitchFamily="34" charset="-122"/>
+                <a:cs typeface="Malgun Gothic" pitchFamily="34" charset="-120"/>
+              </a:rPr>
+              <a:t>설비 계측</a:t>
+            </a:r>
+            <a:endParaRPr lang="en-US" sz="975" dirty="0"/>
+          </a:p>
+        </p:txBody>
+      </p:sp>
+      <p:sp>
+        <p:nvSpPr>
+          <p:cNvPr id="17" name="Shape 15"/>
+          <p:cNvSpPr/>
+          <p:nvPr/>
+        </p:nvSpPr>
+        <p:spPr>
+          <a:xfrm>
+            <a:off x="3352800" y="3067050"/>
+            <a:ext cx="1428750" cy="285750"/>
+          </a:xfrm>
+          <a:prstGeom prst="rect">
+            <a:avLst/>
+          </a:prstGeom>
+          <a:ln w="12700">
+            <a:solidFill>
+              <a:srgbClr val="22354A"/>
+            </a:solidFill>
+            <a:prstDash val="solid"/>
+          </a:ln>
+        </p:spPr>
+      </p:sp>
+      <p:sp>
+        <p:nvSpPr>
+          <p:cNvPr id="18" name="Text 16"/>
+          <p:cNvSpPr txBox="1"/>
+          <p:nvPr/>
+        </p:nvSpPr>
+        <p:spPr>
+          <a:xfrm>
+            <a:off x="3448050" y="3133725"/>
+            <a:ext cx="1238250" cy="148590"/>
+          </a:xfrm>
+          <a:prstGeom prst="rect">
+            <a:avLst/>
+          </a:prstGeom>
+          <a:noFill/>
+          <a:ln/>
+        </p:spPr>
+        <p:txBody>
+          <a:bodyPr wrap="square" lIns="0" tIns="0" rIns="0" bIns="0" rtlCol="0" anchor="t"/>
+          <a:lstStyle/>
+          <a:p>
+            <a:pPr algn="l" indent="0" marL="0">
+              <a:lnSpc>
+                <a:spcPts val="1170"/>
+              </a:lnSpc>
+              <a:buNone/>
+            </a:pPr>
+            <a:r>
+              <a:rPr lang="en-US" sz="975" dirty="0">
+                <a:solidFill>
+                  <a:srgbClr val="93A6BA"/>
+                </a:solidFill>
+                <a:latin typeface="Malgun Gothic" pitchFamily="34" charset="0"/>
+                <a:ea typeface="Malgun Gothic" pitchFamily="34" charset="-122"/>
+                <a:cs typeface="Malgun Gothic" pitchFamily="34" charset="-120"/>
+              </a:rPr>
+              <a:t>표준 통신 직결</a:t>
+            </a:r>
+            <a:endParaRPr lang="en-US" sz="975" dirty="0"/>
+          </a:p>
+        </p:txBody>
+      </p:sp>
+      <p:sp>
+        <p:nvSpPr>
+          <p:cNvPr id="19" name="Shape 17"/>
+          <p:cNvSpPr/>
+          <p:nvPr/>
+        </p:nvSpPr>
+        <p:spPr>
+          <a:xfrm>
+            <a:off x="6496050" y="3067050"/>
+            <a:ext cx="1809750" cy="285750"/>
+          </a:xfrm>
+          <a:prstGeom prst="rect">
+            <a:avLst/>
+          </a:prstGeom>
+          <a:ln w="12700">
+            <a:solidFill>
+              <a:srgbClr val="22354A"/>
+            </a:solidFill>
+            <a:prstDash val="solid"/>
+          </a:ln>
+        </p:spPr>
+      </p:sp>
+      <p:sp>
+        <p:nvSpPr>
+          <p:cNvPr id="20" name="Text 18"/>
+          <p:cNvSpPr txBox="1"/>
+          <p:nvPr/>
+        </p:nvSpPr>
+        <p:spPr>
+          <a:xfrm>
+            <a:off x="6591300" y="3133725"/>
+            <a:ext cx="1619250" cy="148590"/>
+          </a:xfrm>
+          <a:prstGeom prst="rect">
+            <a:avLst/>
+          </a:prstGeom>
+          <a:noFill/>
+          <a:ln/>
+        </p:spPr>
+        <p:txBody>
+          <a:bodyPr wrap="square" lIns="0" tIns="0" rIns="0" bIns="0" rtlCol="0" anchor="t"/>
+          <a:lstStyle/>
+          <a:p>
+            <a:pPr algn="l" indent="0" marL="0">
+              <a:lnSpc>
+                <a:spcPts val="1170"/>
+              </a:lnSpc>
+              <a:buNone/>
+            </a:pPr>
+            <a:r>
+              <a:rPr lang="en-US" sz="975" dirty="0">
+                <a:solidFill>
+                  <a:srgbClr val="93A6BA"/>
+                </a:solidFill>
+                <a:latin typeface="Malgun Gothic" pitchFamily="34" charset="0"/>
+                <a:ea typeface="Malgun Gothic" pitchFamily="34" charset="-122"/>
+                <a:cs typeface="Malgun Gothic" pitchFamily="34" charset="-120"/>
+              </a:rPr>
+              <a:t>1시간 시간가중평균</a:t>
+            </a:r>
+            <a:endParaRPr lang="en-US" sz="975" dirty="0"/>
+          </a:p>
+        </p:txBody>
+      </p:sp>
+      <p:sp>
+        <p:nvSpPr>
+          <p:cNvPr id="21" name="Shape 19"/>
+          <p:cNvSpPr/>
+          <p:nvPr/>
+        </p:nvSpPr>
+        <p:spPr>
+          <a:xfrm>
+            <a:off x="10020300" y="3067050"/>
+            <a:ext cx="1257300" cy="285750"/>
+          </a:xfrm>
+          <a:prstGeom prst="rect">
+            <a:avLst/>
+          </a:prstGeom>
+          <a:ln w="12700">
+            <a:solidFill>
+              <a:srgbClr val="6B5220"/>
+            </a:solidFill>
+            <a:prstDash val="solid"/>
+          </a:ln>
+        </p:spPr>
+      </p:sp>
+      <p:sp>
+        <p:nvSpPr>
+          <p:cNvPr id="22" name="Text 20"/>
+          <p:cNvSpPr txBox="1"/>
+          <p:nvPr/>
+        </p:nvSpPr>
+        <p:spPr>
+          <a:xfrm>
+            <a:off x="10115550" y="3133725"/>
+            <a:ext cx="1066800" cy="148590"/>
+          </a:xfrm>
+          <a:prstGeom prst="rect">
+            <a:avLst/>
+          </a:prstGeom>
+          <a:noFill/>
+          <a:ln/>
+        </p:spPr>
+        <p:txBody>
+          <a:bodyPr wrap="square" lIns="0" tIns="0" rIns="0" bIns="0" rtlCol="0" anchor="t"/>
+          <a:lstStyle/>
+          <a:p>
+            <a:pPr algn="l" indent="0" marL="0">
+              <a:lnSpc>
+                <a:spcPts val="1170"/>
+              </a:lnSpc>
+              <a:buNone/>
+            </a:pPr>
+            <a:r>
+              <a:rPr lang="en-US" sz="975" dirty="0">
+                <a:solidFill>
+                  <a:srgbClr val="EFB13C"/>
+                </a:solidFill>
+                <a:latin typeface="Malgun Gothic" pitchFamily="34" charset="0"/>
+                <a:ea typeface="Malgun Gothic" pitchFamily="34" charset="-122"/>
+                <a:cs typeface="Malgun Gothic" pitchFamily="34" charset="-120"/>
+              </a:rPr>
+              <a:t>검증 후 누적</a:t>
+            </a:r>
+            <a:endParaRPr lang="en-US" sz="975" dirty="0"/>
+          </a:p>
+        </p:txBody>
+      </p:sp>
+      <p:sp>
+        <p:nvSpPr>
+          <p:cNvPr id="23" name="Text 21"/>
+          <p:cNvSpPr txBox="1"/>
+          <p:nvPr/>
+        </p:nvSpPr>
+        <p:spPr>
+          <a:xfrm>
+            <a:off x="2533650" y="3133725"/>
+            <a:ext cx="190500" cy="148590"/>
+          </a:xfrm>
+          <a:prstGeom prst="rect">
+            <a:avLst/>
+          </a:prstGeom>
+          <a:noFill/>
+          <a:ln/>
+        </p:spPr>
+        <p:txBody>
+          <a:bodyPr wrap="square" lIns="0" tIns="0" rIns="0" bIns="0" rtlCol="0" anchor="t"/>
+          <a:lstStyle/>
+          <a:p>
+            <a:pPr algn="ctr" indent="0" marL="0">
+              <a:lnSpc>
+                <a:spcPts val="1170"/>
+              </a:lnSpc>
+              <a:buNone/>
+            </a:pPr>
+            <a:r>
+              <a:rPr lang="en-US" sz="975" dirty="0">
+                <a:solidFill>
+                  <a:srgbClr val="63798F"/>
+                </a:solidFill>
+                <a:latin typeface="Malgun Gothic" pitchFamily="34" charset="0"/>
+                <a:ea typeface="Malgun Gothic" pitchFamily="34" charset="-122"/>
+                <a:cs typeface="Malgun Gothic" pitchFamily="34" charset="-120"/>
+              </a:rPr>
+              <a:t>→</a:t>
+            </a:r>
+            <a:endParaRPr lang="en-US" sz="975" dirty="0"/>
+          </a:p>
+        </p:txBody>
+      </p:sp>
+      <p:sp>
+        <p:nvSpPr>
+          <p:cNvPr id="24" name="Text 22"/>
+          <p:cNvSpPr txBox="1"/>
+          <p:nvPr/>
+        </p:nvSpPr>
+        <p:spPr>
+          <a:xfrm>
+            <a:off x="5924550" y="3133725"/>
+            <a:ext cx="190500" cy="148590"/>
+          </a:xfrm>
+          <a:prstGeom prst="rect">
+            <a:avLst/>
+          </a:prstGeom>
+          <a:noFill/>
+          <a:ln/>
+        </p:spPr>
+        <p:txBody>
+          <a:bodyPr wrap="square" lIns="0" tIns="0" rIns="0" bIns="0" rtlCol="0" anchor="t"/>
+          <a:lstStyle/>
+          <a:p>
+            <a:pPr algn="ctr" indent="0" marL="0">
+              <a:lnSpc>
+                <a:spcPts val="1170"/>
+              </a:lnSpc>
+              <a:buNone/>
+            </a:pPr>
+            <a:r>
+              <a:rPr lang="en-US" sz="975" dirty="0">
+                <a:solidFill>
+                  <a:srgbClr val="63798F"/>
+                </a:solidFill>
+                <a:latin typeface="Malgun Gothic" pitchFamily="34" charset="0"/>
+                <a:ea typeface="Malgun Gothic" pitchFamily="34" charset="-122"/>
+                <a:cs typeface="Malgun Gothic" pitchFamily="34" charset="-120"/>
+              </a:rPr>
+              <a:t>→</a:t>
+            </a:r>
+            <a:endParaRPr lang="en-US" sz="975" dirty="0"/>
+          </a:p>
+        </p:txBody>
+      </p:sp>
+      <p:sp>
+        <p:nvSpPr>
+          <p:cNvPr id="25" name="Text 23"/>
+          <p:cNvSpPr txBox="1"/>
+          <p:nvPr/>
+        </p:nvSpPr>
+        <p:spPr>
+          <a:xfrm>
+            <a:off x="8877300" y="3133725"/>
+            <a:ext cx="190500" cy="148590"/>
+          </a:xfrm>
+          <a:prstGeom prst="rect">
+            <a:avLst/>
+          </a:prstGeom>
+          <a:noFill/>
+          <a:ln/>
+        </p:spPr>
+        <p:txBody>
+          <a:bodyPr wrap="square" lIns="0" tIns="0" rIns="0" bIns="0" rtlCol="0" anchor="t"/>
+          <a:lstStyle/>
+          <a:p>
+            <a:pPr algn="ctr" indent="0" marL="0">
+              <a:lnSpc>
+                <a:spcPts val="1170"/>
+              </a:lnSpc>
+              <a:buNone/>
+            </a:pPr>
+            <a:r>
+              <a:rPr lang="en-US" sz="975" dirty="0">
+                <a:solidFill>
+                  <a:srgbClr val="63798F"/>
+                </a:solidFill>
+                <a:latin typeface="Malgun Gothic" pitchFamily="34" charset="0"/>
+                <a:ea typeface="Malgun Gothic" pitchFamily="34" charset="-122"/>
+                <a:cs typeface="Malgun Gothic" pitchFamily="34" charset="-120"/>
+              </a:rPr>
+              <a:t>→</a:t>
+            </a:r>
+            <a:endParaRPr lang="en-US" sz="975" dirty="0"/>
+          </a:p>
+        </p:txBody>
+      </p:sp>
+      <p:sp>
+        <p:nvSpPr>
+          <p:cNvPr id="26" name="Shape 24"/>
+          <p:cNvSpPr/>
+          <p:nvPr/>
+        </p:nvSpPr>
+        <p:spPr>
+          <a:xfrm>
+            <a:off x="685800" y="3771900"/>
+            <a:ext cx="5295900" cy="19050"/>
+          </a:xfrm>
+          <a:prstGeom prst="rect">
+            <a:avLst/>
+          </a:prstGeom>
+          <a:solidFill>
+            <a:srgbClr val="22354A"/>
+          </a:solidFill>
+          <a:ln/>
+        </p:spPr>
+      </p:sp>
+      <p:sp>
+        <p:nvSpPr>
+          <p:cNvPr id="27" name="Text 25"/>
+          <p:cNvSpPr txBox="1"/>
+          <p:nvPr/>
+        </p:nvSpPr>
+        <p:spPr>
+          <a:xfrm>
+            <a:off x="685800" y="3905250"/>
+            <a:ext cx="5295900" cy="125016"/>
+          </a:xfrm>
+          <a:prstGeom prst="rect">
+            <a:avLst/>
+          </a:prstGeom>
+          <a:noFill/>
+          <a:ln/>
+        </p:spPr>
+        <p:txBody>
+          <a:bodyPr wrap="square" lIns="0" tIns="0" rIns="0" bIns="0" rtlCol="0" anchor="t"/>
+          <a:lstStyle/>
+          <a:p>
+            <a:pPr algn="l" indent="0" marL="0">
+              <a:lnSpc>
+                <a:spcPts val="984"/>
+              </a:lnSpc>
+              <a:buNone/>
+            </a:pPr>
+            <a:r>
+              <a:rPr lang="en-US" sz="788" b="1" spc="150" kern="0" dirty="0">
+                <a:solidFill>
+                  <a:srgbClr val="63798F"/>
+                </a:solidFill>
+                <a:latin typeface="Consolas" pitchFamily="34" charset="0"/>
+                <a:ea typeface="Consolas" pitchFamily="34" charset="-122"/>
+                <a:cs typeface="Consolas" pitchFamily="34" charset="-120"/>
+              </a:rPr>
+              <a:t>받아 오는 값  ·  6가지</a:t>
+            </a:r>
+            <a:endParaRPr lang="en-US" sz="788" dirty="0"/>
+          </a:p>
+        </p:txBody>
+      </p:sp>
+      <p:sp>
+        <p:nvSpPr>
+          <p:cNvPr id="28" name="Shape 26"/>
+          <p:cNvSpPr/>
+          <p:nvPr/>
+        </p:nvSpPr>
+        <p:spPr>
+          <a:xfrm>
+            <a:off x="685800" y="4076700"/>
+            <a:ext cx="5295900" cy="1676400"/>
+          </a:xfrm>
+          <a:prstGeom prst="rect">
+            <a:avLst/>
+          </a:prstGeom>
+          <a:solidFill>
+            <a:srgbClr val="0A1320"/>
+          </a:solidFill>
+          <a:ln w="12700">
+            <a:solidFill>
+              <a:srgbClr val="182838"/>
+            </a:solidFill>
+            <a:prstDash val="solid"/>
+          </a:ln>
+        </p:spPr>
+      </p:sp>
+      <p:sp>
+        <p:nvSpPr>
+          <p:cNvPr id="29" name="Text 27"/>
+          <p:cNvSpPr txBox="1"/>
+          <p:nvPr/>
+        </p:nvSpPr>
+        <p:spPr>
+          <a:xfrm>
+            <a:off x="838200" y="4210050"/>
+            <a:ext cx="1428750" cy="167164"/>
+          </a:xfrm>
+          <a:prstGeom prst="rect">
+            <a:avLst/>
+          </a:prstGeom>
+          <a:noFill/>
+          <a:ln/>
+        </p:spPr>
+        <p:txBody>
+          <a:bodyPr wrap="square" lIns="0" tIns="0" rIns="0" bIns="0" rtlCol="0" anchor="t"/>
+          <a:lstStyle/>
+          <a:p>
+            <a:pPr algn="l" indent="0" marL="0">
+              <a:lnSpc>
+                <a:spcPts val="1316"/>
+              </a:lnSpc>
+              <a:buNone/>
+            </a:pPr>
+            <a:r>
+              <a:rPr lang="en-US" sz="1013" dirty="0">
+                <a:solidFill>
+                  <a:srgbClr val="EAE7E0"/>
+                </a:solidFill>
+                <a:latin typeface="Malgun Gothic" pitchFamily="34" charset="0"/>
+                <a:ea typeface="Malgun Gothic" pitchFamily="34" charset="-122"/>
+                <a:cs typeface="Malgun Gothic" pitchFamily="34" charset="-120"/>
+              </a:rPr>
+              <a:t>외기온도</a:t>
+            </a:r>
+            <a:endParaRPr lang="en-US" sz="1013" dirty="0"/>
+          </a:p>
+        </p:txBody>
+      </p:sp>
+      <p:sp>
+        <p:nvSpPr>
+          <p:cNvPr id="30" name="Text 28"/>
+          <p:cNvSpPr txBox="1"/>
+          <p:nvPr/>
+        </p:nvSpPr>
+        <p:spPr>
+          <a:xfrm>
+            <a:off x="2400300" y="4210050"/>
+            <a:ext cx="3390900" cy="160973"/>
+          </a:xfrm>
+          <a:prstGeom prst="rect">
+            <a:avLst/>
+          </a:prstGeom>
+          <a:noFill/>
+          <a:ln/>
+        </p:spPr>
+        <p:txBody>
+          <a:bodyPr wrap="square" lIns="0" tIns="0" rIns="0" bIns="0" rtlCol="0" anchor="t"/>
+          <a:lstStyle/>
+          <a:p>
+            <a:pPr algn="l" indent="0" marL="0">
+              <a:lnSpc>
+                <a:spcPts val="1268"/>
+              </a:lnSpc>
+              <a:buNone/>
+            </a:pPr>
+            <a:r>
+              <a:rPr lang="en-US" sz="975" dirty="0">
+                <a:solidFill>
+                  <a:srgbClr val="93A6BA"/>
+                </a:solidFill>
+                <a:latin typeface="Malgun Gothic" pitchFamily="34" charset="0"/>
+                <a:ea typeface="Malgun Gothic" pitchFamily="34" charset="-122"/>
+                <a:cs typeface="Malgun Gothic" pitchFamily="34" charset="-120"/>
+              </a:rPr>
+              <a:t>보정값을 고르는 기준</a:t>
+            </a:r>
+            <a:endParaRPr lang="en-US" sz="975" dirty="0"/>
+          </a:p>
+        </p:txBody>
+      </p:sp>
+      <p:sp>
+        <p:nvSpPr>
+          <p:cNvPr id="31" name="Shape 29"/>
+          <p:cNvSpPr/>
+          <p:nvPr/>
+        </p:nvSpPr>
+        <p:spPr>
+          <a:xfrm>
+            <a:off x="838200" y="4419600"/>
+            <a:ext cx="4991100" cy="0"/>
+          </a:xfrm>
+          <a:prstGeom prst="line">
+            <a:avLst/>
+          </a:prstGeom>
+          <a:noFill/>
+          <a:ln w="12700">
+            <a:solidFill>
+              <a:srgbClr val="182838"/>
+            </a:solidFill>
+            <a:prstDash val="solid"/>
+          </a:ln>
+        </p:spPr>
+      </p:sp>
+      <p:sp>
+        <p:nvSpPr>
+          <p:cNvPr id="32" name="Text 30"/>
+          <p:cNvSpPr txBox="1"/>
+          <p:nvPr/>
+        </p:nvSpPr>
+        <p:spPr>
+          <a:xfrm>
+            <a:off x="838200" y="4457700"/>
+            <a:ext cx="1428750" cy="167164"/>
+          </a:xfrm>
+          <a:prstGeom prst="rect">
+            <a:avLst/>
+          </a:prstGeom>
+          <a:noFill/>
+          <a:ln/>
+        </p:spPr>
+        <p:txBody>
+          <a:bodyPr wrap="square" lIns="0" tIns="0" rIns="0" bIns="0" rtlCol="0" anchor="t"/>
+          <a:lstStyle/>
+          <a:p>
+            <a:pPr algn="l" indent="0" marL="0">
+              <a:lnSpc>
+                <a:spcPts val="1316"/>
+              </a:lnSpc>
+              <a:buNone/>
+            </a:pPr>
+            <a:r>
+              <a:rPr lang="en-US" sz="1013" dirty="0">
+                <a:solidFill>
+                  <a:srgbClr val="EAE7E0"/>
+                </a:solidFill>
+                <a:latin typeface="Malgun Gothic" pitchFamily="34" charset="0"/>
+                <a:ea typeface="Malgun Gothic" pitchFamily="34" charset="-122"/>
+                <a:cs typeface="Malgun Gothic" pitchFamily="34" charset="-120"/>
+              </a:rPr>
+              <a:t>대기압</a:t>
+            </a:r>
+            <a:endParaRPr lang="en-US" sz="1013" dirty="0"/>
+          </a:p>
+        </p:txBody>
+      </p:sp>
+      <p:sp>
+        <p:nvSpPr>
+          <p:cNvPr id="33" name="Text 31"/>
+          <p:cNvSpPr txBox="1"/>
+          <p:nvPr/>
+        </p:nvSpPr>
+        <p:spPr>
+          <a:xfrm>
+            <a:off x="2400300" y="4457700"/>
+            <a:ext cx="3390900" cy="160973"/>
+          </a:xfrm>
+          <a:prstGeom prst="rect">
+            <a:avLst/>
+          </a:prstGeom>
+          <a:noFill/>
+          <a:ln/>
+        </p:spPr>
+        <p:txBody>
+          <a:bodyPr wrap="square" lIns="0" tIns="0" rIns="0" bIns="0" rtlCol="0" anchor="t"/>
+          <a:lstStyle/>
+          <a:p>
+            <a:pPr algn="l" indent="0" marL="0">
+              <a:lnSpc>
+                <a:spcPts val="1268"/>
+              </a:lnSpc>
+              <a:buNone/>
+            </a:pPr>
+            <a:r>
+              <a:rPr lang="en-US" sz="975" dirty="0">
+                <a:solidFill>
+                  <a:srgbClr val="93A6BA"/>
+                </a:solidFill>
+                <a:latin typeface="Malgun Gothic" pitchFamily="34" charset="0"/>
+                <a:ea typeface="Malgun Gothic" pitchFamily="34" charset="-122"/>
+                <a:cs typeface="Malgun Gothic" pitchFamily="34" charset="-120"/>
+              </a:rPr>
+              <a:t>이론 출력 계산</a:t>
+            </a:r>
+            <a:endParaRPr lang="en-US" sz="975" dirty="0"/>
+          </a:p>
+        </p:txBody>
+      </p:sp>
+      <p:sp>
+        <p:nvSpPr>
+          <p:cNvPr id="34" name="Shape 32"/>
+          <p:cNvSpPr/>
+          <p:nvPr/>
+        </p:nvSpPr>
+        <p:spPr>
+          <a:xfrm>
+            <a:off x="838200" y="4667250"/>
+            <a:ext cx="4991100" cy="0"/>
+          </a:xfrm>
+          <a:prstGeom prst="line">
+            <a:avLst/>
+          </a:prstGeom>
+          <a:noFill/>
+          <a:ln w="12700">
+            <a:solidFill>
+              <a:srgbClr val="182838"/>
+            </a:solidFill>
+            <a:prstDash val="solid"/>
+          </a:ln>
+        </p:spPr>
+      </p:sp>
+      <p:sp>
+        <p:nvSpPr>
+          <p:cNvPr id="35" name="Text 33"/>
+          <p:cNvSpPr txBox="1"/>
+          <p:nvPr/>
+        </p:nvSpPr>
+        <p:spPr>
+          <a:xfrm>
+            <a:off x="838200" y="4705350"/>
+            <a:ext cx="1428750" cy="167164"/>
+          </a:xfrm>
+          <a:prstGeom prst="rect">
+            <a:avLst/>
+          </a:prstGeom>
+          <a:noFill/>
+          <a:ln/>
+        </p:spPr>
+        <p:txBody>
+          <a:bodyPr wrap="square" lIns="0" tIns="0" rIns="0" bIns="0" rtlCol="0" anchor="t"/>
+          <a:lstStyle/>
+          <a:p>
+            <a:pPr algn="l" indent="0" marL="0">
+              <a:lnSpc>
+                <a:spcPts val="1316"/>
+              </a:lnSpc>
+              <a:buNone/>
+            </a:pPr>
+            <a:r>
+              <a:rPr lang="en-US" sz="1013" dirty="0">
+                <a:solidFill>
+                  <a:srgbClr val="EAE7E0"/>
+                </a:solidFill>
+                <a:latin typeface="Malgun Gothic" pitchFamily="34" charset="0"/>
+                <a:ea typeface="Malgun Gothic" pitchFamily="34" charset="-122"/>
+                <a:cs typeface="Malgun Gothic" pitchFamily="34" charset="-120"/>
+              </a:rPr>
+              <a:t>상대습도</a:t>
+            </a:r>
+            <a:endParaRPr lang="en-US" sz="1013" dirty="0"/>
+          </a:p>
+        </p:txBody>
+      </p:sp>
+      <p:sp>
+        <p:nvSpPr>
+          <p:cNvPr id="36" name="Text 34"/>
+          <p:cNvSpPr txBox="1"/>
+          <p:nvPr/>
+        </p:nvSpPr>
+        <p:spPr>
+          <a:xfrm>
+            <a:off x="2400300" y="4705350"/>
+            <a:ext cx="3390900" cy="160973"/>
+          </a:xfrm>
+          <a:prstGeom prst="rect">
+            <a:avLst/>
+          </a:prstGeom>
+          <a:noFill/>
+          <a:ln/>
+        </p:spPr>
+        <p:txBody>
+          <a:bodyPr wrap="square" lIns="0" tIns="0" rIns="0" bIns="0" rtlCol="0" anchor="t"/>
+          <a:lstStyle/>
+          <a:p>
+            <a:pPr algn="l" indent="0" marL="0">
+              <a:lnSpc>
+                <a:spcPts val="1268"/>
+              </a:lnSpc>
+              <a:buNone/>
+            </a:pPr>
+            <a:r>
+              <a:rPr lang="en-US" sz="975" dirty="0">
+                <a:solidFill>
+                  <a:srgbClr val="93A6BA"/>
+                </a:solidFill>
+                <a:latin typeface="Malgun Gothic" pitchFamily="34" charset="0"/>
+                <a:ea typeface="Malgun Gothic" pitchFamily="34" charset="-122"/>
+                <a:cs typeface="Malgun Gothic" pitchFamily="34" charset="-120"/>
+              </a:rPr>
+              <a:t>계기 2대 교차 확인</a:t>
+            </a:r>
+            <a:endParaRPr lang="en-US" sz="975" dirty="0"/>
+          </a:p>
+        </p:txBody>
+      </p:sp>
+      <p:sp>
+        <p:nvSpPr>
+          <p:cNvPr id="37" name="Shape 35"/>
+          <p:cNvSpPr/>
+          <p:nvPr/>
+        </p:nvSpPr>
+        <p:spPr>
+          <a:xfrm>
+            <a:off x="838200" y="4914900"/>
+            <a:ext cx="4991100" cy="0"/>
+          </a:xfrm>
+          <a:prstGeom prst="line">
+            <a:avLst/>
+          </a:prstGeom>
+          <a:noFill/>
+          <a:ln w="12700">
+            <a:solidFill>
+              <a:srgbClr val="182838"/>
+            </a:solidFill>
+            <a:prstDash val="solid"/>
+          </a:ln>
+        </p:spPr>
+      </p:sp>
+      <p:sp>
+        <p:nvSpPr>
+          <p:cNvPr id="38" name="Text 36"/>
+          <p:cNvSpPr txBox="1"/>
+          <p:nvPr/>
+        </p:nvSpPr>
+        <p:spPr>
+          <a:xfrm>
+            <a:off x="838200" y="4953000"/>
+            <a:ext cx="1428750" cy="167164"/>
+          </a:xfrm>
+          <a:prstGeom prst="rect">
+            <a:avLst/>
+          </a:prstGeom>
+          <a:noFill/>
+          <a:ln/>
+        </p:spPr>
+        <p:txBody>
+          <a:bodyPr wrap="square" lIns="0" tIns="0" rIns="0" bIns="0" rtlCol="0" anchor="t"/>
+          <a:lstStyle/>
+          <a:p>
+            <a:pPr algn="l" indent="0" marL="0">
+              <a:lnSpc>
+                <a:spcPts val="1316"/>
+              </a:lnSpc>
+              <a:buNone/>
+            </a:pPr>
+            <a:r>
+              <a:rPr lang="en-US" sz="1013" dirty="0">
+                <a:solidFill>
+                  <a:srgbClr val="EAE7E0"/>
+                </a:solidFill>
+                <a:latin typeface="Malgun Gothic" pitchFamily="34" charset="0"/>
+                <a:ea typeface="Malgun Gothic" pitchFamily="34" charset="-122"/>
+                <a:cs typeface="Malgun Gothic" pitchFamily="34" charset="-120"/>
+              </a:rPr>
+              <a:t>진공도</a:t>
+            </a:r>
+            <a:endParaRPr lang="en-US" sz="1013" dirty="0"/>
+          </a:p>
+        </p:txBody>
+      </p:sp>
+      <p:sp>
+        <p:nvSpPr>
+          <p:cNvPr id="39" name="Text 37"/>
+          <p:cNvSpPr txBox="1"/>
+          <p:nvPr/>
+        </p:nvSpPr>
+        <p:spPr>
+          <a:xfrm>
+            <a:off x="2400300" y="4953000"/>
+            <a:ext cx="3390900" cy="160973"/>
+          </a:xfrm>
+          <a:prstGeom prst="rect">
+            <a:avLst/>
+          </a:prstGeom>
+          <a:noFill/>
+          <a:ln/>
+        </p:spPr>
+        <p:txBody>
+          <a:bodyPr wrap="square" lIns="0" tIns="0" rIns="0" bIns="0" rtlCol="0" anchor="t"/>
+          <a:lstStyle/>
+          <a:p>
+            <a:pPr algn="l" indent="0" marL="0">
+              <a:lnSpc>
+                <a:spcPts val="1268"/>
+              </a:lnSpc>
+              <a:buNone/>
+            </a:pPr>
+            <a:r>
+              <a:rPr lang="en-US" sz="975" dirty="0">
+                <a:solidFill>
+                  <a:srgbClr val="93A6BA"/>
+                </a:solidFill>
+                <a:latin typeface="Malgun Gothic" pitchFamily="34" charset="0"/>
+                <a:ea typeface="Malgun Gothic" pitchFamily="34" charset="-122"/>
+                <a:cs typeface="Malgun Gothic" pitchFamily="34" charset="-120"/>
+              </a:rPr>
+              <a:t>이론 출력 계산</a:t>
+            </a:r>
+            <a:endParaRPr lang="en-US" sz="975" dirty="0"/>
+          </a:p>
+        </p:txBody>
+      </p:sp>
+      <p:sp>
+        <p:nvSpPr>
+          <p:cNvPr id="40" name="Shape 38"/>
+          <p:cNvSpPr/>
+          <p:nvPr/>
+        </p:nvSpPr>
+        <p:spPr>
+          <a:xfrm>
+            <a:off x="838200" y="5162550"/>
+            <a:ext cx="4991100" cy="0"/>
+          </a:xfrm>
+          <a:prstGeom prst="line">
+            <a:avLst/>
+          </a:prstGeom>
+          <a:noFill/>
+          <a:ln w="12700">
+            <a:solidFill>
+              <a:srgbClr val="182838"/>
+            </a:solidFill>
+            <a:prstDash val="solid"/>
+          </a:ln>
+        </p:spPr>
+      </p:sp>
+      <p:sp>
+        <p:nvSpPr>
+          <p:cNvPr id="41" name="Text 39"/>
+          <p:cNvSpPr txBox="1"/>
+          <p:nvPr/>
+        </p:nvSpPr>
+        <p:spPr>
+          <a:xfrm>
+            <a:off x="838200" y="5200650"/>
+            <a:ext cx="1428750" cy="167164"/>
+          </a:xfrm>
+          <a:prstGeom prst="rect">
+            <a:avLst/>
+          </a:prstGeom>
+          <a:noFill/>
+          <a:ln/>
+        </p:spPr>
+        <p:txBody>
+          <a:bodyPr wrap="square" lIns="0" tIns="0" rIns="0" bIns="0" rtlCol="0" anchor="t"/>
+          <a:lstStyle/>
+          <a:p>
+            <a:pPr algn="l" indent="0" marL="0">
+              <a:lnSpc>
+                <a:spcPts val="1316"/>
+              </a:lnSpc>
+              <a:buNone/>
+            </a:pPr>
+            <a:r>
+              <a:rPr lang="en-US" sz="1013" dirty="0">
+                <a:solidFill>
+                  <a:srgbClr val="EAE7E0"/>
+                </a:solidFill>
+                <a:latin typeface="Malgun Gothic" pitchFamily="34" charset="0"/>
+                <a:ea typeface="Malgun Gothic" pitchFamily="34" charset="-122"/>
+                <a:cs typeface="Malgun Gothic" pitchFamily="34" charset="-120"/>
+              </a:rPr>
+              <a:t>발전량</a:t>
+            </a:r>
+            <a:endParaRPr lang="en-US" sz="1013" dirty="0"/>
+          </a:p>
+        </p:txBody>
+      </p:sp>
+      <p:sp>
+        <p:nvSpPr>
+          <p:cNvPr id="42" name="Text 40"/>
+          <p:cNvSpPr txBox="1"/>
+          <p:nvPr/>
+        </p:nvSpPr>
+        <p:spPr>
+          <a:xfrm>
+            <a:off x="2400300" y="5200650"/>
+            <a:ext cx="3390900" cy="160973"/>
+          </a:xfrm>
+          <a:prstGeom prst="rect">
+            <a:avLst/>
+          </a:prstGeom>
+          <a:noFill/>
+          <a:ln/>
+        </p:spPr>
+        <p:txBody>
+          <a:bodyPr wrap="square" lIns="0" tIns="0" rIns="0" bIns="0" rtlCol="0" anchor="t"/>
+          <a:lstStyle/>
+          <a:p>
+            <a:pPr algn="l" indent="0" marL="0">
+              <a:lnSpc>
+                <a:spcPts val="1268"/>
+              </a:lnSpc>
+              <a:buNone/>
+            </a:pPr>
+            <a:r>
+              <a:rPr lang="en-US" sz="975" dirty="0">
+                <a:solidFill>
+                  <a:srgbClr val="93A6BA"/>
+                </a:solidFill>
+                <a:latin typeface="Malgun Gothic" pitchFamily="34" charset="0"/>
+                <a:ea typeface="Malgun Gothic" pitchFamily="34" charset="-122"/>
+                <a:cs typeface="Malgun Gothic" pitchFamily="34" charset="-120"/>
+              </a:rPr>
+              <a:t>실적 대조</a:t>
+            </a:r>
+            <a:endParaRPr lang="en-US" sz="975" dirty="0"/>
+          </a:p>
+        </p:txBody>
+      </p:sp>
+      <p:sp>
+        <p:nvSpPr>
+          <p:cNvPr id="43" name="Shape 41"/>
+          <p:cNvSpPr/>
+          <p:nvPr/>
+        </p:nvSpPr>
+        <p:spPr>
+          <a:xfrm>
+            <a:off x="838200" y="5410200"/>
+            <a:ext cx="4991100" cy="0"/>
+          </a:xfrm>
+          <a:prstGeom prst="line">
+            <a:avLst/>
+          </a:prstGeom>
+          <a:noFill/>
+          <a:ln w="12700">
+            <a:solidFill>
+              <a:srgbClr val="182838"/>
+            </a:solidFill>
+            <a:prstDash val="solid"/>
+          </a:ln>
+        </p:spPr>
+      </p:sp>
+      <p:sp>
+        <p:nvSpPr>
+          <p:cNvPr id="44" name="Text 42"/>
+          <p:cNvSpPr txBox="1"/>
+          <p:nvPr/>
+        </p:nvSpPr>
+        <p:spPr>
+          <a:xfrm>
+            <a:off x="838200" y="5448300"/>
+            <a:ext cx="1428750" cy="167164"/>
+          </a:xfrm>
+          <a:prstGeom prst="rect">
+            <a:avLst/>
+          </a:prstGeom>
+          <a:noFill/>
+          <a:ln/>
+        </p:spPr>
+        <p:txBody>
+          <a:bodyPr wrap="square" lIns="0" tIns="0" rIns="0" bIns="0" rtlCol="0" anchor="t"/>
+          <a:lstStyle/>
+          <a:p>
+            <a:pPr algn="l" indent="0" marL="0">
+              <a:lnSpc>
+                <a:spcPts val="1316"/>
+              </a:lnSpc>
+              <a:buNone/>
+            </a:pPr>
+            <a:r>
+              <a:rPr lang="en-US" sz="1013" dirty="0">
+                <a:solidFill>
+                  <a:srgbClr val="EAE7E0"/>
+                </a:solidFill>
+                <a:latin typeface="Malgun Gothic" pitchFamily="34" charset="0"/>
+                <a:ea typeface="Malgun Gothic" pitchFamily="34" charset="-122"/>
+                <a:cs typeface="Malgun Gothic" pitchFamily="34" charset="-120"/>
+              </a:rPr>
+              <a:t>IGV 실시 여부</a:t>
+            </a:r>
+            <a:endParaRPr lang="en-US" sz="1013" dirty="0"/>
+          </a:p>
+        </p:txBody>
+      </p:sp>
+      <p:sp>
+        <p:nvSpPr>
+          <p:cNvPr id="45" name="Text 43"/>
+          <p:cNvSpPr txBox="1"/>
+          <p:nvPr/>
+        </p:nvSpPr>
+        <p:spPr>
+          <a:xfrm>
+            <a:off x="2400300" y="5448300"/>
+            <a:ext cx="3390900" cy="160973"/>
+          </a:xfrm>
+          <a:prstGeom prst="rect">
+            <a:avLst/>
+          </a:prstGeom>
+          <a:noFill/>
+          <a:ln/>
+        </p:spPr>
+        <p:txBody>
+          <a:bodyPr wrap="square" lIns="0" tIns="0" rIns="0" bIns="0" rtlCol="0" anchor="t"/>
+          <a:lstStyle/>
+          <a:p>
+            <a:pPr algn="l" indent="0" marL="0">
+              <a:lnSpc>
+                <a:spcPts val="1268"/>
+              </a:lnSpc>
+              <a:buNone/>
+            </a:pPr>
+            <a:r>
+              <a:rPr lang="en-US" sz="975" dirty="0">
+                <a:solidFill>
+                  <a:srgbClr val="93A6BA"/>
+                </a:solidFill>
+                <a:latin typeface="Malgun Gothic" pitchFamily="34" charset="0"/>
+                <a:ea typeface="Malgun Gothic" pitchFamily="34" charset="-122"/>
+                <a:cs typeface="Malgun Gothic" pitchFamily="34" charset="-120"/>
+              </a:rPr>
+              <a:t>미실시면 반영 차단</a:t>
+            </a:r>
+            <a:endParaRPr lang="en-US" sz="975" dirty="0"/>
+          </a:p>
+        </p:txBody>
+      </p:sp>
+      <p:sp>
+        <p:nvSpPr>
+          <p:cNvPr id="46" name="Text 44"/>
+          <p:cNvSpPr txBox="1"/>
+          <p:nvPr/>
+        </p:nvSpPr>
+        <p:spPr>
+          <a:xfrm>
+            <a:off x="685800" y="5867400"/>
+            <a:ext cx="5295900" cy="240030"/>
+          </a:xfrm>
+          <a:prstGeom prst="rect">
+            <a:avLst/>
+          </a:prstGeom>
+          <a:noFill/>
+          <a:ln/>
+        </p:spPr>
+        <p:txBody>
+          <a:bodyPr wrap="square" lIns="0" tIns="0" rIns="0" bIns="0" rtlCol="0" anchor="t"/>
+          <a:lstStyle/>
+          <a:p>
+            <a:pPr algn="l" indent="0" marL="0">
+              <a:lnSpc>
+                <a:spcPts val="1890"/>
+              </a:lnSpc>
+              <a:buNone/>
+            </a:pPr>
+            <a:r>
+              <a:rPr lang="en-US" sz="1125" b="1" dirty="0">
+                <a:solidFill>
+                  <a:srgbClr val="EAE7E0"/>
+                </a:solidFill>
+                <a:latin typeface="Malgun Gothic" pitchFamily="34" charset="0"/>
+                <a:ea typeface="Malgun Gothic" pitchFamily="34" charset="-122"/>
+                <a:cs typeface="Malgun Gothic" pitchFamily="34" charset="-120"/>
+              </a:rPr>
+              <a:t>습도는 2대를 함께 봅니다</a:t>
+            </a:r>
+            <a:pPr algn="l" indent="0" marL="0">
+              <a:lnSpc>
+                <a:spcPts val="1890"/>
+              </a:lnSpc>
+              <a:buNone/>
+            </a:pPr>
+            <a:r>
+              <a:rPr lang="en-US" sz="1125" dirty="0">
+                <a:solidFill>
+                  <a:srgbClr val="BCC9D6"/>
+                </a:solidFill>
+                <a:latin typeface="Malgun Gothic" pitchFamily="34" charset="0"/>
+                <a:ea typeface="Malgun Gothic" pitchFamily="34" charset="-122"/>
+                <a:cs typeface="Malgun Gothic" pitchFamily="34" charset="-120"/>
+              </a:rPr>
+              <a:t> — 두 값이 벌어지면 그 회차는 반영을 보류합니다.</a:t>
+            </a:r>
+            <a:endParaRPr lang="en-US" sz="1125" dirty="0"/>
+          </a:p>
+        </p:txBody>
+      </p:sp>
+      <p:sp>
+        <p:nvSpPr>
+          <p:cNvPr id="47" name="Shape 45"/>
+          <p:cNvSpPr/>
+          <p:nvPr/>
+        </p:nvSpPr>
+        <p:spPr>
+          <a:xfrm>
+            <a:off x="6210300" y="3771900"/>
+            <a:ext cx="5295900" cy="19050"/>
+          </a:xfrm>
+          <a:prstGeom prst="rect">
+            <a:avLst/>
+          </a:prstGeom>
+          <a:solidFill>
+            <a:srgbClr val="22354A"/>
+          </a:solidFill>
+          <a:ln/>
+        </p:spPr>
+      </p:sp>
+      <p:sp>
+        <p:nvSpPr>
+          <p:cNvPr id="48" name="Text 46"/>
+          <p:cNvSpPr txBox="1"/>
+          <p:nvPr/>
+        </p:nvSpPr>
+        <p:spPr>
+          <a:xfrm>
+            <a:off x="6210300" y="3905250"/>
+            <a:ext cx="5295900" cy="125016"/>
+          </a:xfrm>
+          <a:prstGeom prst="rect">
+            <a:avLst/>
+          </a:prstGeom>
+          <a:noFill/>
+          <a:ln/>
+        </p:spPr>
+        <p:txBody>
+          <a:bodyPr wrap="square" lIns="0" tIns="0" rIns="0" bIns="0" rtlCol="0" anchor="t"/>
+          <a:lstStyle/>
+          <a:p>
+            <a:pPr algn="l" indent="0" marL="0">
+              <a:lnSpc>
+                <a:spcPts val="984"/>
+              </a:lnSpc>
+              <a:buNone/>
+            </a:pPr>
+            <a:r>
+              <a:rPr lang="en-US" sz="788" b="1" spc="150" kern="0" dirty="0">
+                <a:solidFill>
+                  <a:srgbClr val="63798F"/>
+                </a:solidFill>
+                <a:latin typeface="Consolas" pitchFamily="34" charset="0"/>
+                <a:ea typeface="Consolas" pitchFamily="34" charset="-122"/>
+                <a:cs typeface="Consolas" pitchFamily="34" charset="-120"/>
+              </a:rPr>
+              <a:t>Tool 산정 탭  ·  최신 화면 삽입 자리</a:t>
+            </a:r>
+            <a:endParaRPr lang="en-US" sz="788" dirty="0"/>
+          </a:p>
+        </p:txBody>
+      </p:sp>
+      <p:sp>
+        <p:nvSpPr>
+          <p:cNvPr id="49" name="Shape 47"/>
+          <p:cNvSpPr/>
+          <p:nvPr/>
+        </p:nvSpPr>
+        <p:spPr>
+          <a:xfrm>
+            <a:off x="6210300" y="4076700"/>
+            <a:ext cx="4991100" cy="1676400"/>
           </a:xfrm>
           <a:prstGeom prst="rect">
             <a:avLst/>
@@ -17270,14 +21189,14 @@
       </p:sp>
       <p:sp>
         <p:nvSpPr>
-          <p:cNvPr id="13" name="Text 11"/>
-          <p:cNvSpPr txBox="1"/>
-          <p:nvPr/>
-        </p:nvSpPr>
-        <p:spPr>
-          <a:xfrm>
-            <a:off x="685800" y="3695700"/>
-            <a:ext cx="10820400" cy="226695"/>
+          <p:cNvPr id="50" name="Text 48"/>
+          <p:cNvSpPr txBox="1"/>
+          <p:nvPr/>
+        </p:nvSpPr>
+        <p:spPr>
+          <a:xfrm>
+            <a:off x="6210300" y="4762500"/>
+            <a:ext cx="4991100" cy="200025"/>
           </a:xfrm>
           <a:prstGeom prst="rect">
             <a:avLst/>
@@ -17291,12 +21210,12 @@
           <a:p>
             <a:pPr algn="ctr" indent="0" marL="0">
               <a:lnSpc>
-                <a:spcPts val="1785"/>
-              </a:lnSpc>
-              <a:buNone/>
-            </a:pPr>
-            <a:r>
-              <a:rPr lang="en-US" sz="1275" dirty="0">
+                <a:spcPts val="1575"/>
+              </a:lnSpc>
+              <a:buNone/>
+            </a:pPr>
+            <a:r>
+              <a:rPr lang="en-US" sz="1125" dirty="0">
                 <a:solidFill>
                   <a:srgbClr val="63798F"/>
                 </a:solidFill>
@@ -17304,22 +21223,22 @@
                 <a:ea typeface="Malgun Gothic" pitchFamily="34" charset="-122"/>
                 <a:cs typeface="Malgun Gothic" pitchFamily="34" charset="-120"/>
               </a:rPr>
-              <a:t>작성 예정 — 이 장은 아직 만들지 않았습니다.</a:t>
-            </a:r>
-            <a:endParaRPr lang="en-US" sz="1275" dirty="0"/>
-          </a:p>
-        </p:txBody>
-      </p:sp>
-      <p:sp>
-        <p:nvSpPr>
-          <p:cNvPr id="14" name="Text 12"/>
-          <p:cNvSpPr txBox="1"/>
-          <p:nvPr/>
-        </p:nvSpPr>
-        <p:spPr>
-          <a:xfrm>
-            <a:off x="685800" y="4038600"/>
-            <a:ext cx="10820400" cy="125016"/>
+              <a:t>화면 캡쳐를 여기에 넣습니다</a:t>
+            </a:r>
+            <a:endParaRPr lang="en-US" sz="1125" dirty="0"/>
+          </a:p>
+        </p:txBody>
+      </p:sp>
+      <p:sp>
+        <p:nvSpPr>
+          <p:cNvPr id="51" name="Text 49"/>
+          <p:cNvSpPr txBox="1"/>
+          <p:nvPr/>
+        </p:nvSpPr>
+        <p:spPr>
+          <a:xfrm>
+            <a:off x="6210300" y="5029200"/>
+            <a:ext cx="4991100" cy="125016"/>
           </a:xfrm>
           <a:prstGeom prst="rect">
             <a:avLst/>
@@ -17340,13 +21259,13 @@
             <a:r>
               <a:rPr lang="en-US" sz="788" b="1" spc="150" kern="0" dirty="0">
                 <a:solidFill>
-                  <a:srgbClr val="7E2333"/>
+                  <a:srgbClr val="63798F"/>
                 </a:solidFill>
                 <a:latin typeface="Consolas" pitchFamily="34" charset="0"/>
                 <a:ea typeface="Consolas" pitchFamily="34" charset="-122"/>
                 <a:cs typeface="Consolas" pitchFamily="34" charset="-120"/>
               </a:rPr>
-              <a:t>SLIDE 06  ·  TODO</a:t>
+              <a:t>524 × 176 px  ·  가로 5.46 in</a:t>
             </a:r>
             <a:endParaRPr lang="en-US" sz="788" dirty="0"/>
           </a:p>
@@ -17354,7 +21273,49 @@
       </p:sp>
       <p:sp>
         <p:nvSpPr>
-          <p:cNvPr id="15" name="Shape 13"/>
+          <p:cNvPr id="52" name="Text 50"/>
+          <p:cNvSpPr txBox="1"/>
+          <p:nvPr/>
+        </p:nvSpPr>
+        <p:spPr>
+          <a:xfrm>
+            <a:off x="6210300" y="5867400"/>
+            <a:ext cx="5295900" cy="240030"/>
+          </a:xfrm>
+          <a:prstGeom prst="rect">
+            <a:avLst/>
+          </a:prstGeom>
+          <a:noFill/>
+          <a:ln/>
+        </p:spPr>
+        <p:txBody>
+          <a:bodyPr wrap="square" lIns="0" tIns="0" rIns="0" bIns="0" rtlCol="0" anchor="t"/>
+          <a:lstStyle/>
+          <a:p>
+            <a:pPr algn="l" indent="0" marL="0">
+              <a:lnSpc>
+                <a:spcPts val="1890"/>
+              </a:lnSpc>
+              <a:buNone/>
+            </a:pPr>
+            <a:r>
+              <a:rPr lang="en-US" sz="1125" dirty="0">
+                <a:solidFill>
+                  <a:srgbClr val="BCC9D6"/>
+                </a:solidFill>
+                <a:latin typeface="Malgun Gothic" pitchFamily="34" charset="0"/>
+                <a:ea typeface="Malgun Gothic" pitchFamily="34" charset="-122"/>
+                <a:cs typeface="Malgun Gothic" pitchFamily="34" charset="-120"/>
+              </a:rPr>
+              <a:t>취득 결과 요약줄에 값·시각·검증 통과 여부가 함께 찍힙니다.</a:t>
+            </a:r>
+            <a:endParaRPr lang="en-US" sz="1125" dirty="0"/>
+          </a:p>
+        </p:txBody>
+      </p:sp>
+      <p:sp>
+        <p:nvSpPr>
+          <p:cNvPr id="53" name="Shape 51"/>
           <p:cNvSpPr/>
           <p:nvPr/>
         </p:nvSpPr>
@@ -17374,6 +21335,124 @@
             <a:prstDash val="solid"/>
           </a:ln>
         </p:spPr>
+      </p:sp>
+      <p:sp>
+        <p:nvSpPr>
+          <p:cNvPr id="54" name="Text 52"/>
+          <p:cNvSpPr txBox="1"/>
+          <p:nvPr/>
+        </p:nvSpPr>
+        <p:spPr>
+          <a:xfrm>
+            <a:off x="685800" y="6267450"/>
+            <a:ext cx="476250" cy="120015"/>
+          </a:xfrm>
+          <a:prstGeom prst="rect">
+            <a:avLst/>
+          </a:prstGeom>
+          <a:noFill/>
+          <a:ln/>
+        </p:spPr>
+        <p:txBody>
+          <a:bodyPr wrap="square" lIns="0" tIns="0" rIns="0" bIns="0" rtlCol="0" anchor="t"/>
+          <a:lstStyle/>
+          <a:p>
+            <a:pPr algn="l" indent="0" marL="0">
+              <a:lnSpc>
+                <a:spcPts val="945"/>
+              </a:lnSpc>
+              <a:buNone/>
+            </a:pPr>
+            <a:r>
+              <a:rPr lang="en-US" sz="788" b="1" spc="180" kern="0" dirty="0">
+                <a:solidFill>
+                  <a:srgbClr val="EFB13C"/>
+                </a:solidFill>
+                <a:latin typeface="Consolas" pitchFamily="34" charset="0"/>
+                <a:ea typeface="Consolas" pitchFamily="34" charset="-122"/>
+                <a:cs typeface="Consolas" pitchFamily="34" charset="-120"/>
+              </a:rPr>
+              <a:t>결론</a:t>
+            </a:r>
+            <a:endParaRPr lang="en-US" sz="788" dirty="0"/>
+          </a:p>
+        </p:txBody>
+      </p:sp>
+      <p:sp>
+        <p:nvSpPr>
+          <p:cNvPr id="55" name="Text 53"/>
+          <p:cNvSpPr txBox="1"/>
+          <p:nvPr/>
+        </p:nvSpPr>
+        <p:spPr>
+          <a:xfrm>
+            <a:off x="1219200" y="6229350"/>
+            <a:ext cx="10287000" cy="220027"/>
+          </a:xfrm>
+          <a:prstGeom prst="rect">
+            <a:avLst/>
+          </a:prstGeom>
+          <a:noFill/>
+          <a:ln/>
+        </p:spPr>
+        <p:txBody>
+          <a:bodyPr wrap="square" lIns="0" tIns="0" rIns="0" bIns="0" rtlCol="0" anchor="t"/>
+          <a:lstStyle/>
+          <a:p>
+            <a:pPr algn="l" indent="0" marL="0">
+              <a:lnSpc>
+                <a:spcPts val="1733"/>
+              </a:lnSpc>
+              <a:buNone/>
+            </a:pPr>
+            <a:r>
+              <a:rPr lang="en-US" sz="1238" dirty="0">
+                <a:solidFill>
+                  <a:srgbClr val="BCC9D6"/>
+                </a:solidFill>
+                <a:latin typeface="Malgun Gothic" pitchFamily="34" charset="0"/>
+                <a:ea typeface="Malgun Gothic" pitchFamily="34" charset="-122"/>
+                <a:cs typeface="Malgun Gothic" pitchFamily="34" charset="-120"/>
+              </a:rPr>
+              <a:t>숫자의 출처가 </a:t>
+            </a:r>
+            <a:pPr algn="l" indent="0" marL="0">
+              <a:lnSpc>
+                <a:spcPts val="1733"/>
+              </a:lnSpc>
+              <a:buNone/>
+            </a:pPr>
+            <a:r>
+              <a:rPr lang="en-US" sz="1238" b="1" dirty="0">
+                <a:solidFill>
+                  <a:srgbClr val="EFB13C"/>
+                </a:solidFill>
+                <a:latin typeface="Malgun Gothic" pitchFamily="34" charset="0"/>
+                <a:ea typeface="Malgun Gothic" pitchFamily="34" charset="-122"/>
+                <a:cs typeface="Malgun Gothic" pitchFamily="34" charset="-120"/>
+              </a:rPr>
+              <a:t>화면에 그대로 남습니다</a:t>
+            </a:r>
+            <a:pPr algn="l" indent="0" marL="0">
+              <a:lnSpc>
+                <a:spcPts val="1733"/>
+              </a:lnSpc>
+              <a:buNone/>
+            </a:pPr>
+            <a:r>
+              <a:rPr lang="en-US" sz="1238" dirty="0">
+                <a:solidFill>
+                  <a:srgbClr val="BCC9D6"/>
+                </a:solidFill>
+                <a:latin typeface="Malgun Gothic" pitchFamily="34" charset="0"/>
+                <a:ea typeface="Malgun Gothic" pitchFamily="34" charset="-122"/>
+                <a:cs typeface="Malgun Gothic" pitchFamily="34" charset="-120"/>
+              </a:rPr>
+              <a:t> — 나중에 왜 그 값이었는지 되짚을 수 있습니다.</a:t>
+            </a:r>
+            <a:endParaRPr lang="en-US" sz="1238" dirty="0"/>
+          </a:p>
+        </p:txBody>
       </p:sp>
     </p:spTree>
   </p:cSld>
@@ -17638,26 +21717,26 @@
         <p:spPr>
           <a:xfrm>
             <a:off x="685800" y="914400"/>
-            <a:ext cx="10287000" cy="360045"/>
-          </a:xfrm>
-          <a:prstGeom prst="rect">
-            <a:avLst/>
-          </a:prstGeom>
-          <a:noFill/>
-          <a:ln/>
-        </p:spPr>
-        <p:txBody>
-          <a:bodyPr wrap="square" lIns="0" tIns="0" rIns="0" bIns="0" rtlCol="0" anchor="t"/>
-          <a:lstStyle/>
-          <a:p>
-            <a:pPr algn="l" indent="0" marL="0">
-              <a:lnSpc>
-                <a:spcPts val="2835"/>
-              </a:lnSpc>
-              <a:buNone/>
-            </a:pPr>
-            <a:r>
-              <a:rPr lang="en-US" sz="2250" b="1" dirty="0">
+            <a:ext cx="10287000" cy="888111"/>
+          </a:xfrm>
+          <a:prstGeom prst="rect">
+            <a:avLst/>
+          </a:prstGeom>
+          <a:noFill/>
+          <a:ln/>
+        </p:spPr>
+        <p:txBody>
+          <a:bodyPr wrap="square" lIns="0" tIns="0" rIns="0" bIns="0" rtlCol="0" anchor="t"/>
+          <a:lstStyle/>
+          <a:p>
+            <a:pPr algn="l" indent="0" marL="0">
+              <a:lnSpc>
+                <a:spcPts val="3496"/>
+              </a:lnSpc>
+              <a:buNone/>
+            </a:pPr>
+            <a:r>
+              <a:rPr lang="en-US" sz="2775" b="1" dirty="0">
                 <a:solidFill>
                   <a:srgbClr val="EAE7E0"/>
                 </a:solidFill>
@@ -17665,22 +21744,1254 @@
                 <a:ea typeface="Malgun Gothic" pitchFamily="34" charset="-122"/>
                 <a:cs typeface="Malgun Gothic" pitchFamily="34" charset="-120"/>
               </a:rPr>
-              <a:t>그럴듯한 설명 4개를 의심했고, 3개는 틀렸습니다</a:t>
-            </a:r>
-            <a:endParaRPr lang="en-US" sz="2250" dirty="0"/>
-          </a:p>
-        </p:txBody>
-      </p:sp>
-      <p:sp>
-        <p:nvSpPr>
-          <p:cNvPr id="12" name="Shape 10"/>
-          <p:cNvSpPr/>
-          <p:nvPr/>
-        </p:nvSpPr>
-        <p:spPr>
-          <a:xfrm>
-            <a:off x="685800" y="2857500"/>
-            <a:ext cx="10820400" cy="2095500"/>
+              <a:t>그럴듯한 설명 4개를 의심했고,</a:t>
+            </a:r>
+            <a:endParaRPr lang="en-US" sz="2775" dirty="0"/>
+          </a:p>
+          <a:p>
+            <a:pPr algn="l" indent="0" marL="0">
+              <a:lnSpc>
+                <a:spcPts val="3496"/>
+              </a:lnSpc>
+              <a:buNone/>
+            </a:pPr>
+            <a:r>
+              <a:rPr lang="en-US" sz="2775" b="1" dirty="0">
+                <a:solidFill>
+                  <a:srgbClr val="EFB13C"/>
+                </a:solidFill>
+                <a:latin typeface="Malgun Gothic" pitchFamily="34" charset="0"/>
+                <a:ea typeface="Malgun Gothic" pitchFamily="34" charset="-122"/>
+                <a:cs typeface="Malgun Gothic" pitchFamily="34" charset="-120"/>
+              </a:rPr>
+              <a:t>3개는 틀렸습니다</a:t>
+            </a:r>
+            <a:endParaRPr lang="en-US" sz="2775" dirty="0"/>
+          </a:p>
+        </p:txBody>
+      </p:sp>
+      <p:sp>
+        <p:nvSpPr>
+          <p:cNvPr id="12" name="Text 10"/>
+          <p:cNvSpPr txBox="1"/>
+          <p:nvPr/>
+        </p:nvSpPr>
+        <p:spPr>
+          <a:xfrm>
+            <a:off x="685800" y="2000250"/>
+            <a:ext cx="10287000" cy="569214"/>
+          </a:xfrm>
+          <a:prstGeom prst="rect">
+            <a:avLst/>
+          </a:prstGeom>
+          <a:noFill/>
+          <a:ln/>
+        </p:spPr>
+        <p:txBody>
+          <a:bodyPr wrap="square" lIns="0" tIns="0" rIns="0" bIns="0" rtlCol="0" anchor="t"/>
+          <a:lstStyle/>
+          <a:p>
+            <a:pPr algn="l" indent="0" marL="0">
+              <a:lnSpc>
+                <a:spcPts val="2241"/>
+              </a:lnSpc>
+              <a:buNone/>
+            </a:pPr>
+            <a:r>
+              <a:rPr lang="en-US" sz="1350" dirty="0">
+                <a:solidFill>
+                  <a:srgbClr val="BCC9D6"/>
+                </a:solidFill>
+                <a:latin typeface="Malgun Gothic" pitchFamily="34" charset="0"/>
+                <a:ea typeface="Malgun Gothic" pitchFamily="34" charset="-122"/>
+                <a:cs typeface="Malgun Gothic" pitchFamily="34" charset="-120"/>
+              </a:rPr>
+              <a:t>온도에 따라 갈리는 이유를 설명할 후보를 세우고 데이터로 하나씩 검증했습니다. </a:t>
+            </a:r>
+            <a:pPr algn="l" indent="0" marL="0">
+              <a:lnSpc>
+                <a:spcPts val="2241"/>
+              </a:lnSpc>
+              <a:buNone/>
+            </a:pPr>
+            <a:r>
+              <a:rPr lang="en-US" sz="1350" b="1" dirty="0">
+                <a:solidFill>
+                  <a:srgbClr val="EAE7E0"/>
+                </a:solidFill>
+                <a:latin typeface="Malgun Gothic" pitchFamily="34" charset="0"/>
+                <a:ea typeface="Malgun Gothic" pitchFamily="34" charset="-122"/>
+                <a:cs typeface="Malgun Gothic" pitchFamily="34" charset="-120"/>
+              </a:rPr>
+              <a:t>살아남은 것은 하나</a:t>
+            </a:r>
+            <a:pPr algn="l" indent="0" marL="0">
+              <a:lnSpc>
+                <a:spcPts val="2241"/>
+              </a:lnSpc>
+              <a:buNone/>
+            </a:pPr>
+            <a:r>
+              <a:rPr lang="en-US" sz="1350" dirty="0">
+                <a:solidFill>
+                  <a:srgbClr val="BCC9D6"/>
+                </a:solidFill>
+                <a:latin typeface="Malgun Gothic" pitchFamily="34" charset="0"/>
+                <a:ea typeface="Malgun Gothic" pitchFamily="34" charset="-122"/>
+                <a:cs typeface="Malgun Gothic" pitchFamily="34" charset="-120"/>
+              </a:rPr>
+              <a:t> 입니다.</a:t>
+            </a:r>
+            <a:endParaRPr lang="en-US" sz="1350" dirty="0"/>
+          </a:p>
+        </p:txBody>
+      </p:sp>
+      <p:sp>
+        <p:nvSpPr>
+          <p:cNvPr id="13" name="Shape 11"/>
+          <p:cNvSpPr/>
+          <p:nvPr/>
+        </p:nvSpPr>
+        <p:spPr>
+          <a:xfrm>
+            <a:off x="685800" y="2743200"/>
+            <a:ext cx="2562225" cy="19050"/>
+          </a:xfrm>
+          <a:prstGeom prst="rect">
+            <a:avLst/>
+          </a:prstGeom>
+          <a:solidFill>
+            <a:srgbClr val="7E2333"/>
+          </a:solidFill>
+          <a:ln/>
+        </p:spPr>
+      </p:sp>
+      <p:sp>
+        <p:nvSpPr>
+          <p:cNvPr id="14" name="Text 12"/>
+          <p:cNvSpPr txBox="1"/>
+          <p:nvPr/>
+        </p:nvSpPr>
+        <p:spPr>
+          <a:xfrm>
+            <a:off x="685800" y="2876550"/>
+            <a:ext cx="2562225" cy="125016"/>
+          </a:xfrm>
+          <a:prstGeom prst="rect">
+            <a:avLst/>
+          </a:prstGeom>
+          <a:noFill/>
+          <a:ln/>
+        </p:spPr>
+        <p:txBody>
+          <a:bodyPr wrap="square" lIns="0" tIns="0" rIns="0" bIns="0" rtlCol="0" anchor="t"/>
+          <a:lstStyle/>
+          <a:p>
+            <a:pPr algn="l" indent="0" marL="0">
+              <a:lnSpc>
+                <a:spcPts val="984"/>
+              </a:lnSpc>
+              <a:buNone/>
+            </a:pPr>
+            <a:r>
+              <a:rPr lang="en-US" sz="788" b="1" spc="150" kern="0" dirty="0">
+                <a:solidFill>
+                  <a:srgbClr val="FF4D63"/>
+                </a:solidFill>
+                <a:latin typeface="Consolas" pitchFamily="34" charset="0"/>
+                <a:ea typeface="Consolas" pitchFamily="34" charset="-122"/>
+                <a:cs typeface="Consolas" pitchFamily="34" charset="-120"/>
+              </a:rPr>
+              <a:t>가설 1</a:t>
+            </a:r>
+            <a:endParaRPr lang="en-US" sz="788" dirty="0"/>
+          </a:p>
+        </p:txBody>
+      </p:sp>
+      <p:sp>
+        <p:nvSpPr>
+          <p:cNvPr id="15" name="Text 13"/>
+          <p:cNvSpPr txBox="1"/>
+          <p:nvPr/>
+        </p:nvSpPr>
+        <p:spPr>
+          <a:xfrm>
+            <a:off x="685800" y="3086100"/>
+            <a:ext cx="2562225" cy="852107"/>
+          </a:xfrm>
+          <a:prstGeom prst="rect">
+            <a:avLst/>
+          </a:prstGeom>
+          <a:noFill/>
+          <a:ln/>
+        </p:spPr>
+        <p:txBody>
+          <a:bodyPr wrap="square" lIns="0" tIns="0" rIns="0" bIns="0" rtlCol="0" anchor="t"/>
+          <a:lstStyle/>
+          <a:p>
+            <a:pPr algn="l" indent="0" marL="0">
+              <a:lnSpc>
+                <a:spcPts val="2237"/>
+              </a:lnSpc>
+              <a:buNone/>
+            </a:pPr>
+            <a:r>
+              <a:rPr lang="en-US" sz="1575" b="1" dirty="0">
+                <a:solidFill>
+                  <a:srgbClr val="EAE7E0"/>
+                </a:solidFill>
+                <a:latin typeface="Malgun Gothic" pitchFamily="34" charset="0"/>
+                <a:ea typeface="Malgun Gothic" pitchFamily="34" charset="-122"/>
+                <a:cs typeface="Malgun Gothic" pitchFamily="34" charset="-120"/>
+              </a:rPr>
+              <a:t>2025 상반기는</a:t>
+            </a:r>
+            <a:endParaRPr lang="en-US" sz="1575" dirty="0"/>
+          </a:p>
+          <a:p>
+            <a:pPr algn="l" indent="0" marL="0">
+              <a:lnSpc>
+                <a:spcPts val="2237"/>
+              </a:lnSpc>
+              <a:buNone/>
+            </a:pPr>
+            <a:r>
+              <a:rPr lang="en-US" sz="1575" b="1" dirty="0">
+                <a:solidFill>
+                  <a:srgbClr val="EAE7E0"/>
+                </a:solidFill>
+                <a:latin typeface="Malgun Gothic" pitchFamily="34" charset="0"/>
+                <a:ea typeface="Malgun Gothic" pitchFamily="34" charset="-122"/>
+                <a:cs typeface="Malgun Gothic" pitchFamily="34" charset="-120"/>
+              </a:rPr>
+              <a:t>설비 수준이</a:t>
+            </a:r>
+            <a:endParaRPr lang="en-US" sz="1575" dirty="0"/>
+          </a:p>
+          <a:p>
+            <a:pPr algn="l" indent="0" marL="0">
+              <a:lnSpc>
+                <a:spcPts val="2237"/>
+              </a:lnSpc>
+              <a:buNone/>
+            </a:pPr>
+            <a:r>
+              <a:rPr lang="en-US" sz="1575" b="1" dirty="0">
+                <a:solidFill>
+                  <a:srgbClr val="EAE7E0"/>
+                </a:solidFill>
+                <a:latin typeface="Malgun Gothic" pitchFamily="34" charset="0"/>
+                <a:ea typeface="Malgun Gothic" pitchFamily="34" charset="-122"/>
+                <a:cs typeface="Malgun Gothic" pitchFamily="34" charset="-120"/>
+              </a:rPr>
+              <a:t>달랐다</a:t>
+            </a:r>
+            <a:endParaRPr lang="en-US" sz="1575" dirty="0"/>
+          </a:p>
+        </p:txBody>
+      </p:sp>
+      <p:sp>
+        <p:nvSpPr>
+          <p:cNvPr id="16" name="Shape 14"/>
+          <p:cNvSpPr/>
+          <p:nvPr/>
+        </p:nvSpPr>
+        <p:spPr>
+          <a:xfrm>
+            <a:off x="685800" y="4038600"/>
+            <a:ext cx="704850" cy="285750"/>
+          </a:xfrm>
+          <a:prstGeom prst="rect">
+            <a:avLst/>
+          </a:prstGeom>
+          <a:ln w="17780">
+            <a:solidFill>
+              <a:srgbClr val="7E2333"/>
+            </a:solidFill>
+            <a:prstDash val="solid"/>
+          </a:ln>
+        </p:spPr>
+      </p:sp>
+      <p:sp>
+        <p:nvSpPr>
+          <p:cNvPr id="17" name="Text 15"/>
+          <p:cNvSpPr txBox="1"/>
+          <p:nvPr/>
+        </p:nvSpPr>
+        <p:spPr>
+          <a:xfrm>
+            <a:off x="685800" y="4105275"/>
+            <a:ext cx="704850" cy="160020"/>
+          </a:xfrm>
+          <a:prstGeom prst="rect">
+            <a:avLst/>
+          </a:prstGeom>
+          <a:noFill/>
+          <a:ln/>
+        </p:spPr>
+        <p:txBody>
+          <a:bodyPr wrap="square" lIns="0" tIns="0" rIns="0" bIns="0" rtlCol="0" anchor="t"/>
+          <a:lstStyle/>
+          <a:p>
+            <a:pPr algn="ctr" indent="0" marL="0">
+              <a:lnSpc>
+                <a:spcPts val="1260"/>
+              </a:lnSpc>
+              <a:buNone/>
+            </a:pPr>
+            <a:r>
+              <a:rPr lang="en-US" sz="1050" b="1" dirty="0">
+                <a:solidFill>
+                  <a:srgbClr val="FF4D63"/>
+                </a:solidFill>
+                <a:latin typeface="Malgun Gothic" pitchFamily="34" charset="0"/>
+                <a:ea typeface="Malgun Gothic" pitchFamily="34" charset="-122"/>
+                <a:cs typeface="Malgun Gothic" pitchFamily="34" charset="-120"/>
+              </a:rPr>
+              <a:t>기각</a:t>
+            </a:r>
+            <a:endParaRPr lang="en-US" sz="1050" dirty="0"/>
+          </a:p>
+        </p:txBody>
+      </p:sp>
+      <p:sp>
+        <p:nvSpPr>
+          <p:cNvPr id="18" name="Text 16"/>
+          <p:cNvSpPr txBox="1"/>
+          <p:nvPr/>
+        </p:nvSpPr>
+        <p:spPr>
+          <a:xfrm>
+            <a:off x="685800" y="4495800"/>
+            <a:ext cx="2562225" cy="1200150"/>
+          </a:xfrm>
+          <a:prstGeom prst="rect">
+            <a:avLst/>
+          </a:prstGeom>
+          <a:noFill/>
+          <a:ln/>
+        </p:spPr>
+        <p:txBody>
+          <a:bodyPr wrap="square" lIns="0" tIns="0" rIns="0" bIns="0" rtlCol="0" anchor="t"/>
+          <a:lstStyle/>
+          <a:p>
+            <a:pPr algn="l" indent="0" marL="0">
+              <a:lnSpc>
+                <a:spcPts val="1890"/>
+              </a:lnSpc>
+              <a:buNone/>
+            </a:pPr>
+            <a:r>
+              <a:rPr lang="en-US" sz="1125" dirty="0">
+                <a:solidFill>
+                  <a:srgbClr val="BCC9D6"/>
+                </a:solidFill>
+                <a:latin typeface="Malgun Gothic" pitchFamily="34" charset="0"/>
+                <a:ea typeface="Malgun Gothic" pitchFamily="34" charset="-122"/>
+                <a:cs typeface="Malgun Gothic" pitchFamily="34" charset="-120"/>
+              </a:rPr>
+              <a:t>해당 5건의 IGV 효과 평균이 +0.09 였습니다. 설비가 아니라 </a:t>
+            </a:r>
+            <a:pPr algn="l" indent="0" marL="0">
+              <a:lnSpc>
+                <a:spcPts val="1890"/>
+              </a:lnSpc>
+              <a:buNone/>
+            </a:pPr>
+            <a:r>
+              <a:rPr lang="en-US" sz="1125" b="1" dirty="0">
+                <a:solidFill>
+                  <a:srgbClr val="EAE7E0"/>
+                </a:solidFill>
+                <a:latin typeface="Malgun Gothic" pitchFamily="34" charset="0"/>
+                <a:ea typeface="Malgun Gothic" pitchFamily="34" charset="-122"/>
+                <a:cs typeface="Malgun Gothic" pitchFamily="34" charset="-120"/>
+              </a:rPr>
+              <a:t>IGV 미실시</a:t>
+            </a:r>
+            <a:pPr algn="l" indent="0" marL="0">
+              <a:lnSpc>
+                <a:spcPts val="1890"/>
+              </a:lnSpc>
+              <a:buNone/>
+            </a:pPr>
+            <a:r>
+              <a:rPr lang="en-US" sz="1125" dirty="0">
+                <a:solidFill>
+                  <a:srgbClr val="BCC9D6"/>
+                </a:solidFill>
+                <a:latin typeface="Malgun Gothic" pitchFamily="34" charset="0"/>
+                <a:ea typeface="Malgun Gothic" pitchFamily="34" charset="-122"/>
+                <a:cs typeface="Malgun Gothic" pitchFamily="34" charset="-120"/>
+              </a:rPr>
+              <a:t> 가 원인이었습니다.</a:t>
+            </a:r>
+            <a:endParaRPr lang="en-US" sz="1125" dirty="0"/>
+          </a:p>
+        </p:txBody>
+      </p:sp>
+      <p:sp>
+        <p:nvSpPr>
+          <p:cNvPr id="19" name="Shape 17"/>
+          <p:cNvSpPr/>
+          <p:nvPr/>
+        </p:nvSpPr>
+        <p:spPr>
+          <a:xfrm>
+            <a:off x="3438525" y="2743200"/>
+            <a:ext cx="2562225" cy="19050"/>
+          </a:xfrm>
+          <a:prstGeom prst="rect">
+            <a:avLst/>
+          </a:prstGeom>
+          <a:solidFill>
+            <a:srgbClr val="7E2333"/>
+          </a:solidFill>
+          <a:ln/>
+        </p:spPr>
+      </p:sp>
+      <p:sp>
+        <p:nvSpPr>
+          <p:cNvPr id="20" name="Text 18"/>
+          <p:cNvSpPr txBox="1"/>
+          <p:nvPr/>
+        </p:nvSpPr>
+        <p:spPr>
+          <a:xfrm>
+            <a:off x="3438525" y="2876550"/>
+            <a:ext cx="2562225" cy="125016"/>
+          </a:xfrm>
+          <a:prstGeom prst="rect">
+            <a:avLst/>
+          </a:prstGeom>
+          <a:noFill/>
+          <a:ln/>
+        </p:spPr>
+        <p:txBody>
+          <a:bodyPr wrap="square" lIns="0" tIns="0" rIns="0" bIns="0" rtlCol="0" anchor="t"/>
+          <a:lstStyle/>
+          <a:p>
+            <a:pPr algn="l" indent="0" marL="0">
+              <a:lnSpc>
+                <a:spcPts val="984"/>
+              </a:lnSpc>
+              <a:buNone/>
+            </a:pPr>
+            <a:r>
+              <a:rPr lang="en-US" sz="788" b="1" spc="150" kern="0" dirty="0">
+                <a:solidFill>
+                  <a:srgbClr val="FF4D63"/>
+                </a:solidFill>
+                <a:latin typeface="Consolas" pitchFamily="34" charset="0"/>
+                <a:ea typeface="Consolas" pitchFamily="34" charset="-122"/>
+                <a:cs typeface="Consolas" pitchFamily="34" charset="-120"/>
+              </a:rPr>
+              <a:t>가설 2</a:t>
+            </a:r>
+            <a:endParaRPr lang="en-US" sz="788" dirty="0"/>
+          </a:p>
+        </p:txBody>
+      </p:sp>
+      <p:sp>
+        <p:nvSpPr>
+          <p:cNvPr id="21" name="Text 19"/>
+          <p:cNvSpPr txBox="1"/>
+          <p:nvPr/>
+        </p:nvSpPr>
+        <p:spPr>
+          <a:xfrm>
+            <a:off x="3438525" y="3086100"/>
+            <a:ext cx="2562225" cy="852107"/>
+          </a:xfrm>
+          <a:prstGeom prst="rect">
+            <a:avLst/>
+          </a:prstGeom>
+          <a:noFill/>
+          <a:ln/>
+        </p:spPr>
+        <p:txBody>
+          <a:bodyPr wrap="square" lIns="0" tIns="0" rIns="0" bIns="0" rtlCol="0" anchor="t"/>
+          <a:lstStyle/>
+          <a:p>
+            <a:pPr algn="l" indent="0" marL="0">
+              <a:lnSpc>
+                <a:spcPts val="2237"/>
+              </a:lnSpc>
+              <a:buNone/>
+            </a:pPr>
+            <a:r>
+              <a:rPr lang="en-US" sz="1575" b="1" dirty="0">
+                <a:solidFill>
+                  <a:srgbClr val="EAE7E0"/>
+                </a:solidFill>
+                <a:latin typeface="Malgun Gothic" pitchFamily="34" charset="0"/>
+                <a:ea typeface="Malgun Gothic" pitchFamily="34" charset="-122"/>
+                <a:cs typeface="Malgun Gothic" pitchFamily="34" charset="-120"/>
+              </a:rPr>
+              <a:t>진공 잔차로</a:t>
+            </a:r>
+            <a:endParaRPr lang="en-US" sz="1575" dirty="0"/>
+          </a:p>
+          <a:p>
+            <a:pPr algn="l" indent="0" marL="0">
+              <a:lnSpc>
+                <a:spcPts val="2237"/>
+              </a:lnSpc>
+              <a:buNone/>
+            </a:pPr>
+            <a:r>
+              <a:rPr lang="en-US" sz="1575" b="1" dirty="0">
+                <a:solidFill>
+                  <a:srgbClr val="EAE7E0"/>
+                </a:solidFill>
+                <a:latin typeface="Malgun Gothic" pitchFamily="34" charset="0"/>
+                <a:ea typeface="Malgun Gothic" pitchFamily="34" charset="-122"/>
+                <a:cs typeface="Malgun Gothic" pitchFamily="34" charset="-120"/>
+              </a:rPr>
+              <a:t>보정값을</a:t>
+            </a:r>
+            <a:endParaRPr lang="en-US" sz="1575" dirty="0"/>
+          </a:p>
+          <a:p>
+            <a:pPr algn="l" indent="0" marL="0">
+              <a:lnSpc>
+                <a:spcPts val="2237"/>
+              </a:lnSpc>
+              <a:buNone/>
+            </a:pPr>
+            <a:r>
+              <a:rPr lang="en-US" sz="1575" b="1" dirty="0">
+                <a:solidFill>
+                  <a:srgbClr val="EAE7E0"/>
+                </a:solidFill>
+                <a:latin typeface="Malgun Gothic" pitchFamily="34" charset="0"/>
+                <a:ea typeface="Malgun Gothic" pitchFamily="34" charset="-122"/>
+                <a:cs typeface="Malgun Gothic" pitchFamily="34" charset="-120"/>
+              </a:rPr>
+              <a:t>예측할 수 있다</a:t>
+            </a:r>
+            <a:endParaRPr lang="en-US" sz="1575" dirty="0"/>
+          </a:p>
+        </p:txBody>
+      </p:sp>
+      <p:sp>
+        <p:nvSpPr>
+          <p:cNvPr id="22" name="Shape 20"/>
+          <p:cNvSpPr/>
+          <p:nvPr/>
+        </p:nvSpPr>
+        <p:spPr>
+          <a:xfrm>
+            <a:off x="3438525" y="4038600"/>
+            <a:ext cx="704850" cy="285750"/>
+          </a:xfrm>
+          <a:prstGeom prst="rect">
+            <a:avLst/>
+          </a:prstGeom>
+          <a:ln w="17780">
+            <a:solidFill>
+              <a:srgbClr val="7E2333"/>
+            </a:solidFill>
+            <a:prstDash val="solid"/>
+          </a:ln>
+        </p:spPr>
+      </p:sp>
+      <p:sp>
+        <p:nvSpPr>
+          <p:cNvPr id="23" name="Text 21"/>
+          <p:cNvSpPr txBox="1"/>
+          <p:nvPr/>
+        </p:nvSpPr>
+        <p:spPr>
+          <a:xfrm>
+            <a:off x="3438525" y="4105275"/>
+            <a:ext cx="704850" cy="160020"/>
+          </a:xfrm>
+          <a:prstGeom prst="rect">
+            <a:avLst/>
+          </a:prstGeom>
+          <a:noFill/>
+          <a:ln/>
+        </p:spPr>
+        <p:txBody>
+          <a:bodyPr wrap="square" lIns="0" tIns="0" rIns="0" bIns="0" rtlCol="0" anchor="t"/>
+          <a:lstStyle/>
+          <a:p>
+            <a:pPr algn="ctr" indent="0" marL="0">
+              <a:lnSpc>
+                <a:spcPts val="1260"/>
+              </a:lnSpc>
+              <a:buNone/>
+            </a:pPr>
+            <a:r>
+              <a:rPr lang="en-US" sz="1050" b="1" dirty="0">
+                <a:solidFill>
+                  <a:srgbClr val="FF4D63"/>
+                </a:solidFill>
+                <a:latin typeface="Malgun Gothic" pitchFamily="34" charset="0"/>
+                <a:ea typeface="Malgun Gothic" pitchFamily="34" charset="-122"/>
+                <a:cs typeface="Malgun Gothic" pitchFamily="34" charset="-120"/>
+              </a:rPr>
+              <a:t>기각</a:t>
+            </a:r>
+            <a:endParaRPr lang="en-US" sz="1050" dirty="0"/>
+          </a:p>
+        </p:txBody>
+      </p:sp>
+      <p:sp>
+        <p:nvSpPr>
+          <p:cNvPr id="24" name="Text 22"/>
+          <p:cNvSpPr txBox="1"/>
+          <p:nvPr/>
+        </p:nvSpPr>
+        <p:spPr>
+          <a:xfrm>
+            <a:off x="3438525" y="4495800"/>
+            <a:ext cx="2562225" cy="1200150"/>
+          </a:xfrm>
+          <a:prstGeom prst="rect">
+            <a:avLst/>
+          </a:prstGeom>
+          <a:noFill/>
+          <a:ln/>
+        </p:spPr>
+        <p:txBody>
+          <a:bodyPr wrap="square" lIns="0" tIns="0" rIns="0" bIns="0" rtlCol="0" anchor="t"/>
+          <a:lstStyle/>
+          <a:p>
+            <a:pPr algn="l" indent="0" marL="0">
+              <a:lnSpc>
+                <a:spcPts val="1890"/>
+              </a:lnSpc>
+              <a:buNone/>
+            </a:pPr>
+            <a:r>
+              <a:rPr lang="en-US" sz="1125" dirty="0">
+                <a:solidFill>
+                  <a:srgbClr val="BCC9D6"/>
+                </a:solidFill>
+                <a:latin typeface="Malgun Gothic" pitchFamily="34" charset="0"/>
+                <a:ea typeface="Malgun Gothic" pitchFamily="34" charset="-122"/>
+                <a:cs typeface="Malgun Gothic" pitchFamily="34" charset="-120"/>
+              </a:rPr>
+              <a:t>5건일 때 관련성 −0.85 로 강했지만, </a:t>
+            </a:r>
+            <a:pPr algn="l" indent="0" marL="0">
+              <a:lnSpc>
+                <a:spcPts val="1890"/>
+              </a:lnSpc>
+              <a:buNone/>
+            </a:pPr>
+            <a:r>
+              <a:rPr lang="en-US" sz="1125" b="1" dirty="0">
+                <a:solidFill>
+                  <a:srgbClr val="EAE7E0"/>
+                </a:solidFill>
+                <a:latin typeface="Malgun Gothic" pitchFamily="34" charset="0"/>
+                <a:ea typeface="Malgun Gothic" pitchFamily="34" charset="-122"/>
+                <a:cs typeface="Malgun Gothic" pitchFamily="34" charset="-120"/>
+              </a:rPr>
+              <a:t>36건에서 +0.09</a:t>
+            </a:r>
+            <a:pPr algn="l" indent="0" marL="0">
+              <a:lnSpc>
+                <a:spcPts val="1890"/>
+              </a:lnSpc>
+              <a:buNone/>
+            </a:pPr>
+            <a:r>
+              <a:rPr lang="en-US" sz="1125" dirty="0">
+                <a:solidFill>
+                  <a:srgbClr val="BCC9D6"/>
+                </a:solidFill>
+                <a:latin typeface="Malgun Gothic" pitchFamily="34" charset="0"/>
+                <a:ea typeface="Malgun Gothic" pitchFamily="34" charset="-122"/>
+                <a:cs typeface="Malgun Gothic" pitchFamily="34" charset="-120"/>
+              </a:rPr>
+              <a:t> 로 사라졌습니다. 표본 5개의 과대해석이었습니다.</a:t>
+            </a:r>
+            <a:endParaRPr lang="en-US" sz="1125" dirty="0"/>
+          </a:p>
+        </p:txBody>
+      </p:sp>
+      <p:sp>
+        <p:nvSpPr>
+          <p:cNvPr id="25" name="Shape 23"/>
+          <p:cNvSpPr/>
+          <p:nvPr/>
+        </p:nvSpPr>
+        <p:spPr>
+          <a:xfrm>
+            <a:off x="6191250" y="2743200"/>
+            <a:ext cx="2562225" cy="19050"/>
+          </a:xfrm>
+          <a:prstGeom prst="rect">
+            <a:avLst/>
+          </a:prstGeom>
+          <a:solidFill>
+            <a:srgbClr val="7E2333"/>
+          </a:solidFill>
+          <a:ln/>
+        </p:spPr>
+      </p:sp>
+      <p:sp>
+        <p:nvSpPr>
+          <p:cNvPr id="26" name="Text 24"/>
+          <p:cNvSpPr txBox="1"/>
+          <p:nvPr/>
+        </p:nvSpPr>
+        <p:spPr>
+          <a:xfrm>
+            <a:off x="6191250" y="2876550"/>
+            <a:ext cx="2562225" cy="125016"/>
+          </a:xfrm>
+          <a:prstGeom prst="rect">
+            <a:avLst/>
+          </a:prstGeom>
+          <a:noFill/>
+          <a:ln/>
+        </p:spPr>
+        <p:txBody>
+          <a:bodyPr wrap="square" lIns="0" tIns="0" rIns="0" bIns="0" rtlCol="0" anchor="t"/>
+          <a:lstStyle/>
+          <a:p>
+            <a:pPr algn="l" indent="0" marL="0">
+              <a:lnSpc>
+                <a:spcPts val="984"/>
+              </a:lnSpc>
+              <a:buNone/>
+            </a:pPr>
+            <a:r>
+              <a:rPr lang="en-US" sz="788" b="1" spc="150" kern="0" dirty="0">
+                <a:solidFill>
+                  <a:srgbClr val="FF4D63"/>
+                </a:solidFill>
+                <a:latin typeface="Consolas" pitchFamily="34" charset="0"/>
+                <a:ea typeface="Consolas" pitchFamily="34" charset="-122"/>
+                <a:cs typeface="Consolas" pitchFamily="34" charset="-120"/>
+              </a:rPr>
+              <a:t>가설 3</a:t>
+            </a:r>
+            <a:endParaRPr lang="en-US" sz="788" dirty="0"/>
+          </a:p>
+        </p:txBody>
+      </p:sp>
+      <p:sp>
+        <p:nvSpPr>
+          <p:cNvPr id="27" name="Text 25"/>
+          <p:cNvSpPr txBox="1"/>
+          <p:nvPr/>
+        </p:nvSpPr>
+        <p:spPr>
+          <a:xfrm>
+            <a:off x="6191250" y="3086100"/>
+            <a:ext cx="2562225" cy="852107"/>
+          </a:xfrm>
+          <a:prstGeom prst="rect">
+            <a:avLst/>
+          </a:prstGeom>
+          <a:noFill/>
+          <a:ln/>
+        </p:spPr>
+        <p:txBody>
+          <a:bodyPr wrap="square" lIns="0" tIns="0" rIns="0" bIns="0" rtlCol="0" anchor="t"/>
+          <a:lstStyle/>
+          <a:p>
+            <a:pPr algn="l" indent="0" marL="0">
+              <a:lnSpc>
+                <a:spcPts val="2237"/>
+              </a:lnSpc>
+              <a:buNone/>
+            </a:pPr>
+            <a:r>
+              <a:rPr lang="en-US" sz="1575" b="1" dirty="0">
+                <a:solidFill>
+                  <a:srgbClr val="EAE7E0"/>
+                </a:solidFill>
+                <a:latin typeface="Malgun Gothic" pitchFamily="34" charset="0"/>
+                <a:ea typeface="Malgun Gothic" pitchFamily="34" charset="-122"/>
+                <a:cs typeface="Malgun Gothic" pitchFamily="34" charset="-120"/>
+              </a:rPr>
+              <a:t>담당자 표와의</a:t>
+            </a:r>
+            <a:endParaRPr lang="en-US" sz="1575" dirty="0"/>
+          </a:p>
+          <a:p>
+            <a:pPr algn="l" indent="0" marL="0">
+              <a:lnSpc>
+                <a:spcPts val="2237"/>
+              </a:lnSpc>
+              <a:buNone/>
+            </a:pPr>
+            <a:r>
+              <a:rPr lang="en-US" sz="1575" b="1" dirty="0">
+                <a:solidFill>
+                  <a:srgbClr val="EAE7E0"/>
+                </a:solidFill>
+                <a:latin typeface="Malgun Gothic" pitchFamily="34" charset="0"/>
+                <a:ea typeface="Malgun Gothic" pitchFamily="34" charset="-122"/>
+                <a:cs typeface="Malgun Gothic" pitchFamily="34" charset="-120"/>
+              </a:rPr>
+              <a:t>이론값 차이는</a:t>
+            </a:r>
+            <a:endParaRPr lang="en-US" sz="1575" dirty="0"/>
+          </a:p>
+          <a:p>
+            <a:pPr algn="l" indent="0" marL="0">
+              <a:lnSpc>
+                <a:spcPts val="2237"/>
+              </a:lnSpc>
+              <a:buNone/>
+            </a:pPr>
+            <a:r>
+              <a:rPr lang="en-US" sz="1575" b="1" dirty="0">
+                <a:solidFill>
+                  <a:srgbClr val="EAE7E0"/>
+                </a:solidFill>
+                <a:latin typeface="Malgun Gothic" pitchFamily="34" charset="0"/>
+                <a:ea typeface="Malgun Gothic" pitchFamily="34" charset="-122"/>
+                <a:cs typeface="Malgun Gothic" pitchFamily="34" charset="-120"/>
+              </a:rPr>
+              <a:t>진공 항 때문이다</a:t>
+            </a:r>
+            <a:endParaRPr lang="en-US" sz="1575" dirty="0"/>
+          </a:p>
+        </p:txBody>
+      </p:sp>
+      <p:sp>
+        <p:nvSpPr>
+          <p:cNvPr id="28" name="Shape 26"/>
+          <p:cNvSpPr/>
+          <p:nvPr/>
+        </p:nvSpPr>
+        <p:spPr>
+          <a:xfrm>
+            <a:off x="6191250" y="4038600"/>
+            <a:ext cx="704850" cy="285750"/>
+          </a:xfrm>
+          <a:prstGeom prst="rect">
+            <a:avLst/>
+          </a:prstGeom>
+          <a:ln w="17780">
+            <a:solidFill>
+              <a:srgbClr val="7E2333"/>
+            </a:solidFill>
+            <a:prstDash val="solid"/>
+          </a:ln>
+        </p:spPr>
+      </p:sp>
+      <p:sp>
+        <p:nvSpPr>
+          <p:cNvPr id="29" name="Text 27"/>
+          <p:cNvSpPr txBox="1"/>
+          <p:nvPr/>
+        </p:nvSpPr>
+        <p:spPr>
+          <a:xfrm>
+            <a:off x="6191250" y="4105275"/>
+            <a:ext cx="704850" cy="160020"/>
+          </a:xfrm>
+          <a:prstGeom prst="rect">
+            <a:avLst/>
+          </a:prstGeom>
+          <a:noFill/>
+          <a:ln/>
+        </p:spPr>
+        <p:txBody>
+          <a:bodyPr wrap="square" lIns="0" tIns="0" rIns="0" bIns="0" rtlCol="0" anchor="t"/>
+          <a:lstStyle/>
+          <a:p>
+            <a:pPr algn="ctr" indent="0" marL="0">
+              <a:lnSpc>
+                <a:spcPts val="1260"/>
+              </a:lnSpc>
+              <a:buNone/>
+            </a:pPr>
+            <a:r>
+              <a:rPr lang="en-US" sz="1050" b="1" dirty="0">
+                <a:solidFill>
+                  <a:srgbClr val="FF4D63"/>
+                </a:solidFill>
+                <a:latin typeface="Malgun Gothic" pitchFamily="34" charset="0"/>
+                <a:ea typeface="Malgun Gothic" pitchFamily="34" charset="-122"/>
+                <a:cs typeface="Malgun Gothic" pitchFamily="34" charset="-120"/>
+              </a:rPr>
+              <a:t>기각</a:t>
+            </a:r>
+            <a:endParaRPr lang="en-US" sz="1050" dirty="0"/>
+          </a:p>
+        </p:txBody>
+      </p:sp>
+      <p:sp>
+        <p:nvSpPr>
+          <p:cNvPr id="30" name="Text 28"/>
+          <p:cNvSpPr txBox="1"/>
+          <p:nvPr/>
+        </p:nvSpPr>
+        <p:spPr>
+          <a:xfrm>
+            <a:off x="6191250" y="4495800"/>
+            <a:ext cx="2562225" cy="1200150"/>
+          </a:xfrm>
+          <a:prstGeom prst="rect">
+            <a:avLst/>
+          </a:prstGeom>
+          <a:noFill/>
+          <a:ln/>
+        </p:spPr>
+        <p:txBody>
+          <a:bodyPr wrap="square" lIns="0" tIns="0" rIns="0" bIns="0" rtlCol="0" anchor="t"/>
+          <a:lstStyle/>
+          <a:p>
+            <a:pPr algn="l" indent="0" marL="0">
+              <a:lnSpc>
+                <a:spcPts val="1890"/>
+              </a:lnSpc>
+              <a:buNone/>
+            </a:pPr>
+            <a:r>
+              <a:rPr lang="en-US" sz="1125" dirty="0">
+                <a:solidFill>
+                  <a:srgbClr val="BCC9D6"/>
+                </a:solidFill>
+                <a:latin typeface="Malgun Gothic" pitchFamily="34" charset="0"/>
+                <a:ea typeface="Malgun Gothic" pitchFamily="34" charset="-122"/>
+                <a:cs typeface="Malgun Gothic" pitchFamily="34" charset="-120"/>
+              </a:rPr>
+              <a:t>58건을 대조하니 차이가 온도에 비례했습니다. 진공이 아니라 </a:t>
+            </a:r>
+            <a:pPr algn="l" indent="0" marL="0">
+              <a:lnSpc>
+                <a:spcPts val="1890"/>
+              </a:lnSpc>
+              <a:buNone/>
+            </a:pPr>
+            <a:r>
+              <a:rPr lang="en-US" sz="1125" b="1" dirty="0">
+                <a:solidFill>
+                  <a:srgbClr val="EAE7E0"/>
+                </a:solidFill>
+                <a:latin typeface="Malgun Gothic" pitchFamily="34" charset="0"/>
+                <a:ea typeface="Malgun Gothic" pitchFamily="34" charset="-122"/>
+                <a:cs typeface="Malgun Gothic" pitchFamily="34" charset="-120"/>
+              </a:rPr>
+              <a:t>곡선 자체의 차이</a:t>
+            </a:r>
+            <a:pPr algn="l" indent="0" marL="0">
+              <a:lnSpc>
+                <a:spcPts val="1890"/>
+              </a:lnSpc>
+              <a:buNone/>
+            </a:pPr>
+            <a:r>
+              <a:rPr lang="en-US" sz="1125" dirty="0">
+                <a:solidFill>
+                  <a:srgbClr val="BCC9D6"/>
+                </a:solidFill>
+                <a:latin typeface="Malgun Gothic" pitchFamily="34" charset="0"/>
+                <a:ea typeface="Malgun Gothic" pitchFamily="34" charset="-122"/>
+                <a:cs typeface="Malgun Gothic" pitchFamily="34" charset="-120"/>
+              </a:rPr>
+              <a:t> 였습니다.</a:t>
+            </a:r>
+            <a:endParaRPr lang="en-US" sz="1125" dirty="0"/>
+          </a:p>
+        </p:txBody>
+      </p:sp>
+      <p:sp>
+        <p:nvSpPr>
+          <p:cNvPr id="31" name="Shape 29"/>
+          <p:cNvSpPr/>
+          <p:nvPr/>
+        </p:nvSpPr>
+        <p:spPr>
+          <a:xfrm>
+            <a:off x="8943975" y="2743200"/>
+            <a:ext cx="2562225" cy="19050"/>
+          </a:xfrm>
+          <a:prstGeom prst="rect">
+            <a:avLst/>
+          </a:prstGeom>
+          <a:solidFill>
+            <a:srgbClr val="EFB13C"/>
+          </a:solidFill>
+          <a:ln/>
+        </p:spPr>
+      </p:sp>
+      <p:sp>
+        <p:nvSpPr>
+          <p:cNvPr id="32" name="Text 30"/>
+          <p:cNvSpPr txBox="1"/>
+          <p:nvPr/>
+        </p:nvSpPr>
+        <p:spPr>
+          <a:xfrm>
+            <a:off x="8943975" y="2876550"/>
+            <a:ext cx="2562225" cy="125016"/>
+          </a:xfrm>
+          <a:prstGeom prst="rect">
+            <a:avLst/>
+          </a:prstGeom>
+          <a:noFill/>
+          <a:ln/>
+        </p:spPr>
+        <p:txBody>
+          <a:bodyPr wrap="square" lIns="0" tIns="0" rIns="0" bIns="0" rtlCol="0" anchor="t"/>
+          <a:lstStyle/>
+          <a:p>
+            <a:pPr algn="l" indent="0" marL="0">
+              <a:lnSpc>
+                <a:spcPts val="984"/>
+              </a:lnSpc>
+              <a:buNone/>
+            </a:pPr>
+            <a:r>
+              <a:rPr lang="en-US" sz="788" b="1" spc="150" kern="0" dirty="0">
+                <a:solidFill>
+                  <a:srgbClr val="EFB13C"/>
+                </a:solidFill>
+                <a:latin typeface="Consolas" pitchFamily="34" charset="0"/>
+                <a:ea typeface="Consolas" pitchFamily="34" charset="-122"/>
+                <a:cs typeface="Consolas" pitchFamily="34" charset="-120"/>
+              </a:rPr>
+              <a:t>가설 4</a:t>
+            </a:r>
+            <a:endParaRPr lang="en-US" sz="788" dirty="0"/>
+          </a:p>
+        </p:txBody>
+      </p:sp>
+      <p:sp>
+        <p:nvSpPr>
+          <p:cNvPr id="33" name="Text 31"/>
+          <p:cNvSpPr txBox="1"/>
+          <p:nvPr/>
+        </p:nvSpPr>
+        <p:spPr>
+          <a:xfrm>
+            <a:off x="8943975" y="3086100"/>
+            <a:ext cx="2562225" cy="852107"/>
+          </a:xfrm>
+          <a:prstGeom prst="rect">
+            <a:avLst/>
+          </a:prstGeom>
+          <a:noFill/>
+          <a:ln/>
+        </p:spPr>
+        <p:txBody>
+          <a:bodyPr wrap="square" lIns="0" tIns="0" rIns="0" bIns="0" rtlCol="0" anchor="t"/>
+          <a:lstStyle/>
+          <a:p>
+            <a:pPr algn="l" indent="0" marL="0">
+              <a:lnSpc>
+                <a:spcPts val="2237"/>
+              </a:lnSpc>
+              <a:buNone/>
+            </a:pPr>
+            <a:r>
+              <a:rPr lang="en-US" sz="1575" b="1" dirty="0">
+                <a:solidFill>
+                  <a:srgbClr val="EAE7E0"/>
+                </a:solidFill>
+                <a:latin typeface="Malgun Gothic" pitchFamily="34" charset="0"/>
+                <a:ea typeface="Malgun Gothic" pitchFamily="34" charset="-122"/>
+                <a:cs typeface="Malgun Gothic" pitchFamily="34" charset="-120"/>
+              </a:rPr>
+              <a:t>진공도는</a:t>
+            </a:r>
+            <a:endParaRPr lang="en-US" sz="1575" dirty="0"/>
+          </a:p>
+          <a:p>
+            <a:pPr algn="l" indent="0" marL="0">
+              <a:lnSpc>
+                <a:spcPts val="2237"/>
+              </a:lnSpc>
+              <a:buNone/>
+            </a:pPr>
+            <a:r>
+              <a:rPr lang="en-US" sz="1575" b="1" dirty="0">
+                <a:solidFill>
+                  <a:srgbClr val="EAE7E0"/>
+                </a:solidFill>
+                <a:latin typeface="Malgun Gothic" pitchFamily="34" charset="0"/>
+                <a:ea typeface="Malgun Gothic" pitchFamily="34" charset="-122"/>
+                <a:cs typeface="Malgun Gothic" pitchFamily="34" charset="-120"/>
+              </a:rPr>
+              <a:t>외기온도의</a:t>
+            </a:r>
+            <a:endParaRPr lang="en-US" sz="1575" dirty="0"/>
+          </a:p>
+          <a:p>
+            <a:pPr algn="l" indent="0" marL="0">
+              <a:lnSpc>
+                <a:spcPts val="2237"/>
+              </a:lnSpc>
+              <a:buNone/>
+            </a:pPr>
+            <a:r>
+              <a:rPr lang="en-US" sz="1575" b="1" dirty="0">
+                <a:solidFill>
+                  <a:srgbClr val="EAE7E0"/>
+                </a:solidFill>
+                <a:latin typeface="Malgun Gothic" pitchFamily="34" charset="0"/>
+                <a:ea typeface="Malgun Gothic" pitchFamily="34" charset="-122"/>
+                <a:cs typeface="Malgun Gothic" pitchFamily="34" charset="-120"/>
+              </a:rPr>
+              <a:t>함수다</a:t>
+            </a:r>
+            <a:endParaRPr lang="en-US" sz="1575" dirty="0"/>
+          </a:p>
+        </p:txBody>
+      </p:sp>
+      <p:sp>
+        <p:nvSpPr>
+          <p:cNvPr id="34" name="Shape 32"/>
+          <p:cNvSpPr/>
+          <p:nvPr/>
+        </p:nvSpPr>
+        <p:spPr>
+          <a:xfrm>
+            <a:off x="8943975" y="4038600"/>
+            <a:ext cx="704850" cy="285750"/>
+          </a:xfrm>
+          <a:prstGeom prst="rect">
+            <a:avLst/>
+          </a:prstGeom>
+          <a:ln w="17780">
+            <a:solidFill>
+              <a:srgbClr val="6B5220"/>
+            </a:solidFill>
+            <a:prstDash val="solid"/>
+          </a:ln>
+        </p:spPr>
+      </p:sp>
+      <p:sp>
+        <p:nvSpPr>
+          <p:cNvPr id="35" name="Text 33"/>
+          <p:cNvSpPr txBox="1"/>
+          <p:nvPr/>
+        </p:nvSpPr>
+        <p:spPr>
+          <a:xfrm>
+            <a:off x="8943975" y="4105275"/>
+            <a:ext cx="704850" cy="160020"/>
+          </a:xfrm>
+          <a:prstGeom prst="rect">
+            <a:avLst/>
+          </a:prstGeom>
+          <a:noFill/>
+          <a:ln/>
+        </p:spPr>
+        <p:txBody>
+          <a:bodyPr wrap="square" lIns="0" tIns="0" rIns="0" bIns="0" rtlCol="0" anchor="t"/>
+          <a:lstStyle/>
+          <a:p>
+            <a:pPr algn="ctr" indent="0" marL="0">
+              <a:lnSpc>
+                <a:spcPts val="1260"/>
+              </a:lnSpc>
+              <a:buNone/>
+            </a:pPr>
+            <a:r>
+              <a:rPr lang="en-US" sz="1050" b="1" dirty="0">
+                <a:solidFill>
+                  <a:srgbClr val="EFB13C"/>
+                </a:solidFill>
+                <a:latin typeface="Malgun Gothic" pitchFamily="34" charset="0"/>
+                <a:ea typeface="Malgun Gothic" pitchFamily="34" charset="-122"/>
+                <a:cs typeface="Malgun Gothic" pitchFamily="34" charset="-120"/>
+              </a:rPr>
+              <a:t>채택</a:t>
+            </a:r>
+            <a:endParaRPr lang="en-US" sz="1050" dirty="0"/>
+          </a:p>
+        </p:txBody>
+      </p:sp>
+      <p:sp>
+        <p:nvSpPr>
+          <p:cNvPr id="36" name="Text 34"/>
+          <p:cNvSpPr txBox="1"/>
+          <p:nvPr/>
+        </p:nvSpPr>
+        <p:spPr>
+          <a:xfrm>
+            <a:off x="8943975" y="4495800"/>
+            <a:ext cx="2562225" cy="1200150"/>
+          </a:xfrm>
+          <a:prstGeom prst="rect">
+            <a:avLst/>
+          </a:prstGeom>
+          <a:noFill/>
+          <a:ln/>
+        </p:spPr>
+        <p:txBody>
+          <a:bodyPr wrap="square" lIns="0" tIns="0" rIns="0" bIns="0" rtlCol="0" anchor="t"/>
+          <a:lstStyle/>
+          <a:p>
+            <a:pPr algn="l" indent="0" marL="0">
+              <a:lnSpc>
+                <a:spcPts val="1890"/>
+              </a:lnSpc>
+              <a:buNone/>
+            </a:pPr>
+            <a:r>
+              <a:rPr lang="en-US" sz="1125" dirty="0">
+                <a:solidFill>
+                  <a:srgbClr val="BCC9D6"/>
+                </a:solidFill>
+                <a:latin typeface="Malgun Gothic" pitchFamily="34" charset="0"/>
+                <a:ea typeface="Malgun Gothic" pitchFamily="34" charset="-122"/>
+                <a:cs typeface="Malgun Gothic" pitchFamily="34" charset="-120"/>
+              </a:rPr>
+              <a:t>진공도 = 33.64 + 1.242 × 온도, 관련성 </a:t>
+            </a:r>
+            <a:pPr algn="l" indent="0" marL="0">
+              <a:lnSpc>
+                <a:spcPts val="1890"/>
+              </a:lnSpc>
+              <a:buNone/>
+            </a:pPr>
+            <a:r>
+              <a:rPr lang="en-US" sz="1125" b="1" dirty="0">
+                <a:solidFill>
+                  <a:srgbClr val="EFB13C"/>
+                </a:solidFill>
+                <a:latin typeface="Malgun Gothic" pitchFamily="34" charset="0"/>
+                <a:ea typeface="Malgun Gothic" pitchFamily="34" charset="-122"/>
+                <a:cs typeface="Malgun Gothic" pitchFamily="34" charset="-120"/>
+              </a:rPr>
+              <a:t>+0.947</a:t>
+            </a:r>
+            <a:pPr algn="l" indent="0" marL="0">
+              <a:lnSpc>
+                <a:spcPts val="1890"/>
+              </a:lnSpc>
+              <a:buNone/>
+            </a:pPr>
+            <a:r>
+              <a:rPr lang="en-US" sz="1125" dirty="0">
+                <a:solidFill>
+                  <a:srgbClr val="BCC9D6"/>
+                </a:solidFill>
+                <a:latin typeface="Malgun Gothic" pitchFamily="34" charset="0"/>
+                <a:ea typeface="Malgun Gothic" pitchFamily="34" charset="-122"/>
+                <a:cs typeface="Malgun Gothic" pitchFamily="34" charset="-120"/>
+              </a:rPr>
+              <a:t>. 온도 하나로 설명됩니다.</a:t>
+            </a:r>
+            <a:endParaRPr lang="en-US" sz="1125" dirty="0"/>
+          </a:p>
+        </p:txBody>
+      </p:sp>
+      <p:sp>
+        <p:nvSpPr>
+          <p:cNvPr id="37" name="Shape 35"/>
+          <p:cNvSpPr/>
+          <p:nvPr/>
+        </p:nvSpPr>
+        <p:spPr>
+          <a:xfrm>
+            <a:off x="685800" y="5505450"/>
+            <a:ext cx="10820400" cy="400050"/>
           </a:xfrm>
           <a:prstGeom prst="rect">
             <a:avLst/>
@@ -17688,24 +22999,24 @@
           <a:solidFill>
             <a:srgbClr val="0A1320"/>
           </a:solidFill>
-          <a:ln w="19050">
+          <a:ln w="12700">
             <a:solidFill>
-              <a:srgbClr val="22354A"/>
+              <a:srgbClr val="182838"/>
             </a:solidFill>
-            <a:prstDash val="dash"/>
+            <a:prstDash val="solid"/>
           </a:ln>
         </p:spPr>
       </p:sp>
       <p:sp>
         <p:nvSpPr>
-          <p:cNvPr id="13" name="Text 11"/>
-          <p:cNvSpPr txBox="1"/>
-          <p:nvPr/>
-        </p:nvSpPr>
-        <p:spPr>
-          <a:xfrm>
-            <a:off x="685800" y="3695700"/>
-            <a:ext cx="10820400" cy="226695"/>
+          <p:cNvPr id="38" name="Text 36"/>
+          <p:cNvSpPr txBox="1"/>
+          <p:nvPr/>
+        </p:nvSpPr>
+        <p:spPr>
+          <a:xfrm>
+            <a:off x="914400" y="5619750"/>
+            <a:ext cx="10363200" cy="173355"/>
           </a:xfrm>
           <a:prstGeom prst="rect">
             <a:avLst/>
@@ -17719,70 +23030,28 @@
           <a:p>
             <a:pPr algn="ctr" indent="0" marL="0">
               <a:lnSpc>
-                <a:spcPts val="1785"/>
-              </a:lnSpc>
-              <a:buNone/>
-            </a:pPr>
-            <a:r>
-              <a:rPr lang="en-US" sz="1275" dirty="0">
-                <a:solidFill>
-                  <a:srgbClr val="63798F"/>
+                <a:spcPts val="1365"/>
+              </a:lnSpc>
+              <a:buNone/>
+            </a:pPr>
+            <a:r>
+              <a:rPr lang="en-US" sz="975" dirty="0">
+                <a:solidFill>
+                  <a:srgbClr val="93A6BA"/>
                 </a:solidFill>
                 <a:latin typeface="Malgun Gothic" pitchFamily="34" charset="0"/>
                 <a:ea typeface="Malgun Gothic" pitchFamily="34" charset="-122"/>
                 <a:cs typeface="Malgun Gothic" pitchFamily="34" charset="-120"/>
               </a:rPr>
-              <a:t>작성 예정 — 이 장은 아직 만들지 않았습니다.</a:t>
-            </a:r>
-            <a:endParaRPr lang="en-US" sz="1275" dirty="0"/>
-          </a:p>
-        </p:txBody>
-      </p:sp>
-      <p:sp>
-        <p:nvSpPr>
-          <p:cNvPr id="14" name="Text 12"/>
-          <p:cNvSpPr txBox="1"/>
-          <p:nvPr/>
-        </p:nvSpPr>
-        <p:spPr>
-          <a:xfrm>
-            <a:off x="685800" y="4038600"/>
-            <a:ext cx="10820400" cy="125016"/>
-          </a:xfrm>
-          <a:prstGeom prst="rect">
-            <a:avLst/>
-          </a:prstGeom>
-          <a:noFill/>
-          <a:ln/>
-        </p:spPr>
-        <p:txBody>
-          <a:bodyPr wrap="square" lIns="0" tIns="0" rIns="0" bIns="0" rtlCol="0" anchor="t"/>
-          <a:lstStyle/>
-          <a:p>
-            <a:pPr algn="l" indent="0" marL="0">
-              <a:lnSpc>
-                <a:spcPts val="984"/>
-              </a:lnSpc>
-              <a:buNone/>
-            </a:pPr>
-            <a:r>
-              <a:rPr lang="en-US" sz="788" b="1" spc="150" kern="0" dirty="0">
-                <a:solidFill>
-                  <a:srgbClr val="7E2333"/>
-                </a:solidFill>
-                <a:latin typeface="Consolas" pitchFamily="34" charset="0"/>
-                <a:ea typeface="Consolas" pitchFamily="34" charset="-122"/>
-                <a:cs typeface="Consolas" pitchFamily="34" charset="-120"/>
-              </a:rPr>
-              <a:t>SLIDE 07  ·  TODO</a:t>
-            </a:r>
-            <a:endParaRPr lang="en-US" sz="788" dirty="0"/>
-          </a:p>
-        </p:txBody>
-      </p:sp>
-      <p:sp>
-        <p:nvSpPr>
-          <p:cNvPr id="15" name="Shape 13"/>
+              <a:t>표본 5개로 보였던 관련성 −0.85 는 36개에서 +0.09 로 사라졌습니다  ·  적은 데이터로 결론을 내리지 않는 것이 이 과제의 규칙입니다</a:t>
+            </a:r>
+            <a:endParaRPr lang="en-US" sz="975" dirty="0"/>
+          </a:p>
+        </p:txBody>
+      </p:sp>
+      <p:sp>
+        <p:nvSpPr>
+          <p:cNvPr id="39" name="Shape 37"/>
           <p:cNvSpPr/>
           <p:nvPr/>
         </p:nvSpPr>
@@ -17802,6 +23071,124 @@
             <a:prstDash val="solid"/>
           </a:ln>
         </p:spPr>
+      </p:sp>
+      <p:sp>
+        <p:nvSpPr>
+          <p:cNvPr id="40" name="Text 38"/>
+          <p:cNvSpPr txBox="1"/>
+          <p:nvPr/>
+        </p:nvSpPr>
+        <p:spPr>
+          <a:xfrm>
+            <a:off x="685800" y="6267450"/>
+            <a:ext cx="476250" cy="120015"/>
+          </a:xfrm>
+          <a:prstGeom prst="rect">
+            <a:avLst/>
+          </a:prstGeom>
+          <a:noFill/>
+          <a:ln/>
+        </p:spPr>
+        <p:txBody>
+          <a:bodyPr wrap="square" lIns="0" tIns="0" rIns="0" bIns="0" rtlCol="0" anchor="t"/>
+          <a:lstStyle/>
+          <a:p>
+            <a:pPr algn="l" indent="0" marL="0">
+              <a:lnSpc>
+                <a:spcPts val="945"/>
+              </a:lnSpc>
+              <a:buNone/>
+            </a:pPr>
+            <a:r>
+              <a:rPr lang="en-US" sz="788" b="1" spc="180" kern="0" dirty="0">
+                <a:solidFill>
+                  <a:srgbClr val="EFB13C"/>
+                </a:solidFill>
+                <a:latin typeface="Consolas" pitchFamily="34" charset="0"/>
+                <a:ea typeface="Consolas" pitchFamily="34" charset="-122"/>
+                <a:cs typeface="Consolas" pitchFamily="34" charset="-120"/>
+              </a:rPr>
+              <a:t>결론</a:t>
+            </a:r>
+            <a:endParaRPr lang="en-US" sz="788" dirty="0"/>
+          </a:p>
+        </p:txBody>
+      </p:sp>
+      <p:sp>
+        <p:nvSpPr>
+          <p:cNvPr id="41" name="Text 39"/>
+          <p:cNvSpPr txBox="1"/>
+          <p:nvPr/>
+        </p:nvSpPr>
+        <p:spPr>
+          <a:xfrm>
+            <a:off x="1219200" y="6229350"/>
+            <a:ext cx="10287000" cy="220027"/>
+          </a:xfrm>
+          <a:prstGeom prst="rect">
+            <a:avLst/>
+          </a:prstGeom>
+          <a:noFill/>
+          <a:ln/>
+        </p:spPr>
+        <p:txBody>
+          <a:bodyPr wrap="square" lIns="0" tIns="0" rIns="0" bIns="0" rtlCol="0" anchor="t"/>
+          <a:lstStyle/>
+          <a:p>
+            <a:pPr algn="l" indent="0" marL="0">
+              <a:lnSpc>
+                <a:spcPts val="1733"/>
+              </a:lnSpc>
+              <a:buNone/>
+            </a:pPr>
+            <a:r>
+              <a:rPr lang="en-US" sz="1238" dirty="0">
+                <a:solidFill>
+                  <a:srgbClr val="BCC9D6"/>
+                </a:solidFill>
+                <a:latin typeface="Malgun Gothic" pitchFamily="34" charset="0"/>
+                <a:ea typeface="Malgun Gothic" pitchFamily="34" charset="-122"/>
+                <a:cs typeface="Malgun Gothic" pitchFamily="34" charset="-120"/>
+              </a:rPr>
+              <a:t>남은 설명은 하나였습니다 — </a:t>
+            </a:r>
+            <a:pPr algn="l" indent="0" marL="0">
+              <a:lnSpc>
+                <a:spcPts val="1733"/>
+              </a:lnSpc>
+              <a:buNone/>
+            </a:pPr>
+            <a:r>
+              <a:rPr lang="en-US" sz="1238" b="1" dirty="0">
+                <a:solidFill>
+                  <a:srgbClr val="EFB13C"/>
+                </a:solidFill>
+                <a:latin typeface="Malgun Gothic" pitchFamily="34" charset="0"/>
+                <a:ea typeface="Malgun Gothic" pitchFamily="34" charset="-122"/>
+                <a:cs typeface="Malgun Gothic" pitchFamily="34" charset="-120"/>
+              </a:rPr>
+              <a:t>온도</a:t>
+            </a:r>
+            <a:pPr algn="l" indent="0" marL="0">
+              <a:lnSpc>
+                <a:spcPts val="1733"/>
+              </a:lnSpc>
+              <a:buNone/>
+            </a:pPr>
+            <a:r>
+              <a:rPr lang="en-US" sz="1238" dirty="0">
+                <a:solidFill>
+                  <a:srgbClr val="BCC9D6"/>
+                </a:solidFill>
+                <a:latin typeface="Malgun Gothic" pitchFamily="34" charset="0"/>
+                <a:ea typeface="Malgun Gothic" pitchFamily="34" charset="-122"/>
+                <a:cs typeface="Malgun Gothic" pitchFamily="34" charset="-120"/>
+              </a:rPr>
+              <a:t>. 그래서 온도로 나눠 학습합니다.</a:t>
+            </a:r>
+            <a:endParaRPr lang="en-US" sz="1238" dirty="0"/>
+          </a:p>
+        </p:txBody>
       </p:sp>
     </p:spTree>
   </p:cSld>
@@ -18066,26 +23453,26 @@
         <p:spPr>
           <a:xfrm>
             <a:off x="685800" y="914400"/>
-            <a:ext cx="10287000" cy="360045"/>
-          </a:xfrm>
-          <a:prstGeom prst="rect">
-            <a:avLst/>
-          </a:prstGeom>
-          <a:noFill/>
-          <a:ln/>
-        </p:spPr>
-        <p:txBody>
-          <a:bodyPr wrap="square" lIns="0" tIns="0" rIns="0" bIns="0" rtlCol="0" anchor="t"/>
-          <a:lstStyle/>
-          <a:p>
-            <a:pPr algn="l" indent="0" marL="0">
-              <a:lnSpc>
-                <a:spcPts val="2835"/>
-              </a:lnSpc>
-              <a:buNone/>
-            </a:pPr>
-            <a:r>
-              <a:rPr lang="en-US" sz="2250" b="1" dirty="0">
+            <a:ext cx="10287000" cy="888111"/>
+          </a:xfrm>
+          <a:prstGeom prst="rect">
+            <a:avLst/>
+          </a:prstGeom>
+          <a:noFill/>
+          <a:ln/>
+        </p:spPr>
+        <p:txBody>
+          <a:bodyPr wrap="square" lIns="0" tIns="0" rIns="0" bIns="0" rtlCol="0" anchor="t"/>
+          <a:lstStyle/>
+          <a:p>
+            <a:pPr algn="l" indent="0" marL="0">
+              <a:lnSpc>
+                <a:spcPts val="3496"/>
+              </a:lnSpc>
+              <a:buNone/>
+            </a:pPr>
+            <a:r>
+              <a:rPr lang="en-US" sz="2775" b="1" dirty="0">
                 <a:solidFill>
                   <a:srgbClr val="EAE7E0"/>
                 </a:solidFill>
@@ -18093,22 +23480,197 @@
                 <a:ea typeface="Malgun Gothic" pitchFamily="34" charset="-122"/>
                 <a:cs typeface="Malgun Gothic" pitchFamily="34" charset="-120"/>
               </a:rPr>
-              <a:t>물리는 동결하고, 통계만 학습합니다</a:t>
-            </a:r>
-            <a:endParaRPr lang="en-US" sz="2250" dirty="0"/>
-          </a:p>
-        </p:txBody>
-      </p:sp>
-      <p:sp>
-        <p:nvSpPr>
-          <p:cNvPr id="12" name="Shape 10"/>
-          <p:cNvSpPr/>
-          <p:nvPr/>
-        </p:nvSpPr>
-        <p:spPr>
-          <a:xfrm>
-            <a:off x="685800" y="2857500"/>
-            <a:ext cx="10820400" cy="2095500"/>
+              <a:t>물리 이론은 손대지 않고,</a:t>
+            </a:r>
+            <a:endParaRPr lang="en-US" sz="2775" dirty="0"/>
+          </a:p>
+          <a:p>
+            <a:pPr algn="l" indent="0" marL="0">
+              <a:lnSpc>
+                <a:spcPts val="3496"/>
+              </a:lnSpc>
+              <a:buNone/>
+            </a:pPr>
+            <a:r>
+              <a:rPr lang="en-US" sz="2775" b="1" dirty="0">
+                <a:solidFill>
+                  <a:srgbClr val="EFB13C"/>
+                </a:solidFill>
+                <a:latin typeface="Malgun Gothic" pitchFamily="34" charset="0"/>
+                <a:ea typeface="Malgun Gothic" pitchFamily="34" charset="-122"/>
+                <a:cs typeface="Malgun Gothic" pitchFamily="34" charset="-120"/>
+              </a:rPr>
+              <a:t>차이만</a:t>
+            </a:r>
+            <a:pPr algn="l" indent="0" marL="0">
+              <a:lnSpc>
+                <a:spcPts val="3496"/>
+              </a:lnSpc>
+              <a:buNone/>
+            </a:pPr>
+            <a:r>
+              <a:rPr lang="en-US" sz="2775" b="1" dirty="0">
+                <a:solidFill>
+                  <a:srgbClr val="EAE7E0"/>
+                </a:solidFill>
+                <a:latin typeface="Malgun Gothic" pitchFamily="34" charset="0"/>
+                <a:ea typeface="Malgun Gothic" pitchFamily="34" charset="-122"/>
+                <a:cs typeface="Malgun Gothic" pitchFamily="34" charset="-120"/>
+              </a:rPr>
+              <a:t> 온도별로 학습합니다</a:t>
+            </a:r>
+            <a:endParaRPr lang="en-US" sz="2775" dirty="0"/>
+          </a:p>
+        </p:txBody>
+      </p:sp>
+      <p:sp>
+        <p:nvSpPr>
+          <p:cNvPr id="12" name="Text 10"/>
+          <p:cNvSpPr txBox="1"/>
+          <p:nvPr/>
+        </p:nvSpPr>
+        <p:spPr>
+          <a:xfrm>
+            <a:off x="685800" y="2000250"/>
+            <a:ext cx="10287000" cy="569214"/>
+          </a:xfrm>
+          <a:prstGeom prst="rect">
+            <a:avLst/>
+          </a:prstGeom>
+          <a:noFill/>
+          <a:ln/>
+        </p:spPr>
+        <p:txBody>
+          <a:bodyPr wrap="square" lIns="0" tIns="0" rIns="0" bIns="0" rtlCol="0" anchor="t"/>
+          <a:lstStyle/>
+          <a:p>
+            <a:pPr algn="l" indent="0" marL="0">
+              <a:lnSpc>
+                <a:spcPts val="2241"/>
+              </a:lnSpc>
+              <a:buNone/>
+            </a:pPr>
+            <a:r>
+              <a:rPr lang="en-US" sz="1350" dirty="0">
+                <a:solidFill>
+                  <a:srgbClr val="BCC9D6"/>
+                </a:solidFill>
+                <a:latin typeface="Malgun Gothic" pitchFamily="34" charset="0"/>
+                <a:ea typeface="Malgun Gothic" pitchFamily="34" charset="-122"/>
+                <a:cs typeface="Malgun Gothic" pitchFamily="34" charset="-120"/>
+              </a:rPr>
+              <a:t>이론 계산은 검증된 그대로 동결합니다. 학습하는 것은 </a:t>
+            </a:r>
+            <a:pPr algn="l" indent="0" marL="0">
+              <a:lnSpc>
+                <a:spcPts val="2241"/>
+              </a:lnSpc>
+              <a:buNone/>
+            </a:pPr>
+            <a:r>
+              <a:rPr lang="en-US" sz="1350" b="1" dirty="0">
+                <a:solidFill>
+                  <a:srgbClr val="EAE7E0"/>
+                </a:solidFill>
+                <a:latin typeface="Malgun Gothic" pitchFamily="34" charset="0"/>
+                <a:ea typeface="Malgun Gothic" pitchFamily="34" charset="-122"/>
+                <a:cs typeface="Malgun Gothic" pitchFamily="34" charset="-120"/>
+              </a:rPr>
+              <a:t>이론과 실제의 차이</a:t>
+            </a:r>
+            <a:pPr algn="l" indent="0" marL="0">
+              <a:lnSpc>
+                <a:spcPts val="2241"/>
+              </a:lnSpc>
+              <a:buNone/>
+            </a:pPr>
+            <a:r>
+              <a:rPr lang="en-US" sz="1350" dirty="0">
+                <a:solidFill>
+                  <a:srgbClr val="BCC9D6"/>
+                </a:solidFill>
+                <a:latin typeface="Malgun Gothic" pitchFamily="34" charset="0"/>
+                <a:ea typeface="Malgun Gothic" pitchFamily="34" charset="-122"/>
+                <a:cs typeface="Malgun Gothic" pitchFamily="34" charset="-120"/>
+              </a:rPr>
+              <a:t> 뿐이고, 그 차이를 온도별로 나눠 봅니다.</a:t>
+            </a:r>
+            <a:endParaRPr lang="en-US" sz="1350" dirty="0"/>
+          </a:p>
+        </p:txBody>
+      </p:sp>
+      <p:sp>
+        <p:nvSpPr>
+          <p:cNvPr id="13" name="Shape 11"/>
+          <p:cNvSpPr/>
+          <p:nvPr/>
+        </p:nvSpPr>
+        <p:spPr>
+          <a:xfrm>
+            <a:off x="685800" y="2743200"/>
+            <a:ext cx="7048500" cy="19050"/>
+          </a:xfrm>
+          <a:prstGeom prst="rect">
+            <a:avLst/>
+          </a:prstGeom>
+          <a:solidFill>
+            <a:srgbClr val="22354A"/>
+          </a:solidFill>
+          <a:ln/>
+        </p:spPr>
+      </p:sp>
+      <p:sp>
+        <p:nvSpPr>
+          <p:cNvPr id="14" name="Text 12"/>
+          <p:cNvSpPr txBox="1"/>
+          <p:nvPr/>
+        </p:nvSpPr>
+        <p:spPr>
+          <a:xfrm>
+            <a:off x="685800" y="2876550"/>
+            <a:ext cx="7048500" cy="125016"/>
+          </a:xfrm>
+          <a:prstGeom prst="rect">
+            <a:avLst/>
+          </a:prstGeom>
+          <a:noFill/>
+          <a:ln/>
+        </p:spPr>
+        <p:txBody>
+          <a:bodyPr wrap="square" lIns="0" tIns="0" rIns="0" bIns="0" rtlCol="0" anchor="t"/>
+          <a:lstStyle/>
+          <a:p>
+            <a:pPr algn="l" indent="0" marL="0">
+              <a:lnSpc>
+                <a:spcPts val="984"/>
+              </a:lnSpc>
+              <a:buNone/>
+            </a:pPr>
+            <a:r>
+              <a:rPr lang="en-US" sz="788" b="1" spc="150" kern="0" dirty="0">
+                <a:solidFill>
+                  <a:srgbClr val="63798F"/>
+                </a:solidFill>
+                <a:latin typeface="Consolas" pitchFamily="34" charset="0"/>
+                <a:ea typeface="Consolas" pitchFamily="34" charset="-122"/>
+                <a:cs typeface="Consolas" pitchFamily="34" charset="-120"/>
+              </a:rPr>
+              <a:t>2단 구조</a:t>
+            </a:r>
+            <a:endParaRPr lang="en-US" sz="788" dirty="0"/>
+          </a:p>
+        </p:txBody>
+      </p:sp>
+      <p:sp>
+        <p:nvSpPr>
+          <p:cNvPr id="15" name="Shape 13"/>
+          <p:cNvSpPr/>
+          <p:nvPr/>
+        </p:nvSpPr>
+        <p:spPr>
+          <a:xfrm>
+            <a:off x="685800" y="3067050"/>
+            <a:ext cx="7048500" cy="1123950"/>
           </a:xfrm>
           <a:prstGeom prst="rect">
             <a:avLst/>
@@ -18116,66 +23678,316 @@
           <a:solidFill>
             <a:srgbClr val="0A1320"/>
           </a:solidFill>
-          <a:ln w="19050">
+          <a:ln w="12700">
             <a:solidFill>
-              <a:srgbClr val="22354A"/>
+              <a:srgbClr val="182838"/>
             </a:solidFill>
-            <a:prstDash val="dash"/>
+            <a:prstDash val="solid"/>
           </a:ln>
         </p:spPr>
       </p:sp>
       <p:sp>
         <p:nvSpPr>
-          <p:cNvPr id="13" name="Text 11"/>
-          <p:cNvSpPr txBox="1"/>
-          <p:nvPr/>
-        </p:nvSpPr>
-        <p:spPr>
-          <a:xfrm>
-            <a:off x="685800" y="3695700"/>
-            <a:ext cx="10820400" cy="226695"/>
-          </a:xfrm>
-          <a:prstGeom prst="rect">
-            <a:avLst/>
-          </a:prstGeom>
-          <a:noFill/>
-          <a:ln/>
-        </p:spPr>
-        <p:txBody>
-          <a:bodyPr wrap="square" lIns="0" tIns="0" rIns="0" bIns="0" rtlCol="0" anchor="t"/>
-          <a:lstStyle/>
-          <a:p>
-            <a:pPr algn="ctr" indent="0" marL="0">
-              <a:lnSpc>
-                <a:spcPts val="1785"/>
-              </a:lnSpc>
-              <a:buNone/>
-            </a:pPr>
-            <a:r>
-              <a:rPr lang="en-US" sz="1275" dirty="0">
-                <a:solidFill>
-                  <a:srgbClr val="63798F"/>
+          <p:cNvPr id="16" name="Shape 14"/>
+          <p:cNvSpPr/>
+          <p:nvPr/>
+        </p:nvSpPr>
+        <p:spPr>
+          <a:xfrm>
+            <a:off x="685800" y="3067050"/>
+            <a:ext cx="7048500" cy="19050"/>
+          </a:xfrm>
+          <a:prstGeom prst="rect">
+            <a:avLst/>
+          </a:prstGeom>
+          <a:solidFill>
+            <a:srgbClr val="5E7793"/>
+          </a:solidFill>
+          <a:ln/>
+        </p:spPr>
+      </p:sp>
+      <p:sp>
+        <p:nvSpPr>
+          <p:cNvPr id="17" name="Text 15"/>
+          <p:cNvSpPr txBox="1"/>
+          <p:nvPr/>
+        </p:nvSpPr>
+        <p:spPr>
+          <a:xfrm>
+            <a:off x="838200" y="3200400"/>
+            <a:ext cx="3810000" cy="125016"/>
+          </a:xfrm>
+          <a:prstGeom prst="rect">
+            <a:avLst/>
+          </a:prstGeom>
+          <a:noFill/>
+          <a:ln/>
+        </p:spPr>
+        <p:txBody>
+          <a:bodyPr wrap="square" lIns="0" tIns="0" rIns="0" bIns="0" rtlCol="0" anchor="t"/>
+          <a:lstStyle/>
+          <a:p>
+            <a:pPr algn="l" indent="0" marL="0">
+              <a:lnSpc>
+                <a:spcPts val="984"/>
+              </a:lnSpc>
+              <a:buNone/>
+            </a:pPr>
+            <a:r>
+              <a:rPr lang="en-US" sz="788" b="1" spc="150" kern="0" dirty="0">
+                <a:solidFill>
+                  <a:srgbClr val="5E7793"/>
+                </a:solidFill>
+                <a:latin typeface="Consolas" pitchFamily="34" charset="0"/>
+                <a:ea typeface="Consolas" pitchFamily="34" charset="-122"/>
+                <a:cs typeface="Consolas" pitchFamily="34" charset="-120"/>
+              </a:rPr>
+              <a:t>1층  ·  동결 — 손대지 않는다</a:t>
+            </a:r>
+            <a:endParaRPr lang="en-US" sz="788" dirty="0"/>
+          </a:p>
+        </p:txBody>
+      </p:sp>
+      <p:sp>
+        <p:nvSpPr>
+          <p:cNvPr id="18" name="Text 16"/>
+          <p:cNvSpPr txBox="1"/>
+          <p:nvPr/>
+        </p:nvSpPr>
+        <p:spPr>
+          <a:xfrm>
+            <a:off x="838200" y="3409950"/>
+            <a:ext cx="6667500" cy="284036"/>
+          </a:xfrm>
+          <a:prstGeom prst="rect">
+            <a:avLst/>
+          </a:prstGeom>
+          <a:noFill/>
+          <a:ln/>
+        </p:spPr>
+        <p:txBody>
+          <a:bodyPr wrap="square" lIns="0" tIns="0" rIns="0" bIns="0" rtlCol="0" anchor="t"/>
+          <a:lstStyle/>
+          <a:p>
+            <a:pPr algn="l" indent="0" marL="0">
+              <a:lnSpc>
+                <a:spcPts val="2237"/>
+              </a:lnSpc>
+              <a:buNone/>
+            </a:pPr>
+            <a:r>
+              <a:rPr lang="en-US" sz="1575" b="1" dirty="0">
+                <a:solidFill>
+                  <a:srgbClr val="EAE7E0"/>
                 </a:solidFill>
                 <a:latin typeface="Malgun Gothic" pitchFamily="34" charset="0"/>
                 <a:ea typeface="Malgun Gothic" pitchFamily="34" charset="-122"/>
                 <a:cs typeface="Malgun Gothic" pitchFamily="34" charset="-120"/>
               </a:rPr>
-              <a:t>작성 예정 — 이 장은 아직 만들지 않았습니다.</a:t>
-            </a:r>
-            <a:endParaRPr lang="en-US" sz="1275" dirty="0"/>
-          </a:p>
-        </p:txBody>
-      </p:sp>
-      <p:sp>
-        <p:nvSpPr>
-          <p:cNvPr id="14" name="Text 12"/>
-          <p:cNvSpPr txBox="1"/>
-          <p:nvPr/>
-        </p:nvSpPr>
-        <p:spPr>
-          <a:xfrm>
-            <a:off x="685800" y="4038600"/>
-            <a:ext cx="10820400" cy="125016"/>
+              <a:t>온도·대기압·습도·진공도로 계산하는 </a:t>
+            </a:r>
+            <a:pPr algn="l" indent="0" marL="0">
+              <a:lnSpc>
+                <a:spcPts val="2237"/>
+              </a:lnSpc>
+              <a:buNone/>
+            </a:pPr>
+            <a:r>
+              <a:rPr lang="en-US" sz="1575" b="1" dirty="0">
+                <a:solidFill>
+                  <a:srgbClr val="5E7793"/>
+                </a:solidFill>
+                <a:latin typeface="Malgun Gothic" pitchFamily="34" charset="0"/>
+                <a:ea typeface="Malgun Gothic" pitchFamily="34" charset="-122"/>
+                <a:cs typeface="Malgun Gothic" pitchFamily="34" charset="-120"/>
+              </a:rPr>
+              <a:t>이론 출력</a:t>
+            </a:r>
+            <a:endParaRPr lang="en-US" sz="1575" dirty="0"/>
+          </a:p>
+        </p:txBody>
+      </p:sp>
+      <p:sp>
+        <p:nvSpPr>
+          <p:cNvPr id="19" name="Text 17"/>
+          <p:cNvSpPr txBox="1"/>
+          <p:nvPr/>
+        </p:nvSpPr>
+        <p:spPr>
+          <a:xfrm>
+            <a:off x="838200" y="3771900"/>
+            <a:ext cx="6667500" cy="240030"/>
+          </a:xfrm>
+          <a:prstGeom prst="rect">
+            <a:avLst/>
+          </a:prstGeom>
+          <a:noFill/>
+          <a:ln/>
+        </p:spPr>
+        <p:txBody>
+          <a:bodyPr wrap="square" lIns="0" tIns="0" rIns="0" bIns="0" rtlCol="0" anchor="t"/>
+          <a:lstStyle/>
+          <a:p>
+            <a:pPr algn="l" indent="0" marL="0">
+              <a:lnSpc>
+                <a:spcPts val="1890"/>
+              </a:lnSpc>
+              <a:buNone/>
+            </a:pPr>
+            <a:r>
+              <a:rPr lang="en-US" sz="1125" dirty="0">
+                <a:solidFill>
+                  <a:srgbClr val="BCC9D6"/>
+                </a:solidFill>
+                <a:latin typeface="Malgun Gothic" pitchFamily="34" charset="0"/>
+                <a:ea typeface="Malgun Gothic" pitchFamily="34" charset="-122"/>
+                <a:cs typeface="Malgun Gothic" pitchFamily="34" charset="-120"/>
+              </a:rPr>
+              <a:t>제작사 성능 곡선과 사내 검증을 거친 계산식입니다. 데이터가 쌓여도 이 층은 바뀌지 않습니다.</a:t>
+            </a:r>
+            <a:endParaRPr lang="en-US" sz="1125" dirty="0"/>
+          </a:p>
+        </p:txBody>
+      </p:sp>
+      <p:sp>
+        <p:nvSpPr>
+          <p:cNvPr id="20" name="Text 18"/>
+          <p:cNvSpPr txBox="1"/>
+          <p:nvPr/>
+        </p:nvSpPr>
+        <p:spPr>
+          <a:xfrm>
+            <a:off x="838200" y="4248150"/>
+            <a:ext cx="285750" cy="205740"/>
+          </a:xfrm>
+          <a:prstGeom prst="rect">
+            <a:avLst/>
+          </a:prstGeom>
+          <a:noFill/>
+          <a:ln/>
+        </p:spPr>
+        <p:txBody>
+          <a:bodyPr wrap="square" lIns="0" tIns="0" rIns="0" bIns="0" rtlCol="0" anchor="t"/>
+          <a:lstStyle/>
+          <a:p>
+            <a:pPr algn="l" indent="0" marL="0">
+              <a:lnSpc>
+                <a:spcPts val="1620"/>
+              </a:lnSpc>
+              <a:buNone/>
+            </a:pPr>
+            <a:r>
+              <a:rPr lang="en-US" sz="1350" dirty="0">
+                <a:solidFill>
+                  <a:srgbClr val="EFB13C"/>
+                </a:solidFill>
+                <a:latin typeface="Malgun Gothic" pitchFamily="34" charset="0"/>
+                <a:ea typeface="Malgun Gothic" pitchFamily="34" charset="-122"/>
+                <a:cs typeface="Malgun Gothic" pitchFamily="34" charset="-120"/>
+              </a:rPr>
+              <a:t>↓</a:t>
+            </a:r>
+            <a:endParaRPr lang="en-US" sz="1350" dirty="0"/>
+          </a:p>
+        </p:txBody>
+      </p:sp>
+      <p:sp>
+        <p:nvSpPr>
+          <p:cNvPr id="21" name="Text 19"/>
+          <p:cNvSpPr txBox="1"/>
+          <p:nvPr/>
+        </p:nvSpPr>
+        <p:spPr>
+          <a:xfrm>
+            <a:off x="1181100" y="4286250"/>
+            <a:ext cx="2857500" cy="160973"/>
+          </a:xfrm>
+          <a:prstGeom prst="rect">
+            <a:avLst/>
+          </a:prstGeom>
+          <a:noFill/>
+          <a:ln/>
+        </p:spPr>
+        <p:txBody>
+          <a:bodyPr wrap="square" lIns="0" tIns="0" rIns="0" bIns="0" rtlCol="0" anchor="t"/>
+          <a:lstStyle/>
+          <a:p>
+            <a:pPr algn="l" indent="0" marL="0">
+              <a:lnSpc>
+                <a:spcPts val="1268"/>
+              </a:lnSpc>
+              <a:buNone/>
+            </a:pPr>
+            <a:r>
+              <a:rPr lang="en-US" sz="975" dirty="0">
+                <a:solidFill>
+                  <a:srgbClr val="93A6BA"/>
+                </a:solidFill>
+                <a:latin typeface="Malgun Gothic" pitchFamily="34" charset="0"/>
+                <a:ea typeface="Malgun Gothic" pitchFamily="34" charset="-122"/>
+                <a:cs typeface="Malgun Gothic" pitchFamily="34" charset="-120"/>
+              </a:rPr>
+              <a:t>이론과 실제의 차이</a:t>
+            </a:r>
+            <a:endParaRPr lang="en-US" sz="975" dirty="0"/>
+          </a:p>
+        </p:txBody>
+      </p:sp>
+      <p:sp>
+        <p:nvSpPr>
+          <p:cNvPr id="22" name="Shape 20"/>
+          <p:cNvSpPr/>
+          <p:nvPr/>
+        </p:nvSpPr>
+        <p:spPr>
+          <a:xfrm>
+            <a:off x="685800" y="4552950"/>
+            <a:ext cx="7048500" cy="1123950"/>
+          </a:xfrm>
+          <a:prstGeom prst="rect">
+            <a:avLst/>
+          </a:prstGeom>
+          <a:solidFill>
+            <a:srgbClr val="0A1320"/>
+          </a:solidFill>
+          <a:ln w="12700">
+            <a:solidFill>
+              <a:srgbClr val="182838"/>
+            </a:solidFill>
+            <a:prstDash val="solid"/>
+          </a:ln>
+        </p:spPr>
+      </p:sp>
+      <p:sp>
+        <p:nvSpPr>
+          <p:cNvPr id="23" name="Shape 21"/>
+          <p:cNvSpPr/>
+          <p:nvPr/>
+        </p:nvSpPr>
+        <p:spPr>
+          <a:xfrm>
+            <a:off x="685800" y="4552950"/>
+            <a:ext cx="7048500" cy="19050"/>
+          </a:xfrm>
+          <a:prstGeom prst="rect">
+            <a:avLst/>
+          </a:prstGeom>
+          <a:solidFill>
+            <a:srgbClr val="EFB13C"/>
+          </a:solidFill>
+          <a:ln/>
+        </p:spPr>
+      </p:sp>
+      <p:sp>
+        <p:nvSpPr>
+          <p:cNvPr id="24" name="Text 22"/>
+          <p:cNvSpPr txBox="1"/>
+          <p:nvPr/>
+        </p:nvSpPr>
+        <p:spPr>
+          <a:xfrm>
+            <a:off x="838200" y="4686300"/>
+            <a:ext cx="3810000" cy="125016"/>
           </a:xfrm>
           <a:prstGeom prst="rect">
             <a:avLst/>
@@ -18196,13 +24008,13 @@
             <a:r>
               <a:rPr lang="en-US" sz="788" b="1" spc="150" kern="0" dirty="0">
                 <a:solidFill>
-                  <a:srgbClr val="7E2333"/>
+                  <a:srgbClr val="EFB13C"/>
                 </a:solidFill>
                 <a:latin typeface="Consolas" pitchFamily="34" charset="0"/>
                 <a:ea typeface="Consolas" pitchFamily="34" charset="-122"/>
                 <a:cs typeface="Consolas" pitchFamily="34" charset="-120"/>
               </a:rPr>
-              <a:t>SLIDE 08  ·  TODO</a:t>
+              <a:t>2층  ·  학습 — 데이터가 갱신한다</a:t>
             </a:r>
             <a:endParaRPr lang="en-US" sz="788" dirty="0"/>
           </a:p>
@@ -18210,14 +24022,286 @@
       </p:sp>
       <p:sp>
         <p:nvSpPr>
-          <p:cNvPr id="15" name="Shape 13"/>
-          <p:cNvSpPr/>
-          <p:nvPr/>
-        </p:nvSpPr>
-        <p:spPr>
-          <a:xfrm>
-            <a:off x="685800" y="6057900"/>
-            <a:ext cx="10820400" cy="0"/>
+          <p:cNvPr id="25" name="Text 23"/>
+          <p:cNvSpPr txBox="1"/>
+          <p:nvPr/>
+        </p:nvSpPr>
+        <p:spPr>
+          <a:xfrm>
+            <a:off x="838200" y="4895850"/>
+            <a:ext cx="6667500" cy="284036"/>
+          </a:xfrm>
+          <a:prstGeom prst="rect">
+            <a:avLst/>
+          </a:prstGeom>
+          <a:noFill/>
+          <a:ln/>
+        </p:spPr>
+        <p:txBody>
+          <a:bodyPr wrap="square" lIns="0" tIns="0" rIns="0" bIns="0" rtlCol="0" anchor="t"/>
+          <a:lstStyle/>
+          <a:p>
+            <a:pPr algn="l" indent="0" marL="0">
+              <a:lnSpc>
+                <a:spcPts val="2237"/>
+              </a:lnSpc>
+              <a:buNone/>
+            </a:pPr>
+            <a:r>
+              <a:rPr lang="en-US" sz="1575" b="1" dirty="0">
+                <a:solidFill>
+                  <a:srgbClr val="EAE7E0"/>
+                </a:solidFill>
+                <a:latin typeface="Malgun Gothic" pitchFamily="34" charset="0"/>
+                <a:ea typeface="Malgun Gothic" pitchFamily="34" charset="-122"/>
+                <a:cs typeface="Malgun Gothic" pitchFamily="34" charset="-120"/>
+              </a:rPr>
+              <a:t>온도별로 나눠 학습하는 </a:t>
+            </a:r>
+            <a:pPr algn="l" indent="0" marL="0">
+              <a:lnSpc>
+                <a:spcPts val="2237"/>
+              </a:lnSpc>
+              <a:buNone/>
+            </a:pPr>
+            <a:r>
+              <a:rPr lang="en-US" sz="1575" b="1" dirty="0">
+                <a:solidFill>
+                  <a:srgbClr val="EFB13C"/>
+                </a:solidFill>
+                <a:latin typeface="Malgun Gothic" pitchFamily="34" charset="0"/>
+                <a:ea typeface="Malgun Gothic" pitchFamily="34" charset="-122"/>
+                <a:cs typeface="Malgun Gothic" pitchFamily="34" charset="-120"/>
+              </a:rPr>
+              <a:t>보정값</a:t>
+            </a:r>
+            <a:endParaRPr lang="en-US" sz="1575" dirty="0"/>
+          </a:p>
+        </p:txBody>
+      </p:sp>
+      <p:sp>
+        <p:nvSpPr>
+          <p:cNvPr id="26" name="Text 24"/>
+          <p:cNvSpPr txBox="1"/>
+          <p:nvPr/>
+        </p:nvSpPr>
+        <p:spPr>
+          <a:xfrm>
+            <a:off x="838200" y="5257800"/>
+            <a:ext cx="6667500" cy="240030"/>
+          </a:xfrm>
+          <a:prstGeom prst="rect">
+            <a:avLst/>
+          </a:prstGeom>
+          <a:noFill/>
+          <a:ln/>
+        </p:spPr>
+        <p:txBody>
+          <a:bodyPr wrap="square" lIns="0" tIns="0" rIns="0" bIns="0" rtlCol="0" anchor="t"/>
+          <a:lstStyle/>
+          <a:p>
+            <a:pPr algn="l" indent="0" marL="0">
+              <a:lnSpc>
+                <a:spcPts val="1890"/>
+              </a:lnSpc>
+              <a:buNone/>
+            </a:pPr>
+            <a:r>
+              <a:rPr lang="en-US" sz="1125" dirty="0">
+                <a:solidFill>
+                  <a:srgbClr val="BCC9D6"/>
+                </a:solidFill>
+                <a:latin typeface="Malgun Gothic" pitchFamily="34" charset="0"/>
+                <a:ea typeface="Malgun Gothic" pitchFamily="34" charset="-122"/>
+                <a:cs typeface="Malgun Gothic" pitchFamily="34" charset="-120"/>
+              </a:rPr>
+              <a:t>회차가 쌓이면 다시 학습해 값을 갱신합니다. 사람이 정하는 상수는 여기에 없습니다.</a:t>
+            </a:r>
+            <a:endParaRPr lang="en-US" sz="1125" dirty="0"/>
+          </a:p>
+        </p:txBody>
+      </p:sp>
+      <p:sp>
+        <p:nvSpPr>
+          <p:cNvPr id="27" name="Shape 25"/>
+          <p:cNvSpPr/>
+          <p:nvPr/>
+        </p:nvSpPr>
+        <p:spPr>
+          <a:xfrm>
+            <a:off x="8115300" y="2743200"/>
+            <a:ext cx="3390900" cy="19050"/>
+          </a:xfrm>
+          <a:prstGeom prst="rect">
+            <a:avLst/>
+          </a:prstGeom>
+          <a:solidFill>
+            <a:srgbClr val="EFB13C"/>
+          </a:solidFill>
+          <a:ln/>
+        </p:spPr>
+      </p:sp>
+      <p:sp>
+        <p:nvSpPr>
+          <p:cNvPr id="28" name="Text 26"/>
+          <p:cNvSpPr txBox="1"/>
+          <p:nvPr/>
+        </p:nvSpPr>
+        <p:spPr>
+          <a:xfrm>
+            <a:off x="8115300" y="2876550"/>
+            <a:ext cx="3390900" cy="125016"/>
+          </a:xfrm>
+          <a:prstGeom prst="rect">
+            <a:avLst/>
+          </a:prstGeom>
+          <a:noFill/>
+          <a:ln/>
+        </p:spPr>
+        <p:txBody>
+          <a:bodyPr wrap="square" lIns="0" tIns="0" rIns="0" bIns="0" rtlCol="0" anchor="t"/>
+          <a:lstStyle/>
+          <a:p>
+            <a:pPr algn="l" indent="0" marL="0">
+              <a:lnSpc>
+                <a:spcPts val="984"/>
+              </a:lnSpc>
+              <a:buNone/>
+            </a:pPr>
+            <a:r>
+              <a:rPr lang="en-US" sz="788" b="1" spc="150" kern="0" dirty="0">
+                <a:solidFill>
+                  <a:srgbClr val="63798F"/>
+                </a:solidFill>
+                <a:latin typeface="Consolas" pitchFamily="34" charset="0"/>
+                <a:ea typeface="Consolas" pitchFamily="34" charset="-122"/>
+                <a:cs typeface="Consolas" pitchFamily="34" charset="-120"/>
+              </a:rPr>
+              <a:t>최종 신고값</a:t>
+            </a:r>
+            <a:endParaRPr lang="en-US" sz="788" dirty="0"/>
+          </a:p>
+        </p:txBody>
+      </p:sp>
+      <p:sp>
+        <p:nvSpPr>
+          <p:cNvPr id="29" name="Shape 27"/>
+          <p:cNvSpPr/>
+          <p:nvPr/>
+        </p:nvSpPr>
+        <p:spPr>
+          <a:xfrm>
+            <a:off x="8115300" y="3067050"/>
+            <a:ext cx="3390900" cy="914400"/>
+          </a:xfrm>
+          <a:prstGeom prst="rect">
+            <a:avLst/>
+          </a:prstGeom>
+          <a:solidFill>
+            <a:srgbClr val="0A1320"/>
+          </a:solidFill>
+          <a:ln w="12700">
+            <a:solidFill>
+              <a:srgbClr val="182838"/>
+            </a:solidFill>
+            <a:prstDash val="solid"/>
+          </a:ln>
+        </p:spPr>
+      </p:sp>
+      <p:sp>
+        <p:nvSpPr>
+          <p:cNvPr id="30" name="Text 28"/>
+          <p:cNvSpPr txBox="1"/>
+          <p:nvPr/>
+        </p:nvSpPr>
+        <p:spPr>
+          <a:xfrm>
+            <a:off x="8267700" y="3238500"/>
+            <a:ext cx="3086100" cy="200025"/>
+          </a:xfrm>
+          <a:prstGeom prst="rect">
+            <a:avLst/>
+          </a:prstGeom>
+          <a:noFill/>
+          <a:ln/>
+        </p:spPr>
+        <p:txBody>
+          <a:bodyPr wrap="square" lIns="0" tIns="0" rIns="0" bIns="0" rtlCol="0" anchor="t"/>
+          <a:lstStyle/>
+          <a:p>
+            <a:pPr algn="l" indent="0" marL="0">
+              <a:lnSpc>
+                <a:spcPts val="1575"/>
+              </a:lnSpc>
+              <a:buNone/>
+            </a:pPr>
+            <a:r>
+              <a:rPr lang="en-US" sz="1125" dirty="0">
+                <a:solidFill>
+                  <a:srgbClr val="EAE7E0"/>
+                </a:solidFill>
+                <a:latin typeface="Malgun Gothic" pitchFamily="34" charset="0"/>
+                <a:ea typeface="Malgun Gothic" pitchFamily="34" charset="-122"/>
+                <a:cs typeface="Malgun Gothic" pitchFamily="34" charset="-120"/>
+              </a:rPr>
+              <a:t>이론 출력</a:t>
+            </a:r>
+            <a:endParaRPr lang="en-US" sz="1125" dirty="0"/>
+          </a:p>
+        </p:txBody>
+      </p:sp>
+      <p:sp>
+        <p:nvSpPr>
+          <p:cNvPr id="31" name="Text 29"/>
+          <p:cNvSpPr txBox="1"/>
+          <p:nvPr/>
+        </p:nvSpPr>
+        <p:spPr>
+          <a:xfrm>
+            <a:off x="8267700" y="3486150"/>
+            <a:ext cx="3086100" cy="200025"/>
+          </a:xfrm>
+          <a:prstGeom prst="rect">
+            <a:avLst/>
+          </a:prstGeom>
+          <a:noFill/>
+          <a:ln/>
+        </p:spPr>
+        <p:txBody>
+          <a:bodyPr wrap="square" lIns="0" tIns="0" rIns="0" bIns="0" rtlCol="0" anchor="t"/>
+          <a:lstStyle/>
+          <a:p>
+            <a:pPr algn="l" indent="0" marL="0">
+              <a:lnSpc>
+                <a:spcPts val="1575"/>
+              </a:lnSpc>
+              <a:buNone/>
+            </a:pPr>
+            <a:r>
+              <a:rPr lang="en-US" sz="1125" b="1" dirty="0">
+                <a:solidFill>
+                  <a:srgbClr val="EFB13C"/>
+                </a:solidFill>
+                <a:latin typeface="Malgun Gothic" pitchFamily="34" charset="0"/>
+                <a:ea typeface="Malgun Gothic" pitchFamily="34" charset="-122"/>
+                <a:cs typeface="Malgun Gothic" pitchFamily="34" charset="-120"/>
+              </a:rPr>
+              <a:t>+  온도별 보정값</a:t>
+            </a:r>
+            <a:endParaRPr lang="en-US" sz="1125" dirty="0"/>
+          </a:p>
+        </p:txBody>
+      </p:sp>
+      <p:sp>
+        <p:nvSpPr>
+          <p:cNvPr id="32" name="Shape 30"/>
+          <p:cNvSpPr/>
+          <p:nvPr/>
+        </p:nvSpPr>
+        <p:spPr>
+          <a:xfrm>
+            <a:off x="8267700" y="3733800"/>
+            <a:ext cx="3086100" cy="0"/>
           </a:xfrm>
           <a:prstGeom prst="line">
             <a:avLst/>
@@ -18230,6 +24314,500 @@
             <a:prstDash val="solid"/>
           </a:ln>
         </p:spPr>
+      </p:sp>
+      <p:sp>
+        <p:nvSpPr>
+          <p:cNvPr id="33" name="Text 31"/>
+          <p:cNvSpPr txBox="1"/>
+          <p:nvPr/>
+        </p:nvSpPr>
+        <p:spPr>
+          <a:xfrm>
+            <a:off x="8267700" y="3771900"/>
+            <a:ext cx="3086100" cy="200025"/>
+          </a:xfrm>
+          <a:prstGeom prst="rect">
+            <a:avLst/>
+          </a:prstGeom>
+          <a:noFill/>
+          <a:ln/>
+        </p:spPr>
+        <p:txBody>
+          <a:bodyPr wrap="square" lIns="0" tIns="0" rIns="0" bIns="0" rtlCol="0" anchor="t"/>
+          <a:lstStyle/>
+          <a:p>
+            <a:pPr algn="l" indent="0" marL="0">
+              <a:lnSpc>
+                <a:spcPts val="1575"/>
+              </a:lnSpc>
+              <a:buNone/>
+            </a:pPr>
+            <a:r>
+              <a:rPr lang="en-US" sz="1125" dirty="0">
+                <a:solidFill>
+                  <a:srgbClr val="EAE7E0"/>
+                </a:solidFill>
+                <a:latin typeface="Malgun Gothic" pitchFamily="34" charset="0"/>
+                <a:ea typeface="Malgun Gothic" pitchFamily="34" charset="-122"/>
+                <a:cs typeface="Malgun Gothic" pitchFamily="34" charset="-120"/>
+              </a:rPr>
+              <a:t>=  주간 신고값</a:t>
+            </a:r>
+            <a:endParaRPr lang="en-US" sz="1125" dirty="0"/>
+          </a:p>
+        </p:txBody>
+      </p:sp>
+      <p:sp>
+        <p:nvSpPr>
+          <p:cNvPr id="34" name="Text 32"/>
+          <p:cNvSpPr txBox="1"/>
+          <p:nvPr/>
+        </p:nvSpPr>
+        <p:spPr>
+          <a:xfrm>
+            <a:off x="8115300" y="4152900"/>
+            <a:ext cx="3390900" cy="284036"/>
+          </a:xfrm>
+          <a:prstGeom prst="rect">
+            <a:avLst/>
+          </a:prstGeom>
+          <a:noFill/>
+          <a:ln/>
+        </p:spPr>
+        <p:txBody>
+          <a:bodyPr wrap="square" lIns="0" tIns="0" rIns="0" bIns="0" rtlCol="0" anchor="t"/>
+          <a:lstStyle/>
+          <a:p>
+            <a:pPr algn="l" indent="0" marL="0">
+              <a:lnSpc>
+                <a:spcPts val="2237"/>
+              </a:lnSpc>
+              <a:buNone/>
+            </a:pPr>
+            <a:r>
+              <a:rPr lang="en-US" sz="1575" b="1" dirty="0">
+                <a:solidFill>
+                  <a:srgbClr val="EAE7E0"/>
+                </a:solidFill>
+                <a:latin typeface="Malgun Gothic" pitchFamily="34" charset="0"/>
+                <a:ea typeface="Malgun Gothic" pitchFamily="34" charset="-122"/>
+                <a:cs typeface="Malgun Gothic" pitchFamily="34" charset="-120"/>
+              </a:rPr>
+              <a:t>왜 굳이 </a:t>
+            </a:r>
+            <a:pPr algn="l" indent="0" marL="0">
+              <a:lnSpc>
+                <a:spcPts val="2237"/>
+              </a:lnSpc>
+              <a:buNone/>
+            </a:pPr>
+            <a:r>
+              <a:rPr lang="en-US" sz="1575" b="1" dirty="0">
+                <a:solidFill>
+                  <a:srgbClr val="EFB13C"/>
+                </a:solidFill>
+                <a:latin typeface="Malgun Gothic" pitchFamily="34" charset="0"/>
+                <a:ea typeface="Malgun Gothic" pitchFamily="34" charset="-122"/>
+                <a:cs typeface="Malgun Gothic" pitchFamily="34" charset="-120"/>
+              </a:rPr>
+              <a:t>둘로 나눴나</a:t>
+            </a:r>
+            <a:endParaRPr lang="en-US" sz="1575" dirty="0"/>
+          </a:p>
+        </p:txBody>
+      </p:sp>
+      <p:sp>
+        <p:nvSpPr>
+          <p:cNvPr id="35" name="Text 33"/>
+          <p:cNvSpPr txBox="1"/>
+          <p:nvPr/>
+        </p:nvSpPr>
+        <p:spPr>
+          <a:xfrm>
+            <a:off x="8115300" y="4552950"/>
+            <a:ext cx="3390900" cy="180023"/>
+          </a:xfrm>
+          <a:prstGeom prst="rect">
+            <a:avLst/>
+          </a:prstGeom>
+          <a:noFill/>
+          <a:ln/>
+        </p:spPr>
+        <p:txBody>
+          <a:bodyPr wrap="square" lIns="0" tIns="0" rIns="0" bIns="0" rtlCol="0" anchor="t"/>
+          <a:lstStyle/>
+          <a:p>
+            <a:pPr algn="l" indent="0" marL="0">
+              <a:lnSpc>
+                <a:spcPts val="1418"/>
+              </a:lnSpc>
+              <a:buNone/>
+            </a:pPr>
+            <a:r>
+              <a:rPr lang="en-US" sz="1050" b="1" dirty="0">
+                <a:solidFill>
+                  <a:srgbClr val="EAE7E0"/>
+                </a:solidFill>
+                <a:latin typeface="Malgun Gothic" pitchFamily="34" charset="0"/>
+                <a:ea typeface="Malgun Gothic" pitchFamily="34" charset="-122"/>
+                <a:cs typeface="Malgun Gothic" pitchFamily="34" charset="-120"/>
+              </a:rPr>
+              <a:t>· 검증된 이론을 흔들지 않는다</a:t>
+            </a:r>
+            <a:endParaRPr lang="en-US" sz="1050" dirty="0"/>
+          </a:p>
+        </p:txBody>
+      </p:sp>
+      <p:sp>
+        <p:nvSpPr>
+          <p:cNvPr id="36" name="Text 34"/>
+          <p:cNvSpPr txBox="1"/>
+          <p:nvPr/>
+        </p:nvSpPr>
+        <p:spPr>
+          <a:xfrm>
+            <a:off x="8248650" y="4752975"/>
+            <a:ext cx="3257550" cy="160734"/>
+          </a:xfrm>
+          <a:prstGeom prst="rect">
+            <a:avLst/>
+          </a:prstGeom>
+          <a:noFill/>
+          <a:ln/>
+        </p:spPr>
+        <p:txBody>
+          <a:bodyPr wrap="square" lIns="0" tIns="0" rIns="0" bIns="0" rtlCol="0" anchor="t"/>
+          <a:lstStyle/>
+          <a:p>
+            <a:pPr algn="l" indent="0" marL="0">
+              <a:lnSpc>
+                <a:spcPts val="1266"/>
+              </a:lnSpc>
+              <a:buNone/>
+            </a:pPr>
+            <a:r>
+              <a:rPr lang="en-US" sz="938" dirty="0">
+                <a:solidFill>
+                  <a:srgbClr val="93A6BA"/>
+                </a:solidFill>
+                <a:latin typeface="Malgun Gothic" pitchFamily="34" charset="0"/>
+                <a:ea typeface="Malgun Gothic" pitchFamily="34" charset="-122"/>
+                <a:cs typeface="Malgun Gothic" pitchFamily="34" charset="-120"/>
+              </a:rPr>
+              <a:t>이론이 틀렸다는 말을 하지 않아도 된다</a:t>
+            </a:r>
+            <a:endParaRPr lang="en-US" sz="938" dirty="0"/>
+          </a:p>
+        </p:txBody>
+      </p:sp>
+      <p:sp>
+        <p:nvSpPr>
+          <p:cNvPr id="37" name="Text 35"/>
+          <p:cNvSpPr txBox="1"/>
+          <p:nvPr/>
+        </p:nvSpPr>
+        <p:spPr>
+          <a:xfrm>
+            <a:off x="8115300" y="5010150"/>
+            <a:ext cx="3390900" cy="180023"/>
+          </a:xfrm>
+          <a:prstGeom prst="rect">
+            <a:avLst/>
+          </a:prstGeom>
+          <a:noFill/>
+          <a:ln/>
+        </p:spPr>
+        <p:txBody>
+          <a:bodyPr wrap="square" lIns="0" tIns="0" rIns="0" bIns="0" rtlCol="0" anchor="t"/>
+          <a:lstStyle/>
+          <a:p>
+            <a:pPr algn="l" indent="0" marL="0">
+              <a:lnSpc>
+                <a:spcPts val="1418"/>
+              </a:lnSpc>
+              <a:buNone/>
+            </a:pPr>
+            <a:r>
+              <a:rPr lang="en-US" sz="1050" b="1" dirty="0">
+                <a:solidFill>
+                  <a:srgbClr val="EAE7E0"/>
+                </a:solidFill>
+                <a:latin typeface="Malgun Gothic" pitchFamily="34" charset="0"/>
+                <a:ea typeface="Malgun Gothic" pitchFamily="34" charset="-122"/>
+                <a:cs typeface="Malgun Gothic" pitchFamily="34" charset="-120"/>
+              </a:rPr>
+              <a:t>· 틀린 원인을 찾을 수 있다</a:t>
+            </a:r>
+            <a:endParaRPr lang="en-US" sz="1050" dirty="0"/>
+          </a:p>
+        </p:txBody>
+      </p:sp>
+      <p:sp>
+        <p:nvSpPr>
+          <p:cNvPr id="38" name="Text 36"/>
+          <p:cNvSpPr txBox="1"/>
+          <p:nvPr/>
+        </p:nvSpPr>
+        <p:spPr>
+          <a:xfrm>
+            <a:off x="8248650" y="5210175"/>
+            <a:ext cx="3257550" cy="160734"/>
+          </a:xfrm>
+          <a:prstGeom prst="rect">
+            <a:avLst/>
+          </a:prstGeom>
+          <a:noFill/>
+          <a:ln/>
+        </p:spPr>
+        <p:txBody>
+          <a:bodyPr wrap="square" lIns="0" tIns="0" rIns="0" bIns="0" rtlCol="0" anchor="t"/>
+          <a:lstStyle/>
+          <a:p>
+            <a:pPr algn="l" indent="0" marL="0">
+              <a:lnSpc>
+                <a:spcPts val="1266"/>
+              </a:lnSpc>
+              <a:buNone/>
+            </a:pPr>
+            <a:r>
+              <a:rPr lang="en-US" sz="938" dirty="0">
+                <a:solidFill>
+                  <a:srgbClr val="93A6BA"/>
+                </a:solidFill>
+                <a:latin typeface="Malgun Gothic" pitchFamily="34" charset="0"/>
+                <a:ea typeface="Malgun Gothic" pitchFamily="34" charset="-122"/>
+                <a:cs typeface="Malgun Gothic" pitchFamily="34" charset="-120"/>
+              </a:rPr>
+              <a:t>이론 문제인지 보정 문제인지 갈린다</a:t>
+            </a:r>
+            <a:endParaRPr lang="en-US" sz="938" dirty="0"/>
+          </a:p>
+        </p:txBody>
+      </p:sp>
+      <p:sp>
+        <p:nvSpPr>
+          <p:cNvPr id="39" name="Text 37"/>
+          <p:cNvSpPr txBox="1"/>
+          <p:nvPr/>
+        </p:nvSpPr>
+        <p:spPr>
+          <a:xfrm>
+            <a:off x="8115300" y="5467350"/>
+            <a:ext cx="3390900" cy="180023"/>
+          </a:xfrm>
+          <a:prstGeom prst="rect">
+            <a:avLst/>
+          </a:prstGeom>
+          <a:noFill/>
+          <a:ln/>
+        </p:spPr>
+        <p:txBody>
+          <a:bodyPr wrap="square" lIns="0" tIns="0" rIns="0" bIns="0" rtlCol="0" anchor="t"/>
+          <a:lstStyle/>
+          <a:p>
+            <a:pPr algn="l" indent="0" marL="0">
+              <a:lnSpc>
+                <a:spcPts val="1418"/>
+              </a:lnSpc>
+              <a:buNone/>
+            </a:pPr>
+            <a:r>
+              <a:rPr lang="en-US" sz="1050" b="1" dirty="0">
+                <a:solidFill>
+                  <a:srgbClr val="EAE7E0"/>
+                </a:solidFill>
+                <a:latin typeface="Malgun Gothic" pitchFamily="34" charset="0"/>
+                <a:ea typeface="Malgun Gothic" pitchFamily="34" charset="-122"/>
+                <a:cs typeface="Malgun Gothic" pitchFamily="34" charset="-120"/>
+              </a:rPr>
+              <a:t>· 다른 사업소에 옮길 수 있다</a:t>
+            </a:r>
+            <a:endParaRPr lang="en-US" sz="1050" dirty="0"/>
+          </a:p>
+        </p:txBody>
+      </p:sp>
+      <p:sp>
+        <p:nvSpPr>
+          <p:cNvPr id="40" name="Text 38"/>
+          <p:cNvSpPr txBox="1"/>
+          <p:nvPr/>
+        </p:nvSpPr>
+        <p:spPr>
+          <a:xfrm>
+            <a:off x="8248650" y="5667375"/>
+            <a:ext cx="3257550" cy="160734"/>
+          </a:xfrm>
+          <a:prstGeom prst="rect">
+            <a:avLst/>
+          </a:prstGeom>
+          <a:noFill/>
+          <a:ln/>
+        </p:spPr>
+        <p:txBody>
+          <a:bodyPr wrap="square" lIns="0" tIns="0" rIns="0" bIns="0" rtlCol="0" anchor="t"/>
+          <a:lstStyle/>
+          <a:p>
+            <a:pPr algn="l" indent="0" marL="0">
+              <a:lnSpc>
+                <a:spcPts val="1266"/>
+              </a:lnSpc>
+              <a:buNone/>
+            </a:pPr>
+            <a:r>
+              <a:rPr lang="en-US" sz="938" dirty="0">
+                <a:solidFill>
+                  <a:srgbClr val="93A6BA"/>
+                </a:solidFill>
+                <a:latin typeface="Malgun Gothic" pitchFamily="34" charset="0"/>
+                <a:ea typeface="Malgun Gothic" pitchFamily="34" charset="-122"/>
+                <a:cs typeface="Malgun Gothic" pitchFamily="34" charset="-120"/>
+              </a:rPr>
+              <a:t>이론만 갈아끼우면 2층은 그대로다</a:t>
+            </a:r>
+            <a:endParaRPr lang="en-US" sz="938" dirty="0"/>
+          </a:p>
+        </p:txBody>
+      </p:sp>
+      <p:sp>
+        <p:nvSpPr>
+          <p:cNvPr id="41" name="Shape 39"/>
+          <p:cNvSpPr/>
+          <p:nvPr/>
+        </p:nvSpPr>
+        <p:spPr>
+          <a:xfrm>
+            <a:off x="685800" y="6057900"/>
+            <a:ext cx="10820400" cy="0"/>
+          </a:xfrm>
+          <a:prstGeom prst="line">
+            <a:avLst/>
+          </a:prstGeom>
+          <a:noFill/>
+          <a:ln w="12700">
+            <a:solidFill>
+              <a:srgbClr val="22354A"/>
+            </a:solidFill>
+            <a:prstDash val="solid"/>
+          </a:ln>
+        </p:spPr>
+      </p:sp>
+      <p:sp>
+        <p:nvSpPr>
+          <p:cNvPr id="42" name="Text 40"/>
+          <p:cNvSpPr txBox="1"/>
+          <p:nvPr/>
+        </p:nvSpPr>
+        <p:spPr>
+          <a:xfrm>
+            <a:off x="685800" y="6267450"/>
+            <a:ext cx="476250" cy="120015"/>
+          </a:xfrm>
+          <a:prstGeom prst="rect">
+            <a:avLst/>
+          </a:prstGeom>
+          <a:noFill/>
+          <a:ln/>
+        </p:spPr>
+        <p:txBody>
+          <a:bodyPr wrap="square" lIns="0" tIns="0" rIns="0" bIns="0" rtlCol="0" anchor="t"/>
+          <a:lstStyle/>
+          <a:p>
+            <a:pPr algn="l" indent="0" marL="0">
+              <a:lnSpc>
+                <a:spcPts val="945"/>
+              </a:lnSpc>
+              <a:buNone/>
+            </a:pPr>
+            <a:r>
+              <a:rPr lang="en-US" sz="788" b="1" spc="180" kern="0" dirty="0">
+                <a:solidFill>
+                  <a:srgbClr val="EFB13C"/>
+                </a:solidFill>
+                <a:latin typeface="Consolas" pitchFamily="34" charset="0"/>
+                <a:ea typeface="Consolas" pitchFamily="34" charset="-122"/>
+                <a:cs typeface="Consolas" pitchFamily="34" charset="-120"/>
+              </a:rPr>
+              <a:t>결론</a:t>
+            </a:r>
+            <a:endParaRPr lang="en-US" sz="788" dirty="0"/>
+          </a:p>
+        </p:txBody>
+      </p:sp>
+      <p:sp>
+        <p:nvSpPr>
+          <p:cNvPr id="43" name="Text 41"/>
+          <p:cNvSpPr txBox="1"/>
+          <p:nvPr/>
+        </p:nvSpPr>
+        <p:spPr>
+          <a:xfrm>
+            <a:off x="1219200" y="6229350"/>
+            <a:ext cx="10287000" cy="220027"/>
+          </a:xfrm>
+          <a:prstGeom prst="rect">
+            <a:avLst/>
+          </a:prstGeom>
+          <a:noFill/>
+          <a:ln/>
+        </p:spPr>
+        <p:txBody>
+          <a:bodyPr wrap="square" lIns="0" tIns="0" rIns="0" bIns="0" rtlCol="0" anchor="t"/>
+          <a:lstStyle/>
+          <a:p>
+            <a:pPr algn="l" indent="0" marL="0">
+              <a:lnSpc>
+                <a:spcPts val="1733"/>
+              </a:lnSpc>
+              <a:buNone/>
+            </a:pPr>
+            <a:r>
+              <a:rPr lang="en-US" sz="1238" dirty="0">
+                <a:solidFill>
+                  <a:srgbClr val="BCC9D6"/>
+                </a:solidFill>
+                <a:latin typeface="Malgun Gothic" pitchFamily="34" charset="0"/>
+                <a:ea typeface="Malgun Gothic" pitchFamily="34" charset="-122"/>
+                <a:cs typeface="Malgun Gothic" pitchFamily="34" charset="-120"/>
+              </a:rPr>
+              <a:t>이론은 그대로 두고 </a:t>
+            </a:r>
+            <a:pPr algn="l" indent="0" marL="0">
+              <a:lnSpc>
+                <a:spcPts val="1733"/>
+              </a:lnSpc>
+              <a:buNone/>
+            </a:pPr>
+            <a:r>
+              <a:rPr lang="en-US" sz="1238" b="1" dirty="0">
+                <a:solidFill>
+                  <a:srgbClr val="EFB13C"/>
+                </a:solidFill>
+                <a:latin typeface="Malgun Gothic" pitchFamily="34" charset="0"/>
+                <a:ea typeface="Malgun Gothic" pitchFamily="34" charset="-122"/>
+                <a:cs typeface="Malgun Gothic" pitchFamily="34" charset="-120"/>
+              </a:rPr>
+              <a:t>차이만 배웁니다</a:t>
+            </a:r>
+            <a:pPr algn="l" indent="0" marL="0">
+              <a:lnSpc>
+                <a:spcPts val="1733"/>
+              </a:lnSpc>
+              <a:buNone/>
+            </a:pPr>
+            <a:r>
+              <a:rPr lang="en-US" sz="1238" dirty="0">
+                <a:solidFill>
+                  <a:srgbClr val="BCC9D6"/>
+                </a:solidFill>
+                <a:latin typeface="Malgun Gothic" pitchFamily="34" charset="0"/>
+                <a:ea typeface="Malgun Gothic" pitchFamily="34" charset="-122"/>
+                <a:cs typeface="Malgun Gothic" pitchFamily="34" charset="-120"/>
+              </a:rPr>
+              <a:t> — 그래서 다른 사업소로 옮길 수 있습니다.</a:t>
+            </a:r>
+            <a:endParaRPr lang="en-US" sz="1238" dirty="0"/>
+          </a:p>
+        </p:txBody>
       </p:sp>
     </p:spTree>
   </p:cSld>
@@ -18494,26 +25072,26 @@
         <p:spPr>
           <a:xfrm>
             <a:off x="685800" y="914400"/>
-            <a:ext cx="10287000" cy="360045"/>
-          </a:xfrm>
-          <a:prstGeom prst="rect">
-            <a:avLst/>
-          </a:prstGeom>
-          <a:noFill/>
-          <a:ln/>
-        </p:spPr>
-        <p:txBody>
-          <a:bodyPr wrap="square" lIns="0" tIns="0" rIns="0" bIns="0" rtlCol="0" anchor="t"/>
-          <a:lstStyle/>
-          <a:p>
-            <a:pPr algn="l" indent="0" marL="0">
-              <a:lnSpc>
-                <a:spcPts val="2835"/>
-              </a:lnSpc>
-              <a:buNone/>
-            </a:pPr>
-            <a:r>
-              <a:rPr lang="en-US" sz="2250" b="1" dirty="0">
+            <a:ext cx="10287000" cy="888111"/>
+          </a:xfrm>
+          <a:prstGeom prst="rect">
+            <a:avLst/>
+          </a:prstGeom>
+          <a:noFill/>
+          <a:ln/>
+        </p:spPr>
+        <p:txBody>
+          <a:bodyPr wrap="square" lIns="0" tIns="0" rIns="0" bIns="0" rtlCol="0" anchor="t"/>
+          <a:lstStyle/>
+          <a:p>
+            <a:pPr algn="l" indent="0" marL="0">
+              <a:lnSpc>
+                <a:spcPts val="3496"/>
+              </a:lnSpc>
+              <a:buNone/>
+            </a:pPr>
+            <a:r>
+              <a:rPr lang="en-US" sz="2775" b="1" dirty="0">
                 <a:solidFill>
                   <a:srgbClr val="EAE7E0"/>
                 </a:solidFill>
@@ -18521,22 +25099,197 @@
                 <a:ea typeface="Malgun Gothic" pitchFamily="34" charset="-122"/>
                 <a:cs typeface="Malgun Gothic" pitchFamily="34" charset="-120"/>
               </a:rPr>
-              <a:t>36건이라는 제약을 이렇게 넘었습니다</a:t>
-            </a:r>
-            <a:endParaRPr lang="en-US" sz="2250" dirty="0"/>
-          </a:p>
-        </p:txBody>
-      </p:sp>
-      <p:sp>
-        <p:nvSpPr>
-          <p:cNvPr id="12" name="Shape 10"/>
-          <p:cNvSpPr/>
-          <p:nvPr/>
-        </p:nvSpPr>
-        <p:spPr>
-          <a:xfrm>
-            <a:off x="685800" y="2857500"/>
-            <a:ext cx="10820400" cy="2095500"/>
+              <a:t>데이터가 36건뿐이라는 제약을,</a:t>
+            </a:r>
+            <a:endParaRPr lang="en-US" sz="2775" dirty="0"/>
+          </a:p>
+          <a:p>
+            <a:pPr algn="l" indent="0" marL="0">
+              <a:lnSpc>
+                <a:spcPts val="3496"/>
+              </a:lnSpc>
+              <a:buNone/>
+            </a:pPr>
+            <a:r>
+              <a:rPr lang="en-US" sz="2775" b="1" dirty="0">
+                <a:solidFill>
+                  <a:srgbClr val="EFB13C"/>
+                </a:solidFill>
+                <a:latin typeface="Malgun Gothic" pitchFamily="34" charset="0"/>
+                <a:ea typeface="Malgun Gothic" pitchFamily="34" charset="-122"/>
+                <a:cs typeface="Malgun Gothic" pitchFamily="34" charset="-120"/>
+              </a:rPr>
+              <a:t>검증 설계</a:t>
+            </a:r>
+            <a:pPr algn="l" indent="0" marL="0">
+              <a:lnSpc>
+                <a:spcPts val="3496"/>
+              </a:lnSpc>
+              <a:buNone/>
+            </a:pPr>
+            <a:r>
+              <a:rPr lang="en-US" sz="2775" b="1" dirty="0">
+                <a:solidFill>
+                  <a:srgbClr val="EAE7E0"/>
+                </a:solidFill>
+                <a:latin typeface="Malgun Gothic" pitchFamily="34" charset="0"/>
+                <a:ea typeface="Malgun Gothic" pitchFamily="34" charset="-122"/>
+                <a:cs typeface="Malgun Gothic" pitchFamily="34" charset="-120"/>
+              </a:rPr>
+              <a:t>로 넘었습니다</a:t>
+            </a:r>
+            <a:endParaRPr lang="en-US" sz="2775" dirty="0"/>
+          </a:p>
+        </p:txBody>
+      </p:sp>
+      <p:sp>
+        <p:nvSpPr>
+          <p:cNvPr id="12" name="Text 10"/>
+          <p:cNvSpPr txBox="1"/>
+          <p:nvPr/>
+        </p:nvSpPr>
+        <p:spPr>
+          <a:xfrm>
+            <a:off x="685800" y="2000250"/>
+            <a:ext cx="10287000" cy="569214"/>
+          </a:xfrm>
+          <a:prstGeom prst="rect">
+            <a:avLst/>
+          </a:prstGeom>
+          <a:noFill/>
+          <a:ln/>
+        </p:spPr>
+        <p:txBody>
+          <a:bodyPr wrap="square" lIns="0" tIns="0" rIns="0" bIns="0" rtlCol="0" anchor="t"/>
+          <a:lstStyle/>
+          <a:p>
+            <a:pPr algn="l" indent="0" marL="0">
+              <a:lnSpc>
+                <a:spcPts val="2241"/>
+              </a:lnSpc>
+              <a:buNone/>
+            </a:pPr>
+            <a:r>
+              <a:rPr lang="en-US" sz="1350" dirty="0">
+                <a:solidFill>
+                  <a:srgbClr val="BCC9D6"/>
+                </a:solidFill>
+                <a:latin typeface="Malgun Gothic" pitchFamily="34" charset="0"/>
+                <a:ea typeface="Malgun Gothic" pitchFamily="34" charset="-122"/>
+                <a:cs typeface="Malgun Gothic" pitchFamily="34" charset="-120"/>
+              </a:rPr>
+              <a:t>온도 구간마다 건수가 고르지 않습니다. 가장 빈약한 구간은 </a:t>
+            </a:r>
+            <a:pPr algn="l" indent="0" marL="0">
+              <a:lnSpc>
+                <a:spcPts val="2241"/>
+              </a:lnSpc>
+              <a:buNone/>
+            </a:pPr>
+            <a:r>
+              <a:rPr lang="en-US" sz="1350" b="1" dirty="0">
+                <a:solidFill>
+                  <a:srgbClr val="EAE7E0"/>
+                </a:solidFill>
+                <a:latin typeface="Malgun Gothic" pitchFamily="34" charset="0"/>
+                <a:ea typeface="Malgun Gothic" pitchFamily="34" charset="-122"/>
+                <a:cs typeface="Malgun Gothic" pitchFamily="34" charset="-120"/>
+              </a:rPr>
+              <a:t>1건</a:t>
+            </a:r>
+            <a:pPr algn="l" indent="0" marL="0">
+              <a:lnSpc>
+                <a:spcPts val="2241"/>
+              </a:lnSpc>
+              <a:buNone/>
+            </a:pPr>
+            <a:r>
+              <a:rPr lang="en-US" sz="1350" dirty="0">
+                <a:solidFill>
+                  <a:srgbClr val="BCC9D6"/>
+                </a:solidFill>
+                <a:latin typeface="Malgun Gothic" pitchFamily="34" charset="0"/>
+                <a:ea typeface="Malgun Gothic" pitchFamily="34" charset="-122"/>
+                <a:cs typeface="Malgun Gothic" pitchFamily="34" charset="-120"/>
+              </a:rPr>
+              <a:t> 입니다. 적은 데이터로 과신하지 않도록 검증 방식을 먼저 정했습니다.</a:t>
+            </a:r>
+            <a:endParaRPr lang="en-US" sz="1350" dirty="0"/>
+          </a:p>
+        </p:txBody>
+      </p:sp>
+      <p:sp>
+        <p:nvSpPr>
+          <p:cNvPr id="13" name="Shape 11"/>
+          <p:cNvSpPr/>
+          <p:nvPr/>
+        </p:nvSpPr>
+        <p:spPr>
+          <a:xfrm>
+            <a:off x="685800" y="2743200"/>
+            <a:ext cx="5676900" cy="19050"/>
+          </a:xfrm>
+          <a:prstGeom prst="rect">
+            <a:avLst/>
+          </a:prstGeom>
+          <a:solidFill>
+            <a:srgbClr val="7E2333"/>
+          </a:solidFill>
+          <a:ln/>
+        </p:spPr>
+      </p:sp>
+      <p:sp>
+        <p:nvSpPr>
+          <p:cNvPr id="14" name="Text 12"/>
+          <p:cNvSpPr txBox="1"/>
+          <p:nvPr/>
+        </p:nvSpPr>
+        <p:spPr>
+          <a:xfrm>
+            <a:off x="685800" y="2876550"/>
+            <a:ext cx="5676900" cy="125016"/>
+          </a:xfrm>
+          <a:prstGeom prst="rect">
+            <a:avLst/>
+          </a:prstGeom>
+          <a:noFill/>
+          <a:ln/>
+        </p:spPr>
+        <p:txBody>
+          <a:bodyPr wrap="square" lIns="0" tIns="0" rIns="0" bIns="0" rtlCol="0" anchor="t"/>
+          <a:lstStyle/>
+          <a:p>
+            <a:pPr algn="l" indent="0" marL="0">
+              <a:lnSpc>
+                <a:spcPts val="984"/>
+              </a:lnSpc>
+              <a:buNone/>
+            </a:pPr>
+            <a:r>
+              <a:rPr lang="en-US" sz="788" b="1" spc="150" kern="0" dirty="0">
+                <a:solidFill>
+                  <a:srgbClr val="63798F"/>
+                </a:solidFill>
+                <a:latin typeface="Consolas" pitchFamily="34" charset="0"/>
+                <a:ea typeface="Consolas" pitchFamily="34" charset="-122"/>
+                <a:cs typeface="Consolas" pitchFamily="34" charset="-120"/>
+              </a:rPr>
+              <a:t>온도 구간별 회차 수  ·  누적 36회차</a:t>
+            </a:r>
+            <a:endParaRPr lang="en-US" sz="788" dirty="0"/>
+          </a:p>
+        </p:txBody>
+      </p:sp>
+      <p:sp>
+        <p:nvSpPr>
+          <p:cNvPr id="15" name="Shape 13"/>
+          <p:cNvSpPr/>
+          <p:nvPr/>
+        </p:nvSpPr>
+        <p:spPr>
+          <a:xfrm>
+            <a:off x="685800" y="3067050"/>
+            <a:ext cx="5676900" cy="2381250"/>
           </a:xfrm>
           <a:prstGeom prst="rect">
             <a:avLst/>
@@ -18544,66 +25297,727 @@
           <a:solidFill>
             <a:srgbClr val="0A1320"/>
           </a:solidFill>
-          <a:ln w="19050">
+          <a:ln w="12700">
             <a:solidFill>
-              <a:srgbClr val="22354A"/>
+              <a:srgbClr val="182838"/>
             </a:solidFill>
-            <a:prstDash val="dash"/>
+            <a:prstDash val="solid"/>
           </a:ln>
         </p:spPr>
       </p:sp>
       <p:sp>
         <p:nvSpPr>
-          <p:cNvPr id="13" name="Text 11"/>
-          <p:cNvSpPr txBox="1"/>
-          <p:nvPr/>
-        </p:nvSpPr>
-        <p:spPr>
-          <a:xfrm>
-            <a:off x="685800" y="3695700"/>
-            <a:ext cx="10820400" cy="226695"/>
-          </a:xfrm>
-          <a:prstGeom prst="rect">
-            <a:avLst/>
-          </a:prstGeom>
-          <a:noFill/>
-          <a:ln/>
-        </p:spPr>
-        <p:txBody>
-          <a:bodyPr wrap="square" lIns="0" tIns="0" rIns="0" bIns="0" rtlCol="0" anchor="t"/>
-          <a:lstStyle/>
-          <a:p>
-            <a:pPr algn="ctr" indent="0" marL="0">
-              <a:lnSpc>
-                <a:spcPts val="1785"/>
-              </a:lnSpc>
-              <a:buNone/>
-            </a:pPr>
-            <a:r>
-              <a:rPr lang="en-US" sz="1275" dirty="0">
-                <a:solidFill>
-                  <a:srgbClr val="63798F"/>
+          <p:cNvPr id="16" name="Text 14"/>
+          <p:cNvSpPr txBox="1"/>
+          <p:nvPr/>
+        </p:nvSpPr>
+        <p:spPr>
+          <a:xfrm>
+            <a:off x="838200" y="3257550"/>
+            <a:ext cx="876300" cy="154781"/>
+          </a:xfrm>
+          <a:prstGeom prst="rect">
+            <a:avLst/>
+          </a:prstGeom>
+          <a:noFill/>
+          <a:ln/>
+        </p:spPr>
+        <p:txBody>
+          <a:bodyPr wrap="square" lIns="0" tIns="0" rIns="0" bIns="0" rtlCol="0" anchor="t"/>
+          <a:lstStyle/>
+          <a:p>
+            <a:pPr algn="l" indent="0" marL="0">
+              <a:lnSpc>
+                <a:spcPts val="1219"/>
+              </a:lnSpc>
+              <a:buNone/>
+            </a:pPr>
+            <a:r>
+              <a:rPr lang="en-US" sz="938" dirty="0">
+                <a:solidFill>
+                  <a:srgbClr val="93A6BA"/>
+                </a:solidFill>
+                <a:latin typeface="Consolas" pitchFamily="34" charset="0"/>
+                <a:ea typeface="Consolas" pitchFamily="34" charset="-122"/>
+                <a:cs typeface="Consolas" pitchFamily="34" charset="-120"/>
+              </a:rPr>
+              <a:t>0 ~ 10℃</a:t>
+            </a:r>
+            <a:endParaRPr lang="en-US" sz="938" dirty="0"/>
+          </a:p>
+        </p:txBody>
+      </p:sp>
+      <p:sp>
+        <p:nvSpPr>
+          <p:cNvPr id="17" name="Shape 15"/>
+          <p:cNvSpPr/>
+          <p:nvPr/>
+        </p:nvSpPr>
+        <p:spPr>
+          <a:xfrm>
+            <a:off x="1828800" y="3238500"/>
+            <a:ext cx="2066925" cy="190500"/>
+          </a:xfrm>
+          <a:prstGeom prst="rect">
+            <a:avLst/>
+          </a:prstGeom>
+          <a:solidFill>
+            <a:srgbClr val="5E7793"/>
+          </a:solidFill>
+          <a:ln/>
+        </p:spPr>
+      </p:sp>
+      <p:sp>
+        <p:nvSpPr>
+          <p:cNvPr id="18" name="Text 16"/>
+          <p:cNvSpPr txBox="1"/>
+          <p:nvPr/>
+        </p:nvSpPr>
+        <p:spPr>
+          <a:xfrm>
+            <a:off x="3971925" y="3267075"/>
+            <a:ext cx="571500" cy="148590"/>
+          </a:xfrm>
+          <a:prstGeom prst="rect">
+            <a:avLst/>
+          </a:prstGeom>
+          <a:noFill/>
+          <a:ln/>
+        </p:spPr>
+        <p:txBody>
+          <a:bodyPr wrap="square" lIns="0" tIns="0" rIns="0" bIns="0" rtlCol="0" anchor="t"/>
+          <a:lstStyle/>
+          <a:p>
+            <a:pPr algn="l" indent="0" marL="0">
+              <a:lnSpc>
+                <a:spcPts val="1170"/>
+              </a:lnSpc>
+              <a:buNone/>
+            </a:pPr>
+            <a:r>
+              <a:rPr lang="en-US" sz="975" b="1" dirty="0">
+                <a:solidFill>
+                  <a:srgbClr val="BCC9D6"/>
+                </a:solidFill>
+                <a:latin typeface="Consolas" pitchFamily="34" charset="0"/>
+                <a:ea typeface="Consolas" pitchFamily="34" charset="-122"/>
+                <a:cs typeface="Consolas" pitchFamily="34" charset="-120"/>
+              </a:rPr>
+              <a:t>7건</a:t>
+            </a:r>
+            <a:endParaRPr lang="en-US" sz="975" dirty="0"/>
+          </a:p>
+        </p:txBody>
+      </p:sp>
+      <p:sp>
+        <p:nvSpPr>
+          <p:cNvPr id="19" name="Text 17"/>
+          <p:cNvSpPr txBox="1"/>
+          <p:nvPr/>
+        </p:nvSpPr>
+        <p:spPr>
+          <a:xfrm>
+            <a:off x="838200" y="3600450"/>
+            <a:ext cx="876300" cy="154781"/>
+          </a:xfrm>
+          <a:prstGeom prst="rect">
+            <a:avLst/>
+          </a:prstGeom>
+          <a:noFill/>
+          <a:ln/>
+        </p:spPr>
+        <p:txBody>
+          <a:bodyPr wrap="square" lIns="0" tIns="0" rIns="0" bIns="0" rtlCol="0" anchor="t"/>
+          <a:lstStyle/>
+          <a:p>
+            <a:pPr algn="l" indent="0" marL="0">
+              <a:lnSpc>
+                <a:spcPts val="1219"/>
+              </a:lnSpc>
+              <a:buNone/>
+            </a:pPr>
+            <a:r>
+              <a:rPr lang="en-US" sz="938" dirty="0">
+                <a:solidFill>
+                  <a:srgbClr val="93A6BA"/>
+                </a:solidFill>
+                <a:latin typeface="Consolas" pitchFamily="34" charset="0"/>
+                <a:ea typeface="Consolas" pitchFamily="34" charset="-122"/>
+                <a:cs typeface="Consolas" pitchFamily="34" charset="-120"/>
+              </a:rPr>
+              <a:t>10 ~ 15℃</a:t>
+            </a:r>
+            <a:endParaRPr lang="en-US" sz="938" dirty="0"/>
+          </a:p>
+        </p:txBody>
+      </p:sp>
+      <p:sp>
+        <p:nvSpPr>
+          <p:cNvPr id="20" name="Shape 18"/>
+          <p:cNvSpPr/>
+          <p:nvPr/>
+        </p:nvSpPr>
+        <p:spPr>
+          <a:xfrm>
+            <a:off x="1828800" y="3581400"/>
+            <a:ext cx="1771650" cy="190500"/>
+          </a:xfrm>
+          <a:prstGeom prst="rect">
+            <a:avLst/>
+          </a:prstGeom>
+          <a:solidFill>
+            <a:srgbClr val="5E7793"/>
+          </a:solidFill>
+          <a:ln/>
+        </p:spPr>
+      </p:sp>
+      <p:sp>
+        <p:nvSpPr>
+          <p:cNvPr id="21" name="Text 19"/>
+          <p:cNvSpPr txBox="1"/>
+          <p:nvPr/>
+        </p:nvSpPr>
+        <p:spPr>
+          <a:xfrm>
+            <a:off x="3676650" y="3609975"/>
+            <a:ext cx="571500" cy="148590"/>
+          </a:xfrm>
+          <a:prstGeom prst="rect">
+            <a:avLst/>
+          </a:prstGeom>
+          <a:noFill/>
+          <a:ln/>
+        </p:spPr>
+        <p:txBody>
+          <a:bodyPr wrap="square" lIns="0" tIns="0" rIns="0" bIns="0" rtlCol="0" anchor="t"/>
+          <a:lstStyle/>
+          <a:p>
+            <a:pPr algn="l" indent="0" marL="0">
+              <a:lnSpc>
+                <a:spcPts val="1170"/>
+              </a:lnSpc>
+              <a:buNone/>
+            </a:pPr>
+            <a:r>
+              <a:rPr lang="en-US" sz="975" b="1" dirty="0">
+                <a:solidFill>
+                  <a:srgbClr val="BCC9D6"/>
+                </a:solidFill>
+                <a:latin typeface="Consolas" pitchFamily="34" charset="0"/>
+                <a:ea typeface="Consolas" pitchFamily="34" charset="-122"/>
+                <a:cs typeface="Consolas" pitchFamily="34" charset="-120"/>
+              </a:rPr>
+              <a:t>6건</a:t>
+            </a:r>
+            <a:endParaRPr lang="en-US" sz="975" dirty="0"/>
+          </a:p>
+        </p:txBody>
+      </p:sp>
+      <p:sp>
+        <p:nvSpPr>
+          <p:cNvPr id="22" name="Text 20"/>
+          <p:cNvSpPr txBox="1"/>
+          <p:nvPr/>
+        </p:nvSpPr>
+        <p:spPr>
+          <a:xfrm>
+            <a:off x="838200" y="3943350"/>
+            <a:ext cx="876300" cy="154781"/>
+          </a:xfrm>
+          <a:prstGeom prst="rect">
+            <a:avLst/>
+          </a:prstGeom>
+          <a:noFill/>
+          <a:ln/>
+        </p:spPr>
+        <p:txBody>
+          <a:bodyPr wrap="square" lIns="0" tIns="0" rIns="0" bIns="0" rtlCol="0" anchor="t"/>
+          <a:lstStyle/>
+          <a:p>
+            <a:pPr algn="l" indent="0" marL="0">
+              <a:lnSpc>
+                <a:spcPts val="1219"/>
+              </a:lnSpc>
+              <a:buNone/>
+            </a:pPr>
+            <a:r>
+              <a:rPr lang="en-US" sz="938" dirty="0">
+                <a:solidFill>
+                  <a:srgbClr val="93A6BA"/>
+                </a:solidFill>
+                <a:latin typeface="Consolas" pitchFamily="34" charset="0"/>
+                <a:ea typeface="Consolas" pitchFamily="34" charset="-122"/>
+                <a:cs typeface="Consolas" pitchFamily="34" charset="-120"/>
+              </a:rPr>
+              <a:t>15 ~ 20℃</a:t>
+            </a:r>
+            <a:endParaRPr lang="en-US" sz="938" dirty="0"/>
+          </a:p>
+        </p:txBody>
+      </p:sp>
+      <p:sp>
+        <p:nvSpPr>
+          <p:cNvPr id="23" name="Shape 21"/>
+          <p:cNvSpPr/>
+          <p:nvPr/>
+        </p:nvSpPr>
+        <p:spPr>
+          <a:xfrm>
+            <a:off x="1828800" y="3924300"/>
+            <a:ext cx="885825" cy="190500"/>
+          </a:xfrm>
+          <a:prstGeom prst="rect">
+            <a:avLst/>
+          </a:prstGeom>
+          <a:solidFill>
+            <a:srgbClr val="5E7793"/>
+          </a:solidFill>
+          <a:ln/>
+        </p:spPr>
+      </p:sp>
+      <p:sp>
+        <p:nvSpPr>
+          <p:cNvPr id="24" name="Text 22"/>
+          <p:cNvSpPr txBox="1"/>
+          <p:nvPr/>
+        </p:nvSpPr>
+        <p:spPr>
+          <a:xfrm>
+            <a:off x="2790825" y="3952875"/>
+            <a:ext cx="571500" cy="148590"/>
+          </a:xfrm>
+          <a:prstGeom prst="rect">
+            <a:avLst/>
+          </a:prstGeom>
+          <a:noFill/>
+          <a:ln/>
+        </p:spPr>
+        <p:txBody>
+          <a:bodyPr wrap="square" lIns="0" tIns="0" rIns="0" bIns="0" rtlCol="0" anchor="t"/>
+          <a:lstStyle/>
+          <a:p>
+            <a:pPr algn="l" indent="0" marL="0">
+              <a:lnSpc>
+                <a:spcPts val="1170"/>
+              </a:lnSpc>
+              <a:buNone/>
+            </a:pPr>
+            <a:r>
+              <a:rPr lang="en-US" sz="975" b="1" dirty="0">
+                <a:solidFill>
+                  <a:srgbClr val="BCC9D6"/>
+                </a:solidFill>
+                <a:latin typeface="Consolas" pitchFamily="34" charset="0"/>
+                <a:ea typeface="Consolas" pitchFamily="34" charset="-122"/>
+                <a:cs typeface="Consolas" pitchFamily="34" charset="-120"/>
+              </a:rPr>
+              <a:t>3건</a:t>
+            </a:r>
+            <a:endParaRPr lang="en-US" sz="975" dirty="0"/>
+          </a:p>
+        </p:txBody>
+      </p:sp>
+      <p:sp>
+        <p:nvSpPr>
+          <p:cNvPr id="25" name="Text 23"/>
+          <p:cNvSpPr txBox="1"/>
+          <p:nvPr/>
+        </p:nvSpPr>
+        <p:spPr>
+          <a:xfrm>
+            <a:off x="838200" y="4286250"/>
+            <a:ext cx="876300" cy="154781"/>
+          </a:xfrm>
+          <a:prstGeom prst="rect">
+            <a:avLst/>
+          </a:prstGeom>
+          <a:noFill/>
+          <a:ln/>
+        </p:spPr>
+        <p:txBody>
+          <a:bodyPr wrap="square" lIns="0" tIns="0" rIns="0" bIns="0" rtlCol="0" anchor="t"/>
+          <a:lstStyle/>
+          <a:p>
+            <a:pPr algn="l" indent="0" marL="0">
+              <a:lnSpc>
+                <a:spcPts val="1219"/>
+              </a:lnSpc>
+              <a:buNone/>
+            </a:pPr>
+            <a:r>
+              <a:rPr lang="en-US" sz="938" dirty="0">
+                <a:solidFill>
+                  <a:srgbClr val="FF4D63"/>
+                </a:solidFill>
+                <a:latin typeface="Consolas" pitchFamily="34" charset="0"/>
+                <a:ea typeface="Consolas" pitchFamily="34" charset="-122"/>
+                <a:cs typeface="Consolas" pitchFamily="34" charset="-120"/>
+              </a:rPr>
+              <a:t>20 ~ 25℃</a:t>
+            </a:r>
+            <a:endParaRPr lang="en-US" sz="938" dirty="0"/>
+          </a:p>
+        </p:txBody>
+      </p:sp>
+      <p:sp>
+        <p:nvSpPr>
+          <p:cNvPr id="26" name="Shape 24"/>
+          <p:cNvSpPr/>
+          <p:nvPr/>
+        </p:nvSpPr>
+        <p:spPr>
+          <a:xfrm>
+            <a:off x="1828800" y="4267200"/>
+            <a:ext cx="295275" cy="190500"/>
+          </a:xfrm>
+          <a:prstGeom prst="rect">
+            <a:avLst/>
+          </a:prstGeom>
+          <a:solidFill>
+            <a:srgbClr val="FF4D63"/>
+          </a:solidFill>
+          <a:ln/>
+        </p:spPr>
+      </p:sp>
+      <p:sp>
+        <p:nvSpPr>
+          <p:cNvPr id="27" name="Text 25"/>
+          <p:cNvSpPr txBox="1"/>
+          <p:nvPr/>
+        </p:nvSpPr>
+        <p:spPr>
+          <a:xfrm>
+            <a:off x="2200275" y="4295775"/>
+            <a:ext cx="571500" cy="148590"/>
+          </a:xfrm>
+          <a:prstGeom prst="rect">
+            <a:avLst/>
+          </a:prstGeom>
+          <a:noFill/>
+          <a:ln/>
+        </p:spPr>
+        <p:txBody>
+          <a:bodyPr wrap="square" lIns="0" tIns="0" rIns="0" bIns="0" rtlCol="0" anchor="t"/>
+          <a:lstStyle/>
+          <a:p>
+            <a:pPr algn="l" indent="0" marL="0">
+              <a:lnSpc>
+                <a:spcPts val="1170"/>
+              </a:lnSpc>
+              <a:buNone/>
+            </a:pPr>
+            <a:r>
+              <a:rPr lang="en-US" sz="975" b="1" dirty="0">
+                <a:solidFill>
+                  <a:srgbClr val="FF4D63"/>
+                </a:solidFill>
+                <a:latin typeface="Consolas" pitchFamily="34" charset="0"/>
+                <a:ea typeface="Consolas" pitchFamily="34" charset="-122"/>
+                <a:cs typeface="Consolas" pitchFamily="34" charset="-120"/>
+              </a:rPr>
+              <a:t>1건</a:t>
+            </a:r>
+            <a:endParaRPr lang="en-US" sz="975" dirty="0"/>
+          </a:p>
+        </p:txBody>
+      </p:sp>
+      <p:sp>
+        <p:nvSpPr>
+          <p:cNvPr id="28" name="Text 26"/>
+          <p:cNvSpPr txBox="1"/>
+          <p:nvPr/>
+        </p:nvSpPr>
+        <p:spPr>
+          <a:xfrm>
+            <a:off x="838200" y="4629150"/>
+            <a:ext cx="876300" cy="154781"/>
+          </a:xfrm>
+          <a:prstGeom prst="rect">
+            <a:avLst/>
+          </a:prstGeom>
+          <a:noFill/>
+          <a:ln/>
+        </p:spPr>
+        <p:txBody>
+          <a:bodyPr wrap="square" lIns="0" tIns="0" rIns="0" bIns="0" rtlCol="0" anchor="t"/>
+          <a:lstStyle/>
+          <a:p>
+            <a:pPr algn="l" indent="0" marL="0">
+              <a:lnSpc>
+                <a:spcPts val="1219"/>
+              </a:lnSpc>
+              <a:buNone/>
+            </a:pPr>
+            <a:r>
+              <a:rPr lang="en-US" sz="938" dirty="0">
+                <a:solidFill>
+                  <a:srgbClr val="93A6BA"/>
+                </a:solidFill>
+                <a:latin typeface="Consolas" pitchFamily="34" charset="0"/>
+                <a:ea typeface="Consolas" pitchFamily="34" charset="-122"/>
+                <a:cs typeface="Consolas" pitchFamily="34" charset="-120"/>
+              </a:rPr>
+              <a:t>25 ~ 30℃</a:t>
+            </a:r>
+            <a:endParaRPr lang="en-US" sz="938" dirty="0"/>
+          </a:p>
+        </p:txBody>
+      </p:sp>
+      <p:sp>
+        <p:nvSpPr>
+          <p:cNvPr id="29" name="Shape 27"/>
+          <p:cNvSpPr/>
+          <p:nvPr/>
+        </p:nvSpPr>
+        <p:spPr>
+          <a:xfrm>
+            <a:off x="1828800" y="4610100"/>
+            <a:ext cx="1771650" cy="190500"/>
+          </a:xfrm>
+          <a:prstGeom prst="rect">
+            <a:avLst/>
+          </a:prstGeom>
+          <a:solidFill>
+            <a:srgbClr val="5E7793"/>
+          </a:solidFill>
+          <a:ln/>
+        </p:spPr>
+      </p:sp>
+      <p:sp>
+        <p:nvSpPr>
+          <p:cNvPr id="30" name="Text 28"/>
+          <p:cNvSpPr txBox="1"/>
+          <p:nvPr/>
+        </p:nvSpPr>
+        <p:spPr>
+          <a:xfrm>
+            <a:off x="3676650" y="4638675"/>
+            <a:ext cx="571500" cy="148590"/>
+          </a:xfrm>
+          <a:prstGeom prst="rect">
+            <a:avLst/>
+          </a:prstGeom>
+          <a:noFill/>
+          <a:ln/>
+        </p:spPr>
+        <p:txBody>
+          <a:bodyPr wrap="square" lIns="0" tIns="0" rIns="0" bIns="0" rtlCol="0" anchor="t"/>
+          <a:lstStyle/>
+          <a:p>
+            <a:pPr algn="l" indent="0" marL="0">
+              <a:lnSpc>
+                <a:spcPts val="1170"/>
+              </a:lnSpc>
+              <a:buNone/>
+            </a:pPr>
+            <a:r>
+              <a:rPr lang="en-US" sz="975" b="1" dirty="0">
+                <a:solidFill>
+                  <a:srgbClr val="BCC9D6"/>
+                </a:solidFill>
+                <a:latin typeface="Consolas" pitchFamily="34" charset="0"/>
+                <a:ea typeface="Consolas" pitchFamily="34" charset="-122"/>
+                <a:cs typeface="Consolas" pitchFamily="34" charset="-120"/>
+              </a:rPr>
+              <a:t>6건</a:t>
+            </a:r>
+            <a:endParaRPr lang="en-US" sz="975" dirty="0"/>
+          </a:p>
+        </p:txBody>
+      </p:sp>
+      <p:sp>
+        <p:nvSpPr>
+          <p:cNvPr id="31" name="Text 29"/>
+          <p:cNvSpPr txBox="1"/>
+          <p:nvPr/>
+        </p:nvSpPr>
+        <p:spPr>
+          <a:xfrm>
+            <a:off x="838200" y="4972050"/>
+            <a:ext cx="876300" cy="154781"/>
+          </a:xfrm>
+          <a:prstGeom prst="rect">
+            <a:avLst/>
+          </a:prstGeom>
+          <a:noFill/>
+          <a:ln/>
+        </p:spPr>
+        <p:txBody>
+          <a:bodyPr wrap="square" lIns="0" tIns="0" rIns="0" bIns="0" rtlCol="0" anchor="t"/>
+          <a:lstStyle/>
+          <a:p>
+            <a:pPr algn="l" indent="0" marL="0">
+              <a:lnSpc>
+                <a:spcPts val="1219"/>
+              </a:lnSpc>
+              <a:buNone/>
+            </a:pPr>
+            <a:r>
+              <a:rPr lang="en-US" sz="938" dirty="0">
+                <a:solidFill>
+                  <a:srgbClr val="93A6BA"/>
+                </a:solidFill>
+                <a:latin typeface="Consolas" pitchFamily="34" charset="0"/>
+                <a:ea typeface="Consolas" pitchFamily="34" charset="-122"/>
+                <a:cs typeface="Consolas" pitchFamily="34" charset="-120"/>
+              </a:rPr>
+              <a:t>30 ~ 41℃</a:t>
+            </a:r>
+            <a:endParaRPr lang="en-US" sz="938" dirty="0"/>
+          </a:p>
+        </p:txBody>
+      </p:sp>
+      <p:sp>
+        <p:nvSpPr>
+          <p:cNvPr id="32" name="Shape 30"/>
+          <p:cNvSpPr/>
+          <p:nvPr/>
+        </p:nvSpPr>
+        <p:spPr>
+          <a:xfrm>
+            <a:off x="1828800" y="4953000"/>
+            <a:ext cx="3248025" cy="190500"/>
+          </a:xfrm>
+          <a:prstGeom prst="rect">
+            <a:avLst/>
+          </a:prstGeom>
+          <a:solidFill>
+            <a:srgbClr val="5E7793"/>
+          </a:solidFill>
+          <a:ln/>
+        </p:spPr>
+      </p:sp>
+      <p:sp>
+        <p:nvSpPr>
+          <p:cNvPr id="33" name="Text 31"/>
+          <p:cNvSpPr txBox="1"/>
+          <p:nvPr/>
+        </p:nvSpPr>
+        <p:spPr>
+          <a:xfrm>
+            <a:off x="5153025" y="4981575"/>
+            <a:ext cx="571500" cy="148590"/>
+          </a:xfrm>
+          <a:prstGeom prst="rect">
+            <a:avLst/>
+          </a:prstGeom>
+          <a:noFill/>
+          <a:ln/>
+        </p:spPr>
+        <p:txBody>
+          <a:bodyPr wrap="square" lIns="0" tIns="0" rIns="0" bIns="0" rtlCol="0" anchor="t"/>
+          <a:lstStyle/>
+          <a:p>
+            <a:pPr algn="l" indent="0" marL="0">
+              <a:lnSpc>
+                <a:spcPts val="1170"/>
+              </a:lnSpc>
+              <a:buNone/>
+            </a:pPr>
+            <a:r>
+              <a:rPr lang="en-US" sz="975" b="1" dirty="0">
+                <a:solidFill>
+                  <a:srgbClr val="BCC9D6"/>
+                </a:solidFill>
+                <a:latin typeface="Consolas" pitchFamily="34" charset="0"/>
+                <a:ea typeface="Consolas" pitchFamily="34" charset="-122"/>
+                <a:cs typeface="Consolas" pitchFamily="34" charset="-120"/>
+              </a:rPr>
+              <a:t>11건</a:t>
+            </a:r>
+            <a:endParaRPr lang="en-US" sz="975" dirty="0"/>
+          </a:p>
+        </p:txBody>
+      </p:sp>
+      <p:sp>
+        <p:nvSpPr>
+          <p:cNvPr id="34" name="Text 32"/>
+          <p:cNvSpPr txBox="1"/>
+          <p:nvPr/>
+        </p:nvSpPr>
+        <p:spPr>
+          <a:xfrm>
+            <a:off x="685800" y="5562600"/>
+            <a:ext cx="5676900" cy="480060"/>
+          </a:xfrm>
+          <a:prstGeom prst="rect">
+            <a:avLst/>
+          </a:prstGeom>
+          <a:noFill/>
+          <a:ln/>
+        </p:spPr>
+        <p:txBody>
+          <a:bodyPr wrap="square" lIns="0" tIns="0" rIns="0" bIns="0" rtlCol="0" anchor="t"/>
+          <a:lstStyle/>
+          <a:p>
+            <a:pPr algn="l" indent="0" marL="0">
+              <a:lnSpc>
+                <a:spcPts val="1890"/>
+              </a:lnSpc>
+              <a:buNone/>
+            </a:pPr>
+            <a:r>
+              <a:rPr lang="en-US" sz="1125" b="1" dirty="0">
+                <a:solidFill>
+                  <a:srgbClr val="EAE7E0"/>
                 </a:solidFill>
                 <a:latin typeface="Malgun Gothic" pitchFamily="34" charset="0"/>
                 <a:ea typeface="Malgun Gothic" pitchFamily="34" charset="-122"/>
                 <a:cs typeface="Malgun Gothic" pitchFamily="34" charset="-120"/>
               </a:rPr>
-              <a:t>작성 예정 — 이 장은 아직 만들지 않았습니다.</a:t>
-            </a:r>
-            <a:endParaRPr lang="en-US" sz="1275" dirty="0"/>
-          </a:p>
-        </p:txBody>
-      </p:sp>
-      <p:sp>
-        <p:nvSpPr>
-          <p:cNvPr id="14" name="Text 12"/>
-          <p:cNvSpPr txBox="1"/>
-          <p:nvPr/>
-        </p:nvSpPr>
-        <p:spPr>
-          <a:xfrm>
-            <a:off x="685800" y="4038600"/>
-            <a:ext cx="10820400" cy="125016"/>
+              <a:t>20~25℃ 구간은 1건</a:t>
+            </a:r>
+            <a:pPr algn="l" indent="0" marL="0">
+              <a:lnSpc>
+                <a:spcPts val="1890"/>
+              </a:lnSpc>
+              <a:buNone/>
+            </a:pPr>
+            <a:r>
+              <a:rPr lang="en-US" sz="1125" dirty="0">
+                <a:solidFill>
+                  <a:srgbClr val="BCC9D6"/>
+                </a:solidFill>
+                <a:latin typeface="Malgun Gothic" pitchFamily="34" charset="0"/>
+                <a:ea typeface="Malgun Gothic" pitchFamily="34" charset="-122"/>
+                <a:cs typeface="Malgun Gothic" pitchFamily="34" charset="-120"/>
+              </a:rPr>
+              <a:t> 입니다. 이 구간을 다른 구간과 같은 무게로 믿으면 안 됩니다.</a:t>
+            </a:r>
+            <a:endParaRPr lang="en-US" sz="1125" dirty="0"/>
+          </a:p>
+        </p:txBody>
+      </p:sp>
+      <p:sp>
+        <p:nvSpPr>
+          <p:cNvPr id="35" name="Shape 33"/>
+          <p:cNvSpPr/>
+          <p:nvPr/>
+        </p:nvSpPr>
+        <p:spPr>
+          <a:xfrm>
+            <a:off x="6591300" y="2743200"/>
+            <a:ext cx="4914900" cy="19050"/>
+          </a:xfrm>
+          <a:prstGeom prst="rect">
+            <a:avLst/>
+          </a:prstGeom>
+          <a:solidFill>
+            <a:srgbClr val="EFB13C"/>
+          </a:solidFill>
+          <a:ln/>
+        </p:spPr>
+      </p:sp>
+      <p:sp>
+        <p:nvSpPr>
+          <p:cNvPr id="36" name="Text 34"/>
+          <p:cNvSpPr txBox="1"/>
+          <p:nvPr/>
+        </p:nvSpPr>
+        <p:spPr>
+          <a:xfrm>
+            <a:off x="6591300" y="2876550"/>
+            <a:ext cx="4914900" cy="125016"/>
           </a:xfrm>
           <a:prstGeom prst="rect">
             <a:avLst/>
@@ -18624,13 +26038,13 @@
             <a:r>
               <a:rPr lang="en-US" sz="788" b="1" spc="150" kern="0" dirty="0">
                 <a:solidFill>
-                  <a:srgbClr val="7E2333"/>
+                  <a:srgbClr val="63798F"/>
                 </a:solidFill>
                 <a:latin typeface="Consolas" pitchFamily="34" charset="0"/>
                 <a:ea typeface="Consolas" pitchFamily="34" charset="-122"/>
                 <a:cs typeface="Consolas" pitchFamily="34" charset="-120"/>
               </a:rPr>
-              <a:t>SLIDE 09  ·  TODO</a:t>
+              <a:t>그래서 이렇게 검증했습니다</a:t>
             </a:r>
             <a:endParaRPr lang="en-US" sz="788" dirty="0"/>
           </a:p>
@@ -18638,7 +26052,460 @@
       </p:sp>
       <p:sp>
         <p:nvSpPr>
-          <p:cNvPr id="15" name="Shape 13"/>
+          <p:cNvPr id="37" name="Shape 35"/>
+          <p:cNvSpPr/>
+          <p:nvPr/>
+        </p:nvSpPr>
+        <p:spPr>
+          <a:xfrm>
+            <a:off x="6591300" y="3067050"/>
+            <a:ext cx="4914900" cy="838200"/>
+          </a:xfrm>
+          <a:prstGeom prst="rect">
+            <a:avLst/>
+          </a:prstGeom>
+          <a:solidFill>
+            <a:srgbClr val="0A1320"/>
+          </a:solidFill>
+          <a:ln w="12700">
+            <a:solidFill>
+              <a:srgbClr val="182838"/>
+            </a:solidFill>
+            <a:prstDash val="solid"/>
+          </a:ln>
+        </p:spPr>
+      </p:sp>
+      <p:sp>
+        <p:nvSpPr>
+          <p:cNvPr id="38" name="Text 36"/>
+          <p:cNvSpPr txBox="1"/>
+          <p:nvPr/>
+        </p:nvSpPr>
+        <p:spPr>
+          <a:xfrm>
+            <a:off x="6743700" y="3200400"/>
+            <a:ext cx="381000" cy="260033"/>
+          </a:xfrm>
+          <a:prstGeom prst="rect">
+            <a:avLst/>
+          </a:prstGeom>
+          <a:noFill/>
+          <a:ln/>
+        </p:spPr>
+        <p:txBody>
+          <a:bodyPr wrap="square" lIns="0" tIns="0" rIns="0" bIns="0" rtlCol="0" anchor="t"/>
+          <a:lstStyle/>
+          <a:p>
+            <a:pPr algn="l" indent="0" marL="0">
+              <a:lnSpc>
+                <a:spcPts val="2048"/>
+              </a:lnSpc>
+              <a:buNone/>
+            </a:pPr>
+            <a:r>
+              <a:rPr lang="en-US" sz="1950" b="1" dirty="0">
+                <a:solidFill>
+                  <a:srgbClr val="EFB13C"/>
+                </a:solidFill>
+                <a:latin typeface="Consolas" pitchFamily="34" charset="0"/>
+                <a:ea typeface="Consolas" pitchFamily="34" charset="-122"/>
+                <a:cs typeface="Consolas" pitchFamily="34" charset="-120"/>
+              </a:rPr>
+              <a:t>1</a:t>
+            </a:r>
+            <a:endParaRPr lang="en-US" sz="1950" dirty="0"/>
+          </a:p>
+        </p:txBody>
+      </p:sp>
+      <p:sp>
+        <p:nvSpPr>
+          <p:cNvPr id="39" name="Text 37"/>
+          <p:cNvSpPr txBox="1"/>
+          <p:nvPr/>
+        </p:nvSpPr>
+        <p:spPr>
+          <a:xfrm>
+            <a:off x="7124700" y="3200400"/>
+            <a:ext cx="4229100" cy="284036"/>
+          </a:xfrm>
+          <a:prstGeom prst="rect">
+            <a:avLst/>
+          </a:prstGeom>
+          <a:noFill/>
+          <a:ln/>
+        </p:spPr>
+        <p:txBody>
+          <a:bodyPr wrap="square" lIns="0" tIns="0" rIns="0" bIns="0" rtlCol="0" anchor="t"/>
+          <a:lstStyle/>
+          <a:p>
+            <a:pPr algn="l" indent="0" marL="0">
+              <a:lnSpc>
+                <a:spcPts val="2237"/>
+              </a:lnSpc>
+              <a:buNone/>
+            </a:pPr>
+            <a:r>
+              <a:rPr lang="en-US" sz="1575" b="1" dirty="0">
+                <a:solidFill>
+                  <a:srgbClr val="EAE7E0"/>
+                </a:solidFill>
+                <a:latin typeface="Malgun Gothic" pitchFamily="34" charset="0"/>
+                <a:ea typeface="Malgun Gothic" pitchFamily="34" charset="-122"/>
+                <a:cs typeface="Malgun Gothic" pitchFamily="34" charset="-120"/>
+              </a:rPr>
+              <a:t>한 건씩 가리고 맞혀보기</a:t>
+            </a:r>
+            <a:endParaRPr lang="en-US" sz="1575" dirty="0"/>
+          </a:p>
+        </p:txBody>
+      </p:sp>
+      <p:sp>
+        <p:nvSpPr>
+          <p:cNvPr id="40" name="Text 38"/>
+          <p:cNvSpPr txBox="1"/>
+          <p:nvPr/>
+        </p:nvSpPr>
+        <p:spPr>
+          <a:xfrm>
+            <a:off x="7124700" y="3505200"/>
+            <a:ext cx="4229100" cy="480060"/>
+          </a:xfrm>
+          <a:prstGeom prst="rect">
+            <a:avLst/>
+          </a:prstGeom>
+          <a:noFill/>
+          <a:ln/>
+        </p:spPr>
+        <p:txBody>
+          <a:bodyPr wrap="square" lIns="0" tIns="0" rIns="0" bIns="0" rtlCol="0" anchor="t"/>
+          <a:lstStyle/>
+          <a:p>
+            <a:pPr algn="l" indent="0" marL="0">
+              <a:lnSpc>
+                <a:spcPts val="1890"/>
+              </a:lnSpc>
+              <a:buNone/>
+            </a:pPr>
+            <a:r>
+              <a:rPr lang="en-US" sz="1125" dirty="0">
+                <a:solidFill>
+                  <a:srgbClr val="BCC9D6"/>
+                </a:solidFill>
+                <a:latin typeface="Malgun Gothic" pitchFamily="34" charset="0"/>
+                <a:ea typeface="Malgun Gothic" pitchFamily="34" charset="-122"/>
+                <a:cs typeface="Malgun Gothic" pitchFamily="34" charset="-120"/>
+              </a:rPr>
+              <a:t>정답 하나를 가리고 나머지 35건으로 맞혀봅니다. 36번 반복하니 모의고사와 같습니다.</a:t>
+            </a:r>
+            <a:endParaRPr lang="en-US" sz="1125" dirty="0"/>
+          </a:p>
+        </p:txBody>
+      </p:sp>
+      <p:sp>
+        <p:nvSpPr>
+          <p:cNvPr id="41" name="Shape 39"/>
+          <p:cNvSpPr/>
+          <p:nvPr/>
+        </p:nvSpPr>
+        <p:spPr>
+          <a:xfrm>
+            <a:off x="6591300" y="4038600"/>
+            <a:ext cx="4914900" cy="838200"/>
+          </a:xfrm>
+          <a:prstGeom prst="rect">
+            <a:avLst/>
+          </a:prstGeom>
+          <a:solidFill>
+            <a:srgbClr val="0A1320"/>
+          </a:solidFill>
+          <a:ln w="12700">
+            <a:solidFill>
+              <a:srgbClr val="182838"/>
+            </a:solidFill>
+            <a:prstDash val="solid"/>
+          </a:ln>
+        </p:spPr>
+      </p:sp>
+      <p:sp>
+        <p:nvSpPr>
+          <p:cNvPr id="42" name="Text 40"/>
+          <p:cNvSpPr txBox="1"/>
+          <p:nvPr/>
+        </p:nvSpPr>
+        <p:spPr>
+          <a:xfrm>
+            <a:off x="6743700" y="4171950"/>
+            <a:ext cx="381000" cy="260033"/>
+          </a:xfrm>
+          <a:prstGeom prst="rect">
+            <a:avLst/>
+          </a:prstGeom>
+          <a:noFill/>
+          <a:ln/>
+        </p:spPr>
+        <p:txBody>
+          <a:bodyPr wrap="square" lIns="0" tIns="0" rIns="0" bIns="0" rtlCol="0" anchor="t"/>
+          <a:lstStyle/>
+          <a:p>
+            <a:pPr algn="l" indent="0" marL="0">
+              <a:lnSpc>
+                <a:spcPts val="2048"/>
+              </a:lnSpc>
+              <a:buNone/>
+            </a:pPr>
+            <a:r>
+              <a:rPr lang="en-US" sz="1950" b="1" dirty="0">
+                <a:solidFill>
+                  <a:srgbClr val="EFB13C"/>
+                </a:solidFill>
+                <a:latin typeface="Consolas" pitchFamily="34" charset="0"/>
+                <a:ea typeface="Consolas" pitchFamily="34" charset="-122"/>
+                <a:cs typeface="Consolas" pitchFamily="34" charset="-120"/>
+              </a:rPr>
+              <a:t>2</a:t>
+            </a:r>
+            <a:endParaRPr lang="en-US" sz="1950" dirty="0"/>
+          </a:p>
+        </p:txBody>
+      </p:sp>
+      <p:sp>
+        <p:nvSpPr>
+          <p:cNvPr id="43" name="Text 41"/>
+          <p:cNvSpPr txBox="1"/>
+          <p:nvPr/>
+        </p:nvSpPr>
+        <p:spPr>
+          <a:xfrm>
+            <a:off x="7124700" y="4171950"/>
+            <a:ext cx="4229100" cy="284036"/>
+          </a:xfrm>
+          <a:prstGeom prst="rect">
+            <a:avLst/>
+          </a:prstGeom>
+          <a:noFill/>
+          <a:ln/>
+        </p:spPr>
+        <p:txBody>
+          <a:bodyPr wrap="square" lIns="0" tIns="0" rIns="0" bIns="0" rtlCol="0" anchor="t"/>
+          <a:lstStyle/>
+          <a:p>
+            <a:pPr algn="l" indent="0" marL="0">
+              <a:lnSpc>
+                <a:spcPts val="2237"/>
+              </a:lnSpc>
+              <a:buNone/>
+            </a:pPr>
+            <a:r>
+              <a:rPr lang="en-US" sz="1575" b="1" dirty="0">
+                <a:solidFill>
+                  <a:srgbClr val="EAE7E0"/>
+                </a:solidFill>
+                <a:latin typeface="Malgun Gothic" pitchFamily="34" charset="0"/>
+                <a:ea typeface="Malgun Gothic" pitchFamily="34" charset="-122"/>
+                <a:cs typeface="Malgun Gothic" pitchFamily="34" charset="-120"/>
+              </a:rPr>
+              <a:t>잇는 방식을 여럿 비교</a:t>
+            </a:r>
+            <a:endParaRPr lang="en-US" sz="1575" dirty="0"/>
+          </a:p>
+        </p:txBody>
+      </p:sp>
+      <p:sp>
+        <p:nvSpPr>
+          <p:cNvPr id="44" name="Text 42"/>
+          <p:cNvSpPr txBox="1"/>
+          <p:nvPr/>
+        </p:nvSpPr>
+        <p:spPr>
+          <a:xfrm>
+            <a:off x="7124700" y="4476750"/>
+            <a:ext cx="4229100" cy="480060"/>
+          </a:xfrm>
+          <a:prstGeom prst="rect">
+            <a:avLst/>
+          </a:prstGeom>
+          <a:noFill/>
+          <a:ln/>
+        </p:spPr>
+        <p:txBody>
+          <a:bodyPr wrap="square" lIns="0" tIns="0" rIns="0" bIns="0" rtlCol="0" anchor="t"/>
+          <a:lstStyle/>
+          <a:p>
+            <a:pPr algn="l" indent="0" marL="0">
+              <a:lnSpc>
+                <a:spcPts val="1890"/>
+              </a:lnSpc>
+              <a:buNone/>
+            </a:pPr>
+            <a:r>
+              <a:rPr lang="en-US" sz="1125" dirty="0">
+                <a:solidFill>
+                  <a:srgbClr val="BCC9D6"/>
+                </a:solidFill>
+                <a:latin typeface="Malgun Gothic" pitchFamily="34" charset="0"/>
+                <a:ea typeface="Malgun Gothic" pitchFamily="34" charset="-122"/>
+                <a:cs typeface="Malgun Gothic" pitchFamily="34" charset="-120"/>
+              </a:rPr>
+              <a:t>한 방식만 써서 잘 나왔다고 하지 않습니다. 7가지를 같은 자리에서 채점합니다.</a:t>
+            </a:r>
+            <a:endParaRPr lang="en-US" sz="1125" dirty="0"/>
+          </a:p>
+        </p:txBody>
+      </p:sp>
+      <p:sp>
+        <p:nvSpPr>
+          <p:cNvPr id="45" name="Shape 43"/>
+          <p:cNvSpPr/>
+          <p:nvPr/>
+        </p:nvSpPr>
+        <p:spPr>
+          <a:xfrm>
+            <a:off x="6591300" y="5010150"/>
+            <a:ext cx="4914900" cy="838200"/>
+          </a:xfrm>
+          <a:prstGeom prst="rect">
+            <a:avLst/>
+          </a:prstGeom>
+          <a:solidFill>
+            <a:srgbClr val="0A1320"/>
+          </a:solidFill>
+          <a:ln w="12700">
+            <a:solidFill>
+              <a:srgbClr val="182838"/>
+            </a:solidFill>
+            <a:prstDash val="solid"/>
+          </a:ln>
+        </p:spPr>
+      </p:sp>
+      <p:sp>
+        <p:nvSpPr>
+          <p:cNvPr id="46" name="Text 44"/>
+          <p:cNvSpPr txBox="1"/>
+          <p:nvPr/>
+        </p:nvSpPr>
+        <p:spPr>
+          <a:xfrm>
+            <a:off x="6743700" y="5143500"/>
+            <a:ext cx="381000" cy="260033"/>
+          </a:xfrm>
+          <a:prstGeom prst="rect">
+            <a:avLst/>
+          </a:prstGeom>
+          <a:noFill/>
+          <a:ln/>
+        </p:spPr>
+        <p:txBody>
+          <a:bodyPr wrap="square" lIns="0" tIns="0" rIns="0" bIns="0" rtlCol="0" anchor="t"/>
+          <a:lstStyle/>
+          <a:p>
+            <a:pPr algn="l" indent="0" marL="0">
+              <a:lnSpc>
+                <a:spcPts val="2048"/>
+              </a:lnSpc>
+              <a:buNone/>
+            </a:pPr>
+            <a:r>
+              <a:rPr lang="en-US" sz="1950" b="1" dirty="0">
+                <a:solidFill>
+                  <a:srgbClr val="EFB13C"/>
+                </a:solidFill>
+                <a:latin typeface="Consolas" pitchFamily="34" charset="0"/>
+                <a:ea typeface="Consolas" pitchFamily="34" charset="-122"/>
+                <a:cs typeface="Consolas" pitchFamily="34" charset="-120"/>
+              </a:rPr>
+              <a:t>3</a:t>
+            </a:r>
+            <a:endParaRPr lang="en-US" sz="1950" dirty="0"/>
+          </a:p>
+        </p:txBody>
+      </p:sp>
+      <p:sp>
+        <p:nvSpPr>
+          <p:cNvPr id="47" name="Text 45"/>
+          <p:cNvSpPr txBox="1"/>
+          <p:nvPr/>
+        </p:nvSpPr>
+        <p:spPr>
+          <a:xfrm>
+            <a:off x="7124700" y="5143500"/>
+            <a:ext cx="4229100" cy="284036"/>
+          </a:xfrm>
+          <a:prstGeom prst="rect">
+            <a:avLst/>
+          </a:prstGeom>
+          <a:noFill/>
+          <a:ln/>
+        </p:spPr>
+        <p:txBody>
+          <a:bodyPr wrap="square" lIns="0" tIns="0" rIns="0" bIns="0" rtlCol="0" anchor="t"/>
+          <a:lstStyle/>
+          <a:p>
+            <a:pPr algn="l" indent="0" marL="0">
+              <a:lnSpc>
+                <a:spcPts val="2237"/>
+              </a:lnSpc>
+              <a:buNone/>
+            </a:pPr>
+            <a:r>
+              <a:rPr lang="en-US" sz="1575" b="1" dirty="0">
+                <a:solidFill>
+                  <a:srgbClr val="EAE7E0"/>
+                </a:solidFill>
+                <a:latin typeface="Malgun Gothic" pitchFamily="34" charset="0"/>
+                <a:ea typeface="Malgun Gothic" pitchFamily="34" charset="-122"/>
+                <a:cs typeface="Malgun Gothic" pitchFamily="34" charset="-120"/>
+              </a:rPr>
+              <a:t>온도대별로 골고루 나눠 뽑기</a:t>
+            </a:r>
+            <a:endParaRPr lang="en-US" sz="1575" dirty="0"/>
+          </a:p>
+        </p:txBody>
+      </p:sp>
+      <p:sp>
+        <p:nvSpPr>
+          <p:cNvPr id="48" name="Text 46"/>
+          <p:cNvSpPr txBox="1"/>
+          <p:nvPr/>
+        </p:nvSpPr>
+        <p:spPr>
+          <a:xfrm>
+            <a:off x="7124700" y="5448300"/>
+            <a:ext cx="4229100" cy="480060"/>
+          </a:xfrm>
+          <a:prstGeom prst="rect">
+            <a:avLst/>
+          </a:prstGeom>
+          <a:noFill/>
+          <a:ln/>
+        </p:spPr>
+        <p:txBody>
+          <a:bodyPr wrap="square" lIns="0" tIns="0" rIns="0" bIns="0" rtlCol="0" anchor="t"/>
+          <a:lstStyle/>
+          <a:p>
+            <a:pPr algn="l" indent="0" marL="0">
+              <a:lnSpc>
+                <a:spcPts val="1890"/>
+              </a:lnSpc>
+              <a:buNone/>
+            </a:pPr>
+            <a:r>
+              <a:rPr lang="en-US" sz="1125" dirty="0">
+                <a:solidFill>
+                  <a:srgbClr val="BCC9D6"/>
+                </a:solidFill>
+                <a:latin typeface="Malgun Gothic" pitchFamily="34" charset="0"/>
+                <a:ea typeface="Malgun Gothic" pitchFamily="34" charset="-122"/>
+                <a:cs typeface="Malgun Gothic" pitchFamily="34" charset="-120"/>
+              </a:rPr>
+              <a:t>한쪽 온도대가 통째로 빠지면 채점이 왜곡됩니다. 구간마다 섞어 나눕니다.</a:t>
+            </a:r>
+            <a:endParaRPr lang="en-US" sz="1125" dirty="0"/>
+          </a:p>
+        </p:txBody>
+      </p:sp>
+      <p:sp>
+        <p:nvSpPr>
+          <p:cNvPr id="49" name="Shape 47"/>
           <p:cNvSpPr/>
           <p:nvPr/>
         </p:nvSpPr>
@@ -18658,6 +26525,124 @@
             <a:prstDash val="solid"/>
           </a:ln>
         </p:spPr>
+      </p:sp>
+      <p:sp>
+        <p:nvSpPr>
+          <p:cNvPr id="50" name="Text 48"/>
+          <p:cNvSpPr txBox="1"/>
+          <p:nvPr/>
+        </p:nvSpPr>
+        <p:spPr>
+          <a:xfrm>
+            <a:off x="685800" y="6267450"/>
+            <a:ext cx="476250" cy="120015"/>
+          </a:xfrm>
+          <a:prstGeom prst="rect">
+            <a:avLst/>
+          </a:prstGeom>
+          <a:noFill/>
+          <a:ln/>
+        </p:spPr>
+        <p:txBody>
+          <a:bodyPr wrap="square" lIns="0" tIns="0" rIns="0" bIns="0" rtlCol="0" anchor="t"/>
+          <a:lstStyle/>
+          <a:p>
+            <a:pPr algn="l" indent="0" marL="0">
+              <a:lnSpc>
+                <a:spcPts val="945"/>
+              </a:lnSpc>
+              <a:buNone/>
+            </a:pPr>
+            <a:r>
+              <a:rPr lang="en-US" sz="788" b="1" spc="180" kern="0" dirty="0">
+                <a:solidFill>
+                  <a:srgbClr val="EFB13C"/>
+                </a:solidFill>
+                <a:latin typeface="Consolas" pitchFamily="34" charset="0"/>
+                <a:ea typeface="Consolas" pitchFamily="34" charset="-122"/>
+                <a:cs typeface="Consolas" pitchFamily="34" charset="-120"/>
+              </a:rPr>
+              <a:t>결론</a:t>
+            </a:r>
+            <a:endParaRPr lang="en-US" sz="788" dirty="0"/>
+          </a:p>
+        </p:txBody>
+      </p:sp>
+      <p:sp>
+        <p:nvSpPr>
+          <p:cNvPr id="51" name="Text 49"/>
+          <p:cNvSpPr txBox="1"/>
+          <p:nvPr/>
+        </p:nvSpPr>
+        <p:spPr>
+          <a:xfrm>
+            <a:off x="1219200" y="6229350"/>
+            <a:ext cx="10287000" cy="220027"/>
+          </a:xfrm>
+          <a:prstGeom prst="rect">
+            <a:avLst/>
+          </a:prstGeom>
+          <a:noFill/>
+          <a:ln/>
+        </p:spPr>
+        <p:txBody>
+          <a:bodyPr wrap="square" lIns="0" tIns="0" rIns="0" bIns="0" rtlCol="0" anchor="t"/>
+          <a:lstStyle/>
+          <a:p>
+            <a:pPr algn="l" indent="0" marL="0">
+              <a:lnSpc>
+                <a:spcPts val="1733"/>
+              </a:lnSpc>
+              <a:buNone/>
+            </a:pPr>
+            <a:r>
+              <a:rPr lang="en-US" sz="1238" dirty="0">
+                <a:solidFill>
+                  <a:srgbClr val="BCC9D6"/>
+                </a:solidFill>
+                <a:latin typeface="Malgun Gothic" pitchFamily="34" charset="0"/>
+                <a:ea typeface="Malgun Gothic" pitchFamily="34" charset="-122"/>
+                <a:cs typeface="Malgun Gothic" pitchFamily="34" charset="-120"/>
+              </a:rPr>
+              <a:t>데이터가 적을 때 필요한 것은 더 좋은 수식이 아니라 </a:t>
+            </a:r>
+            <a:pPr algn="l" indent="0" marL="0">
+              <a:lnSpc>
+                <a:spcPts val="1733"/>
+              </a:lnSpc>
+              <a:buNone/>
+            </a:pPr>
+            <a:r>
+              <a:rPr lang="en-US" sz="1238" b="1" dirty="0">
+                <a:solidFill>
+                  <a:srgbClr val="EFB13C"/>
+                </a:solidFill>
+                <a:latin typeface="Malgun Gothic" pitchFamily="34" charset="0"/>
+                <a:ea typeface="Malgun Gothic" pitchFamily="34" charset="-122"/>
+                <a:cs typeface="Malgun Gothic" pitchFamily="34" charset="-120"/>
+              </a:rPr>
+              <a:t>더 엄한 채점</a:t>
+            </a:r>
+            <a:pPr algn="l" indent="0" marL="0">
+              <a:lnSpc>
+                <a:spcPts val="1733"/>
+              </a:lnSpc>
+              <a:buNone/>
+            </a:pPr>
+            <a:r>
+              <a:rPr lang="en-US" sz="1238" dirty="0">
+                <a:solidFill>
+                  <a:srgbClr val="BCC9D6"/>
+                </a:solidFill>
+                <a:latin typeface="Malgun Gothic" pitchFamily="34" charset="0"/>
+                <a:ea typeface="Malgun Gothic" pitchFamily="34" charset="-122"/>
+                <a:cs typeface="Malgun Gothic" pitchFamily="34" charset="-120"/>
+              </a:rPr>
+              <a:t>입니다.</a:t>
+            </a:r>
+            <a:endParaRPr lang="en-US" sz="1238" dirty="0"/>
+          </a:p>
+        </p:txBody>
       </p:sp>
     </p:spTree>
   </p:cSld>

--- a/docs/ppt/위례_공급가능용량_최종발표.pptx
+++ b/docs/ppt/위례_공급가능용량_최종발표.pptx
@@ -7621,26 +7621,26 @@
         <p:spPr>
           <a:xfrm>
             <a:off x="685800" y="914400"/>
-            <a:ext cx="10287000" cy="360045"/>
-          </a:xfrm>
-          <a:prstGeom prst="rect">
-            <a:avLst/>
-          </a:prstGeom>
-          <a:noFill/>
-          <a:ln/>
-        </p:spPr>
-        <p:txBody>
-          <a:bodyPr wrap="square" lIns="0" tIns="0" rIns="0" bIns="0" rtlCol="0" anchor="t"/>
-          <a:lstStyle/>
-          <a:p>
-            <a:pPr algn="l" indent="0" marL="0">
-              <a:lnSpc>
-                <a:spcPts val="2835"/>
-              </a:lnSpc>
-              <a:buNone/>
-            </a:pPr>
-            <a:r>
-              <a:rPr lang="en-US" sz="2250" b="1" dirty="0">
+            <a:ext cx="10287000" cy="888111"/>
+          </a:xfrm>
+          <a:prstGeom prst="rect">
+            <a:avLst/>
+          </a:prstGeom>
+          <a:noFill/>
+          <a:ln/>
+        </p:spPr>
+        <p:txBody>
+          <a:bodyPr wrap="square" lIns="0" tIns="0" rIns="0" bIns="0" rtlCol="0" anchor="t"/>
+          <a:lstStyle/>
+          <a:p>
+            <a:pPr algn="l" indent="0" marL="0">
+              <a:lnSpc>
+                <a:spcPts val="3496"/>
+              </a:lnSpc>
+              <a:buNone/>
+            </a:pPr>
+            <a:r>
+              <a:rPr lang="en-US" sz="2775" b="1" dirty="0">
                 <a:solidFill>
                   <a:srgbClr val="EAE7E0"/>
                 </a:solidFill>
@@ -7648,22 +7648,180 @@
                 <a:ea typeface="Malgun Gothic" pitchFamily="34" charset="-122"/>
                 <a:cs typeface="Malgun Gothic" pitchFamily="34" charset="-120"/>
               </a:rPr>
-              <a:t>회차가 쌓이면 스스로 다시 고릅니다</a:t>
-            </a:r>
-            <a:endParaRPr lang="en-US" sz="2250" dirty="0"/>
-          </a:p>
-        </p:txBody>
-      </p:sp>
-      <p:sp>
-        <p:nvSpPr>
-          <p:cNvPr id="12" name="Shape 10"/>
-          <p:cNvSpPr/>
-          <p:nvPr/>
-        </p:nvSpPr>
-        <p:spPr>
-          <a:xfrm>
-            <a:off x="685800" y="2857500"/>
-            <a:ext cx="10820400" cy="2095500"/>
+              <a:t>회차가 쌓이면,</a:t>
+            </a:r>
+            <a:endParaRPr lang="en-US" sz="2775" dirty="0"/>
+          </a:p>
+          <a:p>
+            <a:pPr algn="l" indent="0" marL="0">
+              <a:lnSpc>
+                <a:spcPts val="3496"/>
+              </a:lnSpc>
+              <a:buNone/>
+            </a:pPr>
+            <a:r>
+              <a:rPr lang="en-US" sz="2775" b="1" dirty="0">
+                <a:solidFill>
+                  <a:srgbClr val="EFB13C"/>
+                </a:solidFill>
+                <a:latin typeface="Malgun Gothic" pitchFamily="34" charset="0"/>
+                <a:ea typeface="Malgun Gothic" pitchFamily="34" charset="-122"/>
+                <a:cs typeface="Malgun Gothic" pitchFamily="34" charset="-120"/>
+              </a:rPr>
+              <a:t>스스로 다시 고릅니다</a:t>
+            </a:r>
+            <a:endParaRPr lang="en-US" sz="2775" dirty="0"/>
+          </a:p>
+        </p:txBody>
+      </p:sp>
+      <p:sp>
+        <p:nvSpPr>
+          <p:cNvPr id="12" name="Text 10"/>
+          <p:cNvSpPr txBox="1"/>
+          <p:nvPr/>
+        </p:nvSpPr>
+        <p:spPr>
+          <a:xfrm>
+            <a:off x="685800" y="2000250"/>
+            <a:ext cx="10287000" cy="569214"/>
+          </a:xfrm>
+          <a:prstGeom prst="rect">
+            <a:avLst/>
+          </a:prstGeom>
+          <a:noFill/>
+          <a:ln/>
+        </p:spPr>
+        <p:txBody>
+          <a:bodyPr wrap="square" lIns="0" tIns="0" rIns="0" bIns="0" rtlCol="0" anchor="t"/>
+          <a:lstStyle/>
+          <a:p>
+            <a:pPr algn="l" indent="0" marL="0">
+              <a:lnSpc>
+                <a:spcPts val="2241"/>
+              </a:lnSpc>
+              <a:buNone/>
+            </a:pPr>
+            <a:r>
+              <a:rPr lang="en-US" sz="1350" dirty="0">
+                <a:solidFill>
+                  <a:srgbClr val="BCC9D6"/>
+                </a:solidFill>
+                <a:latin typeface="Malgun Gothic" pitchFamily="34" charset="0"/>
+                <a:ea typeface="Malgun Gothic" pitchFamily="34" charset="-122"/>
+                <a:cs typeface="Malgun Gothic" pitchFamily="34" charset="-120"/>
+              </a:rPr>
+              <a:t>매주 받은 값이 검증을 통과하면 누적에 들어가고, 누적이 늘면 </a:t>
+            </a:r>
+            <a:pPr algn="l" indent="0" marL="0">
+              <a:lnSpc>
+                <a:spcPts val="2241"/>
+              </a:lnSpc>
+              <a:buNone/>
+            </a:pPr>
+            <a:r>
+              <a:rPr lang="en-US" sz="1350" b="1" dirty="0">
+                <a:solidFill>
+                  <a:srgbClr val="EAE7E0"/>
+                </a:solidFill>
+                <a:latin typeface="Malgun Gothic" pitchFamily="34" charset="0"/>
+                <a:ea typeface="Malgun Gothic" pitchFamily="34" charset="-122"/>
+                <a:cs typeface="Malgun Gothic" pitchFamily="34" charset="-120"/>
+              </a:rPr>
+              <a:t>다시 채점해 방식을 다시 고릅니다</a:t>
+            </a:r>
+            <a:pPr algn="l" indent="0" marL="0">
+              <a:lnSpc>
+                <a:spcPts val="2241"/>
+              </a:lnSpc>
+              <a:buNone/>
+            </a:pPr>
+            <a:r>
+              <a:rPr lang="en-US" sz="1350" dirty="0">
+                <a:solidFill>
+                  <a:srgbClr val="BCC9D6"/>
+                </a:solidFill>
+                <a:latin typeface="Malgun Gothic" pitchFamily="34" charset="0"/>
+                <a:ea typeface="Malgun Gothic" pitchFamily="34" charset="-122"/>
+                <a:cs typeface="Malgun Gothic" pitchFamily="34" charset="-120"/>
+              </a:rPr>
+              <a:t>. 사람이 손대는 지점이 없습니다.</a:t>
+            </a:r>
+            <a:endParaRPr lang="en-US" sz="1350" dirty="0"/>
+          </a:p>
+        </p:txBody>
+      </p:sp>
+      <p:sp>
+        <p:nvSpPr>
+          <p:cNvPr id="13" name="Shape 11"/>
+          <p:cNvSpPr/>
+          <p:nvPr/>
+        </p:nvSpPr>
+        <p:spPr>
+          <a:xfrm>
+            <a:off x="685800" y="2743200"/>
+            <a:ext cx="5676900" cy="19050"/>
+          </a:xfrm>
+          <a:prstGeom prst="rect">
+            <a:avLst/>
+          </a:prstGeom>
+          <a:solidFill>
+            <a:srgbClr val="EFB13C"/>
+          </a:solidFill>
+          <a:ln/>
+        </p:spPr>
+      </p:sp>
+      <p:sp>
+        <p:nvSpPr>
+          <p:cNvPr id="14" name="Text 12"/>
+          <p:cNvSpPr txBox="1"/>
+          <p:nvPr/>
+        </p:nvSpPr>
+        <p:spPr>
+          <a:xfrm>
+            <a:off x="685800" y="2876550"/>
+            <a:ext cx="5676900" cy="125016"/>
+          </a:xfrm>
+          <a:prstGeom prst="rect">
+            <a:avLst/>
+          </a:prstGeom>
+          <a:noFill/>
+          <a:ln/>
+        </p:spPr>
+        <p:txBody>
+          <a:bodyPr wrap="square" lIns="0" tIns="0" rIns="0" bIns="0" rtlCol="0" anchor="t"/>
+          <a:lstStyle/>
+          <a:p>
+            <a:pPr algn="l" indent="0" marL="0">
+              <a:lnSpc>
+                <a:spcPts val="984"/>
+              </a:lnSpc>
+              <a:buNone/>
+            </a:pPr>
+            <a:r>
+              <a:rPr lang="en-US" sz="788" b="1" spc="150" kern="0" dirty="0">
+                <a:solidFill>
+                  <a:srgbClr val="63798F"/>
+                </a:solidFill>
+                <a:latin typeface="Consolas" pitchFamily="34" charset="0"/>
+                <a:ea typeface="Consolas" pitchFamily="34" charset="-122"/>
+                <a:cs typeface="Consolas" pitchFamily="34" charset="-120"/>
+              </a:rPr>
+              <a:t>갱신 순환</a:t>
+            </a:r>
+            <a:endParaRPr lang="en-US" sz="788" dirty="0"/>
+          </a:p>
+        </p:txBody>
+      </p:sp>
+      <p:sp>
+        <p:nvSpPr>
+          <p:cNvPr id="15" name="Shape 13"/>
+          <p:cNvSpPr/>
+          <p:nvPr/>
+        </p:nvSpPr>
+        <p:spPr>
+          <a:xfrm>
+            <a:off x="685800" y="3067050"/>
+            <a:ext cx="5676900" cy="1028700"/>
           </a:xfrm>
           <a:prstGeom prst="rect">
             <a:avLst/>
@@ -7671,113 +7829,28 @@
           <a:solidFill>
             <a:srgbClr val="0A1320"/>
           </a:solidFill>
-          <a:ln w="19050">
+          <a:ln w="12700">
             <a:solidFill>
-              <a:srgbClr val="22354A"/>
+              <a:srgbClr val="182838"/>
             </a:solidFill>
-            <a:prstDash val="dash"/>
+            <a:prstDash val="solid"/>
           </a:ln>
         </p:spPr>
       </p:sp>
       <p:sp>
         <p:nvSpPr>
-          <p:cNvPr id="13" name="Text 11"/>
-          <p:cNvSpPr txBox="1"/>
-          <p:nvPr/>
-        </p:nvSpPr>
-        <p:spPr>
-          <a:xfrm>
-            <a:off x="685800" y="3695700"/>
-            <a:ext cx="10820400" cy="226695"/>
-          </a:xfrm>
-          <a:prstGeom prst="rect">
-            <a:avLst/>
-          </a:prstGeom>
-          <a:noFill/>
-          <a:ln/>
-        </p:spPr>
-        <p:txBody>
-          <a:bodyPr wrap="square" lIns="0" tIns="0" rIns="0" bIns="0" rtlCol="0" anchor="t"/>
-          <a:lstStyle/>
-          <a:p>
-            <a:pPr algn="ctr" indent="0" marL="0">
-              <a:lnSpc>
-                <a:spcPts val="1785"/>
-              </a:lnSpc>
-              <a:buNone/>
-            </a:pPr>
-            <a:r>
-              <a:rPr lang="en-US" sz="1275" dirty="0">
-                <a:solidFill>
-                  <a:srgbClr val="63798F"/>
-                </a:solidFill>
-                <a:latin typeface="Malgun Gothic" pitchFamily="34" charset="0"/>
-                <a:ea typeface="Malgun Gothic" pitchFamily="34" charset="-122"/>
-                <a:cs typeface="Malgun Gothic" pitchFamily="34" charset="-120"/>
-              </a:rPr>
-              <a:t>작성 예정 — 이 장은 아직 만들지 않았습니다.</a:t>
-            </a:r>
-            <a:endParaRPr lang="en-US" sz="1275" dirty="0"/>
-          </a:p>
-        </p:txBody>
-      </p:sp>
-      <p:sp>
-        <p:nvSpPr>
-          <p:cNvPr id="14" name="Text 12"/>
-          <p:cNvSpPr txBox="1"/>
-          <p:nvPr/>
-        </p:nvSpPr>
-        <p:spPr>
-          <a:xfrm>
-            <a:off x="685800" y="4038600"/>
-            <a:ext cx="10820400" cy="125016"/>
-          </a:xfrm>
-          <a:prstGeom prst="rect">
-            <a:avLst/>
-          </a:prstGeom>
-          <a:noFill/>
-          <a:ln/>
-        </p:spPr>
-        <p:txBody>
-          <a:bodyPr wrap="square" lIns="0" tIns="0" rIns="0" bIns="0" rtlCol="0" anchor="t"/>
-          <a:lstStyle/>
-          <a:p>
-            <a:pPr algn="l" indent="0" marL="0">
-              <a:lnSpc>
-                <a:spcPts val="984"/>
-              </a:lnSpc>
-              <a:buNone/>
-            </a:pPr>
-            <a:r>
-              <a:rPr lang="en-US" sz="788" b="1" spc="150" kern="0" dirty="0">
-                <a:solidFill>
-                  <a:srgbClr val="7E2333"/>
-                </a:solidFill>
-                <a:latin typeface="Consolas" pitchFamily="34" charset="0"/>
-                <a:ea typeface="Consolas" pitchFamily="34" charset="-122"/>
-                <a:cs typeface="Consolas" pitchFamily="34" charset="-120"/>
-              </a:rPr>
-              <a:t>SLIDE 11  ·  TODO</a:t>
-            </a:r>
-            <a:endParaRPr lang="en-US" sz="788" dirty="0"/>
-          </a:p>
-        </p:txBody>
-      </p:sp>
-      <p:sp>
-        <p:nvSpPr>
-          <p:cNvPr id="15" name="Shape 13"/>
-          <p:cNvSpPr/>
-          <p:nvPr/>
-        </p:nvSpPr>
-        <p:spPr>
-          <a:xfrm>
-            <a:off x="685800" y="6057900"/>
-            <a:ext cx="10820400" cy="0"/>
-          </a:xfrm>
-          <a:prstGeom prst="line">
-            <a:avLst/>
-          </a:prstGeom>
-          <a:noFill/>
+          <p:cNvPr id="16" name="Shape 14"/>
+          <p:cNvSpPr/>
+          <p:nvPr/>
+        </p:nvSpPr>
+        <p:spPr>
+          <a:xfrm>
+            <a:off x="838200" y="3238500"/>
+            <a:ext cx="952500" cy="285750"/>
+          </a:xfrm>
+          <a:prstGeom prst="rect">
+            <a:avLst/>
+          </a:prstGeom>
           <a:ln w="12700">
             <a:solidFill>
               <a:srgbClr val="22354A"/>
@@ -7785,6 +7858,2207 @@
             <a:prstDash val="solid"/>
           </a:ln>
         </p:spPr>
+      </p:sp>
+      <p:sp>
+        <p:nvSpPr>
+          <p:cNvPr id="17" name="Text 15"/>
+          <p:cNvSpPr txBox="1"/>
+          <p:nvPr/>
+        </p:nvSpPr>
+        <p:spPr>
+          <a:xfrm>
+            <a:off x="933450" y="3305175"/>
+            <a:ext cx="762000" cy="148590"/>
+          </a:xfrm>
+          <a:prstGeom prst="rect">
+            <a:avLst/>
+          </a:prstGeom>
+          <a:noFill/>
+          <a:ln/>
+        </p:spPr>
+        <p:txBody>
+          <a:bodyPr wrap="square" lIns="0" tIns="0" rIns="0" bIns="0" rtlCol="0" anchor="t"/>
+          <a:lstStyle/>
+          <a:p>
+            <a:pPr algn="l" indent="0" marL="0">
+              <a:lnSpc>
+                <a:spcPts val="1170"/>
+              </a:lnSpc>
+              <a:buNone/>
+            </a:pPr>
+            <a:r>
+              <a:rPr lang="en-US" sz="975" dirty="0">
+                <a:solidFill>
+                  <a:srgbClr val="93A6BA"/>
+                </a:solidFill>
+                <a:latin typeface="Malgun Gothic" pitchFamily="34" charset="0"/>
+                <a:ea typeface="Malgun Gothic" pitchFamily="34" charset="-122"/>
+                <a:cs typeface="Malgun Gothic" pitchFamily="34" charset="-120"/>
+              </a:rPr>
+              <a:t>자동 취득</a:t>
+            </a:r>
+            <a:endParaRPr lang="en-US" sz="975" dirty="0"/>
+          </a:p>
+        </p:txBody>
+      </p:sp>
+      <p:sp>
+        <p:nvSpPr>
+          <p:cNvPr id="18" name="Shape 16"/>
+          <p:cNvSpPr/>
+          <p:nvPr/>
+        </p:nvSpPr>
+        <p:spPr>
+          <a:xfrm>
+            <a:off x="2133600" y="3238500"/>
+            <a:ext cx="1000125" cy="285750"/>
+          </a:xfrm>
+          <a:prstGeom prst="rect">
+            <a:avLst/>
+          </a:prstGeom>
+          <a:ln w="12700">
+            <a:solidFill>
+              <a:srgbClr val="22354A"/>
+            </a:solidFill>
+            <a:prstDash val="solid"/>
+          </a:ln>
+        </p:spPr>
+      </p:sp>
+      <p:sp>
+        <p:nvSpPr>
+          <p:cNvPr id="19" name="Text 17"/>
+          <p:cNvSpPr txBox="1"/>
+          <p:nvPr/>
+        </p:nvSpPr>
+        <p:spPr>
+          <a:xfrm>
+            <a:off x="2228850" y="3305175"/>
+            <a:ext cx="809625" cy="148590"/>
+          </a:xfrm>
+          <a:prstGeom prst="rect">
+            <a:avLst/>
+          </a:prstGeom>
+          <a:noFill/>
+          <a:ln/>
+        </p:spPr>
+        <p:txBody>
+          <a:bodyPr wrap="square" lIns="0" tIns="0" rIns="0" bIns="0" rtlCol="0" anchor="t"/>
+          <a:lstStyle/>
+          <a:p>
+            <a:pPr algn="l" indent="0" marL="0">
+              <a:lnSpc>
+                <a:spcPts val="1170"/>
+              </a:lnSpc>
+              <a:buNone/>
+            </a:pPr>
+            <a:r>
+              <a:rPr lang="en-US" sz="975" dirty="0">
+                <a:solidFill>
+                  <a:srgbClr val="93A6BA"/>
+                </a:solidFill>
+                <a:latin typeface="Malgun Gothic" pitchFamily="34" charset="0"/>
+                <a:ea typeface="Malgun Gothic" pitchFamily="34" charset="-122"/>
+                <a:cs typeface="Malgun Gothic" pitchFamily="34" charset="-120"/>
+              </a:rPr>
+              <a:t>검증 가드</a:t>
+            </a:r>
+            <a:endParaRPr lang="en-US" sz="975" dirty="0"/>
+          </a:p>
+        </p:txBody>
+      </p:sp>
+      <p:sp>
+        <p:nvSpPr>
+          <p:cNvPr id="20" name="Shape 18"/>
+          <p:cNvSpPr/>
+          <p:nvPr/>
+        </p:nvSpPr>
+        <p:spPr>
+          <a:xfrm>
+            <a:off x="3476625" y="3238500"/>
+            <a:ext cx="1000125" cy="285750"/>
+          </a:xfrm>
+          <a:prstGeom prst="rect">
+            <a:avLst/>
+          </a:prstGeom>
+          <a:ln w="12700">
+            <a:solidFill>
+              <a:srgbClr val="22354A"/>
+            </a:solidFill>
+            <a:prstDash val="solid"/>
+          </a:ln>
+        </p:spPr>
+      </p:sp>
+      <p:sp>
+        <p:nvSpPr>
+          <p:cNvPr id="21" name="Text 19"/>
+          <p:cNvSpPr txBox="1"/>
+          <p:nvPr/>
+        </p:nvSpPr>
+        <p:spPr>
+          <a:xfrm>
+            <a:off x="3571875" y="3305175"/>
+            <a:ext cx="809625" cy="148590"/>
+          </a:xfrm>
+          <a:prstGeom prst="rect">
+            <a:avLst/>
+          </a:prstGeom>
+          <a:noFill/>
+          <a:ln/>
+        </p:spPr>
+        <p:txBody>
+          <a:bodyPr wrap="square" lIns="0" tIns="0" rIns="0" bIns="0" rtlCol="0" anchor="t"/>
+          <a:lstStyle/>
+          <a:p>
+            <a:pPr algn="l" indent="0" marL="0">
+              <a:lnSpc>
+                <a:spcPts val="1170"/>
+              </a:lnSpc>
+              <a:buNone/>
+            </a:pPr>
+            <a:r>
+              <a:rPr lang="en-US" sz="975" dirty="0">
+                <a:solidFill>
+                  <a:srgbClr val="93A6BA"/>
+                </a:solidFill>
+                <a:latin typeface="Malgun Gothic" pitchFamily="34" charset="0"/>
+                <a:ea typeface="Malgun Gothic" pitchFamily="34" charset="-122"/>
+                <a:cs typeface="Malgun Gothic" pitchFamily="34" charset="-120"/>
+              </a:rPr>
+              <a:t>누적 반영</a:t>
+            </a:r>
+            <a:endParaRPr lang="en-US" sz="975" dirty="0"/>
+          </a:p>
+        </p:txBody>
+      </p:sp>
+      <p:sp>
+        <p:nvSpPr>
+          <p:cNvPr id="22" name="Shape 20"/>
+          <p:cNvSpPr/>
+          <p:nvPr/>
+        </p:nvSpPr>
+        <p:spPr>
+          <a:xfrm>
+            <a:off x="4819650" y="3238500"/>
+            <a:ext cx="1333500" cy="285750"/>
+          </a:xfrm>
+          <a:prstGeom prst="rect">
+            <a:avLst/>
+          </a:prstGeom>
+          <a:ln w="12700">
+            <a:solidFill>
+              <a:srgbClr val="6B5220"/>
+            </a:solidFill>
+            <a:prstDash val="solid"/>
+          </a:ln>
+        </p:spPr>
+      </p:sp>
+      <p:sp>
+        <p:nvSpPr>
+          <p:cNvPr id="23" name="Text 21"/>
+          <p:cNvSpPr txBox="1"/>
+          <p:nvPr/>
+        </p:nvSpPr>
+        <p:spPr>
+          <a:xfrm>
+            <a:off x="4914900" y="3305175"/>
+            <a:ext cx="1143000" cy="148590"/>
+          </a:xfrm>
+          <a:prstGeom prst="rect">
+            <a:avLst/>
+          </a:prstGeom>
+          <a:noFill/>
+          <a:ln/>
+        </p:spPr>
+        <p:txBody>
+          <a:bodyPr wrap="square" lIns="0" tIns="0" rIns="0" bIns="0" rtlCol="0" anchor="t"/>
+          <a:lstStyle/>
+          <a:p>
+            <a:pPr algn="l" indent="0" marL="0">
+              <a:lnSpc>
+                <a:spcPts val="1170"/>
+              </a:lnSpc>
+              <a:buNone/>
+            </a:pPr>
+            <a:r>
+              <a:rPr lang="en-US" sz="975" dirty="0">
+                <a:solidFill>
+                  <a:srgbClr val="EFB13C"/>
+                </a:solidFill>
+                <a:latin typeface="Malgun Gothic" pitchFamily="34" charset="0"/>
+                <a:ea typeface="Malgun Gothic" pitchFamily="34" charset="-122"/>
+                <a:cs typeface="Malgun Gothic" pitchFamily="34" charset="-120"/>
+              </a:rPr>
+              <a:t>재학습·재선정</a:t>
+            </a:r>
+            <a:endParaRPr lang="en-US" sz="975" dirty="0"/>
+          </a:p>
+        </p:txBody>
+      </p:sp>
+      <p:sp>
+        <p:nvSpPr>
+          <p:cNvPr id="24" name="Text 22"/>
+          <p:cNvSpPr txBox="1"/>
+          <p:nvPr/>
+        </p:nvSpPr>
+        <p:spPr>
+          <a:xfrm>
+            <a:off x="1866900" y="3305175"/>
+            <a:ext cx="190500" cy="148590"/>
+          </a:xfrm>
+          <a:prstGeom prst="rect">
+            <a:avLst/>
+          </a:prstGeom>
+          <a:noFill/>
+          <a:ln/>
+        </p:spPr>
+        <p:txBody>
+          <a:bodyPr wrap="square" lIns="0" tIns="0" rIns="0" bIns="0" rtlCol="0" anchor="t"/>
+          <a:lstStyle/>
+          <a:p>
+            <a:pPr algn="ctr" indent="0" marL="0">
+              <a:lnSpc>
+                <a:spcPts val="1170"/>
+              </a:lnSpc>
+              <a:buNone/>
+            </a:pPr>
+            <a:r>
+              <a:rPr lang="en-US" sz="975" dirty="0">
+                <a:solidFill>
+                  <a:srgbClr val="63798F"/>
+                </a:solidFill>
+                <a:latin typeface="Malgun Gothic" pitchFamily="34" charset="0"/>
+                <a:ea typeface="Malgun Gothic" pitchFamily="34" charset="-122"/>
+                <a:cs typeface="Malgun Gothic" pitchFamily="34" charset="-120"/>
+              </a:rPr>
+              <a:t>→</a:t>
+            </a:r>
+            <a:endParaRPr lang="en-US" sz="975" dirty="0"/>
+          </a:p>
+        </p:txBody>
+      </p:sp>
+      <p:sp>
+        <p:nvSpPr>
+          <p:cNvPr id="25" name="Text 23"/>
+          <p:cNvSpPr txBox="1"/>
+          <p:nvPr/>
+        </p:nvSpPr>
+        <p:spPr>
+          <a:xfrm>
+            <a:off x="3209925" y="3305175"/>
+            <a:ext cx="190500" cy="148590"/>
+          </a:xfrm>
+          <a:prstGeom prst="rect">
+            <a:avLst/>
+          </a:prstGeom>
+          <a:noFill/>
+          <a:ln/>
+        </p:spPr>
+        <p:txBody>
+          <a:bodyPr wrap="square" lIns="0" tIns="0" rIns="0" bIns="0" rtlCol="0" anchor="t"/>
+          <a:lstStyle/>
+          <a:p>
+            <a:pPr algn="ctr" indent="0" marL="0">
+              <a:lnSpc>
+                <a:spcPts val="1170"/>
+              </a:lnSpc>
+              <a:buNone/>
+            </a:pPr>
+            <a:r>
+              <a:rPr lang="en-US" sz="975" dirty="0">
+                <a:solidFill>
+                  <a:srgbClr val="63798F"/>
+                </a:solidFill>
+                <a:latin typeface="Malgun Gothic" pitchFamily="34" charset="0"/>
+                <a:ea typeface="Malgun Gothic" pitchFamily="34" charset="-122"/>
+                <a:cs typeface="Malgun Gothic" pitchFamily="34" charset="-120"/>
+              </a:rPr>
+              <a:t>→</a:t>
+            </a:r>
+            <a:endParaRPr lang="en-US" sz="975" dirty="0"/>
+          </a:p>
+        </p:txBody>
+      </p:sp>
+      <p:sp>
+        <p:nvSpPr>
+          <p:cNvPr id="26" name="Text 24"/>
+          <p:cNvSpPr txBox="1"/>
+          <p:nvPr/>
+        </p:nvSpPr>
+        <p:spPr>
+          <a:xfrm>
+            <a:off x="4552950" y="3305175"/>
+            <a:ext cx="190500" cy="148590"/>
+          </a:xfrm>
+          <a:prstGeom prst="rect">
+            <a:avLst/>
+          </a:prstGeom>
+          <a:noFill/>
+          <a:ln/>
+        </p:spPr>
+        <p:txBody>
+          <a:bodyPr wrap="square" lIns="0" tIns="0" rIns="0" bIns="0" rtlCol="0" anchor="t"/>
+          <a:lstStyle/>
+          <a:p>
+            <a:pPr algn="ctr" indent="0" marL="0">
+              <a:lnSpc>
+                <a:spcPts val="1170"/>
+              </a:lnSpc>
+              <a:buNone/>
+            </a:pPr>
+            <a:r>
+              <a:rPr lang="en-US" sz="975" dirty="0">
+                <a:solidFill>
+                  <a:srgbClr val="63798F"/>
+                </a:solidFill>
+                <a:latin typeface="Malgun Gothic" pitchFamily="34" charset="0"/>
+                <a:ea typeface="Malgun Gothic" pitchFamily="34" charset="-122"/>
+                <a:cs typeface="Malgun Gothic" pitchFamily="34" charset="-120"/>
+              </a:rPr>
+              <a:t>→</a:t>
+            </a:r>
+            <a:endParaRPr lang="en-US" sz="975" dirty="0"/>
+          </a:p>
+        </p:txBody>
+      </p:sp>
+      <p:sp>
+        <p:nvSpPr>
+          <p:cNvPr id="27" name="Shape 25"/>
+          <p:cNvSpPr/>
+          <p:nvPr/>
+        </p:nvSpPr>
+        <p:spPr>
+          <a:xfrm>
+            <a:off x="5486400" y="3600450"/>
+            <a:ext cx="0" cy="209550"/>
+          </a:xfrm>
+          <a:prstGeom prst="line">
+            <a:avLst/>
+          </a:prstGeom>
+          <a:noFill/>
+          <a:ln w="17780">
+            <a:solidFill>
+              <a:srgbClr val="EFB13C"/>
+            </a:solidFill>
+            <a:prstDash val="solid"/>
+          </a:ln>
+        </p:spPr>
+      </p:sp>
+      <p:sp>
+        <p:nvSpPr>
+          <p:cNvPr id="28" name="Shape 26"/>
+          <p:cNvSpPr/>
+          <p:nvPr/>
+        </p:nvSpPr>
+        <p:spPr>
+          <a:xfrm>
+            <a:off x="1314450" y="3810000"/>
+            <a:ext cx="4171950" cy="0"/>
+          </a:xfrm>
+          <a:prstGeom prst="line">
+            <a:avLst/>
+          </a:prstGeom>
+          <a:noFill/>
+          <a:ln w="17780">
+            <a:solidFill>
+              <a:srgbClr val="EFB13C"/>
+            </a:solidFill>
+            <a:prstDash val="solid"/>
+          </a:ln>
+        </p:spPr>
+      </p:sp>
+      <p:sp>
+        <p:nvSpPr>
+          <p:cNvPr id="29" name="Shape 27"/>
+          <p:cNvSpPr/>
+          <p:nvPr/>
+        </p:nvSpPr>
+        <p:spPr>
+          <a:xfrm>
+            <a:off x="1314450" y="3600450"/>
+            <a:ext cx="0" cy="209550"/>
+          </a:xfrm>
+          <a:prstGeom prst="line">
+            <a:avLst/>
+          </a:prstGeom>
+          <a:noFill/>
+          <a:ln w="17780">
+            <a:solidFill>
+              <a:srgbClr val="EFB13C"/>
+            </a:solidFill>
+            <a:prstDash val="solid"/>
+          </a:ln>
+        </p:spPr>
+      </p:sp>
+      <p:sp>
+        <p:nvSpPr>
+          <p:cNvPr id="30" name="Text 28"/>
+          <p:cNvSpPr txBox="1"/>
+          <p:nvPr/>
+        </p:nvSpPr>
+        <p:spPr>
+          <a:xfrm>
+            <a:off x="1257300" y="3524250"/>
+            <a:ext cx="133350" cy="94298"/>
+          </a:xfrm>
+          <a:prstGeom prst="rect">
+            <a:avLst/>
+          </a:prstGeom>
+          <a:noFill/>
+          <a:ln/>
+        </p:spPr>
+        <p:txBody>
+          <a:bodyPr wrap="square" lIns="0" tIns="0" rIns="0" bIns="0" rtlCol="0" anchor="t"/>
+          <a:lstStyle/>
+          <a:p>
+            <a:pPr algn="l" indent="0" marL="0">
+              <a:lnSpc>
+                <a:spcPts val="743"/>
+              </a:lnSpc>
+              <a:buNone/>
+            </a:pPr>
+            <a:r>
+              <a:rPr lang="en-US" sz="675" dirty="0">
+                <a:solidFill>
+                  <a:srgbClr val="EFB13C"/>
+                </a:solidFill>
+                <a:latin typeface="Malgun Gothic" pitchFamily="34" charset="0"/>
+                <a:ea typeface="Malgun Gothic" pitchFamily="34" charset="-122"/>
+                <a:cs typeface="Malgun Gothic" pitchFamily="34" charset="-120"/>
+              </a:rPr>
+              <a:t>▲</a:t>
+            </a:r>
+            <a:endParaRPr lang="en-US" sz="675" dirty="0"/>
+          </a:p>
+        </p:txBody>
+      </p:sp>
+      <p:sp>
+        <p:nvSpPr>
+          <p:cNvPr id="31" name="Text 29"/>
+          <p:cNvSpPr txBox="1"/>
+          <p:nvPr/>
+        </p:nvSpPr>
+        <p:spPr>
+          <a:xfrm>
+            <a:off x="2857500" y="3848100"/>
+            <a:ext cx="1905000" cy="142399"/>
+          </a:xfrm>
+          <a:prstGeom prst="rect">
+            <a:avLst/>
+          </a:prstGeom>
+          <a:noFill/>
+          <a:ln/>
+        </p:spPr>
+        <p:txBody>
+          <a:bodyPr wrap="square" lIns="0" tIns="0" rIns="0" bIns="0" rtlCol="0" anchor="t"/>
+          <a:lstStyle/>
+          <a:p>
+            <a:pPr algn="l" indent="0" marL="0">
+              <a:lnSpc>
+                <a:spcPts val="1121"/>
+              </a:lnSpc>
+              <a:buNone/>
+            </a:pPr>
+            <a:r>
+              <a:rPr lang="en-US" sz="863" dirty="0">
+                <a:solidFill>
+                  <a:srgbClr val="63798F"/>
+                </a:solidFill>
+                <a:latin typeface="Consolas" pitchFamily="34" charset="0"/>
+                <a:ea typeface="Consolas" pitchFamily="34" charset="-122"/>
+                <a:cs typeface="Consolas" pitchFamily="34" charset="-120"/>
+              </a:rPr>
+              <a:t>회차가 쌓일 때마다</a:t>
+            </a:r>
+            <a:endParaRPr lang="en-US" sz="863" dirty="0"/>
+          </a:p>
+        </p:txBody>
+      </p:sp>
+      <p:sp>
+        <p:nvSpPr>
+          <p:cNvPr id="32" name="Text 30"/>
+          <p:cNvSpPr txBox="1"/>
+          <p:nvPr/>
+        </p:nvSpPr>
+        <p:spPr>
+          <a:xfrm>
+            <a:off x="685800" y="4286250"/>
+            <a:ext cx="1238250" cy="173593"/>
+          </a:xfrm>
+          <a:prstGeom prst="rect">
+            <a:avLst/>
+          </a:prstGeom>
+          <a:noFill/>
+          <a:ln/>
+        </p:spPr>
+        <p:txBody>
+          <a:bodyPr wrap="square" lIns="0" tIns="0" rIns="0" bIns="0" rtlCol="0" anchor="t"/>
+          <a:lstStyle/>
+          <a:p>
+            <a:pPr algn="l" indent="0" marL="0">
+              <a:lnSpc>
+                <a:spcPts val="1367"/>
+              </a:lnSpc>
+              <a:buNone/>
+            </a:pPr>
+            <a:r>
+              <a:rPr lang="en-US" sz="1013" b="1" dirty="0">
+                <a:solidFill>
+                  <a:srgbClr val="EFB13C"/>
+                </a:solidFill>
+                <a:latin typeface="Malgun Gothic" pitchFamily="34" charset="0"/>
+                <a:ea typeface="Malgun Gothic" pitchFamily="34" charset="-122"/>
+                <a:cs typeface="Malgun Gothic" pitchFamily="34" charset="-120"/>
+              </a:rPr>
+              <a:t>자동 취득</a:t>
+            </a:r>
+            <a:endParaRPr lang="en-US" sz="1013" dirty="0"/>
+          </a:p>
+        </p:txBody>
+      </p:sp>
+      <p:sp>
+        <p:nvSpPr>
+          <p:cNvPr id="33" name="Text 31"/>
+          <p:cNvSpPr txBox="1"/>
+          <p:nvPr/>
+        </p:nvSpPr>
+        <p:spPr>
+          <a:xfrm>
+            <a:off x="2000250" y="4286250"/>
+            <a:ext cx="4362450" cy="173593"/>
+          </a:xfrm>
+          <a:prstGeom prst="rect">
+            <a:avLst/>
+          </a:prstGeom>
+          <a:noFill/>
+          <a:ln/>
+        </p:spPr>
+        <p:txBody>
+          <a:bodyPr wrap="square" lIns="0" tIns="0" rIns="0" bIns="0" rtlCol="0" anchor="t"/>
+          <a:lstStyle/>
+          <a:p>
+            <a:pPr algn="l" indent="0" marL="0">
+              <a:lnSpc>
+                <a:spcPts val="1367"/>
+              </a:lnSpc>
+              <a:buNone/>
+            </a:pPr>
+            <a:r>
+              <a:rPr lang="en-US" sz="1013" dirty="0">
+                <a:solidFill>
+                  <a:srgbClr val="BCC9D6"/>
+                </a:solidFill>
+                <a:latin typeface="Malgun Gothic" pitchFamily="34" charset="0"/>
+                <a:ea typeface="Malgun Gothic" pitchFamily="34" charset="-122"/>
+                <a:cs typeface="Malgun Gothic" pitchFamily="34" charset="-120"/>
+              </a:rPr>
+              <a:t>설비에서 6가지 값을 직접 받습니다. 옮겨 적는 단계가 없습니다.</a:t>
+            </a:r>
+            <a:endParaRPr lang="en-US" sz="1013" dirty="0"/>
+          </a:p>
+        </p:txBody>
+      </p:sp>
+      <p:sp>
+        <p:nvSpPr>
+          <p:cNvPr id="34" name="Shape 32"/>
+          <p:cNvSpPr/>
+          <p:nvPr/>
+        </p:nvSpPr>
+        <p:spPr>
+          <a:xfrm>
+            <a:off x="685800" y="4572000"/>
+            <a:ext cx="5676900" cy="0"/>
+          </a:xfrm>
+          <a:prstGeom prst="line">
+            <a:avLst/>
+          </a:prstGeom>
+          <a:noFill/>
+          <a:ln w="12700">
+            <a:solidFill>
+              <a:srgbClr val="182838"/>
+            </a:solidFill>
+            <a:prstDash val="solid"/>
+          </a:ln>
+        </p:spPr>
+      </p:sp>
+      <p:sp>
+        <p:nvSpPr>
+          <p:cNvPr id="35" name="Text 33"/>
+          <p:cNvSpPr txBox="1"/>
+          <p:nvPr/>
+        </p:nvSpPr>
+        <p:spPr>
+          <a:xfrm>
+            <a:off x="685800" y="4667250"/>
+            <a:ext cx="1238250" cy="173593"/>
+          </a:xfrm>
+          <a:prstGeom prst="rect">
+            <a:avLst/>
+          </a:prstGeom>
+          <a:noFill/>
+          <a:ln/>
+        </p:spPr>
+        <p:txBody>
+          <a:bodyPr wrap="square" lIns="0" tIns="0" rIns="0" bIns="0" rtlCol="0" anchor="t"/>
+          <a:lstStyle/>
+          <a:p>
+            <a:pPr algn="l" indent="0" marL="0">
+              <a:lnSpc>
+                <a:spcPts val="1367"/>
+              </a:lnSpc>
+              <a:buNone/>
+            </a:pPr>
+            <a:r>
+              <a:rPr lang="en-US" sz="1013" b="1" dirty="0">
+                <a:solidFill>
+                  <a:srgbClr val="EFB13C"/>
+                </a:solidFill>
+                <a:latin typeface="Malgun Gothic" pitchFamily="34" charset="0"/>
+                <a:ea typeface="Malgun Gothic" pitchFamily="34" charset="-122"/>
+                <a:cs typeface="Malgun Gothic" pitchFamily="34" charset="-120"/>
+              </a:rPr>
+              <a:t>검증 가드</a:t>
+            </a:r>
+            <a:endParaRPr lang="en-US" sz="1013" dirty="0"/>
+          </a:p>
+        </p:txBody>
+      </p:sp>
+      <p:sp>
+        <p:nvSpPr>
+          <p:cNvPr id="36" name="Text 34"/>
+          <p:cNvSpPr txBox="1"/>
+          <p:nvPr/>
+        </p:nvSpPr>
+        <p:spPr>
+          <a:xfrm>
+            <a:off x="2000250" y="4667250"/>
+            <a:ext cx="4362450" cy="173593"/>
+          </a:xfrm>
+          <a:prstGeom prst="rect">
+            <a:avLst/>
+          </a:prstGeom>
+          <a:noFill/>
+          <a:ln/>
+        </p:spPr>
+        <p:txBody>
+          <a:bodyPr wrap="square" lIns="0" tIns="0" rIns="0" bIns="0" rtlCol="0" anchor="t"/>
+          <a:lstStyle/>
+          <a:p>
+            <a:pPr algn="l" indent="0" marL="0">
+              <a:lnSpc>
+                <a:spcPts val="1367"/>
+              </a:lnSpc>
+              <a:buNone/>
+            </a:pPr>
+            <a:r>
+              <a:rPr lang="en-US" sz="1013" dirty="0">
+                <a:solidFill>
+                  <a:srgbClr val="BCC9D6"/>
+                </a:solidFill>
+                <a:latin typeface="Malgun Gothic" pitchFamily="34" charset="0"/>
+                <a:ea typeface="Malgun Gothic" pitchFamily="34" charset="-122"/>
+                <a:cs typeface="Malgun Gothic" pitchFamily="34" charset="-120"/>
+              </a:rPr>
+              <a:t>IGV 미실시·습도계 이탈이면 그 회차는 누적에 넣지 않습니다.</a:t>
+            </a:r>
+            <a:endParaRPr lang="en-US" sz="1013" dirty="0"/>
+          </a:p>
+        </p:txBody>
+      </p:sp>
+      <p:sp>
+        <p:nvSpPr>
+          <p:cNvPr id="37" name="Shape 35"/>
+          <p:cNvSpPr/>
+          <p:nvPr/>
+        </p:nvSpPr>
+        <p:spPr>
+          <a:xfrm>
+            <a:off x="685800" y="4953000"/>
+            <a:ext cx="5676900" cy="0"/>
+          </a:xfrm>
+          <a:prstGeom prst="line">
+            <a:avLst/>
+          </a:prstGeom>
+          <a:noFill/>
+          <a:ln w="12700">
+            <a:solidFill>
+              <a:srgbClr val="182838"/>
+            </a:solidFill>
+            <a:prstDash val="solid"/>
+          </a:ln>
+        </p:spPr>
+      </p:sp>
+      <p:sp>
+        <p:nvSpPr>
+          <p:cNvPr id="38" name="Text 36"/>
+          <p:cNvSpPr txBox="1"/>
+          <p:nvPr/>
+        </p:nvSpPr>
+        <p:spPr>
+          <a:xfrm>
+            <a:off x="685800" y="5048250"/>
+            <a:ext cx="1238250" cy="173593"/>
+          </a:xfrm>
+          <a:prstGeom prst="rect">
+            <a:avLst/>
+          </a:prstGeom>
+          <a:noFill/>
+          <a:ln/>
+        </p:spPr>
+        <p:txBody>
+          <a:bodyPr wrap="square" lIns="0" tIns="0" rIns="0" bIns="0" rtlCol="0" anchor="t"/>
+          <a:lstStyle/>
+          <a:p>
+            <a:pPr algn="l" indent="0" marL="0">
+              <a:lnSpc>
+                <a:spcPts val="1367"/>
+              </a:lnSpc>
+              <a:buNone/>
+            </a:pPr>
+            <a:r>
+              <a:rPr lang="en-US" sz="1013" b="1" dirty="0">
+                <a:solidFill>
+                  <a:srgbClr val="EFB13C"/>
+                </a:solidFill>
+                <a:latin typeface="Malgun Gothic" pitchFamily="34" charset="0"/>
+                <a:ea typeface="Malgun Gothic" pitchFamily="34" charset="-122"/>
+                <a:cs typeface="Malgun Gothic" pitchFamily="34" charset="-120"/>
+              </a:rPr>
+              <a:t>누적 반영</a:t>
+            </a:r>
+            <a:endParaRPr lang="en-US" sz="1013" dirty="0"/>
+          </a:p>
+        </p:txBody>
+      </p:sp>
+      <p:sp>
+        <p:nvSpPr>
+          <p:cNvPr id="39" name="Text 37"/>
+          <p:cNvSpPr txBox="1"/>
+          <p:nvPr/>
+        </p:nvSpPr>
+        <p:spPr>
+          <a:xfrm>
+            <a:off x="2000250" y="5048250"/>
+            <a:ext cx="4362450" cy="173593"/>
+          </a:xfrm>
+          <a:prstGeom prst="rect">
+            <a:avLst/>
+          </a:prstGeom>
+          <a:noFill/>
+          <a:ln/>
+        </p:spPr>
+        <p:txBody>
+          <a:bodyPr wrap="square" lIns="0" tIns="0" rIns="0" bIns="0" rtlCol="0" anchor="t"/>
+          <a:lstStyle/>
+          <a:p>
+            <a:pPr algn="l" indent="0" marL="0">
+              <a:lnSpc>
+                <a:spcPts val="1367"/>
+              </a:lnSpc>
+              <a:buNone/>
+            </a:pPr>
+            <a:r>
+              <a:rPr lang="en-US" sz="1013" dirty="0">
+                <a:solidFill>
+                  <a:srgbClr val="BCC9D6"/>
+                </a:solidFill>
+                <a:latin typeface="Malgun Gothic" pitchFamily="34" charset="0"/>
+                <a:ea typeface="Malgun Gothic" pitchFamily="34" charset="-122"/>
+                <a:cs typeface="Malgun Gothic" pitchFamily="34" charset="-120"/>
+              </a:rPr>
+              <a:t>통과한 회차만 학습 데이터가 됩니다. 이력은 그대로 남습니다.</a:t>
+            </a:r>
+            <a:endParaRPr lang="en-US" sz="1013" dirty="0"/>
+          </a:p>
+        </p:txBody>
+      </p:sp>
+      <p:sp>
+        <p:nvSpPr>
+          <p:cNvPr id="40" name="Shape 38"/>
+          <p:cNvSpPr/>
+          <p:nvPr/>
+        </p:nvSpPr>
+        <p:spPr>
+          <a:xfrm>
+            <a:off x="685800" y="5334000"/>
+            <a:ext cx="5676900" cy="0"/>
+          </a:xfrm>
+          <a:prstGeom prst="line">
+            <a:avLst/>
+          </a:prstGeom>
+          <a:noFill/>
+          <a:ln w="12700">
+            <a:solidFill>
+              <a:srgbClr val="182838"/>
+            </a:solidFill>
+            <a:prstDash val="solid"/>
+          </a:ln>
+        </p:spPr>
+      </p:sp>
+      <p:sp>
+        <p:nvSpPr>
+          <p:cNvPr id="41" name="Text 39"/>
+          <p:cNvSpPr txBox="1"/>
+          <p:nvPr/>
+        </p:nvSpPr>
+        <p:spPr>
+          <a:xfrm>
+            <a:off x="685800" y="5429250"/>
+            <a:ext cx="1238250" cy="173593"/>
+          </a:xfrm>
+          <a:prstGeom prst="rect">
+            <a:avLst/>
+          </a:prstGeom>
+          <a:noFill/>
+          <a:ln/>
+        </p:spPr>
+        <p:txBody>
+          <a:bodyPr wrap="square" lIns="0" tIns="0" rIns="0" bIns="0" rtlCol="0" anchor="t"/>
+          <a:lstStyle/>
+          <a:p>
+            <a:pPr algn="l" indent="0" marL="0">
+              <a:lnSpc>
+                <a:spcPts val="1367"/>
+              </a:lnSpc>
+              <a:buNone/>
+            </a:pPr>
+            <a:r>
+              <a:rPr lang="en-US" sz="1013" b="1" dirty="0">
+                <a:solidFill>
+                  <a:srgbClr val="EFB13C"/>
+                </a:solidFill>
+                <a:latin typeface="Malgun Gothic" pitchFamily="34" charset="0"/>
+                <a:ea typeface="Malgun Gothic" pitchFamily="34" charset="-122"/>
+                <a:cs typeface="Malgun Gothic" pitchFamily="34" charset="-120"/>
+              </a:rPr>
+              <a:t>재학습·재선정</a:t>
+            </a:r>
+            <a:endParaRPr lang="en-US" sz="1013" dirty="0"/>
+          </a:p>
+        </p:txBody>
+      </p:sp>
+      <p:sp>
+        <p:nvSpPr>
+          <p:cNvPr id="42" name="Text 40"/>
+          <p:cNvSpPr txBox="1"/>
+          <p:nvPr/>
+        </p:nvSpPr>
+        <p:spPr>
+          <a:xfrm>
+            <a:off x="2000250" y="5429250"/>
+            <a:ext cx="4362450" cy="173593"/>
+          </a:xfrm>
+          <a:prstGeom prst="rect">
+            <a:avLst/>
+          </a:prstGeom>
+          <a:noFill/>
+          <a:ln/>
+        </p:spPr>
+        <p:txBody>
+          <a:bodyPr wrap="square" lIns="0" tIns="0" rIns="0" bIns="0" rtlCol="0" anchor="t"/>
+          <a:lstStyle/>
+          <a:p>
+            <a:pPr algn="l" indent="0" marL="0">
+              <a:lnSpc>
+                <a:spcPts val="1367"/>
+              </a:lnSpc>
+              <a:buNone/>
+            </a:pPr>
+            <a:r>
+              <a:rPr lang="en-US" sz="1013" dirty="0">
+                <a:solidFill>
+                  <a:srgbClr val="BCC9D6"/>
+                </a:solidFill>
+                <a:latin typeface="Malgun Gothic" pitchFamily="34" charset="0"/>
+                <a:ea typeface="Malgun Gothic" pitchFamily="34" charset="-122"/>
+                <a:cs typeface="Malgun Gothic" pitchFamily="34" charset="-120"/>
+              </a:rPr>
+              <a:t>누적이 늘면 7가지를 다시 채점해 1위를 다시 고릅니다.</a:t>
+            </a:r>
+            <a:endParaRPr lang="en-US" sz="1013" dirty="0"/>
+          </a:p>
+        </p:txBody>
+      </p:sp>
+      <p:sp>
+        <p:nvSpPr>
+          <p:cNvPr id="43" name="Shape 41"/>
+          <p:cNvSpPr/>
+          <p:nvPr/>
+        </p:nvSpPr>
+        <p:spPr>
+          <a:xfrm>
+            <a:off x="6591300" y="2743200"/>
+            <a:ext cx="4914900" cy="19050"/>
+          </a:xfrm>
+          <a:prstGeom prst="rect">
+            <a:avLst/>
+          </a:prstGeom>
+          <a:solidFill>
+            <a:srgbClr val="22354A"/>
+          </a:solidFill>
+          <a:ln/>
+        </p:spPr>
+      </p:sp>
+      <p:sp>
+        <p:nvSpPr>
+          <p:cNvPr id="44" name="Text 42"/>
+          <p:cNvSpPr txBox="1"/>
+          <p:nvPr/>
+        </p:nvSpPr>
+        <p:spPr>
+          <a:xfrm>
+            <a:off x="6591300" y="2876550"/>
+            <a:ext cx="4914900" cy="125016"/>
+          </a:xfrm>
+          <a:prstGeom prst="rect">
+            <a:avLst/>
+          </a:prstGeom>
+          <a:noFill/>
+          <a:ln/>
+        </p:spPr>
+        <p:txBody>
+          <a:bodyPr wrap="square" lIns="0" tIns="0" rIns="0" bIns="0" rtlCol="0" anchor="t"/>
+          <a:lstStyle/>
+          <a:p>
+            <a:pPr algn="l" indent="0" marL="0">
+              <a:lnSpc>
+                <a:spcPts val="984"/>
+              </a:lnSpc>
+              <a:buNone/>
+            </a:pPr>
+            <a:r>
+              <a:rPr lang="en-US" sz="788" b="1" spc="150" kern="0" dirty="0">
+                <a:solidFill>
+                  <a:srgbClr val="63798F"/>
+                </a:solidFill>
+                <a:latin typeface="Consolas" pitchFamily="34" charset="0"/>
+                <a:ea typeface="Consolas" pitchFamily="34" charset="-122"/>
+                <a:cs typeface="Consolas" pitchFamily="34" charset="-120"/>
+              </a:rPr>
+              <a:t>온도 구간별 데이터 현황  ·  누적 36회차</a:t>
+            </a:r>
+            <a:endParaRPr lang="en-US" sz="788" dirty="0"/>
+          </a:p>
+        </p:txBody>
+      </p:sp>
+      <p:sp>
+        <p:nvSpPr>
+          <p:cNvPr id="45" name="Shape 43"/>
+          <p:cNvSpPr/>
+          <p:nvPr/>
+        </p:nvSpPr>
+        <p:spPr>
+          <a:xfrm>
+            <a:off x="6591300" y="3067050"/>
+            <a:ext cx="4914900" cy="2266950"/>
+          </a:xfrm>
+          <a:prstGeom prst="rect">
+            <a:avLst/>
+          </a:prstGeom>
+          <a:solidFill>
+            <a:srgbClr val="0A1320"/>
+          </a:solidFill>
+          <a:ln w="12700">
+            <a:solidFill>
+              <a:srgbClr val="182838"/>
+            </a:solidFill>
+            <a:prstDash val="solid"/>
+          </a:ln>
+        </p:spPr>
+      </p:sp>
+      <p:sp>
+        <p:nvSpPr>
+          <p:cNvPr id="46" name="Shape 44"/>
+          <p:cNvSpPr/>
+          <p:nvPr/>
+        </p:nvSpPr>
+        <p:spPr>
+          <a:xfrm>
+            <a:off x="6743700" y="3276600"/>
+            <a:ext cx="95250" cy="95250"/>
+          </a:xfrm>
+          <a:prstGeom prst="rect">
+            <a:avLst/>
+          </a:prstGeom>
+          <a:solidFill>
+            <a:srgbClr val="EFB13C"/>
+          </a:solidFill>
+          <a:ln/>
+        </p:spPr>
+      </p:sp>
+      <p:sp>
+        <p:nvSpPr>
+          <p:cNvPr id="47" name="Text 45"/>
+          <p:cNvSpPr txBox="1"/>
+          <p:nvPr/>
+        </p:nvSpPr>
+        <p:spPr>
+          <a:xfrm>
+            <a:off x="6953250" y="3248025"/>
+            <a:ext cx="914400" cy="154781"/>
+          </a:xfrm>
+          <a:prstGeom prst="rect">
+            <a:avLst/>
+          </a:prstGeom>
+          <a:noFill/>
+          <a:ln/>
+        </p:spPr>
+        <p:txBody>
+          <a:bodyPr wrap="square" lIns="0" tIns="0" rIns="0" bIns="0" rtlCol="0" anchor="t"/>
+          <a:lstStyle/>
+          <a:p>
+            <a:pPr algn="l" indent="0" marL="0">
+              <a:lnSpc>
+                <a:spcPts val="1219"/>
+              </a:lnSpc>
+              <a:buNone/>
+            </a:pPr>
+            <a:r>
+              <a:rPr lang="en-US" sz="938" dirty="0">
+                <a:solidFill>
+                  <a:srgbClr val="BCC9D6"/>
+                </a:solidFill>
+                <a:latin typeface="Consolas" pitchFamily="34" charset="0"/>
+                <a:ea typeface="Consolas" pitchFamily="34" charset="-122"/>
+                <a:cs typeface="Consolas" pitchFamily="34" charset="-120"/>
+              </a:rPr>
+              <a:t>0 ~ 10℃</a:t>
+            </a:r>
+            <a:endParaRPr lang="en-US" sz="938" dirty="0"/>
+          </a:p>
+        </p:txBody>
+      </p:sp>
+      <p:sp>
+        <p:nvSpPr>
+          <p:cNvPr id="48" name="Shape 46"/>
+          <p:cNvSpPr/>
+          <p:nvPr/>
+        </p:nvSpPr>
+        <p:spPr>
+          <a:xfrm>
+            <a:off x="8001000" y="3276600"/>
+            <a:ext cx="800100" cy="95250"/>
+          </a:xfrm>
+          <a:prstGeom prst="rect">
+            <a:avLst/>
+          </a:prstGeom>
+          <a:solidFill>
+            <a:srgbClr val="8A6620"/>
+          </a:solidFill>
+          <a:ln/>
+        </p:spPr>
+      </p:sp>
+      <p:sp>
+        <p:nvSpPr>
+          <p:cNvPr id="49" name="Text 47"/>
+          <p:cNvSpPr txBox="1"/>
+          <p:nvPr/>
+        </p:nvSpPr>
+        <p:spPr>
+          <a:xfrm>
+            <a:off x="9429750" y="3248025"/>
+            <a:ext cx="476250" cy="154781"/>
+          </a:xfrm>
+          <a:prstGeom prst="rect">
+            <a:avLst/>
+          </a:prstGeom>
+          <a:noFill/>
+          <a:ln/>
+        </p:spPr>
+        <p:txBody>
+          <a:bodyPr wrap="square" lIns="0" tIns="0" rIns="0" bIns="0" rtlCol="0" anchor="t"/>
+          <a:lstStyle/>
+          <a:p>
+            <a:pPr algn="l" indent="0" marL="0">
+              <a:lnSpc>
+                <a:spcPts val="1219"/>
+              </a:lnSpc>
+              <a:buNone/>
+            </a:pPr>
+            <a:r>
+              <a:rPr lang="en-US" sz="938" dirty="0">
+                <a:solidFill>
+                  <a:srgbClr val="93A6BA"/>
+                </a:solidFill>
+                <a:latin typeface="Consolas" pitchFamily="34" charset="0"/>
+                <a:ea typeface="Consolas" pitchFamily="34" charset="-122"/>
+                <a:cs typeface="Consolas" pitchFamily="34" charset="-120"/>
+              </a:rPr>
+              <a:t>7건</a:t>
+            </a:r>
+            <a:endParaRPr lang="en-US" sz="938" dirty="0"/>
+          </a:p>
+        </p:txBody>
+      </p:sp>
+      <p:sp>
+        <p:nvSpPr>
+          <p:cNvPr id="50" name="Text 48"/>
+          <p:cNvSpPr txBox="1"/>
+          <p:nvPr/>
+        </p:nvSpPr>
+        <p:spPr>
+          <a:xfrm>
+            <a:off x="10668000" y="3248025"/>
+            <a:ext cx="685800" cy="154781"/>
+          </a:xfrm>
+          <a:prstGeom prst="rect">
+            <a:avLst/>
+          </a:prstGeom>
+          <a:noFill/>
+          <a:ln/>
+        </p:spPr>
+        <p:txBody>
+          <a:bodyPr wrap="square" lIns="0" tIns="0" rIns="0" bIns="0" rtlCol="0" anchor="t"/>
+          <a:lstStyle/>
+          <a:p>
+            <a:pPr algn="r" indent="0" marL="0">
+              <a:lnSpc>
+                <a:spcPts val="1219"/>
+              </a:lnSpc>
+              <a:buNone/>
+            </a:pPr>
+            <a:r>
+              <a:rPr lang="en-US" sz="938" b="1" dirty="0">
+                <a:solidFill>
+                  <a:srgbClr val="EFB13C"/>
+                </a:solidFill>
+                <a:latin typeface="Malgun Gothic" pitchFamily="34" charset="0"/>
+                <a:ea typeface="Malgun Gothic" pitchFamily="34" charset="-122"/>
+                <a:cs typeface="Malgun Gothic" pitchFamily="34" charset="-120"/>
+              </a:rPr>
+              <a:t>충분</a:t>
+            </a:r>
+            <a:endParaRPr lang="en-US" sz="938" dirty="0"/>
+          </a:p>
+        </p:txBody>
+      </p:sp>
+      <p:sp>
+        <p:nvSpPr>
+          <p:cNvPr id="51" name="Shape 49"/>
+          <p:cNvSpPr/>
+          <p:nvPr/>
+        </p:nvSpPr>
+        <p:spPr>
+          <a:xfrm>
+            <a:off x="6743700" y="3619500"/>
+            <a:ext cx="95250" cy="95250"/>
+          </a:xfrm>
+          <a:prstGeom prst="rect">
+            <a:avLst/>
+          </a:prstGeom>
+          <a:solidFill>
+            <a:srgbClr val="EFB13C"/>
+          </a:solidFill>
+          <a:ln/>
+        </p:spPr>
+      </p:sp>
+      <p:sp>
+        <p:nvSpPr>
+          <p:cNvPr id="52" name="Text 50"/>
+          <p:cNvSpPr txBox="1"/>
+          <p:nvPr/>
+        </p:nvSpPr>
+        <p:spPr>
+          <a:xfrm>
+            <a:off x="6953250" y="3590925"/>
+            <a:ext cx="914400" cy="154781"/>
+          </a:xfrm>
+          <a:prstGeom prst="rect">
+            <a:avLst/>
+          </a:prstGeom>
+          <a:noFill/>
+          <a:ln/>
+        </p:spPr>
+        <p:txBody>
+          <a:bodyPr wrap="square" lIns="0" tIns="0" rIns="0" bIns="0" rtlCol="0" anchor="t"/>
+          <a:lstStyle/>
+          <a:p>
+            <a:pPr algn="l" indent="0" marL="0">
+              <a:lnSpc>
+                <a:spcPts val="1219"/>
+              </a:lnSpc>
+              <a:buNone/>
+            </a:pPr>
+            <a:r>
+              <a:rPr lang="en-US" sz="938" dirty="0">
+                <a:solidFill>
+                  <a:srgbClr val="BCC9D6"/>
+                </a:solidFill>
+                <a:latin typeface="Consolas" pitchFamily="34" charset="0"/>
+                <a:ea typeface="Consolas" pitchFamily="34" charset="-122"/>
+                <a:cs typeface="Consolas" pitchFamily="34" charset="-120"/>
+              </a:rPr>
+              <a:t>10 ~ 15℃</a:t>
+            </a:r>
+            <a:endParaRPr lang="en-US" sz="938" dirty="0"/>
+          </a:p>
+        </p:txBody>
+      </p:sp>
+      <p:sp>
+        <p:nvSpPr>
+          <p:cNvPr id="53" name="Shape 51"/>
+          <p:cNvSpPr/>
+          <p:nvPr/>
+        </p:nvSpPr>
+        <p:spPr>
+          <a:xfrm>
+            <a:off x="8001000" y="3619500"/>
+            <a:ext cx="685800" cy="95250"/>
+          </a:xfrm>
+          <a:prstGeom prst="rect">
+            <a:avLst/>
+          </a:prstGeom>
+          <a:solidFill>
+            <a:srgbClr val="8A6620"/>
+          </a:solidFill>
+          <a:ln/>
+        </p:spPr>
+      </p:sp>
+      <p:sp>
+        <p:nvSpPr>
+          <p:cNvPr id="54" name="Text 52"/>
+          <p:cNvSpPr txBox="1"/>
+          <p:nvPr/>
+        </p:nvSpPr>
+        <p:spPr>
+          <a:xfrm>
+            <a:off x="9429750" y="3590925"/>
+            <a:ext cx="476250" cy="154781"/>
+          </a:xfrm>
+          <a:prstGeom prst="rect">
+            <a:avLst/>
+          </a:prstGeom>
+          <a:noFill/>
+          <a:ln/>
+        </p:spPr>
+        <p:txBody>
+          <a:bodyPr wrap="square" lIns="0" tIns="0" rIns="0" bIns="0" rtlCol="0" anchor="t"/>
+          <a:lstStyle/>
+          <a:p>
+            <a:pPr algn="l" indent="0" marL="0">
+              <a:lnSpc>
+                <a:spcPts val="1219"/>
+              </a:lnSpc>
+              <a:buNone/>
+            </a:pPr>
+            <a:r>
+              <a:rPr lang="en-US" sz="938" dirty="0">
+                <a:solidFill>
+                  <a:srgbClr val="93A6BA"/>
+                </a:solidFill>
+                <a:latin typeface="Consolas" pitchFamily="34" charset="0"/>
+                <a:ea typeface="Consolas" pitchFamily="34" charset="-122"/>
+                <a:cs typeface="Consolas" pitchFamily="34" charset="-120"/>
+              </a:rPr>
+              <a:t>6건</a:t>
+            </a:r>
+            <a:endParaRPr lang="en-US" sz="938" dirty="0"/>
+          </a:p>
+        </p:txBody>
+      </p:sp>
+      <p:sp>
+        <p:nvSpPr>
+          <p:cNvPr id="55" name="Text 53"/>
+          <p:cNvSpPr txBox="1"/>
+          <p:nvPr/>
+        </p:nvSpPr>
+        <p:spPr>
+          <a:xfrm>
+            <a:off x="10668000" y="3590925"/>
+            <a:ext cx="685800" cy="154781"/>
+          </a:xfrm>
+          <a:prstGeom prst="rect">
+            <a:avLst/>
+          </a:prstGeom>
+          <a:noFill/>
+          <a:ln/>
+        </p:spPr>
+        <p:txBody>
+          <a:bodyPr wrap="square" lIns="0" tIns="0" rIns="0" bIns="0" rtlCol="0" anchor="t"/>
+          <a:lstStyle/>
+          <a:p>
+            <a:pPr algn="r" indent="0" marL="0">
+              <a:lnSpc>
+                <a:spcPts val="1219"/>
+              </a:lnSpc>
+              <a:buNone/>
+            </a:pPr>
+            <a:r>
+              <a:rPr lang="en-US" sz="938" b="1" dirty="0">
+                <a:solidFill>
+                  <a:srgbClr val="EFB13C"/>
+                </a:solidFill>
+                <a:latin typeface="Malgun Gothic" pitchFamily="34" charset="0"/>
+                <a:ea typeface="Malgun Gothic" pitchFamily="34" charset="-122"/>
+                <a:cs typeface="Malgun Gothic" pitchFamily="34" charset="-120"/>
+              </a:rPr>
+              <a:t>충분</a:t>
+            </a:r>
+            <a:endParaRPr lang="en-US" sz="938" dirty="0"/>
+          </a:p>
+        </p:txBody>
+      </p:sp>
+      <p:sp>
+        <p:nvSpPr>
+          <p:cNvPr id="56" name="Shape 54"/>
+          <p:cNvSpPr/>
+          <p:nvPr/>
+        </p:nvSpPr>
+        <p:spPr>
+          <a:xfrm>
+            <a:off x="6743700" y="3962400"/>
+            <a:ext cx="95250" cy="95250"/>
+          </a:xfrm>
+          <a:prstGeom prst="rect">
+            <a:avLst/>
+          </a:prstGeom>
+          <a:solidFill>
+            <a:srgbClr val="8CA3BC"/>
+          </a:solidFill>
+          <a:ln/>
+        </p:spPr>
+      </p:sp>
+      <p:sp>
+        <p:nvSpPr>
+          <p:cNvPr id="57" name="Text 55"/>
+          <p:cNvSpPr txBox="1"/>
+          <p:nvPr/>
+        </p:nvSpPr>
+        <p:spPr>
+          <a:xfrm>
+            <a:off x="6953250" y="3933825"/>
+            <a:ext cx="914400" cy="154781"/>
+          </a:xfrm>
+          <a:prstGeom prst="rect">
+            <a:avLst/>
+          </a:prstGeom>
+          <a:noFill/>
+          <a:ln/>
+        </p:spPr>
+        <p:txBody>
+          <a:bodyPr wrap="square" lIns="0" tIns="0" rIns="0" bIns="0" rtlCol="0" anchor="t"/>
+          <a:lstStyle/>
+          <a:p>
+            <a:pPr algn="l" indent="0" marL="0">
+              <a:lnSpc>
+                <a:spcPts val="1219"/>
+              </a:lnSpc>
+              <a:buNone/>
+            </a:pPr>
+            <a:r>
+              <a:rPr lang="en-US" sz="938" dirty="0">
+                <a:solidFill>
+                  <a:srgbClr val="BCC9D6"/>
+                </a:solidFill>
+                <a:latin typeface="Consolas" pitchFamily="34" charset="0"/>
+                <a:ea typeface="Consolas" pitchFamily="34" charset="-122"/>
+                <a:cs typeface="Consolas" pitchFamily="34" charset="-120"/>
+              </a:rPr>
+              <a:t>15 ~ 20℃</a:t>
+            </a:r>
+            <a:endParaRPr lang="en-US" sz="938" dirty="0"/>
+          </a:p>
+        </p:txBody>
+      </p:sp>
+      <p:sp>
+        <p:nvSpPr>
+          <p:cNvPr id="58" name="Shape 56"/>
+          <p:cNvSpPr/>
+          <p:nvPr/>
+        </p:nvSpPr>
+        <p:spPr>
+          <a:xfrm>
+            <a:off x="8001000" y="3962400"/>
+            <a:ext cx="342900" cy="95250"/>
+          </a:xfrm>
+          <a:prstGeom prst="rect">
+            <a:avLst/>
+          </a:prstGeom>
+          <a:solidFill>
+            <a:srgbClr val="22354A"/>
+          </a:solidFill>
+          <a:ln/>
+        </p:spPr>
+      </p:sp>
+      <p:sp>
+        <p:nvSpPr>
+          <p:cNvPr id="59" name="Text 57"/>
+          <p:cNvSpPr txBox="1"/>
+          <p:nvPr/>
+        </p:nvSpPr>
+        <p:spPr>
+          <a:xfrm>
+            <a:off x="9429750" y="3933825"/>
+            <a:ext cx="476250" cy="154781"/>
+          </a:xfrm>
+          <a:prstGeom prst="rect">
+            <a:avLst/>
+          </a:prstGeom>
+          <a:noFill/>
+          <a:ln/>
+        </p:spPr>
+        <p:txBody>
+          <a:bodyPr wrap="square" lIns="0" tIns="0" rIns="0" bIns="0" rtlCol="0" anchor="t"/>
+          <a:lstStyle/>
+          <a:p>
+            <a:pPr algn="l" indent="0" marL="0">
+              <a:lnSpc>
+                <a:spcPts val="1219"/>
+              </a:lnSpc>
+              <a:buNone/>
+            </a:pPr>
+            <a:r>
+              <a:rPr lang="en-US" sz="938" dirty="0">
+                <a:solidFill>
+                  <a:srgbClr val="93A6BA"/>
+                </a:solidFill>
+                <a:latin typeface="Consolas" pitchFamily="34" charset="0"/>
+                <a:ea typeface="Consolas" pitchFamily="34" charset="-122"/>
+                <a:cs typeface="Consolas" pitchFamily="34" charset="-120"/>
+              </a:rPr>
+              <a:t>3건</a:t>
+            </a:r>
+            <a:endParaRPr lang="en-US" sz="938" dirty="0"/>
+          </a:p>
+        </p:txBody>
+      </p:sp>
+      <p:sp>
+        <p:nvSpPr>
+          <p:cNvPr id="60" name="Text 58"/>
+          <p:cNvSpPr txBox="1"/>
+          <p:nvPr/>
+        </p:nvSpPr>
+        <p:spPr>
+          <a:xfrm>
+            <a:off x="10668000" y="3933825"/>
+            <a:ext cx="685800" cy="154781"/>
+          </a:xfrm>
+          <a:prstGeom prst="rect">
+            <a:avLst/>
+          </a:prstGeom>
+          <a:noFill/>
+          <a:ln/>
+        </p:spPr>
+        <p:txBody>
+          <a:bodyPr wrap="square" lIns="0" tIns="0" rIns="0" bIns="0" rtlCol="0" anchor="t"/>
+          <a:lstStyle/>
+          <a:p>
+            <a:pPr algn="r" indent="0" marL="0">
+              <a:lnSpc>
+                <a:spcPts val="1219"/>
+              </a:lnSpc>
+              <a:buNone/>
+            </a:pPr>
+            <a:r>
+              <a:rPr lang="en-US" sz="938" b="1" dirty="0">
+                <a:solidFill>
+                  <a:srgbClr val="8CA3BC"/>
+                </a:solidFill>
+                <a:latin typeface="Malgun Gothic" pitchFamily="34" charset="0"/>
+                <a:ea typeface="Malgun Gothic" pitchFamily="34" charset="-122"/>
+                <a:cs typeface="Malgun Gothic" pitchFamily="34" charset="-120"/>
+              </a:rPr>
+              <a:t>보통</a:t>
+            </a:r>
+            <a:endParaRPr lang="en-US" sz="938" dirty="0"/>
+          </a:p>
+        </p:txBody>
+      </p:sp>
+      <p:sp>
+        <p:nvSpPr>
+          <p:cNvPr id="61" name="Shape 59"/>
+          <p:cNvSpPr/>
+          <p:nvPr/>
+        </p:nvSpPr>
+        <p:spPr>
+          <a:xfrm>
+            <a:off x="6743700" y="4305300"/>
+            <a:ext cx="95250" cy="95250"/>
+          </a:xfrm>
+          <a:prstGeom prst="rect">
+            <a:avLst/>
+          </a:prstGeom>
+          <a:solidFill>
+            <a:srgbClr val="FF4D63"/>
+          </a:solidFill>
+          <a:ln/>
+        </p:spPr>
+      </p:sp>
+      <p:sp>
+        <p:nvSpPr>
+          <p:cNvPr id="62" name="Text 60"/>
+          <p:cNvSpPr txBox="1"/>
+          <p:nvPr/>
+        </p:nvSpPr>
+        <p:spPr>
+          <a:xfrm>
+            <a:off x="6953250" y="4276725"/>
+            <a:ext cx="914400" cy="154781"/>
+          </a:xfrm>
+          <a:prstGeom prst="rect">
+            <a:avLst/>
+          </a:prstGeom>
+          <a:noFill/>
+          <a:ln/>
+        </p:spPr>
+        <p:txBody>
+          <a:bodyPr wrap="square" lIns="0" tIns="0" rIns="0" bIns="0" rtlCol="0" anchor="t"/>
+          <a:lstStyle/>
+          <a:p>
+            <a:pPr algn="l" indent="0" marL="0">
+              <a:lnSpc>
+                <a:spcPts val="1219"/>
+              </a:lnSpc>
+              <a:buNone/>
+            </a:pPr>
+            <a:r>
+              <a:rPr lang="en-US" sz="938" dirty="0">
+                <a:solidFill>
+                  <a:srgbClr val="BCC9D6"/>
+                </a:solidFill>
+                <a:latin typeface="Consolas" pitchFamily="34" charset="0"/>
+                <a:ea typeface="Consolas" pitchFamily="34" charset="-122"/>
+                <a:cs typeface="Consolas" pitchFamily="34" charset="-120"/>
+              </a:rPr>
+              <a:t>20 ~ 25℃</a:t>
+            </a:r>
+            <a:endParaRPr lang="en-US" sz="938" dirty="0"/>
+          </a:p>
+        </p:txBody>
+      </p:sp>
+      <p:sp>
+        <p:nvSpPr>
+          <p:cNvPr id="63" name="Shape 61"/>
+          <p:cNvSpPr/>
+          <p:nvPr/>
+        </p:nvSpPr>
+        <p:spPr>
+          <a:xfrm>
+            <a:off x="8001000" y="4305300"/>
+            <a:ext cx="114300" cy="95250"/>
+          </a:xfrm>
+          <a:prstGeom prst="rect">
+            <a:avLst/>
+          </a:prstGeom>
+          <a:solidFill>
+            <a:srgbClr val="7E2333"/>
+          </a:solidFill>
+          <a:ln/>
+        </p:spPr>
+      </p:sp>
+      <p:sp>
+        <p:nvSpPr>
+          <p:cNvPr id="64" name="Text 62"/>
+          <p:cNvSpPr txBox="1"/>
+          <p:nvPr/>
+        </p:nvSpPr>
+        <p:spPr>
+          <a:xfrm>
+            <a:off x="9429750" y="4276725"/>
+            <a:ext cx="476250" cy="154781"/>
+          </a:xfrm>
+          <a:prstGeom prst="rect">
+            <a:avLst/>
+          </a:prstGeom>
+          <a:noFill/>
+          <a:ln/>
+        </p:spPr>
+        <p:txBody>
+          <a:bodyPr wrap="square" lIns="0" tIns="0" rIns="0" bIns="0" rtlCol="0" anchor="t"/>
+          <a:lstStyle/>
+          <a:p>
+            <a:pPr algn="l" indent="0" marL="0">
+              <a:lnSpc>
+                <a:spcPts val="1219"/>
+              </a:lnSpc>
+              <a:buNone/>
+            </a:pPr>
+            <a:r>
+              <a:rPr lang="en-US" sz="938" dirty="0">
+                <a:solidFill>
+                  <a:srgbClr val="93A6BA"/>
+                </a:solidFill>
+                <a:latin typeface="Consolas" pitchFamily="34" charset="0"/>
+                <a:ea typeface="Consolas" pitchFamily="34" charset="-122"/>
+                <a:cs typeface="Consolas" pitchFamily="34" charset="-120"/>
+              </a:rPr>
+              <a:t>1건</a:t>
+            </a:r>
+            <a:endParaRPr lang="en-US" sz="938" dirty="0"/>
+          </a:p>
+        </p:txBody>
+      </p:sp>
+      <p:sp>
+        <p:nvSpPr>
+          <p:cNvPr id="65" name="Text 63"/>
+          <p:cNvSpPr txBox="1"/>
+          <p:nvPr/>
+        </p:nvSpPr>
+        <p:spPr>
+          <a:xfrm>
+            <a:off x="10668000" y="4276725"/>
+            <a:ext cx="685800" cy="154781"/>
+          </a:xfrm>
+          <a:prstGeom prst="rect">
+            <a:avLst/>
+          </a:prstGeom>
+          <a:noFill/>
+          <a:ln/>
+        </p:spPr>
+        <p:txBody>
+          <a:bodyPr wrap="square" lIns="0" tIns="0" rIns="0" bIns="0" rtlCol="0" anchor="t"/>
+          <a:lstStyle/>
+          <a:p>
+            <a:pPr algn="r" indent="0" marL="0">
+              <a:lnSpc>
+                <a:spcPts val="1219"/>
+              </a:lnSpc>
+              <a:buNone/>
+            </a:pPr>
+            <a:r>
+              <a:rPr lang="en-US" sz="938" b="1" dirty="0">
+                <a:solidFill>
+                  <a:srgbClr val="FF4D63"/>
+                </a:solidFill>
+                <a:latin typeface="Malgun Gothic" pitchFamily="34" charset="0"/>
+                <a:ea typeface="Malgun Gothic" pitchFamily="34" charset="-122"/>
+                <a:cs typeface="Malgun Gothic" pitchFamily="34" charset="-120"/>
+              </a:rPr>
+              <a:t>부족</a:t>
+            </a:r>
+            <a:endParaRPr lang="en-US" sz="938" dirty="0"/>
+          </a:p>
+        </p:txBody>
+      </p:sp>
+      <p:sp>
+        <p:nvSpPr>
+          <p:cNvPr id="66" name="Shape 64"/>
+          <p:cNvSpPr/>
+          <p:nvPr/>
+        </p:nvSpPr>
+        <p:spPr>
+          <a:xfrm>
+            <a:off x="6743700" y="4648200"/>
+            <a:ext cx="95250" cy="95250"/>
+          </a:xfrm>
+          <a:prstGeom prst="rect">
+            <a:avLst/>
+          </a:prstGeom>
+          <a:solidFill>
+            <a:srgbClr val="EFB13C"/>
+          </a:solidFill>
+          <a:ln/>
+        </p:spPr>
+      </p:sp>
+      <p:sp>
+        <p:nvSpPr>
+          <p:cNvPr id="67" name="Text 65"/>
+          <p:cNvSpPr txBox="1"/>
+          <p:nvPr/>
+        </p:nvSpPr>
+        <p:spPr>
+          <a:xfrm>
+            <a:off x="6953250" y="4619625"/>
+            <a:ext cx="914400" cy="154781"/>
+          </a:xfrm>
+          <a:prstGeom prst="rect">
+            <a:avLst/>
+          </a:prstGeom>
+          <a:noFill/>
+          <a:ln/>
+        </p:spPr>
+        <p:txBody>
+          <a:bodyPr wrap="square" lIns="0" tIns="0" rIns="0" bIns="0" rtlCol="0" anchor="t"/>
+          <a:lstStyle/>
+          <a:p>
+            <a:pPr algn="l" indent="0" marL="0">
+              <a:lnSpc>
+                <a:spcPts val="1219"/>
+              </a:lnSpc>
+              <a:buNone/>
+            </a:pPr>
+            <a:r>
+              <a:rPr lang="en-US" sz="938" dirty="0">
+                <a:solidFill>
+                  <a:srgbClr val="BCC9D6"/>
+                </a:solidFill>
+                <a:latin typeface="Consolas" pitchFamily="34" charset="0"/>
+                <a:ea typeface="Consolas" pitchFamily="34" charset="-122"/>
+                <a:cs typeface="Consolas" pitchFamily="34" charset="-120"/>
+              </a:rPr>
+              <a:t>25 ~ 30℃</a:t>
+            </a:r>
+            <a:endParaRPr lang="en-US" sz="938" dirty="0"/>
+          </a:p>
+        </p:txBody>
+      </p:sp>
+      <p:sp>
+        <p:nvSpPr>
+          <p:cNvPr id="68" name="Shape 66"/>
+          <p:cNvSpPr/>
+          <p:nvPr/>
+        </p:nvSpPr>
+        <p:spPr>
+          <a:xfrm>
+            <a:off x="8001000" y="4648200"/>
+            <a:ext cx="685800" cy="95250"/>
+          </a:xfrm>
+          <a:prstGeom prst="rect">
+            <a:avLst/>
+          </a:prstGeom>
+          <a:solidFill>
+            <a:srgbClr val="8A6620"/>
+          </a:solidFill>
+          <a:ln/>
+        </p:spPr>
+      </p:sp>
+      <p:sp>
+        <p:nvSpPr>
+          <p:cNvPr id="69" name="Text 67"/>
+          <p:cNvSpPr txBox="1"/>
+          <p:nvPr/>
+        </p:nvSpPr>
+        <p:spPr>
+          <a:xfrm>
+            <a:off x="9429750" y="4619625"/>
+            <a:ext cx="476250" cy="154781"/>
+          </a:xfrm>
+          <a:prstGeom prst="rect">
+            <a:avLst/>
+          </a:prstGeom>
+          <a:noFill/>
+          <a:ln/>
+        </p:spPr>
+        <p:txBody>
+          <a:bodyPr wrap="square" lIns="0" tIns="0" rIns="0" bIns="0" rtlCol="0" anchor="t"/>
+          <a:lstStyle/>
+          <a:p>
+            <a:pPr algn="l" indent="0" marL="0">
+              <a:lnSpc>
+                <a:spcPts val="1219"/>
+              </a:lnSpc>
+              <a:buNone/>
+            </a:pPr>
+            <a:r>
+              <a:rPr lang="en-US" sz="938" dirty="0">
+                <a:solidFill>
+                  <a:srgbClr val="93A6BA"/>
+                </a:solidFill>
+                <a:latin typeface="Consolas" pitchFamily="34" charset="0"/>
+                <a:ea typeface="Consolas" pitchFamily="34" charset="-122"/>
+                <a:cs typeface="Consolas" pitchFamily="34" charset="-120"/>
+              </a:rPr>
+              <a:t>6건</a:t>
+            </a:r>
+            <a:endParaRPr lang="en-US" sz="938" dirty="0"/>
+          </a:p>
+        </p:txBody>
+      </p:sp>
+      <p:sp>
+        <p:nvSpPr>
+          <p:cNvPr id="70" name="Text 68"/>
+          <p:cNvSpPr txBox="1"/>
+          <p:nvPr/>
+        </p:nvSpPr>
+        <p:spPr>
+          <a:xfrm>
+            <a:off x="10668000" y="4619625"/>
+            <a:ext cx="685800" cy="154781"/>
+          </a:xfrm>
+          <a:prstGeom prst="rect">
+            <a:avLst/>
+          </a:prstGeom>
+          <a:noFill/>
+          <a:ln/>
+        </p:spPr>
+        <p:txBody>
+          <a:bodyPr wrap="square" lIns="0" tIns="0" rIns="0" bIns="0" rtlCol="0" anchor="t"/>
+          <a:lstStyle/>
+          <a:p>
+            <a:pPr algn="r" indent="0" marL="0">
+              <a:lnSpc>
+                <a:spcPts val="1219"/>
+              </a:lnSpc>
+              <a:buNone/>
+            </a:pPr>
+            <a:r>
+              <a:rPr lang="en-US" sz="938" b="1" dirty="0">
+                <a:solidFill>
+                  <a:srgbClr val="EFB13C"/>
+                </a:solidFill>
+                <a:latin typeface="Malgun Gothic" pitchFamily="34" charset="0"/>
+                <a:ea typeface="Malgun Gothic" pitchFamily="34" charset="-122"/>
+                <a:cs typeface="Malgun Gothic" pitchFamily="34" charset="-120"/>
+              </a:rPr>
+              <a:t>충분</a:t>
+            </a:r>
+            <a:endParaRPr lang="en-US" sz="938" dirty="0"/>
+          </a:p>
+        </p:txBody>
+      </p:sp>
+      <p:sp>
+        <p:nvSpPr>
+          <p:cNvPr id="71" name="Shape 69"/>
+          <p:cNvSpPr/>
+          <p:nvPr/>
+        </p:nvSpPr>
+        <p:spPr>
+          <a:xfrm>
+            <a:off x="6743700" y="4991100"/>
+            <a:ext cx="95250" cy="95250"/>
+          </a:xfrm>
+          <a:prstGeom prst="rect">
+            <a:avLst/>
+          </a:prstGeom>
+          <a:solidFill>
+            <a:srgbClr val="EFB13C"/>
+          </a:solidFill>
+          <a:ln/>
+        </p:spPr>
+      </p:sp>
+      <p:sp>
+        <p:nvSpPr>
+          <p:cNvPr id="72" name="Text 70"/>
+          <p:cNvSpPr txBox="1"/>
+          <p:nvPr/>
+        </p:nvSpPr>
+        <p:spPr>
+          <a:xfrm>
+            <a:off x="6953250" y="4962525"/>
+            <a:ext cx="914400" cy="154781"/>
+          </a:xfrm>
+          <a:prstGeom prst="rect">
+            <a:avLst/>
+          </a:prstGeom>
+          <a:noFill/>
+          <a:ln/>
+        </p:spPr>
+        <p:txBody>
+          <a:bodyPr wrap="square" lIns="0" tIns="0" rIns="0" bIns="0" rtlCol="0" anchor="t"/>
+          <a:lstStyle/>
+          <a:p>
+            <a:pPr algn="l" indent="0" marL="0">
+              <a:lnSpc>
+                <a:spcPts val="1219"/>
+              </a:lnSpc>
+              <a:buNone/>
+            </a:pPr>
+            <a:r>
+              <a:rPr lang="en-US" sz="938" dirty="0">
+                <a:solidFill>
+                  <a:srgbClr val="BCC9D6"/>
+                </a:solidFill>
+                <a:latin typeface="Consolas" pitchFamily="34" charset="0"/>
+                <a:ea typeface="Consolas" pitchFamily="34" charset="-122"/>
+                <a:cs typeface="Consolas" pitchFamily="34" charset="-120"/>
+              </a:rPr>
+              <a:t>30 ~ 41℃</a:t>
+            </a:r>
+            <a:endParaRPr lang="en-US" sz="938" dirty="0"/>
+          </a:p>
+        </p:txBody>
+      </p:sp>
+      <p:sp>
+        <p:nvSpPr>
+          <p:cNvPr id="73" name="Shape 71"/>
+          <p:cNvSpPr/>
+          <p:nvPr/>
+        </p:nvSpPr>
+        <p:spPr>
+          <a:xfrm>
+            <a:off x="8001000" y="4991100"/>
+            <a:ext cx="1257300" cy="95250"/>
+          </a:xfrm>
+          <a:prstGeom prst="rect">
+            <a:avLst/>
+          </a:prstGeom>
+          <a:solidFill>
+            <a:srgbClr val="8A6620"/>
+          </a:solidFill>
+          <a:ln/>
+        </p:spPr>
+      </p:sp>
+      <p:sp>
+        <p:nvSpPr>
+          <p:cNvPr id="74" name="Text 72"/>
+          <p:cNvSpPr txBox="1"/>
+          <p:nvPr/>
+        </p:nvSpPr>
+        <p:spPr>
+          <a:xfrm>
+            <a:off x="9429750" y="4962525"/>
+            <a:ext cx="476250" cy="154781"/>
+          </a:xfrm>
+          <a:prstGeom prst="rect">
+            <a:avLst/>
+          </a:prstGeom>
+          <a:noFill/>
+          <a:ln/>
+        </p:spPr>
+        <p:txBody>
+          <a:bodyPr wrap="square" lIns="0" tIns="0" rIns="0" bIns="0" rtlCol="0" anchor="t"/>
+          <a:lstStyle/>
+          <a:p>
+            <a:pPr algn="l" indent="0" marL="0">
+              <a:lnSpc>
+                <a:spcPts val="1219"/>
+              </a:lnSpc>
+              <a:buNone/>
+            </a:pPr>
+            <a:r>
+              <a:rPr lang="en-US" sz="938" dirty="0">
+                <a:solidFill>
+                  <a:srgbClr val="93A6BA"/>
+                </a:solidFill>
+                <a:latin typeface="Consolas" pitchFamily="34" charset="0"/>
+                <a:ea typeface="Consolas" pitchFamily="34" charset="-122"/>
+                <a:cs typeface="Consolas" pitchFamily="34" charset="-120"/>
+              </a:rPr>
+              <a:t>11건</a:t>
+            </a:r>
+            <a:endParaRPr lang="en-US" sz="938" dirty="0"/>
+          </a:p>
+        </p:txBody>
+      </p:sp>
+      <p:sp>
+        <p:nvSpPr>
+          <p:cNvPr id="75" name="Text 73"/>
+          <p:cNvSpPr txBox="1"/>
+          <p:nvPr/>
+        </p:nvSpPr>
+        <p:spPr>
+          <a:xfrm>
+            <a:off x="10668000" y="4962525"/>
+            <a:ext cx="685800" cy="154781"/>
+          </a:xfrm>
+          <a:prstGeom prst="rect">
+            <a:avLst/>
+          </a:prstGeom>
+          <a:noFill/>
+          <a:ln/>
+        </p:spPr>
+        <p:txBody>
+          <a:bodyPr wrap="square" lIns="0" tIns="0" rIns="0" bIns="0" rtlCol="0" anchor="t"/>
+          <a:lstStyle/>
+          <a:p>
+            <a:pPr algn="r" indent="0" marL="0">
+              <a:lnSpc>
+                <a:spcPts val="1219"/>
+              </a:lnSpc>
+              <a:buNone/>
+            </a:pPr>
+            <a:r>
+              <a:rPr lang="en-US" sz="938" b="1" dirty="0">
+                <a:solidFill>
+                  <a:srgbClr val="EFB13C"/>
+                </a:solidFill>
+                <a:latin typeface="Malgun Gothic" pitchFamily="34" charset="0"/>
+                <a:ea typeface="Malgun Gothic" pitchFamily="34" charset="-122"/>
+                <a:cs typeface="Malgun Gothic" pitchFamily="34" charset="-120"/>
+              </a:rPr>
+              <a:t>충분</a:t>
+            </a:r>
+            <a:endParaRPr lang="en-US" sz="938" dirty="0"/>
+          </a:p>
+        </p:txBody>
+      </p:sp>
+      <p:sp>
+        <p:nvSpPr>
+          <p:cNvPr id="76" name="Text 74"/>
+          <p:cNvSpPr txBox="1"/>
+          <p:nvPr/>
+        </p:nvSpPr>
+        <p:spPr>
+          <a:xfrm>
+            <a:off x="6591300" y="5486400"/>
+            <a:ext cx="4914900" cy="480060"/>
+          </a:xfrm>
+          <a:prstGeom prst="rect">
+            <a:avLst/>
+          </a:prstGeom>
+          <a:noFill/>
+          <a:ln/>
+        </p:spPr>
+        <p:txBody>
+          <a:bodyPr wrap="square" lIns="0" tIns="0" rIns="0" bIns="0" rtlCol="0" anchor="t"/>
+          <a:lstStyle/>
+          <a:p>
+            <a:pPr algn="l" indent="0" marL="0">
+              <a:lnSpc>
+                <a:spcPts val="1890"/>
+              </a:lnSpc>
+              <a:buNone/>
+            </a:pPr>
+            <a:r>
+              <a:rPr lang="en-US" sz="1125" b="1" dirty="0">
+                <a:solidFill>
+                  <a:srgbClr val="EAE7E0"/>
+                </a:solidFill>
+                <a:latin typeface="Malgun Gothic" pitchFamily="34" charset="0"/>
+                <a:ea typeface="Malgun Gothic" pitchFamily="34" charset="-122"/>
+                <a:cs typeface="Malgun Gothic" pitchFamily="34" charset="-120"/>
+              </a:rPr>
+              <a:t>부족한 구간은 화면에 그대로 뜹니다</a:t>
+            </a:r>
+            <a:pPr algn="l" indent="0" marL="0">
+              <a:lnSpc>
+                <a:spcPts val="1890"/>
+              </a:lnSpc>
+              <a:buNone/>
+            </a:pPr>
+            <a:r>
+              <a:rPr lang="en-US" sz="1125" dirty="0">
+                <a:solidFill>
+                  <a:srgbClr val="BCC9D6"/>
+                </a:solidFill>
+                <a:latin typeface="Malgun Gothic" pitchFamily="34" charset="0"/>
+                <a:ea typeface="Malgun Gothic" pitchFamily="34" charset="-122"/>
+                <a:cs typeface="Malgun Gothic" pitchFamily="34" charset="-120"/>
+              </a:rPr>
+              <a:t> — 그 구간의 값은 아직 믿지 말라는 표시입니다.</a:t>
+            </a:r>
+            <a:endParaRPr lang="en-US" sz="1125" dirty="0"/>
+          </a:p>
+        </p:txBody>
+      </p:sp>
+      <p:sp>
+        <p:nvSpPr>
+          <p:cNvPr id="77" name="Shape 75"/>
+          <p:cNvSpPr/>
+          <p:nvPr/>
+        </p:nvSpPr>
+        <p:spPr>
+          <a:xfrm>
+            <a:off x="685800" y="6057900"/>
+            <a:ext cx="10820400" cy="0"/>
+          </a:xfrm>
+          <a:prstGeom prst="line">
+            <a:avLst/>
+          </a:prstGeom>
+          <a:noFill/>
+          <a:ln w="12700">
+            <a:solidFill>
+              <a:srgbClr val="22354A"/>
+            </a:solidFill>
+            <a:prstDash val="solid"/>
+          </a:ln>
+        </p:spPr>
+      </p:sp>
+      <p:sp>
+        <p:nvSpPr>
+          <p:cNvPr id="78" name="Text 76"/>
+          <p:cNvSpPr txBox="1"/>
+          <p:nvPr/>
+        </p:nvSpPr>
+        <p:spPr>
+          <a:xfrm>
+            <a:off x="685800" y="6267450"/>
+            <a:ext cx="476250" cy="120015"/>
+          </a:xfrm>
+          <a:prstGeom prst="rect">
+            <a:avLst/>
+          </a:prstGeom>
+          <a:noFill/>
+          <a:ln/>
+        </p:spPr>
+        <p:txBody>
+          <a:bodyPr wrap="square" lIns="0" tIns="0" rIns="0" bIns="0" rtlCol="0" anchor="t"/>
+          <a:lstStyle/>
+          <a:p>
+            <a:pPr algn="l" indent="0" marL="0">
+              <a:lnSpc>
+                <a:spcPts val="945"/>
+              </a:lnSpc>
+              <a:buNone/>
+            </a:pPr>
+            <a:r>
+              <a:rPr lang="en-US" sz="788" b="1" spc="180" kern="0" dirty="0">
+                <a:solidFill>
+                  <a:srgbClr val="EFB13C"/>
+                </a:solidFill>
+                <a:latin typeface="Consolas" pitchFamily="34" charset="0"/>
+                <a:ea typeface="Consolas" pitchFamily="34" charset="-122"/>
+                <a:cs typeface="Consolas" pitchFamily="34" charset="-120"/>
+              </a:rPr>
+              <a:t>결론</a:t>
+            </a:r>
+            <a:endParaRPr lang="en-US" sz="788" dirty="0"/>
+          </a:p>
+        </p:txBody>
+      </p:sp>
+      <p:sp>
+        <p:nvSpPr>
+          <p:cNvPr id="79" name="Text 77"/>
+          <p:cNvSpPr txBox="1"/>
+          <p:nvPr/>
+        </p:nvSpPr>
+        <p:spPr>
+          <a:xfrm>
+            <a:off x="1219200" y="6229350"/>
+            <a:ext cx="10287000" cy="220027"/>
+          </a:xfrm>
+          <a:prstGeom prst="rect">
+            <a:avLst/>
+          </a:prstGeom>
+          <a:noFill/>
+          <a:ln/>
+        </p:spPr>
+        <p:txBody>
+          <a:bodyPr wrap="square" lIns="0" tIns="0" rIns="0" bIns="0" rtlCol="0" anchor="t"/>
+          <a:lstStyle/>
+          <a:p>
+            <a:pPr algn="l" indent="0" marL="0">
+              <a:lnSpc>
+                <a:spcPts val="1733"/>
+              </a:lnSpc>
+              <a:buNone/>
+            </a:pPr>
+            <a:r>
+              <a:rPr lang="en-US" sz="1238" dirty="0">
+                <a:solidFill>
+                  <a:srgbClr val="BCC9D6"/>
+                </a:solidFill>
+                <a:latin typeface="Malgun Gothic" pitchFamily="34" charset="0"/>
+                <a:ea typeface="Malgun Gothic" pitchFamily="34" charset="-122"/>
+                <a:cs typeface="Malgun Gothic" pitchFamily="34" charset="-120"/>
+              </a:rPr>
+              <a:t>한 번 만들고 끝나는 모델이 아닙니다 — </a:t>
+            </a:r>
+            <a:pPr algn="l" indent="0" marL="0">
+              <a:lnSpc>
+                <a:spcPts val="1733"/>
+              </a:lnSpc>
+              <a:buNone/>
+            </a:pPr>
+            <a:r>
+              <a:rPr lang="en-US" sz="1238" b="1" dirty="0">
+                <a:solidFill>
+                  <a:srgbClr val="EFB13C"/>
+                </a:solidFill>
+                <a:latin typeface="Malgun Gothic" pitchFamily="34" charset="0"/>
+                <a:ea typeface="Malgun Gothic" pitchFamily="34" charset="-122"/>
+                <a:cs typeface="Malgun Gothic" pitchFamily="34" charset="-120"/>
+              </a:rPr>
+              <a:t>회차가 쌓일수록 좋아집니다</a:t>
+            </a:r>
+            <a:pPr algn="l" indent="0" marL="0">
+              <a:lnSpc>
+                <a:spcPts val="1733"/>
+              </a:lnSpc>
+              <a:buNone/>
+            </a:pPr>
+            <a:r>
+              <a:rPr lang="en-US" sz="1238" dirty="0">
+                <a:solidFill>
+                  <a:srgbClr val="BCC9D6"/>
+                </a:solidFill>
+                <a:latin typeface="Malgun Gothic" pitchFamily="34" charset="0"/>
+                <a:ea typeface="Malgun Gothic" pitchFamily="34" charset="-122"/>
+                <a:cs typeface="Malgun Gothic" pitchFamily="34" charset="-120"/>
+              </a:rPr>
+              <a:t>.</a:t>
+            </a:r>
+            <a:endParaRPr lang="en-US" sz="1238" dirty="0"/>
+          </a:p>
+        </p:txBody>
       </p:sp>
     </p:spTree>
   </p:cSld>
@@ -8049,26 +10323,26 @@
         <p:spPr>
           <a:xfrm>
             <a:off x="685800" y="914400"/>
-            <a:ext cx="10287000" cy="360045"/>
-          </a:xfrm>
-          <a:prstGeom prst="rect">
-            <a:avLst/>
-          </a:prstGeom>
-          <a:noFill/>
-          <a:ln/>
-        </p:spPr>
-        <p:txBody>
-          <a:bodyPr wrap="square" lIns="0" tIns="0" rIns="0" bIns="0" rtlCol="0" anchor="t"/>
-          <a:lstStyle/>
-          <a:p>
-            <a:pPr algn="l" indent="0" marL="0">
-              <a:lnSpc>
-                <a:spcPts val="2835"/>
-              </a:lnSpc>
-              <a:buNone/>
-            </a:pPr>
-            <a:r>
-              <a:rPr lang="en-US" sz="2250" b="1" dirty="0">
+            <a:ext cx="10287000" cy="888111"/>
+          </a:xfrm>
+          <a:prstGeom prst="rect">
+            <a:avLst/>
+          </a:prstGeom>
+          <a:noFill/>
+          <a:ln/>
+        </p:spPr>
+        <p:txBody>
+          <a:bodyPr wrap="square" lIns="0" tIns="0" rIns="0" bIns="0" rtlCol="0" anchor="t"/>
+          <a:lstStyle/>
+          <a:p>
+            <a:pPr algn="l" indent="0" marL="0">
+              <a:lnSpc>
+                <a:spcPts val="3496"/>
+              </a:lnSpc>
+              <a:buNone/>
+            </a:pPr>
+            <a:r>
+              <a:rPr lang="en-US" sz="2775" b="1" dirty="0">
                 <a:solidFill>
                   <a:srgbClr val="EAE7E0"/>
                 </a:solidFill>
@@ -8076,22 +10350,301 @@
                 <a:ea typeface="Malgun Gothic" pitchFamily="34" charset="-122"/>
                 <a:cs typeface="Malgun Gothic" pitchFamily="34" charset="-120"/>
               </a:rPr>
-              <a:t>시운전에서 함정 3개를 만나 전부 코드로 못박았습니다</a:t>
-            </a:r>
-            <a:endParaRPr lang="en-US" sz="2250" dirty="0"/>
-          </a:p>
-        </p:txBody>
-      </p:sp>
-      <p:sp>
-        <p:nvSpPr>
-          <p:cNvPr id="12" name="Shape 10"/>
-          <p:cNvSpPr/>
-          <p:nvPr/>
-        </p:nvSpPr>
-        <p:spPr>
-          <a:xfrm>
-            <a:off x="685800" y="2857500"/>
-            <a:ext cx="10820400" cy="2095500"/>
+              <a:t>시운전에서 함정 3개를 만나,</a:t>
+            </a:r>
+            <a:endParaRPr lang="en-US" sz="2775" dirty="0"/>
+          </a:p>
+          <a:p>
+            <a:pPr algn="l" indent="0" marL="0">
+              <a:lnSpc>
+                <a:spcPts val="3496"/>
+              </a:lnSpc>
+              <a:buNone/>
+            </a:pPr>
+            <a:r>
+              <a:rPr lang="en-US" sz="2775" b="1" dirty="0">
+                <a:solidFill>
+                  <a:srgbClr val="EAE7E0"/>
+                </a:solidFill>
+                <a:latin typeface="Malgun Gothic" pitchFamily="34" charset="0"/>
+                <a:ea typeface="Malgun Gothic" pitchFamily="34" charset="-122"/>
+                <a:cs typeface="Malgun Gothic" pitchFamily="34" charset="-120"/>
+              </a:rPr>
+              <a:t>전부 </a:t>
+            </a:r>
+            <a:pPr algn="l" indent="0" marL="0">
+              <a:lnSpc>
+                <a:spcPts val="3496"/>
+              </a:lnSpc>
+              <a:buNone/>
+            </a:pPr>
+            <a:r>
+              <a:rPr lang="en-US" sz="2775" b="1" dirty="0">
+                <a:solidFill>
+                  <a:srgbClr val="EFB13C"/>
+                </a:solidFill>
+                <a:latin typeface="Malgun Gothic" pitchFamily="34" charset="0"/>
+                <a:ea typeface="Malgun Gothic" pitchFamily="34" charset="-122"/>
+                <a:cs typeface="Malgun Gothic" pitchFamily="34" charset="-120"/>
+              </a:rPr>
+              <a:t>코드로 못박았습니다</a:t>
+            </a:r>
+            <a:endParaRPr lang="en-US" sz="2775" dirty="0"/>
+          </a:p>
+        </p:txBody>
+      </p:sp>
+      <p:sp>
+        <p:nvSpPr>
+          <p:cNvPr id="12" name="Text 10"/>
+          <p:cNvSpPr txBox="1"/>
+          <p:nvPr/>
+        </p:nvSpPr>
+        <p:spPr>
+          <a:xfrm>
+            <a:off x="685800" y="2000250"/>
+            <a:ext cx="10287000" cy="569214"/>
+          </a:xfrm>
+          <a:prstGeom prst="rect">
+            <a:avLst/>
+          </a:prstGeom>
+          <a:noFill/>
+          <a:ln/>
+        </p:spPr>
+        <p:txBody>
+          <a:bodyPr wrap="square" lIns="0" tIns="0" rIns="0" bIns="0" rtlCol="0" anchor="t"/>
+          <a:lstStyle/>
+          <a:p>
+            <a:pPr algn="l" indent="0" marL="0">
+              <a:lnSpc>
+                <a:spcPts val="2241"/>
+              </a:lnSpc>
+              <a:buNone/>
+            </a:pPr>
+            <a:r>
+              <a:rPr lang="en-US" sz="1350" dirty="0">
+                <a:solidFill>
+                  <a:srgbClr val="BCC9D6"/>
+                </a:solidFill>
+                <a:latin typeface="Malgun Gothic" pitchFamily="34" charset="0"/>
+                <a:ea typeface="Malgun Gothic" pitchFamily="34" charset="-122"/>
+                <a:cs typeface="Malgun Gothic" pitchFamily="34" charset="-120"/>
+              </a:rPr>
+              <a:t>숫자가 자동으로 들어온다는 것은 </a:t>
+            </a:r>
+            <a:pPr algn="l" indent="0" marL="0">
+              <a:lnSpc>
+                <a:spcPts val="2241"/>
+              </a:lnSpc>
+              <a:buNone/>
+            </a:pPr>
+            <a:r>
+              <a:rPr lang="en-US" sz="1350" b="1" dirty="0">
+                <a:solidFill>
+                  <a:srgbClr val="EAE7E0"/>
+                </a:solidFill>
+                <a:latin typeface="Malgun Gothic" pitchFamily="34" charset="0"/>
+                <a:ea typeface="Malgun Gothic" pitchFamily="34" charset="-122"/>
+                <a:cs typeface="Malgun Gothic" pitchFamily="34" charset="-120"/>
+              </a:rPr>
+              <a:t>틀린 숫자도 자동으로 들어온다</a:t>
+            </a:r>
+            <a:pPr algn="l" indent="0" marL="0">
+              <a:lnSpc>
+                <a:spcPts val="2241"/>
+              </a:lnSpc>
+              <a:buNone/>
+            </a:pPr>
+            <a:r>
+              <a:rPr lang="en-US" sz="1350" dirty="0">
+                <a:solidFill>
+                  <a:srgbClr val="BCC9D6"/>
+                </a:solidFill>
+                <a:latin typeface="Malgun Gothic" pitchFamily="34" charset="0"/>
+                <a:ea typeface="Malgun Gothic" pitchFamily="34" charset="-122"/>
+                <a:cs typeface="Malgun Gothic" pitchFamily="34" charset="-120"/>
+              </a:rPr>
+              <a:t> 는 뜻입니다. 만난 함정을 사람의 주의가 아니라 코드로 막았습니다.</a:t>
+            </a:r>
+            <a:endParaRPr lang="en-US" sz="1350" dirty="0"/>
+          </a:p>
+        </p:txBody>
+      </p:sp>
+      <p:sp>
+        <p:nvSpPr>
+          <p:cNvPr id="13" name="Shape 11"/>
+          <p:cNvSpPr/>
+          <p:nvPr/>
+        </p:nvSpPr>
+        <p:spPr>
+          <a:xfrm>
+            <a:off x="685800" y="2743200"/>
+            <a:ext cx="3467100" cy="19050"/>
+          </a:xfrm>
+          <a:prstGeom prst="rect">
+            <a:avLst/>
+          </a:prstGeom>
+          <a:solidFill>
+            <a:srgbClr val="7E2333"/>
+          </a:solidFill>
+          <a:ln/>
+        </p:spPr>
+      </p:sp>
+      <p:sp>
+        <p:nvSpPr>
+          <p:cNvPr id="14" name="Text 12"/>
+          <p:cNvSpPr txBox="1"/>
+          <p:nvPr/>
+        </p:nvSpPr>
+        <p:spPr>
+          <a:xfrm>
+            <a:off x="685800" y="2876550"/>
+            <a:ext cx="3467100" cy="125016"/>
+          </a:xfrm>
+          <a:prstGeom prst="rect">
+            <a:avLst/>
+          </a:prstGeom>
+          <a:noFill/>
+          <a:ln/>
+        </p:spPr>
+        <p:txBody>
+          <a:bodyPr wrap="square" lIns="0" tIns="0" rIns="0" bIns="0" rtlCol="0" anchor="t"/>
+          <a:lstStyle/>
+          <a:p>
+            <a:pPr algn="l" indent="0" marL="0">
+              <a:lnSpc>
+                <a:spcPts val="984"/>
+              </a:lnSpc>
+              <a:buNone/>
+            </a:pPr>
+            <a:r>
+              <a:rPr lang="en-US" sz="788" b="1" spc="150" kern="0" dirty="0">
+                <a:solidFill>
+                  <a:srgbClr val="FF4D63"/>
+                </a:solidFill>
+                <a:latin typeface="Consolas" pitchFamily="34" charset="0"/>
+                <a:ea typeface="Consolas" pitchFamily="34" charset="-122"/>
+                <a:cs typeface="Consolas" pitchFamily="34" charset="-120"/>
+              </a:rPr>
+              <a:t>함정 1</a:t>
+            </a:r>
+            <a:endParaRPr lang="en-US" sz="788" dirty="0"/>
+          </a:p>
+        </p:txBody>
+      </p:sp>
+      <p:sp>
+        <p:nvSpPr>
+          <p:cNvPr id="15" name="Text 13"/>
+          <p:cNvSpPr txBox="1"/>
+          <p:nvPr/>
+        </p:nvSpPr>
+        <p:spPr>
+          <a:xfrm>
+            <a:off x="685800" y="3086100"/>
+            <a:ext cx="3467100" cy="568071"/>
+          </a:xfrm>
+          <a:prstGeom prst="rect">
+            <a:avLst/>
+          </a:prstGeom>
+          <a:noFill/>
+          <a:ln/>
+        </p:spPr>
+        <p:txBody>
+          <a:bodyPr wrap="square" lIns="0" tIns="0" rIns="0" bIns="0" rtlCol="0" anchor="t"/>
+          <a:lstStyle/>
+          <a:p>
+            <a:pPr algn="l" indent="0" marL="0">
+              <a:lnSpc>
+                <a:spcPts val="2237"/>
+              </a:lnSpc>
+              <a:buNone/>
+            </a:pPr>
+            <a:r>
+              <a:rPr lang="en-US" sz="1575" b="1" dirty="0">
+                <a:solidFill>
+                  <a:srgbClr val="EAE7E0"/>
+                </a:solidFill>
+                <a:latin typeface="Malgun Gothic" pitchFamily="34" charset="0"/>
+                <a:ea typeface="Malgun Gothic" pitchFamily="34" charset="-122"/>
+                <a:cs typeface="Malgun Gothic" pitchFamily="34" charset="-120"/>
+              </a:rPr>
+              <a:t>IGV 미실시 회차가</a:t>
+            </a:r>
+            <a:endParaRPr lang="en-US" sz="1575" dirty="0"/>
+          </a:p>
+          <a:p>
+            <a:pPr algn="l" indent="0" marL="0">
+              <a:lnSpc>
+                <a:spcPts val="2237"/>
+              </a:lnSpc>
+              <a:buNone/>
+            </a:pPr>
+            <a:r>
+              <a:rPr lang="en-US" sz="1575" b="1" dirty="0">
+                <a:solidFill>
+                  <a:srgbClr val="EAE7E0"/>
+                </a:solidFill>
+                <a:latin typeface="Malgun Gothic" pitchFamily="34" charset="0"/>
+                <a:ea typeface="Malgun Gothic" pitchFamily="34" charset="-122"/>
+                <a:cs typeface="Malgun Gothic" pitchFamily="34" charset="-120"/>
+              </a:rPr>
+              <a:t>섞여 들어왔다</a:t>
+            </a:r>
+            <a:endParaRPr lang="en-US" sz="1575" dirty="0"/>
+          </a:p>
+        </p:txBody>
+      </p:sp>
+      <p:sp>
+        <p:nvSpPr>
+          <p:cNvPr id="16" name="Text 14"/>
+          <p:cNvSpPr txBox="1"/>
+          <p:nvPr/>
+        </p:nvSpPr>
+        <p:spPr>
+          <a:xfrm>
+            <a:off x="685800" y="3733800"/>
+            <a:ext cx="3467100" cy="720090"/>
+          </a:xfrm>
+          <a:prstGeom prst="rect">
+            <a:avLst/>
+          </a:prstGeom>
+          <a:noFill/>
+          <a:ln/>
+        </p:spPr>
+        <p:txBody>
+          <a:bodyPr wrap="square" lIns="0" tIns="0" rIns="0" bIns="0" rtlCol="0" anchor="t"/>
+          <a:lstStyle/>
+          <a:p>
+            <a:pPr algn="l" indent="0" marL="0">
+              <a:lnSpc>
+                <a:spcPts val="1890"/>
+              </a:lnSpc>
+              <a:buNone/>
+            </a:pPr>
+            <a:r>
+              <a:rPr lang="en-US" sz="1125" dirty="0">
+                <a:solidFill>
+                  <a:srgbClr val="BCC9D6"/>
+                </a:solidFill>
+                <a:latin typeface="Malgun Gothic" pitchFamily="34" charset="0"/>
+                <a:ea typeface="Malgun Gothic" pitchFamily="34" charset="-122"/>
+                <a:cs typeface="Malgun Gothic" pitchFamily="34" charset="-120"/>
+              </a:rPr>
+              <a:t>3회차가 4~6 MW 낮게 나왔습니다. 그대로 두면 미달로 잘못 판단됩니다.</a:t>
+            </a:r>
+            <a:endParaRPr lang="en-US" sz="1125" dirty="0"/>
+          </a:p>
+        </p:txBody>
+      </p:sp>
+      <p:sp>
+        <p:nvSpPr>
+          <p:cNvPr id="17" name="Shape 15"/>
+          <p:cNvSpPr/>
+          <p:nvPr/>
+        </p:nvSpPr>
+        <p:spPr>
+          <a:xfrm>
+            <a:off x="685800" y="4476750"/>
+            <a:ext cx="3467100" cy="590550"/>
           </a:xfrm>
           <a:prstGeom prst="rect">
             <a:avLst/>
@@ -8099,93 +10652,177 @@
           <a:solidFill>
             <a:srgbClr val="0A1320"/>
           </a:solidFill>
-          <a:ln w="19050">
+          <a:ln w="12700">
             <a:solidFill>
-              <a:srgbClr val="22354A"/>
+              <a:srgbClr val="182838"/>
             </a:solidFill>
-            <a:prstDash val="dash"/>
+            <a:prstDash val="solid"/>
           </a:ln>
         </p:spPr>
       </p:sp>
       <p:sp>
         <p:nvSpPr>
-          <p:cNvPr id="13" name="Text 11"/>
-          <p:cNvSpPr txBox="1"/>
-          <p:nvPr/>
-        </p:nvSpPr>
-        <p:spPr>
-          <a:xfrm>
-            <a:off x="685800" y="3695700"/>
-            <a:ext cx="10820400" cy="226695"/>
-          </a:xfrm>
-          <a:prstGeom prst="rect">
-            <a:avLst/>
-          </a:prstGeom>
-          <a:noFill/>
-          <a:ln/>
-        </p:spPr>
-        <p:txBody>
-          <a:bodyPr wrap="square" lIns="0" tIns="0" rIns="0" bIns="0" rtlCol="0" anchor="t"/>
-          <a:lstStyle/>
-          <a:p>
-            <a:pPr algn="ctr" indent="0" marL="0">
-              <a:lnSpc>
-                <a:spcPts val="1785"/>
-              </a:lnSpc>
-              <a:buNone/>
-            </a:pPr>
-            <a:r>
-              <a:rPr lang="en-US" sz="1275" dirty="0">
-                <a:solidFill>
-                  <a:srgbClr val="63798F"/>
-                </a:solidFill>
-                <a:latin typeface="Malgun Gothic" pitchFamily="34" charset="0"/>
-                <a:ea typeface="Malgun Gothic" pitchFamily="34" charset="-122"/>
-                <a:cs typeface="Malgun Gothic" pitchFamily="34" charset="-120"/>
-              </a:rPr>
-              <a:t>작성 예정 — 이 장은 아직 만들지 않았습니다.</a:t>
-            </a:r>
-            <a:endParaRPr lang="en-US" sz="1275" dirty="0"/>
-          </a:p>
-        </p:txBody>
-      </p:sp>
-      <p:sp>
-        <p:nvSpPr>
-          <p:cNvPr id="14" name="Text 12"/>
-          <p:cNvSpPr txBox="1"/>
-          <p:nvPr/>
-        </p:nvSpPr>
-        <p:spPr>
-          <a:xfrm>
-            <a:off x="685800" y="4038600"/>
-            <a:ext cx="10820400" cy="125016"/>
-          </a:xfrm>
-          <a:prstGeom prst="rect">
-            <a:avLst/>
-          </a:prstGeom>
-          <a:noFill/>
-          <a:ln/>
-        </p:spPr>
-        <p:txBody>
-          <a:bodyPr wrap="square" lIns="0" tIns="0" rIns="0" bIns="0" rtlCol="0" anchor="t"/>
-          <a:lstStyle/>
-          <a:p>
-            <a:pPr algn="l" indent="0" marL="0">
-              <a:lnSpc>
-                <a:spcPts val="984"/>
-              </a:lnSpc>
-              <a:buNone/>
-            </a:pPr>
-            <a:r>
-              <a:rPr lang="en-US" sz="788" b="1" spc="150" kern="0" dirty="0">
-                <a:solidFill>
-                  <a:srgbClr val="7E2333"/>
+          <p:cNvPr id="18" name="Text 16"/>
+          <p:cNvSpPr txBox="1"/>
+          <p:nvPr/>
+        </p:nvSpPr>
+        <p:spPr>
+          <a:xfrm>
+            <a:off x="838200" y="4591050"/>
+            <a:ext cx="1238250" cy="260033"/>
+          </a:xfrm>
+          <a:prstGeom prst="rect">
+            <a:avLst/>
+          </a:prstGeom>
+          <a:noFill/>
+          <a:ln/>
+        </p:spPr>
+        <p:txBody>
+          <a:bodyPr wrap="square" lIns="0" tIns="0" rIns="0" bIns="0" rtlCol="0" anchor="t"/>
+          <a:lstStyle/>
+          <a:p>
+            <a:pPr algn="l" indent="0" marL="0">
+              <a:lnSpc>
+                <a:spcPts val="2048"/>
+              </a:lnSpc>
+              <a:buNone/>
+            </a:pPr>
+            <a:r>
+              <a:rPr lang="en-US" sz="1950" b="1" dirty="0">
+                <a:solidFill>
+                  <a:srgbClr val="FF4D63"/>
                 </a:solidFill>
                 <a:latin typeface="Consolas" pitchFamily="34" charset="0"/>
                 <a:ea typeface="Consolas" pitchFamily="34" charset="-122"/>
                 <a:cs typeface="Consolas" pitchFamily="34" charset="-120"/>
               </a:rPr>
-              <a:t>SLIDE 12  ·  TODO</a:t>
+              <a:t>6.0</a:t>
+            </a:r>
+            <a:endParaRPr lang="en-US" sz="1950" dirty="0"/>
+          </a:p>
+        </p:txBody>
+      </p:sp>
+      <p:sp>
+        <p:nvSpPr>
+          <p:cNvPr id="19" name="Text 17"/>
+          <p:cNvSpPr txBox="1"/>
+          <p:nvPr/>
+        </p:nvSpPr>
+        <p:spPr>
+          <a:xfrm>
+            <a:off x="1323975" y="4667250"/>
+            <a:ext cx="476250" cy="148590"/>
+          </a:xfrm>
+          <a:prstGeom prst="rect">
+            <a:avLst/>
+          </a:prstGeom>
+          <a:noFill/>
+          <a:ln/>
+        </p:spPr>
+        <p:txBody>
+          <a:bodyPr wrap="square" lIns="0" tIns="0" rIns="0" bIns="0" rtlCol="0" anchor="t"/>
+          <a:lstStyle/>
+          <a:p>
+            <a:pPr algn="l" indent="0" marL="0">
+              <a:lnSpc>
+                <a:spcPts val="1170"/>
+              </a:lnSpc>
+              <a:buNone/>
+            </a:pPr>
+            <a:r>
+              <a:rPr lang="en-US" sz="975" dirty="0">
+                <a:solidFill>
+                  <a:srgbClr val="93A6BA"/>
+                </a:solidFill>
+                <a:latin typeface="Malgun Gothic" pitchFamily="34" charset="0"/>
+                <a:ea typeface="Malgun Gothic" pitchFamily="34" charset="-122"/>
+                <a:cs typeface="Malgun Gothic" pitchFamily="34" charset="-120"/>
+              </a:rPr>
+              <a:t>MW</a:t>
+            </a:r>
+            <a:endParaRPr lang="en-US" sz="975" dirty="0"/>
+          </a:p>
+        </p:txBody>
+      </p:sp>
+      <p:sp>
+        <p:nvSpPr>
+          <p:cNvPr id="20" name="Text 18"/>
+          <p:cNvSpPr txBox="1"/>
+          <p:nvPr/>
+        </p:nvSpPr>
+        <p:spPr>
+          <a:xfrm>
+            <a:off x="2114550" y="4667250"/>
+            <a:ext cx="1905000" cy="142399"/>
+          </a:xfrm>
+          <a:prstGeom prst="rect">
+            <a:avLst/>
+          </a:prstGeom>
+          <a:noFill/>
+          <a:ln/>
+        </p:spPr>
+        <p:txBody>
+          <a:bodyPr wrap="square" lIns="0" tIns="0" rIns="0" bIns="0" rtlCol="0" anchor="t"/>
+          <a:lstStyle/>
+          <a:p>
+            <a:pPr algn="l" indent="0" marL="0">
+              <a:lnSpc>
+                <a:spcPts val="1121"/>
+              </a:lnSpc>
+              <a:buNone/>
+            </a:pPr>
+            <a:r>
+              <a:rPr lang="en-US" sz="863" dirty="0">
+                <a:solidFill>
+                  <a:srgbClr val="63798F"/>
+                </a:solidFill>
+                <a:latin typeface="Consolas" pitchFamily="34" charset="0"/>
+                <a:ea typeface="Consolas" pitchFamily="34" charset="-122"/>
+                <a:cs typeface="Consolas" pitchFamily="34" charset="-120"/>
+              </a:rPr>
+              <a:t>가장 크게 벌어진 폭</a:t>
+            </a:r>
+            <a:endParaRPr lang="en-US" sz="863" dirty="0"/>
+          </a:p>
+        </p:txBody>
+      </p:sp>
+      <p:sp>
+        <p:nvSpPr>
+          <p:cNvPr id="21" name="Text 19"/>
+          <p:cNvSpPr txBox="1"/>
+          <p:nvPr/>
+        </p:nvSpPr>
+        <p:spPr>
+          <a:xfrm>
+            <a:off x="685800" y="5219700"/>
+            <a:ext cx="3467100" cy="125016"/>
+          </a:xfrm>
+          <a:prstGeom prst="rect">
+            <a:avLst/>
+          </a:prstGeom>
+          <a:noFill/>
+          <a:ln/>
+        </p:spPr>
+        <p:txBody>
+          <a:bodyPr wrap="square" lIns="0" tIns="0" rIns="0" bIns="0" rtlCol="0" anchor="t"/>
+          <a:lstStyle/>
+          <a:p>
+            <a:pPr algn="l" indent="0" marL="0">
+              <a:lnSpc>
+                <a:spcPts val="984"/>
+              </a:lnSpc>
+              <a:buNone/>
+            </a:pPr>
+            <a:r>
+              <a:rPr lang="en-US" sz="788" b="1" spc="150" kern="0" dirty="0">
+                <a:solidFill>
+                  <a:srgbClr val="EFB13C"/>
+                </a:solidFill>
+                <a:latin typeface="Consolas" pitchFamily="34" charset="0"/>
+                <a:ea typeface="Consolas" pitchFamily="34" charset="-122"/>
+                <a:cs typeface="Consolas" pitchFamily="34" charset="-120"/>
+              </a:rPr>
+              <a:t>심어 둔 가드</a:t>
             </a:r>
             <a:endParaRPr lang="en-US" sz="788" dirty="0"/>
           </a:p>
@@ -8193,7 +10830,953 @@
       </p:sp>
       <p:sp>
         <p:nvSpPr>
-          <p:cNvPr id="15" name="Shape 13"/>
+          <p:cNvPr id="22" name="Text 20"/>
+          <p:cNvSpPr txBox="1"/>
+          <p:nvPr/>
+        </p:nvSpPr>
+        <p:spPr>
+          <a:xfrm>
+            <a:off x="685800" y="5410200"/>
+            <a:ext cx="3467100" cy="720090"/>
+          </a:xfrm>
+          <a:prstGeom prst="rect">
+            <a:avLst/>
+          </a:prstGeom>
+          <a:noFill/>
+          <a:ln/>
+        </p:spPr>
+        <p:txBody>
+          <a:bodyPr wrap="square" lIns="0" tIns="0" rIns="0" bIns="0" rtlCol="0" anchor="t"/>
+          <a:lstStyle/>
+          <a:p>
+            <a:pPr algn="l" indent="0" marL="0">
+              <a:lnSpc>
+                <a:spcPts val="1890"/>
+              </a:lnSpc>
+              <a:buNone/>
+            </a:pPr>
+            <a:r>
+              <a:rPr lang="en-US" sz="1125" dirty="0">
+                <a:solidFill>
+                  <a:srgbClr val="BCC9D6"/>
+                </a:solidFill>
+                <a:latin typeface="Malgun Gothic" pitchFamily="34" charset="0"/>
+                <a:ea typeface="Malgun Gothic" pitchFamily="34" charset="-122"/>
+                <a:cs typeface="Malgun Gothic" pitchFamily="34" charset="-120"/>
+              </a:rPr>
+              <a:t>IGV 미실시로 기록된 회차는 </a:t>
+            </a:r>
+            <a:pPr algn="l" indent="0" marL="0">
+              <a:lnSpc>
+                <a:spcPts val="1890"/>
+              </a:lnSpc>
+              <a:buNone/>
+            </a:pPr>
+            <a:r>
+              <a:rPr lang="en-US" sz="1125" b="1" dirty="0">
+                <a:solidFill>
+                  <a:srgbClr val="EAE7E0"/>
+                </a:solidFill>
+                <a:latin typeface="Malgun Gothic" pitchFamily="34" charset="0"/>
+                <a:ea typeface="Malgun Gothic" pitchFamily="34" charset="-122"/>
+                <a:cs typeface="Malgun Gothic" pitchFamily="34" charset="-120"/>
+              </a:rPr>
+              <a:t>누적 반영을 차단</a:t>
+            </a:r>
+            <a:pPr algn="l" indent="0" marL="0">
+              <a:lnSpc>
+                <a:spcPts val="1890"/>
+              </a:lnSpc>
+              <a:buNone/>
+            </a:pPr>
+            <a:r>
+              <a:rPr lang="en-US" sz="1125" dirty="0">
+                <a:solidFill>
+                  <a:srgbClr val="BCC9D6"/>
+                </a:solidFill>
+                <a:latin typeface="Malgun Gothic" pitchFamily="34" charset="0"/>
+                <a:ea typeface="Malgun Gothic" pitchFamily="34" charset="-122"/>
+                <a:cs typeface="Malgun Gothic" pitchFamily="34" charset="-120"/>
+              </a:rPr>
+              <a:t> 합니다. 값은 남기고 학습에서만 뺍니다.</a:t>
+            </a:r>
+            <a:endParaRPr lang="en-US" sz="1125" dirty="0"/>
+          </a:p>
+        </p:txBody>
+      </p:sp>
+      <p:sp>
+        <p:nvSpPr>
+          <p:cNvPr id="23" name="Shape 21"/>
+          <p:cNvSpPr/>
+          <p:nvPr/>
+        </p:nvSpPr>
+        <p:spPr>
+          <a:xfrm>
+            <a:off x="4362450" y="2743200"/>
+            <a:ext cx="3467100" cy="19050"/>
+          </a:xfrm>
+          <a:prstGeom prst="rect">
+            <a:avLst/>
+          </a:prstGeom>
+          <a:solidFill>
+            <a:srgbClr val="7E2333"/>
+          </a:solidFill>
+          <a:ln/>
+        </p:spPr>
+      </p:sp>
+      <p:sp>
+        <p:nvSpPr>
+          <p:cNvPr id="24" name="Text 22"/>
+          <p:cNvSpPr txBox="1"/>
+          <p:nvPr/>
+        </p:nvSpPr>
+        <p:spPr>
+          <a:xfrm>
+            <a:off x="4362450" y="2876550"/>
+            <a:ext cx="3467100" cy="125016"/>
+          </a:xfrm>
+          <a:prstGeom prst="rect">
+            <a:avLst/>
+          </a:prstGeom>
+          <a:noFill/>
+          <a:ln/>
+        </p:spPr>
+        <p:txBody>
+          <a:bodyPr wrap="square" lIns="0" tIns="0" rIns="0" bIns="0" rtlCol="0" anchor="t"/>
+          <a:lstStyle/>
+          <a:p>
+            <a:pPr algn="l" indent="0" marL="0">
+              <a:lnSpc>
+                <a:spcPts val="984"/>
+              </a:lnSpc>
+              <a:buNone/>
+            </a:pPr>
+            <a:r>
+              <a:rPr lang="en-US" sz="788" b="1" spc="150" kern="0" dirty="0">
+                <a:solidFill>
+                  <a:srgbClr val="FF4D63"/>
+                </a:solidFill>
+                <a:latin typeface="Consolas" pitchFamily="34" charset="0"/>
+                <a:ea typeface="Consolas" pitchFamily="34" charset="-122"/>
+                <a:cs typeface="Consolas" pitchFamily="34" charset="-120"/>
+              </a:rPr>
+              <a:t>함정 2</a:t>
+            </a:r>
+            <a:endParaRPr lang="en-US" sz="788" dirty="0"/>
+          </a:p>
+        </p:txBody>
+      </p:sp>
+      <p:sp>
+        <p:nvSpPr>
+          <p:cNvPr id="25" name="Text 23"/>
+          <p:cNvSpPr txBox="1"/>
+          <p:nvPr/>
+        </p:nvSpPr>
+        <p:spPr>
+          <a:xfrm>
+            <a:off x="4362450" y="3086100"/>
+            <a:ext cx="3467100" cy="568071"/>
+          </a:xfrm>
+          <a:prstGeom prst="rect">
+            <a:avLst/>
+          </a:prstGeom>
+          <a:noFill/>
+          <a:ln/>
+        </p:spPr>
+        <p:txBody>
+          <a:bodyPr wrap="square" lIns="0" tIns="0" rIns="0" bIns="0" rtlCol="0" anchor="t"/>
+          <a:lstStyle/>
+          <a:p>
+            <a:pPr algn="l" indent="0" marL="0">
+              <a:lnSpc>
+                <a:spcPts val="2237"/>
+              </a:lnSpc>
+              <a:buNone/>
+            </a:pPr>
+            <a:r>
+              <a:rPr lang="en-US" sz="1575" b="1" dirty="0">
+                <a:solidFill>
+                  <a:srgbClr val="EAE7E0"/>
+                </a:solidFill>
+                <a:latin typeface="Malgun Gothic" pitchFamily="34" charset="0"/>
+                <a:ea typeface="Malgun Gothic" pitchFamily="34" charset="-122"/>
+                <a:cs typeface="Malgun Gothic" pitchFamily="34" charset="-120"/>
+              </a:rPr>
+              <a:t>습도계 값이</a:t>
+            </a:r>
+            <a:endParaRPr lang="en-US" sz="1575" dirty="0"/>
+          </a:p>
+          <a:p>
+            <a:pPr algn="l" indent="0" marL="0">
+              <a:lnSpc>
+                <a:spcPts val="2237"/>
+              </a:lnSpc>
+              <a:buNone/>
+            </a:pPr>
+            <a:r>
+              <a:rPr lang="en-US" sz="1575" b="1" dirty="0">
+                <a:solidFill>
+                  <a:srgbClr val="EAE7E0"/>
+                </a:solidFill>
+                <a:latin typeface="Malgun Gothic" pitchFamily="34" charset="0"/>
+                <a:ea typeface="Malgun Gothic" pitchFamily="34" charset="-122"/>
+                <a:cs typeface="Malgun Gothic" pitchFamily="34" charset="-120"/>
+              </a:rPr>
+              <a:t>서서히 어긋났다</a:t>
+            </a:r>
+            <a:endParaRPr lang="en-US" sz="1575" dirty="0"/>
+          </a:p>
+        </p:txBody>
+      </p:sp>
+      <p:sp>
+        <p:nvSpPr>
+          <p:cNvPr id="26" name="Text 24"/>
+          <p:cNvSpPr txBox="1"/>
+          <p:nvPr/>
+        </p:nvSpPr>
+        <p:spPr>
+          <a:xfrm>
+            <a:off x="4362450" y="3733800"/>
+            <a:ext cx="3467100" cy="720090"/>
+          </a:xfrm>
+          <a:prstGeom prst="rect">
+            <a:avLst/>
+          </a:prstGeom>
+          <a:noFill/>
+          <a:ln/>
+        </p:spPr>
+        <p:txBody>
+          <a:bodyPr wrap="square" lIns="0" tIns="0" rIns="0" bIns="0" rtlCol="0" anchor="t"/>
+          <a:lstStyle/>
+          <a:p>
+            <a:pPr algn="l" indent="0" marL="0">
+              <a:lnSpc>
+                <a:spcPts val="1890"/>
+              </a:lnSpc>
+              <a:buNone/>
+            </a:pPr>
+            <a:r>
+              <a:rPr lang="en-US" sz="1125" dirty="0">
+                <a:solidFill>
+                  <a:srgbClr val="BCC9D6"/>
+                </a:solidFill>
+                <a:latin typeface="Malgun Gothic" pitchFamily="34" charset="0"/>
+                <a:ea typeface="Malgun Gothic" pitchFamily="34" charset="-122"/>
+                <a:cs typeface="Malgun Gothic" pitchFamily="34" charset="-120"/>
+              </a:rPr>
+              <a:t>취득값 19.6% 인데 실제는 68.5% 였습니다. 계기 한 대만 믿으면 못 잡습니다.</a:t>
+            </a:r>
+            <a:endParaRPr lang="en-US" sz="1125" dirty="0"/>
+          </a:p>
+        </p:txBody>
+      </p:sp>
+      <p:sp>
+        <p:nvSpPr>
+          <p:cNvPr id="27" name="Shape 25"/>
+          <p:cNvSpPr/>
+          <p:nvPr/>
+        </p:nvSpPr>
+        <p:spPr>
+          <a:xfrm>
+            <a:off x="4362450" y="4476750"/>
+            <a:ext cx="3467100" cy="590550"/>
+          </a:xfrm>
+          <a:prstGeom prst="rect">
+            <a:avLst/>
+          </a:prstGeom>
+          <a:solidFill>
+            <a:srgbClr val="0A1320"/>
+          </a:solidFill>
+          <a:ln w="12700">
+            <a:solidFill>
+              <a:srgbClr val="182838"/>
+            </a:solidFill>
+            <a:prstDash val="solid"/>
+          </a:ln>
+        </p:spPr>
+      </p:sp>
+      <p:sp>
+        <p:nvSpPr>
+          <p:cNvPr id="28" name="Text 26"/>
+          <p:cNvSpPr txBox="1"/>
+          <p:nvPr/>
+        </p:nvSpPr>
+        <p:spPr>
+          <a:xfrm>
+            <a:off x="4514850" y="4591050"/>
+            <a:ext cx="1238250" cy="260033"/>
+          </a:xfrm>
+          <a:prstGeom prst="rect">
+            <a:avLst/>
+          </a:prstGeom>
+          <a:noFill/>
+          <a:ln/>
+        </p:spPr>
+        <p:txBody>
+          <a:bodyPr wrap="square" lIns="0" tIns="0" rIns="0" bIns="0" rtlCol="0" anchor="t"/>
+          <a:lstStyle/>
+          <a:p>
+            <a:pPr algn="l" indent="0" marL="0">
+              <a:lnSpc>
+                <a:spcPts val="2048"/>
+              </a:lnSpc>
+              <a:buNone/>
+            </a:pPr>
+            <a:r>
+              <a:rPr lang="en-US" sz="1950" b="1" dirty="0">
+                <a:solidFill>
+                  <a:srgbClr val="FF4D63"/>
+                </a:solidFill>
+                <a:latin typeface="Consolas" pitchFamily="34" charset="0"/>
+                <a:ea typeface="Consolas" pitchFamily="34" charset="-122"/>
+                <a:cs typeface="Consolas" pitchFamily="34" charset="-120"/>
+              </a:rPr>
+              <a:t>4.57</a:t>
+            </a:r>
+            <a:endParaRPr lang="en-US" sz="1950" dirty="0"/>
+          </a:p>
+        </p:txBody>
+      </p:sp>
+      <p:sp>
+        <p:nvSpPr>
+          <p:cNvPr id="29" name="Text 27"/>
+          <p:cNvSpPr txBox="1"/>
+          <p:nvPr/>
+        </p:nvSpPr>
+        <p:spPr>
+          <a:xfrm>
+            <a:off x="5162550" y="4667250"/>
+            <a:ext cx="476250" cy="148590"/>
+          </a:xfrm>
+          <a:prstGeom prst="rect">
+            <a:avLst/>
+          </a:prstGeom>
+          <a:noFill/>
+          <a:ln/>
+        </p:spPr>
+        <p:txBody>
+          <a:bodyPr wrap="square" lIns="0" tIns="0" rIns="0" bIns="0" rtlCol="0" anchor="t"/>
+          <a:lstStyle/>
+          <a:p>
+            <a:pPr algn="l" indent="0" marL="0">
+              <a:lnSpc>
+                <a:spcPts val="1170"/>
+              </a:lnSpc>
+              <a:buNone/>
+            </a:pPr>
+            <a:r>
+              <a:rPr lang="en-US" sz="975" dirty="0">
+                <a:solidFill>
+                  <a:srgbClr val="93A6BA"/>
+                </a:solidFill>
+                <a:latin typeface="Malgun Gothic" pitchFamily="34" charset="0"/>
+                <a:ea typeface="Malgun Gothic" pitchFamily="34" charset="-122"/>
+                <a:cs typeface="Malgun Gothic" pitchFamily="34" charset="-120"/>
+              </a:rPr>
+              <a:t>MW</a:t>
+            </a:r>
+            <a:endParaRPr lang="en-US" sz="975" dirty="0"/>
+          </a:p>
+        </p:txBody>
+      </p:sp>
+      <p:sp>
+        <p:nvSpPr>
+          <p:cNvPr id="30" name="Text 28"/>
+          <p:cNvSpPr txBox="1"/>
+          <p:nvPr/>
+        </p:nvSpPr>
+        <p:spPr>
+          <a:xfrm>
+            <a:off x="5791200" y="4667250"/>
+            <a:ext cx="1905000" cy="142399"/>
+          </a:xfrm>
+          <a:prstGeom prst="rect">
+            <a:avLst/>
+          </a:prstGeom>
+          <a:noFill/>
+          <a:ln/>
+        </p:spPr>
+        <p:txBody>
+          <a:bodyPr wrap="square" lIns="0" tIns="0" rIns="0" bIns="0" rtlCol="0" anchor="t"/>
+          <a:lstStyle/>
+          <a:p>
+            <a:pPr algn="l" indent="0" marL="0">
+              <a:lnSpc>
+                <a:spcPts val="1121"/>
+              </a:lnSpc>
+              <a:buNone/>
+            </a:pPr>
+            <a:r>
+              <a:rPr lang="en-US" sz="863" dirty="0">
+                <a:solidFill>
+                  <a:srgbClr val="63798F"/>
+                </a:solidFill>
+                <a:latin typeface="Consolas" pitchFamily="34" charset="0"/>
+                <a:ea typeface="Consolas" pitchFamily="34" charset="-122"/>
+                <a:cs typeface="Consolas" pitchFamily="34" charset="-120"/>
+              </a:rPr>
+              <a:t>이 한 건의 오차 폭</a:t>
+            </a:r>
+            <a:endParaRPr lang="en-US" sz="863" dirty="0"/>
+          </a:p>
+        </p:txBody>
+      </p:sp>
+      <p:sp>
+        <p:nvSpPr>
+          <p:cNvPr id="31" name="Text 29"/>
+          <p:cNvSpPr txBox="1"/>
+          <p:nvPr/>
+        </p:nvSpPr>
+        <p:spPr>
+          <a:xfrm>
+            <a:off x="4362450" y="5219700"/>
+            <a:ext cx="3467100" cy="125016"/>
+          </a:xfrm>
+          <a:prstGeom prst="rect">
+            <a:avLst/>
+          </a:prstGeom>
+          <a:noFill/>
+          <a:ln/>
+        </p:spPr>
+        <p:txBody>
+          <a:bodyPr wrap="square" lIns="0" tIns="0" rIns="0" bIns="0" rtlCol="0" anchor="t"/>
+          <a:lstStyle/>
+          <a:p>
+            <a:pPr algn="l" indent="0" marL="0">
+              <a:lnSpc>
+                <a:spcPts val="984"/>
+              </a:lnSpc>
+              <a:buNone/>
+            </a:pPr>
+            <a:r>
+              <a:rPr lang="en-US" sz="788" b="1" spc="150" kern="0" dirty="0">
+                <a:solidFill>
+                  <a:srgbClr val="EFB13C"/>
+                </a:solidFill>
+                <a:latin typeface="Consolas" pitchFamily="34" charset="0"/>
+                <a:ea typeface="Consolas" pitchFamily="34" charset="-122"/>
+                <a:cs typeface="Consolas" pitchFamily="34" charset="-120"/>
+              </a:rPr>
+              <a:t>심어 둔 가드</a:t>
+            </a:r>
+            <a:endParaRPr lang="en-US" sz="788" dirty="0"/>
+          </a:p>
+        </p:txBody>
+      </p:sp>
+      <p:sp>
+        <p:nvSpPr>
+          <p:cNvPr id="32" name="Text 30"/>
+          <p:cNvSpPr txBox="1"/>
+          <p:nvPr/>
+        </p:nvSpPr>
+        <p:spPr>
+          <a:xfrm>
+            <a:off x="4362450" y="5410200"/>
+            <a:ext cx="3467100" cy="720090"/>
+          </a:xfrm>
+          <a:prstGeom prst="rect">
+            <a:avLst/>
+          </a:prstGeom>
+          <a:noFill/>
+          <a:ln/>
+        </p:spPr>
+        <p:txBody>
+          <a:bodyPr wrap="square" lIns="0" tIns="0" rIns="0" bIns="0" rtlCol="0" anchor="t"/>
+          <a:lstStyle/>
+          <a:p>
+            <a:pPr algn="l" indent="0" marL="0">
+              <a:lnSpc>
+                <a:spcPts val="1890"/>
+              </a:lnSpc>
+              <a:buNone/>
+            </a:pPr>
+            <a:r>
+              <a:rPr lang="en-US" sz="1125" dirty="0">
+                <a:solidFill>
+                  <a:srgbClr val="BCC9D6"/>
+                </a:solidFill>
+                <a:latin typeface="Malgun Gothic" pitchFamily="34" charset="0"/>
+                <a:ea typeface="Malgun Gothic" pitchFamily="34" charset="-122"/>
+                <a:cs typeface="Malgun Gothic" pitchFamily="34" charset="-120"/>
+              </a:rPr>
+              <a:t>습도계 </a:t>
+            </a:r>
+            <a:pPr algn="l" indent="0" marL="0">
+              <a:lnSpc>
+                <a:spcPts val="1890"/>
+              </a:lnSpc>
+              <a:buNone/>
+            </a:pPr>
+            <a:r>
+              <a:rPr lang="en-US" sz="1125" b="1" dirty="0">
+                <a:solidFill>
+                  <a:srgbClr val="EAE7E0"/>
+                </a:solidFill>
+                <a:latin typeface="Malgun Gothic" pitchFamily="34" charset="0"/>
+                <a:ea typeface="Malgun Gothic" pitchFamily="34" charset="-122"/>
+                <a:cs typeface="Malgun Gothic" pitchFamily="34" charset="-120"/>
+              </a:rPr>
+              <a:t>2대를 교차 확인</a:t>
+            </a:r>
+            <a:pPr algn="l" indent="0" marL="0">
+              <a:lnSpc>
+                <a:spcPts val="1890"/>
+              </a:lnSpc>
+              <a:buNone/>
+            </a:pPr>
+            <a:r>
+              <a:rPr lang="en-US" sz="1125" dirty="0">
+                <a:solidFill>
+                  <a:srgbClr val="BCC9D6"/>
+                </a:solidFill>
+                <a:latin typeface="Malgun Gothic" pitchFamily="34" charset="0"/>
+                <a:ea typeface="Malgun Gothic" pitchFamily="34" charset="-122"/>
+                <a:cs typeface="Malgun Gothic" pitchFamily="34" charset="-120"/>
+              </a:rPr>
+              <a:t> 해 벌어지면 그 회차는 반영 보류하고 화면에 띄웁니다.</a:t>
+            </a:r>
+            <a:endParaRPr lang="en-US" sz="1125" dirty="0"/>
+          </a:p>
+        </p:txBody>
+      </p:sp>
+      <p:sp>
+        <p:nvSpPr>
+          <p:cNvPr id="33" name="Shape 31"/>
+          <p:cNvSpPr/>
+          <p:nvPr/>
+        </p:nvSpPr>
+        <p:spPr>
+          <a:xfrm>
+            <a:off x="8039100" y="2743200"/>
+            <a:ext cx="3467100" cy="19050"/>
+          </a:xfrm>
+          <a:prstGeom prst="rect">
+            <a:avLst/>
+          </a:prstGeom>
+          <a:solidFill>
+            <a:srgbClr val="7E2333"/>
+          </a:solidFill>
+          <a:ln/>
+        </p:spPr>
+      </p:sp>
+      <p:sp>
+        <p:nvSpPr>
+          <p:cNvPr id="34" name="Text 32"/>
+          <p:cNvSpPr txBox="1"/>
+          <p:nvPr/>
+        </p:nvSpPr>
+        <p:spPr>
+          <a:xfrm>
+            <a:off x="8039100" y="2876550"/>
+            <a:ext cx="3467100" cy="125016"/>
+          </a:xfrm>
+          <a:prstGeom prst="rect">
+            <a:avLst/>
+          </a:prstGeom>
+          <a:noFill/>
+          <a:ln/>
+        </p:spPr>
+        <p:txBody>
+          <a:bodyPr wrap="square" lIns="0" tIns="0" rIns="0" bIns="0" rtlCol="0" anchor="t"/>
+          <a:lstStyle/>
+          <a:p>
+            <a:pPr algn="l" indent="0" marL="0">
+              <a:lnSpc>
+                <a:spcPts val="984"/>
+              </a:lnSpc>
+              <a:buNone/>
+            </a:pPr>
+            <a:r>
+              <a:rPr lang="en-US" sz="788" b="1" spc="150" kern="0" dirty="0">
+                <a:solidFill>
+                  <a:srgbClr val="FF4D63"/>
+                </a:solidFill>
+                <a:latin typeface="Consolas" pitchFamily="34" charset="0"/>
+                <a:ea typeface="Consolas" pitchFamily="34" charset="-122"/>
+                <a:cs typeface="Consolas" pitchFamily="34" charset="-120"/>
+              </a:rPr>
+              <a:t>함정 3</a:t>
+            </a:r>
+            <a:endParaRPr lang="en-US" sz="788" dirty="0"/>
+          </a:p>
+        </p:txBody>
+      </p:sp>
+      <p:sp>
+        <p:nvSpPr>
+          <p:cNvPr id="35" name="Text 33"/>
+          <p:cNvSpPr txBox="1"/>
+          <p:nvPr/>
+        </p:nvSpPr>
+        <p:spPr>
+          <a:xfrm>
+            <a:off x="8039100" y="3086100"/>
+            <a:ext cx="3467100" cy="568071"/>
+          </a:xfrm>
+          <a:prstGeom prst="rect">
+            <a:avLst/>
+          </a:prstGeom>
+          <a:noFill/>
+          <a:ln/>
+        </p:spPr>
+        <p:txBody>
+          <a:bodyPr wrap="square" lIns="0" tIns="0" rIns="0" bIns="0" rtlCol="0" anchor="t"/>
+          <a:lstStyle/>
+          <a:p>
+            <a:pPr algn="l" indent="0" marL="0">
+              <a:lnSpc>
+                <a:spcPts val="2237"/>
+              </a:lnSpc>
+              <a:buNone/>
+            </a:pPr>
+            <a:r>
+              <a:rPr lang="en-US" sz="1575" b="1" dirty="0">
+                <a:solidFill>
+                  <a:srgbClr val="EAE7E0"/>
+                </a:solidFill>
+                <a:latin typeface="Malgun Gothic" pitchFamily="34" charset="0"/>
+                <a:ea typeface="Malgun Gothic" pitchFamily="34" charset="-122"/>
+                <a:cs typeface="Malgun Gothic" pitchFamily="34" charset="-120"/>
+              </a:rPr>
+              <a:t>대기압 평균 기간이</a:t>
+            </a:r>
+            <a:endParaRPr lang="en-US" sz="1575" dirty="0"/>
+          </a:p>
+          <a:p>
+            <a:pPr algn="l" indent="0" marL="0">
+              <a:lnSpc>
+                <a:spcPts val="2237"/>
+              </a:lnSpc>
+              <a:buNone/>
+            </a:pPr>
+            <a:r>
+              <a:rPr lang="en-US" sz="1575" b="1" dirty="0">
+                <a:solidFill>
+                  <a:srgbClr val="EAE7E0"/>
+                </a:solidFill>
+                <a:latin typeface="Malgun Gothic" pitchFamily="34" charset="0"/>
+                <a:ea typeface="Malgun Gothic" pitchFamily="34" charset="-122"/>
+                <a:cs typeface="Malgun Gothic" pitchFamily="34" charset="-120"/>
+              </a:rPr>
+              <a:t>신고 서식과 달랐다</a:t>
+            </a:r>
+            <a:endParaRPr lang="en-US" sz="1575" dirty="0"/>
+          </a:p>
+        </p:txBody>
+      </p:sp>
+      <p:sp>
+        <p:nvSpPr>
+          <p:cNvPr id="36" name="Text 34"/>
+          <p:cNvSpPr txBox="1"/>
+          <p:nvPr/>
+        </p:nvSpPr>
+        <p:spPr>
+          <a:xfrm>
+            <a:off x="8039100" y="3733800"/>
+            <a:ext cx="3467100" cy="720090"/>
+          </a:xfrm>
+          <a:prstGeom prst="rect">
+            <a:avLst/>
+          </a:prstGeom>
+          <a:noFill/>
+          <a:ln/>
+        </p:spPr>
+        <p:txBody>
+          <a:bodyPr wrap="square" lIns="0" tIns="0" rIns="0" bIns="0" rtlCol="0" anchor="t"/>
+          <a:lstStyle/>
+          <a:p>
+            <a:pPr algn="l" indent="0" marL="0">
+              <a:lnSpc>
+                <a:spcPts val="1890"/>
+              </a:lnSpc>
+              <a:buNone/>
+            </a:pPr>
+            <a:r>
+              <a:rPr lang="en-US" sz="1125" dirty="0">
+                <a:solidFill>
+                  <a:srgbClr val="BCC9D6"/>
+                </a:solidFill>
+                <a:latin typeface="Malgun Gothic" pitchFamily="34" charset="0"/>
+                <a:ea typeface="Malgun Gothic" pitchFamily="34" charset="-122"/>
+                <a:cs typeface="Malgun Gothic" pitchFamily="34" charset="-120"/>
+              </a:rPr>
+              <a:t>우리는 7일 평균, 신고 서식은 5일 평균이었습니다. 조용히 어긋나는 종류입니다.</a:t>
+            </a:r>
+            <a:endParaRPr lang="en-US" sz="1125" dirty="0"/>
+          </a:p>
+        </p:txBody>
+      </p:sp>
+      <p:sp>
+        <p:nvSpPr>
+          <p:cNvPr id="37" name="Shape 35"/>
+          <p:cNvSpPr/>
+          <p:nvPr/>
+        </p:nvSpPr>
+        <p:spPr>
+          <a:xfrm>
+            <a:off x="8039100" y="4476750"/>
+            <a:ext cx="3467100" cy="590550"/>
+          </a:xfrm>
+          <a:prstGeom prst="rect">
+            <a:avLst/>
+          </a:prstGeom>
+          <a:solidFill>
+            <a:srgbClr val="0A1320"/>
+          </a:solidFill>
+          <a:ln w="12700">
+            <a:solidFill>
+              <a:srgbClr val="182838"/>
+            </a:solidFill>
+            <a:prstDash val="solid"/>
+          </a:ln>
+        </p:spPr>
+      </p:sp>
+      <p:sp>
+        <p:nvSpPr>
+          <p:cNvPr id="38" name="Text 36"/>
+          <p:cNvSpPr txBox="1"/>
+          <p:nvPr/>
+        </p:nvSpPr>
+        <p:spPr>
+          <a:xfrm>
+            <a:off x="8191500" y="4591050"/>
+            <a:ext cx="1238250" cy="260033"/>
+          </a:xfrm>
+          <a:prstGeom prst="rect">
+            <a:avLst/>
+          </a:prstGeom>
+          <a:noFill/>
+          <a:ln/>
+        </p:spPr>
+        <p:txBody>
+          <a:bodyPr wrap="square" lIns="0" tIns="0" rIns="0" bIns="0" rtlCol="0" anchor="t"/>
+          <a:lstStyle/>
+          <a:p>
+            <a:pPr algn="l" indent="0" marL="0">
+              <a:lnSpc>
+                <a:spcPts val="2048"/>
+              </a:lnSpc>
+              <a:buNone/>
+            </a:pPr>
+            <a:r>
+              <a:rPr lang="en-US" sz="1950" b="1" dirty="0">
+                <a:solidFill>
+                  <a:srgbClr val="FF4D63"/>
+                </a:solidFill>
+                <a:latin typeface="Consolas" pitchFamily="34" charset="0"/>
+                <a:ea typeface="Consolas" pitchFamily="34" charset="-122"/>
+                <a:cs typeface="Consolas" pitchFamily="34" charset="-120"/>
+              </a:rPr>
+              <a:t>0.5</a:t>
+            </a:r>
+            <a:endParaRPr lang="en-US" sz="1950" dirty="0"/>
+          </a:p>
+        </p:txBody>
+      </p:sp>
+      <p:sp>
+        <p:nvSpPr>
+          <p:cNvPr id="39" name="Text 37"/>
+          <p:cNvSpPr txBox="1"/>
+          <p:nvPr/>
+        </p:nvSpPr>
+        <p:spPr>
+          <a:xfrm>
+            <a:off x="8677275" y="4667250"/>
+            <a:ext cx="476250" cy="148590"/>
+          </a:xfrm>
+          <a:prstGeom prst="rect">
+            <a:avLst/>
+          </a:prstGeom>
+          <a:noFill/>
+          <a:ln/>
+        </p:spPr>
+        <p:txBody>
+          <a:bodyPr wrap="square" lIns="0" tIns="0" rIns="0" bIns="0" rtlCol="0" anchor="t"/>
+          <a:lstStyle/>
+          <a:p>
+            <a:pPr algn="l" indent="0" marL="0">
+              <a:lnSpc>
+                <a:spcPts val="1170"/>
+              </a:lnSpc>
+              <a:buNone/>
+            </a:pPr>
+            <a:r>
+              <a:rPr lang="en-US" sz="975" dirty="0">
+                <a:solidFill>
+                  <a:srgbClr val="93A6BA"/>
+                </a:solidFill>
+                <a:latin typeface="Malgun Gothic" pitchFamily="34" charset="0"/>
+                <a:ea typeface="Malgun Gothic" pitchFamily="34" charset="-122"/>
+                <a:cs typeface="Malgun Gothic" pitchFamily="34" charset="-120"/>
+              </a:rPr>
+              <a:t>MW</a:t>
+            </a:r>
+            <a:endParaRPr lang="en-US" sz="975" dirty="0"/>
+          </a:p>
+        </p:txBody>
+      </p:sp>
+      <p:sp>
+        <p:nvSpPr>
+          <p:cNvPr id="40" name="Text 38"/>
+          <p:cNvSpPr txBox="1"/>
+          <p:nvPr/>
+        </p:nvSpPr>
+        <p:spPr>
+          <a:xfrm>
+            <a:off x="9467850" y="4667250"/>
+            <a:ext cx="1905000" cy="142399"/>
+          </a:xfrm>
+          <a:prstGeom prst="rect">
+            <a:avLst/>
+          </a:prstGeom>
+          <a:noFill/>
+          <a:ln/>
+        </p:spPr>
+        <p:txBody>
+          <a:bodyPr wrap="square" lIns="0" tIns="0" rIns="0" bIns="0" rtlCol="0" anchor="t"/>
+          <a:lstStyle/>
+          <a:p>
+            <a:pPr algn="l" indent="0" marL="0">
+              <a:lnSpc>
+                <a:spcPts val="1121"/>
+              </a:lnSpc>
+              <a:buNone/>
+            </a:pPr>
+            <a:r>
+              <a:rPr lang="en-US" sz="863" dirty="0">
+                <a:solidFill>
+                  <a:srgbClr val="63798F"/>
+                </a:solidFill>
+                <a:latin typeface="Consolas" pitchFamily="34" charset="0"/>
+                <a:ea typeface="Consolas" pitchFamily="34" charset="-122"/>
+                <a:cs typeface="Consolas" pitchFamily="34" charset="-120"/>
+              </a:rPr>
+              <a:t>어긋난 폭 (작지만 상시)</a:t>
+            </a:r>
+            <a:endParaRPr lang="en-US" sz="863" dirty="0"/>
+          </a:p>
+        </p:txBody>
+      </p:sp>
+      <p:sp>
+        <p:nvSpPr>
+          <p:cNvPr id="41" name="Text 39"/>
+          <p:cNvSpPr txBox="1"/>
+          <p:nvPr/>
+        </p:nvSpPr>
+        <p:spPr>
+          <a:xfrm>
+            <a:off x="8039100" y="5219700"/>
+            <a:ext cx="3467100" cy="125016"/>
+          </a:xfrm>
+          <a:prstGeom prst="rect">
+            <a:avLst/>
+          </a:prstGeom>
+          <a:noFill/>
+          <a:ln/>
+        </p:spPr>
+        <p:txBody>
+          <a:bodyPr wrap="square" lIns="0" tIns="0" rIns="0" bIns="0" rtlCol="0" anchor="t"/>
+          <a:lstStyle/>
+          <a:p>
+            <a:pPr algn="l" indent="0" marL="0">
+              <a:lnSpc>
+                <a:spcPts val="984"/>
+              </a:lnSpc>
+              <a:buNone/>
+            </a:pPr>
+            <a:r>
+              <a:rPr lang="en-US" sz="788" b="1" spc="150" kern="0" dirty="0">
+                <a:solidFill>
+                  <a:srgbClr val="EFB13C"/>
+                </a:solidFill>
+                <a:latin typeface="Consolas" pitchFamily="34" charset="0"/>
+                <a:ea typeface="Consolas" pitchFamily="34" charset="-122"/>
+                <a:cs typeface="Consolas" pitchFamily="34" charset="-120"/>
+              </a:rPr>
+              <a:t>심어 둔 가드</a:t>
+            </a:r>
+            <a:endParaRPr lang="en-US" sz="788" dirty="0"/>
+          </a:p>
+        </p:txBody>
+      </p:sp>
+      <p:sp>
+        <p:nvSpPr>
+          <p:cNvPr id="42" name="Text 40"/>
+          <p:cNvSpPr txBox="1"/>
+          <p:nvPr/>
+        </p:nvSpPr>
+        <p:spPr>
+          <a:xfrm>
+            <a:off x="8039100" y="5410200"/>
+            <a:ext cx="3467100" cy="720090"/>
+          </a:xfrm>
+          <a:prstGeom prst="rect">
+            <a:avLst/>
+          </a:prstGeom>
+          <a:noFill/>
+          <a:ln/>
+        </p:spPr>
+        <p:txBody>
+          <a:bodyPr wrap="square" lIns="0" tIns="0" rIns="0" bIns="0" rtlCol="0" anchor="t"/>
+          <a:lstStyle/>
+          <a:p>
+            <a:pPr algn="l" indent="0" marL="0">
+              <a:lnSpc>
+                <a:spcPts val="1890"/>
+              </a:lnSpc>
+              <a:buNone/>
+            </a:pPr>
+            <a:r>
+              <a:rPr lang="en-US" sz="1125" dirty="0">
+                <a:solidFill>
+                  <a:srgbClr val="BCC9D6"/>
+                </a:solidFill>
+                <a:latin typeface="Malgun Gothic" pitchFamily="34" charset="0"/>
+                <a:ea typeface="Malgun Gothic" pitchFamily="34" charset="-122"/>
+                <a:cs typeface="Malgun Gothic" pitchFamily="34" charset="-120"/>
+              </a:rPr>
+              <a:t>서식 수식을 그대로 읽어 대조하는 </a:t>
+            </a:r>
+            <a:pPr algn="l" indent="0" marL="0">
+              <a:lnSpc>
+                <a:spcPts val="1890"/>
+              </a:lnSpc>
+              <a:buNone/>
+            </a:pPr>
+            <a:r>
+              <a:rPr lang="en-US" sz="1125" b="1" dirty="0">
+                <a:solidFill>
+                  <a:srgbClr val="EAE7E0"/>
+                </a:solidFill>
+                <a:latin typeface="Malgun Gothic" pitchFamily="34" charset="0"/>
+                <a:ea typeface="Malgun Gothic" pitchFamily="34" charset="-122"/>
+                <a:cs typeface="Malgun Gothic" pitchFamily="34" charset="-120"/>
+              </a:rPr>
+              <a:t>자동 시험</a:t>
+            </a:r>
+            <a:pPr algn="l" indent="0" marL="0">
+              <a:lnSpc>
+                <a:spcPts val="1890"/>
+              </a:lnSpc>
+              <a:buNone/>
+            </a:pPr>
+            <a:r>
+              <a:rPr lang="en-US" sz="1125" dirty="0">
+                <a:solidFill>
+                  <a:srgbClr val="BCC9D6"/>
+                </a:solidFill>
+                <a:latin typeface="Malgun Gothic" pitchFamily="34" charset="0"/>
+                <a:ea typeface="Malgun Gothic" pitchFamily="34" charset="-122"/>
+                <a:cs typeface="Malgun Gothic" pitchFamily="34" charset="-120"/>
+              </a:rPr>
+              <a:t> 을 걸어 두었습니다. 다시 어긋나면 실패합니다.</a:t>
+            </a:r>
+            <a:endParaRPr lang="en-US" sz="1125" dirty="0"/>
+          </a:p>
+        </p:txBody>
+      </p:sp>
+      <p:sp>
+        <p:nvSpPr>
+          <p:cNvPr id="43" name="Shape 41"/>
           <p:cNvSpPr/>
           <p:nvPr/>
         </p:nvSpPr>
@@ -8213,6 +11796,124 @@
             <a:prstDash val="solid"/>
           </a:ln>
         </p:spPr>
+      </p:sp>
+      <p:sp>
+        <p:nvSpPr>
+          <p:cNvPr id="44" name="Text 42"/>
+          <p:cNvSpPr txBox="1"/>
+          <p:nvPr/>
+        </p:nvSpPr>
+        <p:spPr>
+          <a:xfrm>
+            <a:off x="685800" y="6267450"/>
+            <a:ext cx="476250" cy="120015"/>
+          </a:xfrm>
+          <a:prstGeom prst="rect">
+            <a:avLst/>
+          </a:prstGeom>
+          <a:noFill/>
+          <a:ln/>
+        </p:spPr>
+        <p:txBody>
+          <a:bodyPr wrap="square" lIns="0" tIns="0" rIns="0" bIns="0" rtlCol="0" anchor="t"/>
+          <a:lstStyle/>
+          <a:p>
+            <a:pPr algn="l" indent="0" marL="0">
+              <a:lnSpc>
+                <a:spcPts val="945"/>
+              </a:lnSpc>
+              <a:buNone/>
+            </a:pPr>
+            <a:r>
+              <a:rPr lang="en-US" sz="788" b="1" spc="180" kern="0" dirty="0">
+                <a:solidFill>
+                  <a:srgbClr val="EFB13C"/>
+                </a:solidFill>
+                <a:latin typeface="Consolas" pitchFamily="34" charset="0"/>
+                <a:ea typeface="Consolas" pitchFamily="34" charset="-122"/>
+                <a:cs typeface="Consolas" pitchFamily="34" charset="-120"/>
+              </a:rPr>
+              <a:t>결론</a:t>
+            </a:r>
+            <a:endParaRPr lang="en-US" sz="788" dirty="0"/>
+          </a:p>
+        </p:txBody>
+      </p:sp>
+      <p:sp>
+        <p:nvSpPr>
+          <p:cNvPr id="45" name="Text 43"/>
+          <p:cNvSpPr txBox="1"/>
+          <p:nvPr/>
+        </p:nvSpPr>
+        <p:spPr>
+          <a:xfrm>
+            <a:off x="1219200" y="6229350"/>
+            <a:ext cx="10287000" cy="220027"/>
+          </a:xfrm>
+          <a:prstGeom prst="rect">
+            <a:avLst/>
+          </a:prstGeom>
+          <a:noFill/>
+          <a:ln/>
+        </p:spPr>
+        <p:txBody>
+          <a:bodyPr wrap="square" lIns="0" tIns="0" rIns="0" bIns="0" rtlCol="0" anchor="t"/>
+          <a:lstStyle/>
+          <a:p>
+            <a:pPr algn="l" indent="0" marL="0">
+              <a:lnSpc>
+                <a:spcPts val="1733"/>
+              </a:lnSpc>
+              <a:buNone/>
+            </a:pPr>
+            <a:r>
+              <a:rPr lang="en-US" sz="1238" dirty="0">
+                <a:solidFill>
+                  <a:srgbClr val="BCC9D6"/>
+                </a:solidFill>
+                <a:latin typeface="Malgun Gothic" pitchFamily="34" charset="0"/>
+                <a:ea typeface="Malgun Gothic" pitchFamily="34" charset="-122"/>
+                <a:cs typeface="Malgun Gothic" pitchFamily="34" charset="-120"/>
+              </a:rPr>
+              <a:t>데이터를 믿는 것이 아니라, </a:t>
+            </a:r>
+            <a:pPr algn="l" indent="0" marL="0">
+              <a:lnSpc>
+                <a:spcPts val="1733"/>
+              </a:lnSpc>
+              <a:buNone/>
+            </a:pPr>
+            <a:r>
+              <a:rPr lang="en-US" sz="1238" b="1" dirty="0">
+                <a:solidFill>
+                  <a:srgbClr val="EFB13C"/>
+                </a:solidFill>
+                <a:latin typeface="Malgun Gothic" pitchFamily="34" charset="0"/>
+                <a:ea typeface="Malgun Gothic" pitchFamily="34" charset="-122"/>
+                <a:cs typeface="Malgun Gothic" pitchFamily="34" charset="-120"/>
+              </a:rPr>
+              <a:t>의심하는 절차</a:t>
+            </a:r>
+            <a:pPr algn="l" indent="0" marL="0">
+              <a:lnSpc>
+                <a:spcPts val="1733"/>
+              </a:lnSpc>
+              <a:buNone/>
+            </a:pPr>
+            <a:r>
+              <a:rPr lang="en-US" sz="1238" dirty="0">
+                <a:solidFill>
+                  <a:srgbClr val="BCC9D6"/>
+                </a:solidFill>
+                <a:latin typeface="Malgun Gothic" pitchFamily="34" charset="0"/>
+                <a:ea typeface="Malgun Gothic" pitchFamily="34" charset="-122"/>
+                <a:cs typeface="Malgun Gothic" pitchFamily="34" charset="-120"/>
+              </a:rPr>
+              <a:t>를 코드에 심었습니다.</a:t>
+            </a:r>
+            <a:endParaRPr lang="en-US" sz="1238" dirty="0"/>
+          </a:p>
+        </p:txBody>
       </p:sp>
     </p:spTree>
   </p:cSld>
@@ -8477,26 +12178,26 @@
         <p:spPr>
           <a:xfrm>
             <a:off x="685800" y="914400"/>
-            <a:ext cx="10287000" cy="360045"/>
-          </a:xfrm>
-          <a:prstGeom prst="rect">
-            <a:avLst/>
-          </a:prstGeom>
-          <a:noFill/>
-          <a:ln/>
-        </p:spPr>
-        <p:txBody>
-          <a:bodyPr wrap="square" lIns="0" tIns="0" rIns="0" bIns="0" rtlCol="0" anchor="t"/>
-          <a:lstStyle/>
-          <a:p>
-            <a:pPr algn="l" indent="0" marL="0">
-              <a:lnSpc>
-                <a:spcPts val="2835"/>
-              </a:lnSpc>
-              <a:buNone/>
-            </a:pPr>
-            <a:r>
-              <a:rPr lang="en-US" sz="2250" b="1" dirty="0">
+            <a:ext cx="10287000" cy="888111"/>
+          </a:xfrm>
+          <a:prstGeom prst="rect">
+            <a:avLst/>
+          </a:prstGeom>
+          <a:noFill/>
+          <a:ln/>
+        </p:spPr>
+        <p:txBody>
+          <a:bodyPr wrap="square" lIns="0" tIns="0" rIns="0" bIns="0" rtlCol="0" anchor="t"/>
+          <a:lstStyle/>
+          <a:p>
+            <a:pPr algn="l" indent="0" marL="0">
+              <a:lnSpc>
+                <a:spcPts val="3496"/>
+              </a:lnSpc>
+              <a:buNone/>
+            </a:pPr>
+            <a:r>
+              <a:rPr lang="en-US" sz="2775" b="1" dirty="0">
                 <a:solidFill>
                   <a:srgbClr val="EAE7E0"/>
                 </a:solidFill>
@@ -8504,22 +12205,197 @@
                 <a:ea typeface="Malgun Gothic" pitchFamily="34" charset="-122"/>
                 <a:cs typeface="Malgun Gothic" pitchFamily="34" charset="-120"/>
               </a:rPr>
-              <a:t>세 지표가 동시에 좋아졌습니다</a:t>
-            </a:r>
-            <a:endParaRPr lang="en-US" sz="2250" dirty="0"/>
-          </a:p>
-        </p:txBody>
-      </p:sp>
-      <p:sp>
-        <p:nvSpPr>
-          <p:cNvPr id="12" name="Shape 10"/>
-          <p:cNvSpPr/>
-          <p:nvPr/>
-        </p:nvSpPr>
-        <p:spPr>
-          <a:xfrm>
-            <a:off x="685800" y="2857500"/>
-            <a:ext cx="10820400" cy="2095500"/>
+              <a:t>한 지표만 좋아진 게 아닙니다 —</a:t>
+            </a:r>
+            <a:endParaRPr lang="en-US" sz="2775" dirty="0"/>
+          </a:p>
+          <a:p>
+            <a:pPr algn="l" indent="0" marL="0">
+              <a:lnSpc>
+                <a:spcPts val="3496"/>
+              </a:lnSpc>
+              <a:buNone/>
+            </a:pPr>
+            <a:r>
+              <a:rPr lang="en-US" sz="2775" b="1" dirty="0">
+                <a:solidFill>
+                  <a:srgbClr val="EFB13C"/>
+                </a:solidFill>
+                <a:latin typeface="Malgun Gothic" pitchFamily="34" charset="0"/>
+                <a:ea typeface="Malgun Gothic" pitchFamily="34" charset="-122"/>
+                <a:cs typeface="Malgun Gothic" pitchFamily="34" charset="-120"/>
+              </a:rPr>
+              <a:t>세 지표가 동시에</a:t>
+            </a:r>
+            <a:pPr algn="l" indent="0" marL="0">
+              <a:lnSpc>
+                <a:spcPts val="3496"/>
+              </a:lnSpc>
+              <a:buNone/>
+            </a:pPr>
+            <a:r>
+              <a:rPr lang="en-US" sz="2775" b="1" dirty="0">
+                <a:solidFill>
+                  <a:srgbClr val="EAE7E0"/>
+                </a:solidFill>
+                <a:latin typeface="Malgun Gothic" pitchFamily="34" charset="0"/>
+                <a:ea typeface="Malgun Gothic" pitchFamily="34" charset="-122"/>
+                <a:cs typeface="Malgun Gothic" pitchFamily="34" charset="-120"/>
+              </a:rPr>
+              <a:t> 좋아졌습니다</a:t>
+            </a:r>
+            <a:endParaRPr lang="en-US" sz="2775" dirty="0"/>
+          </a:p>
+        </p:txBody>
+      </p:sp>
+      <p:sp>
+        <p:nvSpPr>
+          <p:cNvPr id="12" name="Text 10"/>
+          <p:cNvSpPr txBox="1"/>
+          <p:nvPr/>
+        </p:nvSpPr>
+        <p:spPr>
+          <a:xfrm>
+            <a:off x="685800" y="2000250"/>
+            <a:ext cx="10287000" cy="569214"/>
+          </a:xfrm>
+          <a:prstGeom prst="rect">
+            <a:avLst/>
+          </a:prstGeom>
+          <a:noFill/>
+          <a:ln/>
+        </p:spPr>
+        <p:txBody>
+          <a:bodyPr wrap="square" lIns="0" tIns="0" rIns="0" bIns="0" rtlCol="0" anchor="t"/>
+          <a:lstStyle/>
+          <a:p>
+            <a:pPr algn="l" indent="0" marL="0">
+              <a:lnSpc>
+                <a:spcPts val="2241"/>
+              </a:lnSpc>
+              <a:buNone/>
+            </a:pPr>
+            <a:r>
+              <a:rPr lang="en-US" sz="1350" dirty="0">
+                <a:solidFill>
+                  <a:srgbClr val="BCC9D6"/>
+                </a:solidFill>
+                <a:latin typeface="Malgun Gothic" pitchFamily="34" charset="0"/>
+                <a:ea typeface="Malgun Gothic" pitchFamily="34" charset="-122"/>
+                <a:cs typeface="Malgun Gothic" pitchFamily="34" charset="-120"/>
+              </a:rPr>
+              <a:t>같은 36회차를 </a:t>
+            </a:r>
+            <a:pPr algn="l" indent="0" marL="0">
+              <a:lnSpc>
+                <a:spcPts val="2241"/>
+              </a:lnSpc>
+              <a:buNone/>
+            </a:pPr>
+            <a:r>
+              <a:rPr lang="en-US" sz="1350" b="1" dirty="0">
+                <a:solidFill>
+                  <a:srgbClr val="EAE7E0"/>
+                </a:solidFill>
+                <a:latin typeface="Malgun Gothic" pitchFamily="34" charset="0"/>
+                <a:ea typeface="Malgun Gothic" pitchFamily="34" charset="-122"/>
+                <a:cs typeface="Malgun Gothic" pitchFamily="34" charset="-120"/>
+              </a:rPr>
+              <a:t>같은 방식으로 채점</a:t>
+            </a:r>
+            <a:pPr algn="l" indent="0" marL="0">
+              <a:lnSpc>
+                <a:spcPts val="2241"/>
+              </a:lnSpc>
+              <a:buNone/>
+            </a:pPr>
+            <a:r>
+              <a:rPr lang="en-US" sz="1350" dirty="0">
+                <a:solidFill>
+                  <a:srgbClr val="BCC9D6"/>
+                </a:solidFill>
+                <a:latin typeface="Malgun Gothic" pitchFamily="34" charset="0"/>
+                <a:ea typeface="Malgun Gothic" pitchFamily="34" charset="-122"/>
+                <a:cs typeface="Malgun Gothic" pitchFamily="34" charset="-120"/>
+              </a:rPr>
+              <a:t> 해 종전과 나란히 놓았습니다. 그리고 시운전 4회차에서 다시 확인했습니다.</a:t>
+            </a:r>
+            <a:endParaRPr lang="en-US" sz="1350" dirty="0"/>
+          </a:p>
+        </p:txBody>
+      </p:sp>
+      <p:sp>
+        <p:nvSpPr>
+          <p:cNvPr id="13" name="Shape 11"/>
+          <p:cNvSpPr/>
+          <p:nvPr/>
+        </p:nvSpPr>
+        <p:spPr>
+          <a:xfrm>
+            <a:off x="685800" y="2743200"/>
+            <a:ext cx="6667500" cy="19050"/>
+          </a:xfrm>
+          <a:prstGeom prst="rect">
+            <a:avLst/>
+          </a:prstGeom>
+          <a:solidFill>
+            <a:srgbClr val="EFB13C"/>
+          </a:solidFill>
+          <a:ln/>
+        </p:spPr>
+      </p:sp>
+      <p:sp>
+        <p:nvSpPr>
+          <p:cNvPr id="14" name="Text 12"/>
+          <p:cNvSpPr txBox="1"/>
+          <p:nvPr/>
+        </p:nvSpPr>
+        <p:spPr>
+          <a:xfrm>
+            <a:off x="685800" y="2876550"/>
+            <a:ext cx="6667500" cy="125016"/>
+          </a:xfrm>
+          <a:prstGeom prst="rect">
+            <a:avLst/>
+          </a:prstGeom>
+          <a:noFill/>
+          <a:ln/>
+        </p:spPr>
+        <p:txBody>
+          <a:bodyPr wrap="square" lIns="0" tIns="0" rIns="0" bIns="0" rtlCol="0" anchor="t"/>
+          <a:lstStyle/>
+          <a:p>
+            <a:pPr algn="l" indent="0" marL="0">
+              <a:lnSpc>
+                <a:spcPts val="984"/>
+              </a:lnSpc>
+              <a:buNone/>
+            </a:pPr>
+            <a:r>
+              <a:rPr lang="en-US" sz="788" b="1" spc="150" kern="0" dirty="0">
+                <a:solidFill>
+                  <a:srgbClr val="63798F"/>
+                </a:solidFill>
+                <a:latin typeface="Consolas" pitchFamily="34" charset="0"/>
+                <a:ea typeface="Consolas" pitchFamily="34" charset="-122"/>
+                <a:cs typeface="Consolas" pitchFamily="34" charset="-120"/>
+              </a:rPr>
+              <a:t>종전 대비  ·  누적 36회차를 한 건씩 가려 채점</a:t>
+            </a:r>
+            <a:endParaRPr lang="en-US" sz="788" dirty="0"/>
+          </a:p>
+        </p:txBody>
+      </p:sp>
+      <p:sp>
+        <p:nvSpPr>
+          <p:cNvPr id="15" name="Shape 13"/>
+          <p:cNvSpPr/>
+          <p:nvPr/>
+        </p:nvSpPr>
+        <p:spPr>
+          <a:xfrm>
+            <a:off x="685800" y="3067050"/>
+            <a:ext cx="6667500" cy="2286000"/>
           </a:xfrm>
           <a:prstGeom prst="rect">
             <a:avLst/>
@@ -8527,93 +12403,51 @@
           <a:solidFill>
             <a:srgbClr val="0A1320"/>
           </a:solidFill>
-          <a:ln w="19050">
+          <a:ln w="12700">
             <a:solidFill>
-              <a:srgbClr val="22354A"/>
+              <a:srgbClr val="182838"/>
             </a:solidFill>
-            <a:prstDash val="dash"/>
+            <a:prstDash val="solid"/>
           </a:ln>
         </p:spPr>
       </p:sp>
       <p:sp>
         <p:nvSpPr>
-          <p:cNvPr id="13" name="Text 11"/>
-          <p:cNvSpPr txBox="1"/>
-          <p:nvPr/>
-        </p:nvSpPr>
-        <p:spPr>
-          <a:xfrm>
-            <a:off x="685800" y="3695700"/>
-            <a:ext cx="10820400" cy="226695"/>
-          </a:xfrm>
-          <a:prstGeom prst="rect">
-            <a:avLst/>
-          </a:prstGeom>
-          <a:noFill/>
-          <a:ln/>
-        </p:spPr>
-        <p:txBody>
-          <a:bodyPr wrap="square" lIns="0" tIns="0" rIns="0" bIns="0" rtlCol="0" anchor="t"/>
-          <a:lstStyle/>
-          <a:p>
-            <a:pPr algn="ctr" indent="0" marL="0">
-              <a:lnSpc>
-                <a:spcPts val="1785"/>
-              </a:lnSpc>
-              <a:buNone/>
-            </a:pPr>
-            <a:r>
-              <a:rPr lang="en-US" sz="1275" dirty="0">
+          <p:cNvPr id="16" name="Text 14"/>
+          <p:cNvSpPr txBox="1"/>
+          <p:nvPr/>
+        </p:nvSpPr>
+        <p:spPr>
+          <a:xfrm>
+            <a:off x="838200" y="3219450"/>
+            <a:ext cx="1905000" cy="125016"/>
+          </a:xfrm>
+          <a:prstGeom prst="rect">
+            <a:avLst/>
+          </a:prstGeom>
+          <a:noFill/>
+          <a:ln/>
+        </p:spPr>
+        <p:txBody>
+          <a:bodyPr wrap="square" lIns="0" tIns="0" rIns="0" bIns="0" rtlCol="0" anchor="t"/>
+          <a:lstStyle/>
+          <a:p>
+            <a:pPr algn="l" indent="0" marL="0">
+              <a:lnSpc>
+                <a:spcPts val="984"/>
+              </a:lnSpc>
+              <a:buNone/>
+            </a:pPr>
+            <a:r>
+              <a:rPr lang="en-US" sz="788" b="1" spc="150" kern="0" dirty="0">
                 <a:solidFill>
                   <a:srgbClr val="63798F"/>
-                </a:solidFill>
-                <a:latin typeface="Malgun Gothic" pitchFamily="34" charset="0"/>
-                <a:ea typeface="Malgun Gothic" pitchFamily="34" charset="-122"/>
-                <a:cs typeface="Malgun Gothic" pitchFamily="34" charset="-120"/>
-              </a:rPr>
-              <a:t>작성 예정 — 이 장은 아직 만들지 않았습니다.</a:t>
-            </a:r>
-            <a:endParaRPr lang="en-US" sz="1275" dirty="0"/>
-          </a:p>
-        </p:txBody>
-      </p:sp>
-      <p:sp>
-        <p:nvSpPr>
-          <p:cNvPr id="14" name="Text 12"/>
-          <p:cNvSpPr txBox="1"/>
-          <p:nvPr/>
-        </p:nvSpPr>
-        <p:spPr>
-          <a:xfrm>
-            <a:off x="685800" y="4038600"/>
-            <a:ext cx="10820400" cy="125016"/>
-          </a:xfrm>
-          <a:prstGeom prst="rect">
-            <a:avLst/>
-          </a:prstGeom>
-          <a:noFill/>
-          <a:ln/>
-        </p:spPr>
-        <p:txBody>
-          <a:bodyPr wrap="square" lIns="0" tIns="0" rIns="0" bIns="0" rtlCol="0" anchor="t"/>
-          <a:lstStyle/>
-          <a:p>
-            <a:pPr algn="l" indent="0" marL="0">
-              <a:lnSpc>
-                <a:spcPts val="984"/>
-              </a:lnSpc>
-              <a:buNone/>
-            </a:pPr>
-            <a:r>
-              <a:rPr lang="en-US" sz="788" b="1" spc="150" kern="0" dirty="0">
-                <a:solidFill>
-                  <a:srgbClr val="7E2333"/>
                 </a:solidFill>
                 <a:latin typeface="Consolas" pitchFamily="34" charset="0"/>
                 <a:ea typeface="Consolas" pitchFamily="34" charset="-122"/>
                 <a:cs typeface="Consolas" pitchFamily="34" charset="-120"/>
               </a:rPr>
-              <a:t>SLIDE 13  ·  TODO</a:t>
+              <a:t>지표</a:t>
             </a:r>
             <a:endParaRPr lang="en-US" sz="788" dirty="0"/>
           </a:p>
@@ -8621,14 +12455,140 @@
       </p:sp>
       <p:sp>
         <p:nvSpPr>
-          <p:cNvPr id="15" name="Shape 13"/>
-          <p:cNvSpPr/>
-          <p:nvPr/>
-        </p:nvSpPr>
-        <p:spPr>
-          <a:xfrm>
-            <a:off x="685800" y="6057900"/>
-            <a:ext cx="10820400" cy="0"/>
+          <p:cNvPr id="17" name="Text 15"/>
+          <p:cNvSpPr txBox="1"/>
+          <p:nvPr/>
+        </p:nvSpPr>
+        <p:spPr>
+          <a:xfrm>
+            <a:off x="2857500" y="3219450"/>
+            <a:ext cx="1047750" cy="125016"/>
+          </a:xfrm>
+          <a:prstGeom prst="rect">
+            <a:avLst/>
+          </a:prstGeom>
+          <a:noFill/>
+          <a:ln/>
+        </p:spPr>
+        <p:txBody>
+          <a:bodyPr wrap="square" lIns="0" tIns="0" rIns="0" bIns="0" rtlCol="0" anchor="t"/>
+          <a:lstStyle/>
+          <a:p>
+            <a:pPr algn="l" indent="0" marL="0">
+              <a:lnSpc>
+                <a:spcPts val="984"/>
+              </a:lnSpc>
+              <a:buNone/>
+            </a:pPr>
+            <a:r>
+              <a:rPr lang="en-US" sz="788" b="1" spc="150" kern="0" dirty="0">
+                <a:solidFill>
+                  <a:srgbClr val="63798F"/>
+                </a:solidFill>
+                <a:latin typeface="Consolas" pitchFamily="34" charset="0"/>
+                <a:ea typeface="Consolas" pitchFamily="34" charset="-122"/>
+                <a:cs typeface="Consolas" pitchFamily="34" charset="-120"/>
+              </a:rPr>
+              <a:t>종전</a:t>
+            </a:r>
+            <a:endParaRPr lang="en-US" sz="788" dirty="0"/>
+          </a:p>
+        </p:txBody>
+      </p:sp>
+      <p:sp>
+        <p:nvSpPr>
+          <p:cNvPr id="18" name="Text 16"/>
+          <p:cNvSpPr txBox="1"/>
+          <p:nvPr/>
+        </p:nvSpPr>
+        <p:spPr>
+          <a:xfrm>
+            <a:off x="4191000" y="3219450"/>
+            <a:ext cx="1047750" cy="125016"/>
+          </a:xfrm>
+          <a:prstGeom prst="rect">
+            <a:avLst/>
+          </a:prstGeom>
+          <a:noFill/>
+          <a:ln/>
+        </p:spPr>
+        <p:txBody>
+          <a:bodyPr wrap="square" lIns="0" tIns="0" rIns="0" bIns="0" rtlCol="0" anchor="t"/>
+          <a:lstStyle/>
+          <a:p>
+            <a:pPr algn="l" indent="0" marL="0">
+              <a:lnSpc>
+                <a:spcPts val="984"/>
+              </a:lnSpc>
+              <a:buNone/>
+            </a:pPr>
+            <a:r>
+              <a:rPr lang="en-US" sz="788" b="1" spc="150" kern="0" dirty="0">
+                <a:solidFill>
+                  <a:srgbClr val="63798F"/>
+                </a:solidFill>
+                <a:latin typeface="Consolas" pitchFamily="34" charset="0"/>
+                <a:ea typeface="Consolas" pitchFamily="34" charset="-122"/>
+                <a:cs typeface="Consolas" pitchFamily="34" charset="-120"/>
+              </a:rPr>
+              <a:t>개선</a:t>
+            </a:r>
+            <a:endParaRPr lang="en-US" sz="788" dirty="0"/>
+          </a:p>
+        </p:txBody>
+      </p:sp>
+      <p:sp>
+        <p:nvSpPr>
+          <p:cNvPr id="19" name="Text 17"/>
+          <p:cNvSpPr txBox="1"/>
+          <p:nvPr/>
+        </p:nvSpPr>
+        <p:spPr>
+          <a:xfrm>
+            <a:off x="5619750" y="3219450"/>
+            <a:ext cx="1428750" cy="125016"/>
+          </a:xfrm>
+          <a:prstGeom prst="rect">
+            <a:avLst/>
+          </a:prstGeom>
+          <a:noFill/>
+          <a:ln/>
+        </p:spPr>
+        <p:txBody>
+          <a:bodyPr wrap="square" lIns="0" tIns="0" rIns="0" bIns="0" rtlCol="0" anchor="t"/>
+          <a:lstStyle/>
+          <a:p>
+            <a:pPr algn="l" indent="0" marL="0">
+              <a:lnSpc>
+                <a:spcPts val="984"/>
+              </a:lnSpc>
+              <a:buNone/>
+            </a:pPr>
+            <a:r>
+              <a:rPr lang="en-US" sz="788" b="1" spc="150" kern="0" dirty="0">
+                <a:solidFill>
+                  <a:srgbClr val="63798F"/>
+                </a:solidFill>
+                <a:latin typeface="Consolas" pitchFamily="34" charset="0"/>
+                <a:ea typeface="Consolas" pitchFamily="34" charset="-122"/>
+                <a:cs typeface="Consolas" pitchFamily="34" charset="-120"/>
+              </a:rPr>
+              <a:t>나아진 폭</a:t>
+            </a:r>
+            <a:endParaRPr lang="en-US" sz="788" dirty="0"/>
+          </a:p>
+        </p:txBody>
+      </p:sp>
+      <p:sp>
+        <p:nvSpPr>
+          <p:cNvPr id="20" name="Shape 18"/>
+          <p:cNvSpPr/>
+          <p:nvPr/>
+        </p:nvSpPr>
+        <p:spPr>
+          <a:xfrm>
+            <a:off x="838200" y="3409950"/>
+            <a:ext cx="6362700" cy="0"/>
           </a:xfrm>
           <a:prstGeom prst="line">
             <a:avLst/>
@@ -8641,6 +12601,2057 @@
             <a:prstDash val="solid"/>
           </a:ln>
         </p:spPr>
+      </p:sp>
+      <p:sp>
+        <p:nvSpPr>
+          <p:cNvPr id="21" name="Text 19"/>
+          <p:cNvSpPr txBox="1"/>
+          <p:nvPr/>
+        </p:nvSpPr>
+        <p:spPr>
+          <a:xfrm>
+            <a:off x="838200" y="3543300"/>
+            <a:ext cx="1905000" cy="180023"/>
+          </a:xfrm>
+          <a:prstGeom prst="rect">
+            <a:avLst/>
+          </a:prstGeom>
+          <a:noFill/>
+          <a:ln/>
+        </p:spPr>
+        <p:txBody>
+          <a:bodyPr wrap="square" lIns="0" tIns="0" rIns="0" bIns="0" rtlCol="0" anchor="t"/>
+          <a:lstStyle/>
+          <a:p>
+            <a:pPr algn="l" indent="0" marL="0">
+              <a:lnSpc>
+                <a:spcPts val="1418"/>
+              </a:lnSpc>
+              <a:buNone/>
+            </a:pPr>
+            <a:r>
+              <a:rPr lang="en-US" sz="1050" dirty="0">
+                <a:solidFill>
+                  <a:srgbClr val="EAE7E0"/>
+                </a:solidFill>
+                <a:latin typeface="Malgun Gothic" pitchFamily="34" charset="0"/>
+                <a:ea typeface="Malgun Gothic" pitchFamily="34" charset="-122"/>
+                <a:cs typeface="Malgun Gothic" pitchFamily="34" charset="-120"/>
+              </a:rPr>
+              <a:t>평균 오차</a:t>
+            </a:r>
+            <a:endParaRPr lang="en-US" sz="1050" dirty="0"/>
+          </a:p>
+        </p:txBody>
+      </p:sp>
+      <p:sp>
+        <p:nvSpPr>
+          <p:cNvPr id="22" name="Text 20"/>
+          <p:cNvSpPr txBox="1"/>
+          <p:nvPr/>
+        </p:nvSpPr>
+        <p:spPr>
+          <a:xfrm>
+            <a:off x="2857500" y="3543300"/>
+            <a:ext cx="1047750" cy="185738"/>
+          </a:xfrm>
+          <a:prstGeom prst="rect">
+            <a:avLst/>
+          </a:prstGeom>
+          <a:noFill/>
+          <a:ln/>
+        </p:spPr>
+        <p:txBody>
+          <a:bodyPr wrap="square" lIns="0" tIns="0" rIns="0" bIns="0" rtlCol="0" anchor="t"/>
+          <a:lstStyle/>
+          <a:p>
+            <a:pPr algn="r" indent="0" marL="0">
+              <a:lnSpc>
+                <a:spcPts val="1463"/>
+              </a:lnSpc>
+              <a:buNone/>
+            </a:pPr>
+            <a:r>
+              <a:rPr lang="en-US" sz="1125" dirty="0">
+                <a:solidFill>
+                  <a:srgbClr val="8CA3BC"/>
+                </a:solidFill>
+                <a:latin typeface="Consolas" pitchFamily="34" charset="0"/>
+                <a:ea typeface="Consolas" pitchFamily="34" charset="-122"/>
+                <a:cs typeface="Consolas" pitchFamily="34" charset="-120"/>
+              </a:rPr>
+              <a:t>3.83</a:t>
+            </a:r>
+            <a:endParaRPr lang="en-US" sz="1125" dirty="0"/>
+          </a:p>
+        </p:txBody>
+      </p:sp>
+      <p:sp>
+        <p:nvSpPr>
+          <p:cNvPr id="23" name="Text 21"/>
+          <p:cNvSpPr txBox="1"/>
+          <p:nvPr/>
+        </p:nvSpPr>
+        <p:spPr>
+          <a:xfrm>
+            <a:off x="3981450" y="3543300"/>
+            <a:ext cx="228600" cy="160020"/>
+          </a:xfrm>
+          <a:prstGeom prst="rect">
+            <a:avLst/>
+          </a:prstGeom>
+          <a:noFill/>
+          <a:ln/>
+        </p:spPr>
+        <p:txBody>
+          <a:bodyPr wrap="square" lIns="0" tIns="0" rIns="0" bIns="0" rtlCol="0" anchor="t"/>
+          <a:lstStyle/>
+          <a:p>
+            <a:pPr algn="l" indent="0" marL="0">
+              <a:lnSpc>
+                <a:spcPts val="1260"/>
+              </a:lnSpc>
+              <a:buNone/>
+            </a:pPr>
+            <a:r>
+              <a:rPr lang="en-US" sz="900" dirty="0">
+                <a:solidFill>
+                  <a:srgbClr val="63798F"/>
+                </a:solidFill>
+                <a:latin typeface="Malgun Gothic" pitchFamily="34" charset="0"/>
+                <a:ea typeface="Malgun Gothic" pitchFamily="34" charset="-122"/>
+                <a:cs typeface="Malgun Gothic" pitchFamily="34" charset="-120"/>
+              </a:rPr>
+              <a:t>→</a:t>
+            </a:r>
+            <a:endParaRPr lang="en-US" sz="900" dirty="0"/>
+          </a:p>
+        </p:txBody>
+      </p:sp>
+      <p:sp>
+        <p:nvSpPr>
+          <p:cNvPr id="24" name="Text 22"/>
+          <p:cNvSpPr txBox="1"/>
+          <p:nvPr/>
+        </p:nvSpPr>
+        <p:spPr>
+          <a:xfrm>
+            <a:off x="4191000" y="3533775"/>
+            <a:ext cx="1047750" cy="202406"/>
+          </a:xfrm>
+          <a:prstGeom prst="rect">
+            <a:avLst/>
+          </a:prstGeom>
+          <a:noFill/>
+          <a:ln/>
+        </p:spPr>
+        <p:txBody>
+          <a:bodyPr wrap="square" lIns="0" tIns="0" rIns="0" bIns="0" rtlCol="0" anchor="t"/>
+          <a:lstStyle/>
+          <a:p>
+            <a:pPr algn="r" indent="0" marL="0">
+              <a:lnSpc>
+                <a:spcPts val="1594"/>
+              </a:lnSpc>
+              <a:buNone/>
+            </a:pPr>
+            <a:r>
+              <a:rPr lang="en-US" sz="1275" b="1" dirty="0">
+                <a:solidFill>
+                  <a:srgbClr val="EFB13C"/>
+                </a:solidFill>
+                <a:latin typeface="Consolas" pitchFamily="34" charset="0"/>
+                <a:ea typeface="Consolas" pitchFamily="34" charset="-122"/>
+                <a:cs typeface="Consolas" pitchFamily="34" charset="-120"/>
+              </a:rPr>
+              <a:t>1.29</a:t>
+            </a:r>
+            <a:endParaRPr lang="en-US" sz="1275" dirty="0"/>
+          </a:p>
+        </p:txBody>
+      </p:sp>
+      <p:sp>
+        <p:nvSpPr>
+          <p:cNvPr id="25" name="Text 23"/>
+          <p:cNvSpPr txBox="1"/>
+          <p:nvPr/>
+        </p:nvSpPr>
+        <p:spPr>
+          <a:xfrm>
+            <a:off x="5619750" y="3543300"/>
+            <a:ext cx="1428750" cy="173593"/>
+          </a:xfrm>
+          <a:prstGeom prst="rect">
+            <a:avLst/>
+          </a:prstGeom>
+          <a:noFill/>
+          <a:ln/>
+        </p:spPr>
+        <p:txBody>
+          <a:bodyPr wrap="square" lIns="0" tIns="0" rIns="0" bIns="0" rtlCol="0" anchor="t"/>
+          <a:lstStyle/>
+          <a:p>
+            <a:pPr algn="r" indent="0" marL="0">
+              <a:lnSpc>
+                <a:spcPts val="1367"/>
+              </a:lnSpc>
+              <a:buNone/>
+            </a:pPr>
+            <a:r>
+              <a:rPr lang="en-US" sz="1013" dirty="0">
+                <a:solidFill>
+                  <a:srgbClr val="EFB13C"/>
+                </a:solidFill>
+                <a:latin typeface="Consolas" pitchFamily="34" charset="0"/>
+                <a:ea typeface="Consolas" pitchFamily="34" charset="-122"/>
+                <a:cs typeface="Consolas" pitchFamily="34" charset="-120"/>
+              </a:rPr>
+              <a:t>66% ↓</a:t>
+            </a:r>
+            <a:endParaRPr lang="en-US" sz="1013" dirty="0"/>
+          </a:p>
+        </p:txBody>
+      </p:sp>
+      <p:sp>
+        <p:nvSpPr>
+          <p:cNvPr id="26" name="Shape 24"/>
+          <p:cNvSpPr/>
+          <p:nvPr/>
+        </p:nvSpPr>
+        <p:spPr>
+          <a:xfrm>
+            <a:off x="838200" y="3829050"/>
+            <a:ext cx="6362700" cy="0"/>
+          </a:xfrm>
+          <a:prstGeom prst="line">
+            <a:avLst/>
+          </a:prstGeom>
+          <a:noFill/>
+          <a:ln w="12700">
+            <a:solidFill>
+              <a:srgbClr val="182838"/>
+            </a:solidFill>
+            <a:prstDash val="solid"/>
+          </a:ln>
+        </p:spPr>
+      </p:sp>
+      <p:sp>
+        <p:nvSpPr>
+          <p:cNvPr id="27" name="Text 25"/>
+          <p:cNvSpPr txBox="1"/>
+          <p:nvPr/>
+        </p:nvSpPr>
+        <p:spPr>
+          <a:xfrm>
+            <a:off x="838200" y="3905250"/>
+            <a:ext cx="1905000" cy="180023"/>
+          </a:xfrm>
+          <a:prstGeom prst="rect">
+            <a:avLst/>
+          </a:prstGeom>
+          <a:noFill/>
+          <a:ln/>
+        </p:spPr>
+        <p:txBody>
+          <a:bodyPr wrap="square" lIns="0" tIns="0" rIns="0" bIns="0" rtlCol="0" anchor="t"/>
+          <a:lstStyle/>
+          <a:p>
+            <a:pPr algn="l" indent="0" marL="0">
+              <a:lnSpc>
+                <a:spcPts val="1418"/>
+              </a:lnSpc>
+              <a:buNone/>
+            </a:pPr>
+            <a:r>
+              <a:rPr lang="en-US" sz="1050" dirty="0">
+                <a:solidFill>
+                  <a:srgbClr val="EAE7E0"/>
+                </a:solidFill>
+                <a:latin typeface="Malgun Gothic" pitchFamily="34" charset="0"/>
+                <a:ea typeface="Malgun Gothic" pitchFamily="34" charset="-122"/>
+                <a:cs typeface="Malgun Gothic" pitchFamily="34" charset="-120"/>
+              </a:rPr>
+              <a:t>큰 오차 가중</a:t>
+            </a:r>
+            <a:endParaRPr lang="en-US" sz="1050" dirty="0"/>
+          </a:p>
+        </p:txBody>
+      </p:sp>
+      <p:sp>
+        <p:nvSpPr>
+          <p:cNvPr id="28" name="Text 26"/>
+          <p:cNvSpPr txBox="1"/>
+          <p:nvPr/>
+        </p:nvSpPr>
+        <p:spPr>
+          <a:xfrm>
+            <a:off x="2857500" y="3905250"/>
+            <a:ext cx="1047750" cy="185738"/>
+          </a:xfrm>
+          <a:prstGeom prst="rect">
+            <a:avLst/>
+          </a:prstGeom>
+          <a:noFill/>
+          <a:ln/>
+        </p:spPr>
+        <p:txBody>
+          <a:bodyPr wrap="square" lIns="0" tIns="0" rIns="0" bIns="0" rtlCol="0" anchor="t"/>
+          <a:lstStyle/>
+          <a:p>
+            <a:pPr algn="r" indent="0" marL="0">
+              <a:lnSpc>
+                <a:spcPts val="1463"/>
+              </a:lnSpc>
+              <a:buNone/>
+            </a:pPr>
+            <a:r>
+              <a:rPr lang="en-US" sz="1125" dirty="0">
+                <a:solidFill>
+                  <a:srgbClr val="8CA3BC"/>
+                </a:solidFill>
+                <a:latin typeface="Consolas" pitchFamily="34" charset="0"/>
+                <a:ea typeface="Consolas" pitchFamily="34" charset="-122"/>
+                <a:cs typeface="Consolas" pitchFamily="34" charset="-120"/>
+              </a:rPr>
+              <a:t>4.49</a:t>
+            </a:r>
+            <a:endParaRPr lang="en-US" sz="1125" dirty="0"/>
+          </a:p>
+        </p:txBody>
+      </p:sp>
+      <p:sp>
+        <p:nvSpPr>
+          <p:cNvPr id="29" name="Text 27"/>
+          <p:cNvSpPr txBox="1"/>
+          <p:nvPr/>
+        </p:nvSpPr>
+        <p:spPr>
+          <a:xfrm>
+            <a:off x="3981450" y="3905250"/>
+            <a:ext cx="228600" cy="160020"/>
+          </a:xfrm>
+          <a:prstGeom prst="rect">
+            <a:avLst/>
+          </a:prstGeom>
+          <a:noFill/>
+          <a:ln/>
+        </p:spPr>
+        <p:txBody>
+          <a:bodyPr wrap="square" lIns="0" tIns="0" rIns="0" bIns="0" rtlCol="0" anchor="t"/>
+          <a:lstStyle/>
+          <a:p>
+            <a:pPr algn="l" indent="0" marL="0">
+              <a:lnSpc>
+                <a:spcPts val="1260"/>
+              </a:lnSpc>
+              <a:buNone/>
+            </a:pPr>
+            <a:r>
+              <a:rPr lang="en-US" sz="900" dirty="0">
+                <a:solidFill>
+                  <a:srgbClr val="63798F"/>
+                </a:solidFill>
+                <a:latin typeface="Malgun Gothic" pitchFamily="34" charset="0"/>
+                <a:ea typeface="Malgun Gothic" pitchFamily="34" charset="-122"/>
+                <a:cs typeface="Malgun Gothic" pitchFamily="34" charset="-120"/>
+              </a:rPr>
+              <a:t>→</a:t>
+            </a:r>
+            <a:endParaRPr lang="en-US" sz="900" dirty="0"/>
+          </a:p>
+        </p:txBody>
+      </p:sp>
+      <p:sp>
+        <p:nvSpPr>
+          <p:cNvPr id="30" name="Text 28"/>
+          <p:cNvSpPr txBox="1"/>
+          <p:nvPr/>
+        </p:nvSpPr>
+        <p:spPr>
+          <a:xfrm>
+            <a:off x="4191000" y="3895725"/>
+            <a:ext cx="1047750" cy="202406"/>
+          </a:xfrm>
+          <a:prstGeom prst="rect">
+            <a:avLst/>
+          </a:prstGeom>
+          <a:noFill/>
+          <a:ln/>
+        </p:spPr>
+        <p:txBody>
+          <a:bodyPr wrap="square" lIns="0" tIns="0" rIns="0" bIns="0" rtlCol="0" anchor="t"/>
+          <a:lstStyle/>
+          <a:p>
+            <a:pPr algn="r" indent="0" marL="0">
+              <a:lnSpc>
+                <a:spcPts val="1594"/>
+              </a:lnSpc>
+              <a:buNone/>
+            </a:pPr>
+            <a:r>
+              <a:rPr lang="en-US" sz="1275" b="1" dirty="0">
+                <a:solidFill>
+                  <a:srgbClr val="EFB13C"/>
+                </a:solidFill>
+                <a:latin typeface="Consolas" pitchFamily="34" charset="0"/>
+                <a:ea typeface="Consolas" pitchFamily="34" charset="-122"/>
+                <a:cs typeface="Consolas" pitchFamily="34" charset="-120"/>
+              </a:rPr>
+              <a:t>1.72</a:t>
+            </a:r>
+            <a:endParaRPr lang="en-US" sz="1275" dirty="0"/>
+          </a:p>
+        </p:txBody>
+      </p:sp>
+      <p:sp>
+        <p:nvSpPr>
+          <p:cNvPr id="31" name="Text 29"/>
+          <p:cNvSpPr txBox="1"/>
+          <p:nvPr/>
+        </p:nvSpPr>
+        <p:spPr>
+          <a:xfrm>
+            <a:off x="5619750" y="3905250"/>
+            <a:ext cx="1428750" cy="173593"/>
+          </a:xfrm>
+          <a:prstGeom prst="rect">
+            <a:avLst/>
+          </a:prstGeom>
+          <a:noFill/>
+          <a:ln/>
+        </p:spPr>
+        <p:txBody>
+          <a:bodyPr wrap="square" lIns="0" tIns="0" rIns="0" bIns="0" rtlCol="0" anchor="t"/>
+          <a:lstStyle/>
+          <a:p>
+            <a:pPr algn="r" indent="0" marL="0">
+              <a:lnSpc>
+                <a:spcPts val="1367"/>
+              </a:lnSpc>
+              <a:buNone/>
+            </a:pPr>
+            <a:r>
+              <a:rPr lang="en-US" sz="1013" dirty="0">
+                <a:solidFill>
+                  <a:srgbClr val="EFB13C"/>
+                </a:solidFill>
+                <a:latin typeface="Consolas" pitchFamily="34" charset="0"/>
+                <a:ea typeface="Consolas" pitchFamily="34" charset="-122"/>
+                <a:cs typeface="Consolas" pitchFamily="34" charset="-120"/>
+              </a:rPr>
+              <a:t>62% ↓</a:t>
+            </a:r>
+            <a:endParaRPr lang="en-US" sz="1013" dirty="0"/>
+          </a:p>
+        </p:txBody>
+      </p:sp>
+      <p:sp>
+        <p:nvSpPr>
+          <p:cNvPr id="32" name="Shape 30"/>
+          <p:cNvSpPr/>
+          <p:nvPr/>
+        </p:nvSpPr>
+        <p:spPr>
+          <a:xfrm>
+            <a:off x="838200" y="4191000"/>
+            <a:ext cx="6362700" cy="0"/>
+          </a:xfrm>
+          <a:prstGeom prst="line">
+            <a:avLst/>
+          </a:prstGeom>
+          <a:noFill/>
+          <a:ln w="12700">
+            <a:solidFill>
+              <a:srgbClr val="182838"/>
+            </a:solidFill>
+            <a:prstDash val="solid"/>
+          </a:ln>
+        </p:spPr>
+      </p:sp>
+      <p:sp>
+        <p:nvSpPr>
+          <p:cNvPr id="33" name="Text 31"/>
+          <p:cNvSpPr txBox="1"/>
+          <p:nvPr/>
+        </p:nvSpPr>
+        <p:spPr>
+          <a:xfrm>
+            <a:off x="838200" y="4267200"/>
+            <a:ext cx="1905000" cy="180023"/>
+          </a:xfrm>
+          <a:prstGeom prst="rect">
+            <a:avLst/>
+          </a:prstGeom>
+          <a:noFill/>
+          <a:ln/>
+        </p:spPr>
+        <p:txBody>
+          <a:bodyPr wrap="square" lIns="0" tIns="0" rIns="0" bIns="0" rtlCol="0" anchor="t"/>
+          <a:lstStyle/>
+          <a:p>
+            <a:pPr algn="l" indent="0" marL="0">
+              <a:lnSpc>
+                <a:spcPts val="1418"/>
+              </a:lnSpc>
+              <a:buNone/>
+            </a:pPr>
+            <a:r>
+              <a:rPr lang="en-US" sz="1050" dirty="0">
+                <a:solidFill>
+                  <a:srgbClr val="EAE7E0"/>
+                </a:solidFill>
+                <a:latin typeface="Malgun Gothic" pitchFamily="34" charset="0"/>
+                <a:ea typeface="Malgun Gothic" pitchFamily="34" charset="-122"/>
+                <a:cs typeface="Malgun Gothic" pitchFamily="34" charset="-120"/>
+              </a:rPr>
+              <a:t>설명력</a:t>
+            </a:r>
+            <a:endParaRPr lang="en-US" sz="1050" dirty="0"/>
+          </a:p>
+        </p:txBody>
+      </p:sp>
+      <p:sp>
+        <p:nvSpPr>
+          <p:cNvPr id="34" name="Text 32"/>
+          <p:cNvSpPr txBox="1"/>
+          <p:nvPr/>
+        </p:nvSpPr>
+        <p:spPr>
+          <a:xfrm>
+            <a:off x="2857500" y="4267200"/>
+            <a:ext cx="1047750" cy="185738"/>
+          </a:xfrm>
+          <a:prstGeom prst="rect">
+            <a:avLst/>
+          </a:prstGeom>
+          <a:noFill/>
+          <a:ln/>
+        </p:spPr>
+        <p:txBody>
+          <a:bodyPr wrap="square" lIns="0" tIns="0" rIns="0" bIns="0" rtlCol="0" anchor="t"/>
+          <a:lstStyle/>
+          <a:p>
+            <a:pPr algn="r" indent="0" marL="0">
+              <a:lnSpc>
+                <a:spcPts val="1463"/>
+              </a:lnSpc>
+              <a:buNone/>
+            </a:pPr>
+            <a:r>
+              <a:rPr lang="en-US" sz="1125" dirty="0">
+                <a:solidFill>
+                  <a:srgbClr val="8CA3BC"/>
+                </a:solidFill>
+                <a:latin typeface="Consolas" pitchFamily="34" charset="0"/>
+                <a:ea typeface="Consolas" pitchFamily="34" charset="-122"/>
+                <a:cs typeface="Consolas" pitchFamily="34" charset="-120"/>
+              </a:rPr>
+              <a:t>—</a:t>
+            </a:r>
+            <a:endParaRPr lang="en-US" sz="1125" dirty="0"/>
+          </a:p>
+        </p:txBody>
+      </p:sp>
+      <p:sp>
+        <p:nvSpPr>
+          <p:cNvPr id="35" name="Text 33"/>
+          <p:cNvSpPr txBox="1"/>
+          <p:nvPr/>
+        </p:nvSpPr>
+        <p:spPr>
+          <a:xfrm>
+            <a:off x="3981450" y="4267200"/>
+            <a:ext cx="228600" cy="160020"/>
+          </a:xfrm>
+          <a:prstGeom prst="rect">
+            <a:avLst/>
+          </a:prstGeom>
+          <a:noFill/>
+          <a:ln/>
+        </p:spPr>
+        <p:txBody>
+          <a:bodyPr wrap="square" lIns="0" tIns="0" rIns="0" bIns="0" rtlCol="0" anchor="t"/>
+          <a:lstStyle/>
+          <a:p>
+            <a:pPr algn="l" indent="0" marL="0">
+              <a:lnSpc>
+                <a:spcPts val="1260"/>
+              </a:lnSpc>
+              <a:buNone/>
+            </a:pPr>
+            <a:r>
+              <a:rPr lang="en-US" sz="900" dirty="0">
+                <a:solidFill>
+                  <a:srgbClr val="63798F"/>
+                </a:solidFill>
+                <a:latin typeface="Malgun Gothic" pitchFamily="34" charset="0"/>
+                <a:ea typeface="Malgun Gothic" pitchFamily="34" charset="-122"/>
+                <a:cs typeface="Malgun Gothic" pitchFamily="34" charset="-120"/>
+              </a:rPr>
+              <a:t>→</a:t>
+            </a:r>
+            <a:endParaRPr lang="en-US" sz="900" dirty="0"/>
+          </a:p>
+        </p:txBody>
+      </p:sp>
+      <p:sp>
+        <p:nvSpPr>
+          <p:cNvPr id="36" name="Text 34"/>
+          <p:cNvSpPr txBox="1"/>
+          <p:nvPr/>
+        </p:nvSpPr>
+        <p:spPr>
+          <a:xfrm>
+            <a:off x="4191000" y="4257675"/>
+            <a:ext cx="1047750" cy="202406"/>
+          </a:xfrm>
+          <a:prstGeom prst="rect">
+            <a:avLst/>
+          </a:prstGeom>
+          <a:noFill/>
+          <a:ln/>
+        </p:spPr>
+        <p:txBody>
+          <a:bodyPr wrap="square" lIns="0" tIns="0" rIns="0" bIns="0" rtlCol="0" anchor="t"/>
+          <a:lstStyle/>
+          <a:p>
+            <a:pPr algn="r" indent="0" marL="0">
+              <a:lnSpc>
+                <a:spcPts val="1594"/>
+              </a:lnSpc>
+              <a:buNone/>
+            </a:pPr>
+            <a:r>
+              <a:rPr lang="en-US" sz="1275" b="1" dirty="0">
+                <a:solidFill>
+                  <a:srgbClr val="EFB13C"/>
+                </a:solidFill>
+                <a:latin typeface="Consolas" pitchFamily="34" charset="0"/>
+                <a:ea typeface="Consolas" pitchFamily="34" charset="-122"/>
+                <a:cs typeface="Consolas" pitchFamily="34" charset="-120"/>
+              </a:rPr>
+              <a:t>+0.85</a:t>
+            </a:r>
+            <a:endParaRPr lang="en-US" sz="1275" dirty="0"/>
+          </a:p>
+        </p:txBody>
+      </p:sp>
+      <p:sp>
+        <p:nvSpPr>
+          <p:cNvPr id="37" name="Text 35"/>
+          <p:cNvSpPr txBox="1"/>
+          <p:nvPr/>
+        </p:nvSpPr>
+        <p:spPr>
+          <a:xfrm>
+            <a:off x="5619750" y="4267200"/>
+            <a:ext cx="1428750" cy="173593"/>
+          </a:xfrm>
+          <a:prstGeom prst="rect">
+            <a:avLst/>
+          </a:prstGeom>
+          <a:noFill/>
+          <a:ln/>
+        </p:spPr>
+        <p:txBody>
+          <a:bodyPr wrap="square" lIns="0" tIns="0" rIns="0" bIns="0" rtlCol="0" anchor="t"/>
+          <a:lstStyle/>
+          <a:p>
+            <a:pPr algn="r" indent="0" marL="0">
+              <a:lnSpc>
+                <a:spcPts val="1367"/>
+              </a:lnSpc>
+              <a:buNone/>
+            </a:pPr>
+            <a:r>
+              <a:rPr lang="en-US" sz="1013" dirty="0">
+                <a:solidFill>
+                  <a:srgbClr val="93A6BA"/>
+                </a:solidFill>
+                <a:latin typeface="Malgun Gothic" pitchFamily="34" charset="0"/>
+                <a:ea typeface="Malgun Gothic" pitchFamily="34" charset="-122"/>
+                <a:cs typeface="Malgun Gothic" pitchFamily="34" charset="-120"/>
+              </a:rPr>
+              <a:t>1에 가까울수록 좋음</a:t>
+            </a:r>
+            <a:endParaRPr lang="en-US" sz="1013" dirty="0"/>
+          </a:p>
+        </p:txBody>
+      </p:sp>
+      <p:sp>
+        <p:nvSpPr>
+          <p:cNvPr id="38" name="Shape 36"/>
+          <p:cNvSpPr/>
+          <p:nvPr/>
+        </p:nvSpPr>
+        <p:spPr>
+          <a:xfrm>
+            <a:off x="838200" y="4552950"/>
+            <a:ext cx="6362700" cy="0"/>
+          </a:xfrm>
+          <a:prstGeom prst="line">
+            <a:avLst/>
+          </a:prstGeom>
+          <a:noFill/>
+          <a:ln w="12700">
+            <a:solidFill>
+              <a:srgbClr val="182838"/>
+            </a:solidFill>
+            <a:prstDash val="solid"/>
+          </a:ln>
+        </p:spPr>
+      </p:sp>
+      <p:sp>
+        <p:nvSpPr>
+          <p:cNvPr id="39" name="Text 37"/>
+          <p:cNvSpPr txBox="1"/>
+          <p:nvPr/>
+        </p:nvSpPr>
+        <p:spPr>
+          <a:xfrm>
+            <a:off x="838200" y="4629150"/>
+            <a:ext cx="1905000" cy="180023"/>
+          </a:xfrm>
+          <a:prstGeom prst="rect">
+            <a:avLst/>
+          </a:prstGeom>
+          <a:noFill/>
+          <a:ln/>
+        </p:spPr>
+        <p:txBody>
+          <a:bodyPr wrap="square" lIns="0" tIns="0" rIns="0" bIns="0" rtlCol="0" anchor="t"/>
+          <a:lstStyle/>
+          <a:p>
+            <a:pPr algn="l" indent="0" marL="0">
+              <a:lnSpc>
+                <a:spcPts val="1418"/>
+              </a:lnSpc>
+              <a:buNone/>
+            </a:pPr>
+            <a:r>
+              <a:rPr lang="en-US" sz="1050" dirty="0">
+                <a:solidFill>
+                  <a:srgbClr val="EAE7E0"/>
+                </a:solidFill>
+                <a:latin typeface="Malgun Gothic" pitchFamily="34" charset="0"/>
+                <a:ea typeface="Malgun Gothic" pitchFamily="34" charset="-122"/>
+                <a:cs typeface="Malgun Gothic" pitchFamily="34" charset="-120"/>
+              </a:rPr>
+              <a:t>기준 미달 회차</a:t>
+            </a:r>
+            <a:endParaRPr lang="en-US" sz="1050" dirty="0"/>
+          </a:p>
+        </p:txBody>
+      </p:sp>
+      <p:sp>
+        <p:nvSpPr>
+          <p:cNvPr id="40" name="Text 38"/>
+          <p:cNvSpPr txBox="1"/>
+          <p:nvPr/>
+        </p:nvSpPr>
+        <p:spPr>
+          <a:xfrm>
+            <a:off x="2857500" y="4629150"/>
+            <a:ext cx="1047750" cy="185738"/>
+          </a:xfrm>
+          <a:prstGeom prst="rect">
+            <a:avLst/>
+          </a:prstGeom>
+          <a:noFill/>
+          <a:ln/>
+        </p:spPr>
+        <p:txBody>
+          <a:bodyPr wrap="square" lIns="0" tIns="0" rIns="0" bIns="0" rtlCol="0" anchor="t"/>
+          <a:lstStyle/>
+          <a:p>
+            <a:pPr algn="r" indent="0" marL="0">
+              <a:lnSpc>
+                <a:spcPts val="1463"/>
+              </a:lnSpc>
+              <a:buNone/>
+            </a:pPr>
+            <a:r>
+              <a:rPr lang="en-US" sz="1125" dirty="0">
+                <a:solidFill>
+                  <a:srgbClr val="8CA3BC"/>
+                </a:solidFill>
+                <a:latin typeface="Consolas" pitchFamily="34" charset="0"/>
+                <a:ea typeface="Consolas" pitchFamily="34" charset="-122"/>
+                <a:cs typeface="Consolas" pitchFamily="34" charset="-120"/>
+              </a:rPr>
+              <a:t>14</a:t>
+            </a:r>
+            <a:endParaRPr lang="en-US" sz="1125" dirty="0"/>
+          </a:p>
+        </p:txBody>
+      </p:sp>
+      <p:sp>
+        <p:nvSpPr>
+          <p:cNvPr id="41" name="Text 39"/>
+          <p:cNvSpPr txBox="1"/>
+          <p:nvPr/>
+        </p:nvSpPr>
+        <p:spPr>
+          <a:xfrm>
+            <a:off x="3981450" y="4629150"/>
+            <a:ext cx="228600" cy="160020"/>
+          </a:xfrm>
+          <a:prstGeom prst="rect">
+            <a:avLst/>
+          </a:prstGeom>
+          <a:noFill/>
+          <a:ln/>
+        </p:spPr>
+        <p:txBody>
+          <a:bodyPr wrap="square" lIns="0" tIns="0" rIns="0" bIns="0" rtlCol="0" anchor="t"/>
+          <a:lstStyle/>
+          <a:p>
+            <a:pPr algn="l" indent="0" marL="0">
+              <a:lnSpc>
+                <a:spcPts val="1260"/>
+              </a:lnSpc>
+              <a:buNone/>
+            </a:pPr>
+            <a:r>
+              <a:rPr lang="en-US" sz="900" dirty="0">
+                <a:solidFill>
+                  <a:srgbClr val="63798F"/>
+                </a:solidFill>
+                <a:latin typeface="Malgun Gothic" pitchFamily="34" charset="0"/>
+                <a:ea typeface="Malgun Gothic" pitchFamily="34" charset="-122"/>
+                <a:cs typeface="Malgun Gothic" pitchFamily="34" charset="-120"/>
+              </a:rPr>
+              <a:t>→</a:t>
+            </a:r>
+            <a:endParaRPr lang="en-US" sz="900" dirty="0"/>
+          </a:p>
+        </p:txBody>
+      </p:sp>
+      <p:sp>
+        <p:nvSpPr>
+          <p:cNvPr id="42" name="Text 40"/>
+          <p:cNvSpPr txBox="1"/>
+          <p:nvPr/>
+        </p:nvSpPr>
+        <p:spPr>
+          <a:xfrm>
+            <a:off x="4191000" y="4619625"/>
+            <a:ext cx="1047750" cy="202406"/>
+          </a:xfrm>
+          <a:prstGeom prst="rect">
+            <a:avLst/>
+          </a:prstGeom>
+          <a:noFill/>
+          <a:ln/>
+        </p:spPr>
+        <p:txBody>
+          <a:bodyPr wrap="square" lIns="0" tIns="0" rIns="0" bIns="0" rtlCol="0" anchor="t"/>
+          <a:lstStyle/>
+          <a:p>
+            <a:pPr algn="r" indent="0" marL="0">
+              <a:lnSpc>
+                <a:spcPts val="1594"/>
+              </a:lnSpc>
+              <a:buNone/>
+            </a:pPr>
+            <a:r>
+              <a:rPr lang="en-US" sz="1275" b="1" dirty="0">
+                <a:solidFill>
+                  <a:srgbClr val="EFB13C"/>
+                </a:solidFill>
+                <a:latin typeface="Consolas" pitchFamily="34" charset="0"/>
+                <a:ea typeface="Consolas" pitchFamily="34" charset="-122"/>
+                <a:cs typeface="Consolas" pitchFamily="34" charset="-120"/>
+              </a:rPr>
+              <a:t>3</a:t>
+            </a:r>
+            <a:endParaRPr lang="en-US" sz="1275" dirty="0"/>
+          </a:p>
+        </p:txBody>
+      </p:sp>
+      <p:sp>
+        <p:nvSpPr>
+          <p:cNvPr id="43" name="Text 41"/>
+          <p:cNvSpPr txBox="1"/>
+          <p:nvPr/>
+        </p:nvSpPr>
+        <p:spPr>
+          <a:xfrm>
+            <a:off x="5619750" y="4629150"/>
+            <a:ext cx="1428750" cy="173593"/>
+          </a:xfrm>
+          <a:prstGeom prst="rect">
+            <a:avLst/>
+          </a:prstGeom>
+          <a:noFill/>
+          <a:ln/>
+        </p:spPr>
+        <p:txBody>
+          <a:bodyPr wrap="square" lIns="0" tIns="0" rIns="0" bIns="0" rtlCol="0" anchor="t"/>
+          <a:lstStyle/>
+          <a:p>
+            <a:pPr algn="r" indent="0" marL="0">
+              <a:lnSpc>
+                <a:spcPts val="1367"/>
+              </a:lnSpc>
+              <a:buNone/>
+            </a:pPr>
+            <a:r>
+              <a:rPr lang="en-US" sz="1013" dirty="0">
+                <a:solidFill>
+                  <a:srgbClr val="EFB13C"/>
+                </a:solidFill>
+                <a:latin typeface="Consolas" pitchFamily="34" charset="0"/>
+                <a:ea typeface="Consolas" pitchFamily="34" charset="-122"/>
+                <a:cs typeface="Consolas" pitchFamily="34" charset="-120"/>
+              </a:rPr>
+              <a:t>79% ↓</a:t>
+            </a:r>
+            <a:endParaRPr lang="en-US" sz="1013" dirty="0"/>
+          </a:p>
+        </p:txBody>
+      </p:sp>
+      <p:sp>
+        <p:nvSpPr>
+          <p:cNvPr id="44" name="Shape 42"/>
+          <p:cNvSpPr/>
+          <p:nvPr/>
+        </p:nvSpPr>
+        <p:spPr>
+          <a:xfrm>
+            <a:off x="838200" y="4914900"/>
+            <a:ext cx="6362700" cy="0"/>
+          </a:xfrm>
+          <a:prstGeom prst="line">
+            <a:avLst/>
+          </a:prstGeom>
+          <a:noFill/>
+          <a:ln w="12700">
+            <a:solidFill>
+              <a:srgbClr val="182838"/>
+            </a:solidFill>
+            <a:prstDash val="solid"/>
+          </a:ln>
+        </p:spPr>
+      </p:sp>
+      <p:sp>
+        <p:nvSpPr>
+          <p:cNvPr id="45" name="Text 43"/>
+          <p:cNvSpPr txBox="1"/>
+          <p:nvPr/>
+        </p:nvSpPr>
+        <p:spPr>
+          <a:xfrm>
+            <a:off x="838200" y="4991100"/>
+            <a:ext cx="1905000" cy="180023"/>
+          </a:xfrm>
+          <a:prstGeom prst="rect">
+            <a:avLst/>
+          </a:prstGeom>
+          <a:noFill/>
+          <a:ln/>
+        </p:spPr>
+        <p:txBody>
+          <a:bodyPr wrap="square" lIns="0" tIns="0" rIns="0" bIns="0" rtlCol="0" anchor="t"/>
+          <a:lstStyle/>
+          <a:p>
+            <a:pPr algn="l" indent="0" marL="0">
+              <a:lnSpc>
+                <a:spcPts val="1418"/>
+              </a:lnSpc>
+              <a:buNone/>
+            </a:pPr>
+            <a:r>
+              <a:rPr lang="en-US" sz="1050" dirty="0">
+                <a:solidFill>
+                  <a:srgbClr val="EAE7E0"/>
+                </a:solidFill>
+                <a:latin typeface="Malgun Gothic" pitchFamily="34" charset="0"/>
+                <a:ea typeface="Malgun Gothic" pitchFamily="34" charset="-122"/>
+                <a:cs typeface="Malgun Gothic" pitchFamily="34" charset="-120"/>
+              </a:rPr>
+              <a:t>과대 신고 누계</a:t>
+            </a:r>
+            <a:endParaRPr lang="en-US" sz="1050" dirty="0"/>
+          </a:p>
+        </p:txBody>
+      </p:sp>
+      <p:sp>
+        <p:nvSpPr>
+          <p:cNvPr id="46" name="Text 44"/>
+          <p:cNvSpPr txBox="1"/>
+          <p:nvPr/>
+        </p:nvSpPr>
+        <p:spPr>
+          <a:xfrm>
+            <a:off x="2857500" y="4991100"/>
+            <a:ext cx="1047750" cy="185738"/>
+          </a:xfrm>
+          <a:prstGeom prst="rect">
+            <a:avLst/>
+          </a:prstGeom>
+          <a:noFill/>
+          <a:ln/>
+        </p:spPr>
+        <p:txBody>
+          <a:bodyPr wrap="square" lIns="0" tIns="0" rIns="0" bIns="0" rtlCol="0" anchor="t"/>
+          <a:lstStyle/>
+          <a:p>
+            <a:pPr algn="r" indent="0" marL="0">
+              <a:lnSpc>
+                <a:spcPts val="1463"/>
+              </a:lnSpc>
+              <a:buNone/>
+            </a:pPr>
+            <a:r>
+              <a:rPr lang="en-US" sz="1125" dirty="0">
+                <a:solidFill>
+                  <a:srgbClr val="8CA3BC"/>
+                </a:solidFill>
+                <a:latin typeface="Consolas" pitchFamily="34" charset="0"/>
+                <a:ea typeface="Consolas" pitchFamily="34" charset="-122"/>
+                <a:cs typeface="Consolas" pitchFamily="34" charset="-120"/>
+              </a:rPr>
+              <a:t>65.4</a:t>
+            </a:r>
+            <a:endParaRPr lang="en-US" sz="1125" dirty="0"/>
+          </a:p>
+        </p:txBody>
+      </p:sp>
+      <p:sp>
+        <p:nvSpPr>
+          <p:cNvPr id="47" name="Text 45"/>
+          <p:cNvSpPr txBox="1"/>
+          <p:nvPr/>
+        </p:nvSpPr>
+        <p:spPr>
+          <a:xfrm>
+            <a:off x="3981450" y="4991100"/>
+            <a:ext cx="228600" cy="160020"/>
+          </a:xfrm>
+          <a:prstGeom prst="rect">
+            <a:avLst/>
+          </a:prstGeom>
+          <a:noFill/>
+          <a:ln/>
+        </p:spPr>
+        <p:txBody>
+          <a:bodyPr wrap="square" lIns="0" tIns="0" rIns="0" bIns="0" rtlCol="0" anchor="t"/>
+          <a:lstStyle/>
+          <a:p>
+            <a:pPr algn="l" indent="0" marL="0">
+              <a:lnSpc>
+                <a:spcPts val="1260"/>
+              </a:lnSpc>
+              <a:buNone/>
+            </a:pPr>
+            <a:r>
+              <a:rPr lang="en-US" sz="900" dirty="0">
+                <a:solidFill>
+                  <a:srgbClr val="63798F"/>
+                </a:solidFill>
+                <a:latin typeface="Malgun Gothic" pitchFamily="34" charset="0"/>
+                <a:ea typeface="Malgun Gothic" pitchFamily="34" charset="-122"/>
+                <a:cs typeface="Malgun Gothic" pitchFamily="34" charset="-120"/>
+              </a:rPr>
+              <a:t>→</a:t>
+            </a:r>
+            <a:endParaRPr lang="en-US" sz="900" dirty="0"/>
+          </a:p>
+        </p:txBody>
+      </p:sp>
+      <p:sp>
+        <p:nvSpPr>
+          <p:cNvPr id="48" name="Text 46"/>
+          <p:cNvSpPr txBox="1"/>
+          <p:nvPr/>
+        </p:nvSpPr>
+        <p:spPr>
+          <a:xfrm>
+            <a:off x="4191000" y="4981575"/>
+            <a:ext cx="1047750" cy="202406"/>
+          </a:xfrm>
+          <a:prstGeom prst="rect">
+            <a:avLst/>
+          </a:prstGeom>
+          <a:noFill/>
+          <a:ln/>
+        </p:spPr>
+        <p:txBody>
+          <a:bodyPr wrap="square" lIns="0" tIns="0" rIns="0" bIns="0" rtlCol="0" anchor="t"/>
+          <a:lstStyle/>
+          <a:p>
+            <a:pPr algn="r" indent="0" marL="0">
+              <a:lnSpc>
+                <a:spcPts val="1594"/>
+              </a:lnSpc>
+              <a:buNone/>
+            </a:pPr>
+            <a:r>
+              <a:rPr lang="en-US" sz="1275" b="1" dirty="0">
+                <a:solidFill>
+                  <a:srgbClr val="EFB13C"/>
+                </a:solidFill>
+                <a:latin typeface="Consolas" pitchFamily="34" charset="0"/>
+                <a:ea typeface="Consolas" pitchFamily="34" charset="-122"/>
+                <a:cs typeface="Consolas" pitchFamily="34" charset="-120"/>
+              </a:rPr>
+              <a:t>7.6</a:t>
+            </a:r>
+            <a:endParaRPr lang="en-US" sz="1275" dirty="0"/>
+          </a:p>
+        </p:txBody>
+      </p:sp>
+      <p:sp>
+        <p:nvSpPr>
+          <p:cNvPr id="49" name="Text 47"/>
+          <p:cNvSpPr txBox="1"/>
+          <p:nvPr/>
+        </p:nvSpPr>
+        <p:spPr>
+          <a:xfrm>
+            <a:off x="5619750" y="4991100"/>
+            <a:ext cx="1428750" cy="173593"/>
+          </a:xfrm>
+          <a:prstGeom prst="rect">
+            <a:avLst/>
+          </a:prstGeom>
+          <a:noFill/>
+          <a:ln/>
+        </p:spPr>
+        <p:txBody>
+          <a:bodyPr wrap="square" lIns="0" tIns="0" rIns="0" bIns="0" rtlCol="0" anchor="t"/>
+          <a:lstStyle/>
+          <a:p>
+            <a:pPr algn="r" indent="0" marL="0">
+              <a:lnSpc>
+                <a:spcPts val="1367"/>
+              </a:lnSpc>
+              <a:buNone/>
+            </a:pPr>
+            <a:r>
+              <a:rPr lang="en-US" sz="1013" dirty="0">
+                <a:solidFill>
+                  <a:srgbClr val="EFB13C"/>
+                </a:solidFill>
+                <a:latin typeface="Consolas" pitchFamily="34" charset="0"/>
+                <a:ea typeface="Consolas" pitchFamily="34" charset="-122"/>
+                <a:cs typeface="Consolas" pitchFamily="34" charset="-120"/>
+              </a:rPr>
+              <a:t>88% ↓</a:t>
+            </a:r>
+            <a:endParaRPr lang="en-US" sz="1013" dirty="0"/>
+          </a:p>
+        </p:txBody>
+      </p:sp>
+      <p:sp>
+        <p:nvSpPr>
+          <p:cNvPr id="50" name="Text 48"/>
+          <p:cNvSpPr txBox="1"/>
+          <p:nvPr/>
+        </p:nvSpPr>
+        <p:spPr>
+          <a:xfrm>
+            <a:off x="685800" y="5505450"/>
+            <a:ext cx="6667500" cy="480060"/>
+          </a:xfrm>
+          <a:prstGeom prst="rect">
+            <a:avLst/>
+          </a:prstGeom>
+          <a:noFill/>
+          <a:ln/>
+        </p:spPr>
+        <p:txBody>
+          <a:bodyPr wrap="square" lIns="0" tIns="0" rIns="0" bIns="0" rtlCol="0" anchor="t"/>
+          <a:lstStyle/>
+          <a:p>
+            <a:pPr algn="l" indent="0" marL="0">
+              <a:lnSpc>
+                <a:spcPts val="1890"/>
+              </a:lnSpc>
+              <a:buNone/>
+            </a:pPr>
+            <a:r>
+              <a:rPr lang="en-US" sz="1125" dirty="0">
+                <a:solidFill>
+                  <a:srgbClr val="BCC9D6"/>
+                </a:solidFill>
+                <a:latin typeface="Malgun Gothic" pitchFamily="34" charset="0"/>
+                <a:ea typeface="Malgun Gothic" pitchFamily="34" charset="-122"/>
+                <a:cs typeface="Malgun Gothic" pitchFamily="34" charset="-120"/>
+              </a:rPr>
+              <a:t>오차는 MW, 미달은 회차, 과대 신고는 누계 MW 입니다. 설명력은 종전 방식에 대응하는 값이 없어 </a:t>
+            </a:r>
+            <a:pPr algn="l" indent="0" marL="0">
+              <a:lnSpc>
+                <a:spcPts val="1890"/>
+              </a:lnSpc>
+              <a:buNone/>
+            </a:pPr>
+            <a:r>
+              <a:rPr lang="en-US" sz="1125" b="1" dirty="0">
+                <a:solidFill>
+                  <a:srgbClr val="EAE7E0"/>
+                </a:solidFill>
+                <a:latin typeface="Malgun Gothic" pitchFamily="34" charset="0"/>
+                <a:ea typeface="Malgun Gothic" pitchFamily="34" charset="-122"/>
+                <a:cs typeface="Malgun Gothic" pitchFamily="34" charset="-120"/>
+              </a:rPr>
+              <a:t>비워 두었습니다</a:t>
+            </a:r>
+            <a:pPr algn="l" indent="0" marL="0">
+              <a:lnSpc>
+                <a:spcPts val="1890"/>
+              </a:lnSpc>
+              <a:buNone/>
+            </a:pPr>
+            <a:r>
+              <a:rPr lang="en-US" sz="1125" dirty="0">
+                <a:solidFill>
+                  <a:srgbClr val="BCC9D6"/>
+                </a:solidFill>
+                <a:latin typeface="Malgun Gothic" pitchFamily="34" charset="0"/>
+                <a:ea typeface="Malgun Gothic" pitchFamily="34" charset="-122"/>
+                <a:cs typeface="Malgun Gothic" pitchFamily="34" charset="-120"/>
+              </a:rPr>
+              <a:t>.</a:t>
+            </a:r>
+            <a:endParaRPr lang="en-US" sz="1125" dirty="0"/>
+          </a:p>
+        </p:txBody>
+      </p:sp>
+      <p:sp>
+        <p:nvSpPr>
+          <p:cNvPr id="51" name="Shape 49"/>
+          <p:cNvSpPr/>
+          <p:nvPr/>
+        </p:nvSpPr>
+        <p:spPr>
+          <a:xfrm>
+            <a:off x="7734300" y="2743200"/>
+            <a:ext cx="3771900" cy="19050"/>
+          </a:xfrm>
+          <a:prstGeom prst="rect">
+            <a:avLst/>
+          </a:prstGeom>
+          <a:solidFill>
+            <a:srgbClr val="22354A"/>
+          </a:solidFill>
+          <a:ln/>
+        </p:spPr>
+      </p:sp>
+      <p:sp>
+        <p:nvSpPr>
+          <p:cNvPr id="52" name="Text 50"/>
+          <p:cNvSpPr txBox="1"/>
+          <p:nvPr/>
+        </p:nvSpPr>
+        <p:spPr>
+          <a:xfrm>
+            <a:off x="7734300" y="2876550"/>
+            <a:ext cx="3771900" cy="125016"/>
+          </a:xfrm>
+          <a:prstGeom prst="rect">
+            <a:avLst/>
+          </a:prstGeom>
+          <a:noFill/>
+          <a:ln/>
+        </p:spPr>
+        <p:txBody>
+          <a:bodyPr wrap="square" lIns="0" tIns="0" rIns="0" bIns="0" rtlCol="0" anchor="t"/>
+          <a:lstStyle/>
+          <a:p>
+            <a:pPr algn="l" indent="0" marL="0">
+              <a:lnSpc>
+                <a:spcPts val="984"/>
+              </a:lnSpc>
+              <a:buNone/>
+            </a:pPr>
+            <a:r>
+              <a:rPr lang="en-US" sz="788" b="1" spc="150" kern="0" dirty="0">
+                <a:solidFill>
+                  <a:srgbClr val="63798F"/>
+                </a:solidFill>
+                <a:latin typeface="Consolas" pitchFamily="34" charset="0"/>
+                <a:ea typeface="Consolas" pitchFamily="34" charset="-122"/>
+                <a:cs typeface="Consolas" pitchFamily="34" charset="-120"/>
+              </a:rPr>
+              <a:t>시운전 실측  ·  4회차</a:t>
+            </a:r>
+            <a:endParaRPr lang="en-US" sz="788" dirty="0"/>
+          </a:p>
+        </p:txBody>
+      </p:sp>
+      <p:sp>
+        <p:nvSpPr>
+          <p:cNvPr id="53" name="Shape 51"/>
+          <p:cNvSpPr/>
+          <p:nvPr/>
+        </p:nvSpPr>
+        <p:spPr>
+          <a:xfrm>
+            <a:off x="7734300" y="3067050"/>
+            <a:ext cx="3771900" cy="1447800"/>
+          </a:xfrm>
+          <a:prstGeom prst="rect">
+            <a:avLst/>
+          </a:prstGeom>
+          <a:solidFill>
+            <a:srgbClr val="0A1320"/>
+          </a:solidFill>
+          <a:ln w="12700">
+            <a:solidFill>
+              <a:srgbClr val="182838"/>
+            </a:solidFill>
+            <a:prstDash val="solid"/>
+          </a:ln>
+        </p:spPr>
+      </p:sp>
+      <p:sp>
+        <p:nvSpPr>
+          <p:cNvPr id="54" name="Text 52"/>
+          <p:cNvSpPr txBox="1"/>
+          <p:nvPr/>
+        </p:nvSpPr>
+        <p:spPr>
+          <a:xfrm>
+            <a:off x="7886700" y="3219450"/>
+            <a:ext cx="1714500" cy="125016"/>
+          </a:xfrm>
+          <a:prstGeom prst="rect">
+            <a:avLst/>
+          </a:prstGeom>
+          <a:noFill/>
+          <a:ln/>
+        </p:spPr>
+        <p:txBody>
+          <a:bodyPr wrap="square" lIns="0" tIns="0" rIns="0" bIns="0" rtlCol="0" anchor="t"/>
+          <a:lstStyle/>
+          <a:p>
+            <a:pPr algn="l" indent="0" marL="0">
+              <a:lnSpc>
+                <a:spcPts val="984"/>
+              </a:lnSpc>
+              <a:buNone/>
+            </a:pPr>
+            <a:r>
+              <a:rPr lang="en-US" sz="788" b="1" spc="150" kern="0" dirty="0">
+                <a:solidFill>
+                  <a:srgbClr val="63798F"/>
+                </a:solidFill>
+                <a:latin typeface="Consolas" pitchFamily="34" charset="0"/>
+                <a:ea typeface="Consolas" pitchFamily="34" charset="-122"/>
+                <a:cs typeface="Consolas" pitchFamily="34" charset="-120"/>
+              </a:rPr>
+              <a:t>치우침</a:t>
+            </a:r>
+            <a:endParaRPr lang="en-US" sz="788" dirty="0"/>
+          </a:p>
+        </p:txBody>
+      </p:sp>
+      <p:sp>
+        <p:nvSpPr>
+          <p:cNvPr id="55" name="Text 53"/>
+          <p:cNvSpPr txBox="1"/>
+          <p:nvPr/>
+        </p:nvSpPr>
+        <p:spPr>
+          <a:xfrm>
+            <a:off x="7886700" y="3409950"/>
+            <a:ext cx="1238250" cy="240030"/>
+          </a:xfrm>
+          <a:prstGeom prst="rect">
+            <a:avLst/>
+          </a:prstGeom>
+          <a:noFill/>
+          <a:ln/>
+        </p:spPr>
+        <p:txBody>
+          <a:bodyPr wrap="square" lIns="0" tIns="0" rIns="0" bIns="0" rtlCol="0" anchor="t"/>
+          <a:lstStyle/>
+          <a:p>
+            <a:pPr algn="l" indent="0" marL="0">
+              <a:lnSpc>
+                <a:spcPts val="1890"/>
+              </a:lnSpc>
+              <a:buNone/>
+            </a:pPr>
+            <a:r>
+              <a:rPr lang="en-US" sz="1800" b="1" dirty="0">
+                <a:solidFill>
+                  <a:srgbClr val="EFB13C"/>
+                </a:solidFill>
+                <a:latin typeface="Consolas" pitchFamily="34" charset="0"/>
+                <a:ea typeface="Consolas" pitchFamily="34" charset="-122"/>
+                <a:cs typeface="Consolas" pitchFamily="34" charset="-120"/>
+              </a:rPr>
+              <a:t>+0.14</a:t>
+            </a:r>
+            <a:endParaRPr lang="en-US" sz="1800" dirty="0"/>
+          </a:p>
+        </p:txBody>
+      </p:sp>
+      <p:sp>
+        <p:nvSpPr>
+          <p:cNvPr id="56" name="Text 54"/>
+          <p:cNvSpPr txBox="1"/>
+          <p:nvPr/>
+        </p:nvSpPr>
+        <p:spPr>
+          <a:xfrm>
+            <a:off x="8639175" y="3486150"/>
+            <a:ext cx="381000" cy="137160"/>
+          </a:xfrm>
+          <a:prstGeom prst="rect">
+            <a:avLst/>
+          </a:prstGeom>
+          <a:noFill/>
+          <a:ln/>
+        </p:spPr>
+        <p:txBody>
+          <a:bodyPr wrap="square" lIns="0" tIns="0" rIns="0" bIns="0" rtlCol="0" anchor="t"/>
+          <a:lstStyle/>
+          <a:p>
+            <a:pPr algn="l" indent="0" marL="0">
+              <a:lnSpc>
+                <a:spcPts val="1080"/>
+              </a:lnSpc>
+              <a:buNone/>
+            </a:pPr>
+            <a:r>
+              <a:rPr lang="en-US" sz="900" dirty="0">
+                <a:solidFill>
+                  <a:srgbClr val="63798F"/>
+                </a:solidFill>
+                <a:latin typeface="Malgun Gothic" pitchFamily="34" charset="0"/>
+                <a:ea typeface="Malgun Gothic" pitchFamily="34" charset="-122"/>
+                <a:cs typeface="Malgun Gothic" pitchFamily="34" charset="-120"/>
+              </a:rPr>
+              <a:t>MW</a:t>
+            </a:r>
+            <a:endParaRPr lang="en-US" sz="900" dirty="0"/>
+          </a:p>
+        </p:txBody>
+      </p:sp>
+      <p:sp>
+        <p:nvSpPr>
+          <p:cNvPr id="57" name="Text 55"/>
+          <p:cNvSpPr txBox="1"/>
+          <p:nvPr/>
+        </p:nvSpPr>
+        <p:spPr>
+          <a:xfrm>
+            <a:off x="9715500" y="3219450"/>
+            <a:ext cx="1714500" cy="125016"/>
+          </a:xfrm>
+          <a:prstGeom prst="rect">
+            <a:avLst/>
+          </a:prstGeom>
+          <a:noFill/>
+          <a:ln/>
+        </p:spPr>
+        <p:txBody>
+          <a:bodyPr wrap="square" lIns="0" tIns="0" rIns="0" bIns="0" rtlCol="0" anchor="t"/>
+          <a:lstStyle/>
+          <a:p>
+            <a:pPr algn="l" indent="0" marL="0">
+              <a:lnSpc>
+                <a:spcPts val="984"/>
+              </a:lnSpc>
+              <a:buNone/>
+            </a:pPr>
+            <a:r>
+              <a:rPr lang="en-US" sz="788" b="1" spc="150" kern="0" dirty="0">
+                <a:solidFill>
+                  <a:srgbClr val="63798F"/>
+                </a:solidFill>
+                <a:latin typeface="Consolas" pitchFamily="34" charset="0"/>
+                <a:ea typeface="Consolas" pitchFamily="34" charset="-122"/>
+                <a:cs typeface="Consolas" pitchFamily="34" charset="-120"/>
+              </a:rPr>
+              <a:t>평균 오차</a:t>
+            </a:r>
+            <a:endParaRPr lang="en-US" sz="788" dirty="0"/>
+          </a:p>
+        </p:txBody>
+      </p:sp>
+      <p:sp>
+        <p:nvSpPr>
+          <p:cNvPr id="58" name="Text 56"/>
+          <p:cNvSpPr txBox="1"/>
+          <p:nvPr/>
+        </p:nvSpPr>
+        <p:spPr>
+          <a:xfrm>
+            <a:off x="9715500" y="3409950"/>
+            <a:ext cx="1238250" cy="240030"/>
+          </a:xfrm>
+          <a:prstGeom prst="rect">
+            <a:avLst/>
+          </a:prstGeom>
+          <a:noFill/>
+          <a:ln/>
+        </p:spPr>
+        <p:txBody>
+          <a:bodyPr wrap="square" lIns="0" tIns="0" rIns="0" bIns="0" rtlCol="0" anchor="t"/>
+          <a:lstStyle/>
+          <a:p>
+            <a:pPr algn="l" indent="0" marL="0">
+              <a:lnSpc>
+                <a:spcPts val="1890"/>
+              </a:lnSpc>
+              <a:buNone/>
+            </a:pPr>
+            <a:r>
+              <a:rPr lang="en-US" sz="1800" b="1" dirty="0">
+                <a:solidFill>
+                  <a:srgbClr val="EFB13C"/>
+                </a:solidFill>
+                <a:latin typeface="Consolas" pitchFamily="34" charset="0"/>
+                <a:ea typeface="Consolas" pitchFamily="34" charset="-122"/>
+                <a:cs typeface="Consolas" pitchFamily="34" charset="-120"/>
+              </a:rPr>
+              <a:t>1.36</a:t>
+            </a:r>
+            <a:endParaRPr lang="en-US" sz="1800" dirty="0"/>
+          </a:p>
+        </p:txBody>
+      </p:sp>
+      <p:sp>
+        <p:nvSpPr>
+          <p:cNvPr id="59" name="Text 57"/>
+          <p:cNvSpPr txBox="1"/>
+          <p:nvPr/>
+        </p:nvSpPr>
+        <p:spPr>
+          <a:xfrm>
+            <a:off x="10325100" y="3486150"/>
+            <a:ext cx="381000" cy="137160"/>
+          </a:xfrm>
+          <a:prstGeom prst="rect">
+            <a:avLst/>
+          </a:prstGeom>
+          <a:noFill/>
+          <a:ln/>
+        </p:spPr>
+        <p:txBody>
+          <a:bodyPr wrap="square" lIns="0" tIns="0" rIns="0" bIns="0" rtlCol="0" anchor="t"/>
+          <a:lstStyle/>
+          <a:p>
+            <a:pPr algn="l" indent="0" marL="0">
+              <a:lnSpc>
+                <a:spcPts val="1080"/>
+              </a:lnSpc>
+              <a:buNone/>
+            </a:pPr>
+            <a:r>
+              <a:rPr lang="en-US" sz="900" dirty="0">
+                <a:solidFill>
+                  <a:srgbClr val="63798F"/>
+                </a:solidFill>
+                <a:latin typeface="Malgun Gothic" pitchFamily="34" charset="0"/>
+                <a:ea typeface="Malgun Gothic" pitchFamily="34" charset="-122"/>
+                <a:cs typeface="Malgun Gothic" pitchFamily="34" charset="-120"/>
+              </a:rPr>
+              <a:t>MW</a:t>
+            </a:r>
+            <a:endParaRPr lang="en-US" sz="900" dirty="0"/>
+          </a:p>
+        </p:txBody>
+      </p:sp>
+      <p:sp>
+        <p:nvSpPr>
+          <p:cNvPr id="60" name="Text 58"/>
+          <p:cNvSpPr txBox="1"/>
+          <p:nvPr/>
+        </p:nvSpPr>
+        <p:spPr>
+          <a:xfrm>
+            <a:off x="7886700" y="3886200"/>
+            <a:ext cx="1714500" cy="125016"/>
+          </a:xfrm>
+          <a:prstGeom prst="rect">
+            <a:avLst/>
+          </a:prstGeom>
+          <a:noFill/>
+          <a:ln/>
+        </p:spPr>
+        <p:txBody>
+          <a:bodyPr wrap="square" lIns="0" tIns="0" rIns="0" bIns="0" rtlCol="0" anchor="t"/>
+          <a:lstStyle/>
+          <a:p>
+            <a:pPr algn="l" indent="0" marL="0">
+              <a:lnSpc>
+                <a:spcPts val="984"/>
+              </a:lnSpc>
+              <a:buNone/>
+            </a:pPr>
+            <a:r>
+              <a:rPr lang="en-US" sz="788" b="1" spc="150" kern="0" dirty="0">
+                <a:solidFill>
+                  <a:srgbClr val="63798F"/>
+                </a:solidFill>
+                <a:latin typeface="Consolas" pitchFamily="34" charset="0"/>
+                <a:ea typeface="Consolas" pitchFamily="34" charset="-122"/>
+                <a:cs typeface="Consolas" pitchFamily="34" charset="-120"/>
+              </a:rPr>
+              <a:t>큰 오차 가중</a:t>
+            </a:r>
+            <a:endParaRPr lang="en-US" sz="788" dirty="0"/>
+          </a:p>
+        </p:txBody>
+      </p:sp>
+      <p:sp>
+        <p:nvSpPr>
+          <p:cNvPr id="61" name="Text 59"/>
+          <p:cNvSpPr txBox="1"/>
+          <p:nvPr/>
+        </p:nvSpPr>
+        <p:spPr>
+          <a:xfrm>
+            <a:off x="7886700" y="4076700"/>
+            <a:ext cx="1238250" cy="240030"/>
+          </a:xfrm>
+          <a:prstGeom prst="rect">
+            <a:avLst/>
+          </a:prstGeom>
+          <a:noFill/>
+          <a:ln/>
+        </p:spPr>
+        <p:txBody>
+          <a:bodyPr wrap="square" lIns="0" tIns="0" rIns="0" bIns="0" rtlCol="0" anchor="t"/>
+          <a:lstStyle/>
+          <a:p>
+            <a:pPr algn="l" indent="0" marL="0">
+              <a:lnSpc>
+                <a:spcPts val="1890"/>
+              </a:lnSpc>
+              <a:buNone/>
+            </a:pPr>
+            <a:r>
+              <a:rPr lang="en-US" sz="1800" b="1" dirty="0">
+                <a:solidFill>
+                  <a:srgbClr val="EFB13C"/>
+                </a:solidFill>
+                <a:latin typeface="Consolas" pitchFamily="34" charset="0"/>
+                <a:ea typeface="Consolas" pitchFamily="34" charset="-122"/>
+                <a:cs typeface="Consolas" pitchFamily="34" charset="-120"/>
+              </a:rPr>
+              <a:t>1.57</a:t>
+            </a:r>
+            <a:endParaRPr lang="en-US" sz="1800" dirty="0"/>
+          </a:p>
+        </p:txBody>
+      </p:sp>
+      <p:sp>
+        <p:nvSpPr>
+          <p:cNvPr id="62" name="Text 60"/>
+          <p:cNvSpPr txBox="1"/>
+          <p:nvPr/>
+        </p:nvSpPr>
+        <p:spPr>
+          <a:xfrm>
+            <a:off x="8496300" y="4152900"/>
+            <a:ext cx="381000" cy="137160"/>
+          </a:xfrm>
+          <a:prstGeom prst="rect">
+            <a:avLst/>
+          </a:prstGeom>
+          <a:noFill/>
+          <a:ln/>
+        </p:spPr>
+        <p:txBody>
+          <a:bodyPr wrap="square" lIns="0" tIns="0" rIns="0" bIns="0" rtlCol="0" anchor="t"/>
+          <a:lstStyle/>
+          <a:p>
+            <a:pPr algn="l" indent="0" marL="0">
+              <a:lnSpc>
+                <a:spcPts val="1080"/>
+              </a:lnSpc>
+              <a:buNone/>
+            </a:pPr>
+            <a:r>
+              <a:rPr lang="en-US" sz="900" dirty="0">
+                <a:solidFill>
+                  <a:srgbClr val="63798F"/>
+                </a:solidFill>
+                <a:latin typeface="Malgun Gothic" pitchFamily="34" charset="0"/>
+                <a:ea typeface="Malgun Gothic" pitchFamily="34" charset="-122"/>
+                <a:cs typeface="Malgun Gothic" pitchFamily="34" charset="-120"/>
+              </a:rPr>
+              <a:t>MW</a:t>
+            </a:r>
+            <a:endParaRPr lang="en-US" sz="900" dirty="0"/>
+          </a:p>
+        </p:txBody>
+      </p:sp>
+      <p:sp>
+        <p:nvSpPr>
+          <p:cNvPr id="63" name="Text 61"/>
+          <p:cNvSpPr txBox="1"/>
+          <p:nvPr/>
+        </p:nvSpPr>
+        <p:spPr>
+          <a:xfrm>
+            <a:off x="9715500" y="3886200"/>
+            <a:ext cx="1714500" cy="125016"/>
+          </a:xfrm>
+          <a:prstGeom prst="rect">
+            <a:avLst/>
+          </a:prstGeom>
+          <a:noFill/>
+          <a:ln/>
+        </p:spPr>
+        <p:txBody>
+          <a:bodyPr wrap="square" lIns="0" tIns="0" rIns="0" bIns="0" rtlCol="0" anchor="t"/>
+          <a:lstStyle/>
+          <a:p>
+            <a:pPr algn="l" indent="0" marL="0">
+              <a:lnSpc>
+                <a:spcPts val="984"/>
+              </a:lnSpc>
+              <a:buNone/>
+            </a:pPr>
+            <a:r>
+              <a:rPr lang="en-US" sz="788" b="1" spc="150" kern="0" dirty="0">
+                <a:solidFill>
+                  <a:srgbClr val="63798F"/>
+                </a:solidFill>
+                <a:latin typeface="Consolas" pitchFamily="34" charset="0"/>
+                <a:ea typeface="Consolas" pitchFamily="34" charset="-122"/>
+                <a:cs typeface="Consolas" pitchFamily="34" charset="-120"/>
+              </a:rPr>
+              <a:t>종전 대비 개선율</a:t>
+            </a:r>
+            <a:endParaRPr lang="en-US" sz="788" dirty="0"/>
+          </a:p>
+        </p:txBody>
+      </p:sp>
+      <p:sp>
+        <p:nvSpPr>
+          <p:cNvPr id="64" name="Text 62"/>
+          <p:cNvSpPr txBox="1"/>
+          <p:nvPr/>
+        </p:nvSpPr>
+        <p:spPr>
+          <a:xfrm>
+            <a:off x="9715500" y="4076700"/>
+            <a:ext cx="1238250" cy="240030"/>
+          </a:xfrm>
+          <a:prstGeom prst="rect">
+            <a:avLst/>
+          </a:prstGeom>
+          <a:noFill/>
+          <a:ln/>
+        </p:spPr>
+        <p:txBody>
+          <a:bodyPr wrap="square" lIns="0" tIns="0" rIns="0" bIns="0" rtlCol="0" anchor="t"/>
+          <a:lstStyle/>
+          <a:p>
+            <a:pPr algn="l" indent="0" marL="0">
+              <a:lnSpc>
+                <a:spcPts val="1890"/>
+              </a:lnSpc>
+              <a:buNone/>
+            </a:pPr>
+            <a:r>
+              <a:rPr lang="en-US" sz="1800" b="1" dirty="0">
+                <a:solidFill>
+                  <a:srgbClr val="EFB13C"/>
+                </a:solidFill>
+                <a:latin typeface="Consolas" pitchFamily="34" charset="0"/>
+                <a:ea typeface="Consolas" pitchFamily="34" charset="-122"/>
+                <a:cs typeface="Consolas" pitchFamily="34" charset="-120"/>
+              </a:rPr>
+              <a:t>91.3</a:t>
+            </a:r>
+            <a:endParaRPr lang="en-US" sz="1800" dirty="0"/>
+          </a:p>
+        </p:txBody>
+      </p:sp>
+      <p:sp>
+        <p:nvSpPr>
+          <p:cNvPr id="65" name="Text 63"/>
+          <p:cNvSpPr txBox="1"/>
+          <p:nvPr/>
+        </p:nvSpPr>
+        <p:spPr>
+          <a:xfrm>
+            <a:off x="10325100" y="4152900"/>
+            <a:ext cx="381000" cy="137160"/>
+          </a:xfrm>
+          <a:prstGeom prst="rect">
+            <a:avLst/>
+          </a:prstGeom>
+          <a:noFill/>
+          <a:ln/>
+        </p:spPr>
+        <p:txBody>
+          <a:bodyPr wrap="square" lIns="0" tIns="0" rIns="0" bIns="0" rtlCol="0" anchor="t"/>
+          <a:lstStyle/>
+          <a:p>
+            <a:pPr algn="l" indent="0" marL="0">
+              <a:lnSpc>
+                <a:spcPts val="1080"/>
+              </a:lnSpc>
+              <a:buNone/>
+            </a:pPr>
+            <a:r>
+              <a:rPr lang="en-US" sz="900" dirty="0">
+                <a:solidFill>
+                  <a:srgbClr val="63798F"/>
+                </a:solidFill>
+                <a:latin typeface="Malgun Gothic" pitchFamily="34" charset="0"/>
+                <a:ea typeface="Malgun Gothic" pitchFamily="34" charset="-122"/>
+                <a:cs typeface="Malgun Gothic" pitchFamily="34" charset="-120"/>
+              </a:rPr>
+              <a:t>%</a:t>
+            </a:r>
+            <a:endParaRPr lang="en-US" sz="900" dirty="0"/>
+          </a:p>
+        </p:txBody>
+      </p:sp>
+      <p:sp>
+        <p:nvSpPr>
+          <p:cNvPr id="66" name="Text 64"/>
+          <p:cNvSpPr txBox="1"/>
+          <p:nvPr/>
+        </p:nvSpPr>
+        <p:spPr>
+          <a:xfrm>
+            <a:off x="7734300" y="4705350"/>
+            <a:ext cx="3771900" cy="568071"/>
+          </a:xfrm>
+          <a:prstGeom prst="rect">
+            <a:avLst/>
+          </a:prstGeom>
+          <a:noFill/>
+          <a:ln/>
+        </p:spPr>
+        <p:txBody>
+          <a:bodyPr wrap="square" lIns="0" tIns="0" rIns="0" bIns="0" rtlCol="0" anchor="t"/>
+          <a:lstStyle/>
+          <a:p>
+            <a:pPr algn="l" indent="0" marL="0">
+              <a:lnSpc>
+                <a:spcPts val="2237"/>
+              </a:lnSpc>
+              <a:buNone/>
+            </a:pPr>
+            <a:r>
+              <a:rPr lang="en-US" sz="1575" b="1" dirty="0">
+                <a:solidFill>
+                  <a:srgbClr val="EAE7E0"/>
+                </a:solidFill>
+                <a:latin typeface="Malgun Gothic" pitchFamily="34" charset="0"/>
+                <a:ea typeface="Malgun Gothic" pitchFamily="34" charset="-122"/>
+                <a:cs typeface="Malgun Gothic" pitchFamily="34" charset="-120"/>
+              </a:rPr>
+              <a:t>학습에 쓰지 않은 회차에서도 </a:t>
+            </a:r>
+            <a:pPr algn="l" indent="0" marL="0">
+              <a:lnSpc>
+                <a:spcPts val="2237"/>
+              </a:lnSpc>
+              <a:buNone/>
+            </a:pPr>
+            <a:r>
+              <a:rPr lang="en-US" sz="1575" b="1" dirty="0">
+                <a:solidFill>
+                  <a:srgbClr val="EFB13C"/>
+                </a:solidFill>
+                <a:latin typeface="Malgun Gothic" pitchFamily="34" charset="0"/>
+                <a:ea typeface="Malgun Gothic" pitchFamily="34" charset="-122"/>
+                <a:cs typeface="Malgun Gothic" pitchFamily="34" charset="-120"/>
+              </a:rPr>
+              <a:t>같은 수준</a:t>
+            </a:r>
+            <a:endParaRPr lang="en-US" sz="1575" dirty="0"/>
+          </a:p>
+        </p:txBody>
+      </p:sp>
+      <p:sp>
+        <p:nvSpPr>
+          <p:cNvPr id="67" name="Text 65"/>
+          <p:cNvSpPr txBox="1"/>
+          <p:nvPr/>
+        </p:nvSpPr>
+        <p:spPr>
+          <a:xfrm>
+            <a:off x="7734300" y="5353050"/>
+            <a:ext cx="3771900" cy="720090"/>
+          </a:xfrm>
+          <a:prstGeom prst="rect">
+            <a:avLst/>
+          </a:prstGeom>
+          <a:noFill/>
+          <a:ln/>
+        </p:spPr>
+        <p:txBody>
+          <a:bodyPr wrap="square" lIns="0" tIns="0" rIns="0" bIns="0" rtlCol="0" anchor="t"/>
+          <a:lstStyle/>
+          <a:p>
+            <a:pPr algn="l" indent="0" marL="0">
+              <a:lnSpc>
+                <a:spcPts val="1890"/>
+              </a:lnSpc>
+              <a:buNone/>
+            </a:pPr>
+            <a:r>
+              <a:rPr lang="en-US" sz="1125" dirty="0">
+                <a:solidFill>
+                  <a:srgbClr val="BCC9D6"/>
+                </a:solidFill>
+                <a:latin typeface="Malgun Gothic" pitchFamily="34" charset="0"/>
+                <a:ea typeface="Malgun Gothic" pitchFamily="34" charset="-122"/>
+                <a:cs typeface="Malgun Gothic" pitchFamily="34" charset="-120"/>
+              </a:rPr>
+              <a:t>시운전 4회차는 학습에 넣지 않고 예측만 했습니다. 누적 36회차 채점과 비슷하게 나왔습니다.</a:t>
+            </a:r>
+            <a:endParaRPr lang="en-US" sz="1125" dirty="0"/>
+          </a:p>
+        </p:txBody>
+      </p:sp>
+      <p:sp>
+        <p:nvSpPr>
+          <p:cNvPr id="68" name="Shape 66"/>
+          <p:cNvSpPr/>
+          <p:nvPr/>
+        </p:nvSpPr>
+        <p:spPr>
+          <a:xfrm>
+            <a:off x="685800" y="6057900"/>
+            <a:ext cx="10820400" cy="0"/>
+          </a:xfrm>
+          <a:prstGeom prst="line">
+            <a:avLst/>
+          </a:prstGeom>
+          <a:noFill/>
+          <a:ln w="12700">
+            <a:solidFill>
+              <a:srgbClr val="22354A"/>
+            </a:solidFill>
+            <a:prstDash val="solid"/>
+          </a:ln>
+        </p:spPr>
+      </p:sp>
+      <p:sp>
+        <p:nvSpPr>
+          <p:cNvPr id="69" name="Text 67"/>
+          <p:cNvSpPr txBox="1"/>
+          <p:nvPr/>
+        </p:nvSpPr>
+        <p:spPr>
+          <a:xfrm>
+            <a:off x="685800" y="6267450"/>
+            <a:ext cx="476250" cy="120015"/>
+          </a:xfrm>
+          <a:prstGeom prst="rect">
+            <a:avLst/>
+          </a:prstGeom>
+          <a:noFill/>
+          <a:ln/>
+        </p:spPr>
+        <p:txBody>
+          <a:bodyPr wrap="square" lIns="0" tIns="0" rIns="0" bIns="0" rtlCol="0" anchor="t"/>
+          <a:lstStyle/>
+          <a:p>
+            <a:pPr algn="l" indent="0" marL="0">
+              <a:lnSpc>
+                <a:spcPts val="945"/>
+              </a:lnSpc>
+              <a:buNone/>
+            </a:pPr>
+            <a:r>
+              <a:rPr lang="en-US" sz="788" b="1" spc="180" kern="0" dirty="0">
+                <a:solidFill>
+                  <a:srgbClr val="EFB13C"/>
+                </a:solidFill>
+                <a:latin typeface="Consolas" pitchFamily="34" charset="0"/>
+                <a:ea typeface="Consolas" pitchFamily="34" charset="-122"/>
+                <a:cs typeface="Consolas" pitchFamily="34" charset="-120"/>
+              </a:rPr>
+              <a:t>결론</a:t>
+            </a:r>
+            <a:endParaRPr lang="en-US" sz="788" dirty="0"/>
+          </a:p>
+        </p:txBody>
+      </p:sp>
+      <p:sp>
+        <p:nvSpPr>
+          <p:cNvPr id="70" name="Text 68"/>
+          <p:cNvSpPr txBox="1"/>
+          <p:nvPr/>
+        </p:nvSpPr>
+        <p:spPr>
+          <a:xfrm>
+            <a:off x="1219200" y="6229350"/>
+            <a:ext cx="10287000" cy="220027"/>
+          </a:xfrm>
+          <a:prstGeom prst="rect">
+            <a:avLst/>
+          </a:prstGeom>
+          <a:noFill/>
+          <a:ln/>
+        </p:spPr>
+        <p:txBody>
+          <a:bodyPr wrap="square" lIns="0" tIns="0" rIns="0" bIns="0" rtlCol="0" anchor="t"/>
+          <a:lstStyle/>
+          <a:p>
+            <a:pPr algn="l" indent="0" marL="0">
+              <a:lnSpc>
+                <a:spcPts val="1733"/>
+              </a:lnSpc>
+              <a:buNone/>
+            </a:pPr>
+            <a:r>
+              <a:rPr lang="en-US" sz="1238" dirty="0">
+                <a:solidFill>
+                  <a:srgbClr val="BCC9D6"/>
+                </a:solidFill>
+                <a:latin typeface="Malgun Gothic" pitchFamily="34" charset="0"/>
+                <a:ea typeface="Malgun Gothic" pitchFamily="34" charset="-122"/>
+                <a:cs typeface="Malgun Gothic" pitchFamily="34" charset="-120"/>
+              </a:rPr>
+              <a:t>한 지표를 좋게 만들려고 다른 지표를 희생하지 않았습니다 — </a:t>
+            </a:r>
+            <a:pPr algn="l" indent="0" marL="0">
+              <a:lnSpc>
+                <a:spcPts val="1733"/>
+              </a:lnSpc>
+              <a:buNone/>
+            </a:pPr>
+            <a:r>
+              <a:rPr lang="en-US" sz="1238" b="1" dirty="0">
+                <a:solidFill>
+                  <a:srgbClr val="EFB13C"/>
+                </a:solidFill>
+                <a:latin typeface="Malgun Gothic" pitchFamily="34" charset="0"/>
+                <a:ea typeface="Malgun Gothic" pitchFamily="34" charset="-122"/>
+                <a:cs typeface="Malgun Gothic" pitchFamily="34" charset="-120"/>
+              </a:rPr>
+              <a:t>전부 같은 방향</a:t>
+            </a:r>
+            <a:pPr algn="l" indent="0" marL="0">
+              <a:lnSpc>
+                <a:spcPts val="1733"/>
+              </a:lnSpc>
+              <a:buNone/>
+            </a:pPr>
+            <a:r>
+              <a:rPr lang="en-US" sz="1238" dirty="0">
+                <a:solidFill>
+                  <a:srgbClr val="BCC9D6"/>
+                </a:solidFill>
+                <a:latin typeface="Malgun Gothic" pitchFamily="34" charset="0"/>
+                <a:ea typeface="Malgun Gothic" pitchFamily="34" charset="-122"/>
+                <a:cs typeface="Malgun Gothic" pitchFamily="34" charset="-120"/>
+              </a:rPr>
+              <a:t>으로 움직였습니다.</a:t>
+            </a:r>
+            <a:endParaRPr lang="en-US" sz="1238" dirty="0"/>
+          </a:p>
+        </p:txBody>
       </p:sp>
     </p:spTree>
   </p:cSld>
@@ -8905,26 +14916,26 @@
         <p:spPr>
           <a:xfrm>
             <a:off x="685800" y="914400"/>
-            <a:ext cx="10287000" cy="360045"/>
-          </a:xfrm>
-          <a:prstGeom prst="rect">
-            <a:avLst/>
-          </a:prstGeom>
-          <a:noFill/>
-          <a:ln/>
-        </p:spPr>
-        <p:txBody>
-          <a:bodyPr wrap="square" lIns="0" tIns="0" rIns="0" bIns="0" rtlCol="0" anchor="t"/>
-          <a:lstStyle/>
-          <a:p>
-            <a:pPr algn="l" indent="0" marL="0">
-              <a:lnSpc>
-                <a:spcPts val="2835"/>
-              </a:lnSpc>
-              <a:buNone/>
-            </a:pPr>
-            <a:r>
-              <a:rPr lang="en-US" sz="2250" b="1" dirty="0">
+            <a:ext cx="10287000" cy="888111"/>
+          </a:xfrm>
+          <a:prstGeom prst="rect">
+            <a:avLst/>
+          </a:prstGeom>
+          <a:noFill/>
+          <a:ln/>
+        </p:spPr>
+        <p:txBody>
+          <a:bodyPr wrap="square" lIns="0" tIns="0" rIns="0" bIns="0" rtlCol="0" anchor="t"/>
+          <a:lstStyle/>
+          <a:p>
+            <a:pPr algn="l" indent="0" marL="0">
+              <a:lnSpc>
+                <a:spcPts val="3496"/>
+              </a:lnSpc>
+              <a:buNone/>
+            </a:pPr>
+            <a:r>
+              <a:rPr lang="en-US" sz="2775" b="1" dirty="0">
                 <a:solidFill>
                   <a:srgbClr val="EAE7E0"/>
                 </a:solidFill>
@@ -8932,78 +14943,144 @@
                 <a:ea typeface="Malgun Gothic" pitchFamily="34" charset="-122"/>
                 <a:cs typeface="Malgun Gothic" pitchFamily="34" charset="-120"/>
               </a:rPr>
-              <a:t>숫자보다 오래 남는 것은 설명할 수 있게 됐다는 점입니다</a:t>
-            </a:r>
-            <a:endParaRPr lang="en-US" sz="2250" dirty="0"/>
-          </a:p>
-        </p:txBody>
-      </p:sp>
-      <p:sp>
-        <p:nvSpPr>
-          <p:cNvPr id="12" name="Shape 10"/>
-          <p:cNvSpPr/>
-          <p:nvPr/>
-        </p:nvSpPr>
-        <p:spPr>
-          <a:xfrm>
-            <a:off x="685800" y="2857500"/>
-            <a:ext cx="10820400" cy="2095500"/>
+              <a:t>숫자보다 오래 남는 것은,</a:t>
+            </a:r>
+            <a:endParaRPr lang="en-US" sz="2775" dirty="0"/>
+          </a:p>
+          <a:p>
+            <a:pPr algn="l" indent="0" marL="0">
+              <a:lnSpc>
+                <a:spcPts val="3496"/>
+              </a:lnSpc>
+              <a:buNone/>
+            </a:pPr>
+            <a:r>
+              <a:rPr lang="en-US" sz="2775" b="1" dirty="0">
+                <a:solidFill>
+                  <a:srgbClr val="EFB13C"/>
+                </a:solidFill>
+                <a:latin typeface="Malgun Gothic" pitchFamily="34" charset="0"/>
+                <a:ea typeface="Malgun Gothic" pitchFamily="34" charset="-122"/>
+                <a:cs typeface="Malgun Gothic" pitchFamily="34" charset="-120"/>
+              </a:rPr>
+              <a:t>설명할 수 있게 됐다</a:t>
+            </a:r>
+            <a:pPr algn="l" indent="0" marL="0">
+              <a:lnSpc>
+                <a:spcPts val="3496"/>
+              </a:lnSpc>
+              <a:buNone/>
+            </a:pPr>
+            <a:r>
+              <a:rPr lang="en-US" sz="2775" b="1" dirty="0">
+                <a:solidFill>
+                  <a:srgbClr val="EAE7E0"/>
+                </a:solidFill>
+                <a:latin typeface="Malgun Gothic" pitchFamily="34" charset="0"/>
+                <a:ea typeface="Malgun Gothic" pitchFamily="34" charset="-122"/>
+                <a:cs typeface="Malgun Gothic" pitchFamily="34" charset="-120"/>
+              </a:rPr>
+              <a:t>는 점입니다</a:t>
+            </a:r>
+            <a:endParaRPr lang="en-US" sz="2775" dirty="0"/>
+          </a:p>
+        </p:txBody>
+      </p:sp>
+      <p:sp>
+        <p:nvSpPr>
+          <p:cNvPr id="12" name="Text 10"/>
+          <p:cNvSpPr txBox="1"/>
+          <p:nvPr/>
+        </p:nvSpPr>
+        <p:spPr>
+          <a:xfrm>
+            <a:off x="685800" y="2000250"/>
+            <a:ext cx="10287000" cy="569214"/>
+          </a:xfrm>
+          <a:prstGeom prst="rect">
+            <a:avLst/>
+          </a:prstGeom>
+          <a:noFill/>
+          <a:ln/>
+        </p:spPr>
+        <p:txBody>
+          <a:bodyPr wrap="square" lIns="0" tIns="0" rIns="0" bIns="0" rtlCol="0" anchor="t"/>
+          <a:lstStyle/>
+          <a:p>
+            <a:pPr algn="l" indent="0" marL="0">
+              <a:lnSpc>
+                <a:spcPts val="2241"/>
+              </a:lnSpc>
+              <a:buNone/>
+            </a:pPr>
+            <a:r>
+              <a:rPr lang="en-US" sz="1350" dirty="0">
+                <a:solidFill>
+                  <a:srgbClr val="BCC9D6"/>
+                </a:solidFill>
+                <a:latin typeface="Malgun Gothic" pitchFamily="34" charset="0"/>
+                <a:ea typeface="Malgun Gothic" pitchFamily="34" charset="-122"/>
+                <a:cs typeface="Malgun Gothic" pitchFamily="34" charset="-120"/>
+              </a:rPr>
+              <a:t>MW 개선치는 회차마다 달라집니다. 그러나 </a:t>
+            </a:r>
+            <a:pPr algn="l" indent="0" marL="0">
+              <a:lnSpc>
+                <a:spcPts val="2241"/>
+              </a:lnSpc>
+              <a:buNone/>
+            </a:pPr>
+            <a:r>
+              <a:rPr lang="en-US" sz="1350" b="1" dirty="0">
+                <a:solidFill>
+                  <a:srgbClr val="EAE7E0"/>
+                </a:solidFill>
+                <a:latin typeface="Malgun Gothic" pitchFamily="34" charset="0"/>
+                <a:ea typeface="Malgun Gothic" pitchFamily="34" charset="-122"/>
+                <a:cs typeface="Malgun Gothic" pitchFamily="34" charset="-120"/>
+              </a:rPr>
+              <a:t>왜 그 숫자인지 말할 수 있게 된 것</a:t>
+            </a:r>
+            <a:pPr algn="l" indent="0" marL="0">
+              <a:lnSpc>
+                <a:spcPts val="2241"/>
+              </a:lnSpc>
+              <a:buNone/>
+            </a:pPr>
+            <a:r>
+              <a:rPr lang="en-US" sz="1350" dirty="0">
+                <a:solidFill>
+                  <a:srgbClr val="BCC9D6"/>
+                </a:solidFill>
+                <a:latin typeface="Malgun Gothic" pitchFamily="34" charset="0"/>
+                <a:ea typeface="Malgun Gothic" pitchFamily="34" charset="-122"/>
+                <a:cs typeface="Malgun Gothic" pitchFamily="34" charset="-120"/>
+              </a:rPr>
+              <a:t> 은 되돌아가지 않습니다.</a:t>
+            </a:r>
+            <a:endParaRPr lang="en-US" sz="1350" dirty="0"/>
+          </a:p>
+        </p:txBody>
+      </p:sp>
+      <p:sp>
+        <p:nvSpPr>
+          <p:cNvPr id="13" name="Shape 11"/>
+          <p:cNvSpPr/>
+          <p:nvPr/>
+        </p:nvSpPr>
+        <p:spPr>
+          <a:xfrm>
+            <a:off x="685800" y="2743200"/>
+            <a:ext cx="5295900" cy="19050"/>
           </a:xfrm>
           <a:prstGeom prst="rect">
             <a:avLst/>
           </a:prstGeom>
           <a:solidFill>
-            <a:srgbClr val="0A1320"/>
+            <a:srgbClr val="EFB13C"/>
           </a:solidFill>
-          <a:ln w="19050">
-            <a:solidFill>
-              <a:srgbClr val="22354A"/>
-            </a:solidFill>
-            <a:prstDash val="dash"/>
-          </a:ln>
-        </p:spPr>
-      </p:sp>
-      <p:sp>
-        <p:nvSpPr>
-          <p:cNvPr id="13" name="Text 11"/>
-          <p:cNvSpPr txBox="1"/>
-          <p:nvPr/>
-        </p:nvSpPr>
-        <p:spPr>
-          <a:xfrm>
-            <a:off x="685800" y="3695700"/>
-            <a:ext cx="10820400" cy="226695"/>
-          </a:xfrm>
-          <a:prstGeom prst="rect">
-            <a:avLst/>
-          </a:prstGeom>
-          <a:noFill/>
-          <a:ln/>
-        </p:spPr>
-        <p:txBody>
-          <a:bodyPr wrap="square" lIns="0" tIns="0" rIns="0" bIns="0" rtlCol="0" anchor="t"/>
-          <a:lstStyle/>
-          <a:p>
-            <a:pPr algn="ctr" indent="0" marL="0">
-              <a:lnSpc>
-                <a:spcPts val="1785"/>
-              </a:lnSpc>
-              <a:buNone/>
-            </a:pPr>
-            <a:r>
-              <a:rPr lang="en-US" sz="1275" dirty="0">
-                <a:solidFill>
-                  <a:srgbClr val="63798F"/>
-                </a:solidFill>
-                <a:latin typeface="Malgun Gothic" pitchFamily="34" charset="0"/>
-                <a:ea typeface="Malgun Gothic" pitchFamily="34" charset="-122"/>
-                <a:cs typeface="Malgun Gothic" pitchFamily="34" charset="-120"/>
-              </a:rPr>
-              <a:t>작성 예정 — 이 장은 아직 만들지 않았습니다.</a:t>
-            </a:r>
-            <a:endParaRPr lang="en-US" sz="1275" dirty="0"/>
-          </a:p>
-        </p:txBody>
+          <a:ln/>
+        </p:spPr>
       </p:sp>
       <p:sp>
         <p:nvSpPr>
@@ -9013,8 +15090,8 @@
         </p:nvSpPr>
         <p:spPr>
           <a:xfrm>
-            <a:off x="685800" y="4038600"/>
-            <a:ext cx="10820400" cy="125016"/>
+            <a:off x="685800" y="2876550"/>
+            <a:ext cx="5295900" cy="125016"/>
           </a:xfrm>
           <a:prstGeom prst="rect">
             <a:avLst/>
@@ -9035,13 +15112,13 @@
             <a:r>
               <a:rPr lang="en-US" sz="788" b="1" spc="150" kern="0" dirty="0">
                 <a:solidFill>
-                  <a:srgbClr val="7E2333"/>
+                  <a:srgbClr val="EFB13C"/>
                 </a:solidFill>
                 <a:latin typeface="Consolas" pitchFamily="34" charset="0"/>
                 <a:ea typeface="Consolas" pitchFamily="34" charset="-122"/>
                 <a:cs typeface="Consolas" pitchFamily="34" charset="-120"/>
               </a:rPr>
-              <a:t>SLIDE 14  ·  TODO</a:t>
+              <a:t>재현성</a:t>
             </a:r>
             <a:endParaRPr lang="en-US" sz="788" dirty="0"/>
           </a:p>
@@ -9049,7 +15126,614 @@
       </p:sp>
       <p:sp>
         <p:nvSpPr>
-          <p:cNvPr id="15" name="Shape 13"/>
+          <p:cNvPr id="15" name="Text 13"/>
+          <p:cNvSpPr txBox="1"/>
+          <p:nvPr/>
+        </p:nvSpPr>
+        <p:spPr>
+          <a:xfrm>
+            <a:off x="685800" y="3086100"/>
+            <a:ext cx="5295900" cy="284036"/>
+          </a:xfrm>
+          <a:prstGeom prst="rect">
+            <a:avLst/>
+          </a:prstGeom>
+          <a:noFill/>
+          <a:ln/>
+        </p:spPr>
+        <p:txBody>
+          <a:bodyPr wrap="square" lIns="0" tIns="0" rIns="0" bIns="0" rtlCol="0" anchor="t"/>
+          <a:lstStyle/>
+          <a:p>
+            <a:pPr algn="l" indent="0" marL="0">
+              <a:lnSpc>
+                <a:spcPts val="2237"/>
+              </a:lnSpc>
+              <a:buNone/>
+            </a:pPr>
+            <a:r>
+              <a:rPr lang="en-US" sz="1575" b="1" dirty="0">
+                <a:solidFill>
+                  <a:srgbClr val="EAE7E0"/>
+                </a:solidFill>
+                <a:latin typeface="Malgun Gothic" pitchFamily="34" charset="0"/>
+                <a:ea typeface="Malgun Gothic" pitchFamily="34" charset="-122"/>
+                <a:cs typeface="Malgun Gothic" pitchFamily="34" charset="-120"/>
+              </a:rPr>
+              <a:t>다시 해도 </a:t>
+            </a:r>
+            <a:pPr algn="l" indent="0" marL="0">
+              <a:lnSpc>
+                <a:spcPts val="2237"/>
+              </a:lnSpc>
+              <a:buNone/>
+            </a:pPr>
+            <a:r>
+              <a:rPr lang="en-US" sz="1575" b="1" dirty="0">
+                <a:solidFill>
+                  <a:srgbClr val="EFB13C"/>
+                </a:solidFill>
+                <a:latin typeface="Malgun Gothic" pitchFamily="34" charset="0"/>
+                <a:ea typeface="Malgun Gothic" pitchFamily="34" charset="-122"/>
+                <a:cs typeface="Malgun Gothic" pitchFamily="34" charset="-120"/>
+              </a:rPr>
+              <a:t>같은 답</a:t>
+            </a:r>
+            <a:pPr algn="l" indent="0" marL="0">
+              <a:lnSpc>
+                <a:spcPts val="2237"/>
+              </a:lnSpc>
+              <a:buNone/>
+            </a:pPr>
+            <a:r>
+              <a:rPr lang="en-US" sz="1575" b="1" dirty="0">
+                <a:solidFill>
+                  <a:srgbClr val="EAE7E0"/>
+                </a:solidFill>
+                <a:latin typeface="Malgun Gothic" pitchFamily="34" charset="0"/>
+                <a:ea typeface="Malgun Gothic" pitchFamily="34" charset="-122"/>
+                <a:cs typeface="Malgun Gothic" pitchFamily="34" charset="-120"/>
+              </a:rPr>
+              <a:t>이 나옵니다</a:t>
+            </a:r>
+            <a:endParaRPr lang="en-US" sz="1575" dirty="0"/>
+          </a:p>
+        </p:txBody>
+      </p:sp>
+      <p:sp>
+        <p:nvSpPr>
+          <p:cNvPr id="16" name="Text 14"/>
+          <p:cNvSpPr txBox="1"/>
+          <p:nvPr/>
+        </p:nvSpPr>
+        <p:spPr>
+          <a:xfrm>
+            <a:off x="685800" y="3486150"/>
+            <a:ext cx="5295900" cy="480060"/>
+          </a:xfrm>
+          <a:prstGeom prst="rect">
+            <a:avLst/>
+          </a:prstGeom>
+          <a:noFill/>
+          <a:ln/>
+        </p:spPr>
+        <p:txBody>
+          <a:bodyPr wrap="square" lIns="0" tIns="0" rIns="0" bIns="0" rtlCol="0" anchor="t"/>
+          <a:lstStyle/>
+          <a:p>
+            <a:pPr algn="l" indent="0" marL="0">
+              <a:lnSpc>
+                <a:spcPts val="1890"/>
+              </a:lnSpc>
+              <a:buNone/>
+            </a:pPr>
+            <a:r>
+              <a:rPr lang="en-US" sz="1125" dirty="0">
+                <a:solidFill>
+                  <a:srgbClr val="BCC9D6"/>
+                </a:solidFill>
+                <a:latin typeface="Malgun Gothic" pitchFamily="34" charset="0"/>
+                <a:ea typeface="Malgun Gothic" pitchFamily="34" charset="-122"/>
+                <a:cs typeface="Malgun Gothic" pitchFamily="34" charset="-120"/>
+              </a:rPr>
+              <a:t>같은 데이터와 같은 코드면 누가 돌려도 같은 값입니다. 사람의 판단이 끼어들 자리가 없습니다.</a:t>
+            </a:r>
+            <a:endParaRPr lang="en-US" sz="1125" dirty="0"/>
+          </a:p>
+        </p:txBody>
+      </p:sp>
+      <p:sp>
+        <p:nvSpPr>
+          <p:cNvPr id="17" name="Shape 15"/>
+          <p:cNvSpPr/>
+          <p:nvPr/>
+        </p:nvSpPr>
+        <p:spPr>
+          <a:xfrm>
+            <a:off x="6210300" y="2743200"/>
+            <a:ext cx="5295900" cy="19050"/>
+          </a:xfrm>
+          <a:prstGeom prst="rect">
+            <a:avLst/>
+          </a:prstGeom>
+          <a:solidFill>
+            <a:srgbClr val="EFB13C"/>
+          </a:solidFill>
+          <a:ln/>
+        </p:spPr>
+      </p:sp>
+      <p:sp>
+        <p:nvSpPr>
+          <p:cNvPr id="18" name="Text 16"/>
+          <p:cNvSpPr txBox="1"/>
+          <p:nvPr/>
+        </p:nvSpPr>
+        <p:spPr>
+          <a:xfrm>
+            <a:off x="6210300" y="2876550"/>
+            <a:ext cx="5295900" cy="125016"/>
+          </a:xfrm>
+          <a:prstGeom prst="rect">
+            <a:avLst/>
+          </a:prstGeom>
+          <a:noFill/>
+          <a:ln/>
+        </p:spPr>
+        <p:txBody>
+          <a:bodyPr wrap="square" lIns="0" tIns="0" rIns="0" bIns="0" rtlCol="0" anchor="t"/>
+          <a:lstStyle/>
+          <a:p>
+            <a:pPr algn="l" indent="0" marL="0">
+              <a:lnSpc>
+                <a:spcPts val="984"/>
+              </a:lnSpc>
+              <a:buNone/>
+            </a:pPr>
+            <a:r>
+              <a:rPr lang="en-US" sz="788" b="1" spc="150" kern="0" dirty="0">
+                <a:solidFill>
+                  <a:srgbClr val="EFB13C"/>
+                </a:solidFill>
+                <a:latin typeface="Consolas" pitchFamily="34" charset="0"/>
+                <a:ea typeface="Consolas" pitchFamily="34" charset="-122"/>
+                <a:cs typeface="Consolas" pitchFamily="34" charset="-120"/>
+              </a:rPr>
+              <a:t>추적성</a:t>
+            </a:r>
+            <a:endParaRPr lang="en-US" sz="788" dirty="0"/>
+          </a:p>
+        </p:txBody>
+      </p:sp>
+      <p:sp>
+        <p:nvSpPr>
+          <p:cNvPr id="19" name="Text 17"/>
+          <p:cNvSpPr txBox="1"/>
+          <p:nvPr/>
+        </p:nvSpPr>
+        <p:spPr>
+          <a:xfrm>
+            <a:off x="6210300" y="3086100"/>
+            <a:ext cx="5295900" cy="284036"/>
+          </a:xfrm>
+          <a:prstGeom prst="rect">
+            <a:avLst/>
+          </a:prstGeom>
+          <a:noFill/>
+          <a:ln/>
+        </p:spPr>
+        <p:txBody>
+          <a:bodyPr wrap="square" lIns="0" tIns="0" rIns="0" bIns="0" rtlCol="0" anchor="t"/>
+          <a:lstStyle/>
+          <a:p>
+            <a:pPr algn="l" indent="0" marL="0">
+              <a:lnSpc>
+                <a:spcPts val="2237"/>
+              </a:lnSpc>
+              <a:buNone/>
+            </a:pPr>
+            <a:r>
+              <a:rPr lang="en-US" sz="1575" b="1" dirty="0">
+                <a:solidFill>
+                  <a:srgbClr val="EFB13C"/>
+                </a:solidFill>
+                <a:latin typeface="Malgun Gothic" pitchFamily="34" charset="0"/>
+                <a:ea typeface="Malgun Gothic" pitchFamily="34" charset="-122"/>
+                <a:cs typeface="Malgun Gothic" pitchFamily="34" charset="-120"/>
+              </a:rPr>
+              <a:t>왜 그 값인지</a:t>
+            </a:r>
+            <a:pPr algn="l" indent="0" marL="0">
+              <a:lnSpc>
+                <a:spcPts val="2237"/>
+              </a:lnSpc>
+              <a:buNone/>
+            </a:pPr>
+            <a:r>
+              <a:rPr lang="en-US" sz="1575" b="1" dirty="0">
+                <a:solidFill>
+                  <a:srgbClr val="EAE7E0"/>
+                </a:solidFill>
+                <a:latin typeface="Malgun Gothic" pitchFamily="34" charset="0"/>
+                <a:ea typeface="Malgun Gothic" pitchFamily="34" charset="-122"/>
+                <a:cs typeface="Malgun Gothic" pitchFamily="34" charset="-120"/>
+              </a:rPr>
+              <a:t> 되짚을 수 있습니다</a:t>
+            </a:r>
+            <a:endParaRPr lang="en-US" sz="1575" dirty="0"/>
+          </a:p>
+        </p:txBody>
+      </p:sp>
+      <p:sp>
+        <p:nvSpPr>
+          <p:cNvPr id="20" name="Text 18"/>
+          <p:cNvSpPr txBox="1"/>
+          <p:nvPr/>
+        </p:nvSpPr>
+        <p:spPr>
+          <a:xfrm>
+            <a:off x="6210300" y="3486150"/>
+            <a:ext cx="5295900" cy="480060"/>
+          </a:xfrm>
+          <a:prstGeom prst="rect">
+            <a:avLst/>
+          </a:prstGeom>
+          <a:noFill/>
+          <a:ln/>
+        </p:spPr>
+        <p:txBody>
+          <a:bodyPr wrap="square" lIns="0" tIns="0" rIns="0" bIns="0" rtlCol="0" anchor="t"/>
+          <a:lstStyle/>
+          <a:p>
+            <a:pPr algn="l" indent="0" marL="0">
+              <a:lnSpc>
+                <a:spcPts val="1890"/>
+              </a:lnSpc>
+              <a:buNone/>
+            </a:pPr>
+            <a:r>
+              <a:rPr lang="en-US" sz="1125" dirty="0">
+                <a:solidFill>
+                  <a:srgbClr val="BCC9D6"/>
+                </a:solidFill>
+                <a:latin typeface="Malgun Gothic" pitchFamily="34" charset="0"/>
+                <a:ea typeface="Malgun Gothic" pitchFamily="34" charset="-122"/>
+                <a:cs typeface="Malgun Gothic" pitchFamily="34" charset="-120"/>
+              </a:rPr>
+              <a:t>회차마다 취득 시각·검증 통과 여부·선택된 방식이 남습니다. 감사도 설명도 이 기록으로 합니다.</a:t>
+            </a:r>
+            <a:endParaRPr lang="en-US" sz="1125" dirty="0"/>
+          </a:p>
+        </p:txBody>
+      </p:sp>
+      <p:sp>
+        <p:nvSpPr>
+          <p:cNvPr id="21" name="Shape 19"/>
+          <p:cNvSpPr/>
+          <p:nvPr/>
+        </p:nvSpPr>
+        <p:spPr>
+          <a:xfrm>
+            <a:off x="685800" y="4381500"/>
+            <a:ext cx="5295900" cy="19050"/>
+          </a:xfrm>
+          <a:prstGeom prst="rect">
+            <a:avLst/>
+          </a:prstGeom>
+          <a:solidFill>
+            <a:srgbClr val="EFB13C"/>
+          </a:solidFill>
+          <a:ln/>
+        </p:spPr>
+      </p:sp>
+      <p:sp>
+        <p:nvSpPr>
+          <p:cNvPr id="22" name="Text 20"/>
+          <p:cNvSpPr txBox="1"/>
+          <p:nvPr/>
+        </p:nvSpPr>
+        <p:spPr>
+          <a:xfrm>
+            <a:off x="685800" y="4514850"/>
+            <a:ext cx="5295900" cy="125016"/>
+          </a:xfrm>
+          <a:prstGeom prst="rect">
+            <a:avLst/>
+          </a:prstGeom>
+          <a:noFill/>
+          <a:ln/>
+        </p:spPr>
+        <p:txBody>
+          <a:bodyPr wrap="square" lIns="0" tIns="0" rIns="0" bIns="0" rtlCol="0" anchor="t"/>
+          <a:lstStyle/>
+          <a:p>
+            <a:pPr algn="l" indent="0" marL="0">
+              <a:lnSpc>
+                <a:spcPts val="984"/>
+              </a:lnSpc>
+              <a:buNone/>
+            </a:pPr>
+            <a:r>
+              <a:rPr lang="en-US" sz="788" b="1" spc="150" kern="0" dirty="0">
+                <a:solidFill>
+                  <a:srgbClr val="EFB13C"/>
+                </a:solidFill>
+                <a:latin typeface="Consolas" pitchFamily="34" charset="0"/>
+                <a:ea typeface="Consolas" pitchFamily="34" charset="-122"/>
+                <a:cs typeface="Consolas" pitchFamily="34" charset="-120"/>
+              </a:rPr>
+              <a:t>이관성</a:t>
+            </a:r>
+            <a:endParaRPr lang="en-US" sz="788" dirty="0"/>
+          </a:p>
+        </p:txBody>
+      </p:sp>
+      <p:sp>
+        <p:nvSpPr>
+          <p:cNvPr id="23" name="Text 21"/>
+          <p:cNvSpPr txBox="1"/>
+          <p:nvPr/>
+        </p:nvSpPr>
+        <p:spPr>
+          <a:xfrm>
+            <a:off x="685800" y="4724400"/>
+            <a:ext cx="5295900" cy="284036"/>
+          </a:xfrm>
+          <a:prstGeom prst="rect">
+            <a:avLst/>
+          </a:prstGeom>
+          <a:noFill/>
+          <a:ln/>
+        </p:spPr>
+        <p:txBody>
+          <a:bodyPr wrap="square" lIns="0" tIns="0" rIns="0" bIns="0" rtlCol="0" anchor="t"/>
+          <a:lstStyle/>
+          <a:p>
+            <a:pPr algn="l" indent="0" marL="0">
+              <a:lnSpc>
+                <a:spcPts val="2237"/>
+              </a:lnSpc>
+              <a:buNone/>
+            </a:pPr>
+            <a:r>
+              <a:rPr lang="en-US" sz="1575" b="1" dirty="0">
+                <a:solidFill>
+                  <a:srgbClr val="EAE7E0"/>
+                </a:solidFill>
+                <a:latin typeface="Malgun Gothic" pitchFamily="34" charset="0"/>
+                <a:ea typeface="Malgun Gothic" pitchFamily="34" charset="-122"/>
+                <a:cs typeface="Malgun Gothic" pitchFamily="34" charset="-120"/>
+              </a:rPr>
+              <a:t>담당자가 바뀌어도 </a:t>
+            </a:r>
+            <a:pPr algn="l" indent="0" marL="0">
+              <a:lnSpc>
+                <a:spcPts val="2237"/>
+              </a:lnSpc>
+              <a:buNone/>
+            </a:pPr>
+            <a:r>
+              <a:rPr lang="en-US" sz="1575" b="1" dirty="0">
+                <a:solidFill>
+                  <a:srgbClr val="EFB13C"/>
+                </a:solidFill>
+                <a:latin typeface="Malgun Gothic" pitchFamily="34" charset="0"/>
+                <a:ea typeface="Malgun Gothic" pitchFamily="34" charset="-122"/>
+                <a:cs typeface="Malgun Gothic" pitchFamily="34" charset="-120"/>
+              </a:rPr>
+              <a:t>이어집니다</a:t>
+            </a:r>
+            <a:endParaRPr lang="en-US" sz="1575" dirty="0"/>
+          </a:p>
+        </p:txBody>
+      </p:sp>
+      <p:sp>
+        <p:nvSpPr>
+          <p:cNvPr id="24" name="Text 22"/>
+          <p:cNvSpPr txBox="1"/>
+          <p:nvPr/>
+        </p:nvSpPr>
+        <p:spPr>
+          <a:xfrm>
+            <a:off x="685800" y="5124450"/>
+            <a:ext cx="5295900" cy="480060"/>
+          </a:xfrm>
+          <a:prstGeom prst="rect">
+            <a:avLst/>
+          </a:prstGeom>
+          <a:noFill/>
+          <a:ln/>
+        </p:spPr>
+        <p:txBody>
+          <a:bodyPr wrap="square" lIns="0" tIns="0" rIns="0" bIns="0" rtlCol="0" anchor="t"/>
+          <a:lstStyle/>
+          <a:p>
+            <a:pPr algn="l" indent="0" marL="0">
+              <a:lnSpc>
+                <a:spcPts val="1890"/>
+              </a:lnSpc>
+              <a:buNone/>
+            </a:pPr>
+            <a:r>
+              <a:rPr lang="en-US" sz="1125" dirty="0">
+                <a:solidFill>
+                  <a:srgbClr val="BCC9D6"/>
+                </a:solidFill>
+                <a:latin typeface="Malgun Gothic" pitchFamily="34" charset="0"/>
+                <a:ea typeface="Malgun Gothic" pitchFamily="34" charset="-122"/>
+                <a:cs typeface="Malgun Gothic" pitchFamily="34" charset="-120"/>
+              </a:rPr>
+              <a:t>값을 만드는 것이 사람의 감이 아니라 절차입니다. 인수인계 문서가 아니라 코드가 기준입니다.</a:t>
+            </a:r>
+            <a:endParaRPr lang="en-US" sz="1125" dirty="0"/>
+          </a:p>
+        </p:txBody>
+      </p:sp>
+      <p:sp>
+        <p:nvSpPr>
+          <p:cNvPr id="25" name="Shape 23"/>
+          <p:cNvSpPr/>
+          <p:nvPr/>
+        </p:nvSpPr>
+        <p:spPr>
+          <a:xfrm>
+            <a:off x="6210300" y="4381500"/>
+            <a:ext cx="5295900" cy="19050"/>
+          </a:xfrm>
+          <a:prstGeom prst="rect">
+            <a:avLst/>
+          </a:prstGeom>
+          <a:solidFill>
+            <a:srgbClr val="EFB13C"/>
+          </a:solidFill>
+          <a:ln/>
+        </p:spPr>
+      </p:sp>
+      <p:sp>
+        <p:nvSpPr>
+          <p:cNvPr id="26" name="Text 24"/>
+          <p:cNvSpPr txBox="1"/>
+          <p:nvPr/>
+        </p:nvSpPr>
+        <p:spPr>
+          <a:xfrm>
+            <a:off x="6210300" y="4514850"/>
+            <a:ext cx="5295900" cy="125016"/>
+          </a:xfrm>
+          <a:prstGeom prst="rect">
+            <a:avLst/>
+          </a:prstGeom>
+          <a:noFill/>
+          <a:ln/>
+        </p:spPr>
+        <p:txBody>
+          <a:bodyPr wrap="square" lIns="0" tIns="0" rIns="0" bIns="0" rtlCol="0" anchor="t"/>
+          <a:lstStyle/>
+          <a:p>
+            <a:pPr algn="l" indent="0" marL="0">
+              <a:lnSpc>
+                <a:spcPts val="984"/>
+              </a:lnSpc>
+              <a:buNone/>
+            </a:pPr>
+            <a:r>
+              <a:rPr lang="en-US" sz="788" b="1" spc="150" kern="0" dirty="0">
+                <a:solidFill>
+                  <a:srgbClr val="EFB13C"/>
+                </a:solidFill>
+                <a:latin typeface="Consolas" pitchFamily="34" charset="0"/>
+                <a:ea typeface="Consolas" pitchFamily="34" charset="-122"/>
+                <a:cs typeface="Consolas" pitchFamily="34" charset="-120"/>
+              </a:rPr>
+              <a:t>확장성</a:t>
+            </a:r>
+            <a:endParaRPr lang="en-US" sz="788" dirty="0"/>
+          </a:p>
+        </p:txBody>
+      </p:sp>
+      <p:sp>
+        <p:nvSpPr>
+          <p:cNvPr id="27" name="Text 25"/>
+          <p:cNvSpPr txBox="1"/>
+          <p:nvPr/>
+        </p:nvSpPr>
+        <p:spPr>
+          <a:xfrm>
+            <a:off x="6210300" y="4724400"/>
+            <a:ext cx="5295900" cy="284036"/>
+          </a:xfrm>
+          <a:prstGeom prst="rect">
+            <a:avLst/>
+          </a:prstGeom>
+          <a:noFill/>
+          <a:ln/>
+        </p:spPr>
+        <p:txBody>
+          <a:bodyPr wrap="square" lIns="0" tIns="0" rIns="0" bIns="0" rtlCol="0" anchor="t"/>
+          <a:lstStyle/>
+          <a:p>
+            <a:pPr algn="l" indent="0" marL="0">
+              <a:lnSpc>
+                <a:spcPts val="2237"/>
+              </a:lnSpc>
+              <a:buNone/>
+            </a:pPr>
+            <a:r>
+              <a:rPr lang="en-US" sz="1575" b="1" dirty="0">
+                <a:solidFill>
+                  <a:srgbClr val="EAE7E0"/>
+                </a:solidFill>
+                <a:latin typeface="Malgun Gothic" pitchFamily="34" charset="0"/>
+                <a:ea typeface="Malgun Gothic" pitchFamily="34" charset="-122"/>
+                <a:cs typeface="Malgun Gothic" pitchFamily="34" charset="-120"/>
+              </a:rPr>
+              <a:t>다른 사업소로 </a:t>
+            </a:r>
+            <a:pPr algn="l" indent="0" marL="0">
+              <a:lnSpc>
+                <a:spcPts val="2237"/>
+              </a:lnSpc>
+              <a:buNone/>
+            </a:pPr>
+            <a:r>
+              <a:rPr lang="en-US" sz="1575" b="1" dirty="0">
+                <a:solidFill>
+                  <a:srgbClr val="EFB13C"/>
+                </a:solidFill>
+                <a:latin typeface="Malgun Gothic" pitchFamily="34" charset="0"/>
+                <a:ea typeface="Malgun Gothic" pitchFamily="34" charset="-122"/>
+                <a:cs typeface="Malgun Gothic" pitchFamily="34" charset="-120"/>
+              </a:rPr>
+              <a:t>옮길 수 있습니다</a:t>
+            </a:r>
+            <a:endParaRPr lang="en-US" sz="1575" dirty="0"/>
+          </a:p>
+        </p:txBody>
+      </p:sp>
+      <p:sp>
+        <p:nvSpPr>
+          <p:cNvPr id="28" name="Text 26"/>
+          <p:cNvSpPr txBox="1"/>
+          <p:nvPr/>
+        </p:nvSpPr>
+        <p:spPr>
+          <a:xfrm>
+            <a:off x="6210300" y="5124450"/>
+            <a:ext cx="5295900" cy="480060"/>
+          </a:xfrm>
+          <a:prstGeom prst="rect">
+            <a:avLst/>
+          </a:prstGeom>
+          <a:noFill/>
+          <a:ln/>
+        </p:spPr>
+        <p:txBody>
+          <a:bodyPr wrap="square" lIns="0" tIns="0" rIns="0" bIns="0" rtlCol="0" anchor="t"/>
+          <a:lstStyle/>
+          <a:p>
+            <a:pPr algn="l" indent="0" marL="0">
+              <a:lnSpc>
+                <a:spcPts val="1890"/>
+              </a:lnSpc>
+              <a:buNone/>
+            </a:pPr>
+            <a:r>
+              <a:rPr lang="en-US" sz="1125" dirty="0">
+                <a:solidFill>
+                  <a:srgbClr val="BCC9D6"/>
+                </a:solidFill>
+                <a:latin typeface="Malgun Gothic" pitchFamily="34" charset="0"/>
+                <a:ea typeface="Malgun Gothic" pitchFamily="34" charset="-122"/>
+                <a:cs typeface="Malgun Gothic" pitchFamily="34" charset="-120"/>
+              </a:rPr>
+              <a:t>이론 계산식만 갈아끼우면 학습 층과 검증 가드는 그대로 씁니다. 처음부터 다시 만들지 않습니다.</a:t>
+            </a:r>
+            <a:endParaRPr lang="en-US" sz="1125" dirty="0"/>
+          </a:p>
+        </p:txBody>
+      </p:sp>
+      <p:sp>
+        <p:nvSpPr>
+          <p:cNvPr id="29" name="Shape 27"/>
           <p:cNvSpPr/>
           <p:nvPr/>
         </p:nvSpPr>
@@ -9069,6 +15753,124 @@
             <a:prstDash val="solid"/>
           </a:ln>
         </p:spPr>
+      </p:sp>
+      <p:sp>
+        <p:nvSpPr>
+          <p:cNvPr id="30" name="Text 28"/>
+          <p:cNvSpPr txBox="1"/>
+          <p:nvPr/>
+        </p:nvSpPr>
+        <p:spPr>
+          <a:xfrm>
+            <a:off x="685800" y="6267450"/>
+            <a:ext cx="476250" cy="120015"/>
+          </a:xfrm>
+          <a:prstGeom prst="rect">
+            <a:avLst/>
+          </a:prstGeom>
+          <a:noFill/>
+          <a:ln/>
+        </p:spPr>
+        <p:txBody>
+          <a:bodyPr wrap="square" lIns="0" tIns="0" rIns="0" bIns="0" rtlCol="0" anchor="t"/>
+          <a:lstStyle/>
+          <a:p>
+            <a:pPr algn="l" indent="0" marL="0">
+              <a:lnSpc>
+                <a:spcPts val="945"/>
+              </a:lnSpc>
+              <a:buNone/>
+            </a:pPr>
+            <a:r>
+              <a:rPr lang="en-US" sz="788" b="1" spc="180" kern="0" dirty="0">
+                <a:solidFill>
+                  <a:srgbClr val="EFB13C"/>
+                </a:solidFill>
+                <a:latin typeface="Consolas" pitchFamily="34" charset="0"/>
+                <a:ea typeface="Consolas" pitchFamily="34" charset="-122"/>
+                <a:cs typeface="Consolas" pitchFamily="34" charset="-120"/>
+              </a:rPr>
+              <a:t>결론</a:t>
+            </a:r>
+            <a:endParaRPr lang="en-US" sz="788" dirty="0"/>
+          </a:p>
+        </p:txBody>
+      </p:sp>
+      <p:sp>
+        <p:nvSpPr>
+          <p:cNvPr id="31" name="Text 29"/>
+          <p:cNvSpPr txBox="1"/>
+          <p:nvPr/>
+        </p:nvSpPr>
+        <p:spPr>
+          <a:xfrm>
+            <a:off x="1219200" y="6229350"/>
+            <a:ext cx="10287000" cy="220027"/>
+          </a:xfrm>
+          <a:prstGeom prst="rect">
+            <a:avLst/>
+          </a:prstGeom>
+          <a:noFill/>
+          <a:ln/>
+        </p:spPr>
+        <p:txBody>
+          <a:bodyPr wrap="square" lIns="0" tIns="0" rIns="0" bIns="0" rtlCol="0" anchor="t"/>
+          <a:lstStyle/>
+          <a:p>
+            <a:pPr algn="l" indent="0" marL="0">
+              <a:lnSpc>
+                <a:spcPts val="1733"/>
+              </a:lnSpc>
+              <a:buNone/>
+            </a:pPr>
+            <a:r>
+              <a:rPr lang="en-US" sz="1238" dirty="0">
+                <a:solidFill>
+                  <a:srgbClr val="BCC9D6"/>
+                </a:solidFill>
+                <a:latin typeface="Malgun Gothic" pitchFamily="34" charset="0"/>
+                <a:ea typeface="Malgun Gothic" pitchFamily="34" charset="-122"/>
+                <a:cs typeface="Malgun Gothic" pitchFamily="34" charset="-120"/>
+              </a:rPr>
+              <a:t>이 과제가 바꾼 것은 숫자가 아니라 </a:t>
+            </a:r>
+            <a:pPr algn="l" indent="0" marL="0">
+              <a:lnSpc>
+                <a:spcPts val="1733"/>
+              </a:lnSpc>
+              <a:buNone/>
+            </a:pPr>
+            <a:r>
+              <a:rPr lang="en-US" sz="1238" b="1" dirty="0">
+                <a:solidFill>
+                  <a:srgbClr val="EFB13C"/>
+                </a:solidFill>
+                <a:latin typeface="Malgun Gothic" pitchFamily="34" charset="0"/>
+                <a:ea typeface="Malgun Gothic" pitchFamily="34" charset="-122"/>
+                <a:cs typeface="Malgun Gothic" pitchFamily="34" charset="-120"/>
+              </a:rPr>
+              <a:t>숫자를 정하는 방법</a:t>
+            </a:r>
+            <a:pPr algn="l" indent="0" marL="0">
+              <a:lnSpc>
+                <a:spcPts val="1733"/>
+              </a:lnSpc>
+              <a:buNone/>
+            </a:pPr>
+            <a:r>
+              <a:rPr lang="en-US" sz="1238" dirty="0">
+                <a:solidFill>
+                  <a:srgbClr val="BCC9D6"/>
+                </a:solidFill>
+                <a:latin typeface="Malgun Gothic" pitchFamily="34" charset="0"/>
+                <a:ea typeface="Malgun Gothic" pitchFamily="34" charset="-122"/>
+                <a:cs typeface="Malgun Gothic" pitchFamily="34" charset="-120"/>
+              </a:rPr>
+              <a:t>입니다.</a:t>
+            </a:r>
+            <a:endParaRPr lang="en-US" sz="1238" dirty="0"/>
+          </a:p>
+        </p:txBody>
       </p:sp>
     </p:spTree>
   </p:cSld>
@@ -9333,26 +16135,26 @@
         <p:spPr>
           <a:xfrm>
             <a:off x="685800" y="914400"/>
-            <a:ext cx="10287000" cy="360045"/>
-          </a:xfrm>
-          <a:prstGeom prst="rect">
-            <a:avLst/>
-          </a:prstGeom>
-          <a:noFill/>
-          <a:ln/>
-        </p:spPr>
-        <p:txBody>
-          <a:bodyPr wrap="square" lIns="0" tIns="0" rIns="0" bIns="0" rtlCol="0" anchor="t"/>
-          <a:lstStyle/>
-          <a:p>
-            <a:pPr algn="l" indent="0" marL="0">
-              <a:lnSpc>
-                <a:spcPts val="2835"/>
-              </a:lnSpc>
-              <a:buNone/>
-            </a:pPr>
-            <a:r>
-              <a:rPr lang="en-US" sz="2250" b="1" dirty="0">
+            <a:ext cx="10287000" cy="888111"/>
+          </a:xfrm>
+          <a:prstGeom prst="rect">
+            <a:avLst/>
+          </a:prstGeom>
+          <a:noFill/>
+          <a:ln/>
+        </p:spPr>
+        <p:txBody>
+          <a:bodyPr wrap="square" lIns="0" tIns="0" rIns="0" bIns="0" rtlCol="0" anchor="t"/>
+          <a:lstStyle/>
+          <a:p>
+            <a:pPr algn="l" indent="0" marL="0">
+              <a:lnSpc>
+                <a:spcPts val="3496"/>
+              </a:lnSpc>
+              <a:buNone/>
+            </a:pPr>
+            <a:r>
+              <a:rPr lang="en-US" sz="2775" b="1" dirty="0">
                 <a:solidFill>
                   <a:srgbClr val="EAE7E0"/>
                 </a:solidFill>
@@ -9360,22 +16162,135 @@
                 <a:ea typeface="Malgun Gothic" pitchFamily="34" charset="-122"/>
                 <a:cs typeface="Malgun Gothic" pitchFamily="34" charset="-120"/>
               </a:rPr>
-              <a:t>이론만 갈아끼우면 같은 구조의 사업소에 그대로 적용됩니다</a:t>
-            </a:r>
-            <a:endParaRPr lang="en-US" sz="2250" dirty="0"/>
-          </a:p>
-        </p:txBody>
-      </p:sp>
-      <p:sp>
-        <p:nvSpPr>
-          <p:cNvPr id="12" name="Shape 10"/>
-          <p:cNvSpPr/>
-          <p:nvPr/>
-        </p:nvSpPr>
-        <p:spPr>
-          <a:xfrm>
-            <a:off x="685800" y="2857500"/>
-            <a:ext cx="10820400" cy="2095500"/>
+              <a:t>이론만 갈아끼우면,</a:t>
+            </a:r>
+            <a:endParaRPr lang="en-US" sz="2775" dirty="0"/>
+          </a:p>
+          <a:p>
+            <a:pPr algn="l" indent="0" marL="0">
+              <a:lnSpc>
+                <a:spcPts val="3496"/>
+              </a:lnSpc>
+              <a:buNone/>
+            </a:pPr>
+            <a:r>
+              <a:rPr lang="en-US" sz="2775" b="1" dirty="0">
+                <a:solidFill>
+                  <a:srgbClr val="EFB13C"/>
+                </a:solidFill>
+                <a:latin typeface="Malgun Gothic" pitchFamily="34" charset="0"/>
+                <a:ea typeface="Malgun Gothic" pitchFamily="34" charset="-122"/>
+                <a:cs typeface="Malgun Gothic" pitchFamily="34" charset="-120"/>
+              </a:rPr>
+              <a:t>같은 구조의 사업소에</a:t>
+            </a:r>
+            <a:pPr algn="l" indent="0" marL="0">
+              <a:lnSpc>
+                <a:spcPts val="3496"/>
+              </a:lnSpc>
+              <a:buNone/>
+            </a:pPr>
+            <a:r>
+              <a:rPr lang="en-US" sz="2775" b="1" dirty="0">
+                <a:solidFill>
+                  <a:srgbClr val="EAE7E0"/>
+                </a:solidFill>
+                <a:latin typeface="Malgun Gothic" pitchFamily="34" charset="0"/>
+                <a:ea typeface="Malgun Gothic" pitchFamily="34" charset="-122"/>
+                <a:cs typeface="Malgun Gothic" pitchFamily="34" charset="-120"/>
+              </a:rPr>
+              <a:t> 그대로 적용됩니다</a:t>
+            </a:r>
+            <a:endParaRPr lang="en-US" sz="2775" dirty="0"/>
+          </a:p>
+        </p:txBody>
+      </p:sp>
+      <p:sp>
+        <p:nvSpPr>
+          <p:cNvPr id="12" name="Text 10"/>
+          <p:cNvSpPr txBox="1"/>
+          <p:nvPr/>
+        </p:nvSpPr>
+        <p:spPr>
+          <a:xfrm>
+            <a:off x="685800" y="2000250"/>
+            <a:ext cx="10287000" cy="569214"/>
+          </a:xfrm>
+          <a:prstGeom prst="rect">
+            <a:avLst/>
+          </a:prstGeom>
+          <a:noFill/>
+          <a:ln/>
+        </p:spPr>
+        <p:txBody>
+          <a:bodyPr wrap="square" lIns="0" tIns="0" rIns="0" bIns="0" rtlCol="0" anchor="t"/>
+          <a:lstStyle/>
+          <a:p>
+            <a:pPr algn="l" indent="0" marL="0">
+              <a:lnSpc>
+                <a:spcPts val="2241"/>
+              </a:lnSpc>
+              <a:buNone/>
+            </a:pPr>
+            <a:r>
+              <a:rPr lang="en-US" sz="1350" dirty="0">
+                <a:solidFill>
+                  <a:srgbClr val="BCC9D6"/>
+                </a:solidFill>
+                <a:latin typeface="Malgun Gothic" pitchFamily="34" charset="0"/>
+                <a:ea typeface="Malgun Gothic" pitchFamily="34" charset="-122"/>
+                <a:cs typeface="Malgun Gothic" pitchFamily="34" charset="-120"/>
+              </a:rPr>
+              <a:t>이 과제가 만든 것의 대부분은 특정 설비와 무관합니다. 옮길 때 다시 만드는 것은 </a:t>
+            </a:r>
+            <a:pPr algn="l" indent="0" marL="0">
+              <a:lnSpc>
+                <a:spcPts val="2241"/>
+              </a:lnSpc>
+              <a:buNone/>
+            </a:pPr>
+            <a:r>
+              <a:rPr lang="en-US" sz="1350" b="1" dirty="0">
+                <a:solidFill>
+                  <a:srgbClr val="EAE7E0"/>
+                </a:solidFill>
+                <a:latin typeface="Malgun Gothic" pitchFamily="34" charset="0"/>
+                <a:ea typeface="Malgun Gothic" pitchFamily="34" charset="-122"/>
+                <a:cs typeface="Malgun Gothic" pitchFamily="34" charset="-120"/>
+              </a:rPr>
+              <a:t>이론 계산식 한 층</a:t>
+            </a:r>
+            <a:pPr algn="l" indent="0" marL="0">
+              <a:lnSpc>
+                <a:spcPts val="2241"/>
+              </a:lnSpc>
+              <a:buNone/>
+            </a:pPr>
+            <a:r>
+              <a:rPr lang="en-US" sz="1350" dirty="0">
+                <a:solidFill>
+                  <a:srgbClr val="BCC9D6"/>
+                </a:solidFill>
+                <a:latin typeface="Malgun Gothic" pitchFamily="34" charset="0"/>
+                <a:ea typeface="Malgun Gothic" pitchFamily="34" charset="-122"/>
+                <a:cs typeface="Malgun Gothic" pitchFamily="34" charset="-120"/>
+              </a:rPr>
+              <a:t> 뿐입니다.</a:t>
+            </a:r>
+            <a:endParaRPr lang="en-US" sz="1350" dirty="0"/>
+          </a:p>
+        </p:txBody>
+      </p:sp>
+      <p:sp>
+        <p:nvSpPr>
+          <p:cNvPr id="13" name="Shape 11"/>
+          <p:cNvSpPr/>
+          <p:nvPr/>
+        </p:nvSpPr>
+        <p:spPr>
+          <a:xfrm>
+            <a:off x="685800" y="2743200"/>
+            <a:ext cx="10820400" cy="1066800"/>
           </a:xfrm>
           <a:prstGeom prst="rect">
             <a:avLst/>
@@ -9383,24 +16298,132 @@
           <a:solidFill>
             <a:srgbClr val="0A1320"/>
           </a:solidFill>
-          <a:ln w="19050">
+          <a:ln w="12700">
+            <a:solidFill>
+              <a:srgbClr val="182838"/>
+            </a:solidFill>
+            <a:prstDash val="solid"/>
+          </a:ln>
+        </p:spPr>
+      </p:sp>
+      <p:sp>
+        <p:nvSpPr>
+          <p:cNvPr id="14" name="Text 12"/>
+          <p:cNvSpPr txBox="1"/>
+          <p:nvPr/>
+        </p:nvSpPr>
+        <p:spPr>
+          <a:xfrm>
+            <a:off x="914400" y="2857500"/>
+            <a:ext cx="3810000" cy="125016"/>
+          </a:xfrm>
+          <a:prstGeom prst="rect">
+            <a:avLst/>
+          </a:prstGeom>
+          <a:noFill/>
+          <a:ln/>
+        </p:spPr>
+        <p:txBody>
+          <a:bodyPr wrap="square" lIns="0" tIns="0" rIns="0" bIns="0" rtlCol="0" anchor="t"/>
+          <a:lstStyle/>
+          <a:p>
+            <a:pPr algn="l" indent="0" marL="0">
+              <a:lnSpc>
+                <a:spcPts val="984"/>
+              </a:lnSpc>
+              <a:buNone/>
+            </a:pPr>
+            <a:r>
+              <a:rPr lang="en-US" sz="788" b="1" spc="150" kern="0" dirty="0">
+                <a:solidFill>
+                  <a:srgbClr val="63798F"/>
+                </a:solidFill>
+                <a:latin typeface="Consolas" pitchFamily="34" charset="0"/>
+                <a:ea typeface="Consolas" pitchFamily="34" charset="-122"/>
+                <a:cs typeface="Consolas" pitchFamily="34" charset="-120"/>
+              </a:rPr>
+              <a:t>진행 경과</a:t>
+            </a:r>
+            <a:endParaRPr lang="en-US" sz="788" dirty="0"/>
+          </a:p>
+        </p:txBody>
+      </p:sp>
+      <p:sp>
+        <p:nvSpPr>
+          <p:cNvPr id="15" name="Shape 13"/>
+          <p:cNvSpPr/>
+          <p:nvPr/>
+        </p:nvSpPr>
+        <p:spPr>
+          <a:xfrm>
+            <a:off x="1333500" y="3390900"/>
+            <a:ext cx="9334500" cy="0"/>
+          </a:xfrm>
+          <a:prstGeom prst="line">
+            <a:avLst/>
+          </a:prstGeom>
+          <a:noFill/>
+          <a:ln w="17780">
             <a:solidFill>
               <a:srgbClr val="22354A"/>
             </a:solidFill>
-            <a:prstDash val="dash"/>
+            <a:prstDash val="solid"/>
           </a:ln>
         </p:spPr>
       </p:sp>
       <p:sp>
         <p:nvSpPr>
-          <p:cNvPr id="13" name="Text 11"/>
-          <p:cNvSpPr txBox="1"/>
-          <p:nvPr/>
-        </p:nvSpPr>
-        <p:spPr>
-          <a:xfrm>
-            <a:off x="685800" y="3695700"/>
-            <a:ext cx="10820400" cy="226695"/>
+          <p:cNvPr id="16" name="Shape 14"/>
+          <p:cNvSpPr/>
+          <p:nvPr/>
+        </p:nvSpPr>
+        <p:spPr>
+          <a:xfrm>
+            <a:off x="1333500" y="3390900"/>
+            <a:ext cx="7000875" cy="0"/>
+          </a:xfrm>
+          <a:prstGeom prst="line">
+            <a:avLst/>
+          </a:prstGeom>
+          <a:noFill/>
+          <a:ln w="17780">
+            <a:solidFill>
+              <a:srgbClr val="EFB13C"/>
+            </a:solidFill>
+            <a:prstDash val="solid"/>
+          </a:ln>
+        </p:spPr>
+      </p:sp>
+      <p:sp>
+        <p:nvSpPr>
+          <p:cNvPr id="17" name="Shape 15"/>
+          <p:cNvSpPr/>
+          <p:nvPr/>
+        </p:nvSpPr>
+        <p:spPr>
+          <a:xfrm>
+            <a:off x="1281113" y="3338513"/>
+            <a:ext cx="104775" cy="104775"/>
+          </a:xfrm>
+          <a:prstGeom prst="ellipse">
+            <a:avLst/>
+          </a:prstGeom>
+          <a:solidFill>
+            <a:srgbClr val="EFB13C"/>
+          </a:solidFill>
+          <a:ln/>
+        </p:spPr>
+      </p:sp>
+      <p:sp>
+        <p:nvSpPr>
+          <p:cNvPr id="18" name="Text 16"/>
+          <p:cNvSpPr txBox="1"/>
+          <p:nvPr/>
+        </p:nvSpPr>
+        <p:spPr>
+          <a:xfrm>
+            <a:off x="285750" y="3543300"/>
+            <a:ext cx="2095500" cy="167164"/>
           </a:xfrm>
           <a:prstGeom prst="rect">
             <a:avLst/>
@@ -9414,12 +16437,280 @@
           <a:p>
             <a:pPr algn="ctr" indent="0" marL="0">
               <a:lnSpc>
-                <a:spcPts val="1785"/>
-              </a:lnSpc>
-              <a:buNone/>
-            </a:pPr>
-            <a:r>
-              <a:rPr lang="en-US" sz="1275" dirty="0">
+                <a:spcPts val="1316"/>
+              </a:lnSpc>
+              <a:buNone/>
+            </a:pPr>
+            <a:r>
+              <a:rPr lang="en-US" sz="975" dirty="0">
+                <a:solidFill>
+                  <a:srgbClr val="BCC9D6"/>
+                </a:solidFill>
+                <a:latin typeface="Malgun Gothic" pitchFamily="34" charset="0"/>
+                <a:ea typeface="Malgun Gothic" pitchFamily="34" charset="-122"/>
+                <a:cs typeface="Malgun Gothic" pitchFamily="34" charset="-120"/>
+              </a:rPr>
+              <a:t>착수</a:t>
+            </a:r>
+            <a:endParaRPr lang="en-US" sz="975" dirty="0"/>
+          </a:p>
+        </p:txBody>
+      </p:sp>
+      <p:sp>
+        <p:nvSpPr>
+          <p:cNvPr id="19" name="Shape 17"/>
+          <p:cNvSpPr/>
+          <p:nvPr/>
+        </p:nvSpPr>
+        <p:spPr>
+          <a:xfrm>
+            <a:off x="3614738" y="3338513"/>
+            <a:ext cx="104775" cy="104775"/>
+          </a:xfrm>
+          <a:prstGeom prst="ellipse">
+            <a:avLst/>
+          </a:prstGeom>
+          <a:solidFill>
+            <a:srgbClr val="EFB13C"/>
+          </a:solidFill>
+          <a:ln/>
+        </p:spPr>
+      </p:sp>
+      <p:sp>
+        <p:nvSpPr>
+          <p:cNvPr id="20" name="Text 18"/>
+          <p:cNvSpPr txBox="1"/>
+          <p:nvPr/>
+        </p:nvSpPr>
+        <p:spPr>
+          <a:xfrm>
+            <a:off x="2619375" y="3543300"/>
+            <a:ext cx="2095500" cy="167164"/>
+          </a:xfrm>
+          <a:prstGeom prst="rect">
+            <a:avLst/>
+          </a:prstGeom>
+          <a:noFill/>
+          <a:ln/>
+        </p:spPr>
+        <p:txBody>
+          <a:bodyPr wrap="square" lIns="0" tIns="0" rIns="0" bIns="0" rtlCol="0" anchor="t"/>
+          <a:lstStyle/>
+          <a:p>
+            <a:pPr algn="ctr" indent="0" marL="0">
+              <a:lnSpc>
+                <a:spcPts val="1316"/>
+              </a:lnSpc>
+              <a:buNone/>
+            </a:pPr>
+            <a:r>
+              <a:rPr lang="en-US" sz="975" dirty="0">
+                <a:solidFill>
+                  <a:srgbClr val="BCC9D6"/>
+                </a:solidFill>
+                <a:latin typeface="Malgun Gothic" pitchFamily="34" charset="0"/>
+                <a:ea typeface="Malgun Gothic" pitchFamily="34" charset="-122"/>
+                <a:cs typeface="Malgun Gothic" pitchFamily="34" charset="-120"/>
+              </a:rPr>
+              <a:t>이론 재현</a:t>
+            </a:r>
+            <a:endParaRPr lang="en-US" sz="975" dirty="0"/>
+          </a:p>
+        </p:txBody>
+      </p:sp>
+      <p:sp>
+        <p:nvSpPr>
+          <p:cNvPr id="21" name="Shape 19"/>
+          <p:cNvSpPr/>
+          <p:nvPr/>
+        </p:nvSpPr>
+        <p:spPr>
+          <a:xfrm>
+            <a:off x="5948363" y="3338513"/>
+            <a:ext cx="104775" cy="104775"/>
+          </a:xfrm>
+          <a:prstGeom prst="ellipse">
+            <a:avLst/>
+          </a:prstGeom>
+          <a:solidFill>
+            <a:srgbClr val="EFB13C"/>
+          </a:solidFill>
+          <a:ln/>
+        </p:spPr>
+      </p:sp>
+      <p:sp>
+        <p:nvSpPr>
+          <p:cNvPr id="22" name="Text 20"/>
+          <p:cNvSpPr txBox="1"/>
+          <p:nvPr/>
+        </p:nvSpPr>
+        <p:spPr>
+          <a:xfrm>
+            <a:off x="4953000" y="3543300"/>
+            <a:ext cx="2095500" cy="167164"/>
+          </a:xfrm>
+          <a:prstGeom prst="rect">
+            <a:avLst/>
+          </a:prstGeom>
+          <a:noFill/>
+          <a:ln/>
+        </p:spPr>
+        <p:txBody>
+          <a:bodyPr wrap="square" lIns="0" tIns="0" rIns="0" bIns="0" rtlCol="0" anchor="t"/>
+          <a:lstStyle/>
+          <a:p>
+            <a:pPr algn="ctr" indent="0" marL="0">
+              <a:lnSpc>
+                <a:spcPts val="1316"/>
+              </a:lnSpc>
+              <a:buNone/>
+            </a:pPr>
+            <a:r>
+              <a:rPr lang="en-US" sz="975" dirty="0">
+                <a:solidFill>
+                  <a:srgbClr val="BCC9D6"/>
+                </a:solidFill>
+                <a:latin typeface="Malgun Gothic" pitchFamily="34" charset="0"/>
+                <a:ea typeface="Malgun Gothic" pitchFamily="34" charset="-122"/>
+                <a:cs typeface="Malgun Gothic" pitchFamily="34" charset="-120"/>
+              </a:rPr>
+              <a:t>실적 36회차 적층</a:t>
+            </a:r>
+            <a:endParaRPr lang="en-US" sz="975" dirty="0"/>
+          </a:p>
+        </p:txBody>
+      </p:sp>
+      <p:sp>
+        <p:nvSpPr>
+          <p:cNvPr id="23" name="Shape 21"/>
+          <p:cNvSpPr/>
+          <p:nvPr/>
+        </p:nvSpPr>
+        <p:spPr>
+          <a:xfrm>
+            <a:off x="8258175" y="3314700"/>
+            <a:ext cx="152400" cy="152400"/>
+          </a:xfrm>
+          <a:prstGeom prst="ellipse">
+            <a:avLst/>
+          </a:prstGeom>
+          <a:solidFill>
+            <a:srgbClr val="EFB13C"/>
+          </a:solidFill>
+          <a:ln/>
+        </p:spPr>
+      </p:sp>
+      <p:sp>
+        <p:nvSpPr>
+          <p:cNvPr id="24" name="Shape 22"/>
+          <p:cNvSpPr/>
+          <p:nvPr/>
+        </p:nvSpPr>
+        <p:spPr>
+          <a:xfrm>
+            <a:off x="8301038" y="3357563"/>
+            <a:ext cx="66675" cy="66675"/>
+          </a:xfrm>
+          <a:prstGeom prst="ellipse">
+            <a:avLst/>
+          </a:prstGeom>
+          <a:solidFill>
+            <a:srgbClr val="0A1320"/>
+          </a:solidFill>
+          <a:ln/>
+        </p:spPr>
+      </p:sp>
+      <p:sp>
+        <p:nvSpPr>
+          <p:cNvPr id="25" name="Text 23"/>
+          <p:cNvSpPr txBox="1"/>
+          <p:nvPr/>
+        </p:nvSpPr>
+        <p:spPr>
+          <a:xfrm>
+            <a:off x="7286625" y="3543300"/>
+            <a:ext cx="2095500" cy="167164"/>
+          </a:xfrm>
+          <a:prstGeom prst="rect">
+            <a:avLst/>
+          </a:prstGeom>
+          <a:noFill/>
+          <a:ln/>
+        </p:spPr>
+        <p:txBody>
+          <a:bodyPr wrap="square" lIns="0" tIns="0" rIns="0" bIns="0" rtlCol="0" anchor="t"/>
+          <a:lstStyle/>
+          <a:p>
+            <a:pPr algn="ctr" indent="0" marL="0">
+              <a:lnSpc>
+                <a:spcPts val="1316"/>
+              </a:lnSpc>
+              <a:buNone/>
+            </a:pPr>
+            <a:r>
+              <a:rPr lang="en-US" sz="975" b="1" dirty="0">
+                <a:solidFill>
+                  <a:srgbClr val="EFB13C"/>
+                </a:solidFill>
+                <a:latin typeface="Malgun Gothic" pitchFamily="34" charset="0"/>
+                <a:ea typeface="Malgun Gothic" pitchFamily="34" charset="-122"/>
+                <a:cs typeface="Malgun Gothic" pitchFamily="34" charset="-120"/>
+              </a:rPr>
+              <a:t>시운전 4회차 실측</a:t>
+            </a:r>
+            <a:endParaRPr lang="en-US" sz="975" dirty="0"/>
+          </a:p>
+        </p:txBody>
+      </p:sp>
+      <p:sp>
+        <p:nvSpPr>
+          <p:cNvPr id="26" name="Shape 24"/>
+          <p:cNvSpPr/>
+          <p:nvPr/>
+        </p:nvSpPr>
+        <p:spPr>
+          <a:xfrm>
+            <a:off x="10615613" y="3338513"/>
+            <a:ext cx="104775" cy="104775"/>
+          </a:xfrm>
+          <a:prstGeom prst="ellipse">
+            <a:avLst/>
+          </a:prstGeom>
+          <a:solidFill>
+            <a:srgbClr val="22354A"/>
+          </a:solidFill>
+          <a:ln/>
+        </p:spPr>
+      </p:sp>
+      <p:sp>
+        <p:nvSpPr>
+          <p:cNvPr id="27" name="Text 25"/>
+          <p:cNvSpPr txBox="1"/>
+          <p:nvPr/>
+        </p:nvSpPr>
+        <p:spPr>
+          <a:xfrm>
+            <a:off x="9620250" y="3543300"/>
+            <a:ext cx="2095500" cy="167164"/>
+          </a:xfrm>
+          <a:prstGeom prst="rect">
+            <a:avLst/>
+          </a:prstGeom>
+          <a:noFill/>
+          <a:ln/>
+        </p:spPr>
+        <p:txBody>
+          <a:bodyPr wrap="square" lIns="0" tIns="0" rIns="0" bIns="0" rtlCol="0" anchor="t"/>
+          <a:lstStyle/>
+          <a:p>
+            <a:pPr algn="ctr" indent="0" marL="0">
+              <a:lnSpc>
+                <a:spcPts val="1316"/>
+              </a:lnSpc>
+              <a:buNone/>
+            </a:pPr>
+            <a:r>
+              <a:rPr lang="en-US" sz="975" dirty="0">
                 <a:solidFill>
                   <a:srgbClr val="63798F"/>
                 </a:solidFill>
@@ -9427,22 +16718,22 @@
                 <a:ea typeface="Malgun Gothic" pitchFamily="34" charset="-122"/>
                 <a:cs typeface="Malgun Gothic" pitchFamily="34" charset="-120"/>
               </a:rPr>
-              <a:t>작성 예정 — 이 장은 아직 만들지 않았습니다.</a:t>
-            </a:r>
-            <a:endParaRPr lang="en-US" sz="1275" dirty="0"/>
-          </a:p>
-        </p:txBody>
-      </p:sp>
-      <p:sp>
-        <p:nvSpPr>
-          <p:cNvPr id="14" name="Text 12"/>
-          <p:cNvSpPr txBox="1"/>
-          <p:nvPr/>
-        </p:nvSpPr>
-        <p:spPr>
-          <a:xfrm>
-            <a:off x="685800" y="4038600"/>
-            <a:ext cx="10820400" cy="125016"/>
+              <a:t>수평 전개</a:t>
+            </a:r>
+            <a:endParaRPr lang="en-US" sz="975" dirty="0"/>
+          </a:p>
+        </p:txBody>
+      </p:sp>
+      <p:sp>
+        <p:nvSpPr>
+          <p:cNvPr id="28" name="Text 26"/>
+          <p:cNvSpPr txBox="1"/>
+          <p:nvPr/>
+        </p:nvSpPr>
+        <p:spPr>
+          <a:xfrm>
+            <a:off x="7953375" y="3162300"/>
+            <a:ext cx="762000" cy="125016"/>
           </a:xfrm>
           <a:prstGeom prst="rect">
             <a:avLst/>
@@ -9463,13 +16754,13 @@
             <a:r>
               <a:rPr lang="en-US" sz="788" b="1" spc="150" kern="0" dirty="0">
                 <a:solidFill>
-                  <a:srgbClr val="7E2333"/>
+                  <a:srgbClr val="EFB13C"/>
                 </a:solidFill>
                 <a:latin typeface="Consolas" pitchFamily="34" charset="0"/>
                 <a:ea typeface="Consolas" pitchFamily="34" charset="-122"/>
                 <a:cs typeface="Consolas" pitchFamily="34" charset="-120"/>
               </a:rPr>
-              <a:t>SLIDE 15  ·  TODO</a:t>
+              <a:t>현재</a:t>
             </a:r>
             <a:endParaRPr lang="en-US" sz="788" dirty="0"/>
           </a:p>
@@ -9477,7 +16768,585 @@
       </p:sp>
       <p:sp>
         <p:nvSpPr>
-          <p:cNvPr id="15" name="Shape 13"/>
+          <p:cNvPr id="29" name="Shape 27"/>
+          <p:cNvSpPr/>
+          <p:nvPr/>
+        </p:nvSpPr>
+        <p:spPr>
+          <a:xfrm>
+            <a:off x="685800" y="4095750"/>
+            <a:ext cx="5295900" cy="19050"/>
+          </a:xfrm>
+          <a:prstGeom prst="rect">
+            <a:avLst/>
+          </a:prstGeom>
+          <a:solidFill>
+            <a:srgbClr val="EFB13C"/>
+          </a:solidFill>
+          <a:ln/>
+        </p:spPr>
+      </p:sp>
+      <p:sp>
+        <p:nvSpPr>
+          <p:cNvPr id="30" name="Text 28"/>
+          <p:cNvSpPr txBox="1"/>
+          <p:nvPr/>
+        </p:nvSpPr>
+        <p:spPr>
+          <a:xfrm>
+            <a:off x="685800" y="4229100"/>
+            <a:ext cx="5295900" cy="125016"/>
+          </a:xfrm>
+          <a:prstGeom prst="rect">
+            <a:avLst/>
+          </a:prstGeom>
+          <a:noFill/>
+          <a:ln/>
+        </p:spPr>
+        <p:txBody>
+          <a:bodyPr wrap="square" lIns="0" tIns="0" rIns="0" bIns="0" rtlCol="0" anchor="t"/>
+          <a:lstStyle/>
+          <a:p>
+            <a:pPr algn="l" indent="0" marL="0">
+              <a:lnSpc>
+                <a:spcPts val="984"/>
+              </a:lnSpc>
+              <a:buNone/>
+            </a:pPr>
+            <a:r>
+              <a:rPr lang="en-US" sz="788" b="1" spc="150" kern="0" dirty="0">
+                <a:solidFill>
+                  <a:srgbClr val="EFB13C"/>
+                </a:solidFill>
+                <a:latin typeface="Consolas" pitchFamily="34" charset="0"/>
+                <a:ea typeface="Consolas" pitchFamily="34" charset="-122"/>
+                <a:cs typeface="Consolas" pitchFamily="34" charset="-120"/>
+              </a:rPr>
+              <a:t>그대로 옮기는 것</a:t>
+            </a:r>
+            <a:endParaRPr lang="en-US" sz="788" dirty="0"/>
+          </a:p>
+        </p:txBody>
+      </p:sp>
+      <p:sp>
+        <p:nvSpPr>
+          <p:cNvPr id="31" name="Text 29"/>
+          <p:cNvSpPr txBox="1"/>
+          <p:nvPr/>
+        </p:nvSpPr>
+        <p:spPr>
+          <a:xfrm>
+            <a:off x="685800" y="4438650"/>
+            <a:ext cx="5295900" cy="284036"/>
+          </a:xfrm>
+          <a:prstGeom prst="rect">
+            <a:avLst/>
+          </a:prstGeom>
+          <a:noFill/>
+          <a:ln/>
+        </p:spPr>
+        <p:txBody>
+          <a:bodyPr wrap="square" lIns="0" tIns="0" rIns="0" bIns="0" rtlCol="0" anchor="t"/>
+          <a:lstStyle/>
+          <a:p>
+            <a:pPr algn="l" indent="0" marL="0">
+              <a:lnSpc>
+                <a:spcPts val="2237"/>
+              </a:lnSpc>
+              <a:buNone/>
+            </a:pPr>
+            <a:r>
+              <a:rPr lang="en-US" sz="1575" b="1" dirty="0">
+                <a:solidFill>
+                  <a:srgbClr val="EAE7E0"/>
+                </a:solidFill>
+                <a:latin typeface="Malgun Gothic" pitchFamily="34" charset="0"/>
+                <a:ea typeface="Malgun Gothic" pitchFamily="34" charset="-122"/>
+                <a:cs typeface="Malgun Gothic" pitchFamily="34" charset="-120"/>
+              </a:rPr>
+              <a:t>전체의 </a:t>
+            </a:r>
+            <a:pPr algn="l" indent="0" marL="0">
+              <a:lnSpc>
+                <a:spcPts val="2237"/>
+              </a:lnSpc>
+              <a:buNone/>
+            </a:pPr>
+            <a:r>
+              <a:rPr lang="en-US" sz="1575" b="1" dirty="0">
+                <a:solidFill>
+                  <a:srgbClr val="EFB13C"/>
+                </a:solidFill>
+                <a:latin typeface="Malgun Gothic" pitchFamily="34" charset="0"/>
+                <a:ea typeface="Malgun Gothic" pitchFamily="34" charset="-122"/>
+                <a:cs typeface="Malgun Gothic" pitchFamily="34" charset="-120"/>
+              </a:rPr>
+              <a:t>대부분</a:t>
+            </a:r>
+            <a:endParaRPr lang="en-US" sz="1575" dirty="0"/>
+          </a:p>
+        </p:txBody>
+      </p:sp>
+      <p:sp>
+        <p:nvSpPr>
+          <p:cNvPr id="32" name="Text 30"/>
+          <p:cNvSpPr txBox="1"/>
+          <p:nvPr/>
+        </p:nvSpPr>
+        <p:spPr>
+          <a:xfrm>
+            <a:off x="685800" y="4819650"/>
+            <a:ext cx="5295900" cy="180023"/>
+          </a:xfrm>
+          <a:prstGeom prst="rect">
+            <a:avLst/>
+          </a:prstGeom>
+          <a:noFill/>
+          <a:ln/>
+        </p:spPr>
+        <p:txBody>
+          <a:bodyPr wrap="square" lIns="0" tIns="0" rIns="0" bIns="0" rtlCol="0" anchor="t"/>
+          <a:lstStyle/>
+          <a:p>
+            <a:pPr algn="l" indent="0" marL="0">
+              <a:lnSpc>
+                <a:spcPts val="1418"/>
+              </a:lnSpc>
+              <a:buNone/>
+            </a:pPr>
+            <a:r>
+              <a:rPr lang="en-US" sz="1050" dirty="0">
+                <a:solidFill>
+                  <a:srgbClr val="BCC9D6"/>
+                </a:solidFill>
+                <a:latin typeface="Malgun Gothic" pitchFamily="34" charset="0"/>
+                <a:ea typeface="Malgun Gothic" pitchFamily="34" charset="-122"/>
+                <a:cs typeface="Malgun Gothic" pitchFamily="34" charset="-120"/>
+              </a:rPr>
+              <a:t>· 온도별로 학습하는 구조와 채점 방식</a:t>
+            </a:r>
+            <a:endParaRPr lang="en-US" sz="1050" dirty="0"/>
+          </a:p>
+        </p:txBody>
+      </p:sp>
+      <p:sp>
+        <p:nvSpPr>
+          <p:cNvPr id="33" name="Text 31"/>
+          <p:cNvSpPr txBox="1"/>
+          <p:nvPr/>
+        </p:nvSpPr>
+        <p:spPr>
+          <a:xfrm>
+            <a:off x="685800" y="5086350"/>
+            <a:ext cx="5295900" cy="180023"/>
+          </a:xfrm>
+          <a:prstGeom prst="rect">
+            <a:avLst/>
+          </a:prstGeom>
+          <a:noFill/>
+          <a:ln/>
+        </p:spPr>
+        <p:txBody>
+          <a:bodyPr wrap="square" lIns="0" tIns="0" rIns="0" bIns="0" rtlCol="0" anchor="t"/>
+          <a:lstStyle/>
+          <a:p>
+            <a:pPr algn="l" indent="0" marL="0">
+              <a:lnSpc>
+                <a:spcPts val="1418"/>
+              </a:lnSpc>
+              <a:buNone/>
+            </a:pPr>
+            <a:r>
+              <a:rPr lang="en-US" sz="1050" dirty="0">
+                <a:solidFill>
+                  <a:srgbClr val="BCC9D6"/>
+                </a:solidFill>
+                <a:latin typeface="Malgun Gothic" pitchFamily="34" charset="0"/>
+                <a:ea typeface="Malgun Gothic" pitchFamily="34" charset="-122"/>
+                <a:cs typeface="Malgun Gothic" pitchFamily="34" charset="-120"/>
+              </a:rPr>
+              <a:t>· 검증 가드 3종 (IGV·습도 교차·수식 대조)</a:t>
+            </a:r>
+            <a:endParaRPr lang="en-US" sz="1050" dirty="0"/>
+          </a:p>
+        </p:txBody>
+      </p:sp>
+      <p:sp>
+        <p:nvSpPr>
+          <p:cNvPr id="34" name="Text 32"/>
+          <p:cNvSpPr txBox="1"/>
+          <p:nvPr/>
+        </p:nvSpPr>
+        <p:spPr>
+          <a:xfrm>
+            <a:off x="685800" y="5353050"/>
+            <a:ext cx="5295900" cy="180023"/>
+          </a:xfrm>
+          <a:prstGeom prst="rect">
+            <a:avLst/>
+          </a:prstGeom>
+          <a:noFill/>
+          <a:ln/>
+        </p:spPr>
+        <p:txBody>
+          <a:bodyPr wrap="square" lIns="0" tIns="0" rIns="0" bIns="0" rtlCol="0" anchor="t"/>
+          <a:lstStyle/>
+          <a:p>
+            <a:pPr algn="l" indent="0" marL="0">
+              <a:lnSpc>
+                <a:spcPts val="1418"/>
+              </a:lnSpc>
+              <a:buNone/>
+            </a:pPr>
+            <a:r>
+              <a:rPr lang="en-US" sz="1050" dirty="0">
+                <a:solidFill>
+                  <a:srgbClr val="BCC9D6"/>
+                </a:solidFill>
+                <a:latin typeface="Malgun Gothic" pitchFamily="34" charset="0"/>
+                <a:ea typeface="Malgun Gothic" pitchFamily="34" charset="-122"/>
+                <a:cs typeface="Malgun Gothic" pitchFamily="34" charset="-120"/>
+              </a:rPr>
+              <a:t>· 취득 파이프와 누적 이력</a:t>
+            </a:r>
+            <a:endParaRPr lang="en-US" sz="1050" dirty="0"/>
+          </a:p>
+        </p:txBody>
+      </p:sp>
+      <p:sp>
+        <p:nvSpPr>
+          <p:cNvPr id="35" name="Text 33"/>
+          <p:cNvSpPr txBox="1"/>
+          <p:nvPr/>
+        </p:nvSpPr>
+        <p:spPr>
+          <a:xfrm>
+            <a:off x="685800" y="5619750"/>
+            <a:ext cx="5295900" cy="180023"/>
+          </a:xfrm>
+          <a:prstGeom prst="rect">
+            <a:avLst/>
+          </a:prstGeom>
+          <a:noFill/>
+          <a:ln/>
+        </p:spPr>
+        <p:txBody>
+          <a:bodyPr wrap="square" lIns="0" tIns="0" rIns="0" bIns="0" rtlCol="0" anchor="t"/>
+          <a:lstStyle/>
+          <a:p>
+            <a:pPr algn="l" indent="0" marL="0">
+              <a:lnSpc>
+                <a:spcPts val="1418"/>
+              </a:lnSpc>
+              <a:buNone/>
+            </a:pPr>
+            <a:r>
+              <a:rPr lang="en-US" sz="1050" dirty="0">
+                <a:solidFill>
+                  <a:srgbClr val="BCC9D6"/>
+                </a:solidFill>
+                <a:latin typeface="Malgun Gothic" pitchFamily="34" charset="0"/>
+                <a:ea typeface="Malgun Gothic" pitchFamily="34" charset="-122"/>
+                <a:cs typeface="Malgun Gothic" pitchFamily="34" charset="-120"/>
+              </a:rPr>
+              <a:t>· 현황 화면과 신호등</a:t>
+            </a:r>
+            <a:endParaRPr lang="en-US" sz="1050" dirty="0"/>
+          </a:p>
+        </p:txBody>
+      </p:sp>
+      <p:sp>
+        <p:nvSpPr>
+          <p:cNvPr id="36" name="Shape 34"/>
+          <p:cNvSpPr/>
+          <p:nvPr/>
+        </p:nvSpPr>
+        <p:spPr>
+          <a:xfrm>
+            <a:off x="6210300" y="4095750"/>
+            <a:ext cx="5295900" cy="19050"/>
+          </a:xfrm>
+          <a:prstGeom prst="rect">
+            <a:avLst/>
+          </a:prstGeom>
+          <a:solidFill>
+            <a:srgbClr val="22354A"/>
+          </a:solidFill>
+          <a:ln/>
+        </p:spPr>
+      </p:sp>
+      <p:sp>
+        <p:nvSpPr>
+          <p:cNvPr id="37" name="Text 35"/>
+          <p:cNvSpPr txBox="1"/>
+          <p:nvPr/>
+        </p:nvSpPr>
+        <p:spPr>
+          <a:xfrm>
+            <a:off x="6210300" y="4229100"/>
+            <a:ext cx="5295900" cy="125016"/>
+          </a:xfrm>
+          <a:prstGeom prst="rect">
+            <a:avLst/>
+          </a:prstGeom>
+          <a:noFill/>
+          <a:ln/>
+        </p:spPr>
+        <p:txBody>
+          <a:bodyPr wrap="square" lIns="0" tIns="0" rIns="0" bIns="0" rtlCol="0" anchor="t"/>
+          <a:lstStyle/>
+          <a:p>
+            <a:pPr algn="l" indent="0" marL="0">
+              <a:lnSpc>
+                <a:spcPts val="984"/>
+              </a:lnSpc>
+              <a:buNone/>
+            </a:pPr>
+            <a:r>
+              <a:rPr lang="en-US" sz="788" b="1" spc="150" kern="0" dirty="0">
+                <a:solidFill>
+                  <a:srgbClr val="5E7793"/>
+                </a:solidFill>
+                <a:latin typeface="Consolas" pitchFamily="34" charset="0"/>
+                <a:ea typeface="Consolas" pitchFamily="34" charset="-122"/>
+                <a:cs typeface="Consolas" pitchFamily="34" charset="-120"/>
+              </a:rPr>
+              <a:t>갈아끼우는 것</a:t>
+            </a:r>
+            <a:endParaRPr lang="en-US" sz="788" dirty="0"/>
+          </a:p>
+        </p:txBody>
+      </p:sp>
+      <p:sp>
+        <p:nvSpPr>
+          <p:cNvPr id="38" name="Text 36"/>
+          <p:cNvSpPr txBox="1"/>
+          <p:nvPr/>
+        </p:nvSpPr>
+        <p:spPr>
+          <a:xfrm>
+            <a:off x="6210300" y="4438650"/>
+            <a:ext cx="5295900" cy="284036"/>
+          </a:xfrm>
+          <a:prstGeom prst="rect">
+            <a:avLst/>
+          </a:prstGeom>
+          <a:noFill/>
+          <a:ln/>
+        </p:spPr>
+        <p:txBody>
+          <a:bodyPr wrap="square" lIns="0" tIns="0" rIns="0" bIns="0" rtlCol="0" anchor="t"/>
+          <a:lstStyle/>
+          <a:p>
+            <a:pPr algn="l" indent="0" marL="0">
+              <a:lnSpc>
+                <a:spcPts val="2237"/>
+              </a:lnSpc>
+              <a:buNone/>
+            </a:pPr>
+            <a:r>
+              <a:rPr lang="en-US" sz="1575" b="1" dirty="0">
+                <a:solidFill>
+                  <a:srgbClr val="EAE7E0"/>
+                </a:solidFill>
+                <a:latin typeface="Malgun Gothic" pitchFamily="34" charset="0"/>
+                <a:ea typeface="Malgun Gothic" pitchFamily="34" charset="-122"/>
+                <a:cs typeface="Malgun Gothic" pitchFamily="34" charset="-120"/>
+              </a:rPr>
+              <a:t>사업소마다 </a:t>
+            </a:r>
+            <a:pPr algn="l" indent="0" marL="0">
+              <a:lnSpc>
+                <a:spcPts val="2237"/>
+              </a:lnSpc>
+              <a:buNone/>
+            </a:pPr>
+            <a:r>
+              <a:rPr lang="en-US" sz="1575" b="1" dirty="0">
+                <a:solidFill>
+                  <a:srgbClr val="5E7793"/>
+                </a:solidFill>
+                <a:latin typeface="Malgun Gothic" pitchFamily="34" charset="0"/>
+                <a:ea typeface="Malgun Gothic" pitchFamily="34" charset="-122"/>
+                <a:cs typeface="Malgun Gothic" pitchFamily="34" charset="-120"/>
+              </a:rPr>
+              <a:t>다른 것</a:t>
+            </a:r>
+            <a:endParaRPr lang="en-US" sz="1575" dirty="0"/>
+          </a:p>
+        </p:txBody>
+      </p:sp>
+      <p:sp>
+        <p:nvSpPr>
+          <p:cNvPr id="39" name="Text 37"/>
+          <p:cNvSpPr txBox="1"/>
+          <p:nvPr/>
+        </p:nvSpPr>
+        <p:spPr>
+          <a:xfrm>
+            <a:off x="6210300" y="4819650"/>
+            <a:ext cx="5295900" cy="180023"/>
+          </a:xfrm>
+          <a:prstGeom prst="rect">
+            <a:avLst/>
+          </a:prstGeom>
+          <a:noFill/>
+          <a:ln/>
+        </p:spPr>
+        <p:txBody>
+          <a:bodyPr wrap="square" lIns="0" tIns="0" rIns="0" bIns="0" rtlCol="0" anchor="t"/>
+          <a:lstStyle/>
+          <a:p>
+            <a:pPr algn="l" indent="0" marL="0">
+              <a:lnSpc>
+                <a:spcPts val="1418"/>
+              </a:lnSpc>
+              <a:buNone/>
+            </a:pPr>
+            <a:r>
+              <a:rPr lang="en-US" sz="1050" dirty="0">
+                <a:solidFill>
+                  <a:srgbClr val="BCC9D6"/>
+                </a:solidFill>
+                <a:latin typeface="Malgun Gothic" pitchFamily="34" charset="0"/>
+                <a:ea typeface="Malgun Gothic" pitchFamily="34" charset="-122"/>
+                <a:cs typeface="Malgun Gothic" pitchFamily="34" charset="-120"/>
+              </a:rPr>
+              <a:t>· 그 설비의 이론 출력 계산식</a:t>
+            </a:r>
+            <a:endParaRPr lang="en-US" sz="1050" dirty="0"/>
+          </a:p>
+        </p:txBody>
+      </p:sp>
+      <p:sp>
+        <p:nvSpPr>
+          <p:cNvPr id="40" name="Text 38"/>
+          <p:cNvSpPr txBox="1"/>
+          <p:nvPr/>
+        </p:nvSpPr>
+        <p:spPr>
+          <a:xfrm>
+            <a:off x="6210300" y="5086350"/>
+            <a:ext cx="5295900" cy="180023"/>
+          </a:xfrm>
+          <a:prstGeom prst="rect">
+            <a:avLst/>
+          </a:prstGeom>
+          <a:noFill/>
+          <a:ln/>
+        </p:spPr>
+        <p:txBody>
+          <a:bodyPr wrap="square" lIns="0" tIns="0" rIns="0" bIns="0" rtlCol="0" anchor="t"/>
+          <a:lstStyle/>
+          <a:p>
+            <a:pPr algn="l" indent="0" marL="0">
+              <a:lnSpc>
+                <a:spcPts val="1418"/>
+              </a:lnSpc>
+              <a:buNone/>
+            </a:pPr>
+            <a:r>
+              <a:rPr lang="en-US" sz="1050" dirty="0">
+                <a:solidFill>
+                  <a:srgbClr val="BCC9D6"/>
+                </a:solidFill>
+                <a:latin typeface="Malgun Gothic" pitchFamily="34" charset="0"/>
+                <a:ea typeface="Malgun Gothic" pitchFamily="34" charset="-122"/>
+                <a:cs typeface="Malgun Gothic" pitchFamily="34" charset="-120"/>
+              </a:rPr>
+              <a:t>· 설비 상수와 성능 곡선</a:t>
+            </a:r>
+            <a:endParaRPr lang="en-US" sz="1050" dirty="0"/>
+          </a:p>
+        </p:txBody>
+      </p:sp>
+      <p:sp>
+        <p:nvSpPr>
+          <p:cNvPr id="41" name="Text 39"/>
+          <p:cNvSpPr txBox="1"/>
+          <p:nvPr/>
+        </p:nvSpPr>
+        <p:spPr>
+          <a:xfrm>
+            <a:off x="6210300" y="5353050"/>
+            <a:ext cx="5295900" cy="180023"/>
+          </a:xfrm>
+          <a:prstGeom prst="rect">
+            <a:avLst/>
+          </a:prstGeom>
+          <a:noFill/>
+          <a:ln/>
+        </p:spPr>
+        <p:txBody>
+          <a:bodyPr wrap="square" lIns="0" tIns="0" rIns="0" bIns="0" rtlCol="0" anchor="t"/>
+          <a:lstStyle/>
+          <a:p>
+            <a:pPr algn="l" indent="0" marL="0">
+              <a:lnSpc>
+                <a:spcPts val="1418"/>
+              </a:lnSpc>
+              <a:buNone/>
+            </a:pPr>
+            <a:r>
+              <a:rPr lang="en-US" sz="1050" dirty="0">
+                <a:solidFill>
+                  <a:srgbClr val="BCC9D6"/>
+                </a:solidFill>
+                <a:latin typeface="Malgun Gothic" pitchFamily="34" charset="0"/>
+                <a:ea typeface="Malgun Gothic" pitchFamily="34" charset="-122"/>
+                <a:cs typeface="Malgun Gothic" pitchFamily="34" charset="-120"/>
+              </a:rPr>
+              <a:t>· 신고 서식의 수식 규칙</a:t>
+            </a:r>
+            <a:endParaRPr lang="en-US" sz="1050" dirty="0"/>
+          </a:p>
+        </p:txBody>
+      </p:sp>
+      <p:sp>
+        <p:nvSpPr>
+          <p:cNvPr id="42" name="Text 40"/>
+          <p:cNvSpPr txBox="1"/>
+          <p:nvPr/>
+        </p:nvSpPr>
+        <p:spPr>
+          <a:xfrm>
+            <a:off x="6210300" y="5657850"/>
+            <a:ext cx="5295900" cy="240030"/>
+          </a:xfrm>
+          <a:prstGeom prst="rect">
+            <a:avLst/>
+          </a:prstGeom>
+          <a:noFill/>
+          <a:ln/>
+        </p:spPr>
+        <p:txBody>
+          <a:bodyPr wrap="square" lIns="0" tIns="0" rIns="0" bIns="0" rtlCol="0" anchor="t"/>
+          <a:lstStyle/>
+          <a:p>
+            <a:pPr algn="l" indent="0" marL="0">
+              <a:lnSpc>
+                <a:spcPts val="1890"/>
+              </a:lnSpc>
+              <a:buNone/>
+            </a:pPr>
+            <a:r>
+              <a:rPr lang="en-US" sz="1125" dirty="0">
+                <a:solidFill>
+                  <a:srgbClr val="BCC9D6"/>
+                </a:solidFill>
+                <a:latin typeface="Malgun Gothic" pitchFamily="34" charset="0"/>
+                <a:ea typeface="Malgun Gothic" pitchFamily="34" charset="-122"/>
+                <a:cs typeface="Malgun Gothic" pitchFamily="34" charset="-120"/>
+              </a:rPr>
+              <a:t>먼저 이론값을 그 사업소 실적으로 재현하는 것이 첫 단계입니다.</a:t>
+            </a:r>
+            <a:endParaRPr lang="en-US" sz="1125" dirty="0"/>
+          </a:p>
+        </p:txBody>
+      </p:sp>
+      <p:sp>
+        <p:nvSpPr>
+          <p:cNvPr id="43" name="Shape 41"/>
           <p:cNvSpPr/>
           <p:nvPr/>
         </p:nvSpPr>
@@ -9497,6 +17366,124 @@
             <a:prstDash val="solid"/>
           </a:ln>
         </p:spPr>
+      </p:sp>
+      <p:sp>
+        <p:nvSpPr>
+          <p:cNvPr id="44" name="Text 42"/>
+          <p:cNvSpPr txBox="1"/>
+          <p:nvPr/>
+        </p:nvSpPr>
+        <p:spPr>
+          <a:xfrm>
+            <a:off x="685800" y="6267450"/>
+            <a:ext cx="476250" cy="120015"/>
+          </a:xfrm>
+          <a:prstGeom prst="rect">
+            <a:avLst/>
+          </a:prstGeom>
+          <a:noFill/>
+          <a:ln/>
+        </p:spPr>
+        <p:txBody>
+          <a:bodyPr wrap="square" lIns="0" tIns="0" rIns="0" bIns="0" rtlCol="0" anchor="t"/>
+          <a:lstStyle/>
+          <a:p>
+            <a:pPr algn="l" indent="0" marL="0">
+              <a:lnSpc>
+                <a:spcPts val="945"/>
+              </a:lnSpc>
+              <a:buNone/>
+            </a:pPr>
+            <a:r>
+              <a:rPr lang="en-US" sz="788" b="1" spc="180" kern="0" dirty="0">
+                <a:solidFill>
+                  <a:srgbClr val="EFB13C"/>
+                </a:solidFill>
+                <a:latin typeface="Consolas" pitchFamily="34" charset="0"/>
+                <a:ea typeface="Consolas" pitchFamily="34" charset="-122"/>
+                <a:cs typeface="Consolas" pitchFamily="34" charset="-120"/>
+              </a:rPr>
+              <a:t>결론</a:t>
+            </a:r>
+            <a:endParaRPr lang="en-US" sz="788" dirty="0"/>
+          </a:p>
+        </p:txBody>
+      </p:sp>
+      <p:sp>
+        <p:nvSpPr>
+          <p:cNvPr id="45" name="Text 43"/>
+          <p:cNvSpPr txBox="1"/>
+          <p:nvPr/>
+        </p:nvSpPr>
+        <p:spPr>
+          <a:xfrm>
+            <a:off x="1219200" y="6229350"/>
+            <a:ext cx="10287000" cy="220027"/>
+          </a:xfrm>
+          <a:prstGeom prst="rect">
+            <a:avLst/>
+          </a:prstGeom>
+          <a:noFill/>
+          <a:ln/>
+        </p:spPr>
+        <p:txBody>
+          <a:bodyPr wrap="square" lIns="0" tIns="0" rIns="0" bIns="0" rtlCol="0" anchor="t"/>
+          <a:lstStyle/>
+          <a:p>
+            <a:pPr algn="l" indent="0" marL="0">
+              <a:lnSpc>
+                <a:spcPts val="1733"/>
+              </a:lnSpc>
+              <a:buNone/>
+            </a:pPr>
+            <a:r>
+              <a:rPr lang="en-US" sz="1238" dirty="0">
+                <a:solidFill>
+                  <a:srgbClr val="BCC9D6"/>
+                </a:solidFill>
+                <a:latin typeface="Malgun Gothic" pitchFamily="34" charset="0"/>
+                <a:ea typeface="Malgun Gothic" pitchFamily="34" charset="-122"/>
+                <a:cs typeface="Malgun Gothic" pitchFamily="34" charset="-120"/>
+              </a:rPr>
+              <a:t>한 사업소를 위해 만든 것이 아닙니다 — </a:t>
+            </a:r>
+            <a:pPr algn="l" indent="0" marL="0">
+              <a:lnSpc>
+                <a:spcPts val="1733"/>
+              </a:lnSpc>
+              <a:buNone/>
+            </a:pPr>
+            <a:r>
+              <a:rPr lang="en-US" sz="1238" b="1" dirty="0">
+                <a:solidFill>
+                  <a:srgbClr val="EFB13C"/>
+                </a:solidFill>
+                <a:latin typeface="Malgun Gothic" pitchFamily="34" charset="0"/>
+                <a:ea typeface="Malgun Gothic" pitchFamily="34" charset="-122"/>
+                <a:cs typeface="Malgun Gothic" pitchFamily="34" charset="-120"/>
+              </a:rPr>
+              <a:t>같은 구조라면 이론만 바꿔 씁니다</a:t>
+            </a:r>
+            <a:pPr algn="l" indent="0" marL="0">
+              <a:lnSpc>
+                <a:spcPts val="1733"/>
+              </a:lnSpc>
+              <a:buNone/>
+            </a:pPr>
+            <a:r>
+              <a:rPr lang="en-US" sz="1238" dirty="0">
+                <a:solidFill>
+                  <a:srgbClr val="BCC9D6"/>
+                </a:solidFill>
+                <a:latin typeface="Malgun Gothic" pitchFamily="34" charset="0"/>
+                <a:ea typeface="Malgun Gothic" pitchFamily="34" charset="-122"/>
+                <a:cs typeface="Malgun Gothic" pitchFamily="34" charset="-120"/>
+              </a:rPr>
+              <a:t>.</a:t>
+            </a:r>
+            <a:endParaRPr lang="en-US" sz="1238" dirty="0"/>
+          </a:p>
+        </p:txBody>
       </p:sp>
     </p:spTree>
   </p:cSld>

--- a/docs/ppt/위례_공급가능용량_최종발표.pptx
+++ b/docs/ppt/위례_공급가능용량_최종발표.pptx
@@ -2152,7 +2152,7 @@
         </p:nvSpPr>
         <p:spPr>
           <a:xfrm>
-            <a:off x="685800" y="381000"/>
+            <a:off x="685800" y="419100"/>
             <a:ext cx="5715000" cy="142875"/>
           </a:xfrm>
           <a:prstGeom prst="rect">
@@ -2194,7 +2194,7 @@
         </p:nvSpPr>
         <p:spPr>
           <a:xfrm>
-            <a:off x="9601200" y="381000"/>
+            <a:off x="9601200" y="419100"/>
             <a:ext cx="1905000" cy="142875"/>
           </a:xfrm>
           <a:prstGeom prst="rect">
@@ -2237,26 +2237,26 @@
         <p:spPr>
           <a:xfrm>
             <a:off x="685800" y="1066800"/>
-            <a:ext cx="5676900" cy="1128141"/>
-          </a:xfrm>
-          <a:prstGeom prst="rect">
-            <a:avLst/>
-          </a:prstGeom>
-          <a:noFill/>
-          <a:ln/>
-        </p:spPr>
-        <p:txBody>
-          <a:bodyPr wrap="square" lIns="0" tIns="0" rIns="0" bIns="0" rtlCol="0" anchor="t"/>
-          <a:lstStyle/>
-          <a:p>
-            <a:pPr algn="l" indent="0" marL="0">
-              <a:lnSpc>
-                <a:spcPts val="4442"/>
-              </a:lnSpc>
-              <a:buNone/>
-            </a:pPr>
-            <a:r>
-              <a:rPr lang="en-US" sz="3525" b="1" dirty="0">
+            <a:ext cx="5619750" cy="1056132"/>
+          </a:xfrm>
+          <a:prstGeom prst="rect">
+            <a:avLst/>
+          </a:prstGeom>
+          <a:noFill/>
+          <a:ln/>
+        </p:spPr>
+        <p:txBody>
+          <a:bodyPr wrap="square" lIns="0" tIns="0" rIns="0" bIns="0" rtlCol="0" anchor="t"/>
+          <a:lstStyle/>
+          <a:p>
+            <a:pPr algn="l" indent="0" marL="0">
+              <a:lnSpc>
+                <a:spcPts val="4158"/>
+              </a:lnSpc>
+              <a:buNone/>
+            </a:pPr>
+            <a:r>
+              <a:rPr lang="en-US" sz="3300" b="1" dirty="0">
                 <a:solidFill>
                   <a:srgbClr val="EAE7E0"/>
                 </a:solidFill>
@@ -2266,17 +2266,17 @@
               </a:rPr>
               <a:t>공급가능용량 산정,</a:t>
             </a:r>
-            <a:endParaRPr lang="en-US" sz="3525" dirty="0"/>
-          </a:p>
-          <a:p>
-            <a:pPr algn="l" indent="0" marL="0">
-              <a:lnSpc>
-                <a:spcPts val="4442"/>
-              </a:lnSpc>
-              <a:buNone/>
-            </a:pPr>
-            <a:r>
-              <a:rPr lang="en-US" sz="3525" b="1" dirty="0">
+            <a:endParaRPr lang="en-US" sz="3300" dirty="0"/>
+          </a:p>
+          <a:p>
+            <a:pPr algn="l" indent="0" marL="0">
+              <a:lnSpc>
+                <a:spcPts val="4158"/>
+              </a:lnSpc>
+              <a:buNone/>
+            </a:pPr>
+            <a:r>
+              <a:rPr lang="en-US" sz="3300" b="1" dirty="0">
                 <a:solidFill>
                   <a:srgbClr val="EAE7E0"/>
                 </a:solidFill>
@@ -2288,12 +2288,12 @@
             </a:r>
             <a:pPr algn="l" indent="0" marL="0">
               <a:lnSpc>
-                <a:spcPts val="4442"/>
-              </a:lnSpc>
-              <a:buNone/>
-            </a:pPr>
-            <a:r>
-              <a:rPr lang="en-US" sz="3525" b="1" dirty="0">
+                <a:spcPts val="4158"/>
+              </a:lnSpc>
+              <a:buNone/>
+            </a:pPr>
+            <a:r>
+              <a:rPr lang="en-US" sz="3300" b="1" dirty="0">
                 <a:solidFill>
                   <a:srgbClr val="EFB13C"/>
                 </a:solidFill>
@@ -2303,7 +2303,7 @@
               </a:rPr>
               <a:t>데이터로</a:t>
             </a:r>
-            <a:endParaRPr lang="en-US" sz="3525" dirty="0"/>
+            <a:endParaRPr lang="en-US" sz="3300" dirty="0"/>
           </a:p>
         </p:txBody>
       </p:sp>
@@ -4440,7 +4440,7 @@
         </p:nvSpPr>
         <p:spPr>
           <a:xfrm>
-            <a:off x="685800" y="381000"/>
+            <a:off x="685800" y="419100"/>
             <a:ext cx="5715000" cy="142875"/>
           </a:xfrm>
           <a:prstGeom prst="rect">
@@ -4499,7 +4499,7 @@
         </p:nvSpPr>
         <p:spPr>
           <a:xfrm>
-            <a:off x="10677525" y="466725"/>
+            <a:off x="10677525" y="504825"/>
             <a:ext cx="28575" cy="47625"/>
           </a:xfrm>
           <a:prstGeom prst="rect">
@@ -4519,7 +4519,7 @@
         </p:nvSpPr>
         <p:spPr>
           <a:xfrm>
-            <a:off x="10810875" y="466725"/>
+            <a:off x="10810875" y="504825"/>
             <a:ext cx="28575" cy="47625"/>
           </a:xfrm>
           <a:prstGeom prst="rect">
@@ -4539,7 +4539,7 @@
         </p:nvSpPr>
         <p:spPr>
           <a:xfrm>
-            <a:off x="10944225" y="466725"/>
+            <a:off x="10944225" y="504825"/>
             <a:ext cx="28575" cy="47625"/>
           </a:xfrm>
           <a:prstGeom prst="rect">
@@ -4559,7 +4559,7 @@
         </p:nvSpPr>
         <p:spPr>
           <a:xfrm>
-            <a:off x="11077575" y="390525"/>
+            <a:off x="11077575" y="428625"/>
             <a:ext cx="28575" cy="123825"/>
           </a:xfrm>
           <a:prstGeom prst="rect">
@@ -4579,7 +4579,7 @@
         </p:nvSpPr>
         <p:spPr>
           <a:xfrm>
-            <a:off x="11210925" y="466725"/>
+            <a:off x="11210925" y="504825"/>
             <a:ext cx="28575" cy="47625"/>
           </a:xfrm>
           <a:prstGeom prst="rect">
@@ -4599,7 +4599,7 @@
         </p:nvSpPr>
         <p:spPr>
           <a:xfrm>
-            <a:off x="11344275" y="466725"/>
+            <a:off x="11344275" y="504825"/>
             <a:ext cx="28575" cy="47625"/>
           </a:xfrm>
           <a:prstGeom prst="rect">
@@ -4619,7 +4619,7 @@
         </p:nvSpPr>
         <p:spPr>
           <a:xfrm>
-            <a:off x="11477625" y="466725"/>
+            <a:off x="11477625" y="504825"/>
             <a:ext cx="28575" cy="47625"/>
           </a:xfrm>
           <a:prstGeom prst="rect">
@@ -7398,7 +7398,7 @@
         </p:nvSpPr>
         <p:spPr>
           <a:xfrm>
-            <a:off x="685800" y="381000"/>
+            <a:off x="685800" y="419100"/>
             <a:ext cx="5715000" cy="142875"/>
           </a:xfrm>
           <a:prstGeom prst="rect">
@@ -7457,7 +7457,7 @@
         </p:nvSpPr>
         <p:spPr>
           <a:xfrm>
-            <a:off x="10677525" y="466725"/>
+            <a:off x="10677525" y="504825"/>
             <a:ext cx="28575" cy="47625"/>
           </a:xfrm>
           <a:prstGeom prst="rect">
@@ -7477,7 +7477,7 @@
         </p:nvSpPr>
         <p:spPr>
           <a:xfrm>
-            <a:off x="10810875" y="466725"/>
+            <a:off x="10810875" y="504825"/>
             <a:ext cx="28575" cy="47625"/>
           </a:xfrm>
           <a:prstGeom prst="rect">
@@ -7497,7 +7497,7 @@
         </p:nvSpPr>
         <p:spPr>
           <a:xfrm>
-            <a:off x="10944225" y="466725"/>
+            <a:off x="10944225" y="504825"/>
             <a:ext cx="28575" cy="47625"/>
           </a:xfrm>
           <a:prstGeom prst="rect">
@@ -7517,7 +7517,7 @@
         </p:nvSpPr>
         <p:spPr>
           <a:xfrm>
-            <a:off x="11077575" y="466725"/>
+            <a:off x="11077575" y="504825"/>
             <a:ext cx="28575" cy="47625"/>
           </a:xfrm>
           <a:prstGeom prst="rect">
@@ -7537,7 +7537,7 @@
         </p:nvSpPr>
         <p:spPr>
           <a:xfrm>
-            <a:off x="11210925" y="390525"/>
+            <a:off x="11210925" y="428625"/>
             <a:ext cx="28575" cy="123825"/>
           </a:xfrm>
           <a:prstGeom prst="rect">
@@ -7557,7 +7557,7 @@
         </p:nvSpPr>
         <p:spPr>
           <a:xfrm>
-            <a:off x="11344275" y="466725"/>
+            <a:off x="11344275" y="504825"/>
             <a:ext cx="28575" cy="47625"/>
           </a:xfrm>
           <a:prstGeom prst="rect">
@@ -7577,7 +7577,7 @@
         </p:nvSpPr>
         <p:spPr>
           <a:xfrm>
-            <a:off x="11477625" y="466725"/>
+            <a:off x="11477625" y="504825"/>
             <a:ext cx="28575" cy="47625"/>
           </a:xfrm>
           <a:prstGeom prst="rect">
@@ -10100,7 +10100,7 @@
         </p:nvSpPr>
         <p:spPr>
           <a:xfrm>
-            <a:off x="685800" y="381000"/>
+            <a:off x="685800" y="419100"/>
             <a:ext cx="5715000" cy="142875"/>
           </a:xfrm>
           <a:prstGeom prst="rect">
@@ -10159,7 +10159,7 @@
         </p:nvSpPr>
         <p:spPr>
           <a:xfrm>
-            <a:off x="10677525" y="466725"/>
+            <a:off x="10677525" y="504825"/>
             <a:ext cx="28575" cy="47625"/>
           </a:xfrm>
           <a:prstGeom prst="rect">
@@ -10179,7 +10179,7 @@
         </p:nvSpPr>
         <p:spPr>
           <a:xfrm>
-            <a:off x="10810875" y="466725"/>
+            <a:off x="10810875" y="504825"/>
             <a:ext cx="28575" cy="47625"/>
           </a:xfrm>
           <a:prstGeom prst="rect">
@@ -10199,7 +10199,7 @@
         </p:nvSpPr>
         <p:spPr>
           <a:xfrm>
-            <a:off x="10944225" y="466725"/>
+            <a:off x="10944225" y="504825"/>
             <a:ext cx="28575" cy="47625"/>
           </a:xfrm>
           <a:prstGeom prst="rect">
@@ -10219,7 +10219,7 @@
         </p:nvSpPr>
         <p:spPr>
           <a:xfrm>
-            <a:off x="11077575" y="466725"/>
+            <a:off x="11077575" y="504825"/>
             <a:ext cx="28575" cy="47625"/>
           </a:xfrm>
           <a:prstGeom prst="rect">
@@ -10239,7 +10239,7 @@
         </p:nvSpPr>
         <p:spPr>
           <a:xfrm>
-            <a:off x="11210925" y="390525"/>
+            <a:off x="11210925" y="428625"/>
             <a:ext cx="28575" cy="123825"/>
           </a:xfrm>
           <a:prstGeom prst="rect">
@@ -10259,7 +10259,7 @@
         </p:nvSpPr>
         <p:spPr>
           <a:xfrm>
-            <a:off x="11344275" y="466725"/>
+            <a:off x="11344275" y="504825"/>
             <a:ext cx="28575" cy="47625"/>
           </a:xfrm>
           <a:prstGeom prst="rect">
@@ -10279,7 +10279,7 @@
         </p:nvSpPr>
         <p:spPr>
           <a:xfrm>
-            <a:off x="11477625" y="466725"/>
+            <a:off x="11477625" y="504825"/>
             <a:ext cx="28575" cy="47625"/>
           </a:xfrm>
           <a:prstGeom prst="rect">
@@ -10669,7 +10669,7 @@
         <p:spPr>
           <a:xfrm>
             <a:off x="838200" y="4591050"/>
-            <a:ext cx="1238250" cy="260033"/>
+            <a:ext cx="468535" cy="260033"/>
           </a:xfrm>
           <a:prstGeom prst="rect">
             <a:avLst/>
@@ -10710,8 +10710,8 @@
         </p:nvSpPr>
         <p:spPr>
           <a:xfrm>
-            <a:off x="1323975" y="4667250"/>
-            <a:ext cx="476250" cy="148590"/>
+            <a:off x="1363885" y="4714875"/>
+            <a:ext cx="400050" cy="148590"/>
           </a:xfrm>
           <a:prstGeom prst="rect">
             <a:avLst/>
@@ -11104,7 +11104,7 @@
         <p:spPr>
           <a:xfrm>
             <a:off x="4514850" y="4591050"/>
-            <a:ext cx="1238250" cy="260033"/>
+            <a:ext cx="618363" cy="260033"/>
           </a:xfrm>
           <a:prstGeom prst="rect">
             <a:avLst/>
@@ -11145,8 +11145,8 @@
         </p:nvSpPr>
         <p:spPr>
           <a:xfrm>
-            <a:off x="5162550" y="4667250"/>
-            <a:ext cx="476250" cy="148590"/>
+            <a:off x="5190363" y="4714875"/>
+            <a:ext cx="400050" cy="148590"/>
           </a:xfrm>
           <a:prstGeom prst="rect">
             <a:avLst/>
@@ -11539,7 +11539,7 @@
         <p:spPr>
           <a:xfrm>
             <a:off x="8191500" y="4591050"/>
-            <a:ext cx="1238250" cy="260033"/>
+            <a:ext cx="468535" cy="260033"/>
           </a:xfrm>
           <a:prstGeom prst="rect">
             <a:avLst/>
@@ -11580,8 +11580,8 @@
         </p:nvSpPr>
         <p:spPr>
           <a:xfrm>
-            <a:off x="8677275" y="4667250"/>
-            <a:ext cx="476250" cy="148590"/>
+            <a:off x="8717185" y="4714875"/>
+            <a:ext cx="400050" cy="148590"/>
           </a:xfrm>
           <a:prstGeom prst="rect">
             <a:avLst/>
@@ -11955,7 +11955,7 @@
         </p:nvSpPr>
         <p:spPr>
           <a:xfrm>
-            <a:off x="685800" y="381000"/>
+            <a:off x="685800" y="419100"/>
             <a:ext cx="5715000" cy="142875"/>
           </a:xfrm>
           <a:prstGeom prst="rect">
@@ -12014,7 +12014,7 @@
         </p:nvSpPr>
         <p:spPr>
           <a:xfrm>
-            <a:off x="10677525" y="466725"/>
+            <a:off x="10677525" y="504825"/>
             <a:ext cx="28575" cy="47625"/>
           </a:xfrm>
           <a:prstGeom prst="rect">
@@ -12034,7 +12034,7 @@
         </p:nvSpPr>
         <p:spPr>
           <a:xfrm>
-            <a:off x="10810875" y="466725"/>
+            <a:off x="10810875" y="504825"/>
             <a:ext cx="28575" cy="47625"/>
           </a:xfrm>
           <a:prstGeom prst="rect">
@@ -12054,7 +12054,7 @@
         </p:nvSpPr>
         <p:spPr>
           <a:xfrm>
-            <a:off x="10944225" y="466725"/>
+            <a:off x="10944225" y="504825"/>
             <a:ext cx="28575" cy="47625"/>
           </a:xfrm>
           <a:prstGeom prst="rect">
@@ -12074,7 +12074,7 @@
         </p:nvSpPr>
         <p:spPr>
           <a:xfrm>
-            <a:off x="11077575" y="466725"/>
+            <a:off x="11077575" y="504825"/>
             <a:ext cx="28575" cy="47625"/>
           </a:xfrm>
           <a:prstGeom prst="rect">
@@ -12094,7 +12094,7 @@
         </p:nvSpPr>
         <p:spPr>
           <a:xfrm>
-            <a:off x="11210925" y="466725"/>
+            <a:off x="11210925" y="504825"/>
             <a:ext cx="28575" cy="47625"/>
           </a:xfrm>
           <a:prstGeom prst="rect">
@@ -12114,7 +12114,7 @@
         </p:nvSpPr>
         <p:spPr>
           <a:xfrm>
-            <a:off x="11344275" y="390525"/>
+            <a:off x="11344275" y="428625"/>
             <a:ext cx="28575" cy="123825"/>
           </a:xfrm>
           <a:prstGeom prst="rect">
@@ -12134,7 +12134,7 @@
         </p:nvSpPr>
         <p:spPr>
           <a:xfrm>
-            <a:off x="11477625" y="466725"/>
+            <a:off x="11477625" y="504825"/>
             <a:ext cx="28575" cy="47625"/>
           </a:xfrm>
           <a:prstGeom prst="rect">
@@ -12695,7 +12695,7 @@
         <p:spPr>
           <a:xfrm>
             <a:off x="3981450" y="3543300"/>
-            <a:ext cx="228600" cy="160020"/>
+            <a:ext cx="190500" cy="160020"/>
           </a:xfrm>
           <a:prstGeom prst="rect">
             <a:avLst/>
@@ -12928,7 +12928,7 @@
         <p:spPr>
           <a:xfrm>
             <a:off x="3981450" y="3905250"/>
-            <a:ext cx="228600" cy="160020"/>
+            <a:ext cx="190500" cy="160020"/>
           </a:xfrm>
           <a:prstGeom prst="rect">
             <a:avLst/>
@@ -13161,7 +13161,7 @@
         <p:spPr>
           <a:xfrm>
             <a:off x="3981450" y="4267200"/>
-            <a:ext cx="228600" cy="160020"/>
+            <a:ext cx="190500" cy="160020"/>
           </a:xfrm>
           <a:prstGeom prst="rect">
             <a:avLst/>
@@ -13394,7 +13394,7 @@
         <p:spPr>
           <a:xfrm>
             <a:off x="3981450" y="4629150"/>
-            <a:ext cx="228600" cy="160020"/>
+            <a:ext cx="190500" cy="160020"/>
           </a:xfrm>
           <a:prstGeom prst="rect">
             <a:avLst/>
@@ -13627,7 +13627,7 @@
         <p:spPr>
           <a:xfrm>
             <a:off x="3981450" y="4991100"/>
-            <a:ext cx="228600" cy="160020"/>
+            <a:ext cx="190500" cy="160020"/>
           </a:xfrm>
           <a:prstGeom prst="rect">
             <a:avLst/>
@@ -13958,7 +13958,7 @@
         <p:spPr>
           <a:xfrm>
             <a:off x="7886700" y="3409950"/>
-            <a:ext cx="1238250" cy="240030"/>
+            <a:ext cx="710565" cy="240030"/>
           </a:xfrm>
           <a:prstGeom prst="rect">
             <a:avLst/>
@@ -13999,29 +13999,29 @@
         </p:nvSpPr>
         <p:spPr>
           <a:xfrm>
-            <a:off x="8639175" y="3486150"/>
-            <a:ext cx="381000" cy="137160"/>
-          </a:xfrm>
-          <a:prstGeom prst="rect">
-            <a:avLst/>
-          </a:prstGeom>
-          <a:noFill/>
-          <a:ln/>
-        </p:spPr>
-        <p:txBody>
-          <a:bodyPr wrap="square" lIns="0" tIns="0" rIns="0" bIns="0" rtlCol="0" anchor="t"/>
-          <a:lstStyle/>
-          <a:p>
-            <a:pPr algn="l" indent="0" marL="0">
-              <a:lnSpc>
-                <a:spcPts val="1080"/>
-              </a:lnSpc>
-              <a:buNone/>
-            </a:pPr>
-            <a:r>
-              <a:rPr lang="en-US" sz="900" dirty="0">
-                <a:solidFill>
-                  <a:srgbClr val="63798F"/>
+            <a:off x="8654415" y="3524250"/>
+            <a:ext cx="400050" cy="148590"/>
+          </a:xfrm>
+          <a:prstGeom prst="rect">
+            <a:avLst/>
+          </a:prstGeom>
+          <a:noFill/>
+          <a:ln/>
+        </p:spPr>
+        <p:txBody>
+          <a:bodyPr wrap="square" lIns="0" tIns="0" rIns="0" bIns="0" rtlCol="0" anchor="t"/>
+          <a:lstStyle/>
+          <a:p>
+            <a:pPr algn="l" indent="0" marL="0">
+              <a:lnSpc>
+                <a:spcPts val="1170"/>
+              </a:lnSpc>
+              <a:buNone/>
+            </a:pPr>
+            <a:r>
+              <a:rPr lang="en-US" sz="975" dirty="0">
+                <a:solidFill>
+                  <a:srgbClr val="93A6BA"/>
                 </a:solidFill>
                 <a:latin typeface="Malgun Gothic" pitchFamily="34" charset="0"/>
                 <a:ea typeface="Malgun Gothic" pitchFamily="34" charset="-122"/>
@@ -14029,7 +14029,7 @@
               </a:rPr>
               <a:t>MW</a:t>
             </a:r>
-            <a:endParaRPr lang="en-US" sz="900" dirty="0"/>
+            <a:endParaRPr lang="en-US" sz="975" dirty="0"/>
           </a:p>
         </p:txBody>
       </p:sp>
@@ -14084,7 +14084,7 @@
         <p:spPr>
           <a:xfrm>
             <a:off x="9715500" y="3409950"/>
-            <a:ext cx="1238250" cy="240030"/>
+            <a:ext cx="572262" cy="240030"/>
           </a:xfrm>
           <a:prstGeom prst="rect">
             <a:avLst/>
@@ -14125,29 +14125,29 @@
         </p:nvSpPr>
         <p:spPr>
           <a:xfrm>
-            <a:off x="10325100" y="3486150"/>
-            <a:ext cx="381000" cy="137160"/>
-          </a:xfrm>
-          <a:prstGeom prst="rect">
-            <a:avLst/>
-          </a:prstGeom>
-          <a:noFill/>
-          <a:ln/>
-        </p:spPr>
-        <p:txBody>
-          <a:bodyPr wrap="square" lIns="0" tIns="0" rIns="0" bIns="0" rtlCol="0" anchor="t"/>
-          <a:lstStyle/>
-          <a:p>
-            <a:pPr algn="l" indent="0" marL="0">
-              <a:lnSpc>
-                <a:spcPts val="1080"/>
-              </a:lnSpc>
-              <a:buNone/>
-            </a:pPr>
-            <a:r>
-              <a:rPr lang="en-US" sz="900" dirty="0">
-                <a:solidFill>
-                  <a:srgbClr val="63798F"/>
+            <a:off x="10344912" y="3524250"/>
+            <a:ext cx="400050" cy="148590"/>
+          </a:xfrm>
+          <a:prstGeom prst="rect">
+            <a:avLst/>
+          </a:prstGeom>
+          <a:noFill/>
+          <a:ln/>
+        </p:spPr>
+        <p:txBody>
+          <a:bodyPr wrap="square" lIns="0" tIns="0" rIns="0" bIns="0" rtlCol="0" anchor="t"/>
+          <a:lstStyle/>
+          <a:p>
+            <a:pPr algn="l" indent="0" marL="0">
+              <a:lnSpc>
+                <a:spcPts val="1170"/>
+              </a:lnSpc>
+              <a:buNone/>
+            </a:pPr>
+            <a:r>
+              <a:rPr lang="en-US" sz="975" dirty="0">
+                <a:solidFill>
+                  <a:srgbClr val="93A6BA"/>
                 </a:solidFill>
                 <a:latin typeface="Malgun Gothic" pitchFamily="34" charset="0"/>
                 <a:ea typeface="Malgun Gothic" pitchFamily="34" charset="-122"/>
@@ -14155,7 +14155,7 @@
               </a:rPr>
               <a:t>MW</a:t>
             </a:r>
-            <a:endParaRPr lang="en-US" sz="900" dirty="0"/>
+            <a:endParaRPr lang="en-US" sz="975" dirty="0"/>
           </a:p>
         </p:txBody>
       </p:sp>
@@ -14210,7 +14210,7 @@
         <p:spPr>
           <a:xfrm>
             <a:off x="7886700" y="4076700"/>
-            <a:ext cx="1238250" cy="240030"/>
+            <a:ext cx="572262" cy="240030"/>
           </a:xfrm>
           <a:prstGeom prst="rect">
             <a:avLst/>
@@ -14251,29 +14251,29 @@
         </p:nvSpPr>
         <p:spPr>
           <a:xfrm>
-            <a:off x="8496300" y="4152900"/>
-            <a:ext cx="381000" cy="137160"/>
-          </a:xfrm>
-          <a:prstGeom prst="rect">
-            <a:avLst/>
-          </a:prstGeom>
-          <a:noFill/>
-          <a:ln/>
-        </p:spPr>
-        <p:txBody>
-          <a:bodyPr wrap="square" lIns="0" tIns="0" rIns="0" bIns="0" rtlCol="0" anchor="t"/>
-          <a:lstStyle/>
-          <a:p>
-            <a:pPr algn="l" indent="0" marL="0">
-              <a:lnSpc>
-                <a:spcPts val="1080"/>
-              </a:lnSpc>
-              <a:buNone/>
-            </a:pPr>
-            <a:r>
-              <a:rPr lang="en-US" sz="900" dirty="0">
-                <a:solidFill>
-                  <a:srgbClr val="63798F"/>
+            <a:off x="8516112" y="4191000"/>
+            <a:ext cx="400050" cy="148590"/>
+          </a:xfrm>
+          <a:prstGeom prst="rect">
+            <a:avLst/>
+          </a:prstGeom>
+          <a:noFill/>
+          <a:ln/>
+        </p:spPr>
+        <p:txBody>
+          <a:bodyPr wrap="square" lIns="0" tIns="0" rIns="0" bIns="0" rtlCol="0" anchor="t"/>
+          <a:lstStyle/>
+          <a:p>
+            <a:pPr algn="l" indent="0" marL="0">
+              <a:lnSpc>
+                <a:spcPts val="1170"/>
+              </a:lnSpc>
+              <a:buNone/>
+            </a:pPr>
+            <a:r>
+              <a:rPr lang="en-US" sz="975" dirty="0">
+                <a:solidFill>
+                  <a:srgbClr val="93A6BA"/>
                 </a:solidFill>
                 <a:latin typeface="Malgun Gothic" pitchFamily="34" charset="0"/>
                 <a:ea typeface="Malgun Gothic" pitchFamily="34" charset="-122"/>
@@ -14281,7 +14281,7 @@
               </a:rPr>
               <a:t>MW</a:t>
             </a:r>
-            <a:endParaRPr lang="en-US" sz="900" dirty="0"/>
+            <a:endParaRPr lang="en-US" sz="975" dirty="0"/>
           </a:p>
         </p:txBody>
       </p:sp>
@@ -14336,7 +14336,7 @@
         <p:spPr>
           <a:xfrm>
             <a:off x="9715500" y="4076700"/>
-            <a:ext cx="1238250" cy="240030"/>
+            <a:ext cx="572262" cy="240030"/>
           </a:xfrm>
           <a:prstGeom prst="rect">
             <a:avLst/>
@@ -14377,29 +14377,29 @@
         </p:nvSpPr>
         <p:spPr>
           <a:xfrm>
-            <a:off x="10325100" y="4152900"/>
-            <a:ext cx="381000" cy="137160"/>
-          </a:xfrm>
-          <a:prstGeom prst="rect">
-            <a:avLst/>
-          </a:prstGeom>
-          <a:noFill/>
-          <a:ln/>
-        </p:spPr>
-        <p:txBody>
-          <a:bodyPr wrap="square" lIns="0" tIns="0" rIns="0" bIns="0" rtlCol="0" anchor="t"/>
-          <a:lstStyle/>
-          <a:p>
-            <a:pPr algn="l" indent="0" marL="0">
-              <a:lnSpc>
-                <a:spcPts val="1080"/>
-              </a:lnSpc>
-              <a:buNone/>
-            </a:pPr>
-            <a:r>
-              <a:rPr lang="en-US" sz="900" dirty="0">
-                <a:solidFill>
-                  <a:srgbClr val="63798F"/>
+            <a:off x="10344912" y="4191000"/>
+            <a:ext cx="400050" cy="148590"/>
+          </a:xfrm>
+          <a:prstGeom prst="rect">
+            <a:avLst/>
+          </a:prstGeom>
+          <a:noFill/>
+          <a:ln/>
+        </p:spPr>
+        <p:txBody>
+          <a:bodyPr wrap="square" lIns="0" tIns="0" rIns="0" bIns="0" rtlCol="0" anchor="t"/>
+          <a:lstStyle/>
+          <a:p>
+            <a:pPr algn="l" indent="0" marL="0">
+              <a:lnSpc>
+                <a:spcPts val="1170"/>
+              </a:lnSpc>
+              <a:buNone/>
+            </a:pPr>
+            <a:r>
+              <a:rPr lang="en-US" sz="975" dirty="0">
+                <a:solidFill>
+                  <a:srgbClr val="93A6BA"/>
                 </a:solidFill>
                 <a:latin typeface="Malgun Gothic" pitchFamily="34" charset="0"/>
                 <a:ea typeface="Malgun Gothic" pitchFamily="34" charset="-122"/>
@@ -14407,7 +14407,7 @@
               </a:rPr>
               <a:t>%</a:t>
             </a:r>
-            <a:endParaRPr lang="en-US" sz="900" dirty="0"/>
+            <a:endParaRPr lang="en-US" sz="975" dirty="0"/>
           </a:p>
         </p:txBody>
       </p:sp>
@@ -14693,7 +14693,7 @@
         </p:nvSpPr>
         <p:spPr>
           <a:xfrm>
-            <a:off x="685800" y="381000"/>
+            <a:off x="685800" y="419100"/>
             <a:ext cx="5715000" cy="142875"/>
           </a:xfrm>
           <a:prstGeom prst="rect">
@@ -14752,7 +14752,7 @@
         </p:nvSpPr>
         <p:spPr>
           <a:xfrm>
-            <a:off x="10677525" y="466725"/>
+            <a:off x="10677525" y="504825"/>
             <a:ext cx="28575" cy="47625"/>
           </a:xfrm>
           <a:prstGeom prst="rect">
@@ -14772,7 +14772,7 @@
         </p:nvSpPr>
         <p:spPr>
           <a:xfrm>
-            <a:off x="10810875" y="466725"/>
+            <a:off x="10810875" y="504825"/>
             <a:ext cx="28575" cy="47625"/>
           </a:xfrm>
           <a:prstGeom prst="rect">
@@ -14792,7 +14792,7 @@
         </p:nvSpPr>
         <p:spPr>
           <a:xfrm>
-            <a:off x="10944225" y="466725"/>
+            <a:off x="10944225" y="504825"/>
             <a:ext cx="28575" cy="47625"/>
           </a:xfrm>
           <a:prstGeom prst="rect">
@@ -14812,7 +14812,7 @@
         </p:nvSpPr>
         <p:spPr>
           <a:xfrm>
-            <a:off x="11077575" y="466725"/>
+            <a:off x="11077575" y="504825"/>
             <a:ext cx="28575" cy="47625"/>
           </a:xfrm>
           <a:prstGeom prst="rect">
@@ -14832,7 +14832,7 @@
         </p:nvSpPr>
         <p:spPr>
           <a:xfrm>
-            <a:off x="11210925" y="466725"/>
+            <a:off x="11210925" y="504825"/>
             <a:ext cx="28575" cy="47625"/>
           </a:xfrm>
           <a:prstGeom prst="rect">
@@ -14852,7 +14852,7 @@
         </p:nvSpPr>
         <p:spPr>
           <a:xfrm>
-            <a:off x="11344275" y="390525"/>
+            <a:off x="11344275" y="428625"/>
             <a:ext cx="28575" cy="123825"/>
           </a:xfrm>
           <a:prstGeom prst="rect">
@@ -14872,7 +14872,7 @@
         </p:nvSpPr>
         <p:spPr>
           <a:xfrm>
-            <a:off x="11477625" y="466725"/>
+            <a:off x="11477625" y="504825"/>
             <a:ext cx="28575" cy="47625"/>
           </a:xfrm>
           <a:prstGeom prst="rect">
@@ -15912,7 +15912,7 @@
         </p:nvSpPr>
         <p:spPr>
           <a:xfrm>
-            <a:off x="685800" y="381000"/>
+            <a:off x="685800" y="419100"/>
             <a:ext cx="5715000" cy="142875"/>
           </a:xfrm>
           <a:prstGeom prst="rect">
@@ -15971,7 +15971,7 @@
         </p:nvSpPr>
         <p:spPr>
           <a:xfrm>
-            <a:off x="10677525" y="466725"/>
+            <a:off x="10677525" y="504825"/>
             <a:ext cx="28575" cy="47625"/>
           </a:xfrm>
           <a:prstGeom prst="rect">
@@ -15991,7 +15991,7 @@
         </p:nvSpPr>
         <p:spPr>
           <a:xfrm>
-            <a:off x="10810875" y="466725"/>
+            <a:off x="10810875" y="504825"/>
             <a:ext cx="28575" cy="47625"/>
           </a:xfrm>
           <a:prstGeom prst="rect">
@@ -16011,7 +16011,7 @@
         </p:nvSpPr>
         <p:spPr>
           <a:xfrm>
-            <a:off x="10944225" y="466725"/>
+            <a:off x="10944225" y="504825"/>
             <a:ext cx="28575" cy="47625"/>
           </a:xfrm>
           <a:prstGeom prst="rect">
@@ -16031,7 +16031,7 @@
         </p:nvSpPr>
         <p:spPr>
           <a:xfrm>
-            <a:off x="11077575" y="466725"/>
+            <a:off x="11077575" y="504825"/>
             <a:ext cx="28575" cy="47625"/>
           </a:xfrm>
           <a:prstGeom prst="rect">
@@ -16051,7 +16051,7 @@
         </p:nvSpPr>
         <p:spPr>
           <a:xfrm>
-            <a:off x="11210925" y="466725"/>
+            <a:off x="11210925" y="504825"/>
             <a:ext cx="28575" cy="47625"/>
           </a:xfrm>
           <a:prstGeom prst="rect">
@@ -16071,7 +16071,7 @@
         </p:nvSpPr>
         <p:spPr>
           <a:xfrm>
-            <a:off x="11344275" y="466725"/>
+            <a:off x="11344275" y="504825"/>
             <a:ext cx="28575" cy="47625"/>
           </a:xfrm>
           <a:prstGeom prst="rect">
@@ -16091,7 +16091,7 @@
         </p:nvSpPr>
         <p:spPr>
           <a:xfrm>
-            <a:off x="11477625" y="390525"/>
+            <a:off x="11477625" y="428625"/>
             <a:ext cx="28575" cy="123825"/>
           </a:xfrm>
           <a:prstGeom prst="rect">
@@ -16356,8 +16356,8 @@
         </p:nvSpPr>
         <p:spPr>
           <a:xfrm>
-            <a:off x="1333500" y="3390900"/>
-            <a:ext cx="9334500" cy="0"/>
+            <a:off x="1733550" y="3390900"/>
+            <a:ext cx="8724900" cy="0"/>
           </a:xfrm>
           <a:prstGeom prst="line">
             <a:avLst/>
@@ -16379,8 +16379,8 @@
         </p:nvSpPr>
         <p:spPr>
           <a:xfrm>
-            <a:off x="1333500" y="3390900"/>
-            <a:ext cx="7000875" cy="0"/>
+            <a:off x="1733550" y="3390900"/>
+            <a:ext cx="6543675" cy="0"/>
           </a:xfrm>
           <a:prstGeom prst="line">
             <a:avLst/>
@@ -16402,7 +16402,7 @@
         </p:nvSpPr>
         <p:spPr>
           <a:xfrm>
-            <a:off x="1281113" y="3338513"/>
+            <a:off x="1681163" y="3338513"/>
             <a:ext cx="104775" cy="104775"/>
           </a:xfrm>
           <a:prstGeom prst="ellipse">
@@ -16422,7 +16422,7 @@
         </p:nvSpPr>
         <p:spPr>
           <a:xfrm>
-            <a:off x="285750" y="3543300"/>
+            <a:off x="685800" y="3543300"/>
             <a:ext cx="2095500" cy="167164"/>
           </a:xfrm>
           <a:prstGeom prst="rect">
@@ -16464,7 +16464,7 @@
         </p:nvSpPr>
         <p:spPr>
           <a:xfrm>
-            <a:off x="3614738" y="3338513"/>
+            <a:off x="3862387" y="3338513"/>
             <a:ext cx="104775" cy="104775"/>
           </a:xfrm>
           <a:prstGeom prst="ellipse">
@@ -16484,7 +16484,7 @@
         </p:nvSpPr>
         <p:spPr>
           <a:xfrm>
-            <a:off x="2619375" y="3543300"/>
+            <a:off x="2867025" y="3543300"/>
             <a:ext cx="2095500" cy="167164"/>
           </a:xfrm>
           <a:prstGeom prst="rect">
@@ -16526,7 +16526,7 @@
         </p:nvSpPr>
         <p:spPr>
           <a:xfrm>
-            <a:off x="5948363" y="3338513"/>
+            <a:off x="6043613" y="3338513"/>
             <a:ext cx="104775" cy="104775"/>
           </a:xfrm>
           <a:prstGeom prst="ellipse">
@@ -16546,7 +16546,7 @@
         </p:nvSpPr>
         <p:spPr>
           <a:xfrm>
-            <a:off x="4953000" y="3543300"/>
+            <a:off x="5048250" y="3543300"/>
             <a:ext cx="2095500" cy="167164"/>
           </a:xfrm>
           <a:prstGeom prst="rect">
@@ -16588,7 +16588,7 @@
         </p:nvSpPr>
         <p:spPr>
           <a:xfrm>
-            <a:off x="8258175" y="3314700"/>
+            <a:off x="8201025" y="3314700"/>
             <a:ext cx="152400" cy="152400"/>
           </a:xfrm>
           <a:prstGeom prst="ellipse">
@@ -16608,7 +16608,7 @@
         </p:nvSpPr>
         <p:spPr>
           <a:xfrm>
-            <a:off x="8301038" y="3357563"/>
+            <a:off x="8243888" y="3357563"/>
             <a:ext cx="66675" cy="66675"/>
           </a:xfrm>
           <a:prstGeom prst="ellipse">
@@ -16628,7 +16628,7 @@
         </p:nvSpPr>
         <p:spPr>
           <a:xfrm>
-            <a:off x="7286625" y="3543300"/>
+            <a:off x="7229475" y="3543300"/>
             <a:ext cx="2095500" cy="167164"/>
           </a:xfrm>
           <a:prstGeom prst="rect">
@@ -16670,7 +16670,7 @@
         </p:nvSpPr>
         <p:spPr>
           <a:xfrm>
-            <a:off x="10615613" y="3338513"/>
+            <a:off x="10406063" y="3338513"/>
             <a:ext cx="104775" cy="104775"/>
           </a:xfrm>
           <a:prstGeom prst="ellipse">
@@ -16690,7 +16690,7 @@
         </p:nvSpPr>
         <p:spPr>
           <a:xfrm>
-            <a:off x="9620250" y="3543300"/>
+            <a:off x="9410700" y="3543300"/>
             <a:ext cx="2095500" cy="167164"/>
           </a:xfrm>
           <a:prstGeom prst="rect">
@@ -16732,7 +16732,7 @@
         </p:nvSpPr>
         <p:spPr>
           <a:xfrm>
-            <a:off x="7953375" y="3162300"/>
+            <a:off x="7896225" y="3162300"/>
             <a:ext cx="762000" cy="125016"/>
           </a:xfrm>
           <a:prstGeom prst="rect">
@@ -17525,7 +17525,7 @@
         </p:nvSpPr>
         <p:spPr>
           <a:xfrm>
-            <a:off x="685800" y="381000"/>
+            <a:off x="685800" y="419100"/>
             <a:ext cx="5715000" cy="142875"/>
           </a:xfrm>
           <a:prstGeom prst="rect">
@@ -17842,7 +17842,7 @@
         <p:spPr>
           <a:xfrm>
             <a:off x="685800" y="3048000"/>
-            <a:ext cx="1905000" cy="420053"/>
+            <a:ext cx="987171" cy="420053"/>
           </a:xfrm>
           <a:prstGeom prst="rect">
             <a:avLst/>
@@ -17883,7 +17883,7 @@
         </p:nvSpPr>
         <p:spPr>
           <a:xfrm>
-            <a:off x="1847850" y="3257550"/>
+            <a:off x="1825371" y="3257550"/>
             <a:ext cx="1143000" cy="217170"/>
           </a:xfrm>
           <a:prstGeom prst="rect">
@@ -18205,7 +18205,7 @@
         <p:spPr>
           <a:xfrm>
             <a:off x="4448175" y="3048000"/>
-            <a:ext cx="1905000" cy="420053"/>
+            <a:ext cx="261080" cy="420053"/>
           </a:xfrm>
           <a:prstGeom prst="rect">
             <a:avLst/>
@@ -18246,7 +18246,7 @@
         </p:nvSpPr>
         <p:spPr>
           <a:xfrm>
-            <a:off x="5610225" y="3257550"/>
+            <a:off x="4861655" y="3257550"/>
             <a:ext cx="1143000" cy="217170"/>
           </a:xfrm>
           <a:prstGeom prst="rect">
@@ -18602,7 +18602,7 @@
         <p:spPr>
           <a:xfrm>
             <a:off x="8210550" y="3048000"/>
-            <a:ext cx="1905000" cy="420053"/>
+            <a:ext cx="745141" cy="420053"/>
           </a:xfrm>
           <a:prstGeom prst="rect">
             <a:avLst/>
@@ -18643,7 +18643,7 @@
         </p:nvSpPr>
         <p:spPr>
           <a:xfrm>
-            <a:off x="9372600" y="3257550"/>
+            <a:off x="9108091" y="3257550"/>
             <a:ext cx="1143000" cy="217170"/>
           </a:xfrm>
           <a:prstGeom prst="rect">
@@ -19991,7 +19991,7 @@
         </p:nvSpPr>
         <p:spPr>
           <a:xfrm>
-            <a:off x="685800" y="381000"/>
+            <a:off x="685800" y="419100"/>
             <a:ext cx="5715000" cy="142875"/>
           </a:xfrm>
           <a:prstGeom prst="rect">
@@ -20050,7 +20050,7 @@
         </p:nvSpPr>
         <p:spPr>
           <a:xfrm>
-            <a:off x="10677525" y="390525"/>
+            <a:off x="10677525" y="428625"/>
             <a:ext cx="28575" cy="123825"/>
           </a:xfrm>
           <a:prstGeom prst="rect">
@@ -20070,7 +20070,7 @@
         </p:nvSpPr>
         <p:spPr>
           <a:xfrm>
-            <a:off x="10810875" y="466725"/>
+            <a:off x="10810875" y="504825"/>
             <a:ext cx="28575" cy="47625"/>
           </a:xfrm>
           <a:prstGeom prst="rect">
@@ -20090,7 +20090,7 @@
         </p:nvSpPr>
         <p:spPr>
           <a:xfrm>
-            <a:off x="10944225" y="466725"/>
+            <a:off x="10944225" y="504825"/>
             <a:ext cx="28575" cy="47625"/>
           </a:xfrm>
           <a:prstGeom prst="rect">
@@ -20110,7 +20110,7 @@
         </p:nvSpPr>
         <p:spPr>
           <a:xfrm>
-            <a:off x="11077575" y="466725"/>
+            <a:off x="11077575" y="504825"/>
             <a:ext cx="28575" cy="47625"/>
           </a:xfrm>
           <a:prstGeom prst="rect">
@@ -20130,7 +20130,7 @@
         </p:nvSpPr>
         <p:spPr>
           <a:xfrm>
-            <a:off x="11210925" y="466725"/>
+            <a:off x="11210925" y="504825"/>
             <a:ext cx="28575" cy="47625"/>
           </a:xfrm>
           <a:prstGeom prst="rect">
@@ -20150,7 +20150,7 @@
         </p:nvSpPr>
         <p:spPr>
           <a:xfrm>
-            <a:off x="11344275" y="466725"/>
+            <a:off x="11344275" y="504825"/>
             <a:ext cx="28575" cy="47625"/>
           </a:xfrm>
           <a:prstGeom prst="rect">
@@ -20170,7 +20170,7 @@
         </p:nvSpPr>
         <p:spPr>
           <a:xfrm>
-            <a:off x="11477625" y="466725"/>
+            <a:off x="11477625" y="504825"/>
             <a:ext cx="28575" cy="47625"/>
           </a:xfrm>
           <a:prstGeom prst="rect">
@@ -21057,7 +21057,7 @@
         <p:spPr>
           <a:xfrm>
             <a:off x="838200" y="5486400"/>
-            <a:ext cx="1047750" cy="260033"/>
+            <a:ext cx="468535" cy="260033"/>
           </a:xfrm>
           <a:prstGeom prst="rect">
             <a:avLst/>
@@ -21098,8 +21098,8 @@
         </p:nvSpPr>
         <p:spPr>
           <a:xfrm>
-            <a:off x="1323975" y="5562600"/>
-            <a:ext cx="571500" cy="148590"/>
+            <a:off x="1363885" y="5610225"/>
+            <a:ext cx="400050" cy="148590"/>
           </a:xfrm>
           <a:prstGeom prst="rect">
             <a:avLst/>
@@ -21425,7 +21425,7 @@
         <p:spPr>
           <a:xfrm>
             <a:off x="6362700" y="5486400"/>
-            <a:ext cx="1047750" cy="260033"/>
+            <a:ext cx="318707" cy="260033"/>
           </a:xfrm>
           <a:prstGeom prst="rect">
             <a:avLst/>
@@ -21466,8 +21466,8 @@
         </p:nvSpPr>
         <p:spPr>
           <a:xfrm>
-            <a:off x="6686550" y="5562600"/>
-            <a:ext cx="571500" cy="148590"/>
+            <a:off x="6738557" y="5610225"/>
+            <a:ext cx="400050" cy="148590"/>
           </a:xfrm>
           <a:prstGeom prst="rect">
             <a:avLst/>
@@ -21743,7 +21743,7 @@
         </p:nvSpPr>
         <p:spPr>
           <a:xfrm>
-            <a:off x="685800" y="381000"/>
+            <a:off x="685800" y="419100"/>
             <a:ext cx="5715000" cy="142875"/>
           </a:xfrm>
           <a:prstGeom prst="rect">
@@ -21802,7 +21802,7 @@
         </p:nvSpPr>
         <p:spPr>
           <a:xfrm>
-            <a:off x="10677525" y="466725"/>
+            <a:off x="10677525" y="504825"/>
             <a:ext cx="28575" cy="47625"/>
           </a:xfrm>
           <a:prstGeom prst="rect">
@@ -21822,7 +21822,7 @@
         </p:nvSpPr>
         <p:spPr>
           <a:xfrm>
-            <a:off x="10810875" y="390525"/>
+            <a:off x="10810875" y="428625"/>
             <a:ext cx="28575" cy="123825"/>
           </a:xfrm>
           <a:prstGeom prst="rect">
@@ -21842,7 +21842,7 @@
         </p:nvSpPr>
         <p:spPr>
           <a:xfrm>
-            <a:off x="10944225" y="466725"/>
+            <a:off x="10944225" y="504825"/>
             <a:ext cx="28575" cy="47625"/>
           </a:xfrm>
           <a:prstGeom prst="rect">
@@ -21862,7 +21862,7 @@
         </p:nvSpPr>
         <p:spPr>
           <a:xfrm>
-            <a:off x="11077575" y="466725"/>
+            <a:off x="11077575" y="504825"/>
             <a:ext cx="28575" cy="47625"/>
           </a:xfrm>
           <a:prstGeom prst="rect">
@@ -21882,7 +21882,7 @@
         </p:nvSpPr>
         <p:spPr>
           <a:xfrm>
-            <a:off x="11210925" y="466725"/>
+            <a:off x="11210925" y="504825"/>
             <a:ext cx="28575" cy="47625"/>
           </a:xfrm>
           <a:prstGeom prst="rect">
@@ -21902,7 +21902,7 @@
         </p:nvSpPr>
         <p:spPr>
           <a:xfrm>
-            <a:off x="11344275" y="466725"/>
+            <a:off x="11344275" y="504825"/>
             <a:ext cx="28575" cy="47625"/>
           </a:xfrm>
           <a:prstGeom prst="rect">
@@ -21922,7 +21922,7 @@
         </p:nvSpPr>
         <p:spPr>
           <a:xfrm>
-            <a:off x="11477625" y="466725"/>
+            <a:off x="11477625" y="504825"/>
             <a:ext cx="28575" cy="47625"/>
           </a:xfrm>
           <a:prstGeom prst="rect">
@@ -24075,7 +24075,7 @@
                 <a:ea typeface="Malgun Gothic" pitchFamily="34" charset="-122"/>
                 <a:cs typeface="Malgun Gothic" pitchFamily="34" charset="-120"/>
               </a:rPr>
-              <a:t> — 온도가 18℃ 달라도 같은 값입니다</a:t>
+              <a:t> — 18℃ 차이인데 같은 값</a:t>
             </a:r>
             <a:endParaRPr lang="en-US" sz="1575" dirty="0"/>
           </a:p>
@@ -24157,7 +24157,7 @@
         <p:spPr>
           <a:xfrm>
             <a:off x="5105400" y="4933950"/>
-            <a:ext cx="1905000" cy="240030"/>
+            <a:ext cx="710565" cy="240030"/>
           </a:xfrm>
           <a:prstGeom prst="rect">
             <a:avLst/>
@@ -24198,29 +24198,29 @@
         </p:nvSpPr>
         <p:spPr>
           <a:xfrm>
-            <a:off x="5876925" y="5010150"/>
-            <a:ext cx="381000" cy="137160"/>
-          </a:xfrm>
-          <a:prstGeom prst="rect">
-            <a:avLst/>
-          </a:prstGeom>
-          <a:noFill/>
-          <a:ln/>
-        </p:spPr>
-        <p:txBody>
-          <a:bodyPr wrap="square" lIns="0" tIns="0" rIns="0" bIns="0" rtlCol="0" anchor="t"/>
-          <a:lstStyle/>
-          <a:p>
-            <a:pPr algn="l" indent="0" marL="0">
-              <a:lnSpc>
-                <a:spcPts val="1080"/>
-              </a:lnSpc>
-              <a:buNone/>
-            </a:pPr>
-            <a:r>
-              <a:rPr lang="en-US" sz="900" dirty="0">
-                <a:solidFill>
-                  <a:srgbClr val="63798F"/>
+            <a:off x="5873115" y="5048250"/>
+            <a:ext cx="400050" cy="148590"/>
+          </a:xfrm>
+          <a:prstGeom prst="rect">
+            <a:avLst/>
+          </a:prstGeom>
+          <a:noFill/>
+          <a:ln/>
+        </p:spPr>
+        <p:txBody>
+          <a:bodyPr wrap="square" lIns="0" tIns="0" rIns="0" bIns="0" rtlCol="0" anchor="t"/>
+          <a:lstStyle/>
+          <a:p>
+            <a:pPr algn="l" indent="0" marL="0">
+              <a:lnSpc>
+                <a:spcPts val="1170"/>
+              </a:lnSpc>
+              <a:buNone/>
+            </a:pPr>
+            <a:r>
+              <a:rPr lang="en-US" sz="975" dirty="0">
+                <a:solidFill>
+                  <a:srgbClr val="93A6BA"/>
                 </a:solidFill>
                 <a:latin typeface="Malgun Gothic" pitchFamily="34" charset="0"/>
                 <a:ea typeface="Malgun Gothic" pitchFamily="34" charset="-122"/>
@@ -24228,7 +24228,7 @@
               </a:rPr>
               <a:t>MW</a:t>
             </a:r>
-            <a:endParaRPr lang="en-US" sz="900" dirty="0"/>
+            <a:endParaRPr lang="en-US" sz="975" dirty="0"/>
           </a:p>
         </p:txBody>
       </p:sp>
@@ -24283,7 +24283,7 @@
         <p:spPr>
           <a:xfrm>
             <a:off x="7239000" y="4933950"/>
-            <a:ext cx="1905000" cy="240030"/>
+            <a:ext cx="1100328" cy="240030"/>
           </a:xfrm>
           <a:prstGeom prst="rect">
             <a:avLst/>
@@ -24324,29 +24324,29 @@
         </p:nvSpPr>
         <p:spPr>
           <a:xfrm>
-            <a:off x="8296275" y="5010150"/>
-            <a:ext cx="381000" cy="137160"/>
-          </a:xfrm>
-          <a:prstGeom prst="rect">
-            <a:avLst/>
-          </a:prstGeom>
-          <a:noFill/>
-          <a:ln/>
-        </p:spPr>
-        <p:txBody>
-          <a:bodyPr wrap="square" lIns="0" tIns="0" rIns="0" bIns="0" rtlCol="0" anchor="t"/>
-          <a:lstStyle/>
-          <a:p>
-            <a:pPr algn="l" indent="0" marL="0">
-              <a:lnSpc>
-                <a:spcPts val="1080"/>
-              </a:lnSpc>
-              <a:buNone/>
-            </a:pPr>
-            <a:r>
-              <a:rPr lang="en-US" sz="900" dirty="0">
-                <a:solidFill>
-                  <a:srgbClr val="63798F"/>
+            <a:off x="8396478" y="5048250"/>
+            <a:ext cx="400050" cy="148590"/>
+          </a:xfrm>
+          <a:prstGeom prst="rect">
+            <a:avLst/>
+          </a:prstGeom>
+          <a:noFill/>
+          <a:ln/>
+        </p:spPr>
+        <p:txBody>
+          <a:bodyPr wrap="square" lIns="0" tIns="0" rIns="0" bIns="0" rtlCol="0" anchor="t"/>
+          <a:lstStyle/>
+          <a:p>
+            <a:pPr algn="l" indent="0" marL="0">
+              <a:lnSpc>
+                <a:spcPts val="1170"/>
+              </a:lnSpc>
+              <a:buNone/>
+            </a:pPr>
+            <a:r>
+              <a:rPr lang="en-US" sz="975" dirty="0">
+                <a:solidFill>
+                  <a:srgbClr val="93A6BA"/>
                 </a:solidFill>
                 <a:latin typeface="Malgun Gothic" pitchFamily="34" charset="0"/>
                 <a:ea typeface="Malgun Gothic" pitchFamily="34" charset="-122"/>
@@ -24354,7 +24354,7 @@
               </a:rPr>
               <a:t>MW</a:t>
             </a:r>
-            <a:endParaRPr lang="en-US" sz="900" dirty="0"/>
+            <a:endParaRPr lang="en-US" sz="975" dirty="0"/>
           </a:p>
         </p:txBody>
       </p:sp>
@@ -24409,7 +24409,7 @@
         <p:spPr>
           <a:xfrm>
             <a:off x="9372600" y="4933950"/>
-            <a:ext cx="1905000" cy="240030"/>
+            <a:ext cx="1402080" cy="240030"/>
           </a:xfrm>
           <a:prstGeom prst="rect">
             <a:avLst/>
@@ -24450,29 +24450,29 @@
         </p:nvSpPr>
         <p:spPr>
           <a:xfrm>
-            <a:off x="10858500" y="5010150"/>
-            <a:ext cx="381000" cy="137160"/>
-          </a:xfrm>
-          <a:prstGeom prst="rect">
-            <a:avLst/>
-          </a:prstGeom>
-          <a:noFill/>
-          <a:ln/>
-        </p:spPr>
-        <p:txBody>
-          <a:bodyPr wrap="square" lIns="0" tIns="0" rIns="0" bIns="0" rtlCol="0" anchor="t"/>
-          <a:lstStyle/>
-          <a:p>
-            <a:pPr algn="l" indent="0" marL="0">
-              <a:lnSpc>
-                <a:spcPts val="1080"/>
-              </a:lnSpc>
-              <a:buNone/>
-            </a:pPr>
-            <a:r>
-              <a:rPr lang="en-US" sz="900" dirty="0">
-                <a:solidFill>
-                  <a:srgbClr val="63798F"/>
+            <a:off x="10831830" y="5048250"/>
+            <a:ext cx="400050" cy="148590"/>
+          </a:xfrm>
+          <a:prstGeom prst="rect">
+            <a:avLst/>
+          </a:prstGeom>
+          <a:noFill/>
+          <a:ln/>
+        </p:spPr>
+        <p:txBody>
+          <a:bodyPr wrap="square" lIns="0" tIns="0" rIns="0" bIns="0" rtlCol="0" anchor="t"/>
+          <a:lstStyle/>
+          <a:p>
+            <a:pPr algn="l" indent="0" marL="0">
+              <a:lnSpc>
+                <a:spcPts val="1170"/>
+              </a:lnSpc>
+              <a:buNone/>
+            </a:pPr>
+            <a:r>
+              <a:rPr lang="en-US" sz="975" dirty="0">
+                <a:solidFill>
+                  <a:srgbClr val="93A6BA"/>
                 </a:solidFill>
                 <a:latin typeface="Malgun Gothic" pitchFamily="34" charset="0"/>
                 <a:ea typeface="Malgun Gothic" pitchFamily="34" charset="-122"/>
@@ -24480,7 +24480,7 @@
               </a:rPr>
               <a:t>℃</a:t>
             </a:r>
-            <a:endParaRPr lang="en-US" sz="900" dirty="0"/>
+            <a:endParaRPr lang="en-US" sz="975" dirty="0"/>
           </a:p>
         </p:txBody>
       </p:sp>
@@ -24665,7 +24665,7 @@
         </p:nvSpPr>
         <p:spPr>
           <a:xfrm>
-            <a:off x="685800" y="381000"/>
+            <a:off x="685800" y="419100"/>
             <a:ext cx="5715000" cy="142875"/>
           </a:xfrm>
           <a:prstGeom prst="rect">
@@ -24724,7 +24724,7 @@
         </p:nvSpPr>
         <p:spPr>
           <a:xfrm>
-            <a:off x="10677525" y="466725"/>
+            <a:off x="10677525" y="504825"/>
             <a:ext cx="28575" cy="47625"/>
           </a:xfrm>
           <a:prstGeom prst="rect">
@@ -24744,7 +24744,7 @@
         </p:nvSpPr>
         <p:spPr>
           <a:xfrm>
-            <a:off x="10810875" y="390525"/>
+            <a:off x="10810875" y="428625"/>
             <a:ext cx="28575" cy="123825"/>
           </a:xfrm>
           <a:prstGeom prst="rect">
@@ -24764,7 +24764,7 @@
         </p:nvSpPr>
         <p:spPr>
           <a:xfrm>
-            <a:off x="10944225" y="466725"/>
+            <a:off x="10944225" y="504825"/>
             <a:ext cx="28575" cy="47625"/>
           </a:xfrm>
           <a:prstGeom prst="rect">
@@ -24784,7 +24784,7 @@
         </p:nvSpPr>
         <p:spPr>
           <a:xfrm>
-            <a:off x="11077575" y="466725"/>
+            <a:off x="11077575" y="504825"/>
             <a:ext cx="28575" cy="47625"/>
           </a:xfrm>
           <a:prstGeom prst="rect">
@@ -24804,7 +24804,7 @@
         </p:nvSpPr>
         <p:spPr>
           <a:xfrm>
-            <a:off x="11210925" y="466725"/>
+            <a:off x="11210925" y="504825"/>
             <a:ext cx="28575" cy="47625"/>
           </a:xfrm>
           <a:prstGeom prst="rect">
@@ -24824,7 +24824,7 @@
         </p:nvSpPr>
         <p:spPr>
           <a:xfrm>
-            <a:off x="11344275" y="466725"/>
+            <a:off x="11344275" y="504825"/>
             <a:ext cx="28575" cy="47625"/>
           </a:xfrm>
           <a:prstGeom prst="rect">
@@ -24844,7 +24844,7 @@
         </p:nvSpPr>
         <p:spPr>
           <a:xfrm>
-            <a:off x="11477625" y="466725"/>
+            <a:off x="11477625" y="504825"/>
             <a:ext cx="28575" cy="47625"/>
           </a:xfrm>
           <a:prstGeom prst="rect">
@@ -26684,14 +26684,758 @@
       </p:sp>
       <p:sp>
         <p:nvSpPr>
-          <p:cNvPr id="77" name="Shape 75"/>
-          <p:cNvSpPr/>
-          <p:nvPr/>
-        </p:nvSpPr>
-        <p:spPr>
-          <a:xfrm>
-            <a:off x="10239375" y="3124200"/>
-            <a:ext cx="0" cy="1543050"/>
+          <p:cNvPr id="77" name="Text 75"/>
+          <p:cNvSpPr txBox="1"/>
+          <p:nvPr/>
+        </p:nvSpPr>
+        <p:spPr>
+          <a:xfrm>
+            <a:off x="8267700" y="3171825"/>
+            <a:ext cx="742950" cy="142399"/>
+          </a:xfrm>
+          <a:prstGeom prst="rect">
+            <a:avLst/>
+          </a:prstGeom>
+          <a:noFill/>
+          <a:ln/>
+        </p:spPr>
+        <p:txBody>
+          <a:bodyPr wrap="square" lIns="0" tIns="0" rIns="0" bIns="0" rtlCol="0" anchor="t"/>
+          <a:lstStyle/>
+          <a:p>
+            <a:pPr algn="l" indent="0" marL="0">
+              <a:lnSpc>
+                <a:spcPts val="1121"/>
+              </a:lnSpc>
+              <a:buNone/>
+            </a:pPr>
+            <a:r>
+              <a:rPr lang="en-US" sz="863" dirty="0">
+                <a:solidFill>
+                  <a:srgbClr val="93A6BA"/>
+                </a:solidFill>
+                <a:latin typeface="Consolas" pitchFamily="34" charset="0"/>
+                <a:ea typeface="Consolas" pitchFamily="34" charset="-122"/>
+                <a:cs typeface="Consolas" pitchFamily="34" charset="-120"/>
+              </a:rPr>
+              <a:t>26-01-13</a:t>
+            </a:r>
+            <a:endParaRPr lang="en-US" sz="863" dirty="0"/>
+          </a:p>
+        </p:txBody>
+      </p:sp>
+      <p:sp>
+        <p:nvSpPr>
+          <p:cNvPr id="78" name="Text 76"/>
+          <p:cNvSpPr txBox="1"/>
+          <p:nvPr/>
+        </p:nvSpPr>
+        <p:spPr>
+          <a:xfrm>
+            <a:off x="9067800" y="3171825"/>
+            <a:ext cx="533400" cy="148590"/>
+          </a:xfrm>
+          <a:prstGeom prst="rect">
+            <a:avLst/>
+          </a:prstGeom>
+          <a:noFill/>
+          <a:ln/>
+        </p:spPr>
+        <p:txBody>
+          <a:bodyPr wrap="square" lIns="0" tIns="0" rIns="0" bIns="0" rtlCol="0" anchor="t"/>
+          <a:lstStyle/>
+          <a:p>
+            <a:pPr algn="l" indent="0" marL="0">
+              <a:lnSpc>
+                <a:spcPts val="1170"/>
+              </a:lnSpc>
+              <a:buNone/>
+            </a:pPr>
+            <a:r>
+              <a:rPr lang="en-US" sz="900" b="1" dirty="0">
+                <a:solidFill>
+                  <a:srgbClr val="8CA3BC"/>
+                </a:solidFill>
+                <a:latin typeface="Malgun Gothic" pitchFamily="34" charset="0"/>
+                <a:ea typeface="Malgun Gothic" pitchFamily="34" charset="-122"/>
+                <a:cs typeface="Malgun Gothic" pitchFamily="34" charset="-120"/>
+              </a:rPr>
+              <a:t>낮게</a:t>
+            </a:r>
+            <a:endParaRPr lang="en-US" sz="900" dirty="0"/>
+          </a:p>
+        </p:txBody>
+      </p:sp>
+      <p:sp>
+        <p:nvSpPr>
+          <p:cNvPr id="79" name="Shape 77"/>
+          <p:cNvSpPr/>
+          <p:nvPr/>
+        </p:nvSpPr>
+        <p:spPr>
+          <a:xfrm>
+            <a:off x="9658350" y="3162300"/>
+            <a:ext cx="990600" cy="152400"/>
+          </a:xfrm>
+          <a:prstGeom prst="rect">
+            <a:avLst/>
+          </a:prstGeom>
+          <a:solidFill>
+            <a:srgbClr val="5E7793"/>
+          </a:solidFill>
+          <a:ln/>
+        </p:spPr>
+      </p:sp>
+      <p:sp>
+        <p:nvSpPr>
+          <p:cNvPr id="80" name="Text 78"/>
+          <p:cNvSpPr txBox="1"/>
+          <p:nvPr/>
+        </p:nvSpPr>
+        <p:spPr>
+          <a:xfrm>
+            <a:off x="10706100" y="3171825"/>
+            <a:ext cx="571500" cy="154781"/>
+          </a:xfrm>
+          <a:prstGeom prst="rect">
+            <a:avLst/>
+          </a:prstGeom>
+          <a:noFill/>
+          <a:ln/>
+        </p:spPr>
+        <p:txBody>
+          <a:bodyPr wrap="square" lIns="0" tIns="0" rIns="0" bIns="0" rtlCol="0" anchor="t"/>
+          <a:lstStyle/>
+          <a:p>
+            <a:pPr algn="r" indent="0" marL="0">
+              <a:lnSpc>
+                <a:spcPts val="1219"/>
+              </a:lnSpc>
+              <a:buNone/>
+            </a:pPr>
+            <a:r>
+              <a:rPr lang="en-US" sz="938" b="1" dirty="0">
+                <a:solidFill>
+                  <a:srgbClr val="8CA3BC"/>
+                </a:solidFill>
+                <a:latin typeface="Consolas" pitchFamily="34" charset="0"/>
+                <a:ea typeface="Consolas" pitchFamily="34" charset="-122"/>
+                <a:cs typeface="Consolas" pitchFamily="34" charset="-120"/>
+              </a:rPr>
+              <a:t>-10.40</a:t>
+            </a:r>
+            <a:endParaRPr lang="en-US" sz="938" dirty="0"/>
+          </a:p>
+        </p:txBody>
+      </p:sp>
+      <p:sp>
+        <p:nvSpPr>
+          <p:cNvPr id="81" name="Text 79"/>
+          <p:cNvSpPr txBox="1"/>
+          <p:nvPr/>
+        </p:nvSpPr>
+        <p:spPr>
+          <a:xfrm>
+            <a:off x="8267700" y="3533775"/>
+            <a:ext cx="742950" cy="142399"/>
+          </a:xfrm>
+          <a:prstGeom prst="rect">
+            <a:avLst/>
+          </a:prstGeom>
+          <a:noFill/>
+          <a:ln/>
+        </p:spPr>
+        <p:txBody>
+          <a:bodyPr wrap="square" lIns="0" tIns="0" rIns="0" bIns="0" rtlCol="0" anchor="t"/>
+          <a:lstStyle/>
+          <a:p>
+            <a:pPr algn="l" indent="0" marL="0">
+              <a:lnSpc>
+                <a:spcPts val="1121"/>
+              </a:lnSpc>
+              <a:buNone/>
+            </a:pPr>
+            <a:r>
+              <a:rPr lang="en-US" sz="863" dirty="0">
+                <a:solidFill>
+                  <a:srgbClr val="93A6BA"/>
+                </a:solidFill>
+                <a:latin typeface="Consolas" pitchFamily="34" charset="0"/>
+                <a:ea typeface="Consolas" pitchFamily="34" charset="-122"/>
+                <a:cs typeface="Consolas" pitchFamily="34" charset="-120"/>
+              </a:rPr>
+              <a:t>26-01-08</a:t>
+            </a:r>
+            <a:endParaRPr lang="en-US" sz="863" dirty="0"/>
+          </a:p>
+        </p:txBody>
+      </p:sp>
+      <p:sp>
+        <p:nvSpPr>
+          <p:cNvPr id="82" name="Text 80"/>
+          <p:cNvSpPr txBox="1"/>
+          <p:nvPr/>
+        </p:nvSpPr>
+        <p:spPr>
+          <a:xfrm>
+            <a:off x="9067800" y="3533775"/>
+            <a:ext cx="533400" cy="148590"/>
+          </a:xfrm>
+          <a:prstGeom prst="rect">
+            <a:avLst/>
+          </a:prstGeom>
+          <a:noFill/>
+          <a:ln/>
+        </p:spPr>
+        <p:txBody>
+          <a:bodyPr wrap="square" lIns="0" tIns="0" rIns="0" bIns="0" rtlCol="0" anchor="t"/>
+          <a:lstStyle/>
+          <a:p>
+            <a:pPr algn="l" indent="0" marL="0">
+              <a:lnSpc>
+                <a:spcPts val="1170"/>
+              </a:lnSpc>
+              <a:buNone/>
+            </a:pPr>
+            <a:r>
+              <a:rPr lang="en-US" sz="900" b="1" dirty="0">
+                <a:solidFill>
+                  <a:srgbClr val="8CA3BC"/>
+                </a:solidFill>
+                <a:latin typeface="Malgun Gothic" pitchFamily="34" charset="0"/>
+                <a:ea typeface="Malgun Gothic" pitchFamily="34" charset="-122"/>
+                <a:cs typeface="Malgun Gothic" pitchFamily="34" charset="-120"/>
+              </a:rPr>
+              <a:t>낮게</a:t>
+            </a:r>
+            <a:endParaRPr lang="en-US" sz="900" dirty="0"/>
+          </a:p>
+        </p:txBody>
+      </p:sp>
+      <p:sp>
+        <p:nvSpPr>
+          <p:cNvPr id="83" name="Shape 81"/>
+          <p:cNvSpPr/>
+          <p:nvPr/>
+        </p:nvSpPr>
+        <p:spPr>
+          <a:xfrm>
+            <a:off x="9658350" y="3524250"/>
+            <a:ext cx="943928" cy="152400"/>
+          </a:xfrm>
+          <a:prstGeom prst="rect">
+            <a:avLst/>
+          </a:prstGeom>
+          <a:solidFill>
+            <a:srgbClr val="5E7793"/>
+          </a:solidFill>
+          <a:ln/>
+        </p:spPr>
+      </p:sp>
+      <p:sp>
+        <p:nvSpPr>
+          <p:cNvPr id="84" name="Text 82"/>
+          <p:cNvSpPr txBox="1"/>
+          <p:nvPr/>
+        </p:nvSpPr>
+        <p:spPr>
+          <a:xfrm>
+            <a:off x="10706100" y="3533775"/>
+            <a:ext cx="571500" cy="154781"/>
+          </a:xfrm>
+          <a:prstGeom prst="rect">
+            <a:avLst/>
+          </a:prstGeom>
+          <a:noFill/>
+          <a:ln/>
+        </p:spPr>
+        <p:txBody>
+          <a:bodyPr wrap="square" lIns="0" tIns="0" rIns="0" bIns="0" rtlCol="0" anchor="t"/>
+          <a:lstStyle/>
+          <a:p>
+            <a:pPr algn="r" indent="0" marL="0">
+              <a:lnSpc>
+                <a:spcPts val="1219"/>
+              </a:lnSpc>
+              <a:buNone/>
+            </a:pPr>
+            <a:r>
+              <a:rPr lang="en-US" sz="938" b="1" dirty="0">
+                <a:solidFill>
+                  <a:srgbClr val="8CA3BC"/>
+                </a:solidFill>
+                <a:latin typeface="Consolas" pitchFamily="34" charset="0"/>
+                <a:ea typeface="Consolas" pitchFamily="34" charset="-122"/>
+                <a:cs typeface="Consolas" pitchFamily="34" charset="-120"/>
+              </a:rPr>
+              <a:t>-9.91</a:t>
+            </a:r>
+            <a:endParaRPr lang="en-US" sz="938" dirty="0"/>
+          </a:p>
+        </p:txBody>
+      </p:sp>
+      <p:sp>
+        <p:nvSpPr>
+          <p:cNvPr id="85" name="Text 83"/>
+          <p:cNvSpPr txBox="1"/>
+          <p:nvPr/>
+        </p:nvSpPr>
+        <p:spPr>
+          <a:xfrm>
+            <a:off x="8267700" y="3895725"/>
+            <a:ext cx="742950" cy="142399"/>
+          </a:xfrm>
+          <a:prstGeom prst="rect">
+            <a:avLst/>
+          </a:prstGeom>
+          <a:noFill/>
+          <a:ln/>
+        </p:spPr>
+        <p:txBody>
+          <a:bodyPr wrap="square" lIns="0" tIns="0" rIns="0" bIns="0" rtlCol="0" anchor="t"/>
+          <a:lstStyle/>
+          <a:p>
+            <a:pPr algn="l" indent="0" marL="0">
+              <a:lnSpc>
+                <a:spcPts val="1121"/>
+              </a:lnSpc>
+              <a:buNone/>
+            </a:pPr>
+            <a:r>
+              <a:rPr lang="en-US" sz="863" dirty="0">
+                <a:solidFill>
+                  <a:srgbClr val="93A6BA"/>
+                </a:solidFill>
+                <a:latin typeface="Consolas" pitchFamily="34" charset="0"/>
+                <a:ea typeface="Consolas" pitchFamily="34" charset="-122"/>
+                <a:cs typeface="Consolas" pitchFamily="34" charset="-120"/>
+              </a:rPr>
+              <a:t>26-07-22</a:t>
+            </a:r>
+            <a:endParaRPr lang="en-US" sz="863" dirty="0"/>
+          </a:p>
+        </p:txBody>
+      </p:sp>
+      <p:sp>
+        <p:nvSpPr>
+          <p:cNvPr id="86" name="Text 84"/>
+          <p:cNvSpPr txBox="1"/>
+          <p:nvPr/>
+        </p:nvSpPr>
+        <p:spPr>
+          <a:xfrm>
+            <a:off x="9067800" y="3895725"/>
+            <a:ext cx="533400" cy="148590"/>
+          </a:xfrm>
+          <a:prstGeom prst="rect">
+            <a:avLst/>
+          </a:prstGeom>
+          <a:noFill/>
+          <a:ln/>
+        </p:spPr>
+        <p:txBody>
+          <a:bodyPr wrap="square" lIns="0" tIns="0" rIns="0" bIns="0" rtlCol="0" anchor="t"/>
+          <a:lstStyle/>
+          <a:p>
+            <a:pPr algn="l" indent="0" marL="0">
+              <a:lnSpc>
+                <a:spcPts val="1170"/>
+              </a:lnSpc>
+              <a:buNone/>
+            </a:pPr>
+            <a:r>
+              <a:rPr lang="en-US" sz="900" b="1" dirty="0">
+                <a:solidFill>
+                  <a:srgbClr val="FF4D63"/>
+                </a:solidFill>
+                <a:latin typeface="Malgun Gothic" pitchFamily="34" charset="0"/>
+                <a:ea typeface="Malgun Gothic" pitchFamily="34" charset="-122"/>
+                <a:cs typeface="Malgun Gothic" pitchFamily="34" charset="-120"/>
+              </a:rPr>
+              <a:t>높게</a:t>
+            </a:r>
+            <a:endParaRPr lang="en-US" sz="900" dirty="0"/>
+          </a:p>
+        </p:txBody>
+      </p:sp>
+      <p:sp>
+        <p:nvSpPr>
+          <p:cNvPr id="87" name="Shape 85"/>
+          <p:cNvSpPr/>
+          <p:nvPr/>
+        </p:nvSpPr>
+        <p:spPr>
+          <a:xfrm>
+            <a:off x="9658350" y="3886200"/>
+            <a:ext cx="753427" cy="152400"/>
+          </a:xfrm>
+          <a:prstGeom prst="rect">
+            <a:avLst/>
+          </a:prstGeom>
+          <a:solidFill>
+            <a:srgbClr val="FF4D63"/>
+          </a:solidFill>
+          <a:ln/>
+        </p:spPr>
+      </p:sp>
+      <p:sp>
+        <p:nvSpPr>
+          <p:cNvPr id="88" name="Text 86"/>
+          <p:cNvSpPr txBox="1"/>
+          <p:nvPr/>
+        </p:nvSpPr>
+        <p:spPr>
+          <a:xfrm>
+            <a:off x="10706100" y="3895725"/>
+            <a:ext cx="571500" cy="154781"/>
+          </a:xfrm>
+          <a:prstGeom prst="rect">
+            <a:avLst/>
+          </a:prstGeom>
+          <a:noFill/>
+          <a:ln/>
+        </p:spPr>
+        <p:txBody>
+          <a:bodyPr wrap="square" lIns="0" tIns="0" rIns="0" bIns="0" rtlCol="0" anchor="t"/>
+          <a:lstStyle/>
+          <a:p>
+            <a:pPr algn="r" indent="0" marL="0">
+              <a:lnSpc>
+                <a:spcPts val="1219"/>
+              </a:lnSpc>
+              <a:buNone/>
+            </a:pPr>
+            <a:r>
+              <a:rPr lang="en-US" sz="938" b="1" dirty="0">
+                <a:solidFill>
+                  <a:srgbClr val="FF4D63"/>
+                </a:solidFill>
+                <a:latin typeface="Consolas" pitchFamily="34" charset="0"/>
+                <a:ea typeface="Consolas" pitchFamily="34" charset="-122"/>
+                <a:cs typeface="Consolas" pitchFamily="34" charset="-120"/>
+              </a:rPr>
+              <a:t>+7.91</a:t>
+            </a:r>
+            <a:endParaRPr lang="en-US" sz="938" dirty="0"/>
+          </a:p>
+        </p:txBody>
+      </p:sp>
+      <p:sp>
+        <p:nvSpPr>
+          <p:cNvPr id="89" name="Text 87"/>
+          <p:cNvSpPr txBox="1"/>
+          <p:nvPr/>
+        </p:nvSpPr>
+        <p:spPr>
+          <a:xfrm>
+            <a:off x="8267700" y="4257675"/>
+            <a:ext cx="742950" cy="142399"/>
+          </a:xfrm>
+          <a:prstGeom prst="rect">
+            <a:avLst/>
+          </a:prstGeom>
+          <a:noFill/>
+          <a:ln/>
+        </p:spPr>
+        <p:txBody>
+          <a:bodyPr wrap="square" lIns="0" tIns="0" rIns="0" bIns="0" rtlCol="0" anchor="t"/>
+          <a:lstStyle/>
+          <a:p>
+            <a:pPr algn="l" indent="0" marL="0">
+              <a:lnSpc>
+                <a:spcPts val="1121"/>
+              </a:lnSpc>
+              <a:buNone/>
+            </a:pPr>
+            <a:r>
+              <a:rPr lang="en-US" sz="863" dirty="0">
+                <a:solidFill>
+                  <a:srgbClr val="93A6BA"/>
+                </a:solidFill>
+                <a:latin typeface="Consolas" pitchFamily="34" charset="0"/>
+                <a:ea typeface="Consolas" pitchFamily="34" charset="-122"/>
+                <a:cs typeface="Consolas" pitchFamily="34" charset="-120"/>
+              </a:rPr>
+              <a:t>25-09-02</a:t>
+            </a:r>
+            <a:endParaRPr lang="en-US" sz="863" dirty="0"/>
+          </a:p>
+        </p:txBody>
+      </p:sp>
+      <p:sp>
+        <p:nvSpPr>
+          <p:cNvPr id="90" name="Text 88"/>
+          <p:cNvSpPr txBox="1"/>
+          <p:nvPr/>
+        </p:nvSpPr>
+        <p:spPr>
+          <a:xfrm>
+            <a:off x="9067800" y="4257675"/>
+            <a:ext cx="533400" cy="148590"/>
+          </a:xfrm>
+          <a:prstGeom prst="rect">
+            <a:avLst/>
+          </a:prstGeom>
+          <a:noFill/>
+          <a:ln/>
+        </p:spPr>
+        <p:txBody>
+          <a:bodyPr wrap="square" lIns="0" tIns="0" rIns="0" bIns="0" rtlCol="0" anchor="t"/>
+          <a:lstStyle/>
+          <a:p>
+            <a:pPr algn="l" indent="0" marL="0">
+              <a:lnSpc>
+                <a:spcPts val="1170"/>
+              </a:lnSpc>
+              <a:buNone/>
+            </a:pPr>
+            <a:r>
+              <a:rPr lang="en-US" sz="900" b="1" dirty="0">
+                <a:solidFill>
+                  <a:srgbClr val="FF4D63"/>
+                </a:solidFill>
+                <a:latin typeface="Malgun Gothic" pitchFamily="34" charset="0"/>
+                <a:ea typeface="Malgun Gothic" pitchFamily="34" charset="-122"/>
+                <a:cs typeface="Malgun Gothic" pitchFamily="34" charset="-120"/>
+              </a:rPr>
+              <a:t>높게</a:t>
+            </a:r>
+            <a:endParaRPr lang="en-US" sz="900" dirty="0"/>
+          </a:p>
+        </p:txBody>
+      </p:sp>
+      <p:sp>
+        <p:nvSpPr>
+          <p:cNvPr id="91" name="Shape 89"/>
+          <p:cNvSpPr/>
+          <p:nvPr/>
+        </p:nvSpPr>
+        <p:spPr>
+          <a:xfrm>
+            <a:off x="9658350" y="4248150"/>
+            <a:ext cx="616268" cy="152400"/>
+          </a:xfrm>
+          <a:prstGeom prst="rect">
+            <a:avLst/>
+          </a:prstGeom>
+          <a:solidFill>
+            <a:srgbClr val="FF4D63"/>
+          </a:solidFill>
+          <a:ln/>
+        </p:spPr>
+      </p:sp>
+      <p:sp>
+        <p:nvSpPr>
+          <p:cNvPr id="92" name="Text 90"/>
+          <p:cNvSpPr txBox="1"/>
+          <p:nvPr/>
+        </p:nvSpPr>
+        <p:spPr>
+          <a:xfrm>
+            <a:off x="10706100" y="4257675"/>
+            <a:ext cx="571500" cy="154781"/>
+          </a:xfrm>
+          <a:prstGeom prst="rect">
+            <a:avLst/>
+          </a:prstGeom>
+          <a:noFill/>
+          <a:ln/>
+        </p:spPr>
+        <p:txBody>
+          <a:bodyPr wrap="square" lIns="0" tIns="0" rIns="0" bIns="0" rtlCol="0" anchor="t"/>
+          <a:lstStyle/>
+          <a:p>
+            <a:pPr algn="r" indent="0" marL="0">
+              <a:lnSpc>
+                <a:spcPts val="1219"/>
+              </a:lnSpc>
+              <a:buNone/>
+            </a:pPr>
+            <a:r>
+              <a:rPr lang="en-US" sz="938" b="1" dirty="0">
+                <a:solidFill>
+                  <a:srgbClr val="FF4D63"/>
+                </a:solidFill>
+                <a:latin typeface="Consolas" pitchFamily="34" charset="0"/>
+                <a:ea typeface="Consolas" pitchFamily="34" charset="-122"/>
+                <a:cs typeface="Consolas" pitchFamily="34" charset="-120"/>
+              </a:rPr>
+              <a:t>+6.47</a:t>
+            </a:r>
+            <a:endParaRPr lang="en-US" sz="938" dirty="0"/>
+          </a:p>
+        </p:txBody>
+      </p:sp>
+      <p:sp>
+        <p:nvSpPr>
+          <p:cNvPr id="93" name="Text 91"/>
+          <p:cNvSpPr txBox="1"/>
+          <p:nvPr/>
+        </p:nvSpPr>
+        <p:spPr>
+          <a:xfrm>
+            <a:off x="8267700" y="4533900"/>
+            <a:ext cx="3086100" cy="136208"/>
+          </a:xfrm>
+          <a:prstGeom prst="rect">
+            <a:avLst/>
+          </a:prstGeom>
+          <a:noFill/>
+          <a:ln/>
+        </p:spPr>
+        <p:txBody>
+          <a:bodyPr wrap="square" lIns="0" tIns="0" rIns="0" bIns="0" rtlCol="0" anchor="t"/>
+          <a:lstStyle/>
+          <a:p>
+            <a:pPr algn="l" indent="0" marL="0">
+              <a:lnSpc>
+                <a:spcPts val="1073"/>
+              </a:lnSpc>
+              <a:buNone/>
+            </a:pPr>
+            <a:r>
+              <a:rPr lang="en-US" sz="825" dirty="0">
+                <a:solidFill>
+                  <a:srgbClr val="63798F"/>
+                </a:solidFill>
+                <a:latin typeface="Malgun Gothic" pitchFamily="34" charset="0"/>
+                <a:ea typeface="Malgun Gothic" pitchFamily="34" charset="-122"/>
+                <a:cs typeface="Malgun Gothic" pitchFamily="34" charset="-120"/>
+              </a:rPr>
+              <a:t>낮게 = 팔 수 있었는데 못 팜   ·   높게 = 기준 미달</a:t>
+            </a:r>
+            <a:endParaRPr lang="en-US" sz="825" dirty="0"/>
+          </a:p>
+        </p:txBody>
+      </p:sp>
+      <p:sp>
+        <p:nvSpPr>
+          <p:cNvPr id="94" name="Text 92"/>
+          <p:cNvSpPr txBox="1"/>
+          <p:nvPr/>
+        </p:nvSpPr>
+        <p:spPr>
+          <a:xfrm>
+            <a:off x="8115300" y="4953000"/>
+            <a:ext cx="3390900" cy="284036"/>
+          </a:xfrm>
+          <a:prstGeom prst="rect">
+            <a:avLst/>
+          </a:prstGeom>
+          <a:noFill/>
+          <a:ln/>
+        </p:spPr>
+        <p:txBody>
+          <a:bodyPr wrap="square" lIns="0" tIns="0" rIns="0" bIns="0" rtlCol="0" anchor="t"/>
+          <a:lstStyle/>
+          <a:p>
+            <a:pPr algn="l" indent="0" marL="0">
+              <a:lnSpc>
+                <a:spcPts val="2237"/>
+              </a:lnSpc>
+              <a:buNone/>
+            </a:pPr>
+            <a:r>
+              <a:rPr lang="en-US" sz="1575" b="1" dirty="0">
+                <a:solidFill>
+                  <a:srgbClr val="EAE7E0"/>
+                </a:solidFill>
+                <a:latin typeface="Malgun Gothic" pitchFamily="34" charset="0"/>
+                <a:ea typeface="Malgun Gothic" pitchFamily="34" charset="-122"/>
+                <a:cs typeface="Malgun Gothic" pitchFamily="34" charset="-120"/>
+              </a:rPr>
+              <a:t>겨울과 여름이 </a:t>
+            </a:r>
+            <a:pPr algn="l" indent="0" marL="0">
+              <a:lnSpc>
+                <a:spcPts val="2237"/>
+              </a:lnSpc>
+              <a:buNone/>
+            </a:pPr>
+            <a:r>
+              <a:rPr lang="en-US" sz="1575" b="1" dirty="0">
+                <a:solidFill>
+                  <a:srgbClr val="EFB13C"/>
+                </a:solidFill>
+                <a:latin typeface="Malgun Gothic" pitchFamily="34" charset="0"/>
+                <a:ea typeface="Malgun Gothic" pitchFamily="34" charset="-122"/>
+                <a:cs typeface="Malgun Gothic" pitchFamily="34" charset="-120"/>
+              </a:rPr>
+              <a:t>반대로</a:t>
+            </a:r>
+            <a:pPr algn="l" indent="0" marL="0">
+              <a:lnSpc>
+                <a:spcPts val="2237"/>
+              </a:lnSpc>
+              <a:buNone/>
+            </a:pPr>
+            <a:r>
+              <a:rPr lang="en-US" sz="1575" b="1" dirty="0">
+                <a:solidFill>
+                  <a:srgbClr val="EAE7E0"/>
+                </a:solidFill>
+                <a:latin typeface="Malgun Gothic" pitchFamily="34" charset="0"/>
+                <a:ea typeface="Malgun Gothic" pitchFamily="34" charset="-122"/>
+                <a:cs typeface="Malgun Gothic" pitchFamily="34" charset="-120"/>
+              </a:rPr>
+              <a:t> 틀립니다</a:t>
+            </a:r>
+            <a:endParaRPr lang="en-US" sz="1575" dirty="0"/>
+          </a:p>
+        </p:txBody>
+      </p:sp>
+      <p:sp>
+        <p:nvSpPr>
+          <p:cNvPr id="95" name="Text 93"/>
+          <p:cNvSpPr txBox="1"/>
+          <p:nvPr/>
+        </p:nvSpPr>
+        <p:spPr>
+          <a:xfrm>
+            <a:off x="8115300" y="5334000"/>
+            <a:ext cx="3390900" cy="480060"/>
+          </a:xfrm>
+          <a:prstGeom prst="rect">
+            <a:avLst/>
+          </a:prstGeom>
+          <a:noFill/>
+          <a:ln/>
+        </p:spPr>
+        <p:txBody>
+          <a:bodyPr wrap="square" lIns="0" tIns="0" rIns="0" bIns="0" rtlCol="0" anchor="t"/>
+          <a:lstStyle/>
+          <a:p>
+            <a:pPr algn="l" indent="0" marL="0">
+              <a:lnSpc>
+                <a:spcPts val="1890"/>
+              </a:lnSpc>
+              <a:buNone/>
+            </a:pPr>
+            <a:r>
+              <a:rPr lang="en-US" sz="1125" dirty="0">
+                <a:solidFill>
+                  <a:srgbClr val="BCC9D6"/>
+                </a:solidFill>
+                <a:latin typeface="Malgun Gothic" pitchFamily="34" charset="0"/>
+                <a:ea typeface="Malgun Gothic" pitchFamily="34" charset="-122"/>
+                <a:cs typeface="Malgun Gothic" pitchFamily="34" charset="-120"/>
+              </a:rPr>
+              <a:t>그래서 상수를 올리거나 내려서는 못 고칩니다.</a:t>
+            </a:r>
+            <a:endParaRPr lang="en-US" sz="1125" dirty="0"/>
+          </a:p>
+        </p:txBody>
+      </p:sp>
+      <p:sp>
+        <p:nvSpPr>
+          <p:cNvPr id="96" name="Shape 94"/>
+          <p:cNvSpPr/>
+          <p:nvPr/>
+        </p:nvSpPr>
+        <p:spPr>
+          <a:xfrm>
+            <a:off x="685800" y="6057900"/>
+            <a:ext cx="10820400" cy="0"/>
           </a:xfrm>
           <a:prstGeom prst="line">
             <a:avLst/>
@@ -26707,681 +27451,40 @@
       </p:sp>
       <p:sp>
         <p:nvSpPr>
-          <p:cNvPr id="78" name="Text 76"/>
-          <p:cNvSpPr txBox="1"/>
-          <p:nvPr/>
-        </p:nvSpPr>
-        <p:spPr>
-          <a:xfrm>
-            <a:off x="8267700" y="3171825"/>
-            <a:ext cx="800100" cy="142399"/>
-          </a:xfrm>
-          <a:prstGeom prst="rect">
-            <a:avLst/>
-          </a:prstGeom>
-          <a:noFill/>
-          <a:ln/>
-        </p:spPr>
-        <p:txBody>
-          <a:bodyPr wrap="square" lIns="0" tIns="0" rIns="0" bIns="0" rtlCol="0" anchor="t"/>
-          <a:lstStyle/>
-          <a:p>
-            <a:pPr algn="l" indent="0" marL="0">
-              <a:lnSpc>
-                <a:spcPts val="1121"/>
-              </a:lnSpc>
-              <a:buNone/>
-            </a:pPr>
-            <a:r>
-              <a:rPr lang="en-US" sz="863" dirty="0">
-                <a:solidFill>
-                  <a:srgbClr val="93A6BA"/>
+          <p:cNvPr id="97" name="Text 95"/>
+          <p:cNvSpPr txBox="1"/>
+          <p:nvPr/>
+        </p:nvSpPr>
+        <p:spPr>
+          <a:xfrm>
+            <a:off x="685800" y="6267450"/>
+            <a:ext cx="476250" cy="120015"/>
+          </a:xfrm>
+          <a:prstGeom prst="rect">
+            <a:avLst/>
+          </a:prstGeom>
+          <a:noFill/>
+          <a:ln/>
+        </p:spPr>
+        <p:txBody>
+          <a:bodyPr wrap="square" lIns="0" tIns="0" rIns="0" bIns="0" rtlCol="0" anchor="t"/>
+          <a:lstStyle/>
+          <a:p>
+            <a:pPr algn="l" indent="0" marL="0">
+              <a:lnSpc>
+                <a:spcPts val="945"/>
+              </a:lnSpc>
+              <a:buNone/>
+            </a:pPr>
+            <a:r>
+              <a:rPr lang="en-US" sz="788" b="1" spc="180" kern="0" dirty="0">
+                <a:solidFill>
+                  <a:srgbClr val="EFB13C"/>
                 </a:solidFill>
                 <a:latin typeface="Consolas" pitchFamily="34" charset="0"/>
                 <a:ea typeface="Consolas" pitchFamily="34" charset="-122"/>
                 <a:cs typeface="Consolas" pitchFamily="34" charset="-120"/>
               </a:rPr>
-              <a:t>26-01-13</a:t>
-            </a:r>
-            <a:endParaRPr lang="en-US" sz="863" dirty="0"/>
-          </a:p>
-        </p:txBody>
-      </p:sp>
-      <p:sp>
-        <p:nvSpPr>
-          <p:cNvPr id="79" name="Shape 77"/>
-          <p:cNvSpPr/>
-          <p:nvPr/>
-        </p:nvSpPr>
-        <p:spPr>
-          <a:xfrm>
-            <a:off x="9124950" y="3162300"/>
-            <a:ext cx="1114425" cy="152400"/>
-          </a:xfrm>
-          <a:prstGeom prst="rect">
-            <a:avLst/>
-          </a:prstGeom>
-          <a:solidFill>
-            <a:srgbClr val="5E7793"/>
-          </a:solidFill>
-          <a:ln/>
-        </p:spPr>
-      </p:sp>
-      <p:sp>
-        <p:nvSpPr>
-          <p:cNvPr id="80" name="Text 78"/>
-          <p:cNvSpPr txBox="1"/>
-          <p:nvPr/>
-        </p:nvSpPr>
-        <p:spPr>
-          <a:xfrm>
-            <a:off x="8534400" y="3181350"/>
-            <a:ext cx="533400" cy="137160"/>
-          </a:xfrm>
-          <a:prstGeom prst="rect">
-            <a:avLst/>
-          </a:prstGeom>
-          <a:noFill/>
-          <a:ln/>
-        </p:spPr>
-        <p:txBody>
-          <a:bodyPr wrap="square" lIns="0" tIns="0" rIns="0" bIns="0" rtlCol="0" anchor="t"/>
-          <a:lstStyle/>
-          <a:p>
-            <a:pPr algn="r" indent="0" marL="0">
-              <a:lnSpc>
-                <a:spcPts val="1080"/>
-              </a:lnSpc>
-              <a:buNone/>
-            </a:pPr>
-            <a:r>
-              <a:rPr lang="en-US" sz="900" b="1" dirty="0">
-                <a:solidFill>
-                  <a:srgbClr val="8CA3BC"/>
-                </a:solidFill>
-                <a:latin typeface="Consolas" pitchFamily="34" charset="0"/>
-                <a:ea typeface="Consolas" pitchFamily="34" charset="-122"/>
-                <a:cs typeface="Consolas" pitchFamily="34" charset="-120"/>
-              </a:rPr>
-              <a:t>-10.40</a:t>
-            </a:r>
-            <a:endParaRPr lang="en-US" sz="900" dirty="0"/>
-          </a:p>
-        </p:txBody>
-      </p:sp>
-      <p:sp>
-        <p:nvSpPr>
-          <p:cNvPr id="81" name="Text 79"/>
-          <p:cNvSpPr txBox="1"/>
-          <p:nvPr/>
-        </p:nvSpPr>
-        <p:spPr>
-          <a:xfrm>
-            <a:off x="8267700" y="3533775"/>
-            <a:ext cx="800100" cy="142399"/>
-          </a:xfrm>
-          <a:prstGeom prst="rect">
-            <a:avLst/>
-          </a:prstGeom>
-          <a:noFill/>
-          <a:ln/>
-        </p:spPr>
-        <p:txBody>
-          <a:bodyPr wrap="square" lIns="0" tIns="0" rIns="0" bIns="0" rtlCol="0" anchor="t"/>
-          <a:lstStyle/>
-          <a:p>
-            <a:pPr algn="l" indent="0" marL="0">
-              <a:lnSpc>
-                <a:spcPts val="1121"/>
-              </a:lnSpc>
-              <a:buNone/>
-            </a:pPr>
-            <a:r>
-              <a:rPr lang="en-US" sz="863" dirty="0">
-                <a:solidFill>
-                  <a:srgbClr val="93A6BA"/>
-                </a:solidFill>
-                <a:latin typeface="Consolas" pitchFamily="34" charset="0"/>
-                <a:ea typeface="Consolas" pitchFamily="34" charset="-122"/>
-                <a:cs typeface="Consolas" pitchFamily="34" charset="-120"/>
-              </a:rPr>
-              <a:t>26-01-08</a:t>
-            </a:r>
-            <a:endParaRPr lang="en-US" sz="863" dirty="0"/>
-          </a:p>
-        </p:txBody>
-      </p:sp>
-      <p:sp>
-        <p:nvSpPr>
-          <p:cNvPr id="82" name="Shape 80"/>
-          <p:cNvSpPr/>
-          <p:nvPr/>
-        </p:nvSpPr>
-        <p:spPr>
-          <a:xfrm>
-            <a:off x="9177457" y="3524250"/>
-            <a:ext cx="1061918" cy="152400"/>
-          </a:xfrm>
-          <a:prstGeom prst="rect">
-            <a:avLst/>
-          </a:prstGeom>
-          <a:solidFill>
-            <a:srgbClr val="5E7793"/>
-          </a:solidFill>
-          <a:ln/>
-        </p:spPr>
-      </p:sp>
-      <p:sp>
-        <p:nvSpPr>
-          <p:cNvPr id="83" name="Text 81"/>
-          <p:cNvSpPr txBox="1"/>
-          <p:nvPr/>
-        </p:nvSpPr>
-        <p:spPr>
-          <a:xfrm>
-            <a:off x="8586907" y="3543300"/>
-            <a:ext cx="533400" cy="137160"/>
-          </a:xfrm>
-          <a:prstGeom prst="rect">
-            <a:avLst/>
-          </a:prstGeom>
-          <a:noFill/>
-          <a:ln/>
-        </p:spPr>
-        <p:txBody>
-          <a:bodyPr wrap="square" lIns="0" tIns="0" rIns="0" bIns="0" rtlCol="0" anchor="t"/>
-          <a:lstStyle/>
-          <a:p>
-            <a:pPr algn="r" indent="0" marL="0">
-              <a:lnSpc>
-                <a:spcPts val="1080"/>
-              </a:lnSpc>
-              <a:buNone/>
-            </a:pPr>
-            <a:r>
-              <a:rPr lang="en-US" sz="900" b="1" dirty="0">
-                <a:solidFill>
-                  <a:srgbClr val="8CA3BC"/>
-                </a:solidFill>
-                <a:latin typeface="Consolas" pitchFamily="34" charset="0"/>
-                <a:ea typeface="Consolas" pitchFamily="34" charset="-122"/>
-                <a:cs typeface="Consolas" pitchFamily="34" charset="-120"/>
-              </a:rPr>
-              <a:t>-9.91</a:t>
-            </a:r>
-            <a:endParaRPr lang="en-US" sz="900" dirty="0"/>
-          </a:p>
-        </p:txBody>
-      </p:sp>
-      <p:sp>
-        <p:nvSpPr>
-          <p:cNvPr id="84" name="Text 82"/>
-          <p:cNvSpPr txBox="1"/>
-          <p:nvPr/>
-        </p:nvSpPr>
-        <p:spPr>
-          <a:xfrm>
-            <a:off x="8267700" y="3895725"/>
-            <a:ext cx="800100" cy="142399"/>
-          </a:xfrm>
-          <a:prstGeom prst="rect">
-            <a:avLst/>
-          </a:prstGeom>
-          <a:noFill/>
-          <a:ln/>
-        </p:spPr>
-        <p:txBody>
-          <a:bodyPr wrap="square" lIns="0" tIns="0" rIns="0" bIns="0" rtlCol="0" anchor="t"/>
-          <a:lstStyle/>
-          <a:p>
-            <a:pPr algn="l" indent="0" marL="0">
-              <a:lnSpc>
-                <a:spcPts val="1121"/>
-              </a:lnSpc>
-              <a:buNone/>
-            </a:pPr>
-            <a:r>
-              <a:rPr lang="en-US" sz="863" dirty="0">
-                <a:solidFill>
-                  <a:srgbClr val="93A6BA"/>
-                </a:solidFill>
-                <a:latin typeface="Consolas" pitchFamily="34" charset="0"/>
-                <a:ea typeface="Consolas" pitchFamily="34" charset="-122"/>
-                <a:cs typeface="Consolas" pitchFamily="34" charset="-120"/>
-              </a:rPr>
-              <a:t>26-07-22</a:t>
-            </a:r>
-            <a:endParaRPr lang="en-US" sz="863" dirty="0"/>
-          </a:p>
-        </p:txBody>
-      </p:sp>
-      <p:sp>
-        <p:nvSpPr>
-          <p:cNvPr id="85" name="Shape 83"/>
-          <p:cNvSpPr/>
-          <p:nvPr/>
-        </p:nvSpPr>
-        <p:spPr>
-          <a:xfrm>
-            <a:off x="10239375" y="3886200"/>
-            <a:ext cx="847606" cy="152400"/>
-          </a:xfrm>
-          <a:prstGeom prst="rect">
-            <a:avLst/>
-          </a:prstGeom>
-          <a:solidFill>
-            <a:srgbClr val="FF4D63"/>
-          </a:solidFill>
-          <a:ln/>
-        </p:spPr>
-      </p:sp>
-      <p:sp>
-        <p:nvSpPr>
-          <p:cNvPr id="86" name="Text 84"/>
-          <p:cNvSpPr txBox="1"/>
-          <p:nvPr/>
-        </p:nvSpPr>
-        <p:spPr>
-          <a:xfrm>
-            <a:off x="11144131" y="3905250"/>
-            <a:ext cx="533400" cy="137160"/>
-          </a:xfrm>
-          <a:prstGeom prst="rect">
-            <a:avLst/>
-          </a:prstGeom>
-          <a:noFill/>
-          <a:ln/>
-        </p:spPr>
-        <p:txBody>
-          <a:bodyPr wrap="square" lIns="0" tIns="0" rIns="0" bIns="0" rtlCol="0" anchor="t"/>
-          <a:lstStyle/>
-          <a:p>
-            <a:pPr algn="l" indent="0" marL="0">
-              <a:lnSpc>
-                <a:spcPts val="1080"/>
-              </a:lnSpc>
-              <a:buNone/>
-            </a:pPr>
-            <a:r>
-              <a:rPr lang="en-US" sz="900" b="1" dirty="0">
-                <a:solidFill>
-                  <a:srgbClr val="FF4D63"/>
-                </a:solidFill>
-                <a:latin typeface="Consolas" pitchFamily="34" charset="0"/>
-                <a:ea typeface="Consolas" pitchFamily="34" charset="-122"/>
-                <a:cs typeface="Consolas" pitchFamily="34" charset="-120"/>
-              </a:rPr>
-              <a:t>+7.91</a:t>
-            </a:r>
-            <a:endParaRPr lang="en-US" sz="900" dirty="0"/>
-          </a:p>
-        </p:txBody>
-      </p:sp>
-      <p:sp>
-        <p:nvSpPr>
-          <p:cNvPr id="87" name="Text 85"/>
-          <p:cNvSpPr txBox="1"/>
-          <p:nvPr/>
-        </p:nvSpPr>
-        <p:spPr>
-          <a:xfrm>
-            <a:off x="8267700" y="4257675"/>
-            <a:ext cx="800100" cy="142399"/>
-          </a:xfrm>
-          <a:prstGeom prst="rect">
-            <a:avLst/>
-          </a:prstGeom>
-          <a:noFill/>
-          <a:ln/>
-        </p:spPr>
-        <p:txBody>
-          <a:bodyPr wrap="square" lIns="0" tIns="0" rIns="0" bIns="0" rtlCol="0" anchor="t"/>
-          <a:lstStyle/>
-          <a:p>
-            <a:pPr algn="l" indent="0" marL="0">
-              <a:lnSpc>
-                <a:spcPts val="1121"/>
-              </a:lnSpc>
-              <a:buNone/>
-            </a:pPr>
-            <a:r>
-              <a:rPr lang="en-US" sz="863" dirty="0">
-                <a:solidFill>
-                  <a:srgbClr val="93A6BA"/>
-                </a:solidFill>
-                <a:latin typeface="Consolas" pitchFamily="34" charset="0"/>
-                <a:ea typeface="Consolas" pitchFamily="34" charset="-122"/>
-                <a:cs typeface="Consolas" pitchFamily="34" charset="-120"/>
-              </a:rPr>
-              <a:t>25-09-02</a:t>
-            </a:r>
-            <a:endParaRPr lang="en-US" sz="863" dirty="0"/>
-          </a:p>
-        </p:txBody>
-      </p:sp>
-      <p:sp>
-        <p:nvSpPr>
-          <p:cNvPr id="88" name="Shape 86"/>
-          <p:cNvSpPr/>
-          <p:nvPr/>
-        </p:nvSpPr>
-        <p:spPr>
-          <a:xfrm>
-            <a:off x="10239375" y="4248150"/>
-            <a:ext cx="693301" cy="152400"/>
-          </a:xfrm>
-          <a:prstGeom prst="rect">
-            <a:avLst/>
-          </a:prstGeom>
-          <a:solidFill>
-            <a:srgbClr val="FF4D63"/>
-          </a:solidFill>
-          <a:ln/>
-        </p:spPr>
-      </p:sp>
-      <p:sp>
-        <p:nvSpPr>
-          <p:cNvPr id="89" name="Text 87"/>
-          <p:cNvSpPr txBox="1"/>
-          <p:nvPr/>
-        </p:nvSpPr>
-        <p:spPr>
-          <a:xfrm>
-            <a:off x="10989826" y="4267200"/>
-            <a:ext cx="533400" cy="137160"/>
-          </a:xfrm>
-          <a:prstGeom prst="rect">
-            <a:avLst/>
-          </a:prstGeom>
-          <a:noFill/>
-          <a:ln/>
-        </p:spPr>
-        <p:txBody>
-          <a:bodyPr wrap="square" lIns="0" tIns="0" rIns="0" bIns="0" rtlCol="0" anchor="t"/>
-          <a:lstStyle/>
-          <a:p>
-            <a:pPr algn="l" indent="0" marL="0">
-              <a:lnSpc>
-                <a:spcPts val="1080"/>
-              </a:lnSpc>
-              <a:buNone/>
-            </a:pPr>
-            <a:r>
-              <a:rPr lang="en-US" sz="900" b="1" dirty="0">
-                <a:solidFill>
-                  <a:srgbClr val="FF4D63"/>
-                </a:solidFill>
-                <a:latin typeface="Consolas" pitchFamily="34" charset="0"/>
-                <a:ea typeface="Consolas" pitchFamily="34" charset="-122"/>
-                <a:cs typeface="Consolas" pitchFamily="34" charset="-120"/>
-              </a:rPr>
-              <a:t>+6.47</a:t>
-            </a:r>
-            <a:endParaRPr lang="en-US" sz="900" dirty="0"/>
-          </a:p>
-        </p:txBody>
-      </p:sp>
-      <p:sp>
-        <p:nvSpPr>
-          <p:cNvPr id="90" name="Text 88"/>
-          <p:cNvSpPr txBox="1"/>
-          <p:nvPr/>
-        </p:nvSpPr>
-        <p:spPr>
-          <a:xfrm>
-            <a:off x="9163050" y="4533900"/>
-            <a:ext cx="1047750" cy="136208"/>
-          </a:xfrm>
-          <a:prstGeom prst="rect">
-            <a:avLst/>
-          </a:prstGeom>
-          <a:noFill/>
-          <a:ln/>
-        </p:spPr>
-        <p:txBody>
-          <a:bodyPr wrap="square" lIns="0" tIns="0" rIns="0" bIns="0" rtlCol="0" anchor="t"/>
-          <a:lstStyle/>
-          <a:p>
-            <a:pPr algn="r" indent="0" marL="0">
-              <a:lnSpc>
-                <a:spcPts val="1073"/>
-              </a:lnSpc>
-              <a:buNone/>
-            </a:pPr>
-            <a:r>
-              <a:rPr lang="en-US" sz="825" dirty="0">
-                <a:solidFill>
-                  <a:srgbClr val="8CA3BC"/>
-                </a:solidFill>
-                <a:latin typeface="Malgun Gothic" pitchFamily="34" charset="0"/>
-                <a:ea typeface="Malgun Gothic" pitchFamily="34" charset="-122"/>
-                <a:cs typeface="Malgun Gothic" pitchFamily="34" charset="-120"/>
-              </a:rPr>
-              <a:t>← 낮게 신고</a:t>
-            </a:r>
-            <a:endParaRPr lang="en-US" sz="825" dirty="0"/>
-          </a:p>
-        </p:txBody>
-      </p:sp>
-      <p:sp>
-        <p:nvSpPr>
-          <p:cNvPr id="91" name="Text 89"/>
-          <p:cNvSpPr txBox="1"/>
-          <p:nvPr/>
-        </p:nvSpPr>
-        <p:spPr>
-          <a:xfrm>
-            <a:off x="10287000" y="4533900"/>
-            <a:ext cx="1047750" cy="136208"/>
-          </a:xfrm>
-          <a:prstGeom prst="rect">
-            <a:avLst/>
-          </a:prstGeom>
-          <a:noFill/>
-          <a:ln/>
-        </p:spPr>
-        <p:txBody>
-          <a:bodyPr wrap="square" lIns="0" tIns="0" rIns="0" bIns="0" rtlCol="0" anchor="t"/>
-          <a:lstStyle/>
-          <a:p>
-            <a:pPr algn="l" indent="0" marL="0">
-              <a:lnSpc>
-                <a:spcPts val="1073"/>
-              </a:lnSpc>
-              <a:buNone/>
-            </a:pPr>
-            <a:r>
-              <a:rPr lang="en-US" sz="825" dirty="0">
-                <a:solidFill>
-                  <a:srgbClr val="FF4D63"/>
-                </a:solidFill>
-                <a:latin typeface="Malgun Gothic" pitchFamily="34" charset="0"/>
-                <a:ea typeface="Malgun Gothic" pitchFamily="34" charset="-122"/>
-                <a:cs typeface="Malgun Gothic" pitchFamily="34" charset="-120"/>
-              </a:rPr>
-              <a:t>높게 신고 →</a:t>
-            </a:r>
-            <a:endParaRPr lang="en-US" sz="825" dirty="0"/>
-          </a:p>
-        </p:txBody>
-      </p:sp>
-      <p:sp>
-        <p:nvSpPr>
-          <p:cNvPr id="92" name="Text 90"/>
-          <p:cNvSpPr txBox="1"/>
-          <p:nvPr/>
-        </p:nvSpPr>
-        <p:spPr>
-          <a:xfrm>
-            <a:off x="8115300" y="4953000"/>
-            <a:ext cx="3390900" cy="284036"/>
-          </a:xfrm>
-          <a:prstGeom prst="rect">
-            <a:avLst/>
-          </a:prstGeom>
-          <a:noFill/>
-          <a:ln/>
-        </p:spPr>
-        <p:txBody>
-          <a:bodyPr wrap="square" lIns="0" tIns="0" rIns="0" bIns="0" rtlCol="0" anchor="t"/>
-          <a:lstStyle/>
-          <a:p>
-            <a:pPr algn="l" indent="0" marL="0">
-              <a:lnSpc>
-                <a:spcPts val="2237"/>
-              </a:lnSpc>
-              <a:buNone/>
-            </a:pPr>
-            <a:r>
-              <a:rPr lang="en-US" sz="1575" b="1" dirty="0">
-                <a:solidFill>
-                  <a:srgbClr val="EAE7E0"/>
-                </a:solidFill>
-                <a:latin typeface="Malgun Gothic" pitchFamily="34" charset="0"/>
-                <a:ea typeface="Malgun Gothic" pitchFamily="34" charset="-122"/>
-                <a:cs typeface="Malgun Gothic" pitchFamily="34" charset="-120"/>
-              </a:rPr>
-              <a:t>겨울과 여름이 </a:t>
-            </a:r>
-            <a:pPr algn="l" indent="0" marL="0">
-              <a:lnSpc>
-                <a:spcPts val="2237"/>
-              </a:lnSpc>
-              <a:buNone/>
-            </a:pPr>
-            <a:r>
-              <a:rPr lang="en-US" sz="1575" b="1" dirty="0">
-                <a:solidFill>
-                  <a:srgbClr val="EFB13C"/>
-                </a:solidFill>
-                <a:latin typeface="Malgun Gothic" pitchFamily="34" charset="0"/>
-                <a:ea typeface="Malgun Gothic" pitchFamily="34" charset="-122"/>
-                <a:cs typeface="Malgun Gothic" pitchFamily="34" charset="-120"/>
-              </a:rPr>
-              <a:t>반대로</a:t>
-            </a:r>
-            <a:pPr algn="l" indent="0" marL="0">
-              <a:lnSpc>
-                <a:spcPts val="2237"/>
-              </a:lnSpc>
-              <a:buNone/>
-            </a:pPr>
-            <a:r>
-              <a:rPr lang="en-US" sz="1575" b="1" dirty="0">
-                <a:solidFill>
-                  <a:srgbClr val="EAE7E0"/>
-                </a:solidFill>
-                <a:latin typeface="Malgun Gothic" pitchFamily="34" charset="0"/>
-                <a:ea typeface="Malgun Gothic" pitchFamily="34" charset="-122"/>
-                <a:cs typeface="Malgun Gothic" pitchFamily="34" charset="-120"/>
-              </a:rPr>
-              <a:t> 틀립니다</a:t>
-            </a:r>
-            <a:endParaRPr lang="en-US" sz="1575" dirty="0"/>
-          </a:p>
-        </p:txBody>
-      </p:sp>
-      <p:sp>
-        <p:nvSpPr>
-          <p:cNvPr id="93" name="Text 91"/>
-          <p:cNvSpPr txBox="1"/>
-          <p:nvPr/>
-        </p:nvSpPr>
-        <p:spPr>
-          <a:xfrm>
-            <a:off x="8115300" y="5334000"/>
-            <a:ext cx="3390900" cy="240030"/>
-          </a:xfrm>
-          <a:prstGeom prst="rect">
-            <a:avLst/>
-          </a:prstGeom>
-          <a:noFill/>
-          <a:ln/>
-        </p:spPr>
-        <p:txBody>
-          <a:bodyPr wrap="square" lIns="0" tIns="0" rIns="0" bIns="0" rtlCol="0" anchor="t"/>
-          <a:lstStyle/>
-          <a:p>
-            <a:pPr algn="l" indent="0" marL="0">
-              <a:lnSpc>
-                <a:spcPts val="1890"/>
-              </a:lnSpc>
-              <a:buNone/>
-            </a:pPr>
-            <a:r>
-              <a:rPr lang="en-US" sz="1125" dirty="0">
-                <a:solidFill>
-                  <a:srgbClr val="BCC9D6"/>
-                </a:solidFill>
-                <a:latin typeface="Malgun Gothic" pitchFamily="34" charset="0"/>
-                <a:ea typeface="Malgun Gothic" pitchFamily="34" charset="-122"/>
-                <a:cs typeface="Malgun Gothic" pitchFamily="34" charset="-120"/>
-              </a:rPr>
-              <a:t>그래서 상수를 올리거나 내려서는 못 고칩니다.</a:t>
-            </a:r>
-            <a:endParaRPr lang="en-US" sz="1125" dirty="0"/>
-          </a:p>
-        </p:txBody>
-      </p:sp>
-      <p:sp>
-        <p:nvSpPr>
-          <p:cNvPr id="94" name="Shape 92"/>
-          <p:cNvSpPr/>
-          <p:nvPr/>
-        </p:nvSpPr>
-        <p:spPr>
-          <a:xfrm>
-            <a:off x="685800" y="6057900"/>
-            <a:ext cx="10820400" cy="0"/>
-          </a:xfrm>
-          <a:prstGeom prst="line">
-            <a:avLst/>
-          </a:prstGeom>
-          <a:noFill/>
-          <a:ln w="12700">
-            <a:solidFill>
-              <a:srgbClr val="22354A"/>
-            </a:solidFill>
-            <a:prstDash val="solid"/>
-          </a:ln>
-        </p:spPr>
-      </p:sp>
-      <p:sp>
-        <p:nvSpPr>
-          <p:cNvPr id="95" name="Text 93"/>
-          <p:cNvSpPr txBox="1"/>
-          <p:nvPr/>
-        </p:nvSpPr>
-        <p:spPr>
-          <a:xfrm>
-            <a:off x="685800" y="6267450"/>
-            <a:ext cx="476250" cy="120015"/>
-          </a:xfrm>
-          <a:prstGeom prst="rect">
-            <a:avLst/>
-          </a:prstGeom>
-          <a:noFill/>
-          <a:ln/>
-        </p:spPr>
-        <p:txBody>
-          <a:bodyPr wrap="square" lIns="0" tIns="0" rIns="0" bIns="0" rtlCol="0" anchor="t"/>
-          <a:lstStyle/>
-          <a:p>
-            <a:pPr algn="l" indent="0" marL="0">
-              <a:lnSpc>
-                <a:spcPts val="945"/>
-              </a:lnSpc>
-              <a:buNone/>
-            </a:pPr>
-            <a:r>
-              <a:rPr lang="en-US" sz="788" b="1" spc="180" kern="0" dirty="0">
-                <a:solidFill>
-                  <a:srgbClr val="EFB13C"/>
-                </a:solidFill>
-                <a:latin typeface="Consolas" pitchFamily="34" charset="0"/>
-                <a:ea typeface="Consolas" pitchFamily="34" charset="-122"/>
-                <a:cs typeface="Consolas" pitchFamily="34" charset="-120"/>
-              </a:rPr>
               <a:t>결론</a:t>
             </a:r>
             <a:endParaRPr lang="en-US" sz="788" dirty="0"/>
@@ -27390,7 +27493,7 @@
       </p:sp>
       <p:sp>
         <p:nvSpPr>
-          <p:cNvPr id="96" name="Text 94"/>
+          <p:cNvPr id="98" name="Text 96"/>
           <p:cNvSpPr txBox="1"/>
           <p:nvPr/>
         </p:nvSpPr>
@@ -27504,7 +27607,7 @@
         </p:nvSpPr>
         <p:spPr>
           <a:xfrm>
-            <a:off x="685800" y="381000"/>
+            <a:off x="685800" y="419100"/>
             <a:ext cx="5715000" cy="142875"/>
           </a:xfrm>
           <a:prstGeom prst="rect">
@@ -27563,7 +27666,7 @@
         </p:nvSpPr>
         <p:spPr>
           <a:xfrm>
-            <a:off x="10677525" y="466725"/>
+            <a:off x="10677525" y="504825"/>
             <a:ext cx="28575" cy="47625"/>
           </a:xfrm>
           <a:prstGeom prst="rect">
@@ -27583,7 +27686,7 @@
         </p:nvSpPr>
         <p:spPr>
           <a:xfrm>
-            <a:off x="10810875" y="466725"/>
+            <a:off x="10810875" y="504825"/>
             <a:ext cx="28575" cy="47625"/>
           </a:xfrm>
           <a:prstGeom prst="rect">
@@ -27603,7 +27706,7 @@
         </p:nvSpPr>
         <p:spPr>
           <a:xfrm>
-            <a:off x="10944225" y="390525"/>
+            <a:off x="10944225" y="428625"/>
             <a:ext cx="28575" cy="123825"/>
           </a:xfrm>
           <a:prstGeom prst="rect">
@@ -27623,7 +27726,7 @@
         </p:nvSpPr>
         <p:spPr>
           <a:xfrm>
-            <a:off x="11077575" y="466725"/>
+            <a:off x="11077575" y="504825"/>
             <a:ext cx="28575" cy="47625"/>
           </a:xfrm>
           <a:prstGeom prst="rect">
@@ -27643,7 +27746,7 @@
         </p:nvSpPr>
         <p:spPr>
           <a:xfrm>
-            <a:off x="11210925" y="466725"/>
+            <a:off x="11210925" y="504825"/>
             <a:ext cx="28575" cy="47625"/>
           </a:xfrm>
           <a:prstGeom prst="rect">
@@ -27663,7 +27766,7 @@
         </p:nvSpPr>
         <p:spPr>
           <a:xfrm>
-            <a:off x="11344275" y="466725"/>
+            <a:off x="11344275" y="504825"/>
             <a:ext cx="28575" cy="47625"/>
           </a:xfrm>
           <a:prstGeom prst="rect">
@@ -27683,7 +27786,7 @@
         </p:nvSpPr>
         <p:spPr>
           <a:xfrm>
-            <a:off x="11477625" y="466725"/>
+            <a:off x="11477625" y="504825"/>
             <a:ext cx="28575" cy="47625"/>
           </a:xfrm>
           <a:prstGeom prst="rect">
@@ -28393,7 +28496,7 @@
         <p:spPr>
           <a:xfrm>
             <a:off x="685800" y="4076700"/>
-            <a:ext cx="5295900" cy="1676400"/>
+            <a:ext cx="5295900" cy="1600200"/>
           </a:xfrm>
           <a:prstGeom prst="rect">
             <a:avLst/>
@@ -29036,7 +29139,7 @@
         </p:nvSpPr>
         <p:spPr>
           <a:xfrm>
-            <a:off x="685800" y="5867400"/>
+            <a:off x="685800" y="5753100"/>
             <a:ext cx="5295900" cy="240030"/>
           </a:xfrm>
           <a:prstGeom prst="rect">
@@ -29081,7 +29184,7 @@
                 <a:ea typeface="Malgun Gothic" pitchFamily="34" charset="-122"/>
                 <a:cs typeface="Malgun Gothic" pitchFamily="34" charset="-120"/>
               </a:rPr>
-              <a:t> — 두 값이 벌어지면 그 회차는 반영을 보류합니다.</a:t>
+              <a:t> — 두 값이 벌어지면 반영을 보류합니다.</a:t>
             </a:r>
             <a:endParaRPr lang="en-US" sz="1125" dirty="0"/>
           </a:p>
@@ -29158,7 +29261,7 @@
         <p:spPr>
           <a:xfrm>
             <a:off x="6210300" y="4076700"/>
-            <a:ext cx="4991100" cy="1676400"/>
+            <a:ext cx="4991100" cy="1600200"/>
           </a:xfrm>
           <a:prstGeom prst="rect">
             <a:avLst/>
@@ -29182,7 +29285,7 @@
         </p:nvSpPr>
         <p:spPr>
           <a:xfrm>
-            <a:off x="6210300" y="4762500"/>
+            <a:off x="6210300" y="4667250"/>
             <a:ext cx="4991100" cy="200025"/>
           </a:xfrm>
           <a:prstGeom prst="rect">
@@ -29224,7 +29327,7 @@
         </p:nvSpPr>
         <p:spPr>
           <a:xfrm>
-            <a:off x="6210300" y="5029200"/>
+            <a:off x="6210300" y="4933950"/>
             <a:ext cx="4991100" cy="125016"/>
           </a:xfrm>
           <a:prstGeom prst="rect">
@@ -29252,7 +29355,7 @@
                 <a:ea typeface="Consolas" pitchFamily="34" charset="-122"/>
                 <a:cs typeface="Consolas" pitchFamily="34" charset="-120"/>
               </a:rPr>
-              <a:t>524 × 176 px  ·  가로 5.46 in</a:t>
+              <a:t>524 × 168 px  ·  가로 5.46 in</a:t>
             </a:r>
             <a:endParaRPr lang="en-US" sz="788" dirty="0"/>
           </a:p>
@@ -29266,7 +29369,7 @@
         </p:nvSpPr>
         <p:spPr>
           <a:xfrm>
-            <a:off x="6210300" y="5867400"/>
+            <a:off x="6210300" y="5753100"/>
             <a:ext cx="5295900" cy="240030"/>
           </a:xfrm>
           <a:prstGeom prst="rect">
@@ -29481,7 +29584,7 @@
         </p:nvSpPr>
         <p:spPr>
           <a:xfrm>
-            <a:off x="685800" y="381000"/>
+            <a:off x="685800" y="419100"/>
             <a:ext cx="5715000" cy="142875"/>
           </a:xfrm>
           <a:prstGeom prst="rect">
@@ -29540,7 +29643,7 @@
         </p:nvSpPr>
         <p:spPr>
           <a:xfrm>
-            <a:off x="10677525" y="466725"/>
+            <a:off x="10677525" y="504825"/>
             <a:ext cx="28575" cy="47625"/>
           </a:xfrm>
           <a:prstGeom prst="rect">
@@ -29560,7 +29663,7 @@
         </p:nvSpPr>
         <p:spPr>
           <a:xfrm>
-            <a:off x="10810875" y="466725"/>
+            <a:off x="10810875" y="504825"/>
             <a:ext cx="28575" cy="47625"/>
           </a:xfrm>
           <a:prstGeom prst="rect">
@@ -29580,7 +29683,7 @@
         </p:nvSpPr>
         <p:spPr>
           <a:xfrm>
-            <a:off x="10944225" y="390525"/>
+            <a:off x="10944225" y="428625"/>
             <a:ext cx="28575" cy="123825"/>
           </a:xfrm>
           <a:prstGeom prst="rect">
@@ -29600,7 +29703,7 @@
         </p:nvSpPr>
         <p:spPr>
           <a:xfrm>
-            <a:off x="11077575" y="466725"/>
+            <a:off x="11077575" y="504825"/>
             <a:ext cx="28575" cy="47625"/>
           </a:xfrm>
           <a:prstGeom prst="rect">
@@ -29620,7 +29723,7 @@
         </p:nvSpPr>
         <p:spPr>
           <a:xfrm>
-            <a:off x="11210925" y="466725"/>
+            <a:off x="11210925" y="504825"/>
             <a:ext cx="28575" cy="47625"/>
           </a:xfrm>
           <a:prstGeom prst="rect">
@@ -29640,7 +29743,7 @@
         </p:nvSpPr>
         <p:spPr>
           <a:xfrm>
-            <a:off x="11344275" y="466725"/>
+            <a:off x="11344275" y="504825"/>
             <a:ext cx="28575" cy="47625"/>
           </a:xfrm>
           <a:prstGeom prst="rect">
@@ -29660,7 +29763,7 @@
         </p:nvSpPr>
         <p:spPr>
           <a:xfrm>
-            <a:off x="11477625" y="466725"/>
+            <a:off x="11477625" y="504825"/>
             <a:ext cx="28575" cy="47625"/>
           </a:xfrm>
           <a:prstGeom prst="rect">
@@ -30050,7 +30153,7 @@
         <p:spPr>
           <a:xfrm>
             <a:off x="685800" y="4495800"/>
-            <a:ext cx="2562225" cy="1200150"/>
+            <a:ext cx="2562225" cy="960120"/>
           </a:xfrm>
           <a:prstGeom prst="rect">
             <a:avLst/>
@@ -30334,7 +30437,7 @@
         <p:spPr>
           <a:xfrm>
             <a:off x="3438525" y="4495800"/>
-            <a:ext cx="2562225" cy="1200150"/>
+            <a:ext cx="2562225" cy="960120"/>
           </a:xfrm>
           <a:prstGeom prst="rect">
             <a:avLst/>
@@ -30618,7 +30721,7 @@
         <p:spPr>
           <a:xfrm>
             <a:off x="6191250" y="4495800"/>
-            <a:ext cx="2562225" cy="1200150"/>
+            <a:ext cx="2562225" cy="960120"/>
           </a:xfrm>
           <a:prstGeom prst="rect">
             <a:avLst/>
@@ -30902,7 +31005,7 @@
         <p:spPr>
           <a:xfrm>
             <a:off x="8943975" y="4495800"/>
-            <a:ext cx="2562225" cy="1200150"/>
+            <a:ext cx="2562225" cy="960120"/>
           </a:xfrm>
           <a:prstGeom prst="rect">
             <a:avLst/>
@@ -31217,7 +31320,7 @@
         </p:nvSpPr>
         <p:spPr>
           <a:xfrm>
-            <a:off x="685800" y="381000"/>
+            <a:off x="685800" y="419100"/>
             <a:ext cx="5715000" cy="142875"/>
           </a:xfrm>
           <a:prstGeom prst="rect">
@@ -31276,7 +31379,7 @@
         </p:nvSpPr>
         <p:spPr>
           <a:xfrm>
-            <a:off x="10677525" y="466725"/>
+            <a:off x="10677525" y="504825"/>
             <a:ext cx="28575" cy="47625"/>
           </a:xfrm>
           <a:prstGeom prst="rect">
@@ -31296,7 +31399,7 @@
         </p:nvSpPr>
         <p:spPr>
           <a:xfrm>
-            <a:off x="10810875" y="466725"/>
+            <a:off x="10810875" y="504825"/>
             <a:ext cx="28575" cy="47625"/>
           </a:xfrm>
           <a:prstGeom prst="rect">
@@ -31316,7 +31419,7 @@
         </p:nvSpPr>
         <p:spPr>
           <a:xfrm>
-            <a:off x="10944225" y="466725"/>
+            <a:off x="10944225" y="504825"/>
             <a:ext cx="28575" cy="47625"/>
           </a:xfrm>
           <a:prstGeom prst="rect">
@@ -31336,7 +31439,7 @@
         </p:nvSpPr>
         <p:spPr>
           <a:xfrm>
-            <a:off x="11077575" y="390525"/>
+            <a:off x="11077575" y="428625"/>
             <a:ext cx="28575" cy="123825"/>
           </a:xfrm>
           <a:prstGeom prst="rect">
@@ -31356,7 +31459,7 @@
         </p:nvSpPr>
         <p:spPr>
           <a:xfrm>
-            <a:off x="11210925" y="466725"/>
+            <a:off x="11210925" y="504825"/>
             <a:ext cx="28575" cy="47625"/>
           </a:xfrm>
           <a:prstGeom prst="rect">
@@ -31376,7 +31479,7 @@
         </p:nvSpPr>
         <p:spPr>
           <a:xfrm>
-            <a:off x="11344275" y="466725"/>
+            <a:off x="11344275" y="504825"/>
             <a:ext cx="28575" cy="47625"/>
           </a:xfrm>
           <a:prstGeom prst="rect">
@@ -31396,7 +31499,7 @@
         </p:nvSpPr>
         <p:spPr>
           <a:xfrm>
-            <a:off x="11477625" y="466725"/>
+            <a:off x="11477625" y="504825"/>
             <a:ext cx="28575" cy="47625"/>
           </a:xfrm>
           <a:prstGeom prst="rect">
@@ -31830,7 +31933,7 @@
                 <a:ea typeface="Malgun Gothic" pitchFamily="34" charset="-122"/>
                 <a:cs typeface="Malgun Gothic" pitchFamily="34" charset="-120"/>
               </a:rPr>
-              <a:t>제작사 성능 곡선과 사내 검증을 거친 계산식입니다. 데이터가 쌓여도 이 층은 바뀌지 않습니다.</a:t>
+              <a:t>제작사 성능 곡선과 사내 검증을 거친 계산식입니다. 데이터가 쌓여도 바뀌지 않습니다.</a:t>
             </a:r>
             <a:endParaRPr lang="en-US" sz="1125" dirty="0"/>
           </a:p>
@@ -32836,7 +32939,7 @@
         </p:nvSpPr>
         <p:spPr>
           <a:xfrm>
-            <a:off x="685800" y="381000"/>
+            <a:off x="685800" y="419100"/>
             <a:ext cx="5715000" cy="142875"/>
           </a:xfrm>
           <a:prstGeom prst="rect">
@@ -32895,7 +32998,7 @@
         </p:nvSpPr>
         <p:spPr>
           <a:xfrm>
-            <a:off x="10677525" y="466725"/>
+            <a:off x="10677525" y="504825"/>
             <a:ext cx="28575" cy="47625"/>
           </a:xfrm>
           <a:prstGeom prst="rect">
@@ -32915,7 +33018,7 @@
         </p:nvSpPr>
         <p:spPr>
           <a:xfrm>
-            <a:off x="10810875" y="466725"/>
+            <a:off x="10810875" y="504825"/>
             <a:ext cx="28575" cy="47625"/>
           </a:xfrm>
           <a:prstGeom prst="rect">
@@ -32935,7 +33038,7 @@
         </p:nvSpPr>
         <p:spPr>
           <a:xfrm>
-            <a:off x="10944225" y="466725"/>
+            <a:off x="10944225" y="504825"/>
             <a:ext cx="28575" cy="47625"/>
           </a:xfrm>
           <a:prstGeom prst="rect">
@@ -32955,7 +33058,7 @@
         </p:nvSpPr>
         <p:spPr>
           <a:xfrm>
-            <a:off x="11077575" y="390525"/>
+            <a:off x="11077575" y="428625"/>
             <a:ext cx="28575" cy="123825"/>
           </a:xfrm>
           <a:prstGeom prst="rect">
@@ -32975,7 +33078,7 @@
         </p:nvSpPr>
         <p:spPr>
           <a:xfrm>
-            <a:off x="11210925" y="466725"/>
+            <a:off x="11210925" y="504825"/>
             <a:ext cx="28575" cy="47625"/>
           </a:xfrm>
           <a:prstGeom prst="rect">
@@ -32995,7 +33098,7 @@
         </p:nvSpPr>
         <p:spPr>
           <a:xfrm>
-            <a:off x="11344275" y="466725"/>
+            <a:off x="11344275" y="504825"/>
             <a:ext cx="28575" cy="47625"/>
           </a:xfrm>
           <a:prstGeom prst="rect">
@@ -33015,7 +33118,7 @@
         </p:nvSpPr>
         <p:spPr>
           <a:xfrm>
-            <a:off x="11477625" y="466725"/>
+            <a:off x="11477625" y="504825"/>
             <a:ext cx="28575" cy="47625"/>
           </a:xfrm>
           <a:prstGeom prst="rect">

--- a/docs/ppt/위례_공급가능용량_최종발표.pptx
+++ b/docs/ppt/위례_공급가능용량_최종발표.pptx
@@ -4752,7 +4752,7 @@
                 <a:ea typeface="Malgun Gothic" pitchFamily="34" charset="-122"/>
                 <a:cs typeface="Malgun Gothic" pitchFamily="34" charset="-120"/>
               </a:rPr>
-              <a:t>모델 개발</a:t>
+              <a:t>해결 방안 도출 및 예측/보정 모델 개발</a:t>
             </a:r>
             <a:pPr algn="l" indent="0" marL="0">
               <a:lnSpc>
@@ -6604,7 +6604,7 @@
                 <a:ea typeface="Malgun Gothic" pitchFamily="34" charset="-122"/>
                 <a:cs typeface="Malgun Gothic" pitchFamily="34" charset="-120"/>
               </a:rPr>
-              <a:t>모델 개발</a:t>
+              <a:t>해결 방안 도출 및 예측/보정 모델 개발</a:t>
             </a:r>
             <a:pPr algn="l" indent="0" marL="0">
               <a:lnSpc>
@@ -9579,7 +9579,7 @@
                 <a:ea typeface="Malgun Gothic" pitchFamily="34" charset="-122"/>
                 <a:cs typeface="Malgun Gothic" pitchFamily="34" charset="-120"/>
               </a:rPr>
-              <a:t>운영 및 모니터링</a:t>
+              <a:t>향후 추이 분석(모니터링 체계 구축)</a:t>
             </a:r>
             <a:pPr algn="l" indent="0" marL="0">
               <a:lnSpc>
@@ -12298,7 +12298,7 @@
                 <a:ea typeface="Malgun Gothic" pitchFamily="34" charset="-122"/>
                 <a:cs typeface="Malgun Gothic" pitchFamily="34" charset="-120"/>
               </a:rPr>
-              <a:t>운영 및 모니터링</a:t>
+              <a:t>향후 추이 분석(모니터링 체계 구축)</a:t>
             </a:r>
             <a:pPr algn="l" indent="0" marL="0">
               <a:lnSpc>
@@ -14170,7 +14170,7 @@
                 <a:ea typeface="Malgun Gothic" pitchFamily="34" charset="-122"/>
                 <a:cs typeface="Malgun Gothic" pitchFamily="34" charset="-120"/>
               </a:rPr>
-              <a:t>기대 효과</a:t>
+              <a:t>개선 효과(정량적/정성적)</a:t>
             </a:r>
             <a:pPr algn="l" indent="0" marL="0">
               <a:lnSpc>
@@ -16925,7 +16925,7 @@
                 <a:ea typeface="Malgun Gothic" pitchFamily="34" charset="-122"/>
                 <a:cs typeface="Malgun Gothic" pitchFamily="34" charset="-120"/>
               </a:rPr>
-              <a:t>기대 효과</a:t>
+              <a:t>개선 효과(정량적/정성적)</a:t>
             </a:r>
             <a:pPr algn="l" indent="0" marL="0">
               <a:lnSpc>
@@ -18161,7 +18161,7 @@
                 <a:ea typeface="Malgun Gothic" pitchFamily="34" charset="-122"/>
                 <a:cs typeface="Malgun Gothic" pitchFamily="34" charset="-120"/>
               </a:rPr>
-              <a:t>향후 계획</a:t>
+              <a:t>향후 계획 및 수평 전개 방안</a:t>
             </a:r>
             <a:pPr algn="l" indent="0" marL="0">
               <a:lnSpc>
@@ -22590,7 +22590,7 @@
         <p:spPr>
           <a:xfrm>
             <a:off x="1333500" y="2343150"/>
-            <a:ext cx="3429000" cy="284036"/>
+            <a:ext cx="5715000" cy="284036"/>
           </a:xfrm>
           <a:prstGeom prst="rect">
             <a:avLst/>
@@ -22617,7 +22617,7 @@
                 <a:ea typeface="Malgun Gothic" pitchFamily="34" charset="-122"/>
                 <a:cs typeface="Malgun Gothic" pitchFamily="34" charset="-120"/>
               </a:rPr>
-              <a:t>추진 배경</a:t>
+              <a:t>개요 및 추진 배경</a:t>
             </a:r>
             <a:endParaRPr lang="en-US" sz="1575" dirty="0"/>
           </a:p>
@@ -22631,27 +22631,27 @@
         </p:nvSpPr>
         <p:spPr>
           <a:xfrm>
-            <a:off x="4953000" y="2362200"/>
-            <a:ext cx="5334000" cy="240030"/>
-          </a:xfrm>
-          <a:prstGeom prst="rect">
-            <a:avLst/>
-          </a:prstGeom>
-          <a:noFill/>
-          <a:ln/>
-        </p:spPr>
-        <p:txBody>
-          <a:bodyPr wrap="square" lIns="0" tIns="0" rIns="0" bIns="0" rtlCol="0" anchor="t"/>
-          <a:lstStyle/>
-          <a:p>
-            <a:pPr algn="l" indent="0" marL="0">
-              <a:lnSpc>
-                <a:spcPts val="1890"/>
-              </a:lnSpc>
-              <a:buNone/>
-            </a:pPr>
-            <a:r>
-              <a:rPr lang="en-US" sz="1125" dirty="0">
+            <a:off x="7239000" y="2390775"/>
+            <a:ext cx="3143250" cy="186690"/>
+          </a:xfrm>
+          <a:prstGeom prst="rect">
+            <a:avLst/>
+          </a:prstGeom>
+          <a:noFill/>
+          <a:ln/>
+        </p:spPr>
+        <p:txBody>
+          <a:bodyPr wrap="square" lIns="0" tIns="0" rIns="0" bIns="0" rtlCol="0" anchor="t"/>
+          <a:lstStyle/>
+          <a:p>
+            <a:pPr algn="l" indent="0" marL="0">
+              <a:lnSpc>
+                <a:spcPts val="1470"/>
+              </a:lnSpc>
+              <a:buNone/>
+            </a:pPr>
+            <a:r>
+              <a:rPr lang="en-US" sz="1050" dirty="0">
                 <a:solidFill>
                   <a:srgbClr val="CFCBC2"/>
                 </a:solidFill>
@@ -22659,9 +22659,9 @@
                 <a:ea typeface="Malgun Gothic" pitchFamily="34" charset="-122"/>
                 <a:cs typeface="Malgun Gothic" pitchFamily="34" charset="-120"/>
               </a:rPr>
-              <a:t>매주 신고하는 숫자, 틀리면 양쪽으로 손실이 납니다</a:t>
-            </a:r>
-            <a:endParaRPr lang="en-US" sz="1125" dirty="0"/>
+              <a:t>매주 신고하는 숫자, 양쪽 손실</a:t>
+            </a:r>
+            <a:endParaRPr lang="en-US" sz="1050" dirty="0"/>
           </a:p>
         </p:txBody>
       </p:sp>
@@ -22673,8 +22673,8 @@
         </p:nvSpPr>
         <p:spPr>
           <a:xfrm>
-            <a:off x="10363200" y="2390775"/>
-            <a:ext cx="1143000" cy="148590"/>
+            <a:off x="10553700" y="2400300"/>
+            <a:ext cx="952500" cy="148590"/>
           </a:xfrm>
           <a:prstGeom prst="rect">
             <a:avLst/>
@@ -22781,7 +22781,7 @@
         <p:spPr>
           <a:xfrm>
             <a:off x="1333500" y="2867025"/>
-            <a:ext cx="3429000" cy="284036"/>
+            <a:ext cx="5715000" cy="284036"/>
           </a:xfrm>
           <a:prstGeom prst="rect">
             <a:avLst/>
@@ -22808,7 +22808,7 @@
                 <a:ea typeface="Malgun Gothic" pitchFamily="34" charset="-122"/>
                 <a:cs typeface="Malgun Gothic" pitchFamily="34" charset="-120"/>
               </a:rPr>
-              <a:t>현황 및 문제점</a:t>
+              <a:t>현황 파악 및 문제 정의</a:t>
             </a:r>
             <a:endParaRPr lang="en-US" sz="1575" dirty="0"/>
           </a:p>
@@ -22822,27 +22822,27 @@
         </p:nvSpPr>
         <p:spPr>
           <a:xfrm>
-            <a:off x="4953000" y="2886075"/>
-            <a:ext cx="5334000" cy="240030"/>
-          </a:xfrm>
-          <a:prstGeom prst="rect">
-            <a:avLst/>
-          </a:prstGeom>
-          <a:noFill/>
-          <a:ln/>
-        </p:spPr>
-        <p:txBody>
-          <a:bodyPr wrap="square" lIns="0" tIns="0" rIns="0" bIns="0" rtlCol="0" anchor="t"/>
-          <a:lstStyle/>
-          <a:p>
-            <a:pPr algn="l" indent="0" marL="0">
-              <a:lnSpc>
-                <a:spcPts val="1890"/>
-              </a:lnSpc>
-              <a:buNone/>
-            </a:pPr>
-            <a:r>
-              <a:rPr lang="en-US" sz="1125" dirty="0">
+            <a:off x="7239000" y="2914650"/>
+            <a:ext cx="3143250" cy="186690"/>
+          </a:xfrm>
+          <a:prstGeom prst="rect">
+            <a:avLst/>
+          </a:prstGeom>
+          <a:noFill/>
+          <a:ln/>
+        </p:spPr>
+        <p:txBody>
+          <a:bodyPr wrap="square" lIns="0" tIns="0" rIns="0" bIns="0" rtlCol="0" anchor="t"/>
+          <a:lstStyle/>
+          <a:p>
+            <a:pPr algn="l" indent="0" marL="0">
+              <a:lnSpc>
+                <a:spcPts val="1470"/>
+              </a:lnSpc>
+              <a:buNone/>
+            </a:pPr>
+            <a:r>
+              <a:rPr lang="en-US" sz="1050" dirty="0">
                 <a:solidFill>
                   <a:srgbClr val="CFCBC2"/>
                 </a:solidFill>
@@ -22850,9 +22850,9 @@
                 <a:ea typeface="Malgun Gothic" pitchFamily="34" charset="-122"/>
                 <a:cs typeface="Malgun Gothic" pitchFamily="34" charset="-120"/>
               </a:rPr>
-              <a:t>정수 하나로 메워 온 방식과, 그것으로는 맞출 수 없는 이유</a:t>
-            </a:r>
-            <a:endParaRPr lang="en-US" sz="1125" dirty="0"/>
+              <a:t>정수 하나로는 맞출 수 없다</a:t>
+            </a:r>
+            <a:endParaRPr lang="en-US" sz="1050" dirty="0"/>
           </a:p>
         </p:txBody>
       </p:sp>
@@ -22864,8 +22864,8 @@
         </p:nvSpPr>
         <p:spPr>
           <a:xfrm>
-            <a:off x="10363200" y="2914650"/>
-            <a:ext cx="1143000" cy="148590"/>
+            <a:off x="10553700" y="2924175"/>
+            <a:ext cx="952500" cy="148590"/>
           </a:xfrm>
           <a:prstGeom prst="rect">
             <a:avLst/>
@@ -22972,7 +22972,7 @@
         <p:spPr>
           <a:xfrm>
             <a:off x="1333500" y="3390900"/>
-            <a:ext cx="3429000" cy="284036"/>
+            <a:ext cx="5715000" cy="284036"/>
           </a:xfrm>
           <a:prstGeom prst="rect">
             <a:avLst/>
@@ -22999,7 +22999,7 @@
                 <a:ea typeface="Malgun Gothic" pitchFamily="34" charset="-122"/>
                 <a:cs typeface="Malgun Gothic" pitchFamily="34" charset="-120"/>
               </a:rPr>
-              <a:t>데이터 확보 및 분석</a:t>
+              <a:t>데이터 분석 및 원인 규명(가설 검증)</a:t>
             </a:r>
             <a:endParaRPr lang="en-US" sz="1575" dirty="0"/>
           </a:p>
@@ -23013,27 +23013,27 @@
         </p:nvSpPr>
         <p:spPr>
           <a:xfrm>
-            <a:off x="4953000" y="3409950"/>
-            <a:ext cx="5334000" cy="240030"/>
-          </a:xfrm>
-          <a:prstGeom prst="rect">
-            <a:avLst/>
-          </a:prstGeom>
-          <a:noFill/>
-          <a:ln/>
-        </p:spPr>
-        <p:txBody>
-          <a:bodyPr wrap="square" lIns="0" tIns="0" rIns="0" bIns="0" rtlCol="0" anchor="t"/>
-          <a:lstStyle/>
-          <a:p>
-            <a:pPr algn="l" indent="0" marL="0">
-              <a:lnSpc>
-                <a:spcPts val="1890"/>
-              </a:lnSpc>
-              <a:buNone/>
-            </a:pPr>
-            <a:r>
-              <a:rPr lang="en-US" sz="1125" dirty="0">
+            <a:off x="7239000" y="3438525"/>
+            <a:ext cx="3143250" cy="186690"/>
+          </a:xfrm>
+          <a:prstGeom prst="rect">
+            <a:avLst/>
+          </a:prstGeom>
+          <a:noFill/>
+          <a:ln/>
+        </p:spPr>
+        <p:txBody>
+          <a:bodyPr wrap="square" lIns="0" tIns="0" rIns="0" bIns="0" rtlCol="0" anchor="t"/>
+          <a:lstStyle/>
+          <a:p>
+            <a:pPr algn="l" indent="0" marL="0">
+              <a:lnSpc>
+                <a:spcPts val="1470"/>
+              </a:lnSpc>
+              <a:buNone/>
+            </a:pPr>
+            <a:r>
+              <a:rPr lang="en-US" sz="1050" dirty="0">
                 <a:solidFill>
                   <a:srgbClr val="CFCBC2"/>
                 </a:solidFill>
@@ -23041,9 +23041,9 @@
                 <a:ea typeface="Malgun Gothic" pitchFamily="34" charset="-122"/>
                 <a:cs typeface="Malgun Gothic" pitchFamily="34" charset="-120"/>
               </a:rPr>
-              <a:t>사람 손을 거치지 않는 취득과, 가설 4개의 검증</a:t>
-            </a:r>
-            <a:endParaRPr lang="en-US" sz="1125" dirty="0"/>
+              <a:t>가설 4개 중 3개를 기각</a:t>
+            </a:r>
+            <a:endParaRPr lang="en-US" sz="1050" dirty="0"/>
           </a:p>
         </p:txBody>
       </p:sp>
@@ -23055,8 +23055,8 @@
         </p:nvSpPr>
         <p:spPr>
           <a:xfrm>
-            <a:off x="10363200" y="3438525"/>
-            <a:ext cx="1143000" cy="148590"/>
+            <a:off x="10553700" y="3448050"/>
+            <a:ext cx="952500" cy="148590"/>
           </a:xfrm>
           <a:prstGeom prst="rect">
             <a:avLst/>
@@ -23163,7 +23163,7 @@
         <p:spPr>
           <a:xfrm>
             <a:off x="1333500" y="3914775"/>
-            <a:ext cx="3429000" cy="284036"/>
+            <a:ext cx="5715000" cy="284036"/>
           </a:xfrm>
           <a:prstGeom prst="rect">
             <a:avLst/>
@@ -23190,7 +23190,7 @@
                 <a:ea typeface="Malgun Gothic" pitchFamily="34" charset="-122"/>
                 <a:cs typeface="Malgun Gothic" pitchFamily="34" charset="-120"/>
               </a:rPr>
-              <a:t>모델 개발</a:t>
+              <a:t>해결 방안 도출 및 예측/보정 모델 개발</a:t>
             </a:r>
             <a:endParaRPr lang="en-US" sz="1575" dirty="0"/>
           </a:p>
@@ -23204,27 +23204,27 @@
         </p:nvSpPr>
         <p:spPr>
           <a:xfrm>
-            <a:off x="4953000" y="3933825"/>
-            <a:ext cx="5334000" cy="240030"/>
-          </a:xfrm>
-          <a:prstGeom prst="rect">
-            <a:avLst/>
-          </a:prstGeom>
-          <a:noFill/>
-          <a:ln/>
-        </p:spPr>
-        <p:txBody>
-          <a:bodyPr wrap="square" lIns="0" tIns="0" rIns="0" bIns="0" rtlCol="0" anchor="t"/>
-          <a:lstStyle/>
-          <a:p>
-            <a:pPr algn="l" indent="0" marL="0">
-              <a:lnSpc>
-                <a:spcPts val="1890"/>
-              </a:lnSpc>
-              <a:buNone/>
-            </a:pPr>
-            <a:r>
-              <a:rPr lang="en-US" sz="1125" dirty="0">
+            <a:off x="7239000" y="3962400"/>
+            <a:ext cx="3143250" cy="186690"/>
+          </a:xfrm>
+          <a:prstGeom prst="rect">
+            <a:avLst/>
+          </a:prstGeom>
+          <a:noFill/>
+          <a:ln/>
+        </p:spPr>
+        <p:txBody>
+          <a:bodyPr wrap="square" lIns="0" tIns="0" rIns="0" bIns="0" rtlCol="0" anchor="t"/>
+          <a:lstStyle/>
+          <a:p>
+            <a:pPr algn="l" indent="0" marL="0">
+              <a:lnSpc>
+                <a:spcPts val="1470"/>
+              </a:lnSpc>
+              <a:buNone/>
+            </a:pPr>
+            <a:r>
+              <a:rPr lang="en-US" sz="1050" dirty="0">
                 <a:solidFill>
                   <a:srgbClr val="CFCBC2"/>
                 </a:solidFill>
@@ -23232,9 +23232,9 @@
                 <a:ea typeface="Malgun Gothic" pitchFamily="34" charset="-122"/>
                 <a:cs typeface="Malgun Gothic" pitchFamily="34" charset="-120"/>
               </a:rPr>
-              <a:t>이론은 동결하고 차이만 학습 · 잇는 방식 7가지 채점</a:t>
-            </a:r>
-            <a:endParaRPr lang="en-US" sz="1125" dirty="0"/>
+              <a:t>이론 동결 · 방식 7가지 채점</a:t>
+            </a:r>
+            <a:endParaRPr lang="en-US" sz="1050" dirty="0"/>
           </a:p>
         </p:txBody>
       </p:sp>
@@ -23246,8 +23246,8 @@
         </p:nvSpPr>
         <p:spPr>
           <a:xfrm>
-            <a:off x="10363200" y="3962400"/>
-            <a:ext cx="1143000" cy="148590"/>
+            <a:off x="10553700" y="3971925"/>
+            <a:ext cx="952500" cy="148590"/>
           </a:xfrm>
           <a:prstGeom prst="rect">
             <a:avLst/>
@@ -23354,7 +23354,7 @@
         <p:spPr>
           <a:xfrm>
             <a:off x="1333500" y="4438650"/>
-            <a:ext cx="3429000" cy="284036"/>
+            <a:ext cx="5715000" cy="284036"/>
           </a:xfrm>
           <a:prstGeom prst="rect">
             <a:avLst/>
@@ -23381,7 +23381,7 @@
                 <a:ea typeface="Malgun Gothic" pitchFamily="34" charset="-122"/>
                 <a:cs typeface="Malgun Gothic" pitchFamily="34" charset="-120"/>
               </a:rPr>
-              <a:t>운영 및 모니터링</a:t>
+              <a:t>향후 추이 분석(모니터링 체계 구축)</a:t>
             </a:r>
             <a:endParaRPr lang="en-US" sz="1575" dirty="0"/>
           </a:p>
@@ -23395,27 +23395,27 @@
         </p:nvSpPr>
         <p:spPr>
           <a:xfrm>
-            <a:off x="4953000" y="4457700"/>
-            <a:ext cx="5334000" cy="240030"/>
-          </a:xfrm>
-          <a:prstGeom prst="rect">
-            <a:avLst/>
-          </a:prstGeom>
-          <a:noFill/>
-          <a:ln/>
-        </p:spPr>
-        <p:txBody>
-          <a:bodyPr wrap="square" lIns="0" tIns="0" rIns="0" bIns="0" rtlCol="0" anchor="t"/>
-          <a:lstStyle/>
-          <a:p>
-            <a:pPr algn="l" indent="0" marL="0">
-              <a:lnSpc>
-                <a:spcPts val="1890"/>
-              </a:lnSpc>
-              <a:buNone/>
-            </a:pPr>
-            <a:r>
-              <a:rPr lang="en-US" sz="1125" dirty="0">
+            <a:off x="7239000" y="4486275"/>
+            <a:ext cx="3143250" cy="186690"/>
+          </a:xfrm>
+          <a:prstGeom prst="rect">
+            <a:avLst/>
+          </a:prstGeom>
+          <a:noFill/>
+          <a:ln/>
+        </p:spPr>
+        <p:txBody>
+          <a:bodyPr wrap="square" lIns="0" tIns="0" rIns="0" bIns="0" rtlCol="0" anchor="t"/>
+          <a:lstStyle/>
+          <a:p>
+            <a:pPr algn="l" indent="0" marL="0">
+              <a:lnSpc>
+                <a:spcPts val="1470"/>
+              </a:lnSpc>
+              <a:buNone/>
+            </a:pPr>
+            <a:r>
+              <a:rPr lang="en-US" sz="1050" dirty="0">
                 <a:solidFill>
                   <a:srgbClr val="CFCBC2"/>
                 </a:solidFill>
@@ -23423,9 +23423,9 @@
                 <a:ea typeface="Malgun Gothic" pitchFamily="34" charset="-122"/>
                 <a:cs typeface="Malgun Gothic" pitchFamily="34" charset="-120"/>
               </a:rPr>
-              <a:t>스스로 갱신하는 체계와, 시운전에서 만난 함정 3개</a:t>
-            </a:r>
-            <a:endParaRPr lang="en-US" sz="1125" dirty="0"/>
+              <a:t>회차가 쌓이면 다시 고른다</a:t>
+            </a:r>
+            <a:endParaRPr lang="en-US" sz="1050" dirty="0"/>
           </a:p>
         </p:txBody>
       </p:sp>
@@ -23437,8 +23437,8 @@
         </p:nvSpPr>
         <p:spPr>
           <a:xfrm>
-            <a:off x="10363200" y="4486275"/>
-            <a:ext cx="1143000" cy="148590"/>
+            <a:off x="10553700" y="4495800"/>
+            <a:ext cx="952500" cy="148590"/>
           </a:xfrm>
           <a:prstGeom prst="rect">
             <a:avLst/>
@@ -23545,7 +23545,7 @@
         <p:spPr>
           <a:xfrm>
             <a:off x="1333500" y="4962525"/>
-            <a:ext cx="3429000" cy="284036"/>
+            <a:ext cx="5715000" cy="284036"/>
           </a:xfrm>
           <a:prstGeom prst="rect">
             <a:avLst/>
@@ -23572,7 +23572,7 @@
                 <a:ea typeface="Malgun Gothic" pitchFamily="34" charset="-122"/>
                 <a:cs typeface="Malgun Gothic" pitchFamily="34" charset="-120"/>
               </a:rPr>
-              <a:t>기대 효과</a:t>
+              <a:t>개선 효과(정량적/정성적)</a:t>
             </a:r>
             <a:endParaRPr lang="en-US" sz="1575" dirty="0"/>
           </a:p>
@@ -23586,27 +23586,27 @@
         </p:nvSpPr>
         <p:spPr>
           <a:xfrm>
-            <a:off x="4953000" y="4981575"/>
-            <a:ext cx="5334000" cy="240030"/>
-          </a:xfrm>
-          <a:prstGeom prst="rect">
-            <a:avLst/>
-          </a:prstGeom>
-          <a:noFill/>
-          <a:ln/>
-        </p:spPr>
-        <p:txBody>
-          <a:bodyPr wrap="square" lIns="0" tIns="0" rIns="0" bIns="0" rtlCol="0" anchor="t"/>
-          <a:lstStyle/>
-          <a:p>
-            <a:pPr algn="l" indent="0" marL="0">
-              <a:lnSpc>
-                <a:spcPts val="1890"/>
-              </a:lnSpc>
-              <a:buNone/>
-            </a:pPr>
-            <a:r>
-              <a:rPr lang="en-US" sz="1125" dirty="0">
+            <a:off x="7239000" y="5010150"/>
+            <a:ext cx="3143250" cy="186690"/>
+          </a:xfrm>
+          <a:prstGeom prst="rect">
+            <a:avLst/>
+          </a:prstGeom>
+          <a:noFill/>
+          <a:ln/>
+        </p:spPr>
+        <p:txBody>
+          <a:bodyPr wrap="square" lIns="0" tIns="0" rIns="0" bIns="0" rtlCol="0" anchor="t"/>
+          <a:lstStyle/>
+          <a:p>
+            <a:pPr algn="l" indent="0" marL="0">
+              <a:lnSpc>
+                <a:spcPts val="1470"/>
+              </a:lnSpc>
+              <a:buNone/>
+            </a:pPr>
+            <a:r>
+              <a:rPr lang="en-US" sz="1050" dirty="0">
                 <a:solidFill>
                   <a:srgbClr val="CFCBC2"/>
                 </a:solidFill>
@@ -23614,9 +23614,9 @@
                 <a:ea typeface="Malgun Gothic" pitchFamily="34" charset="-122"/>
                 <a:cs typeface="Malgun Gothic" pitchFamily="34" charset="-120"/>
               </a:rPr>
-              <a:t>정량 3지표와 정성 4관점</a:t>
-            </a:r>
-            <a:endParaRPr lang="en-US" sz="1125" dirty="0"/>
+              <a:t>정량 3지표 · 정성 4관점</a:t>
+            </a:r>
+            <a:endParaRPr lang="en-US" sz="1050" dirty="0"/>
           </a:p>
         </p:txBody>
       </p:sp>
@@ -23628,8 +23628,8 @@
         </p:nvSpPr>
         <p:spPr>
           <a:xfrm>
-            <a:off x="10363200" y="5010150"/>
-            <a:ext cx="1143000" cy="148590"/>
+            <a:off x="10553700" y="5019675"/>
+            <a:ext cx="952500" cy="148590"/>
           </a:xfrm>
           <a:prstGeom prst="rect">
             <a:avLst/>
@@ -23736,7 +23736,7 @@
         <p:spPr>
           <a:xfrm>
             <a:off x="1333500" y="5486400"/>
-            <a:ext cx="3429000" cy="284036"/>
+            <a:ext cx="5715000" cy="284036"/>
           </a:xfrm>
           <a:prstGeom prst="rect">
             <a:avLst/>
@@ -23763,7 +23763,7 @@
                 <a:ea typeface="Malgun Gothic" pitchFamily="34" charset="-122"/>
                 <a:cs typeface="Malgun Gothic" pitchFamily="34" charset="-120"/>
               </a:rPr>
-              <a:t>향후 계획</a:t>
+              <a:t>향후 계획 및 수평 전개 방안</a:t>
             </a:r>
             <a:endParaRPr lang="en-US" sz="1575" dirty="0"/>
           </a:p>
@@ -23777,27 +23777,27 @@
         </p:nvSpPr>
         <p:spPr>
           <a:xfrm>
-            <a:off x="4953000" y="5505450"/>
-            <a:ext cx="5334000" cy="240030"/>
-          </a:xfrm>
-          <a:prstGeom prst="rect">
-            <a:avLst/>
-          </a:prstGeom>
-          <a:noFill/>
-          <a:ln/>
-        </p:spPr>
-        <p:txBody>
-          <a:bodyPr wrap="square" lIns="0" tIns="0" rIns="0" bIns="0" rtlCol="0" anchor="t"/>
-          <a:lstStyle/>
-          <a:p>
-            <a:pPr algn="l" indent="0" marL="0">
-              <a:lnSpc>
-                <a:spcPts val="1890"/>
-              </a:lnSpc>
-              <a:buNone/>
-            </a:pPr>
-            <a:r>
-              <a:rPr lang="en-US" sz="1125" dirty="0">
+            <a:off x="7239000" y="5534025"/>
+            <a:ext cx="3143250" cy="186690"/>
+          </a:xfrm>
+          <a:prstGeom prst="rect">
+            <a:avLst/>
+          </a:prstGeom>
+          <a:noFill/>
+          <a:ln/>
+        </p:spPr>
+        <p:txBody>
+          <a:bodyPr wrap="square" lIns="0" tIns="0" rIns="0" bIns="0" rtlCol="0" anchor="t"/>
+          <a:lstStyle/>
+          <a:p>
+            <a:pPr algn="l" indent="0" marL="0">
+              <a:lnSpc>
+                <a:spcPts val="1470"/>
+              </a:lnSpc>
+              <a:buNone/>
+            </a:pPr>
+            <a:r>
+              <a:rPr lang="en-US" sz="1050" dirty="0">
                 <a:solidFill>
                   <a:srgbClr val="CFCBC2"/>
                 </a:solidFill>
@@ -23807,7 +23807,7 @@
               </a:rPr>
               <a:t>마일스톤과 수평 전개</a:t>
             </a:r>
-            <a:endParaRPr lang="en-US" sz="1125" dirty="0"/>
+            <a:endParaRPr lang="en-US" sz="1050" dirty="0"/>
           </a:p>
         </p:txBody>
       </p:sp>
@@ -23819,8 +23819,8 @@
         </p:nvSpPr>
         <p:spPr>
           <a:xfrm>
-            <a:off x="10363200" y="5534025"/>
-            <a:ext cx="1143000" cy="148590"/>
+            <a:off x="10553700" y="5543550"/>
+            <a:ext cx="952500" cy="148590"/>
           </a:xfrm>
           <a:prstGeom prst="rect">
             <a:avLst/>
@@ -26545,7 +26545,7 @@
                 <a:ea typeface="Malgun Gothic" pitchFamily="34" charset="-122"/>
                 <a:cs typeface="Malgun Gothic" pitchFamily="34" charset="-120"/>
               </a:rPr>
-              <a:t>추진 배경</a:t>
+              <a:t>개요 및 추진 배경</a:t>
             </a:r>
             <a:pPr algn="l" indent="0" marL="0">
               <a:lnSpc>
@@ -28314,7 +28314,7 @@
                 <a:ea typeface="Malgun Gothic" pitchFamily="34" charset="-122"/>
                 <a:cs typeface="Malgun Gothic" pitchFamily="34" charset="-120"/>
               </a:rPr>
-              <a:t>현황 및 문제점</a:t>
+              <a:t>현황 파악 및 문제 정의</a:t>
             </a:r>
             <a:pPr algn="l" indent="0" marL="0">
               <a:lnSpc>
@@ -31253,7 +31253,7 @@
                 <a:ea typeface="Malgun Gothic" pitchFamily="34" charset="-122"/>
                 <a:cs typeface="Malgun Gothic" pitchFamily="34" charset="-120"/>
               </a:rPr>
-              <a:t>현황 및 문제점</a:t>
+              <a:t>현황 파악 및 문제 정의</a:t>
             </a:r>
             <a:pPr algn="l" indent="0" marL="0">
               <a:lnSpc>
@@ -34212,7 +34212,7 @@
                 <a:ea typeface="Malgun Gothic" pitchFamily="34" charset="-122"/>
                 <a:cs typeface="Malgun Gothic" pitchFamily="34" charset="-120"/>
               </a:rPr>
-              <a:t>데이터 확보 및 분석</a:t>
+              <a:t>데이터 분석 및 원인 규명(가설 검증)</a:t>
             </a:r>
             <a:pPr algn="l" indent="0" marL="0">
               <a:lnSpc>
@@ -36206,7 +36206,7 @@
                 <a:ea typeface="Malgun Gothic" pitchFamily="34" charset="-122"/>
                 <a:cs typeface="Malgun Gothic" pitchFamily="34" charset="-120"/>
               </a:rPr>
-              <a:t>데이터 확보 및 분석</a:t>
+              <a:t>데이터 분석 및 원인 규명(가설 검증)</a:t>
             </a:r>
             <a:pPr algn="l" indent="0" marL="0">
               <a:lnSpc>
@@ -37959,7 +37959,7 @@
                 <a:ea typeface="Malgun Gothic" pitchFamily="34" charset="-122"/>
                 <a:cs typeface="Malgun Gothic" pitchFamily="34" charset="-120"/>
               </a:rPr>
-              <a:t>모델 개발</a:t>
+              <a:t>해결 방안 도출 및 예측/보정 모델 개발</a:t>
             </a:r>
             <a:pPr algn="l" indent="0" marL="0">
               <a:lnSpc>

--- a/docs/ppt/위례_공급가능용량_최종발표.pptx
+++ b/docs/ppt/위례_공급가능용량_최종발표.pptx
@@ -3313,7 +3313,7 @@
         </p:nvSpPr>
         <p:spPr>
           <a:xfrm>
-            <a:off x="6896100" y="2305050"/>
+            <a:off x="6896100" y="2305936"/>
             <a:ext cx="4286250" cy="0"/>
           </a:xfrm>
           <a:prstGeom prst="line">
@@ -3336,7 +3336,7 @@
         </p:nvSpPr>
         <p:spPr>
           <a:xfrm>
-            <a:off x="6972300" y="2118360"/>
+            <a:off x="6972300" y="2119246"/>
             <a:ext cx="2095500" cy="148590"/>
           </a:xfrm>
           <a:prstGeom prst="rect">
@@ -3378,8 +3378,8 @@
         </p:nvSpPr>
         <p:spPr>
           <a:xfrm>
-            <a:off x="6972300" y="1733550"/>
-            <a:ext cx="1352550" cy="285750"/>
+            <a:off x="6972300" y="1728788"/>
+            <a:ext cx="1352550" cy="288512"/>
           </a:xfrm>
           <a:prstGeom prst="line">
             <a:avLst/>
@@ -3401,8 +3401,8 @@
         </p:nvSpPr>
         <p:spPr>
           <a:xfrm>
-            <a:off x="8324850" y="2019300"/>
-            <a:ext cx="1352550" cy="209550"/>
+            <a:off x="8324850" y="2017300"/>
+            <a:ext cx="1352550" cy="210502"/>
           </a:xfrm>
           <a:prstGeom prst="line">
             <a:avLst/>
@@ -3424,8 +3424,8 @@
         </p:nvSpPr>
         <p:spPr>
           <a:xfrm>
-            <a:off x="9677400" y="2228850"/>
-            <a:ext cx="1352550" cy="723900"/>
+            <a:off x="9677400" y="2227802"/>
+            <a:ext cx="1352550" cy="724376"/>
           </a:xfrm>
           <a:prstGeom prst="line">
             <a:avLst/>
@@ -3447,7 +3447,7 @@
         </p:nvSpPr>
         <p:spPr>
           <a:xfrm>
-            <a:off x="6934200" y="1695450"/>
+            <a:off x="6934200" y="1690688"/>
             <a:ext cx="76200" cy="76200"/>
           </a:xfrm>
           <a:prstGeom prst="rect">
@@ -3467,7 +3467,7 @@
         </p:nvSpPr>
         <p:spPr>
           <a:xfrm>
-            <a:off x="8286750" y="1981200"/>
+            <a:off x="8286750" y="1979200"/>
             <a:ext cx="76200" cy="76200"/>
           </a:xfrm>
           <a:prstGeom prst="rect">
@@ -3487,7 +3487,7 @@
         </p:nvSpPr>
         <p:spPr>
           <a:xfrm>
-            <a:off x="9639300" y="2190750"/>
+            <a:off x="9639300" y="2189702"/>
             <a:ext cx="76200" cy="76200"/>
           </a:xfrm>
           <a:prstGeom prst="rect">
@@ -3507,7 +3507,7 @@
         </p:nvSpPr>
         <p:spPr>
           <a:xfrm>
-            <a:off x="10991850" y="2914650"/>
+            <a:off x="10991850" y="2914079"/>
             <a:ext cx="76200" cy="76200"/>
           </a:xfrm>
           <a:prstGeom prst="rect">
@@ -3527,7 +3527,7 @@
         </p:nvSpPr>
         <p:spPr>
           <a:xfrm>
-            <a:off x="7067550" y="1842135"/>
+            <a:off x="7067550" y="1837373"/>
             <a:ext cx="571500" cy="148590"/>
           </a:xfrm>
           <a:prstGeom prst="rect">
@@ -3569,7 +3569,7 @@
         </p:nvSpPr>
         <p:spPr>
           <a:xfrm>
-            <a:off x="10325100" y="3004185"/>
+            <a:off x="10325100" y="3003614"/>
             <a:ext cx="628650" cy="148590"/>
           </a:xfrm>
           <a:prstGeom prst="rect">
@@ -3611,8 +3611,8 @@
         </p:nvSpPr>
         <p:spPr>
           <a:xfrm>
-            <a:off x="6972300" y="1790700"/>
-            <a:ext cx="0" cy="457200"/>
+            <a:off x="6972300" y="1785938"/>
+            <a:ext cx="0" cy="462848"/>
           </a:xfrm>
           <a:prstGeom prst="line">
             <a:avLst/>
@@ -3634,7 +3634,7 @@
         </p:nvSpPr>
         <p:spPr>
           <a:xfrm>
-            <a:off x="6915150" y="1790700"/>
+            <a:off x="6915150" y="1785938"/>
             <a:ext cx="114300" cy="0"/>
           </a:xfrm>
           <a:prstGeom prst="line">
@@ -3657,7 +3657,7 @@
         </p:nvSpPr>
         <p:spPr>
           <a:xfrm>
-            <a:off x="6915150" y="2247900"/>
+            <a:off x="6915150" y="2248786"/>
             <a:ext cx="114300" cy="0"/>
           </a:xfrm>
           <a:prstGeom prst="line">
@@ -3680,8 +3680,8 @@
         </p:nvSpPr>
         <p:spPr>
           <a:xfrm>
-            <a:off x="11029950" y="2362200"/>
-            <a:ext cx="0" cy="533400"/>
+            <a:off x="11029950" y="2363086"/>
+            <a:ext cx="0" cy="531943"/>
           </a:xfrm>
           <a:prstGeom prst="line">
             <a:avLst/>
@@ -3703,7 +3703,7 @@
         </p:nvSpPr>
         <p:spPr>
           <a:xfrm>
-            <a:off x="10972800" y="2362200"/>
+            <a:off x="10972800" y="2363086"/>
             <a:ext cx="114300" cy="0"/>
           </a:xfrm>
           <a:prstGeom prst="line">
@@ -3726,7 +3726,7 @@
         </p:nvSpPr>
         <p:spPr>
           <a:xfrm>
-            <a:off x="10972800" y="2895600"/>
+            <a:off x="10972800" y="2895029"/>
             <a:ext cx="114300" cy="0"/>
           </a:xfrm>
           <a:prstGeom prst="line">
@@ -5216,7 +5216,7 @@
                 <a:ea typeface="Consolas" pitchFamily="34" charset="-122"/>
                 <a:cs typeface="Consolas" pitchFamily="34" charset="-120"/>
               </a:rPr>
-              <a:t>0 ~ 10℃</a:t>
+              <a:t>−14 ~ 0℃</a:t>
             </a:r>
             <a:endParaRPr lang="en-US" sz="938" dirty="0"/>
           </a:p>
@@ -5231,7 +5231,7 @@
         <p:spPr>
           <a:xfrm>
             <a:off x="1828800" y="3238500"/>
-            <a:ext cx="2066925" cy="190500"/>
+            <a:ext cx="590550" cy="171450"/>
           </a:xfrm>
           <a:prstGeom prst="rect">
             <a:avLst/>
@@ -5250,7 +5250,7 @@
         </p:nvSpPr>
         <p:spPr>
           <a:xfrm>
-            <a:off x="3971925" y="3267075"/>
+            <a:off x="2495550" y="3257550"/>
             <a:ext cx="571500" cy="148590"/>
           </a:xfrm>
           <a:prstGeom prst="rect">
@@ -5278,7 +5278,7 @@
                 <a:ea typeface="Consolas" pitchFamily="34" charset="-122"/>
                 <a:cs typeface="Consolas" pitchFamily="34" charset="-120"/>
               </a:rPr>
-              <a:t>7건</a:t>
+              <a:t>2건</a:t>
             </a:r>
             <a:endParaRPr lang="en-US" sz="975" dirty="0"/>
           </a:p>
@@ -5292,7 +5292,7 @@
         </p:nvSpPr>
         <p:spPr>
           <a:xfrm>
-            <a:off x="838200" y="3600450"/>
+            <a:off x="838200" y="3562350"/>
             <a:ext cx="876300" cy="154781"/>
           </a:xfrm>
           <a:prstGeom prst="rect">
@@ -5320,7 +5320,7 @@
                 <a:ea typeface="Consolas" pitchFamily="34" charset="-122"/>
                 <a:cs typeface="Consolas" pitchFamily="34" charset="-120"/>
               </a:rPr>
-              <a:t>10 ~ 15℃</a:t>
+              <a:t>0 ~ 10℃</a:t>
             </a:r>
             <a:endParaRPr lang="en-US" sz="938" dirty="0"/>
           </a:p>
@@ -5334,8 +5334,8 @@
         </p:nvSpPr>
         <p:spPr>
           <a:xfrm>
-            <a:off x="1828800" y="3581400"/>
-            <a:ext cx="1771650" cy="190500"/>
+            <a:off x="1828800" y="3543300"/>
+            <a:ext cx="2066925" cy="171450"/>
           </a:xfrm>
           <a:prstGeom prst="rect">
             <a:avLst/>
@@ -5354,7 +5354,7 @@
         </p:nvSpPr>
         <p:spPr>
           <a:xfrm>
-            <a:off x="3676650" y="3609975"/>
+            <a:off x="3971925" y="3562350"/>
             <a:ext cx="571500" cy="148590"/>
           </a:xfrm>
           <a:prstGeom prst="rect">
@@ -5382,7 +5382,7 @@
                 <a:ea typeface="Consolas" pitchFamily="34" charset="-122"/>
                 <a:cs typeface="Consolas" pitchFamily="34" charset="-120"/>
               </a:rPr>
-              <a:t>6건</a:t>
+              <a:t>7건</a:t>
             </a:r>
             <a:endParaRPr lang="en-US" sz="975" dirty="0"/>
           </a:p>
@@ -5396,7 +5396,7 @@
         </p:nvSpPr>
         <p:spPr>
           <a:xfrm>
-            <a:off x="838200" y="3943350"/>
+            <a:off x="838200" y="3867150"/>
             <a:ext cx="876300" cy="154781"/>
           </a:xfrm>
           <a:prstGeom prst="rect">
@@ -5424,7 +5424,7 @@
                 <a:ea typeface="Consolas" pitchFamily="34" charset="-122"/>
                 <a:cs typeface="Consolas" pitchFamily="34" charset="-120"/>
               </a:rPr>
-              <a:t>15 ~ 20℃</a:t>
+              <a:t>10 ~ 15℃</a:t>
             </a:r>
             <a:endParaRPr lang="en-US" sz="938" dirty="0"/>
           </a:p>
@@ -5438,8 +5438,8 @@
         </p:nvSpPr>
         <p:spPr>
           <a:xfrm>
-            <a:off x="1828800" y="3924300"/>
-            <a:ext cx="885825" cy="190500"/>
+            <a:off x="1828800" y="3848100"/>
+            <a:ext cx="1771650" cy="171450"/>
           </a:xfrm>
           <a:prstGeom prst="rect">
             <a:avLst/>
@@ -5458,7 +5458,7 @@
         </p:nvSpPr>
         <p:spPr>
           <a:xfrm>
-            <a:off x="2790825" y="3952875"/>
+            <a:off x="3676650" y="3867150"/>
             <a:ext cx="571500" cy="148590"/>
           </a:xfrm>
           <a:prstGeom prst="rect">
@@ -5486,7 +5486,7 @@
                 <a:ea typeface="Consolas" pitchFamily="34" charset="-122"/>
                 <a:cs typeface="Consolas" pitchFamily="34" charset="-120"/>
               </a:rPr>
-              <a:t>3건</a:t>
+              <a:t>6건</a:t>
             </a:r>
             <a:endParaRPr lang="en-US" sz="975" dirty="0"/>
           </a:p>
@@ -5500,7 +5500,7 @@
         </p:nvSpPr>
         <p:spPr>
           <a:xfrm>
-            <a:off x="838200" y="4286250"/>
+            <a:off x="838200" y="4171950"/>
             <a:ext cx="876300" cy="154781"/>
           </a:xfrm>
           <a:prstGeom prst="rect">
@@ -5522,12 +5522,116 @@
             <a:r>
               <a:rPr lang="en-US" sz="938" dirty="0">
                 <a:solidFill>
-                  <a:srgbClr val="FF4D63"/>
+                  <a:srgbClr val="A9A79F"/>
                 </a:solidFill>
                 <a:latin typeface="Consolas" pitchFamily="34" charset="0"/>
                 <a:ea typeface="Consolas" pitchFamily="34" charset="-122"/>
                 <a:cs typeface="Consolas" pitchFamily="34" charset="-120"/>
               </a:rPr>
+              <a:t>15 ~ 20℃</a:t>
+            </a:r>
+            <a:endParaRPr lang="en-US" sz="938" dirty="0"/>
+          </a:p>
+        </p:txBody>
+      </p:sp>
+      <p:sp>
+        <p:nvSpPr>
+          <p:cNvPr id="26" name="Shape 24"/>
+          <p:cNvSpPr/>
+          <p:nvPr/>
+        </p:nvSpPr>
+        <p:spPr>
+          <a:xfrm>
+            <a:off x="1828800" y="4152900"/>
+            <a:ext cx="885825" cy="171450"/>
+          </a:xfrm>
+          <a:prstGeom prst="rect">
+            <a:avLst/>
+          </a:prstGeom>
+          <a:solidFill>
+            <a:srgbClr val="718BA6"/>
+          </a:solidFill>
+          <a:ln/>
+        </p:spPr>
+      </p:sp>
+      <p:sp>
+        <p:nvSpPr>
+          <p:cNvPr id="27" name="Text 25"/>
+          <p:cNvSpPr txBox="1"/>
+          <p:nvPr/>
+        </p:nvSpPr>
+        <p:spPr>
+          <a:xfrm>
+            <a:off x="2790825" y="4171950"/>
+            <a:ext cx="571500" cy="148590"/>
+          </a:xfrm>
+          <a:prstGeom prst="rect">
+            <a:avLst/>
+          </a:prstGeom>
+          <a:noFill/>
+          <a:ln/>
+        </p:spPr>
+        <p:txBody>
+          <a:bodyPr wrap="square" lIns="0" tIns="0" rIns="0" bIns="0" rtlCol="0" anchor="t"/>
+          <a:lstStyle/>
+          <a:p>
+            <a:pPr algn="l" indent="0" marL="0">
+              <a:lnSpc>
+                <a:spcPts val="1170"/>
+              </a:lnSpc>
+              <a:buNone/>
+            </a:pPr>
+            <a:r>
+              <a:rPr lang="en-US" sz="975" b="1" dirty="0">
+                <a:solidFill>
+                  <a:srgbClr val="CFCBC2"/>
+                </a:solidFill>
+                <a:latin typeface="Consolas" pitchFamily="34" charset="0"/>
+                <a:ea typeface="Consolas" pitchFamily="34" charset="-122"/>
+                <a:cs typeface="Consolas" pitchFamily="34" charset="-120"/>
+              </a:rPr>
+              <a:t>3건</a:t>
+            </a:r>
+            <a:endParaRPr lang="en-US" sz="975" dirty="0"/>
+          </a:p>
+        </p:txBody>
+      </p:sp>
+      <p:sp>
+        <p:nvSpPr>
+          <p:cNvPr id="28" name="Text 26"/>
+          <p:cNvSpPr txBox="1"/>
+          <p:nvPr/>
+        </p:nvSpPr>
+        <p:spPr>
+          <a:xfrm>
+            <a:off x="838200" y="4476750"/>
+            <a:ext cx="876300" cy="154781"/>
+          </a:xfrm>
+          <a:prstGeom prst="rect">
+            <a:avLst/>
+          </a:prstGeom>
+          <a:noFill/>
+          <a:ln/>
+        </p:spPr>
+        <p:txBody>
+          <a:bodyPr wrap="square" lIns="0" tIns="0" rIns="0" bIns="0" rtlCol="0" anchor="t"/>
+          <a:lstStyle/>
+          <a:p>
+            <a:pPr algn="l" indent="0" marL="0">
+              <a:lnSpc>
+                <a:spcPts val="1219"/>
+              </a:lnSpc>
+              <a:buNone/>
+            </a:pPr>
+            <a:r>
+              <a:rPr lang="en-US" sz="938" dirty="0">
+                <a:solidFill>
+                  <a:srgbClr val="FF4D63"/>
+                </a:solidFill>
+                <a:latin typeface="Consolas" pitchFamily="34" charset="0"/>
+                <a:ea typeface="Consolas" pitchFamily="34" charset="-122"/>
+                <a:cs typeface="Consolas" pitchFamily="34" charset="-120"/>
+              </a:rPr>
               <a:t>20 ~ 25℃</a:t>
             </a:r>
             <a:endParaRPr lang="en-US" sz="938" dirty="0"/>
@@ -5536,14 +5640,14 @@
       </p:sp>
       <p:sp>
         <p:nvSpPr>
-          <p:cNvPr id="26" name="Shape 24"/>
-          <p:cNvSpPr/>
-          <p:nvPr/>
-        </p:nvSpPr>
-        <p:spPr>
-          <a:xfrm>
-            <a:off x="1828800" y="4267200"/>
-            <a:ext cx="295275" cy="190500"/>
+          <p:cNvPr id="29" name="Shape 27"/>
+          <p:cNvSpPr/>
+          <p:nvPr/>
+        </p:nvSpPr>
+        <p:spPr>
+          <a:xfrm>
+            <a:off x="1828800" y="4457700"/>
+            <a:ext cx="295275" cy="171450"/>
           </a:xfrm>
           <a:prstGeom prst="rect">
             <a:avLst/>
@@ -5556,13 +5660,13 @@
       </p:sp>
       <p:sp>
         <p:nvSpPr>
-          <p:cNvPr id="27" name="Text 25"/>
-          <p:cNvSpPr txBox="1"/>
-          <p:nvPr/>
-        </p:nvSpPr>
-        <p:spPr>
-          <a:xfrm>
-            <a:off x="2200275" y="4295775"/>
+          <p:cNvPr id="30" name="Text 28"/>
+          <p:cNvSpPr txBox="1"/>
+          <p:nvPr/>
+        </p:nvSpPr>
+        <p:spPr>
+          <a:xfrm>
+            <a:off x="2200275" y="4476750"/>
             <a:ext cx="571500" cy="148590"/>
           </a:xfrm>
           <a:prstGeom prst="rect">
@@ -5598,13 +5702,13 @@
       </p:sp>
       <p:sp>
         <p:nvSpPr>
-          <p:cNvPr id="28" name="Text 26"/>
-          <p:cNvSpPr txBox="1"/>
-          <p:nvPr/>
-        </p:nvSpPr>
-        <p:spPr>
-          <a:xfrm>
-            <a:off x="838200" y="4629150"/>
+          <p:cNvPr id="31" name="Text 29"/>
+          <p:cNvSpPr txBox="1"/>
+          <p:nvPr/>
+        </p:nvSpPr>
+        <p:spPr>
+          <a:xfrm>
+            <a:off x="838200" y="4781550"/>
             <a:ext cx="876300" cy="154781"/>
           </a:xfrm>
           <a:prstGeom prst="rect">
@@ -5640,14 +5744,14 @@
       </p:sp>
       <p:sp>
         <p:nvSpPr>
-          <p:cNvPr id="29" name="Shape 27"/>
-          <p:cNvSpPr/>
-          <p:nvPr/>
-        </p:nvSpPr>
-        <p:spPr>
-          <a:xfrm>
-            <a:off x="1828800" y="4610100"/>
-            <a:ext cx="1771650" cy="190500"/>
+          <p:cNvPr id="32" name="Shape 30"/>
+          <p:cNvSpPr/>
+          <p:nvPr/>
+        </p:nvSpPr>
+        <p:spPr>
+          <a:xfrm>
+            <a:off x="1828800" y="4762500"/>
+            <a:ext cx="1771650" cy="171450"/>
           </a:xfrm>
           <a:prstGeom prst="rect">
             <a:avLst/>
@@ -5660,13 +5764,13 @@
       </p:sp>
       <p:sp>
         <p:nvSpPr>
-          <p:cNvPr id="30" name="Text 28"/>
-          <p:cNvSpPr txBox="1"/>
-          <p:nvPr/>
-        </p:nvSpPr>
-        <p:spPr>
-          <a:xfrm>
-            <a:off x="3676650" y="4638675"/>
+          <p:cNvPr id="33" name="Text 31"/>
+          <p:cNvSpPr txBox="1"/>
+          <p:nvPr/>
+        </p:nvSpPr>
+        <p:spPr>
+          <a:xfrm>
+            <a:off x="3676650" y="4781550"/>
             <a:ext cx="571500" cy="148590"/>
           </a:xfrm>
           <a:prstGeom prst="rect">
@@ -5702,13 +5806,13 @@
       </p:sp>
       <p:sp>
         <p:nvSpPr>
-          <p:cNvPr id="31" name="Text 29"/>
-          <p:cNvSpPr txBox="1"/>
-          <p:nvPr/>
-        </p:nvSpPr>
-        <p:spPr>
-          <a:xfrm>
-            <a:off x="838200" y="4972050"/>
+          <p:cNvPr id="34" name="Text 32"/>
+          <p:cNvSpPr txBox="1"/>
+          <p:nvPr/>
+        </p:nvSpPr>
+        <p:spPr>
+          <a:xfrm>
+            <a:off x="838200" y="5086350"/>
             <a:ext cx="876300" cy="154781"/>
           </a:xfrm>
           <a:prstGeom prst="rect">
@@ -5744,14 +5848,14 @@
       </p:sp>
       <p:sp>
         <p:nvSpPr>
-          <p:cNvPr id="32" name="Shape 30"/>
-          <p:cNvSpPr/>
-          <p:nvPr/>
-        </p:nvSpPr>
-        <p:spPr>
-          <a:xfrm>
-            <a:off x="1828800" y="4953000"/>
-            <a:ext cx="3248025" cy="190500"/>
+          <p:cNvPr id="35" name="Shape 33"/>
+          <p:cNvSpPr/>
+          <p:nvPr/>
+        </p:nvSpPr>
+        <p:spPr>
+          <a:xfrm>
+            <a:off x="1828800" y="5067300"/>
+            <a:ext cx="3248025" cy="171450"/>
           </a:xfrm>
           <a:prstGeom prst="rect">
             <a:avLst/>
@@ -5764,13 +5868,13 @@
       </p:sp>
       <p:sp>
         <p:nvSpPr>
-          <p:cNvPr id="33" name="Text 31"/>
-          <p:cNvSpPr txBox="1"/>
-          <p:nvPr/>
-        </p:nvSpPr>
-        <p:spPr>
-          <a:xfrm>
-            <a:off x="5153025" y="4981575"/>
+          <p:cNvPr id="36" name="Text 34"/>
+          <p:cNvSpPr txBox="1"/>
+          <p:nvPr/>
+        </p:nvSpPr>
+        <p:spPr>
+          <a:xfrm>
+            <a:off x="5153025" y="5086350"/>
             <a:ext cx="571500" cy="148590"/>
           </a:xfrm>
           <a:prstGeom prst="rect">
@@ -5806,7 +5910,7 @@
       </p:sp>
       <p:sp>
         <p:nvSpPr>
-          <p:cNvPr id="34" name="Text 32"/>
+          <p:cNvPr id="37" name="Text 35"/>
           <p:cNvSpPr txBox="1"/>
           <p:nvPr/>
         </p:nvSpPr>
@@ -5840,7 +5944,7 @@
                 <a:ea typeface="Malgun Gothic" pitchFamily="34" charset="-122"/>
                 <a:cs typeface="Malgun Gothic" pitchFamily="34" charset="-120"/>
               </a:rPr>
-              <a:t>20~25℃ 구간은 1건</a:t>
+              <a:t>20 ~ 25℃ 구간은 1건</a:t>
             </a:r>
             <a:pPr algn="l" indent="0" marL="0">
               <a:lnSpc>
@@ -5865,7 +5969,7 @@
       </p:sp>
       <p:sp>
         <p:nvSpPr>
-          <p:cNvPr id="35" name="Shape 33"/>
+          <p:cNvPr id="38" name="Shape 36"/>
           <p:cNvSpPr/>
           <p:nvPr/>
         </p:nvSpPr>
@@ -5885,7 +5989,7 @@
       </p:sp>
       <p:sp>
         <p:nvSpPr>
-          <p:cNvPr id="36" name="Text 34"/>
+          <p:cNvPr id="39" name="Text 37"/>
           <p:cNvSpPr txBox="1"/>
           <p:nvPr/>
         </p:nvSpPr>
@@ -5927,7 +6031,7 @@
       </p:sp>
       <p:sp>
         <p:nvSpPr>
-          <p:cNvPr id="37" name="Shape 35"/>
+          <p:cNvPr id="40" name="Shape 38"/>
           <p:cNvSpPr/>
           <p:nvPr/>
         </p:nvSpPr>
@@ -5952,7 +6056,7 @@
       </p:sp>
       <p:sp>
         <p:nvSpPr>
-          <p:cNvPr id="38" name="Text 36"/>
+          <p:cNvPr id="41" name="Text 39"/>
           <p:cNvSpPr txBox="1"/>
           <p:nvPr/>
         </p:nvSpPr>
@@ -5994,7 +6098,7 @@
       </p:sp>
       <p:sp>
         <p:nvSpPr>
-          <p:cNvPr id="39" name="Text 37"/>
+          <p:cNvPr id="42" name="Text 40"/>
           <p:cNvSpPr txBox="1"/>
           <p:nvPr/>
         </p:nvSpPr>
@@ -6036,7 +6140,7 @@
       </p:sp>
       <p:sp>
         <p:nvSpPr>
-          <p:cNvPr id="40" name="Text 38"/>
+          <p:cNvPr id="43" name="Text 41"/>
           <p:cNvSpPr txBox="1"/>
           <p:nvPr/>
         </p:nvSpPr>
@@ -6078,7 +6182,7 @@
       </p:sp>
       <p:sp>
         <p:nvSpPr>
-          <p:cNvPr id="41" name="Shape 39"/>
+          <p:cNvPr id="44" name="Shape 42"/>
           <p:cNvSpPr/>
           <p:nvPr/>
         </p:nvSpPr>
@@ -6103,7 +6207,7 @@
       </p:sp>
       <p:sp>
         <p:nvSpPr>
-          <p:cNvPr id="42" name="Text 40"/>
+          <p:cNvPr id="45" name="Text 43"/>
           <p:cNvSpPr txBox="1"/>
           <p:nvPr/>
         </p:nvSpPr>
@@ -6145,7 +6249,7 @@
       </p:sp>
       <p:sp>
         <p:nvSpPr>
-          <p:cNvPr id="43" name="Text 41"/>
+          <p:cNvPr id="46" name="Text 44"/>
           <p:cNvSpPr txBox="1"/>
           <p:nvPr/>
         </p:nvSpPr>
@@ -6187,7 +6291,7 @@
       </p:sp>
       <p:sp>
         <p:nvSpPr>
-          <p:cNvPr id="44" name="Text 42"/>
+          <p:cNvPr id="47" name="Text 45"/>
           <p:cNvSpPr txBox="1"/>
           <p:nvPr/>
         </p:nvSpPr>
@@ -6229,7 +6333,7 @@
       </p:sp>
       <p:sp>
         <p:nvSpPr>
-          <p:cNvPr id="45" name="Shape 43"/>
+          <p:cNvPr id="48" name="Shape 46"/>
           <p:cNvSpPr/>
           <p:nvPr/>
         </p:nvSpPr>
@@ -6254,7 +6358,7 @@
       </p:sp>
       <p:sp>
         <p:nvSpPr>
-          <p:cNvPr id="46" name="Text 44"/>
+          <p:cNvPr id="49" name="Text 47"/>
           <p:cNvSpPr txBox="1"/>
           <p:nvPr/>
         </p:nvSpPr>
@@ -6296,7 +6400,7 @@
       </p:sp>
       <p:sp>
         <p:nvSpPr>
-          <p:cNvPr id="47" name="Text 45"/>
+          <p:cNvPr id="50" name="Text 48"/>
           <p:cNvSpPr txBox="1"/>
           <p:nvPr/>
         </p:nvSpPr>
@@ -6338,7 +6442,7 @@
       </p:sp>
       <p:sp>
         <p:nvSpPr>
-          <p:cNvPr id="48" name="Text 46"/>
+          <p:cNvPr id="51" name="Text 49"/>
           <p:cNvSpPr txBox="1"/>
           <p:nvPr/>
         </p:nvSpPr>
@@ -6380,7 +6484,7 @@
       </p:sp>
       <p:sp>
         <p:nvSpPr>
-          <p:cNvPr id="49" name="Shape 47"/>
+          <p:cNvPr id="52" name="Shape 50"/>
           <p:cNvSpPr/>
           <p:nvPr/>
         </p:nvSpPr>
@@ -6403,7 +6507,7 @@
       </p:sp>
       <p:sp>
         <p:nvSpPr>
-          <p:cNvPr id="50" name="Text 48"/>
+          <p:cNvPr id="53" name="Text 51"/>
           <p:cNvSpPr txBox="1"/>
           <p:nvPr/>
         </p:nvSpPr>
@@ -6445,7 +6549,7 @@
       </p:sp>
       <p:sp>
         <p:nvSpPr>
-          <p:cNvPr id="51" name="Text 49"/>
+          <p:cNvPr id="54" name="Text 52"/>
           <p:cNvSpPr txBox="1"/>
           <p:nvPr/>
         </p:nvSpPr>
@@ -7117,7 +7221,7 @@
         <p:spPr>
           <a:xfrm>
             <a:off x="838200" y="3371850"/>
-            <a:ext cx="5337663" cy="142875"/>
+            <a:ext cx="5334000" cy="142875"/>
           </a:xfrm>
           <a:prstGeom prst="rect">
             <a:avLst/>
@@ -7179,7 +7283,7 @@
         <p:spPr>
           <a:xfrm>
             <a:off x="838200" y="3619500"/>
-            <a:ext cx="1905000" cy="142399"/>
+            <a:ext cx="1866900" cy="142399"/>
           </a:xfrm>
           <a:prstGeom prst="rect">
             <a:avLst/>
@@ -7221,7 +7325,7 @@
         <p:spPr>
           <a:xfrm>
             <a:off x="838200" y="3790950"/>
-            <a:ext cx="1827032" cy="142875"/>
+            <a:ext cx="1825778" cy="142875"/>
           </a:xfrm>
           <a:prstGeom prst="rect">
             <a:avLst/>
@@ -7240,7 +7344,7 @@
         </p:nvSpPr>
         <p:spPr>
           <a:xfrm>
-            <a:off x="2781300" y="3743325"/>
+            <a:off x="2778278" y="3743325"/>
             <a:ext cx="857250" cy="285750"/>
           </a:xfrm>
           <a:prstGeom prst="rect">
@@ -7347,7 +7451,7 @@
         </p:nvSpPr>
         <p:spPr>
           <a:xfrm>
-            <a:off x="3543300" y="4400550"/>
+            <a:off x="3361336" y="4400550"/>
             <a:ext cx="0" cy="1333500"/>
           </a:xfrm>
           <a:prstGeom prst="line">
@@ -7370,7 +7474,7 @@
         </p:nvSpPr>
         <p:spPr>
           <a:xfrm>
-            <a:off x="4610100" y="4400550"/>
+            <a:off x="4246172" y="4400550"/>
             <a:ext cx="0" cy="1333500"/>
           </a:xfrm>
           <a:prstGeom prst="line">
@@ -7393,7 +7497,7 @@
         </p:nvSpPr>
         <p:spPr>
           <a:xfrm>
-            <a:off x="5676900" y="4400550"/>
+            <a:off x="5131008" y="4400550"/>
             <a:ext cx="0" cy="1333500"/>
           </a:xfrm>
           <a:prstGeom prst="line">
@@ -7459,7 +7563,7 @@
         <p:spPr>
           <a:xfrm>
             <a:off x="2476500" y="4438650"/>
-            <a:ext cx="256032" cy="123825"/>
+            <a:ext cx="212361" cy="123825"/>
           </a:xfrm>
           <a:prstGeom prst="rect">
             <a:avLst/>
@@ -7478,7 +7582,7 @@
         </p:nvSpPr>
         <p:spPr>
           <a:xfrm>
-            <a:off x="2808732" y="4429125"/>
+            <a:off x="2765061" y="4429125"/>
             <a:ext cx="571500" cy="167164"/>
           </a:xfrm>
           <a:prstGeom prst="rect">
@@ -7563,7 +7667,7 @@
         <p:spPr>
           <a:xfrm>
             <a:off x="2476500" y="4629150"/>
-            <a:ext cx="597408" cy="123825"/>
+            <a:ext cx="495508" cy="123825"/>
           </a:xfrm>
           <a:prstGeom prst="rect">
             <a:avLst/>
@@ -7582,7 +7686,7 @@
         </p:nvSpPr>
         <p:spPr>
           <a:xfrm>
-            <a:off x="3150108" y="4619625"/>
+            <a:off x="3048208" y="4619625"/>
             <a:ext cx="571500" cy="154781"/>
           </a:xfrm>
           <a:prstGeom prst="rect">
@@ -7667,7 +7771,7 @@
         <p:spPr>
           <a:xfrm>
             <a:off x="2476500" y="4819650"/>
-            <a:ext cx="704088" cy="123825"/>
+            <a:ext cx="583992" cy="123825"/>
           </a:xfrm>
           <a:prstGeom prst="rect">
             <a:avLst/>
@@ -7686,7 +7790,7 @@
         </p:nvSpPr>
         <p:spPr>
           <a:xfrm>
-            <a:off x="3256788" y="4810125"/>
+            <a:off x="3136692" y="4810125"/>
             <a:ext cx="571500" cy="154781"/>
           </a:xfrm>
           <a:prstGeom prst="rect">
@@ -7771,7 +7875,7 @@
         <p:spPr>
           <a:xfrm>
             <a:off x="2476500" y="5010150"/>
-            <a:ext cx="1045464" cy="123825"/>
+            <a:ext cx="867139" cy="123825"/>
           </a:xfrm>
           <a:prstGeom prst="rect">
             <a:avLst/>
@@ -7790,7 +7894,7 @@
         </p:nvSpPr>
         <p:spPr>
           <a:xfrm>
-            <a:off x="3598164" y="5000625"/>
+            <a:off x="3419839" y="5000625"/>
             <a:ext cx="571500" cy="154781"/>
           </a:xfrm>
           <a:prstGeom prst="rect">
@@ -7875,7 +7979,7 @@
         <p:spPr>
           <a:xfrm>
             <a:off x="2476500" y="5200650"/>
-            <a:ext cx="2112264" cy="123825"/>
+            <a:ext cx="1751975" cy="123825"/>
           </a:xfrm>
           <a:prstGeom prst="rect">
             <a:avLst/>
@@ -7894,7 +7998,7 @@
         </p:nvSpPr>
         <p:spPr>
           <a:xfrm>
-            <a:off x="4664964" y="5191125"/>
+            <a:off x="4304675" y="5191125"/>
             <a:ext cx="571500" cy="154781"/>
           </a:xfrm>
           <a:prstGeom prst="rect">
@@ -7979,7 +8083,7 @@
         <p:spPr>
           <a:xfrm>
             <a:off x="2476500" y="5391150"/>
-            <a:ext cx="2645664" cy="123825"/>
+            <a:ext cx="2194393" cy="123825"/>
           </a:xfrm>
           <a:prstGeom prst="rect">
             <a:avLst/>
@@ -7998,7 +8102,7 @@
         </p:nvSpPr>
         <p:spPr>
           <a:xfrm>
-            <a:off x="5198364" y="5381625"/>
+            <a:off x="4747093" y="5381625"/>
             <a:ext cx="571500" cy="154781"/>
           </a:xfrm>
           <a:prstGeom prst="rect">
@@ -8083,7 +8187,7 @@
         <p:spPr>
           <a:xfrm>
             <a:off x="2476500" y="5581650"/>
-            <a:ext cx="3904488" cy="123825"/>
+            <a:ext cx="3238500" cy="123825"/>
           </a:xfrm>
           <a:prstGeom prst="rect">
             <a:avLst/>
@@ -8102,7 +8206,7 @@
         </p:nvSpPr>
         <p:spPr>
           <a:xfrm>
-            <a:off x="6457188" y="5572125"/>
+            <a:off x="5791200" y="5572125"/>
             <a:ext cx="571500" cy="154781"/>
           </a:xfrm>
           <a:prstGeom prst="rect">
@@ -8186,7 +8290,7 @@
         </p:nvSpPr>
         <p:spPr>
           <a:xfrm>
-            <a:off x="3314700" y="5791200"/>
+            <a:off x="3132736" y="5791200"/>
             <a:ext cx="457200" cy="117634"/>
           </a:xfrm>
           <a:prstGeom prst="rect">
@@ -8228,7 +8332,7 @@
         </p:nvSpPr>
         <p:spPr>
           <a:xfrm>
-            <a:off x="4381500" y="5791200"/>
+            <a:off x="4017572" y="5791200"/>
             <a:ext cx="457200" cy="117634"/>
           </a:xfrm>
           <a:prstGeom prst="rect">
@@ -8270,7 +8374,7 @@
         </p:nvSpPr>
         <p:spPr>
           <a:xfrm>
-            <a:off x="5448300" y="5791200"/>
+            <a:off x="4902408" y="5791200"/>
             <a:ext cx="457200" cy="117634"/>
           </a:xfrm>
           <a:prstGeom prst="rect">
@@ -8636,7 +8740,7 @@
         </p:nvSpPr>
         <p:spPr>
           <a:xfrm>
-            <a:off x="8750618" y="4629150"/>
+            <a:off x="8750300" y="4629150"/>
             <a:ext cx="457200" cy="117634"/>
           </a:xfrm>
           <a:prstGeom prst="rect">
@@ -8678,7 +8782,7 @@
         </p:nvSpPr>
         <p:spPr>
           <a:xfrm>
-            <a:off x="9881235" y="4629150"/>
+            <a:off x="9880600" y="4629150"/>
             <a:ext cx="457200" cy="117634"/>
           </a:xfrm>
           <a:prstGeom prst="rect">
@@ -8720,7 +8824,7 @@
         </p:nvSpPr>
         <p:spPr>
           <a:xfrm>
-            <a:off x="11011852" y="4629150"/>
+            <a:off x="11010900" y="4629150"/>
             <a:ext cx="457200" cy="117634"/>
           </a:xfrm>
           <a:prstGeom prst="rect">
@@ -8763,7 +8867,7 @@
         <p:spPr>
           <a:xfrm>
             <a:off x="7848600" y="3372803"/>
-            <a:ext cx="1130618" cy="238125"/>
+            <a:ext cx="1130300" cy="238125"/>
           </a:xfrm>
           <a:prstGeom prst="line">
             <a:avLst/>
@@ -8785,8 +8889,8 @@
         </p:nvSpPr>
         <p:spPr>
           <a:xfrm>
-            <a:off x="8979218" y="3610928"/>
-            <a:ext cx="1130618" cy="157163"/>
+            <a:off x="8978900" y="3610928"/>
+            <a:ext cx="1130300" cy="157163"/>
           </a:xfrm>
           <a:prstGeom prst="line">
             <a:avLst/>
@@ -8808,8 +8912,8 @@
         </p:nvSpPr>
         <p:spPr>
           <a:xfrm>
-            <a:off x="10109835" y="3768090"/>
-            <a:ext cx="1130617" cy="563880"/>
+            <a:off x="10109200" y="3768090"/>
+            <a:ext cx="1130300" cy="563880"/>
           </a:xfrm>
           <a:prstGeom prst="line">
             <a:avLst/>
@@ -8832,7 +8936,7 @@
         <p:spPr>
           <a:xfrm>
             <a:off x="7848600" y="3380423"/>
-            <a:ext cx="1130618" cy="228600"/>
+            <a:ext cx="1130300" cy="228600"/>
           </a:xfrm>
           <a:prstGeom prst="line">
             <a:avLst/>
@@ -8854,8 +8958,8 @@
         </p:nvSpPr>
         <p:spPr>
           <a:xfrm>
-            <a:off x="8979218" y="3609023"/>
-            <a:ext cx="1130618" cy="171450"/>
+            <a:off x="8978900" y="3609023"/>
+            <a:ext cx="1130300" cy="171450"/>
           </a:xfrm>
           <a:prstGeom prst="line">
             <a:avLst/>
@@ -8877,8 +8981,8 @@
         </p:nvSpPr>
         <p:spPr>
           <a:xfrm>
-            <a:off x="10109835" y="3780472"/>
-            <a:ext cx="1130617" cy="550545"/>
+            <a:off x="10109200" y="3780472"/>
+            <a:ext cx="1130300" cy="550545"/>
           </a:xfrm>
           <a:prstGeom prst="line">
             <a:avLst/>
@@ -8901,7 +9005,7 @@
         <p:spPr>
           <a:xfrm>
             <a:off x="7848600" y="3378518"/>
-            <a:ext cx="1130618" cy="253365"/>
+            <a:ext cx="1130300" cy="253365"/>
           </a:xfrm>
           <a:prstGeom prst="line">
             <a:avLst/>
@@ -8923,8 +9027,8 @@
         </p:nvSpPr>
         <p:spPr>
           <a:xfrm>
-            <a:off x="8979218" y="3631883"/>
-            <a:ext cx="1130618" cy="168592"/>
+            <a:off x="8978900" y="3631883"/>
+            <a:ext cx="1130300" cy="168592"/>
           </a:xfrm>
           <a:prstGeom prst="line">
             <a:avLst/>
@@ -8946,8 +9050,8 @@
         </p:nvSpPr>
         <p:spPr>
           <a:xfrm>
-            <a:off x="10109835" y="3800475"/>
-            <a:ext cx="1130617" cy="526733"/>
+            <a:off x="10109200" y="3800475"/>
+            <a:ext cx="1130300" cy="526733"/>
           </a:xfrm>
           <a:prstGeom prst="line">
             <a:avLst/>
@@ -8970,7 +9074,7 @@
         <p:spPr>
           <a:xfrm>
             <a:off x="7848600" y="3370897"/>
-            <a:ext cx="1130618" cy="240030"/>
+            <a:ext cx="1130300" cy="240030"/>
           </a:xfrm>
           <a:prstGeom prst="line">
             <a:avLst/>
@@ -8992,8 +9096,8 @@
         </p:nvSpPr>
         <p:spPr>
           <a:xfrm>
-            <a:off x="8979218" y="3610928"/>
-            <a:ext cx="1130618" cy="153352"/>
+            <a:off x="8978900" y="3610928"/>
+            <a:ext cx="1130300" cy="153352"/>
           </a:xfrm>
           <a:prstGeom prst="line">
             <a:avLst/>
@@ -9015,8 +9119,8 @@
         </p:nvSpPr>
         <p:spPr>
           <a:xfrm>
-            <a:off x="10109835" y="3764280"/>
-            <a:ext cx="1130617" cy="565785"/>
+            <a:off x="10109200" y="3764280"/>
+            <a:ext cx="1130300" cy="565785"/>
           </a:xfrm>
           <a:prstGeom prst="line">
             <a:avLst/>
@@ -9039,7 +9143,7 @@
         <p:spPr>
           <a:xfrm>
             <a:off x="7848600" y="3381375"/>
-            <a:ext cx="1130618" cy="221933"/>
+            <a:ext cx="1130300" cy="221933"/>
           </a:xfrm>
           <a:prstGeom prst="line">
             <a:avLst/>
@@ -9061,8 +9165,8 @@
         </p:nvSpPr>
         <p:spPr>
           <a:xfrm>
-            <a:off x="8979218" y="3603308"/>
-            <a:ext cx="1130618" cy="161925"/>
+            <a:off x="8978900" y="3603308"/>
+            <a:ext cx="1130300" cy="161925"/>
           </a:xfrm>
           <a:prstGeom prst="line">
             <a:avLst/>
@@ -9084,8 +9188,8 @@
         </p:nvSpPr>
         <p:spPr>
           <a:xfrm>
-            <a:off x="10109835" y="3765233"/>
-            <a:ext cx="1130617" cy="557213"/>
+            <a:off x="10109200" y="3765233"/>
+            <a:ext cx="1130300" cy="557213"/>
           </a:xfrm>
           <a:prstGeom prst="line">
             <a:avLst/>
@@ -9107,7 +9211,7 @@
         </p:nvSpPr>
         <p:spPr>
           <a:xfrm>
-            <a:off x="10109835" y="3726180"/>
+            <a:off x="10109200" y="3726180"/>
             <a:ext cx="0" cy="112395"/>
           </a:xfrm>
           <a:prstGeom prst="line">
@@ -9130,7 +9234,7 @@
         </p:nvSpPr>
         <p:spPr>
           <a:xfrm>
-            <a:off x="10052685" y="3726180"/>
+            <a:off x="10052050" y="3726180"/>
             <a:ext cx="114300" cy="0"/>
           </a:xfrm>
           <a:prstGeom prst="line">
@@ -9153,7 +9257,7 @@
         </p:nvSpPr>
         <p:spPr>
           <a:xfrm>
-            <a:off x="10052685" y="3838575"/>
+            <a:off x="10052050" y="3838575"/>
             <a:ext cx="114300" cy="0"/>
           </a:xfrm>
           <a:prstGeom prst="line">
@@ -9176,7 +9280,7 @@
         </p:nvSpPr>
         <p:spPr>
           <a:xfrm>
-            <a:off x="10205085" y="3705225"/>
+            <a:off x="10204450" y="3706178"/>
             <a:ext cx="1238250" cy="130016"/>
           </a:xfrm>
           <a:prstGeom prst="rect">
@@ -9218,8 +9322,8 @@
         </p:nvSpPr>
         <p:spPr>
           <a:xfrm>
-            <a:off x="10382250" y="4438650"/>
-            <a:ext cx="933450" cy="130016"/>
+            <a:off x="10096500" y="4438650"/>
+            <a:ext cx="1219200" cy="130016"/>
           </a:xfrm>
           <a:prstGeom prst="rect">
             <a:avLst/>
@@ -9246,7 +9350,7 @@
                 <a:ea typeface="Malgun Gothic" pitchFamily="34" charset="-122"/>
                 <a:cs typeface="Malgun Gothic" pitchFamily="34" charset="-120"/>
               </a:rPr>
-              <a:t>양 끝은 0.10</a:t>
+              <a:t>가장 좁은 곳 0.10</a:t>
             </a:r>
             <a:endParaRPr lang="en-US" sz="788" dirty="0"/>
           </a:p>
@@ -9347,7 +9451,7 @@
                 <a:ea typeface="Malgun Gothic" pitchFamily="34" charset="-122"/>
                 <a:cs typeface="Malgun Gothic" pitchFamily="34" charset="-120"/>
               </a:rPr>
-              <a:t>0℃ 와 30℃ 는 어느 방식이나 거의 같고, 10~20℃ 에서 벌어집니다. 눈으로는 고를 수 없습니다.</a:t>
+              <a:t>0℃ 와 30℃ 는 어느 방식이나 거의 같고, 20℃ 부근에서 벌어집니다. 눈으로는 고를 수 없습니다.</a:t>
             </a:r>
             <a:endParaRPr lang="en-US" sz="1125" dirty="0"/>
           </a:p>
@@ -11032,7 +11136,7 @@
             <a:avLst/>
           </a:prstGeom>
           <a:solidFill>
-            <a:srgbClr val="EFB13C"/>
+            <a:srgbClr val="FF4D63"/>
           </a:solidFill>
           <a:ln/>
         </p:spPr>
@@ -11073,6 +11177,172 @@
                 <a:ea typeface="Consolas" pitchFamily="34" charset="-122"/>
                 <a:cs typeface="Consolas" pitchFamily="34" charset="-120"/>
               </a:rPr>
+              <a:t>−14 ~ 0℃</a:t>
+            </a:r>
+            <a:endParaRPr lang="en-US" sz="938" dirty="0"/>
+          </a:p>
+        </p:txBody>
+      </p:sp>
+      <p:sp>
+        <p:nvSpPr>
+          <p:cNvPr id="48" name="Shape 46"/>
+          <p:cNvSpPr/>
+          <p:nvPr/>
+        </p:nvSpPr>
+        <p:spPr>
+          <a:xfrm>
+            <a:off x="8001000" y="3276600"/>
+            <a:ext cx="228600" cy="95250"/>
+          </a:xfrm>
+          <a:prstGeom prst="rect">
+            <a:avLst/>
+          </a:prstGeom>
+          <a:solidFill>
+            <a:srgbClr val="7E2333"/>
+          </a:solidFill>
+          <a:ln/>
+        </p:spPr>
+      </p:sp>
+      <p:sp>
+        <p:nvSpPr>
+          <p:cNvPr id="49" name="Text 47"/>
+          <p:cNvSpPr txBox="1"/>
+          <p:nvPr/>
+        </p:nvSpPr>
+        <p:spPr>
+          <a:xfrm>
+            <a:off x="9429750" y="3248025"/>
+            <a:ext cx="476250" cy="154781"/>
+          </a:xfrm>
+          <a:prstGeom prst="rect">
+            <a:avLst/>
+          </a:prstGeom>
+          <a:noFill/>
+          <a:ln/>
+        </p:spPr>
+        <p:txBody>
+          <a:bodyPr wrap="square" lIns="0" tIns="0" rIns="0" bIns="0" rtlCol="0" anchor="t"/>
+          <a:lstStyle/>
+          <a:p>
+            <a:pPr algn="l" indent="0" marL="0">
+              <a:lnSpc>
+                <a:spcPts val="1219"/>
+              </a:lnSpc>
+              <a:buNone/>
+            </a:pPr>
+            <a:r>
+              <a:rPr lang="en-US" sz="938" dirty="0">
+                <a:solidFill>
+                  <a:srgbClr val="A9A79F"/>
+                </a:solidFill>
+                <a:latin typeface="Consolas" pitchFamily="34" charset="0"/>
+                <a:ea typeface="Consolas" pitchFamily="34" charset="-122"/>
+                <a:cs typeface="Consolas" pitchFamily="34" charset="-120"/>
+              </a:rPr>
+              <a:t>2건</a:t>
+            </a:r>
+            <a:endParaRPr lang="en-US" sz="938" dirty="0"/>
+          </a:p>
+        </p:txBody>
+      </p:sp>
+      <p:sp>
+        <p:nvSpPr>
+          <p:cNvPr id="50" name="Text 48"/>
+          <p:cNvSpPr txBox="1"/>
+          <p:nvPr/>
+        </p:nvSpPr>
+        <p:spPr>
+          <a:xfrm>
+            <a:off x="10668000" y="3248025"/>
+            <a:ext cx="685800" cy="154781"/>
+          </a:xfrm>
+          <a:prstGeom prst="rect">
+            <a:avLst/>
+          </a:prstGeom>
+          <a:noFill/>
+          <a:ln/>
+        </p:spPr>
+        <p:txBody>
+          <a:bodyPr wrap="square" lIns="0" tIns="0" rIns="0" bIns="0" rtlCol="0" anchor="t"/>
+          <a:lstStyle/>
+          <a:p>
+            <a:pPr algn="r" indent="0" marL="0">
+              <a:lnSpc>
+                <a:spcPts val="1219"/>
+              </a:lnSpc>
+              <a:buNone/>
+            </a:pPr>
+            <a:r>
+              <a:rPr lang="en-US" sz="938" b="1" dirty="0">
+                <a:solidFill>
+                  <a:srgbClr val="FF4D63"/>
+                </a:solidFill>
+                <a:latin typeface="Malgun Gothic" pitchFamily="34" charset="0"/>
+                <a:ea typeface="Malgun Gothic" pitchFamily="34" charset="-122"/>
+                <a:cs typeface="Malgun Gothic" pitchFamily="34" charset="-120"/>
+              </a:rPr>
+              <a:t>부족</a:t>
+            </a:r>
+            <a:endParaRPr lang="en-US" sz="938" dirty="0"/>
+          </a:p>
+        </p:txBody>
+      </p:sp>
+      <p:sp>
+        <p:nvSpPr>
+          <p:cNvPr id="51" name="Shape 49"/>
+          <p:cNvSpPr/>
+          <p:nvPr/>
+        </p:nvSpPr>
+        <p:spPr>
+          <a:xfrm>
+            <a:off x="6743700" y="3581400"/>
+            <a:ext cx="95250" cy="95250"/>
+          </a:xfrm>
+          <a:prstGeom prst="rect">
+            <a:avLst/>
+          </a:prstGeom>
+          <a:solidFill>
+            <a:srgbClr val="EFB13C"/>
+          </a:solidFill>
+          <a:ln/>
+        </p:spPr>
+      </p:sp>
+      <p:sp>
+        <p:nvSpPr>
+          <p:cNvPr id="52" name="Text 50"/>
+          <p:cNvSpPr txBox="1"/>
+          <p:nvPr/>
+        </p:nvSpPr>
+        <p:spPr>
+          <a:xfrm>
+            <a:off x="6953250" y="3552825"/>
+            <a:ext cx="914400" cy="154781"/>
+          </a:xfrm>
+          <a:prstGeom prst="rect">
+            <a:avLst/>
+          </a:prstGeom>
+          <a:noFill/>
+          <a:ln/>
+        </p:spPr>
+        <p:txBody>
+          <a:bodyPr wrap="square" lIns="0" tIns="0" rIns="0" bIns="0" rtlCol="0" anchor="t"/>
+          <a:lstStyle/>
+          <a:p>
+            <a:pPr algn="l" indent="0" marL="0">
+              <a:lnSpc>
+                <a:spcPts val="1219"/>
+              </a:lnSpc>
+              <a:buNone/>
+            </a:pPr>
+            <a:r>
+              <a:rPr lang="en-US" sz="938" dirty="0">
+                <a:solidFill>
+                  <a:srgbClr val="CFCBC2"/>
+                </a:solidFill>
+                <a:latin typeface="Consolas" pitchFamily="34" charset="0"/>
+                <a:ea typeface="Consolas" pitchFamily="34" charset="-122"/>
+                <a:cs typeface="Consolas" pitchFamily="34" charset="-120"/>
+              </a:rPr>
               <a:t>0 ~ 10℃</a:t>
             </a:r>
             <a:endParaRPr lang="en-US" sz="938" dirty="0"/>
@@ -11081,13 +11351,13 @@
       </p:sp>
       <p:sp>
         <p:nvSpPr>
-          <p:cNvPr id="48" name="Shape 46"/>
-          <p:cNvSpPr/>
-          <p:nvPr/>
-        </p:nvSpPr>
-        <p:spPr>
-          <a:xfrm>
-            <a:off x="8001000" y="3276600"/>
+          <p:cNvPr id="53" name="Shape 51"/>
+          <p:cNvSpPr/>
+          <p:nvPr/>
+        </p:nvSpPr>
+        <p:spPr>
+          <a:xfrm>
+            <a:off x="8001000" y="3581400"/>
             <a:ext cx="800100" cy="95250"/>
           </a:xfrm>
           <a:prstGeom prst="rect">
@@ -11101,13 +11371,13 @@
       </p:sp>
       <p:sp>
         <p:nvSpPr>
-          <p:cNvPr id="49" name="Text 47"/>
-          <p:cNvSpPr txBox="1"/>
-          <p:nvPr/>
-        </p:nvSpPr>
-        <p:spPr>
-          <a:xfrm>
-            <a:off x="9429750" y="3248025"/>
+          <p:cNvPr id="54" name="Text 52"/>
+          <p:cNvSpPr txBox="1"/>
+          <p:nvPr/>
+        </p:nvSpPr>
+        <p:spPr>
+          <a:xfrm>
+            <a:off x="9429750" y="3552825"/>
             <a:ext cx="476250" cy="154781"/>
           </a:xfrm>
           <a:prstGeom prst="rect">
@@ -11143,13 +11413,13 @@
       </p:sp>
       <p:sp>
         <p:nvSpPr>
-          <p:cNvPr id="50" name="Text 48"/>
-          <p:cNvSpPr txBox="1"/>
-          <p:nvPr/>
-        </p:nvSpPr>
-        <p:spPr>
-          <a:xfrm>
-            <a:off x="10668000" y="3248025"/>
+          <p:cNvPr id="55" name="Text 53"/>
+          <p:cNvSpPr txBox="1"/>
+          <p:nvPr/>
+        </p:nvSpPr>
+        <p:spPr>
+          <a:xfrm>
+            <a:off x="10668000" y="3552825"/>
             <a:ext cx="685800" cy="154781"/>
           </a:xfrm>
           <a:prstGeom prst="rect">
@@ -11185,13 +11455,13 @@
       </p:sp>
       <p:sp>
         <p:nvSpPr>
-          <p:cNvPr id="51" name="Shape 49"/>
-          <p:cNvSpPr/>
-          <p:nvPr/>
-        </p:nvSpPr>
-        <p:spPr>
-          <a:xfrm>
-            <a:off x="6743700" y="3619500"/>
+          <p:cNvPr id="56" name="Shape 54"/>
+          <p:cNvSpPr/>
+          <p:nvPr/>
+        </p:nvSpPr>
+        <p:spPr>
+          <a:xfrm>
+            <a:off x="6743700" y="3886200"/>
             <a:ext cx="95250" cy="95250"/>
           </a:xfrm>
           <a:prstGeom prst="rect">
@@ -11205,13 +11475,13 @@
       </p:sp>
       <p:sp>
         <p:nvSpPr>
-          <p:cNvPr id="52" name="Text 50"/>
-          <p:cNvSpPr txBox="1"/>
-          <p:nvPr/>
-        </p:nvSpPr>
-        <p:spPr>
-          <a:xfrm>
-            <a:off x="6953250" y="3590925"/>
+          <p:cNvPr id="57" name="Text 55"/>
+          <p:cNvSpPr txBox="1"/>
+          <p:nvPr/>
+        </p:nvSpPr>
+        <p:spPr>
+          <a:xfrm>
+            <a:off x="6953250" y="3857625"/>
             <a:ext cx="914400" cy="154781"/>
           </a:xfrm>
           <a:prstGeom prst="rect">
@@ -11247,13 +11517,13 @@
       </p:sp>
       <p:sp>
         <p:nvSpPr>
-          <p:cNvPr id="53" name="Shape 51"/>
-          <p:cNvSpPr/>
-          <p:nvPr/>
-        </p:nvSpPr>
-        <p:spPr>
-          <a:xfrm>
-            <a:off x="8001000" y="3619500"/>
+          <p:cNvPr id="58" name="Shape 56"/>
+          <p:cNvSpPr/>
+          <p:nvPr/>
+        </p:nvSpPr>
+        <p:spPr>
+          <a:xfrm>
+            <a:off x="8001000" y="3886200"/>
             <a:ext cx="685800" cy="95250"/>
           </a:xfrm>
           <a:prstGeom prst="rect">
@@ -11267,13 +11537,13 @@
       </p:sp>
       <p:sp>
         <p:nvSpPr>
-          <p:cNvPr id="54" name="Text 52"/>
-          <p:cNvSpPr txBox="1"/>
-          <p:nvPr/>
-        </p:nvSpPr>
-        <p:spPr>
-          <a:xfrm>
-            <a:off x="9429750" y="3590925"/>
+          <p:cNvPr id="59" name="Text 57"/>
+          <p:cNvSpPr txBox="1"/>
+          <p:nvPr/>
+        </p:nvSpPr>
+        <p:spPr>
+          <a:xfrm>
+            <a:off x="9429750" y="3857625"/>
             <a:ext cx="476250" cy="154781"/>
           </a:xfrm>
           <a:prstGeom prst="rect">
@@ -11309,13 +11579,13 @@
       </p:sp>
       <p:sp>
         <p:nvSpPr>
-          <p:cNvPr id="55" name="Text 53"/>
-          <p:cNvSpPr txBox="1"/>
-          <p:nvPr/>
-        </p:nvSpPr>
-        <p:spPr>
-          <a:xfrm>
-            <a:off x="10668000" y="3590925"/>
+          <p:cNvPr id="60" name="Text 58"/>
+          <p:cNvSpPr txBox="1"/>
+          <p:nvPr/>
+        </p:nvSpPr>
+        <p:spPr>
+          <a:xfrm>
+            <a:off x="10668000" y="3857625"/>
             <a:ext cx="685800" cy="154781"/>
           </a:xfrm>
           <a:prstGeom prst="rect">
@@ -11351,13 +11621,13 @@
       </p:sp>
       <p:sp>
         <p:nvSpPr>
-          <p:cNvPr id="56" name="Shape 54"/>
-          <p:cNvSpPr/>
-          <p:nvPr/>
-        </p:nvSpPr>
-        <p:spPr>
-          <a:xfrm>
-            <a:off x="6743700" y="3962400"/>
+          <p:cNvPr id="61" name="Shape 59"/>
+          <p:cNvSpPr/>
+          <p:nvPr/>
+        </p:nvSpPr>
+        <p:spPr>
+          <a:xfrm>
+            <a:off x="6743700" y="4191000"/>
             <a:ext cx="95250" cy="95250"/>
           </a:xfrm>
           <a:prstGeom prst="rect">
@@ -11371,13 +11641,13 @@
       </p:sp>
       <p:sp>
         <p:nvSpPr>
-          <p:cNvPr id="57" name="Text 55"/>
-          <p:cNvSpPr txBox="1"/>
-          <p:nvPr/>
-        </p:nvSpPr>
-        <p:spPr>
-          <a:xfrm>
-            <a:off x="6953250" y="3933825"/>
+          <p:cNvPr id="62" name="Text 60"/>
+          <p:cNvSpPr txBox="1"/>
+          <p:nvPr/>
+        </p:nvSpPr>
+        <p:spPr>
+          <a:xfrm>
+            <a:off x="6953250" y="4162425"/>
             <a:ext cx="914400" cy="154781"/>
           </a:xfrm>
           <a:prstGeom prst="rect">
@@ -11413,13 +11683,13 @@
       </p:sp>
       <p:sp>
         <p:nvSpPr>
-          <p:cNvPr id="58" name="Shape 56"/>
-          <p:cNvSpPr/>
-          <p:nvPr/>
-        </p:nvSpPr>
-        <p:spPr>
-          <a:xfrm>
-            <a:off x="8001000" y="3962400"/>
+          <p:cNvPr id="63" name="Shape 61"/>
+          <p:cNvSpPr/>
+          <p:nvPr/>
+        </p:nvSpPr>
+        <p:spPr>
+          <a:xfrm>
+            <a:off x="8001000" y="4191000"/>
             <a:ext cx="342900" cy="95250"/>
           </a:xfrm>
           <a:prstGeom prst="rect">
@@ -11433,13 +11703,13 @@
       </p:sp>
       <p:sp>
         <p:nvSpPr>
-          <p:cNvPr id="59" name="Text 57"/>
-          <p:cNvSpPr txBox="1"/>
-          <p:nvPr/>
-        </p:nvSpPr>
-        <p:spPr>
-          <a:xfrm>
-            <a:off x="9429750" y="3933825"/>
+          <p:cNvPr id="64" name="Text 62"/>
+          <p:cNvSpPr txBox="1"/>
+          <p:nvPr/>
+        </p:nvSpPr>
+        <p:spPr>
+          <a:xfrm>
+            <a:off x="9429750" y="4162425"/>
             <a:ext cx="476250" cy="154781"/>
           </a:xfrm>
           <a:prstGeom prst="rect">
@@ -11475,13 +11745,13 @@
       </p:sp>
       <p:sp>
         <p:nvSpPr>
-          <p:cNvPr id="60" name="Text 58"/>
-          <p:cNvSpPr txBox="1"/>
-          <p:nvPr/>
-        </p:nvSpPr>
-        <p:spPr>
-          <a:xfrm>
-            <a:off x="10668000" y="3933825"/>
+          <p:cNvPr id="65" name="Text 63"/>
+          <p:cNvSpPr txBox="1"/>
+          <p:nvPr/>
+        </p:nvSpPr>
+        <p:spPr>
+          <a:xfrm>
+            <a:off x="10668000" y="4162425"/>
             <a:ext cx="685800" cy="154781"/>
           </a:xfrm>
           <a:prstGeom prst="rect">
@@ -11517,13 +11787,13 @@
       </p:sp>
       <p:sp>
         <p:nvSpPr>
-          <p:cNvPr id="61" name="Shape 59"/>
-          <p:cNvSpPr/>
-          <p:nvPr/>
-        </p:nvSpPr>
-        <p:spPr>
-          <a:xfrm>
-            <a:off x="6743700" y="4305300"/>
+          <p:cNvPr id="66" name="Shape 64"/>
+          <p:cNvSpPr/>
+          <p:nvPr/>
+        </p:nvSpPr>
+        <p:spPr>
+          <a:xfrm>
+            <a:off x="6743700" y="4495800"/>
             <a:ext cx="95250" cy="95250"/>
           </a:xfrm>
           <a:prstGeom prst="rect">
@@ -11537,13 +11807,13 @@
       </p:sp>
       <p:sp>
         <p:nvSpPr>
-          <p:cNvPr id="62" name="Text 60"/>
-          <p:cNvSpPr txBox="1"/>
-          <p:nvPr/>
-        </p:nvSpPr>
-        <p:spPr>
-          <a:xfrm>
-            <a:off x="6953250" y="4276725"/>
+          <p:cNvPr id="67" name="Text 65"/>
+          <p:cNvSpPr txBox="1"/>
+          <p:nvPr/>
+        </p:nvSpPr>
+        <p:spPr>
+          <a:xfrm>
+            <a:off x="6953250" y="4467225"/>
             <a:ext cx="914400" cy="154781"/>
           </a:xfrm>
           <a:prstGeom prst="rect">
@@ -11579,13 +11849,13 @@
       </p:sp>
       <p:sp>
         <p:nvSpPr>
-          <p:cNvPr id="63" name="Shape 61"/>
-          <p:cNvSpPr/>
-          <p:nvPr/>
-        </p:nvSpPr>
-        <p:spPr>
-          <a:xfrm>
-            <a:off x="8001000" y="4305300"/>
+          <p:cNvPr id="68" name="Shape 66"/>
+          <p:cNvSpPr/>
+          <p:nvPr/>
+        </p:nvSpPr>
+        <p:spPr>
+          <a:xfrm>
+            <a:off x="8001000" y="4495800"/>
             <a:ext cx="114300" cy="95250"/>
           </a:xfrm>
           <a:prstGeom prst="rect">
@@ -11599,13 +11869,13 @@
       </p:sp>
       <p:sp>
         <p:nvSpPr>
-          <p:cNvPr id="64" name="Text 62"/>
-          <p:cNvSpPr txBox="1"/>
-          <p:nvPr/>
-        </p:nvSpPr>
-        <p:spPr>
-          <a:xfrm>
-            <a:off x="9429750" y="4276725"/>
+          <p:cNvPr id="69" name="Text 67"/>
+          <p:cNvSpPr txBox="1"/>
+          <p:nvPr/>
+        </p:nvSpPr>
+        <p:spPr>
+          <a:xfrm>
+            <a:off x="9429750" y="4467225"/>
             <a:ext cx="476250" cy="154781"/>
           </a:xfrm>
           <a:prstGeom prst="rect">
@@ -11641,13 +11911,13 @@
       </p:sp>
       <p:sp>
         <p:nvSpPr>
-          <p:cNvPr id="65" name="Text 63"/>
-          <p:cNvSpPr txBox="1"/>
-          <p:nvPr/>
-        </p:nvSpPr>
-        <p:spPr>
-          <a:xfrm>
-            <a:off x="10668000" y="4276725"/>
+          <p:cNvPr id="70" name="Text 68"/>
+          <p:cNvSpPr txBox="1"/>
+          <p:nvPr/>
+        </p:nvSpPr>
+        <p:spPr>
+          <a:xfrm>
+            <a:off x="10668000" y="4467225"/>
             <a:ext cx="685800" cy="154781"/>
           </a:xfrm>
           <a:prstGeom prst="rect">
@@ -11683,13 +11953,13 @@
       </p:sp>
       <p:sp>
         <p:nvSpPr>
-          <p:cNvPr id="66" name="Shape 64"/>
-          <p:cNvSpPr/>
-          <p:nvPr/>
-        </p:nvSpPr>
-        <p:spPr>
-          <a:xfrm>
-            <a:off x="6743700" y="4648200"/>
+          <p:cNvPr id="71" name="Shape 69"/>
+          <p:cNvSpPr/>
+          <p:nvPr/>
+        </p:nvSpPr>
+        <p:spPr>
+          <a:xfrm>
+            <a:off x="6743700" y="4800600"/>
             <a:ext cx="95250" cy="95250"/>
           </a:xfrm>
           <a:prstGeom prst="rect">
@@ -11703,13 +11973,13 @@
       </p:sp>
       <p:sp>
         <p:nvSpPr>
-          <p:cNvPr id="67" name="Text 65"/>
-          <p:cNvSpPr txBox="1"/>
-          <p:nvPr/>
-        </p:nvSpPr>
-        <p:spPr>
-          <a:xfrm>
-            <a:off x="6953250" y="4619625"/>
+          <p:cNvPr id="72" name="Text 70"/>
+          <p:cNvSpPr txBox="1"/>
+          <p:nvPr/>
+        </p:nvSpPr>
+        <p:spPr>
+          <a:xfrm>
+            <a:off x="6953250" y="4772025"/>
             <a:ext cx="914400" cy="154781"/>
           </a:xfrm>
           <a:prstGeom prst="rect">
@@ -11745,13 +12015,13 @@
       </p:sp>
       <p:sp>
         <p:nvSpPr>
-          <p:cNvPr id="68" name="Shape 66"/>
-          <p:cNvSpPr/>
-          <p:nvPr/>
-        </p:nvSpPr>
-        <p:spPr>
-          <a:xfrm>
-            <a:off x="8001000" y="4648200"/>
+          <p:cNvPr id="73" name="Shape 71"/>
+          <p:cNvSpPr/>
+          <p:nvPr/>
+        </p:nvSpPr>
+        <p:spPr>
+          <a:xfrm>
+            <a:off x="8001000" y="4800600"/>
             <a:ext cx="685800" cy="95250"/>
           </a:xfrm>
           <a:prstGeom prst="rect">
@@ -11765,13 +12035,13 @@
       </p:sp>
       <p:sp>
         <p:nvSpPr>
-          <p:cNvPr id="69" name="Text 67"/>
-          <p:cNvSpPr txBox="1"/>
-          <p:nvPr/>
-        </p:nvSpPr>
-        <p:spPr>
-          <a:xfrm>
-            <a:off x="9429750" y="4619625"/>
+          <p:cNvPr id="74" name="Text 72"/>
+          <p:cNvSpPr txBox="1"/>
+          <p:nvPr/>
+        </p:nvSpPr>
+        <p:spPr>
+          <a:xfrm>
+            <a:off x="9429750" y="4772025"/>
             <a:ext cx="476250" cy="154781"/>
           </a:xfrm>
           <a:prstGeom prst="rect">
@@ -11807,13 +12077,13 @@
       </p:sp>
       <p:sp>
         <p:nvSpPr>
-          <p:cNvPr id="70" name="Text 68"/>
-          <p:cNvSpPr txBox="1"/>
-          <p:nvPr/>
-        </p:nvSpPr>
-        <p:spPr>
-          <a:xfrm>
-            <a:off x="10668000" y="4619625"/>
+          <p:cNvPr id="75" name="Text 73"/>
+          <p:cNvSpPr txBox="1"/>
+          <p:nvPr/>
+        </p:nvSpPr>
+        <p:spPr>
+          <a:xfrm>
+            <a:off x="10668000" y="4772025"/>
             <a:ext cx="685800" cy="154781"/>
           </a:xfrm>
           <a:prstGeom prst="rect">
@@ -11849,13 +12119,13 @@
       </p:sp>
       <p:sp>
         <p:nvSpPr>
-          <p:cNvPr id="71" name="Shape 69"/>
-          <p:cNvSpPr/>
-          <p:nvPr/>
-        </p:nvSpPr>
-        <p:spPr>
-          <a:xfrm>
-            <a:off x="6743700" y="4991100"/>
+          <p:cNvPr id="76" name="Shape 74"/>
+          <p:cNvSpPr/>
+          <p:nvPr/>
+        </p:nvSpPr>
+        <p:spPr>
+          <a:xfrm>
+            <a:off x="6743700" y="5105400"/>
             <a:ext cx="95250" cy="95250"/>
           </a:xfrm>
           <a:prstGeom prst="rect">
@@ -11869,13 +12139,13 @@
       </p:sp>
       <p:sp>
         <p:nvSpPr>
-          <p:cNvPr id="72" name="Text 70"/>
-          <p:cNvSpPr txBox="1"/>
-          <p:nvPr/>
-        </p:nvSpPr>
-        <p:spPr>
-          <a:xfrm>
-            <a:off x="6953250" y="4962525"/>
+          <p:cNvPr id="77" name="Text 75"/>
+          <p:cNvSpPr txBox="1"/>
+          <p:nvPr/>
+        </p:nvSpPr>
+        <p:spPr>
+          <a:xfrm>
+            <a:off x="6953250" y="5076825"/>
             <a:ext cx="914400" cy="154781"/>
           </a:xfrm>
           <a:prstGeom prst="rect">
@@ -11911,13 +12181,13 @@
       </p:sp>
       <p:sp>
         <p:nvSpPr>
-          <p:cNvPr id="73" name="Shape 71"/>
-          <p:cNvSpPr/>
-          <p:nvPr/>
-        </p:nvSpPr>
-        <p:spPr>
-          <a:xfrm>
-            <a:off x="8001000" y="4991100"/>
+          <p:cNvPr id="78" name="Shape 76"/>
+          <p:cNvSpPr/>
+          <p:nvPr/>
+        </p:nvSpPr>
+        <p:spPr>
+          <a:xfrm>
+            <a:off x="8001000" y="5105400"/>
             <a:ext cx="1257300" cy="95250"/>
           </a:xfrm>
           <a:prstGeom prst="rect">
@@ -11931,13 +12201,13 @@
       </p:sp>
       <p:sp>
         <p:nvSpPr>
-          <p:cNvPr id="74" name="Text 72"/>
-          <p:cNvSpPr txBox="1"/>
-          <p:nvPr/>
-        </p:nvSpPr>
-        <p:spPr>
-          <a:xfrm>
-            <a:off x="9429750" y="4962525"/>
+          <p:cNvPr id="79" name="Text 77"/>
+          <p:cNvSpPr txBox="1"/>
+          <p:nvPr/>
+        </p:nvSpPr>
+        <p:spPr>
+          <a:xfrm>
+            <a:off x="9429750" y="5076825"/>
             <a:ext cx="476250" cy="154781"/>
           </a:xfrm>
           <a:prstGeom prst="rect">
@@ -11973,13 +12243,13 @@
       </p:sp>
       <p:sp>
         <p:nvSpPr>
-          <p:cNvPr id="75" name="Text 73"/>
-          <p:cNvSpPr txBox="1"/>
-          <p:nvPr/>
-        </p:nvSpPr>
-        <p:spPr>
-          <a:xfrm>
-            <a:off x="10668000" y="4962525"/>
+          <p:cNvPr id="80" name="Text 78"/>
+          <p:cNvSpPr txBox="1"/>
+          <p:nvPr/>
+        </p:nvSpPr>
+        <p:spPr>
+          <a:xfrm>
+            <a:off x="10668000" y="5076825"/>
             <a:ext cx="685800" cy="154781"/>
           </a:xfrm>
           <a:prstGeom prst="rect">
@@ -12015,7 +12285,7 @@
       </p:sp>
       <p:sp>
         <p:nvSpPr>
-          <p:cNvPr id="76" name="Text 74"/>
+          <p:cNvPr id="81" name="Text 79"/>
           <p:cNvSpPr txBox="1"/>
           <p:nvPr/>
         </p:nvSpPr>
@@ -12074,7 +12344,7 @@
       </p:sp>
       <p:sp>
         <p:nvSpPr>
-          <p:cNvPr id="77" name="Shape 75"/>
+          <p:cNvPr id="82" name="Shape 80"/>
           <p:cNvSpPr/>
           <p:nvPr/>
         </p:nvSpPr>
@@ -12097,7 +12367,7 @@
       </p:sp>
       <p:sp>
         <p:nvSpPr>
-          <p:cNvPr id="78" name="Text 76"/>
+          <p:cNvPr id="83" name="Text 81"/>
           <p:cNvSpPr txBox="1"/>
           <p:nvPr/>
         </p:nvSpPr>
@@ -12139,7 +12409,7 @@
       </p:sp>
       <p:sp>
         <p:nvSpPr>
-          <p:cNvPr id="79" name="Text 77"/>
+          <p:cNvPr id="84" name="Text 82"/>
           <p:cNvSpPr txBox="1"/>
           <p:nvPr/>
         </p:nvSpPr>
@@ -14505,7 +14775,7 @@
                 <a:ea typeface="Malgun Gothic" pitchFamily="34" charset="-122"/>
                 <a:cs typeface="Malgun Gothic" pitchFamily="34" charset="-120"/>
               </a:rPr>
-              <a:t> 해 종전과 나란히 놓았습니다. 그리고 시운전 4회차에서 다시 확인했습니다.</a:t>
+              <a:t> 해 종전과 나란히 놓았습니다. 그리고 시운전 5회차에서 다시 확인했습니다.</a:t>
             </a:r>
             <a:endParaRPr lang="en-US" sz="1350" dirty="0"/>
           </a:p>
@@ -16063,7 +16333,7 @@
                 <a:ea typeface="Consolas" pitchFamily="34" charset="-122"/>
                 <a:cs typeface="Consolas" pitchFamily="34" charset="-120"/>
               </a:rPr>
-              <a:t>시운전 실측  ·  4회차</a:t>
+              <a:t>시운전 실측  ·  5회차  ·  26-04-15 ~ 26-07-29</a:t>
             </a:r>
             <a:endParaRPr lang="en-US" sz="788" dirty="0"/>
           </a:p>
@@ -16172,7 +16442,7 @@
                 <a:ea typeface="Consolas" pitchFamily="34" charset="-122"/>
                 <a:cs typeface="Consolas" pitchFamily="34" charset="-120"/>
               </a:rPr>
-              <a:t>+0.14</a:t>
+              <a:t>+0.24</a:t>
             </a:r>
             <a:endParaRPr lang="en-US" sz="1800" dirty="0"/>
           </a:p>
@@ -16298,7 +16568,7 @@
                 <a:ea typeface="Consolas" pitchFamily="34" charset="-122"/>
                 <a:cs typeface="Consolas" pitchFamily="34" charset="-120"/>
               </a:rPr>
-              <a:t>1.36</a:t>
+              <a:t>1.21</a:t>
             </a:r>
             <a:endParaRPr lang="en-US" sz="1800" dirty="0"/>
           </a:p>
@@ -16424,7 +16694,7 @@
                 <a:ea typeface="Consolas" pitchFamily="34" charset="-122"/>
                 <a:cs typeface="Consolas" pitchFamily="34" charset="-120"/>
               </a:rPr>
-              <a:t>1.57</a:t>
+              <a:t>1.43</a:t>
             </a:r>
             <a:endParaRPr lang="en-US" sz="1800" dirty="0"/>
           </a:p>
@@ -16550,7 +16820,7 @@
                 <a:ea typeface="Consolas" pitchFamily="34" charset="-122"/>
                 <a:cs typeface="Consolas" pitchFamily="34" charset="-120"/>
               </a:rPr>
-              <a:t>91.3</a:t>
+              <a:t>92.0</a:t>
             </a:r>
             <a:endParaRPr lang="en-US" sz="1800" dirty="0"/>
           </a:p>
@@ -16693,7 +16963,7 @@
                 <a:ea typeface="Malgun Gothic" pitchFamily="34" charset="-122"/>
                 <a:cs typeface="Malgun Gothic" pitchFamily="34" charset="-120"/>
               </a:rPr>
-              <a:t>시운전 4회차는 학습에 넣지 않고 예측만 했습니다. 누적 36회차 채점과 비슷하게 나왔습니다.</a:t>
+              <a:t>시운전 5회차는 학습에 넣지 않고 예측만 했습니다. 누적 36회차 채점과 비슷하게 나왔습니다.</a:t>
             </a:r>
             <a:endParaRPr lang="en-US" sz="1125" dirty="0"/>
           </a:p>
@@ -22219,7 +22489,7 @@
                 <a:ea typeface="Malgun Gothic" pitchFamily="34" charset="-122"/>
                 <a:cs typeface="Malgun Gothic" pitchFamily="34" charset="-120"/>
               </a:rPr>
-              <a:t> 맞혀본 결과입니다. 시운전 4회차에서 다시 확인했습니다.</a:t>
+              <a:t> 맞혀본 결과입니다. 시운전 5회차에서 다시 확인했습니다.</a:t>
             </a:r>
             <a:endParaRPr lang="en-US" sz="1125" dirty="0"/>
           </a:p>
@@ -32294,7 +32564,7 @@
         </p:nvSpPr>
         <p:spPr>
           <a:xfrm>
-            <a:off x="1162050" y="4365689"/>
+            <a:off x="1162050" y="4365798"/>
             <a:ext cx="6610350" cy="0"/>
           </a:xfrm>
           <a:prstGeom prst="line">
@@ -32317,7 +32587,7 @@
         </p:nvSpPr>
         <p:spPr>
           <a:xfrm>
-            <a:off x="5905500" y="4156139"/>
+            <a:off x="5905500" y="4156248"/>
             <a:ext cx="1866900" cy="142399"/>
           </a:xfrm>
           <a:prstGeom prst="rect">
@@ -32359,7 +32629,7 @@
         </p:nvSpPr>
         <p:spPr>
           <a:xfrm>
-            <a:off x="1131375" y="3210639"/>
+            <a:off x="1131375" y="3211187"/>
             <a:ext cx="95250" cy="95250"/>
           </a:xfrm>
           <a:prstGeom prst="ellipse">
@@ -32379,7 +32649,7 @@
         </p:nvSpPr>
         <p:spPr>
           <a:xfrm>
-            <a:off x="1216123" y="3263217"/>
+            <a:off x="1207649" y="3262998"/>
             <a:ext cx="95250" cy="95250"/>
           </a:xfrm>
           <a:prstGeom prst="ellipse">
@@ -32399,7 +32669,7 @@
         </p:nvSpPr>
         <p:spPr>
           <a:xfrm>
-            <a:off x="1788800" y="3680746"/>
+            <a:off x="1788800" y="3680417"/>
             <a:ext cx="68580" cy="68580"/>
           </a:xfrm>
           <a:prstGeom prst="ellipse">
@@ -32419,7 +32689,7 @@
         </p:nvSpPr>
         <p:spPr>
           <a:xfrm>
-            <a:off x="2127795" y="4017026"/>
+            <a:off x="2127795" y="4016697"/>
             <a:ext cx="68580" cy="68580"/>
           </a:xfrm>
           <a:prstGeom prst="ellipse">
@@ -32439,7 +32709,7 @@
         </p:nvSpPr>
         <p:spPr>
           <a:xfrm>
-            <a:off x="2483739" y="4047696"/>
+            <a:off x="2483739" y="4047258"/>
             <a:ext cx="68580" cy="68580"/>
           </a:xfrm>
           <a:prstGeom prst="ellipse">
@@ -32459,7 +32729,7 @@
         </p:nvSpPr>
         <p:spPr>
           <a:xfrm>
-            <a:off x="2653236" y="4096988"/>
+            <a:off x="2653236" y="4097317"/>
             <a:ext cx="68580" cy="68580"/>
           </a:xfrm>
           <a:prstGeom prst="ellipse">
@@ -32479,7 +32749,7 @@
         </p:nvSpPr>
         <p:spPr>
           <a:xfrm>
-            <a:off x="2822734" y="4144089"/>
+            <a:off x="2822734" y="4143761"/>
             <a:ext cx="68580" cy="68580"/>
           </a:xfrm>
           <a:prstGeom prst="ellipse">
@@ -32499,7 +32769,7 @@
         </p:nvSpPr>
         <p:spPr>
           <a:xfrm>
-            <a:off x="2975281" y="3958971"/>
+            <a:off x="2975281" y="3959081"/>
             <a:ext cx="68580" cy="68580"/>
           </a:xfrm>
           <a:prstGeom prst="ellipse">
@@ -32519,7 +32789,7 @@
         </p:nvSpPr>
         <p:spPr>
           <a:xfrm>
-            <a:off x="3076980" y="4241578"/>
+            <a:off x="3076980" y="4241906"/>
             <a:ext cx="68580" cy="68580"/>
           </a:xfrm>
           <a:prstGeom prst="ellipse">
@@ -32539,7 +32809,7 @@
         </p:nvSpPr>
         <p:spPr>
           <a:xfrm>
-            <a:off x="3365125" y="4079462"/>
+            <a:off x="3365125" y="4079024"/>
             <a:ext cx="68580" cy="68580"/>
           </a:xfrm>
           <a:prstGeom prst="ellipse">
@@ -32559,7 +32829,7 @@
         </p:nvSpPr>
         <p:spPr>
           <a:xfrm>
-            <a:off x="3619371" y="4113419"/>
+            <a:off x="3619371" y="4112981"/>
             <a:ext cx="68580" cy="68580"/>
           </a:xfrm>
           <a:prstGeom prst="ellipse">
@@ -32579,7 +32849,7 @@
         </p:nvSpPr>
         <p:spPr>
           <a:xfrm>
-            <a:off x="3670221" y="3884486"/>
+            <a:off x="3670221" y="3884047"/>
             <a:ext cx="68580" cy="68580"/>
           </a:xfrm>
           <a:prstGeom prst="ellipse">
@@ -32599,7 +32869,7 @@
         </p:nvSpPr>
         <p:spPr>
           <a:xfrm>
-            <a:off x="3721070" y="3932682"/>
+            <a:off x="3721070" y="3932792"/>
             <a:ext cx="68580" cy="68580"/>
           </a:xfrm>
           <a:prstGeom prst="ellipse">
@@ -32619,7 +32889,7 @@
         </p:nvSpPr>
         <p:spPr>
           <a:xfrm>
-            <a:off x="3907517" y="3837384"/>
+            <a:off x="3907517" y="3837275"/>
             <a:ext cx="68580" cy="68580"/>
           </a:xfrm>
           <a:prstGeom prst="ellipse">
@@ -32639,7 +32909,7 @@
         </p:nvSpPr>
         <p:spPr>
           <a:xfrm>
-            <a:off x="3924467" y="3984165"/>
+            <a:off x="3924467" y="3984055"/>
             <a:ext cx="68580" cy="68580"/>
           </a:xfrm>
           <a:prstGeom prst="ellipse">
@@ -32659,7 +32929,7 @@
         </p:nvSpPr>
         <p:spPr>
           <a:xfrm>
-            <a:off x="4026165" y="4030170"/>
+            <a:off x="4026165" y="4030389"/>
             <a:ext cx="68580" cy="68580"/>
           </a:xfrm>
           <a:prstGeom prst="ellipse">
@@ -32679,7 +32949,7 @@
         </p:nvSpPr>
         <p:spPr>
           <a:xfrm>
-            <a:off x="4280411" y="4054269"/>
+            <a:off x="4280411" y="4054707"/>
             <a:ext cx="68580" cy="68580"/>
           </a:xfrm>
           <a:prstGeom prst="ellipse">
@@ -32699,7 +32969,7 @@
         </p:nvSpPr>
         <p:spPr>
           <a:xfrm>
-            <a:off x="4297361" y="4018121"/>
+            <a:off x="4297361" y="4017793"/>
             <a:ext cx="68580" cy="68580"/>
           </a:xfrm>
           <a:prstGeom prst="ellipse">
@@ -32719,7 +32989,7 @@
         </p:nvSpPr>
         <p:spPr>
           <a:xfrm>
-            <a:off x="5077049" y="4355497"/>
+            <a:off x="5077049" y="4355606"/>
             <a:ext cx="68580" cy="68580"/>
           </a:xfrm>
           <a:prstGeom prst="ellipse">
@@ -32739,7 +33009,7 @@
         </p:nvSpPr>
         <p:spPr>
           <a:xfrm>
-            <a:off x="5721139" y="4873609"/>
+            <a:off x="5721139" y="4873500"/>
             <a:ext cx="68580" cy="68580"/>
           </a:xfrm>
           <a:prstGeom prst="ellipse">
@@ -32759,7 +33029,7 @@
         </p:nvSpPr>
         <p:spPr>
           <a:xfrm>
-            <a:off x="5755038" y="5001768"/>
+            <a:off x="5755038" y="5002206"/>
             <a:ext cx="68580" cy="68580"/>
           </a:xfrm>
           <a:prstGeom prst="ellipse">
@@ -32779,7 +33049,7 @@
         </p:nvSpPr>
         <p:spPr>
           <a:xfrm>
-            <a:off x="5771988" y="4706017"/>
+            <a:off x="5771988" y="4705907"/>
             <a:ext cx="68580" cy="68580"/>
           </a:xfrm>
           <a:prstGeom prst="ellipse">
@@ -32819,7 +33089,7 @@
         </p:nvSpPr>
         <p:spPr>
           <a:xfrm>
-            <a:off x="6110983" y="4934950"/>
+            <a:off x="6110983" y="4935169"/>
             <a:ext cx="68580" cy="68580"/>
           </a:xfrm>
           <a:prstGeom prst="ellipse">
@@ -32839,7 +33109,7 @@
         </p:nvSpPr>
         <p:spPr>
           <a:xfrm>
-            <a:off x="6317994" y="5161502"/>
+            <a:off x="6317994" y="5160955"/>
             <a:ext cx="95250" cy="95250"/>
           </a:xfrm>
           <a:prstGeom prst="ellipse">
@@ -32859,7 +33129,7 @@
         </p:nvSpPr>
         <p:spPr>
           <a:xfrm>
-            <a:off x="6585575" y="4817745"/>
+            <a:off x="6585575" y="4818293"/>
             <a:ext cx="68580" cy="68580"/>
           </a:xfrm>
           <a:prstGeom prst="ellipse">
@@ -32879,7 +33149,7 @@
         </p:nvSpPr>
         <p:spPr>
           <a:xfrm>
-            <a:off x="6656989" y="5007054"/>
+            <a:off x="6656989" y="5006945"/>
             <a:ext cx="95250" cy="95250"/>
           </a:xfrm>
           <a:prstGeom prst="ellipse">
@@ -32899,7 +33169,7 @@
         </p:nvSpPr>
         <p:spPr>
           <a:xfrm>
-            <a:off x="6839822" y="4737783"/>
+            <a:off x="6839822" y="4738111"/>
             <a:ext cx="68580" cy="68580"/>
           </a:xfrm>
           <a:prstGeom prst="ellipse">
@@ -32939,7 +33209,7 @@
         </p:nvSpPr>
         <p:spPr>
           <a:xfrm>
-            <a:off x="7009319" y="4920710"/>
+            <a:off x="7009319" y="4920820"/>
             <a:ext cx="68580" cy="68580"/>
           </a:xfrm>
           <a:prstGeom prst="ellipse">
@@ -32959,7 +33229,7 @@
         </p:nvSpPr>
         <p:spPr>
           <a:xfrm>
-            <a:off x="7026269" y="4490228"/>
+            <a:off x="7026269" y="4411251"/>
             <a:ext cx="68580" cy="68580"/>
           </a:xfrm>
           <a:prstGeom prst="ellipse">
@@ -32979,7 +33249,7 @@
         </p:nvSpPr>
         <p:spPr>
           <a:xfrm>
-            <a:off x="7026269" y="4411361"/>
+            <a:off x="7026269" y="4490118"/>
             <a:ext cx="68580" cy="68580"/>
           </a:xfrm>
           <a:prstGeom prst="ellipse">
@@ -32999,7 +33269,7 @@
         </p:nvSpPr>
         <p:spPr>
           <a:xfrm>
-            <a:off x="7161867" y="4568000"/>
+            <a:off x="7161867" y="4568219"/>
             <a:ext cx="68580" cy="68580"/>
           </a:xfrm>
           <a:prstGeom prst="ellipse">
@@ -33019,7 +33289,7 @@
         </p:nvSpPr>
         <p:spPr>
           <a:xfrm>
-            <a:off x="7195766" y="4897707"/>
+            <a:off x="7195766" y="4897379"/>
             <a:ext cx="68580" cy="68580"/>
           </a:xfrm>
           <a:prstGeom prst="ellipse">
@@ -33039,7 +33309,7 @@
         </p:nvSpPr>
         <p:spPr>
           <a:xfrm>
-            <a:off x="7331364" y="4561427"/>
+            <a:off x="7331364" y="4561537"/>
             <a:ext cx="68580" cy="68580"/>
           </a:xfrm>
           <a:prstGeom prst="ellipse">
@@ -33382,7 +33652,7 @@
                 <a:ea typeface="Consolas" pitchFamily="34" charset="-122"/>
                 <a:cs typeface="Consolas" pitchFamily="34" charset="-120"/>
               </a:rPr>
-              <a:t>-10.40</a:t>
+              <a:t>-10.39</a:t>
             </a:r>
             <a:endParaRPr lang="en-US" sz="938" dirty="0"/>
           </a:p>
@@ -33481,7 +33751,7 @@
         <p:spPr>
           <a:xfrm>
             <a:off x="9658350" y="3524250"/>
-            <a:ext cx="943928" cy="152400"/>
+            <a:ext cx="944191" cy="152400"/>
           </a:xfrm>
           <a:prstGeom prst="rect">
             <a:avLst/>
@@ -33627,7 +33897,7 @@
         <p:spPr>
           <a:xfrm>
             <a:off x="9658350" y="3886200"/>
-            <a:ext cx="753427" cy="152400"/>
+            <a:ext cx="754171" cy="152400"/>
           </a:xfrm>
           <a:prstGeom prst="rect">
             <a:avLst/>
@@ -33773,7 +34043,7 @@
         <p:spPr>
           <a:xfrm>
             <a:off x="9658350" y="4248150"/>
-            <a:ext cx="616268" cy="152400"/>
+            <a:ext cx="616278" cy="152400"/>
           </a:xfrm>
           <a:prstGeom prst="rect">
             <a:avLst/>

--- a/docs/ppt/위례_공급가능용량_최종발표.pptx
+++ b/docs/ppt/위례_공급가능용량_최종발표.pptx
@@ -2754,7 +2754,7 @@
                 <a:ea typeface="Malgun Gothic" pitchFamily="34" charset="-122"/>
                 <a:cs typeface="Malgun Gothic" pitchFamily="34" charset="-120"/>
               </a:rPr>
-              <a:t> 에서 채점한 결과입니다. 누적 36회차, 한 건씩 가려 맞혀봤습니다.</a:t>
+              <a:t> 에서 채점한 결과입니다. 누적 40회차, 한 건씩 가려 맞혀봤습니다.</a:t>
             </a:r>
             <a:endParaRPr lang="en-US" sz="1125" dirty="0"/>
           </a:p>
@@ -3313,7 +3313,7 @@
         </p:nvSpPr>
         <p:spPr>
           <a:xfrm>
-            <a:off x="6896100" y="2305936"/>
+            <a:off x="6896100" y="2353485"/>
             <a:ext cx="4286250" cy="0"/>
           </a:xfrm>
           <a:prstGeom prst="line">
@@ -3336,7 +3336,7 @@
         </p:nvSpPr>
         <p:spPr>
           <a:xfrm>
-            <a:off x="6972300" y="2119246"/>
+            <a:off x="6972300" y="2166795"/>
             <a:ext cx="2095500" cy="148590"/>
           </a:xfrm>
           <a:prstGeom prst="rect">
@@ -3364,7 +3364,7 @@
                 <a:ea typeface="Malgun Gothic" pitchFamily="34" charset="-122"/>
                 <a:cs typeface="Malgun Gothic" pitchFamily="34" charset="-120"/>
               </a:rPr>
-              <a:t>종전 · 하나의 값 +2.84</a:t>
+              <a:t>종전 · 하나의 값 +2.46</a:t>
             </a:r>
             <a:endParaRPr lang="en-US" sz="900" dirty="0"/>
           </a:p>
@@ -3378,8 +3378,8 @@
         </p:nvSpPr>
         <p:spPr>
           <a:xfrm>
-            <a:off x="6972300" y="1728788"/>
-            <a:ext cx="1352550" cy="288512"/>
+            <a:off x="6972300" y="1731264"/>
+            <a:ext cx="1352550" cy="286036"/>
           </a:xfrm>
           <a:prstGeom prst="line">
             <a:avLst/>
@@ -3402,7 +3402,7 @@
         <p:spPr>
           <a:xfrm>
             <a:off x="8324850" y="2017300"/>
-            <a:ext cx="1352550" cy="210502"/>
+            <a:ext cx="1352550" cy="215455"/>
           </a:xfrm>
           <a:prstGeom prst="line">
             <a:avLst/>
@@ -3424,8 +3424,8 @@
         </p:nvSpPr>
         <p:spPr>
           <a:xfrm>
-            <a:off x="9677400" y="2227802"/>
-            <a:ext cx="1352550" cy="724376"/>
+            <a:off x="9677400" y="2232755"/>
+            <a:ext cx="1352550" cy="708279"/>
           </a:xfrm>
           <a:prstGeom prst="line">
             <a:avLst/>
@@ -3447,7 +3447,7 @@
         </p:nvSpPr>
         <p:spPr>
           <a:xfrm>
-            <a:off x="6934200" y="1690688"/>
+            <a:off x="6934200" y="1693164"/>
             <a:ext cx="76200" cy="76200"/>
           </a:xfrm>
           <a:prstGeom prst="rect">
@@ -3487,7 +3487,7 @@
         </p:nvSpPr>
         <p:spPr>
           <a:xfrm>
-            <a:off x="9639300" y="2189702"/>
+            <a:off x="9639300" y="2194655"/>
             <a:ext cx="76200" cy="76200"/>
           </a:xfrm>
           <a:prstGeom prst="rect">
@@ -3507,7 +3507,7 @@
         </p:nvSpPr>
         <p:spPr>
           <a:xfrm>
-            <a:off x="10991850" y="2914079"/>
+            <a:off x="10991850" y="2902934"/>
             <a:ext cx="76200" cy="76200"/>
           </a:xfrm>
           <a:prstGeom prst="rect">
@@ -3527,7 +3527,7 @@
         </p:nvSpPr>
         <p:spPr>
           <a:xfrm>
-            <a:off x="7067550" y="1837373"/>
+            <a:off x="7067550" y="1839849"/>
             <a:ext cx="571500" cy="148590"/>
           </a:xfrm>
           <a:prstGeom prst="rect">
@@ -3569,7 +3569,7 @@
         </p:nvSpPr>
         <p:spPr>
           <a:xfrm>
-            <a:off x="10325100" y="3003614"/>
+            <a:off x="10325100" y="2992469"/>
             <a:ext cx="628650" cy="148590"/>
           </a:xfrm>
           <a:prstGeom prst="rect">
@@ -3597,7 +3597,7 @@
                 <a:ea typeface="Consolas" pitchFamily="34" charset="-122"/>
                 <a:cs typeface="Consolas" pitchFamily="34" charset="-120"/>
               </a:rPr>
-              <a:t>−2.4</a:t>
+              <a:t>−2.3</a:t>
             </a:r>
             <a:endParaRPr lang="en-US" sz="900" dirty="0"/>
           </a:p>
@@ -3611,8 +3611,8 @@
         </p:nvSpPr>
         <p:spPr>
           <a:xfrm>
-            <a:off x="6972300" y="1785938"/>
-            <a:ext cx="0" cy="462848"/>
+            <a:off x="6972300" y="1788414"/>
+            <a:ext cx="0" cy="507921"/>
           </a:xfrm>
           <a:prstGeom prst="line">
             <a:avLst/>
@@ -3634,7 +3634,7 @@
         </p:nvSpPr>
         <p:spPr>
           <a:xfrm>
-            <a:off x="6915150" y="1785938"/>
+            <a:off x="6915150" y="1788414"/>
             <a:ext cx="114300" cy="0"/>
           </a:xfrm>
           <a:prstGeom prst="line">
@@ -3657,7 +3657,7 @@
         </p:nvSpPr>
         <p:spPr>
           <a:xfrm>
-            <a:off x="6915150" y="2248786"/>
+            <a:off x="6915150" y="2296335"/>
             <a:ext cx="114300" cy="0"/>
           </a:xfrm>
           <a:prstGeom prst="line">
@@ -3680,8 +3680,8 @@
         </p:nvSpPr>
         <p:spPr>
           <a:xfrm>
-            <a:off x="11029950" y="2363086"/>
-            <a:ext cx="0" cy="531943"/>
+            <a:off x="11029950" y="2410635"/>
+            <a:ext cx="0" cy="473250"/>
           </a:xfrm>
           <a:prstGeom prst="line">
             <a:avLst/>
@@ -3703,7 +3703,7 @@
         </p:nvSpPr>
         <p:spPr>
           <a:xfrm>
-            <a:off x="10972800" y="2363086"/>
+            <a:off x="10972800" y="2410635"/>
             <a:ext cx="114300" cy="0"/>
           </a:xfrm>
           <a:prstGeom prst="line">
@@ -3726,7 +3726,7 @@
         </p:nvSpPr>
         <p:spPr>
           <a:xfrm>
-            <a:off x="10972800" y="2895029"/>
+            <a:off x="10972800" y="2883884"/>
             <a:ext cx="114300" cy="0"/>
           </a:xfrm>
           <a:prstGeom prst="line">
@@ -3800,7 +3800,7 @@
                 <a:ea typeface="Consolas" pitchFamily="34" charset="-122"/>
                 <a:cs typeface="Consolas" pitchFamily="34" charset="-120"/>
               </a:rPr>
-              <a:t>종전 · 하나의 값 +2.84</a:t>
+              <a:t>종전 · 하나의 값 +2.46</a:t>
             </a:r>
             <a:endParaRPr lang="en-US" sz="900" dirty="0"/>
           </a:p>
@@ -3907,7 +3907,7 @@
                 <a:ea typeface="Consolas" pitchFamily="34" charset="-122"/>
                 <a:cs typeface="Consolas" pitchFamily="34" charset="-120"/>
               </a:rPr>
-              <a:t>겨울 0℃ 4.7 MW 과소   ·   여름 30℃ 5.2 MW 과대</a:t>
+              <a:t>겨울 0℃ 5.0 MW 과소   ·   여름 30℃ 4.7 MW 과대</a:t>
             </a:r>
             <a:endParaRPr lang="en-US" sz="900" dirty="0"/>
           </a:p>
@@ -4132,7 +4132,7 @@
                 <a:ea typeface="Consolas" pitchFamily="34" charset="-122"/>
                 <a:cs typeface="Consolas" pitchFamily="34" charset="-120"/>
               </a:rPr>
-              <a:t>3.83 → 1.29 MW</a:t>
+              <a:t>3.80 → 1.29 MW</a:t>
             </a:r>
             <a:endParaRPr lang="en-US" sz="1125" dirty="0"/>
           </a:p>
@@ -4216,7 +4216,7 @@
                 <a:ea typeface="Consolas" pitchFamily="34" charset="-122"/>
                 <a:cs typeface="Consolas" pitchFamily="34" charset="-120"/>
               </a:rPr>
-              <a:t>79%↓</a:t>
+              <a:t>73%↓</a:t>
             </a:r>
             <a:endParaRPr lang="en-US" sz="3600" dirty="0"/>
           </a:p>
@@ -4258,7 +4258,7 @@
                 <a:ea typeface="Consolas" pitchFamily="34" charset="-122"/>
                 <a:cs typeface="Consolas" pitchFamily="34" charset="-120"/>
               </a:rPr>
-              <a:t>14 → 3 건</a:t>
+              <a:t>15 → 4 건</a:t>
             </a:r>
             <a:endParaRPr lang="en-US" sz="1125" dirty="0"/>
           </a:p>
@@ -4342,7 +4342,7 @@
                 <a:ea typeface="Consolas" pitchFamily="34" charset="-122"/>
                 <a:cs typeface="Consolas" pitchFamily="34" charset="-120"/>
               </a:rPr>
-              <a:t>88%↓</a:t>
+              <a:t>87%↓</a:t>
             </a:r>
             <a:endParaRPr lang="en-US" sz="3600" dirty="0"/>
           </a:p>
@@ -4384,7 +4384,7 @@
                 <a:ea typeface="Consolas" pitchFamily="34" charset="-122"/>
                 <a:cs typeface="Consolas" pitchFamily="34" charset="-120"/>
               </a:rPr>
-              <a:t>65.4 → 7.6 MW</a:t>
+              <a:t>69.5 → 9.3 MW</a:t>
             </a:r>
             <a:endParaRPr lang="en-US" sz="1125" dirty="0"/>
           </a:p>
@@ -5149,7 +5149,7 @@
                 <a:ea typeface="Consolas" pitchFamily="34" charset="-122"/>
                 <a:cs typeface="Consolas" pitchFamily="34" charset="-120"/>
               </a:rPr>
-              <a:t>온도 구간별 회차 수  ·  누적 36회차</a:t>
+              <a:t>온도 구간별 회차 수  ·  누적 40회차</a:t>
             </a:r>
             <a:endParaRPr lang="en-US" sz="788" dirty="0"/>
           </a:p>
@@ -5231,7 +5231,7 @@
         <p:spPr>
           <a:xfrm>
             <a:off x="1828800" y="3238500"/>
-            <a:ext cx="590550" cy="171450"/>
+            <a:ext cx="433070" cy="171450"/>
           </a:xfrm>
           <a:prstGeom prst="rect">
             <a:avLst/>
@@ -5250,7 +5250,7 @@
         </p:nvSpPr>
         <p:spPr>
           <a:xfrm>
-            <a:off x="2495550" y="3257550"/>
+            <a:off x="2338070" y="3257550"/>
             <a:ext cx="571500" cy="148590"/>
           </a:xfrm>
           <a:prstGeom prst="rect">
@@ -5335,7 +5335,7 @@
         <p:spPr>
           <a:xfrm>
             <a:off x="1828800" y="3543300"/>
-            <a:ext cx="2066925" cy="171450"/>
+            <a:ext cx="1515745" cy="171450"/>
           </a:xfrm>
           <a:prstGeom prst="rect">
             <a:avLst/>
@@ -5354,7 +5354,7 @@
         </p:nvSpPr>
         <p:spPr>
           <a:xfrm>
-            <a:off x="3971925" y="3562350"/>
+            <a:off x="3420745" y="3562350"/>
             <a:ext cx="571500" cy="148590"/>
           </a:xfrm>
           <a:prstGeom prst="rect">
@@ -5439,7 +5439,7 @@
         <p:spPr>
           <a:xfrm>
             <a:off x="1828800" y="3848100"/>
-            <a:ext cx="1771650" cy="171450"/>
+            <a:ext cx="1299210" cy="171450"/>
           </a:xfrm>
           <a:prstGeom prst="rect">
             <a:avLst/>
@@ -5458,7 +5458,7 @@
         </p:nvSpPr>
         <p:spPr>
           <a:xfrm>
-            <a:off x="3676650" y="3867150"/>
+            <a:off x="3204210" y="3867150"/>
             <a:ext cx="571500" cy="148590"/>
           </a:xfrm>
           <a:prstGeom prst="rect">
@@ -5543,7 +5543,7 @@
         <p:spPr>
           <a:xfrm>
             <a:off x="1828800" y="4152900"/>
-            <a:ext cx="885825" cy="171450"/>
+            <a:ext cx="649605" cy="171450"/>
           </a:xfrm>
           <a:prstGeom prst="rect">
             <a:avLst/>
@@ -5562,7 +5562,7 @@
         </p:nvSpPr>
         <p:spPr>
           <a:xfrm>
-            <a:off x="2790825" y="4171950"/>
+            <a:off x="2554605" y="4171950"/>
             <a:ext cx="571500" cy="148590"/>
           </a:xfrm>
           <a:prstGeom prst="rect">
@@ -5647,7 +5647,7 @@
         <p:spPr>
           <a:xfrm>
             <a:off x="1828800" y="4457700"/>
-            <a:ext cx="295275" cy="171450"/>
+            <a:ext cx="216535" cy="171450"/>
           </a:xfrm>
           <a:prstGeom prst="rect">
             <a:avLst/>
@@ -5666,7 +5666,7 @@
         </p:nvSpPr>
         <p:spPr>
           <a:xfrm>
-            <a:off x="2200275" y="4476750"/>
+            <a:off x="2121535" y="4476750"/>
             <a:ext cx="571500" cy="148590"/>
           </a:xfrm>
           <a:prstGeom prst="rect">
@@ -5751,7 +5751,7 @@
         <p:spPr>
           <a:xfrm>
             <a:off x="1828800" y="4762500"/>
-            <a:ext cx="1771650" cy="171450"/>
+            <a:ext cx="1299210" cy="171450"/>
           </a:xfrm>
           <a:prstGeom prst="rect">
             <a:avLst/>
@@ -5770,7 +5770,7 @@
         </p:nvSpPr>
         <p:spPr>
           <a:xfrm>
-            <a:off x="3676650" y="4781550"/>
+            <a:off x="3204210" y="4781550"/>
             <a:ext cx="571500" cy="148590"/>
           </a:xfrm>
           <a:prstGeom prst="rect">
@@ -5902,7 +5902,7 @@
                 <a:ea typeface="Consolas" pitchFamily="34" charset="-122"/>
                 <a:cs typeface="Consolas" pitchFamily="34" charset="-120"/>
               </a:rPr>
-              <a:t>11건</a:t>
+              <a:t>15건</a:t>
             </a:r>
             <a:endParaRPr lang="en-US" sz="975" dirty="0"/>
           </a:p>
@@ -7043,7 +7043,7 @@
                 <a:ea typeface="Malgun Gothic" pitchFamily="34" charset="-122"/>
                 <a:cs typeface="Malgun Gothic" pitchFamily="34" charset="-120"/>
               </a:rPr>
-              <a:t> 으로 36번 채점했습니다. </a:t>
+              <a:t> 으로 40번 채점했습니다. </a:t>
             </a:r>
             <a:pPr algn="l" indent="0" marL="0">
               <a:lnSpc>
@@ -7268,7 +7268,7 @@
                 <a:ea typeface="Consolas" pitchFamily="34" charset="-122"/>
                 <a:cs typeface="Consolas" pitchFamily="34" charset="-120"/>
               </a:rPr>
-              <a:t>3.83</a:t>
+              <a:t>3.80</a:t>
             </a:r>
             <a:endParaRPr lang="en-US" sz="1350" dirty="0"/>
           </a:p>
@@ -7325,7 +7325,7 @@
         <p:spPr>
           <a:xfrm>
             <a:off x="838200" y="3790950"/>
-            <a:ext cx="1825778" cy="142875"/>
+            <a:ext cx="1825233" cy="142875"/>
           </a:xfrm>
           <a:prstGeom prst="rect">
             <a:avLst/>
@@ -7344,7 +7344,7 @@
         </p:nvSpPr>
         <p:spPr>
           <a:xfrm>
-            <a:off x="2778278" y="3743325"/>
+            <a:off x="2777733" y="3743325"/>
             <a:ext cx="857250" cy="285750"/>
           </a:xfrm>
           <a:prstGeom prst="rect">
@@ -7372,7 +7372,7 @@
                 <a:ea typeface="Consolas" pitchFamily="34" charset="-122"/>
                 <a:cs typeface="Consolas" pitchFamily="34" charset="-120"/>
               </a:rPr>
-              <a:t>1.31</a:t>
+              <a:t>1.30</a:t>
             </a:r>
             <a:endParaRPr lang="en-US" sz="1875" dirty="0"/>
           </a:p>
@@ -7451,7 +7451,7 @@
         </p:nvSpPr>
         <p:spPr>
           <a:xfrm>
-            <a:off x="3361336" y="4400550"/>
+            <a:off x="3401786" y="4400550"/>
             <a:ext cx="0" cy="1333500"/>
           </a:xfrm>
           <a:prstGeom prst="line">
@@ -7474,7 +7474,7 @@
         </p:nvSpPr>
         <p:spPr>
           <a:xfrm>
-            <a:off x="4246172" y="4400550"/>
+            <a:off x="4327071" y="4400550"/>
             <a:ext cx="0" cy="1333500"/>
           </a:xfrm>
           <a:prstGeom prst="line">
@@ -7497,7 +7497,7 @@
         </p:nvSpPr>
         <p:spPr>
           <a:xfrm>
-            <a:off x="5131008" y="4400550"/>
+            <a:off x="5252357" y="4400550"/>
             <a:ext cx="0" cy="1333500"/>
           </a:xfrm>
           <a:prstGeom prst="line">
@@ -7563,7 +7563,7 @@
         <p:spPr>
           <a:xfrm>
             <a:off x="2476500" y="4438650"/>
-            <a:ext cx="212361" cy="123825"/>
+            <a:ext cx="76200" cy="123825"/>
           </a:xfrm>
           <a:prstGeom prst="rect">
             <a:avLst/>
@@ -7582,7 +7582,7 @@
         </p:nvSpPr>
         <p:spPr>
           <a:xfrm>
-            <a:off x="2765061" y="4429125"/>
+            <a:off x="2571206" y="4429125"/>
             <a:ext cx="571500" cy="167164"/>
           </a:xfrm>
           <a:prstGeom prst="rect">
@@ -7610,7 +7610,7 @@
                 <a:ea typeface="Consolas" pitchFamily="34" charset="-122"/>
                 <a:cs typeface="Consolas" pitchFamily="34" charset="-120"/>
               </a:rPr>
-              <a:t>1.312</a:t>
+              <a:t>1.301</a:t>
             </a:r>
             <a:endParaRPr lang="en-US" sz="1013" dirty="0"/>
           </a:p>
@@ -7667,7 +7667,7 @@
         <p:spPr>
           <a:xfrm>
             <a:off x="2476500" y="4629150"/>
-            <a:ext cx="495508" cy="123825"/>
+            <a:ext cx="92529" cy="123825"/>
           </a:xfrm>
           <a:prstGeom prst="rect">
             <a:avLst/>
@@ -7686,7 +7686,7 @@
         </p:nvSpPr>
         <p:spPr>
           <a:xfrm>
-            <a:off x="3048208" y="4619625"/>
+            <a:off x="2645229" y="4619625"/>
             <a:ext cx="571500" cy="154781"/>
           </a:xfrm>
           <a:prstGeom prst="rect">
@@ -7714,7 +7714,7 @@
                 <a:ea typeface="Consolas" pitchFamily="34" charset="-122"/>
                 <a:cs typeface="Consolas" pitchFamily="34" charset="-120"/>
               </a:rPr>
-              <a:t>1.328</a:t>
+              <a:t>1.305</a:t>
             </a:r>
             <a:endParaRPr lang="en-US" sz="938" dirty="0"/>
           </a:p>
@@ -7771,7 +7771,7 @@
         <p:spPr>
           <a:xfrm>
             <a:off x="2476500" y="4819650"/>
-            <a:ext cx="583992" cy="123825"/>
+            <a:ext cx="185057" cy="123825"/>
           </a:xfrm>
           <a:prstGeom prst="rect">
             <a:avLst/>
@@ -7790,7 +7790,7 @@
         </p:nvSpPr>
         <p:spPr>
           <a:xfrm>
-            <a:off x="3136692" y="4810125"/>
+            <a:off x="2737757" y="4810125"/>
             <a:ext cx="571500" cy="154781"/>
           </a:xfrm>
           <a:prstGeom prst="rect">
@@ -7818,7 +7818,7 @@
                 <a:ea typeface="Consolas" pitchFamily="34" charset="-122"/>
                 <a:cs typeface="Consolas" pitchFamily="34" charset="-120"/>
               </a:rPr>
-              <a:t>1.333</a:t>
+              <a:t>1.310</a:t>
             </a:r>
             <a:endParaRPr lang="en-US" sz="938" dirty="0"/>
           </a:p>
@@ -7875,7 +7875,7 @@
         <p:spPr>
           <a:xfrm>
             <a:off x="2476500" y="5010150"/>
-            <a:ext cx="867139" cy="123825"/>
+            <a:ext cx="407126" cy="123825"/>
           </a:xfrm>
           <a:prstGeom prst="rect">
             <a:avLst/>
@@ -7894,7 +7894,7 @@
         </p:nvSpPr>
         <p:spPr>
           <a:xfrm>
-            <a:off x="3419839" y="5000625"/>
+            <a:off x="2959826" y="5000625"/>
             <a:ext cx="571500" cy="154781"/>
           </a:xfrm>
           <a:prstGeom prst="rect">
@@ -7922,7 +7922,7 @@
                 <a:ea typeface="Consolas" pitchFamily="34" charset="-122"/>
                 <a:cs typeface="Consolas" pitchFamily="34" charset="-120"/>
               </a:rPr>
-              <a:t>1.349</a:t>
+              <a:t>1.322</a:t>
             </a:r>
             <a:endParaRPr lang="en-US" sz="938" dirty="0"/>
           </a:p>
@@ -7979,7 +7979,7 @@
         <p:spPr>
           <a:xfrm>
             <a:off x="2476500" y="5200650"/>
-            <a:ext cx="1751975" cy="123825"/>
+            <a:ext cx="1202871" cy="123825"/>
           </a:xfrm>
           <a:prstGeom prst="rect">
             <a:avLst/>
@@ -7998,7 +7998,7 @@
         </p:nvSpPr>
         <p:spPr>
           <a:xfrm>
-            <a:off x="4304675" y="5191125"/>
+            <a:off x="3755571" y="5191125"/>
             <a:ext cx="571500" cy="154781"/>
           </a:xfrm>
           <a:prstGeom prst="rect">
@@ -8026,7 +8026,7 @@
                 <a:ea typeface="Consolas" pitchFamily="34" charset="-122"/>
                 <a:cs typeface="Consolas" pitchFamily="34" charset="-120"/>
               </a:rPr>
-              <a:t>1.399</a:t>
+              <a:t>1.365</a:t>
             </a:r>
             <a:endParaRPr lang="en-US" sz="938" dirty="0"/>
           </a:p>
@@ -8083,7 +8083,7 @@
         <p:spPr>
           <a:xfrm>
             <a:off x="2476500" y="5391150"/>
-            <a:ext cx="2194393" cy="123825"/>
+            <a:ext cx="2202180" cy="123825"/>
           </a:xfrm>
           <a:prstGeom prst="rect">
             <a:avLst/>
@@ -8102,7 +8102,7 @@
         </p:nvSpPr>
         <p:spPr>
           <a:xfrm>
-            <a:off x="4747093" y="5381625"/>
+            <a:off x="4754880" y="5381625"/>
             <a:ext cx="571500" cy="154781"/>
           </a:xfrm>
           <a:prstGeom prst="rect">
@@ -8130,7 +8130,7 @@
                 <a:ea typeface="Consolas" pitchFamily="34" charset="-122"/>
                 <a:cs typeface="Consolas" pitchFamily="34" charset="-120"/>
               </a:rPr>
-              <a:t>1.424</a:t>
+              <a:t>1.419</a:t>
             </a:r>
             <a:endParaRPr lang="en-US" sz="938" dirty="0"/>
           </a:p>
@@ -8234,7 +8234,7 @@
                 <a:ea typeface="Consolas" pitchFamily="34" charset="-122"/>
                 <a:cs typeface="Consolas" pitchFamily="34" charset="-120"/>
               </a:rPr>
-              <a:t>1.483</a:t>
+              <a:t>1.475</a:t>
             </a:r>
             <a:endParaRPr lang="en-US" sz="938" dirty="0"/>
           </a:p>
@@ -8290,7 +8290,7 @@
         </p:nvSpPr>
         <p:spPr>
           <a:xfrm>
-            <a:off x="3132736" y="5791200"/>
+            <a:off x="3173186" y="5791200"/>
             <a:ext cx="457200" cy="117634"/>
           </a:xfrm>
           <a:prstGeom prst="rect">
@@ -8332,7 +8332,7 @@
         </p:nvSpPr>
         <p:spPr>
           <a:xfrm>
-            <a:off x="4017572" y="5791200"/>
+            <a:off x="4098471" y="5791200"/>
             <a:ext cx="457200" cy="117634"/>
           </a:xfrm>
           <a:prstGeom prst="rect">
@@ -8374,7 +8374,7 @@
         </p:nvSpPr>
         <p:spPr>
           <a:xfrm>
-            <a:off x="4902408" y="5791200"/>
+            <a:off x="5023757" y="5791200"/>
             <a:ext cx="457200" cy="117634"/>
           </a:xfrm>
           <a:prstGeom prst="rect">
@@ -8866,8 +8866,8 @@
         </p:nvSpPr>
         <p:spPr>
           <a:xfrm>
-            <a:off x="7848600" y="3372803"/>
-            <a:ext cx="1130300" cy="238125"/>
+            <a:off x="7848600" y="3374708"/>
+            <a:ext cx="1130300" cy="236220"/>
           </a:xfrm>
           <a:prstGeom prst="line">
             <a:avLst/>
@@ -8890,7 +8890,7 @@
         <p:spPr>
           <a:xfrm>
             <a:off x="8978900" y="3610928"/>
-            <a:ext cx="1130300" cy="157163"/>
+            <a:ext cx="1130300" cy="159067"/>
           </a:xfrm>
           <a:prstGeom prst="line">
             <a:avLst/>
@@ -8912,8 +8912,8 @@
         </p:nvSpPr>
         <p:spPr>
           <a:xfrm>
-            <a:off x="10109200" y="3768090"/>
-            <a:ext cx="1130300" cy="563880"/>
+            <a:off x="10109200" y="3769995"/>
+            <a:ext cx="1130300" cy="555308"/>
           </a:xfrm>
           <a:prstGeom prst="line">
             <a:avLst/>
@@ -8935,8 +8935,8 @@
         </p:nvSpPr>
         <p:spPr>
           <a:xfrm>
-            <a:off x="7848600" y="3380423"/>
-            <a:ext cx="1130300" cy="228600"/>
+            <a:off x="7848600" y="3381375"/>
+            <a:ext cx="1130300" cy="227647"/>
           </a:xfrm>
           <a:prstGeom prst="line">
             <a:avLst/>
@@ -8959,7 +8959,7 @@
         <p:spPr>
           <a:xfrm>
             <a:off x="8978900" y="3609023"/>
-            <a:ext cx="1130300" cy="171450"/>
+            <a:ext cx="1130300" cy="172403"/>
           </a:xfrm>
           <a:prstGeom prst="line">
             <a:avLst/>
@@ -8981,8 +8981,8 @@
         </p:nvSpPr>
         <p:spPr>
           <a:xfrm>
-            <a:off x="10109200" y="3780472"/>
-            <a:ext cx="1130300" cy="550545"/>
+            <a:off x="10109200" y="3781425"/>
+            <a:ext cx="1130300" cy="541972"/>
           </a:xfrm>
           <a:prstGeom prst="line">
             <a:avLst/>
@@ -9004,8 +9004,8 @@
         </p:nvSpPr>
         <p:spPr>
           <a:xfrm>
-            <a:off x="7848600" y="3378518"/>
-            <a:ext cx="1130300" cy="253365"/>
+            <a:off x="7848600" y="3380423"/>
+            <a:ext cx="1130300" cy="251460"/>
           </a:xfrm>
           <a:prstGeom prst="line">
             <a:avLst/>
@@ -9028,7 +9028,7 @@
         <p:spPr>
           <a:xfrm>
             <a:off x="8978900" y="3631883"/>
-            <a:ext cx="1130300" cy="168592"/>
+            <a:ext cx="1130300" cy="169545"/>
           </a:xfrm>
           <a:prstGeom prst="line">
             <a:avLst/>
@@ -9050,8 +9050,8 @@
         </p:nvSpPr>
         <p:spPr>
           <a:xfrm>
-            <a:off x="10109200" y="3800475"/>
-            <a:ext cx="1130300" cy="526733"/>
+            <a:off x="10109200" y="3801428"/>
+            <a:ext cx="1130300" cy="495300"/>
           </a:xfrm>
           <a:prstGeom prst="line">
             <a:avLst/>
@@ -9073,8 +9073,8 @@
         </p:nvSpPr>
         <p:spPr>
           <a:xfrm>
-            <a:off x="7848600" y="3370897"/>
-            <a:ext cx="1130300" cy="240030"/>
+            <a:off x="7848600" y="3371850"/>
+            <a:ext cx="1130300" cy="239078"/>
           </a:xfrm>
           <a:prstGeom prst="line">
             <a:avLst/>
@@ -9097,7 +9097,7 @@
         <p:spPr>
           <a:xfrm>
             <a:off x="8978900" y="3610928"/>
-            <a:ext cx="1130300" cy="153352"/>
+            <a:ext cx="1130300" cy="156210"/>
           </a:xfrm>
           <a:prstGeom prst="line">
             <a:avLst/>
@@ -9119,8 +9119,8 @@
         </p:nvSpPr>
         <p:spPr>
           <a:xfrm>
-            <a:off x="10109200" y="3764280"/>
-            <a:ext cx="1130300" cy="565785"/>
+            <a:off x="10109200" y="3767138"/>
+            <a:ext cx="1130300" cy="557213"/>
           </a:xfrm>
           <a:prstGeom prst="line">
             <a:avLst/>
@@ -9142,8 +9142,8 @@
         </p:nvSpPr>
         <p:spPr>
           <a:xfrm>
-            <a:off x="7848600" y="3381375"/>
-            <a:ext cx="1130300" cy="221933"/>
+            <a:off x="7848600" y="3383280"/>
+            <a:ext cx="1130300" cy="220028"/>
           </a:xfrm>
           <a:prstGeom prst="line">
             <a:avLst/>
@@ -9166,7 +9166,7 @@
         <p:spPr>
           <a:xfrm>
             <a:off x="8978900" y="3603308"/>
-            <a:ext cx="1130300" cy="161925"/>
+            <a:ext cx="1130300" cy="165735"/>
           </a:xfrm>
           <a:prstGeom prst="line">
             <a:avLst/>
@@ -9188,8 +9188,8 @@
         </p:nvSpPr>
         <p:spPr>
           <a:xfrm>
-            <a:off x="10109200" y="3765233"/>
-            <a:ext cx="1130300" cy="557213"/>
+            <a:off x="10109200" y="3769043"/>
+            <a:ext cx="1130300" cy="544830"/>
           </a:xfrm>
           <a:prstGeom prst="line">
             <a:avLst/>
@@ -9211,8 +9211,8 @@
         </p:nvSpPr>
         <p:spPr>
           <a:xfrm>
-            <a:off x="10109200" y="3726180"/>
-            <a:ext cx="0" cy="112395"/>
+            <a:off x="10109200" y="3729038"/>
+            <a:ext cx="0" cy="110490"/>
           </a:xfrm>
           <a:prstGeom prst="line">
             <a:avLst/>
@@ -9234,7 +9234,7 @@
         </p:nvSpPr>
         <p:spPr>
           <a:xfrm>
-            <a:off x="10052050" y="3726180"/>
+            <a:off x="10052050" y="3729038"/>
             <a:ext cx="114300" cy="0"/>
           </a:xfrm>
           <a:prstGeom prst="line">
@@ -9257,7 +9257,7 @@
         </p:nvSpPr>
         <p:spPr>
           <a:xfrm>
-            <a:off x="10052050" y="3838575"/>
+            <a:off x="10052050" y="3839528"/>
             <a:ext cx="114300" cy="0"/>
           </a:xfrm>
           <a:prstGeom prst="line">
@@ -9280,7 +9280,7 @@
         </p:nvSpPr>
         <p:spPr>
           <a:xfrm>
-            <a:off x="10204450" y="3706178"/>
+            <a:off x="10204450" y="3708083"/>
             <a:ext cx="1238250" cy="130016"/>
           </a:xfrm>
           <a:prstGeom prst="rect">
@@ -9308,7 +9308,7 @@
                 <a:ea typeface="Malgun Gothic" pitchFamily="34" charset="-122"/>
                 <a:cs typeface="Malgun Gothic" pitchFamily="34" charset="-120"/>
               </a:rPr>
-              <a:t>여기서 0.38 갈림</a:t>
+              <a:t>여기서 0.36 갈림</a:t>
             </a:r>
             <a:endParaRPr lang="en-US" sz="788" dirty="0"/>
           </a:p>
@@ -9350,7 +9350,7 @@
                 <a:ea typeface="Malgun Gothic" pitchFamily="34" charset="-122"/>
                 <a:cs typeface="Malgun Gothic" pitchFamily="34" charset="-120"/>
               </a:rPr>
-              <a:t>가장 좁은 곳 0.10</a:t>
+              <a:t>가장 좁은 곳 0.12</a:t>
             </a:r>
             <a:endParaRPr lang="en-US" sz="788" dirty="0"/>
           </a:p>
@@ -9451,7 +9451,7 @@
                 <a:ea typeface="Malgun Gothic" pitchFamily="34" charset="-122"/>
                 <a:cs typeface="Malgun Gothic" pitchFamily="34" charset="-120"/>
               </a:rPr>
-              <a:t>0℃ 와 30℃ 는 어느 방식이나 거의 같고, 20℃ 부근에서 벌어집니다. 눈으로는 고를 수 없습니다.</a:t>
+              <a:t>가장 좁은 곳은 0℃ 로 0.12 차이뿐이고, 20℃ 에서 0.36 까지 벌어집니다. 눈으로는 고를 수 없습니다.</a:t>
             </a:r>
             <a:endParaRPr lang="en-US" sz="1125" dirty="0"/>
           </a:p>
@@ -11090,7 +11090,7 @@
                 <a:ea typeface="Consolas" pitchFamily="34" charset="-122"/>
                 <a:cs typeface="Consolas" pitchFamily="34" charset="-120"/>
               </a:rPr>
-              <a:t>온도 구간별 데이터 현황  ·  누적 36회차</a:t>
+              <a:t>온도 구간별 데이터 현황  ·  누적 40회차</a:t>
             </a:r>
             <a:endParaRPr lang="en-US" sz="788" dirty="0"/>
           </a:p>
@@ -11192,7 +11192,7 @@
         <p:spPr>
           <a:xfrm>
             <a:off x="8001000" y="3276600"/>
-            <a:ext cx="228600" cy="95250"/>
+            <a:ext cx="167640" cy="95250"/>
           </a:xfrm>
           <a:prstGeom prst="rect">
             <a:avLst/>
@@ -11358,7 +11358,7 @@
         <p:spPr>
           <a:xfrm>
             <a:off x="8001000" y="3581400"/>
-            <a:ext cx="800100" cy="95250"/>
+            <a:ext cx="586740" cy="95250"/>
           </a:xfrm>
           <a:prstGeom prst="rect">
             <a:avLst/>
@@ -11524,7 +11524,7 @@
         <p:spPr>
           <a:xfrm>
             <a:off x="8001000" y="3886200"/>
-            <a:ext cx="685800" cy="95250"/>
+            <a:ext cx="502920" cy="95250"/>
           </a:xfrm>
           <a:prstGeom prst="rect">
             <a:avLst/>
@@ -11690,7 +11690,7 @@
         <p:spPr>
           <a:xfrm>
             <a:off x="8001000" y="4191000"/>
-            <a:ext cx="342900" cy="95250"/>
+            <a:ext cx="251460" cy="95250"/>
           </a:xfrm>
           <a:prstGeom prst="rect">
             <a:avLst/>
@@ -11856,7 +11856,7 @@
         <p:spPr>
           <a:xfrm>
             <a:off x="8001000" y="4495800"/>
-            <a:ext cx="114300" cy="95250"/>
+            <a:ext cx="83820" cy="95250"/>
           </a:xfrm>
           <a:prstGeom prst="rect">
             <a:avLst/>
@@ -12022,7 +12022,7 @@
         <p:spPr>
           <a:xfrm>
             <a:off x="8001000" y="4800600"/>
-            <a:ext cx="685800" cy="95250"/>
+            <a:ext cx="502920" cy="95250"/>
           </a:xfrm>
           <a:prstGeom prst="rect">
             <a:avLst/>
@@ -12235,7 +12235,7 @@
                 <a:ea typeface="Consolas" pitchFamily="34" charset="-122"/>
                 <a:cs typeface="Consolas" pitchFamily="34" charset="-120"/>
               </a:rPr>
-              <a:t>11건</a:t>
+              <a:t>15건</a:t>
             </a:r>
             <a:endParaRPr lang="en-US" sz="938" dirty="0"/>
           </a:p>
@@ -14741,7 +14741,7 @@
                 <a:ea typeface="Malgun Gothic" pitchFamily="34" charset="-122"/>
                 <a:cs typeface="Malgun Gothic" pitchFamily="34" charset="-120"/>
               </a:rPr>
-              <a:t>같은 36회차를 </a:t>
+              <a:t>같은 40회차를 </a:t>
             </a:r>
             <a:pPr algn="l" indent="0" marL="0">
               <a:lnSpc>
@@ -14775,7 +14775,7 @@
                 <a:ea typeface="Malgun Gothic" pitchFamily="34" charset="-122"/>
                 <a:cs typeface="Malgun Gothic" pitchFamily="34" charset="-120"/>
               </a:rPr>
-              <a:t> 해 종전과 나란히 놓았습니다. 그리고 시운전 5회차에서 다시 확인했습니다.</a:t>
+              <a:t> 해 종전과 나란히 놓았습니다. 그리고 시운전 9회차에서 다시 확인했습니다.</a:t>
             </a:r>
             <a:endParaRPr lang="en-US" sz="1350" dirty="0"/>
           </a:p>
@@ -14837,7 +14837,7 @@
                 <a:ea typeface="Consolas" pitchFamily="34" charset="-122"/>
                 <a:cs typeface="Consolas" pitchFamily="34" charset="-120"/>
               </a:rPr>
-              <a:t>종전 대비  ·  누적 36회차를 한 건씩 가려 채점</a:t>
+              <a:t>종전 대비  ·  누적 40회차를 한 건씩 가려 채점</a:t>
             </a:r>
             <a:endParaRPr lang="en-US" sz="788" dirty="0"/>
           </a:p>
@@ -15137,7 +15137,7 @@
                 <a:ea typeface="Consolas" pitchFamily="34" charset="-122"/>
                 <a:cs typeface="Consolas" pitchFamily="34" charset="-120"/>
               </a:rPr>
-              <a:t>3.83</a:t>
+              <a:t>3.80</a:t>
             </a:r>
             <a:endParaRPr lang="en-US" sz="1125" dirty="0"/>
           </a:p>
@@ -15370,7 +15370,7 @@
                 <a:ea typeface="Consolas" pitchFamily="34" charset="-122"/>
                 <a:cs typeface="Consolas" pitchFamily="34" charset="-120"/>
               </a:rPr>
-              <a:t>4.49</a:t>
+              <a:t>4.44</a:t>
             </a:r>
             <a:endParaRPr lang="en-US" sz="1125" dirty="0"/>
           </a:p>
@@ -15454,7 +15454,7 @@
                 <a:ea typeface="Consolas" pitchFamily="34" charset="-122"/>
                 <a:cs typeface="Consolas" pitchFamily="34" charset="-120"/>
               </a:rPr>
-              <a:t>1.72</a:t>
+              <a:t>1.68</a:t>
             </a:r>
             <a:endParaRPr lang="en-US" sz="1275" dirty="0"/>
           </a:p>
@@ -15836,7 +15836,7 @@
                 <a:ea typeface="Consolas" pitchFamily="34" charset="-122"/>
                 <a:cs typeface="Consolas" pitchFamily="34" charset="-120"/>
               </a:rPr>
-              <a:t>14</a:t>
+              <a:t>15</a:t>
             </a:r>
             <a:endParaRPr lang="en-US" sz="1125" dirty="0"/>
           </a:p>
@@ -15920,7 +15920,7 @@
                 <a:ea typeface="Consolas" pitchFamily="34" charset="-122"/>
                 <a:cs typeface="Consolas" pitchFamily="34" charset="-120"/>
               </a:rPr>
-              <a:t>3</a:t>
+              <a:t>4</a:t>
             </a:r>
             <a:endParaRPr lang="en-US" sz="1275" dirty="0"/>
           </a:p>
@@ -15962,7 +15962,7 @@
                 <a:ea typeface="Consolas" pitchFamily="34" charset="-122"/>
                 <a:cs typeface="Consolas" pitchFamily="34" charset="-120"/>
               </a:rPr>
-              <a:t>79% ↓</a:t>
+              <a:t>73% ↓</a:t>
             </a:r>
             <a:endParaRPr lang="en-US" sz="1013" dirty="0"/>
           </a:p>
@@ -16069,7 +16069,7 @@
                 <a:ea typeface="Consolas" pitchFamily="34" charset="-122"/>
                 <a:cs typeface="Consolas" pitchFamily="34" charset="-120"/>
               </a:rPr>
-              <a:t>65.4</a:t>
+              <a:t>69.5</a:t>
             </a:r>
             <a:endParaRPr lang="en-US" sz="1125" dirty="0"/>
           </a:p>
@@ -16153,7 +16153,7 @@
                 <a:ea typeface="Consolas" pitchFamily="34" charset="-122"/>
                 <a:cs typeface="Consolas" pitchFamily="34" charset="-120"/>
               </a:rPr>
-              <a:t>7.6</a:t>
+              <a:t>9.3</a:t>
             </a:r>
             <a:endParaRPr lang="en-US" sz="1275" dirty="0"/>
           </a:p>
@@ -16195,7 +16195,7 @@
                 <a:ea typeface="Consolas" pitchFamily="34" charset="-122"/>
                 <a:cs typeface="Consolas" pitchFamily="34" charset="-120"/>
               </a:rPr>
-              <a:t>88% ↓</a:t>
+              <a:t>87% ↓</a:t>
             </a:r>
             <a:endParaRPr lang="en-US" sz="1013" dirty="0"/>
           </a:p>
@@ -16333,7 +16333,7 @@
                 <a:ea typeface="Consolas" pitchFamily="34" charset="-122"/>
                 <a:cs typeface="Consolas" pitchFamily="34" charset="-120"/>
               </a:rPr>
-              <a:t>시운전 실측  ·  5회차  ·  26-04-15 ~ 26-07-29</a:t>
+              <a:t>시운전 실측  ·  9회차  ·  26-04-15 ~ 26-08-26</a:t>
             </a:r>
             <a:endParaRPr lang="en-US" sz="788" dirty="0"/>
           </a:p>
@@ -16415,7 +16415,7 @@
         <p:spPr>
           <a:xfrm>
             <a:off x="7886700" y="3409950"/>
-            <a:ext cx="710565" cy="240030"/>
+            <a:ext cx="823722" cy="240030"/>
           </a:xfrm>
           <a:prstGeom prst="rect">
             <a:avLst/>
@@ -16442,7 +16442,7 @@
                 <a:ea typeface="Consolas" pitchFamily="34" charset="-122"/>
                 <a:cs typeface="Consolas" pitchFamily="34" charset="-120"/>
               </a:rPr>
-              <a:t>+0.24</a:t>
+              <a:t>−0.04</a:t>
             </a:r>
             <a:endParaRPr lang="en-US" sz="1800" dirty="0"/>
           </a:p>
@@ -16456,7 +16456,7 @@
         </p:nvSpPr>
         <p:spPr>
           <a:xfrm>
-            <a:off x="8654415" y="3524250"/>
+            <a:off x="8767572" y="3524250"/>
             <a:ext cx="400050" cy="148590"/>
           </a:xfrm>
           <a:prstGeom prst="rect">
@@ -16568,7 +16568,7 @@
                 <a:ea typeface="Consolas" pitchFamily="34" charset="-122"/>
                 <a:cs typeface="Consolas" pitchFamily="34" charset="-120"/>
               </a:rPr>
-              <a:t>1.21</a:t>
+              <a:t>1.23</a:t>
             </a:r>
             <a:endParaRPr lang="en-US" sz="1800" dirty="0"/>
           </a:p>
@@ -16694,7 +16694,7 @@
                 <a:ea typeface="Consolas" pitchFamily="34" charset="-122"/>
                 <a:cs typeface="Consolas" pitchFamily="34" charset="-120"/>
               </a:rPr>
-              <a:t>1.43</a:t>
+              <a:t>1.40</a:t>
             </a:r>
             <a:endParaRPr lang="en-US" sz="1800" dirty="0"/>
           </a:p>
@@ -16820,7 +16820,7 @@
                 <a:ea typeface="Consolas" pitchFamily="34" charset="-122"/>
                 <a:cs typeface="Consolas" pitchFamily="34" charset="-120"/>
               </a:rPr>
-              <a:t>92.0</a:t>
+              <a:t>91.0</a:t>
             </a:r>
             <a:endParaRPr lang="en-US" sz="1800" dirty="0"/>
           </a:p>
@@ -16963,7 +16963,7 @@
                 <a:ea typeface="Malgun Gothic" pitchFamily="34" charset="-122"/>
                 <a:cs typeface="Malgun Gothic" pitchFamily="34" charset="-120"/>
               </a:rPr>
-              <a:t>시운전 5회차는 학습에 넣지 않고 예측만 했습니다. 누적 36회차 채점과 비슷하게 나왔습니다.</a:t>
+              <a:t>시운전 9회차는 학습에 넣지 않고 예측만 했습니다. 누적 40회차 채점과 비슷하게 나왔습니다.</a:t>
             </a:r>
             <a:endParaRPr lang="en-US" sz="1125" dirty="0"/>
           </a:p>
@@ -22050,7 +22050,7 @@
                 <a:ea typeface="Consolas" pitchFamily="34" charset="-122"/>
                 <a:cs typeface="Consolas" pitchFamily="34" charset="-120"/>
               </a:rPr>
-              <a:t>3.83 → 1.29 MW</a:t>
+              <a:t>3.80 → 1.29 MW</a:t>
             </a:r>
             <a:endParaRPr lang="en-US" sz="1125" dirty="0"/>
           </a:p>
@@ -22134,7 +22134,7 @@
                 <a:ea typeface="Consolas" pitchFamily="34" charset="-122"/>
                 <a:cs typeface="Consolas" pitchFamily="34" charset="-120"/>
               </a:rPr>
-              <a:t>79%↓</a:t>
+              <a:t>73%↓</a:t>
             </a:r>
             <a:endParaRPr lang="en-US" sz="3300" dirty="0"/>
           </a:p>
@@ -22176,7 +22176,7 @@
                 <a:ea typeface="Consolas" pitchFamily="34" charset="-122"/>
                 <a:cs typeface="Consolas" pitchFamily="34" charset="-120"/>
               </a:rPr>
-              <a:t>14 → 3 건</a:t>
+              <a:t>15 → 4 건</a:t>
             </a:r>
             <a:endParaRPr lang="en-US" sz="1125" dirty="0"/>
           </a:p>
@@ -22260,7 +22260,7 @@
                 <a:ea typeface="Consolas" pitchFamily="34" charset="-122"/>
                 <a:cs typeface="Consolas" pitchFamily="34" charset="-120"/>
               </a:rPr>
-              <a:t>88%↓</a:t>
+              <a:t>87%↓</a:t>
             </a:r>
             <a:endParaRPr lang="en-US" sz="3300" dirty="0"/>
           </a:p>
@@ -22302,7 +22302,7 @@
                 <a:ea typeface="Consolas" pitchFamily="34" charset="-122"/>
                 <a:cs typeface="Consolas" pitchFamily="34" charset="-120"/>
               </a:rPr>
-              <a:t>65.4 → 7.6 MW</a:t>
+              <a:t>69.5 → 9.3 MW</a:t>
             </a:r>
             <a:endParaRPr lang="en-US" sz="1125" dirty="0"/>
           </a:p>
@@ -22455,7 +22455,7 @@
                 <a:ea typeface="Malgun Gothic" pitchFamily="34" charset="-122"/>
                 <a:cs typeface="Malgun Gothic" pitchFamily="34" charset="-120"/>
               </a:rPr>
-              <a:t>누적 36회차를 </a:t>
+              <a:t>누적 40회차를 </a:t>
             </a:r>
             <a:pPr algn="l" indent="0" marL="0">
               <a:lnSpc>
@@ -22489,7 +22489,7 @@
                 <a:ea typeface="Malgun Gothic" pitchFamily="34" charset="-122"/>
                 <a:cs typeface="Malgun Gothic" pitchFamily="34" charset="-120"/>
               </a:rPr>
-              <a:t> 맞혀본 결과입니다. 시운전 5회차에서 다시 확인했습니다.</a:t>
+              <a:t> 맞혀본 결과입니다. 시운전 9회차에서 다시 확인했습니다.</a:t>
             </a:r>
             <a:endParaRPr lang="en-US" sz="1125" dirty="0"/>
           </a:p>
@@ -24690,7 +24690,7 @@
                 <a:ea typeface="Consolas" pitchFamily="34" charset="-122"/>
                 <a:cs typeface="Consolas" pitchFamily="34" charset="-120"/>
               </a:rPr>
-              <a:t>← 3.83</a:t>
+              <a:t>← 3.80</a:t>
             </a:r>
             <a:endParaRPr lang="en-US" sz="1425" dirty="0"/>
           </a:p>
@@ -25011,7 +25011,7 @@
                 <a:ea typeface="Consolas" pitchFamily="34" charset="-122"/>
                 <a:cs typeface="Consolas" pitchFamily="34" charset="-120"/>
               </a:rPr>
-              <a:t>3</a:t>
+              <a:t>4</a:t>
             </a:r>
             <a:endParaRPr lang="en-US" sz="3150" dirty="0"/>
           </a:p>
@@ -25053,7 +25053,7 @@
                 <a:ea typeface="Consolas" pitchFamily="34" charset="-122"/>
                 <a:cs typeface="Consolas" pitchFamily="34" charset="-120"/>
               </a:rPr>
-              <a:t>← 14</a:t>
+              <a:t>← 15</a:t>
             </a:r>
             <a:endParaRPr lang="en-US" sz="1425" dirty="0"/>
           </a:p>
@@ -25168,7 +25168,7 @@
         </p:nvSpPr>
         <p:spPr>
           <a:xfrm>
-            <a:off x="5276850" y="4010025"/>
+            <a:off x="5438775" y="4010025"/>
             <a:ext cx="571500" cy="125016"/>
           </a:xfrm>
           <a:prstGeom prst="rect">
@@ -25276,7 +25276,7 @@
         <p:spPr>
           <a:xfrm>
             <a:off x="4562475" y="4162425"/>
-            <a:ext cx="657225" cy="76200"/>
+            <a:ext cx="819150" cy="76200"/>
           </a:xfrm>
           <a:prstGeom prst="rect">
             <a:avLst/>
@@ -25408,7 +25408,7 @@
                 <a:ea typeface="Consolas" pitchFamily="34" charset="-122"/>
                 <a:cs typeface="Consolas" pitchFamily="34" charset="-120"/>
               </a:rPr>
-              <a:t>7.6</a:t>
+              <a:t>9.3</a:t>
             </a:r>
             <a:endParaRPr lang="en-US" sz="3150" dirty="0"/>
           </a:p>
@@ -25450,7 +25450,7 @@
                 <a:ea typeface="Consolas" pitchFamily="34" charset="-122"/>
                 <a:cs typeface="Consolas" pitchFamily="34" charset="-120"/>
               </a:rPr>
-              <a:t>← 65.4</a:t>
+              <a:t>← 69.5</a:t>
             </a:r>
             <a:endParaRPr lang="en-US" sz="1425" dirty="0"/>
           </a:p>
@@ -25531,7 +25531,7 @@
         </p:nvSpPr>
         <p:spPr>
           <a:xfrm>
-            <a:off x="8734425" y="4010025"/>
+            <a:off x="8791575" y="4010025"/>
             <a:ext cx="571500" cy="125016"/>
           </a:xfrm>
           <a:prstGeom prst="rect">
@@ -25639,7 +25639,7 @@
         <p:spPr>
           <a:xfrm>
             <a:off x="8324850" y="4162425"/>
-            <a:ext cx="352425" cy="76200"/>
+            <a:ext cx="409575" cy="76200"/>
           </a:xfrm>
           <a:prstGeom prst="rect">
             <a:avLst/>
@@ -26707,7 +26707,7 @@
                 <a:ea typeface="Malgun Gothic" pitchFamily="34" charset="-122"/>
                 <a:cs typeface="Malgun Gothic" pitchFamily="34" charset="-120"/>
               </a:rPr>
-              <a:t>36회차 실적이 스스로 만들어 내는 값</a:t>
+              <a:t>40회차 실적이 스스로 만들어 내는 값</a:t>
             </a:r>
             <a:pPr algn="l" indent="0" marL="0">
               <a:lnSpc>
@@ -27880,7 +27880,7 @@
                 <a:ea typeface="Consolas" pitchFamily="34" charset="-122"/>
                 <a:cs typeface="Consolas" pitchFamily="34" charset="-120"/>
               </a:rPr>
-              <a:t>4.7</a:t>
+              <a:t>5.0</a:t>
             </a:r>
             <a:endParaRPr lang="en-US" sz="1950" dirty="0"/>
           </a:p>
@@ -27984,7 +27984,7 @@
                 <a:ea typeface="Consolas" pitchFamily="34" charset="-122"/>
                 <a:cs typeface="Consolas" pitchFamily="34" charset="-120"/>
               </a:rPr>
-              <a:t>종전 +2.84 vs 실제 +7.50</a:t>
+              <a:t>종전 +2.46 vs 실제 +7.48</a:t>
             </a:r>
             <a:endParaRPr lang="en-US" sz="863" dirty="0"/>
           </a:p>
@@ -28248,7 +28248,7 @@
                 <a:ea typeface="Consolas" pitchFamily="34" charset="-122"/>
                 <a:cs typeface="Consolas" pitchFamily="34" charset="-120"/>
               </a:rPr>
-              <a:t>14</a:t>
+              <a:t>15</a:t>
             </a:r>
             <a:endParaRPr lang="en-US" sz="1950" dirty="0"/>
           </a:p>
@@ -28352,7 +28352,7 @@
                 <a:ea typeface="Consolas" pitchFamily="34" charset="-122"/>
                 <a:cs typeface="Consolas" pitchFamily="34" charset="-120"/>
               </a:rPr>
-              <a:t>누적 36회차 가운데</a:t>
+              <a:t>누적 40회차 가운데</a:t>
             </a:r>
             <a:endParaRPr lang="en-US" sz="863" dirty="0"/>
           </a:p>
@@ -31841,7 +31841,7 @@
                 <a:ea typeface="Malgun Gothic" pitchFamily="34" charset="-122"/>
                 <a:cs typeface="Malgun Gothic" pitchFamily="34" charset="-120"/>
               </a:rPr>
-              <a:t>36회차의 실제 보정값을 온도 축에 찍었습니다. 값이 흩어진 것이 아닙니다. </a:t>
+              <a:t>40회차의 실제 보정값을 온도 축에 찍었습니다. 값이 흩어진 것이 아닙니다. </a:t>
             </a:r>
             <a:pPr algn="l" indent="0" marL="0">
               <a:lnSpc>
@@ -31942,7 +31942,7 @@
                 <a:ea typeface="Consolas" pitchFamily="34" charset="-122"/>
                 <a:cs typeface="Consolas" pitchFamily="34" charset="-120"/>
               </a:rPr>
-              <a:t>회차별 실제 보정값  ·  누적 36회차  ·  가로 외기온도 ℃ / 세로 MW</a:t>
+              <a:t>회차별 실제 보정값  ·  누적 40회차  ·  가로 외기온도 ℃ / 세로 MW</a:t>
             </a:r>
             <a:endParaRPr lang="en-US" sz="788" dirty="0"/>
           </a:p>
@@ -32564,7 +32564,7 @@
         </p:nvSpPr>
         <p:spPr>
           <a:xfrm>
-            <a:off x="1162050" y="4365798"/>
+            <a:off x="1162050" y="4407860"/>
             <a:ext cx="6610350" cy="0"/>
           </a:xfrm>
           <a:prstGeom prst="line">
@@ -32587,7 +32587,7 @@
         </p:nvSpPr>
         <p:spPr>
           <a:xfrm>
-            <a:off x="5905500" y="4156248"/>
+            <a:off x="5905500" y="4198310"/>
             <a:ext cx="1866900" cy="142399"/>
           </a:xfrm>
           <a:prstGeom prst="rect">
@@ -32615,7 +32615,7 @@
                 <a:ea typeface="Consolas" pitchFamily="34" charset="-122"/>
                 <a:cs typeface="Consolas" pitchFamily="34" charset="-120"/>
               </a:rPr>
-              <a:t>종전 · 하나의 값 +2.84</a:t>
+              <a:t>종전 · 하나의 값 +2.46</a:t>
             </a:r>
             <a:endParaRPr lang="en-US" sz="863" dirty="0"/>
           </a:p>
@@ -32669,7 +32669,27 @@
         </p:nvSpPr>
         <p:spPr>
           <a:xfrm>
-            <a:off x="1788800" y="3680417"/>
+            <a:off x="1775465" y="3667082"/>
+            <a:ext cx="95250" cy="95250"/>
+          </a:xfrm>
+          <a:prstGeom prst="ellipse">
+            <a:avLst/>
+          </a:prstGeom>
+          <a:solidFill>
+            <a:srgbClr val="FF4D63"/>
+          </a:solidFill>
+          <a:ln/>
+        </p:spPr>
+      </p:sp>
+      <p:sp>
+        <p:nvSpPr>
+          <p:cNvPr id="39" name="Shape 37"/>
+          <p:cNvSpPr/>
+          <p:nvPr/>
+        </p:nvSpPr>
+        <p:spPr>
+          <a:xfrm>
+            <a:off x="2127795" y="4016697"/>
             <a:ext cx="68580" cy="68580"/>
           </a:xfrm>
           <a:prstGeom prst="ellipse">
@@ -32683,13 +32703,13 @@
       </p:sp>
       <p:sp>
         <p:nvSpPr>
-          <p:cNvPr id="39" name="Shape 37"/>
-          <p:cNvSpPr/>
-          <p:nvPr/>
-        </p:nvSpPr>
-        <p:spPr>
-          <a:xfrm>
-            <a:off x="2127795" y="4016697"/>
+          <p:cNvPr id="40" name="Shape 38"/>
+          <p:cNvSpPr/>
+          <p:nvPr/>
+        </p:nvSpPr>
+        <p:spPr>
+          <a:xfrm>
+            <a:off x="2483739" y="4047258"/>
             <a:ext cx="68580" cy="68580"/>
           </a:xfrm>
           <a:prstGeom prst="ellipse">
@@ -32703,13 +32723,13 @@
       </p:sp>
       <p:sp>
         <p:nvSpPr>
-          <p:cNvPr id="40" name="Shape 38"/>
-          <p:cNvSpPr/>
-          <p:nvPr/>
-        </p:nvSpPr>
-        <p:spPr>
-          <a:xfrm>
-            <a:off x="2483739" y="4047258"/>
+          <p:cNvPr id="41" name="Shape 39"/>
+          <p:cNvSpPr/>
+          <p:nvPr/>
+        </p:nvSpPr>
+        <p:spPr>
+          <a:xfrm>
+            <a:off x="2653236" y="4097317"/>
             <a:ext cx="68580" cy="68580"/>
           </a:xfrm>
           <a:prstGeom prst="ellipse">
@@ -32723,13 +32743,13 @@
       </p:sp>
       <p:sp>
         <p:nvSpPr>
-          <p:cNvPr id="41" name="Shape 39"/>
-          <p:cNvSpPr/>
-          <p:nvPr/>
-        </p:nvSpPr>
-        <p:spPr>
-          <a:xfrm>
-            <a:off x="2653236" y="4097317"/>
+          <p:cNvPr id="42" name="Shape 40"/>
+          <p:cNvSpPr/>
+          <p:nvPr/>
+        </p:nvSpPr>
+        <p:spPr>
+          <a:xfrm>
+            <a:off x="2822734" y="4143761"/>
             <a:ext cx="68580" cy="68580"/>
           </a:xfrm>
           <a:prstGeom prst="ellipse">
@@ -32743,13 +32763,13 @@
       </p:sp>
       <p:sp>
         <p:nvSpPr>
-          <p:cNvPr id="42" name="Shape 40"/>
-          <p:cNvSpPr/>
-          <p:nvPr/>
-        </p:nvSpPr>
-        <p:spPr>
-          <a:xfrm>
-            <a:off x="2822734" y="4143761"/>
+          <p:cNvPr id="43" name="Shape 41"/>
+          <p:cNvSpPr/>
+          <p:nvPr/>
+        </p:nvSpPr>
+        <p:spPr>
+          <a:xfrm>
+            <a:off x="2975281" y="3959081"/>
             <a:ext cx="68580" cy="68580"/>
           </a:xfrm>
           <a:prstGeom prst="ellipse">
@@ -32763,13 +32783,13 @@
       </p:sp>
       <p:sp>
         <p:nvSpPr>
-          <p:cNvPr id="43" name="Shape 41"/>
-          <p:cNvSpPr/>
-          <p:nvPr/>
-        </p:nvSpPr>
-        <p:spPr>
-          <a:xfrm>
-            <a:off x="2975281" y="3959081"/>
+          <p:cNvPr id="44" name="Shape 42"/>
+          <p:cNvSpPr/>
+          <p:nvPr/>
+        </p:nvSpPr>
+        <p:spPr>
+          <a:xfrm>
+            <a:off x="3076980" y="4241906"/>
             <a:ext cx="68580" cy="68580"/>
           </a:xfrm>
           <a:prstGeom prst="ellipse">
@@ -32783,13 +32803,13 @@
       </p:sp>
       <p:sp>
         <p:nvSpPr>
-          <p:cNvPr id="44" name="Shape 42"/>
-          <p:cNvSpPr/>
-          <p:nvPr/>
-        </p:nvSpPr>
-        <p:spPr>
-          <a:xfrm>
-            <a:off x="3076980" y="4241906"/>
+          <p:cNvPr id="45" name="Shape 43"/>
+          <p:cNvSpPr/>
+          <p:nvPr/>
+        </p:nvSpPr>
+        <p:spPr>
+          <a:xfrm>
+            <a:off x="3365125" y="4079024"/>
             <a:ext cx="68580" cy="68580"/>
           </a:xfrm>
           <a:prstGeom prst="ellipse">
@@ -32803,13 +32823,13 @@
       </p:sp>
       <p:sp>
         <p:nvSpPr>
-          <p:cNvPr id="45" name="Shape 43"/>
-          <p:cNvSpPr/>
-          <p:nvPr/>
-        </p:nvSpPr>
-        <p:spPr>
-          <a:xfrm>
-            <a:off x="3365125" y="4079024"/>
+          <p:cNvPr id="46" name="Shape 44"/>
+          <p:cNvSpPr/>
+          <p:nvPr/>
+        </p:nvSpPr>
+        <p:spPr>
+          <a:xfrm>
+            <a:off x="3619371" y="4112981"/>
             <a:ext cx="68580" cy="68580"/>
           </a:xfrm>
           <a:prstGeom prst="ellipse">
@@ -32823,13 +32843,13 @@
       </p:sp>
       <p:sp>
         <p:nvSpPr>
-          <p:cNvPr id="46" name="Shape 44"/>
-          <p:cNvSpPr/>
-          <p:nvPr/>
-        </p:nvSpPr>
-        <p:spPr>
-          <a:xfrm>
-            <a:off x="3619371" y="4112981"/>
+          <p:cNvPr id="47" name="Shape 45"/>
+          <p:cNvSpPr/>
+          <p:nvPr/>
+        </p:nvSpPr>
+        <p:spPr>
+          <a:xfrm>
+            <a:off x="3670221" y="3884047"/>
             <a:ext cx="68580" cy="68580"/>
           </a:xfrm>
           <a:prstGeom prst="ellipse">
@@ -32843,13 +32863,13 @@
       </p:sp>
       <p:sp>
         <p:nvSpPr>
-          <p:cNvPr id="47" name="Shape 45"/>
-          <p:cNvSpPr/>
-          <p:nvPr/>
-        </p:nvSpPr>
-        <p:spPr>
-          <a:xfrm>
-            <a:off x="3670221" y="3884047"/>
+          <p:cNvPr id="48" name="Shape 46"/>
+          <p:cNvSpPr/>
+          <p:nvPr/>
+        </p:nvSpPr>
+        <p:spPr>
+          <a:xfrm>
+            <a:off x="3721070" y="3932792"/>
             <a:ext cx="68580" cy="68580"/>
           </a:xfrm>
           <a:prstGeom prst="ellipse">
@@ -32863,13 +32883,13 @@
       </p:sp>
       <p:sp>
         <p:nvSpPr>
-          <p:cNvPr id="48" name="Shape 46"/>
-          <p:cNvSpPr/>
-          <p:nvPr/>
-        </p:nvSpPr>
-        <p:spPr>
-          <a:xfrm>
-            <a:off x="3721070" y="3932792"/>
+          <p:cNvPr id="49" name="Shape 47"/>
+          <p:cNvSpPr/>
+          <p:nvPr/>
+        </p:nvSpPr>
+        <p:spPr>
+          <a:xfrm>
+            <a:off x="3907517" y="3837275"/>
             <a:ext cx="68580" cy="68580"/>
           </a:xfrm>
           <a:prstGeom prst="ellipse">
@@ -32883,13 +32903,13 @@
       </p:sp>
       <p:sp>
         <p:nvSpPr>
-          <p:cNvPr id="49" name="Shape 47"/>
-          <p:cNvSpPr/>
-          <p:nvPr/>
-        </p:nvSpPr>
-        <p:spPr>
-          <a:xfrm>
-            <a:off x="3907517" y="3837275"/>
+          <p:cNvPr id="50" name="Shape 48"/>
+          <p:cNvSpPr/>
+          <p:nvPr/>
+        </p:nvSpPr>
+        <p:spPr>
+          <a:xfrm>
+            <a:off x="3924467" y="3984055"/>
             <a:ext cx="68580" cy="68580"/>
           </a:xfrm>
           <a:prstGeom prst="ellipse">
@@ -32903,13 +32923,13 @@
       </p:sp>
       <p:sp>
         <p:nvSpPr>
-          <p:cNvPr id="50" name="Shape 48"/>
-          <p:cNvSpPr/>
-          <p:nvPr/>
-        </p:nvSpPr>
-        <p:spPr>
-          <a:xfrm>
-            <a:off x="3924467" y="3984055"/>
+          <p:cNvPr id="51" name="Shape 49"/>
+          <p:cNvSpPr/>
+          <p:nvPr/>
+        </p:nvSpPr>
+        <p:spPr>
+          <a:xfrm>
+            <a:off x="4026165" y="4030389"/>
             <a:ext cx="68580" cy="68580"/>
           </a:xfrm>
           <a:prstGeom prst="ellipse">
@@ -32923,13 +32943,13 @@
       </p:sp>
       <p:sp>
         <p:nvSpPr>
-          <p:cNvPr id="51" name="Shape 49"/>
-          <p:cNvSpPr/>
-          <p:nvPr/>
-        </p:nvSpPr>
-        <p:spPr>
-          <a:xfrm>
-            <a:off x="4026165" y="4030389"/>
+          <p:cNvPr id="52" name="Shape 50"/>
+          <p:cNvSpPr/>
+          <p:nvPr/>
+        </p:nvSpPr>
+        <p:spPr>
+          <a:xfrm>
+            <a:off x="4280411" y="4054707"/>
             <a:ext cx="68580" cy="68580"/>
           </a:xfrm>
           <a:prstGeom prst="ellipse">
@@ -32943,13 +32963,13 @@
       </p:sp>
       <p:sp>
         <p:nvSpPr>
-          <p:cNvPr id="52" name="Shape 50"/>
-          <p:cNvSpPr/>
-          <p:nvPr/>
-        </p:nvSpPr>
-        <p:spPr>
-          <a:xfrm>
-            <a:off x="4280411" y="4054707"/>
+          <p:cNvPr id="53" name="Shape 51"/>
+          <p:cNvSpPr/>
+          <p:nvPr/>
+        </p:nvSpPr>
+        <p:spPr>
+          <a:xfrm>
+            <a:off x="4297361" y="4017793"/>
             <a:ext cx="68580" cy="68580"/>
           </a:xfrm>
           <a:prstGeom prst="ellipse">
@@ -32963,13 +32983,13 @@
       </p:sp>
       <p:sp>
         <p:nvSpPr>
-          <p:cNvPr id="53" name="Shape 51"/>
-          <p:cNvSpPr/>
-          <p:nvPr/>
-        </p:nvSpPr>
-        <p:spPr>
-          <a:xfrm>
-            <a:off x="4297361" y="4017793"/>
+          <p:cNvPr id="54" name="Shape 52"/>
+          <p:cNvSpPr/>
+          <p:nvPr/>
+        </p:nvSpPr>
+        <p:spPr>
+          <a:xfrm>
+            <a:off x="5077049" y="4355606"/>
             <a:ext cx="68580" cy="68580"/>
           </a:xfrm>
           <a:prstGeom prst="ellipse">
@@ -32983,13 +33003,13 @@
       </p:sp>
       <p:sp>
         <p:nvSpPr>
-          <p:cNvPr id="54" name="Shape 52"/>
-          <p:cNvSpPr/>
-          <p:nvPr/>
-        </p:nvSpPr>
-        <p:spPr>
-          <a:xfrm>
-            <a:off x="5077049" y="4355606"/>
+          <p:cNvPr id="55" name="Shape 53"/>
+          <p:cNvSpPr/>
+          <p:nvPr/>
+        </p:nvSpPr>
+        <p:spPr>
+          <a:xfrm>
+            <a:off x="5721139" y="4873500"/>
             <a:ext cx="68580" cy="68580"/>
           </a:xfrm>
           <a:prstGeom prst="ellipse">
@@ -33003,13 +33023,13 @@
       </p:sp>
       <p:sp>
         <p:nvSpPr>
-          <p:cNvPr id="55" name="Shape 53"/>
-          <p:cNvSpPr/>
-          <p:nvPr/>
-        </p:nvSpPr>
-        <p:spPr>
-          <a:xfrm>
-            <a:off x="5721139" y="4873500"/>
+          <p:cNvPr id="56" name="Shape 54"/>
+          <p:cNvSpPr/>
+          <p:nvPr/>
+        </p:nvSpPr>
+        <p:spPr>
+          <a:xfrm>
+            <a:off x="5755038" y="5002206"/>
             <a:ext cx="68580" cy="68580"/>
           </a:xfrm>
           <a:prstGeom prst="ellipse">
@@ -33023,13 +33043,13 @@
       </p:sp>
       <p:sp>
         <p:nvSpPr>
-          <p:cNvPr id="56" name="Shape 54"/>
-          <p:cNvSpPr/>
-          <p:nvPr/>
-        </p:nvSpPr>
-        <p:spPr>
-          <a:xfrm>
-            <a:off x="5755038" y="5002206"/>
+          <p:cNvPr id="57" name="Shape 55"/>
+          <p:cNvSpPr/>
+          <p:nvPr/>
+        </p:nvSpPr>
+        <p:spPr>
+          <a:xfrm>
+            <a:off x="5771988" y="4705907"/>
             <a:ext cx="68580" cy="68580"/>
           </a:xfrm>
           <a:prstGeom prst="ellipse">
@@ -33043,13 +33063,13 @@
       </p:sp>
       <p:sp>
         <p:nvSpPr>
-          <p:cNvPr id="57" name="Shape 55"/>
-          <p:cNvSpPr/>
-          <p:nvPr/>
-        </p:nvSpPr>
-        <p:spPr>
-          <a:xfrm>
-            <a:off x="5771988" y="4705907"/>
+          <p:cNvPr id="58" name="Shape 56"/>
+          <p:cNvSpPr/>
+          <p:nvPr/>
+        </p:nvSpPr>
+        <p:spPr>
+          <a:xfrm>
+            <a:off x="5822837" y="4719161"/>
             <a:ext cx="68580" cy="68580"/>
           </a:xfrm>
           <a:prstGeom prst="ellipse">
@@ -33063,13 +33083,13 @@
       </p:sp>
       <p:sp>
         <p:nvSpPr>
-          <p:cNvPr id="58" name="Shape 56"/>
-          <p:cNvSpPr/>
-          <p:nvPr/>
-        </p:nvSpPr>
-        <p:spPr>
-          <a:xfrm>
-            <a:off x="5822837" y="4719161"/>
+          <p:cNvPr id="59" name="Shape 57"/>
+          <p:cNvSpPr/>
+          <p:nvPr/>
+        </p:nvSpPr>
+        <p:spPr>
+          <a:xfrm>
+            <a:off x="6110983" y="4935169"/>
             <a:ext cx="68580" cy="68580"/>
           </a:xfrm>
           <a:prstGeom prst="ellipse">
@@ -33083,13 +33103,33 @@
       </p:sp>
       <p:sp>
         <p:nvSpPr>
-          <p:cNvPr id="59" name="Shape 57"/>
-          <p:cNvSpPr/>
-          <p:nvPr/>
-        </p:nvSpPr>
-        <p:spPr>
-          <a:xfrm>
-            <a:off x="6110983" y="4935169"/>
+          <p:cNvPr id="60" name="Shape 58"/>
+          <p:cNvSpPr/>
+          <p:nvPr/>
+        </p:nvSpPr>
+        <p:spPr>
+          <a:xfrm>
+            <a:off x="6317994" y="5160955"/>
+            <a:ext cx="95250" cy="95250"/>
+          </a:xfrm>
+          <a:prstGeom prst="ellipse">
+            <a:avLst/>
+          </a:prstGeom>
+          <a:solidFill>
+            <a:srgbClr val="FF4D63"/>
+          </a:solidFill>
+          <a:ln/>
+        </p:spPr>
+      </p:sp>
+      <p:sp>
+        <p:nvSpPr>
+          <p:cNvPr id="61" name="Shape 59"/>
+          <p:cNvSpPr/>
+          <p:nvPr/>
+        </p:nvSpPr>
+        <p:spPr>
+          <a:xfrm>
+            <a:off x="6585575" y="4818293"/>
             <a:ext cx="68580" cy="68580"/>
           </a:xfrm>
           <a:prstGeom prst="ellipse">
@@ -33103,33 +33143,13 @@
       </p:sp>
       <p:sp>
         <p:nvSpPr>
-          <p:cNvPr id="60" name="Shape 58"/>
-          <p:cNvSpPr/>
-          <p:nvPr/>
-        </p:nvSpPr>
-        <p:spPr>
-          <a:xfrm>
-            <a:off x="6317994" y="5160955"/>
-            <a:ext cx="95250" cy="95250"/>
-          </a:xfrm>
-          <a:prstGeom prst="ellipse">
-            <a:avLst/>
-          </a:prstGeom>
-          <a:solidFill>
-            <a:srgbClr val="FF4D63"/>
-          </a:solidFill>
-          <a:ln/>
-        </p:spPr>
-      </p:sp>
-      <p:sp>
-        <p:nvSpPr>
-          <p:cNvPr id="61" name="Shape 59"/>
-          <p:cNvSpPr/>
-          <p:nvPr/>
-        </p:nvSpPr>
-        <p:spPr>
-          <a:xfrm>
-            <a:off x="6585575" y="4818293"/>
+          <p:cNvPr id="62" name="Shape 60"/>
+          <p:cNvSpPr/>
+          <p:nvPr/>
+        </p:nvSpPr>
+        <p:spPr>
+          <a:xfrm>
+            <a:off x="6585575" y="4694953"/>
             <a:ext cx="68580" cy="68580"/>
           </a:xfrm>
           <a:prstGeom prst="ellipse">
@@ -33143,33 +33163,13 @@
       </p:sp>
       <p:sp>
         <p:nvSpPr>
-          <p:cNvPr id="62" name="Shape 60"/>
-          <p:cNvSpPr/>
-          <p:nvPr/>
-        </p:nvSpPr>
-        <p:spPr>
-          <a:xfrm>
-            <a:off x="6656989" y="5006945"/>
-            <a:ext cx="95250" cy="95250"/>
-          </a:xfrm>
-          <a:prstGeom prst="ellipse">
-            <a:avLst/>
-          </a:prstGeom>
-          <a:solidFill>
-            <a:srgbClr val="FF4D63"/>
-          </a:solidFill>
-          <a:ln/>
-        </p:spPr>
-      </p:sp>
-      <p:sp>
-        <p:nvSpPr>
           <p:cNvPr id="63" name="Shape 61"/>
           <p:cNvSpPr/>
           <p:nvPr/>
         </p:nvSpPr>
         <p:spPr>
           <a:xfrm>
-            <a:off x="6839822" y="4738111"/>
+            <a:off x="6670324" y="5020280"/>
             <a:ext cx="68580" cy="68580"/>
           </a:xfrm>
           <a:prstGeom prst="ellipse">
@@ -33189,7 +33189,7 @@
         </p:nvSpPr>
         <p:spPr>
           <a:xfrm>
-            <a:off x="6958470" y="4710398"/>
+            <a:off x="6704224" y="5014474"/>
             <a:ext cx="68580" cy="68580"/>
           </a:xfrm>
           <a:prstGeom prst="ellipse">
@@ -33209,7 +33209,7 @@
         </p:nvSpPr>
         <p:spPr>
           <a:xfrm>
-            <a:off x="7009319" y="4920820"/>
+            <a:off x="6839822" y="4738111"/>
             <a:ext cx="68580" cy="68580"/>
           </a:xfrm>
           <a:prstGeom prst="ellipse">
@@ -33229,7 +33229,7 @@
         </p:nvSpPr>
         <p:spPr>
           <a:xfrm>
-            <a:off x="7026269" y="4411251"/>
+            <a:off x="6958470" y="4710398"/>
             <a:ext cx="68580" cy="68580"/>
           </a:xfrm>
           <a:prstGeom prst="ellipse">
@@ -33249,7 +33249,7 @@
         </p:nvSpPr>
         <p:spPr>
           <a:xfrm>
-            <a:off x="7026269" y="4490118"/>
+            <a:off x="7009319" y="4920820"/>
             <a:ext cx="68580" cy="68580"/>
           </a:xfrm>
           <a:prstGeom prst="ellipse">
@@ -33269,7 +33269,7 @@
         </p:nvSpPr>
         <p:spPr>
           <a:xfrm>
-            <a:off x="7161867" y="4568219"/>
+            <a:off x="7026269" y="4411251"/>
             <a:ext cx="68580" cy="68580"/>
           </a:xfrm>
           <a:prstGeom prst="ellipse">
@@ -33289,7 +33289,7 @@
         </p:nvSpPr>
         <p:spPr>
           <a:xfrm>
-            <a:off x="7195766" y="4897379"/>
+            <a:off x="7026269" y="4490118"/>
             <a:ext cx="68580" cy="68580"/>
           </a:xfrm>
           <a:prstGeom prst="ellipse">
@@ -33309,7 +33309,7 @@
         </p:nvSpPr>
         <p:spPr>
           <a:xfrm>
-            <a:off x="7331364" y="4561537"/>
+            <a:off x="7026269" y="4810406"/>
             <a:ext cx="68580" cy="68580"/>
           </a:xfrm>
           <a:prstGeom prst="ellipse">
@@ -33329,7 +33329,7 @@
         </p:nvSpPr>
         <p:spPr>
           <a:xfrm>
-            <a:off x="7585610" y="4412456"/>
+            <a:off x="7161867" y="4568219"/>
             <a:ext cx="68580" cy="68580"/>
           </a:xfrm>
           <a:prstGeom prst="ellipse">
@@ -33343,7 +33343,87 @@
       </p:sp>
       <p:sp>
         <p:nvSpPr>
-          <p:cNvPr id="72" name="Text 70"/>
+          <p:cNvPr id="72" name="Shape 70"/>
+          <p:cNvSpPr/>
+          <p:nvPr/>
+        </p:nvSpPr>
+        <p:spPr>
+          <a:xfrm>
+            <a:off x="7195766" y="4897379"/>
+            <a:ext cx="68580" cy="68580"/>
+          </a:xfrm>
+          <a:prstGeom prst="ellipse">
+            <a:avLst/>
+          </a:prstGeom>
+          <a:solidFill>
+            <a:srgbClr val="CFCBC2"/>
+          </a:solidFill>
+          <a:ln/>
+        </p:spPr>
+      </p:sp>
+      <p:sp>
+        <p:nvSpPr>
+          <p:cNvPr id="73" name="Shape 71"/>
+          <p:cNvSpPr/>
+          <p:nvPr/>
+        </p:nvSpPr>
+        <p:spPr>
+          <a:xfrm>
+            <a:off x="7331364" y="4561537"/>
+            <a:ext cx="68580" cy="68580"/>
+          </a:xfrm>
+          <a:prstGeom prst="ellipse">
+            <a:avLst/>
+          </a:prstGeom>
+          <a:solidFill>
+            <a:srgbClr val="CFCBC2"/>
+          </a:solidFill>
+          <a:ln/>
+        </p:spPr>
+      </p:sp>
+      <p:sp>
+        <p:nvSpPr>
+          <p:cNvPr id="74" name="Shape 72"/>
+          <p:cNvSpPr/>
+          <p:nvPr/>
+        </p:nvSpPr>
+        <p:spPr>
+          <a:xfrm>
+            <a:off x="7585610" y="4412456"/>
+            <a:ext cx="68580" cy="68580"/>
+          </a:xfrm>
+          <a:prstGeom prst="ellipse">
+            <a:avLst/>
+          </a:prstGeom>
+          <a:solidFill>
+            <a:srgbClr val="CFCBC2"/>
+          </a:solidFill>
+          <a:ln/>
+        </p:spPr>
+      </p:sp>
+      <p:sp>
+        <p:nvSpPr>
+          <p:cNvPr id="75" name="Shape 73"/>
+          <p:cNvSpPr/>
+          <p:nvPr/>
+        </p:nvSpPr>
+        <p:spPr>
+          <a:xfrm>
+            <a:off x="7890705" y="4486504"/>
+            <a:ext cx="68580" cy="68580"/>
+          </a:xfrm>
+          <a:prstGeom prst="ellipse">
+            <a:avLst/>
+          </a:prstGeom>
+          <a:solidFill>
+            <a:srgbClr val="CFCBC2"/>
+          </a:solidFill>
+          <a:ln/>
+        </p:spPr>
+      </p:sp>
+      <p:sp>
+        <p:nvSpPr>
+          <p:cNvPr id="76" name="Text 74"/>
           <p:cNvSpPr txBox="1"/>
           <p:nvPr/>
         </p:nvSpPr>
@@ -33385,7 +33465,7 @@
       </p:sp>
       <p:sp>
         <p:nvSpPr>
-          <p:cNvPr id="73" name="Text 71"/>
+          <p:cNvPr id="77" name="Text 75"/>
           <p:cNvSpPr txBox="1"/>
           <p:nvPr/>
         </p:nvSpPr>
@@ -33427,7 +33507,7 @@
       </p:sp>
       <p:sp>
         <p:nvSpPr>
-          <p:cNvPr id="74" name="Shape 72"/>
+          <p:cNvPr id="78" name="Shape 76"/>
           <p:cNvSpPr/>
           <p:nvPr/>
         </p:nvSpPr>
@@ -33447,7 +33527,7 @@
       </p:sp>
       <p:sp>
         <p:nvSpPr>
-          <p:cNvPr id="75" name="Text 73"/>
+          <p:cNvPr id="79" name="Text 77"/>
           <p:cNvSpPr txBox="1"/>
           <p:nvPr/>
         </p:nvSpPr>
@@ -33489,7 +33569,7 @@
       </p:sp>
       <p:sp>
         <p:nvSpPr>
-          <p:cNvPr id="76" name="Shape 74"/>
+          <p:cNvPr id="80" name="Shape 78"/>
           <p:cNvSpPr/>
           <p:nvPr/>
         </p:nvSpPr>
@@ -33514,7 +33594,7 @@
       </p:sp>
       <p:sp>
         <p:nvSpPr>
-          <p:cNvPr id="77" name="Text 75"/>
+          <p:cNvPr id="81" name="Text 79"/>
           <p:cNvSpPr txBox="1"/>
           <p:nvPr/>
         </p:nvSpPr>
@@ -33556,7 +33636,7 @@
       </p:sp>
       <p:sp>
         <p:nvSpPr>
-          <p:cNvPr id="78" name="Text 76"/>
+          <p:cNvPr id="82" name="Text 80"/>
           <p:cNvSpPr txBox="1"/>
           <p:nvPr/>
         </p:nvSpPr>
@@ -33598,7 +33678,7 @@
       </p:sp>
       <p:sp>
         <p:nvSpPr>
-          <p:cNvPr id="79" name="Shape 77"/>
+          <p:cNvPr id="83" name="Shape 81"/>
           <p:cNvSpPr/>
           <p:nvPr/>
         </p:nvSpPr>
@@ -33618,7 +33698,7 @@
       </p:sp>
       <p:sp>
         <p:nvSpPr>
-          <p:cNvPr id="80" name="Text 78"/>
+          <p:cNvPr id="84" name="Text 82"/>
           <p:cNvSpPr txBox="1"/>
           <p:nvPr/>
         </p:nvSpPr>
@@ -33652,7 +33732,7 @@
                 <a:ea typeface="Consolas" pitchFamily="34" charset="-122"/>
                 <a:cs typeface="Consolas" pitchFamily="34" charset="-120"/>
               </a:rPr>
-              <a:t>-10.39</a:t>
+              <a:t>-10.76</a:t>
             </a:r>
             <a:endParaRPr lang="en-US" sz="938" dirty="0"/>
           </a:p>
@@ -33660,7 +33740,7 @@
       </p:sp>
       <p:sp>
         <p:nvSpPr>
-          <p:cNvPr id="81" name="Text 79"/>
+          <p:cNvPr id="85" name="Text 83"/>
           <p:cNvSpPr txBox="1"/>
           <p:nvPr/>
         </p:nvSpPr>
@@ -33702,7 +33782,7 @@
       </p:sp>
       <p:sp>
         <p:nvSpPr>
-          <p:cNvPr id="82" name="Text 80"/>
+          <p:cNvPr id="86" name="Text 84"/>
           <p:cNvSpPr txBox="1"/>
           <p:nvPr/>
         </p:nvSpPr>
@@ -33744,14 +33824,14 @@
       </p:sp>
       <p:sp>
         <p:nvSpPr>
-          <p:cNvPr id="83" name="Shape 81"/>
+          <p:cNvPr id="87" name="Shape 85"/>
           <p:cNvSpPr/>
           <p:nvPr/>
         </p:nvSpPr>
         <p:spPr>
           <a:xfrm>
             <a:off x="9658350" y="3524250"/>
-            <a:ext cx="944191" cy="152400"/>
+            <a:ext cx="945945" cy="152400"/>
           </a:xfrm>
           <a:prstGeom prst="rect">
             <a:avLst/>
@@ -33764,7 +33844,7 @@
       </p:sp>
       <p:sp>
         <p:nvSpPr>
-          <p:cNvPr id="84" name="Text 82"/>
+          <p:cNvPr id="88" name="Text 86"/>
           <p:cNvSpPr txBox="1"/>
           <p:nvPr/>
         </p:nvSpPr>
@@ -33798,7 +33878,7 @@
                 <a:ea typeface="Consolas" pitchFamily="34" charset="-122"/>
                 <a:cs typeface="Consolas" pitchFamily="34" charset="-120"/>
               </a:rPr>
-              <a:t>-9.91</a:t>
+              <a:t>-10.27</a:t>
             </a:r>
             <a:endParaRPr lang="en-US" sz="938" dirty="0"/>
           </a:p>
@@ -33806,7 +33886,7 @@
       </p:sp>
       <p:sp>
         <p:nvSpPr>
-          <p:cNvPr id="85" name="Text 83"/>
+          <p:cNvPr id="89" name="Text 87"/>
           <p:cNvSpPr txBox="1"/>
           <p:nvPr/>
         </p:nvSpPr>
@@ -33848,7 +33928,7 @@
       </p:sp>
       <p:sp>
         <p:nvSpPr>
-          <p:cNvPr id="86" name="Text 84"/>
+          <p:cNvPr id="90" name="Text 88"/>
           <p:cNvSpPr txBox="1"/>
           <p:nvPr/>
         </p:nvSpPr>
@@ -33890,14 +33970,14 @@
       </p:sp>
       <p:sp>
         <p:nvSpPr>
-          <p:cNvPr id="87" name="Shape 85"/>
+          <p:cNvPr id="91" name="Shape 89"/>
           <p:cNvSpPr/>
           <p:nvPr/>
         </p:nvSpPr>
         <p:spPr>
           <a:xfrm>
             <a:off x="9658350" y="3886200"/>
-            <a:ext cx="754171" cy="152400"/>
+            <a:ext cx="690354" cy="152400"/>
           </a:xfrm>
           <a:prstGeom prst="rect">
             <a:avLst/>
@@ -33910,7 +33990,7 @@
       </p:sp>
       <p:sp>
         <p:nvSpPr>
-          <p:cNvPr id="88" name="Text 86"/>
+          <p:cNvPr id="92" name="Text 90"/>
           <p:cNvSpPr txBox="1"/>
           <p:nvPr/>
         </p:nvSpPr>
@@ -33944,7 +34024,7 @@
                 <a:ea typeface="Consolas" pitchFamily="34" charset="-122"/>
                 <a:cs typeface="Consolas" pitchFamily="34" charset="-120"/>
               </a:rPr>
-              <a:t>+7.91</a:t>
+              <a:t>+7.50</a:t>
             </a:r>
             <a:endParaRPr lang="en-US" sz="938" dirty="0"/>
           </a:p>
@@ -33952,7 +34032,7 @@
       </p:sp>
       <p:sp>
         <p:nvSpPr>
-          <p:cNvPr id="89" name="Text 87"/>
+          <p:cNvPr id="93" name="Text 91"/>
           <p:cNvSpPr txBox="1"/>
           <p:nvPr/>
         </p:nvSpPr>
@@ -33986,7 +34066,7 @@
                 <a:ea typeface="Consolas" pitchFamily="34" charset="-122"/>
                 <a:cs typeface="Consolas" pitchFamily="34" charset="-120"/>
               </a:rPr>
-              <a:t>25-09-02</a:t>
+              <a:t>25-12-02</a:t>
             </a:r>
             <a:endParaRPr lang="en-US" sz="863" dirty="0"/>
           </a:p>
@@ -33994,7 +34074,7 @@
       </p:sp>
       <p:sp>
         <p:nvSpPr>
-          <p:cNvPr id="90" name="Text 88"/>
+          <p:cNvPr id="94" name="Text 92"/>
           <p:cNvSpPr txBox="1"/>
           <p:nvPr/>
         </p:nvSpPr>
@@ -34022,13 +34102,13 @@
             <a:r>
               <a:rPr lang="en-US" sz="900" b="1" dirty="0">
                 <a:solidFill>
-                  <a:srgbClr val="FF4D63"/>
-                </a:solidFill>
-                <a:latin typeface="Malgun Gothic" pitchFamily="34" charset="0"/>
-                <a:ea typeface="Malgun Gothic" pitchFamily="34" charset="-122"/>
-                <a:cs typeface="Malgun Gothic" pitchFamily="34" charset="-120"/>
-              </a:rPr>
-              <a:t>높게</a:t>
+                  <a:srgbClr val="A8BCD1"/>
+                </a:solidFill>
+                <a:latin typeface="Malgun Gothic" pitchFamily="34" charset="0"/>
+                <a:ea typeface="Malgun Gothic" pitchFamily="34" charset="-122"/>
+                <a:cs typeface="Malgun Gothic" pitchFamily="34" charset="-120"/>
+              </a:rPr>
+              <a:t>낮게</a:t>
             </a:r>
             <a:endParaRPr lang="en-US" sz="900" dirty="0"/>
           </a:p>
@@ -34036,27 +34116,27 @@
       </p:sp>
       <p:sp>
         <p:nvSpPr>
-          <p:cNvPr id="91" name="Shape 89"/>
+          <p:cNvPr id="95" name="Shape 93"/>
           <p:cNvSpPr/>
           <p:nvPr/>
         </p:nvSpPr>
         <p:spPr>
           <a:xfrm>
             <a:off x="9658350" y="4248150"/>
-            <a:ext cx="616278" cy="152400"/>
+            <a:ext cx="597546" cy="152400"/>
           </a:xfrm>
           <a:prstGeom prst="rect">
             <a:avLst/>
           </a:prstGeom>
           <a:solidFill>
-            <a:srgbClr val="FF4D63"/>
+            <a:srgbClr val="718BA6"/>
           </a:solidFill>
           <a:ln/>
         </p:spPr>
       </p:sp>
       <p:sp>
         <p:nvSpPr>
-          <p:cNvPr id="92" name="Text 90"/>
+          <p:cNvPr id="96" name="Text 94"/>
           <p:cNvSpPr txBox="1"/>
           <p:nvPr/>
         </p:nvSpPr>
@@ -34084,13 +34164,13 @@
             <a:r>
               <a:rPr lang="en-US" sz="938" b="1" dirty="0">
                 <a:solidFill>
-                  <a:srgbClr val="FF4D63"/>
+                  <a:srgbClr val="A8BCD1"/>
                 </a:solidFill>
                 <a:latin typeface="Consolas" pitchFamily="34" charset="0"/>
                 <a:ea typeface="Consolas" pitchFamily="34" charset="-122"/>
                 <a:cs typeface="Consolas" pitchFamily="34" charset="-120"/>
               </a:rPr>
-              <a:t>+6.47</a:t>
+              <a:t>-6.49</a:t>
             </a:r>
             <a:endParaRPr lang="en-US" sz="938" dirty="0"/>
           </a:p>
@@ -34098,7 +34178,7 @@
       </p:sp>
       <p:sp>
         <p:nvSpPr>
-          <p:cNvPr id="93" name="Text 91"/>
+          <p:cNvPr id="97" name="Text 95"/>
           <p:cNvSpPr txBox="1"/>
           <p:nvPr/>
         </p:nvSpPr>
@@ -34140,7 +34220,7 @@
       </p:sp>
       <p:sp>
         <p:nvSpPr>
-          <p:cNvPr id="94" name="Text 92"/>
+          <p:cNvPr id="98" name="Text 96"/>
           <p:cNvSpPr txBox="1"/>
           <p:nvPr/>
         </p:nvSpPr>
@@ -34216,7 +34296,7 @@
       </p:sp>
       <p:sp>
         <p:nvSpPr>
-          <p:cNvPr id="95" name="Text 93"/>
+          <p:cNvPr id="99" name="Text 97"/>
           <p:cNvSpPr txBox="1"/>
           <p:nvPr/>
         </p:nvSpPr>
@@ -34258,7 +34338,7 @@
       </p:sp>
       <p:sp>
         <p:nvSpPr>
-          <p:cNvPr id="96" name="Shape 94"/>
+          <p:cNvPr id="100" name="Shape 98"/>
           <p:cNvSpPr/>
           <p:nvPr/>
         </p:nvSpPr>
@@ -34281,7 +34361,7 @@
       </p:sp>
       <p:sp>
         <p:nvSpPr>
-          <p:cNvPr id="97" name="Text 95"/>
+          <p:cNvPr id="101" name="Text 99"/>
           <p:cNvSpPr txBox="1"/>
           <p:nvPr/>
         </p:nvSpPr>
@@ -34323,7 +34403,7 @@
       </p:sp>
       <p:sp>
         <p:nvSpPr>
-          <p:cNvPr id="98" name="Text 96"/>
+          <p:cNvPr id="102" name="Text 100"/>
           <p:cNvSpPr txBox="1"/>
           <p:nvPr/>
         </p:nvSpPr>
@@ -36698,7 +36778,7 @@
                 <a:ea typeface="Malgun Gothic" pitchFamily="34" charset="-122"/>
                 <a:cs typeface="Malgun Gothic" pitchFamily="34" charset="-120"/>
               </a:rPr>
-              <a:t>그럴듯한 설명 4개를 의심했고,</a:t>
+              <a:t>그럴듯한 설명 5개를 의심했고,</a:t>
             </a:r>
             <a:endParaRPr lang="en-US" sz="2775" dirty="0"/>
           </a:p>
@@ -36718,7 +36798,7 @@
                 <a:ea typeface="Malgun Gothic" pitchFamily="34" charset="-122"/>
                 <a:cs typeface="Malgun Gothic" pitchFamily="34" charset="-120"/>
               </a:rPr>
-              <a:t>3개는 틀렸습니다</a:t>
+              <a:t>4개는 틀렸습니다</a:t>
             </a:r>
             <a:endParaRPr lang="en-US" sz="2775" dirty="0"/>
           </a:p>
@@ -36760,7 +36840,7 @@
                 <a:ea typeface="Malgun Gothic" pitchFamily="34" charset="-122"/>
                 <a:cs typeface="Malgun Gothic" pitchFamily="34" charset="-120"/>
               </a:rPr>
-              <a:t>온도에 따라 갈리는 이유를 설명할 후보를 세우고 데이터로 하나씩 검증했습니다. </a:t>
+              <a:t>온도에 따라 갈리는 이유를 설명할 후보를 세우고 누적 40건으로 하나씩 검증했습니다. </a:t>
             </a:r>
             <a:pPr algn="l" indent="0" marL="0">
               <a:lnSpc>
@@ -36808,8 +36888,8 @@
         </p:nvSpPr>
         <p:spPr>
           <a:xfrm>
-            <a:off x="685800" y="2743200"/>
-            <a:ext cx="2562225" cy="19050"/>
+            <a:off x="685800" y="2705100"/>
+            <a:ext cx="2019300" cy="19050"/>
           </a:xfrm>
           <a:prstGeom prst="rect">
             <a:avLst/>
@@ -36828,8 +36908,8 @@
         </p:nvSpPr>
         <p:spPr>
           <a:xfrm>
-            <a:off x="685800" y="2876550"/>
-            <a:ext cx="2562225" cy="125016"/>
+            <a:off x="685800" y="2838450"/>
+            <a:ext cx="2019300" cy="125016"/>
           </a:xfrm>
           <a:prstGeom prst="rect">
             <a:avLst/>
@@ -36870,8 +36950,8 @@
         </p:nvSpPr>
         <p:spPr>
           <a:xfrm>
-            <a:off x="685800" y="3086100"/>
-            <a:ext cx="2562225" cy="852107"/>
+            <a:off x="685800" y="3048000"/>
+            <a:ext cx="2019300" cy="568071"/>
           </a:xfrm>
           <a:prstGeom prst="rect">
             <a:avLst/>
@@ -36918,30 +36998,10 @@
                 <a:ea typeface="Malgun Gothic" pitchFamily="34" charset="-122"/>
                 <a:cs typeface="Malgun Gothic" pitchFamily="34" charset="-120"/>
               </a:rPr>
-              <a:t>설비 수준이</a:t>
+              <a:t>설비가 달랐다</a:t>
             </a:r>
             <a:endParaRPr lang="en-US" sz="1575" dirty="0"/>
           </a:p>
-          <a:p>
-            <a:pPr algn="l" indent="0" marL="0">
-              <a:lnSpc>
-                <a:spcPts val="2237"/>
-              </a:lnSpc>
-              <a:buNone/>
-            </a:pPr>
-            <a:r>
-              <a:rPr lang="en-US" sz="1575" b="1" dirty="0">
-                <a:solidFill>
-                  <a:srgbClr val="EAE7E0"/>
-                </a:solidFill>
-                <a:latin typeface="Malgun Gothic" pitchFamily="34" charset="0"/>
-                <a:ea typeface="Malgun Gothic" pitchFamily="34" charset="-122"/>
-                <a:cs typeface="Malgun Gothic" pitchFamily="34" charset="-120"/>
-              </a:rPr>
-              <a:t>달랐다</a:t>
-            </a:r>
-            <a:endParaRPr lang="en-US" sz="1575" dirty="0"/>
-          </a:p>
         </p:txBody>
       </p:sp>
       <p:sp>
@@ -36952,8 +37012,8 @@
         </p:nvSpPr>
         <p:spPr>
           <a:xfrm>
-            <a:off x="685800" y="4038600"/>
-            <a:ext cx="704850" cy="285750"/>
+            <a:off x="685800" y="3733800"/>
+            <a:ext cx="666750" cy="285750"/>
           </a:xfrm>
           <a:prstGeom prst="rect">
             <a:avLst/>
@@ -36974,8 +37034,8 @@
         </p:nvSpPr>
         <p:spPr>
           <a:xfrm>
-            <a:off x="685800" y="4105275"/>
-            <a:ext cx="704850" cy="160020"/>
+            <a:off x="685800" y="3800475"/>
+            <a:ext cx="666750" cy="160020"/>
           </a:xfrm>
           <a:prstGeom prst="rect">
             <a:avLst/>
@@ -37016,8 +37076,8 @@
         </p:nvSpPr>
         <p:spPr>
           <a:xfrm>
-            <a:off x="685800" y="4495800"/>
-            <a:ext cx="2562225" cy="960120"/>
+            <a:off x="685800" y="4152900"/>
+            <a:ext cx="2019300" cy="1200150"/>
           </a:xfrm>
           <a:prstGeom prst="rect">
             <a:avLst/>
@@ -37044,7 +37104,7 @@
                 <a:ea typeface="Malgun Gothic" pitchFamily="34" charset="-122"/>
                 <a:cs typeface="Malgun Gothic" pitchFamily="34" charset="-120"/>
               </a:rPr>
-              <a:t>해당 5건의 IGV 효과 평균이 +0.09 였습니다. 설비가 아니라 </a:t>
+              <a:t>IGV 효과 평균 </a:t>
             </a:r>
             <a:pPr algn="l" indent="0" marL="0">
               <a:lnSpc>
@@ -37055,6 +37115,40 @@
             <a:r>
               <a:rPr lang="en-US" sz="1125" b="1" dirty="0">
                 <a:solidFill>
+                  <a:srgbClr val="EFB13C"/>
+                </a:solidFill>
+                <a:latin typeface="Malgun Gothic" pitchFamily="34" charset="0"/>
+                <a:ea typeface="Malgun Gothic" pitchFamily="34" charset="-122"/>
+                <a:cs typeface="Malgun Gothic" pitchFamily="34" charset="-120"/>
+              </a:rPr>
+              <a:t>+0.09</a:t>
+            </a:r>
+            <a:pPr algn="l" indent="0" marL="0">
+              <a:lnSpc>
+                <a:spcPts val="1890"/>
+              </a:lnSpc>
+              <a:buNone/>
+            </a:pPr>
+            <a:r>
+              <a:rPr lang="en-US" sz="1125" dirty="0">
+                <a:solidFill>
+                  <a:srgbClr val="CFCBC2"/>
+                </a:solidFill>
+                <a:latin typeface="Malgun Gothic" pitchFamily="34" charset="0"/>
+                <a:ea typeface="Malgun Gothic" pitchFamily="34" charset="-122"/>
+                <a:cs typeface="Malgun Gothic" pitchFamily="34" charset="-120"/>
+              </a:rPr>
+              <a:t>. 설비가 아니라 </a:t>
+            </a:r>
+            <a:pPr algn="l" indent="0" marL="0">
+              <a:lnSpc>
+                <a:spcPts val="1890"/>
+              </a:lnSpc>
+              <a:buNone/>
+            </a:pPr>
+            <a:r>
+              <a:rPr lang="en-US" sz="1125" b="1" dirty="0">
+                <a:solidFill>
                   <a:srgbClr val="EAE7E0"/>
                 </a:solidFill>
                 <a:latin typeface="Malgun Gothic" pitchFamily="34" charset="0"/>
@@ -37078,7 +37172,7 @@
                 <a:ea typeface="Malgun Gothic" pitchFamily="34" charset="-122"/>
                 <a:cs typeface="Malgun Gothic" pitchFamily="34" charset="-120"/>
               </a:rPr>
-              <a:t> 가 원인이었습니다.</a:t>
+              <a:t> 가 원인이었다.</a:t>
             </a:r>
             <a:endParaRPr lang="en-US" sz="1125" dirty="0"/>
           </a:p>
@@ -37092,8 +37186,8 @@
         </p:nvSpPr>
         <p:spPr>
           <a:xfrm>
-            <a:off x="3438525" y="2743200"/>
-            <a:ext cx="2562225" cy="19050"/>
+            <a:off x="2886075" y="2705100"/>
+            <a:ext cx="2019300" cy="19050"/>
           </a:xfrm>
           <a:prstGeom prst="rect">
             <a:avLst/>
@@ -37112,8 +37206,8 @@
         </p:nvSpPr>
         <p:spPr>
           <a:xfrm>
-            <a:off x="3438525" y="2876550"/>
-            <a:ext cx="2562225" cy="125016"/>
+            <a:off x="2886075" y="2838450"/>
+            <a:ext cx="2019300" cy="125016"/>
           </a:xfrm>
           <a:prstGeom prst="rect">
             <a:avLst/>
@@ -37154,8 +37248,8 @@
         </p:nvSpPr>
         <p:spPr>
           <a:xfrm>
-            <a:off x="3438525" y="3086100"/>
-            <a:ext cx="2562225" cy="852107"/>
+            <a:off x="2886075" y="3048000"/>
+            <a:ext cx="2019300" cy="568071"/>
           </a:xfrm>
           <a:prstGeom prst="rect">
             <a:avLst/>
@@ -37202,30 +37296,10 @@
                 <a:ea typeface="Malgun Gothic" pitchFamily="34" charset="-122"/>
                 <a:cs typeface="Malgun Gothic" pitchFamily="34" charset="-120"/>
               </a:rPr>
-              <a:t>보정값을</a:t>
+              <a:t>예측할 수 있다</a:t>
             </a:r>
             <a:endParaRPr lang="en-US" sz="1575" dirty="0"/>
           </a:p>
-          <a:p>
-            <a:pPr algn="l" indent="0" marL="0">
-              <a:lnSpc>
-                <a:spcPts val="2237"/>
-              </a:lnSpc>
-              <a:buNone/>
-            </a:pPr>
-            <a:r>
-              <a:rPr lang="en-US" sz="1575" b="1" dirty="0">
-                <a:solidFill>
-                  <a:srgbClr val="EAE7E0"/>
-                </a:solidFill>
-                <a:latin typeface="Malgun Gothic" pitchFamily="34" charset="0"/>
-                <a:ea typeface="Malgun Gothic" pitchFamily="34" charset="-122"/>
-                <a:cs typeface="Malgun Gothic" pitchFamily="34" charset="-120"/>
-              </a:rPr>
-              <a:t>예측할 수 있다</a:t>
-            </a:r>
-            <a:endParaRPr lang="en-US" sz="1575" dirty="0"/>
-          </a:p>
         </p:txBody>
       </p:sp>
       <p:sp>
@@ -37236,8 +37310,8 @@
         </p:nvSpPr>
         <p:spPr>
           <a:xfrm>
-            <a:off x="3438525" y="4038600"/>
-            <a:ext cx="704850" cy="285750"/>
+            <a:off x="2886075" y="3733800"/>
+            <a:ext cx="666750" cy="285750"/>
           </a:xfrm>
           <a:prstGeom prst="rect">
             <a:avLst/>
@@ -37258,8 +37332,8 @@
         </p:nvSpPr>
         <p:spPr>
           <a:xfrm>
-            <a:off x="3438525" y="4105275"/>
-            <a:ext cx="704850" cy="160020"/>
+            <a:off x="2886075" y="3800475"/>
+            <a:ext cx="666750" cy="160020"/>
           </a:xfrm>
           <a:prstGeom prst="rect">
             <a:avLst/>
@@ -37300,8 +37374,8 @@
         </p:nvSpPr>
         <p:spPr>
           <a:xfrm>
-            <a:off x="3438525" y="4495800"/>
-            <a:ext cx="2562225" cy="960120"/>
+            <a:off x="2886075" y="4152900"/>
+            <a:ext cx="2019300" cy="1200150"/>
           </a:xfrm>
           <a:prstGeom prst="rect">
             <a:avLst/>
@@ -37328,7 +37402,7 @@
                 <a:ea typeface="Malgun Gothic" pitchFamily="34" charset="-122"/>
                 <a:cs typeface="Malgun Gothic" pitchFamily="34" charset="-120"/>
               </a:rPr>
-              <a:t>5건일 때 관련성 −0.85 로 강했지만, </a:t>
+              <a:t>n=5 에서 r −0.85 → </a:t>
             </a:r>
             <a:pPr algn="l" indent="0" marL="0">
               <a:lnSpc>
@@ -37339,13 +37413,13 @@
             <a:r>
               <a:rPr lang="en-US" sz="1125" b="1" dirty="0">
                 <a:solidFill>
-                  <a:srgbClr val="EAE7E0"/>
-                </a:solidFill>
-                <a:latin typeface="Malgun Gothic" pitchFamily="34" charset="0"/>
-                <a:ea typeface="Malgun Gothic" pitchFamily="34" charset="-122"/>
-                <a:cs typeface="Malgun Gothic" pitchFamily="34" charset="-120"/>
-              </a:rPr>
-              <a:t>36건에서 +0.09</a:t>
+                  <a:srgbClr val="EFB13C"/>
+                </a:solidFill>
+                <a:latin typeface="Malgun Gothic" pitchFamily="34" charset="0"/>
+                <a:ea typeface="Malgun Gothic" pitchFamily="34" charset="-122"/>
+                <a:cs typeface="Malgun Gothic" pitchFamily="34" charset="-120"/>
+              </a:rPr>
+              <a:t>n=40 에서 +0.05</a:t>
             </a:r>
             <a:pPr algn="l" indent="0" marL="0">
               <a:lnSpc>
@@ -37362,7 +37436,7 @@
                 <a:ea typeface="Malgun Gothic" pitchFamily="34" charset="-122"/>
                 <a:cs typeface="Malgun Gothic" pitchFamily="34" charset="-120"/>
               </a:rPr>
-              <a:t> 로 사라졌습니다. 표본 5개의 과대해석이었습니다.</a:t>
+              <a:t> (임계 0.31). 표본 5개의 과대해석.</a:t>
             </a:r>
             <a:endParaRPr lang="en-US" sz="1125" dirty="0"/>
           </a:p>
@@ -37376,8 +37450,8 @@
         </p:nvSpPr>
         <p:spPr>
           <a:xfrm>
-            <a:off x="6191250" y="2743200"/>
-            <a:ext cx="2562225" cy="19050"/>
+            <a:off x="5086350" y="2705100"/>
+            <a:ext cx="2019300" cy="19050"/>
           </a:xfrm>
           <a:prstGeom prst="rect">
             <a:avLst/>
@@ -37396,8 +37470,8 @@
         </p:nvSpPr>
         <p:spPr>
           <a:xfrm>
-            <a:off x="6191250" y="2876550"/>
-            <a:ext cx="2562225" cy="125016"/>
+            <a:off x="5086350" y="2838450"/>
+            <a:ext cx="2019300" cy="125016"/>
           </a:xfrm>
           <a:prstGeom prst="rect">
             <a:avLst/>
@@ -37438,8 +37512,8 @@
         </p:nvSpPr>
         <p:spPr>
           <a:xfrm>
-            <a:off x="6191250" y="3086100"/>
-            <a:ext cx="2562225" cy="852107"/>
+            <a:off x="5086350" y="3048000"/>
+            <a:ext cx="2019300" cy="568071"/>
           </a:xfrm>
           <a:prstGeom prst="rect">
             <a:avLst/>
@@ -37466,7 +37540,7 @@
                 <a:ea typeface="Malgun Gothic" pitchFamily="34" charset="-122"/>
                 <a:cs typeface="Malgun Gothic" pitchFamily="34" charset="-120"/>
               </a:rPr>
-              <a:t>담당자 표와의</a:t>
+              <a:t>이론값 차이는</a:t>
             </a:r>
             <a:endParaRPr lang="en-US" sz="1575" dirty="0"/>
           </a:p>
@@ -37486,30 +37560,10 @@
                 <a:ea typeface="Malgun Gothic" pitchFamily="34" charset="-122"/>
                 <a:cs typeface="Malgun Gothic" pitchFamily="34" charset="-120"/>
               </a:rPr>
-              <a:t>이론값 차이는</a:t>
+              <a:t>진공 항 때문이다</a:t>
             </a:r>
             <a:endParaRPr lang="en-US" sz="1575" dirty="0"/>
           </a:p>
-          <a:p>
-            <a:pPr algn="l" indent="0" marL="0">
-              <a:lnSpc>
-                <a:spcPts val="2237"/>
-              </a:lnSpc>
-              <a:buNone/>
-            </a:pPr>
-            <a:r>
-              <a:rPr lang="en-US" sz="1575" b="1" dirty="0">
-                <a:solidFill>
-                  <a:srgbClr val="EAE7E0"/>
-                </a:solidFill>
-                <a:latin typeface="Malgun Gothic" pitchFamily="34" charset="0"/>
-                <a:ea typeface="Malgun Gothic" pitchFamily="34" charset="-122"/>
-                <a:cs typeface="Malgun Gothic" pitchFamily="34" charset="-120"/>
-              </a:rPr>
-              <a:t>진공 항 때문이다</a:t>
-            </a:r>
-            <a:endParaRPr lang="en-US" sz="1575" dirty="0"/>
-          </a:p>
         </p:txBody>
       </p:sp>
       <p:sp>
@@ -37520,8 +37574,8 @@
         </p:nvSpPr>
         <p:spPr>
           <a:xfrm>
-            <a:off x="6191250" y="4038600"/>
-            <a:ext cx="704850" cy="285750"/>
+            <a:off x="5086350" y="3733800"/>
+            <a:ext cx="666750" cy="285750"/>
           </a:xfrm>
           <a:prstGeom prst="rect">
             <a:avLst/>
@@ -37542,8 +37596,8 @@
         </p:nvSpPr>
         <p:spPr>
           <a:xfrm>
-            <a:off x="6191250" y="4105275"/>
-            <a:ext cx="704850" cy="160020"/>
+            <a:off x="5086350" y="3800475"/>
+            <a:ext cx="666750" cy="160020"/>
           </a:xfrm>
           <a:prstGeom prst="rect">
             <a:avLst/>
@@ -37584,8 +37638,8 @@
         </p:nvSpPr>
         <p:spPr>
           <a:xfrm>
-            <a:off x="6191250" y="4495800"/>
-            <a:ext cx="2562225" cy="960120"/>
+            <a:off x="5086350" y="4152900"/>
+            <a:ext cx="2019300" cy="1200150"/>
           </a:xfrm>
           <a:prstGeom prst="rect">
             <a:avLst/>
@@ -37612,7 +37666,7 @@
                 <a:ea typeface="Malgun Gothic" pitchFamily="34" charset="-122"/>
                 <a:cs typeface="Malgun Gothic" pitchFamily="34" charset="-120"/>
               </a:rPr>
-              <a:t>58건을 대조하니 차이가 온도에 비례했습니다. 진공이 아니라 </a:t>
+              <a:t>58건 대조 → 차이가 온도에 비례. 진공이 아니라 </a:t>
             </a:r>
             <a:pPr algn="l" indent="0" marL="0">
               <a:lnSpc>
@@ -37646,7 +37700,7 @@
                 <a:ea typeface="Malgun Gothic" pitchFamily="34" charset="-122"/>
                 <a:cs typeface="Malgun Gothic" pitchFamily="34" charset="-120"/>
               </a:rPr>
-              <a:t> 였습니다.</a:t>
+              <a:t>.</a:t>
             </a:r>
             <a:endParaRPr lang="en-US" sz="1125" dirty="0"/>
           </a:p>
@@ -37660,8 +37714,272 @@
         </p:nvSpPr>
         <p:spPr>
           <a:xfrm>
-            <a:off x="8943975" y="2743200"/>
-            <a:ext cx="2562225" cy="19050"/>
+            <a:off x="7286625" y="2705100"/>
+            <a:ext cx="2019300" cy="19050"/>
+          </a:xfrm>
+          <a:prstGeom prst="rect">
+            <a:avLst/>
+          </a:prstGeom>
+          <a:solidFill>
+            <a:srgbClr val="7E2333"/>
+          </a:solidFill>
+          <a:ln/>
+        </p:spPr>
+      </p:sp>
+      <p:sp>
+        <p:nvSpPr>
+          <p:cNvPr id="32" name="Text 30"/>
+          <p:cNvSpPr txBox="1"/>
+          <p:nvPr/>
+        </p:nvSpPr>
+        <p:spPr>
+          <a:xfrm>
+            <a:off x="7286625" y="2838450"/>
+            <a:ext cx="2019300" cy="125016"/>
+          </a:xfrm>
+          <a:prstGeom prst="rect">
+            <a:avLst/>
+          </a:prstGeom>
+          <a:noFill/>
+          <a:ln/>
+        </p:spPr>
+        <p:txBody>
+          <a:bodyPr wrap="square" lIns="0" tIns="0" rIns="0" bIns="0" rtlCol="0" anchor="t"/>
+          <a:lstStyle/>
+          <a:p>
+            <a:pPr algn="l" indent="0" marL="0">
+              <a:lnSpc>
+                <a:spcPts val="984"/>
+              </a:lnSpc>
+              <a:buNone/>
+            </a:pPr>
+            <a:r>
+              <a:rPr lang="en-US" sz="788" b="1" spc="150" kern="0" dirty="0">
+                <a:solidFill>
+                  <a:srgbClr val="FF4D63"/>
+                </a:solidFill>
+                <a:latin typeface="Consolas" pitchFamily="34" charset="0"/>
+                <a:ea typeface="Consolas" pitchFamily="34" charset="-122"/>
+                <a:cs typeface="Consolas" pitchFamily="34" charset="-120"/>
+              </a:rPr>
+              <a:t>가설 4</a:t>
+            </a:r>
+            <a:endParaRPr lang="en-US" sz="788" dirty="0"/>
+          </a:p>
+        </p:txBody>
+      </p:sp>
+      <p:sp>
+        <p:nvSpPr>
+          <p:cNvPr id="33" name="Text 31"/>
+          <p:cNvSpPr txBox="1"/>
+          <p:nvPr/>
+        </p:nvSpPr>
+        <p:spPr>
+          <a:xfrm>
+            <a:off x="7286625" y="3048000"/>
+            <a:ext cx="2019300" cy="568071"/>
+          </a:xfrm>
+          <a:prstGeom prst="rect">
+            <a:avLst/>
+          </a:prstGeom>
+          <a:noFill/>
+          <a:ln/>
+        </p:spPr>
+        <p:txBody>
+          <a:bodyPr wrap="square" lIns="0" tIns="0" rIns="0" bIns="0" rtlCol="0" anchor="t"/>
+          <a:lstStyle/>
+          <a:p>
+            <a:pPr algn="l" indent="0" marL="0">
+              <a:lnSpc>
+                <a:spcPts val="2237"/>
+              </a:lnSpc>
+              <a:buNone/>
+            </a:pPr>
+            <a:r>
+              <a:rPr lang="en-US" sz="1575" b="1" dirty="0">
+                <a:solidFill>
+                  <a:srgbClr val="EAE7E0"/>
+                </a:solidFill>
+                <a:latin typeface="Malgun Gothic" pitchFamily="34" charset="0"/>
+                <a:ea typeface="Malgun Gothic" pitchFamily="34" charset="-122"/>
+                <a:cs typeface="Malgun Gothic" pitchFamily="34" charset="-120"/>
+              </a:rPr>
+              <a:t>여름에만</a:t>
+            </a:r>
+            <a:endParaRPr lang="en-US" sz="1575" dirty="0"/>
+          </a:p>
+          <a:p>
+            <a:pPr algn="l" indent="0" marL="0">
+              <a:lnSpc>
+                <a:spcPts val="2237"/>
+              </a:lnSpc>
+              <a:buNone/>
+            </a:pPr>
+            <a:r>
+              <a:rPr lang="en-US" sz="1575" b="1" dirty="0">
+                <a:solidFill>
+                  <a:srgbClr val="EAE7E0"/>
+                </a:solidFill>
+                <a:latin typeface="Malgun Gothic" pitchFamily="34" charset="0"/>
+                <a:ea typeface="Malgun Gothic" pitchFamily="34" charset="-122"/>
+                <a:cs typeface="Malgun Gothic" pitchFamily="34" charset="-120"/>
+              </a:rPr>
+              <a:t>진공 영향이 보인다</a:t>
+            </a:r>
+            <a:endParaRPr lang="en-US" sz="1575" dirty="0"/>
+          </a:p>
+        </p:txBody>
+      </p:sp>
+      <p:sp>
+        <p:nvSpPr>
+          <p:cNvPr id="34" name="Shape 32"/>
+          <p:cNvSpPr/>
+          <p:nvPr/>
+        </p:nvSpPr>
+        <p:spPr>
+          <a:xfrm>
+            <a:off x="7286625" y="3733800"/>
+            <a:ext cx="666750" cy="285750"/>
+          </a:xfrm>
+          <a:prstGeom prst="rect">
+            <a:avLst/>
+          </a:prstGeom>
+          <a:ln w="17780">
+            <a:solidFill>
+              <a:srgbClr val="7E2333"/>
+            </a:solidFill>
+            <a:prstDash val="solid"/>
+          </a:ln>
+        </p:spPr>
+      </p:sp>
+      <p:sp>
+        <p:nvSpPr>
+          <p:cNvPr id="35" name="Text 33"/>
+          <p:cNvSpPr txBox="1"/>
+          <p:nvPr/>
+        </p:nvSpPr>
+        <p:spPr>
+          <a:xfrm>
+            <a:off x="7286625" y="3800475"/>
+            <a:ext cx="666750" cy="160020"/>
+          </a:xfrm>
+          <a:prstGeom prst="rect">
+            <a:avLst/>
+          </a:prstGeom>
+          <a:noFill/>
+          <a:ln/>
+        </p:spPr>
+        <p:txBody>
+          <a:bodyPr wrap="square" lIns="0" tIns="0" rIns="0" bIns="0" rtlCol="0" anchor="t"/>
+          <a:lstStyle/>
+          <a:p>
+            <a:pPr algn="ctr" indent="0" marL="0">
+              <a:lnSpc>
+                <a:spcPts val="1260"/>
+              </a:lnSpc>
+              <a:buNone/>
+            </a:pPr>
+            <a:r>
+              <a:rPr lang="en-US" sz="1050" b="1" dirty="0">
+                <a:solidFill>
+                  <a:srgbClr val="FF4D63"/>
+                </a:solidFill>
+                <a:latin typeface="Malgun Gothic" pitchFamily="34" charset="0"/>
+                <a:ea typeface="Malgun Gothic" pitchFamily="34" charset="-122"/>
+                <a:cs typeface="Malgun Gothic" pitchFamily="34" charset="-120"/>
+              </a:rPr>
+              <a:t>기각</a:t>
+            </a:r>
+            <a:endParaRPr lang="en-US" sz="1050" dirty="0"/>
+          </a:p>
+        </p:txBody>
+      </p:sp>
+      <p:sp>
+        <p:nvSpPr>
+          <p:cNvPr id="36" name="Text 34"/>
+          <p:cNvSpPr txBox="1"/>
+          <p:nvPr/>
+        </p:nvSpPr>
+        <p:spPr>
+          <a:xfrm>
+            <a:off x="7286625" y="4152900"/>
+            <a:ext cx="2019300" cy="1200150"/>
+          </a:xfrm>
+          <a:prstGeom prst="rect">
+            <a:avLst/>
+          </a:prstGeom>
+          <a:noFill/>
+          <a:ln/>
+        </p:spPr>
+        <p:txBody>
+          <a:bodyPr wrap="square" lIns="0" tIns="0" rIns="0" bIns="0" rtlCol="0" anchor="t"/>
+          <a:lstStyle/>
+          <a:p>
+            <a:pPr algn="l" indent="0" marL="0">
+              <a:lnSpc>
+                <a:spcPts val="1890"/>
+              </a:lnSpc>
+              <a:buNone/>
+            </a:pPr>
+            <a:r>
+              <a:rPr lang="en-US" sz="1125" dirty="0">
+                <a:solidFill>
+                  <a:srgbClr val="CFCBC2"/>
+                </a:solidFill>
+                <a:latin typeface="Malgun Gothic" pitchFamily="34" charset="0"/>
+                <a:ea typeface="Malgun Gothic" pitchFamily="34" charset="-122"/>
+                <a:cs typeface="Malgun Gothic" pitchFamily="34" charset="-120"/>
+              </a:rPr>
+              <a:t>n=9 에서 r −0.675 (임계 0.666). 한 건 빼면 </a:t>
+            </a:r>
+            <a:pPr algn="l" indent="0" marL="0">
+              <a:lnSpc>
+                <a:spcPts val="1890"/>
+              </a:lnSpc>
+              <a:buNone/>
+            </a:pPr>
+            <a:r>
+              <a:rPr lang="en-US" sz="1125" b="1" dirty="0">
+                <a:solidFill>
+                  <a:srgbClr val="EFB13C"/>
+                </a:solidFill>
+                <a:latin typeface="Malgun Gothic" pitchFamily="34" charset="0"/>
+                <a:ea typeface="Malgun Gothic" pitchFamily="34" charset="-122"/>
+                <a:cs typeface="Malgun Gothic" pitchFamily="34" charset="-120"/>
+              </a:rPr>
+              <a:t>9번 중 6번</a:t>
+            </a:r>
+            <a:pPr algn="l" indent="0" marL="0">
+              <a:lnSpc>
+                <a:spcPts val="1890"/>
+              </a:lnSpc>
+              <a:buNone/>
+            </a:pPr>
+            <a:r>
+              <a:rPr lang="en-US" sz="1125" dirty="0">
+                <a:solidFill>
+                  <a:srgbClr val="CFCBC2"/>
+                </a:solidFill>
+                <a:latin typeface="Malgun Gothic" pitchFamily="34" charset="0"/>
+                <a:ea typeface="Malgun Gothic" pitchFamily="34" charset="-122"/>
+                <a:cs typeface="Malgun Gothic" pitchFamily="34" charset="-120"/>
+              </a:rPr>
+              <a:t> 유의성 상실.</a:t>
+            </a:r>
+            <a:endParaRPr lang="en-US" sz="1125" dirty="0"/>
+          </a:p>
+        </p:txBody>
+      </p:sp>
+      <p:sp>
+        <p:nvSpPr>
+          <p:cNvPr id="37" name="Shape 35"/>
+          <p:cNvSpPr/>
+          <p:nvPr/>
+        </p:nvSpPr>
+        <p:spPr>
+          <a:xfrm>
+            <a:off x="9486900" y="2705100"/>
+            <a:ext cx="2019300" cy="19050"/>
           </a:xfrm>
           <a:prstGeom prst="rect">
             <a:avLst/>
@@ -37674,14 +37992,14 @@
       </p:sp>
       <p:sp>
         <p:nvSpPr>
-          <p:cNvPr id="32" name="Text 30"/>
-          <p:cNvSpPr txBox="1"/>
-          <p:nvPr/>
-        </p:nvSpPr>
-        <p:spPr>
-          <a:xfrm>
-            <a:off x="8943975" y="2876550"/>
-            <a:ext cx="2562225" cy="125016"/>
+          <p:cNvPr id="38" name="Text 36"/>
+          <p:cNvSpPr txBox="1"/>
+          <p:nvPr/>
+        </p:nvSpPr>
+        <p:spPr>
+          <a:xfrm>
+            <a:off x="9486900" y="2838450"/>
+            <a:ext cx="2019300" cy="125016"/>
           </a:xfrm>
           <a:prstGeom prst="rect">
             <a:avLst/>
@@ -37708,7 +38026,7 @@
                 <a:ea typeface="Consolas" pitchFamily="34" charset="-122"/>
                 <a:cs typeface="Consolas" pitchFamily="34" charset="-120"/>
               </a:rPr>
-              <a:t>가설 4</a:t>
+              <a:t>가설 5</a:t>
             </a:r>
             <a:endParaRPr lang="en-US" sz="788" dirty="0"/>
           </a:p>
@@ -37716,14 +38034,14 @@
       </p:sp>
       <p:sp>
         <p:nvSpPr>
-          <p:cNvPr id="33" name="Text 31"/>
-          <p:cNvSpPr txBox="1"/>
-          <p:nvPr/>
-        </p:nvSpPr>
-        <p:spPr>
-          <a:xfrm>
-            <a:off x="8943975" y="3086100"/>
-            <a:ext cx="2562225" cy="852107"/>
+          <p:cNvPr id="39" name="Text 37"/>
+          <p:cNvSpPr txBox="1"/>
+          <p:nvPr/>
+        </p:nvSpPr>
+        <p:spPr>
+          <a:xfrm>
+            <a:off x="9486900" y="3048000"/>
+            <a:ext cx="2019300" cy="568071"/>
           </a:xfrm>
           <a:prstGeom prst="rect">
             <a:avLst/>
@@ -37770,42 +38088,22 @@
                 <a:ea typeface="Malgun Gothic" pitchFamily="34" charset="-122"/>
                 <a:cs typeface="Malgun Gothic" pitchFamily="34" charset="-120"/>
               </a:rPr>
-              <a:t>외기온도의</a:t>
+              <a:t>외기온도의 함수다</a:t>
             </a:r>
             <a:endParaRPr lang="en-US" sz="1575" dirty="0"/>
           </a:p>
-          <a:p>
-            <a:pPr algn="l" indent="0" marL="0">
-              <a:lnSpc>
-                <a:spcPts val="2237"/>
-              </a:lnSpc>
-              <a:buNone/>
-            </a:pPr>
-            <a:r>
-              <a:rPr lang="en-US" sz="1575" b="1" dirty="0">
-                <a:solidFill>
-                  <a:srgbClr val="EAE7E0"/>
-                </a:solidFill>
-                <a:latin typeface="Malgun Gothic" pitchFamily="34" charset="0"/>
-                <a:ea typeface="Malgun Gothic" pitchFamily="34" charset="-122"/>
-                <a:cs typeface="Malgun Gothic" pitchFamily="34" charset="-120"/>
-              </a:rPr>
-              <a:t>함수다</a:t>
-            </a:r>
-            <a:endParaRPr lang="en-US" sz="1575" dirty="0"/>
-          </a:p>
-        </p:txBody>
-      </p:sp>
-      <p:sp>
-        <p:nvSpPr>
-          <p:cNvPr id="34" name="Shape 32"/>
-          <p:cNvSpPr/>
-          <p:nvPr/>
-        </p:nvSpPr>
-        <p:spPr>
-          <a:xfrm>
-            <a:off x="8943975" y="4038600"/>
-            <a:ext cx="704850" cy="285750"/>
+        </p:txBody>
+      </p:sp>
+      <p:sp>
+        <p:nvSpPr>
+          <p:cNvPr id="40" name="Shape 38"/>
+          <p:cNvSpPr/>
+          <p:nvPr/>
+        </p:nvSpPr>
+        <p:spPr>
+          <a:xfrm>
+            <a:off x="9486900" y="3733800"/>
+            <a:ext cx="666750" cy="285750"/>
           </a:xfrm>
           <a:prstGeom prst="rect">
             <a:avLst/>
@@ -37820,14 +38118,14 @@
       </p:sp>
       <p:sp>
         <p:nvSpPr>
-          <p:cNvPr id="35" name="Text 33"/>
-          <p:cNvSpPr txBox="1"/>
-          <p:nvPr/>
-        </p:nvSpPr>
-        <p:spPr>
-          <a:xfrm>
-            <a:off x="8943975" y="4105275"/>
-            <a:ext cx="704850" cy="160020"/>
+          <p:cNvPr id="41" name="Text 39"/>
+          <p:cNvSpPr txBox="1"/>
+          <p:nvPr/>
+        </p:nvSpPr>
+        <p:spPr>
+          <a:xfrm>
+            <a:off x="9486900" y="3800475"/>
+            <a:ext cx="666750" cy="160020"/>
           </a:xfrm>
           <a:prstGeom prst="rect">
             <a:avLst/>
@@ -37862,14 +38160,14 @@
       </p:sp>
       <p:sp>
         <p:nvSpPr>
-          <p:cNvPr id="36" name="Text 34"/>
-          <p:cNvSpPr txBox="1"/>
-          <p:nvPr/>
-        </p:nvSpPr>
-        <p:spPr>
-          <a:xfrm>
-            <a:off x="8943975" y="4495800"/>
-            <a:ext cx="2562225" cy="960120"/>
+          <p:cNvPr id="42" name="Text 40"/>
+          <p:cNvSpPr txBox="1"/>
+          <p:nvPr/>
+        </p:nvSpPr>
+        <p:spPr>
+          <a:xfrm>
+            <a:off x="9486900" y="4152900"/>
+            <a:ext cx="2019300" cy="1200150"/>
           </a:xfrm>
           <a:prstGeom prst="rect">
             <a:avLst/>
@@ -37896,7 +38194,7 @@
                 <a:ea typeface="Malgun Gothic" pitchFamily="34" charset="-122"/>
                 <a:cs typeface="Malgun Gothic" pitchFamily="34" charset="-120"/>
               </a:rPr>
-              <a:t>진공도 = 33.64 + 1.242 × 온도, 관련성 </a:t>
+              <a:t>진공도 = 33.43 + 1.261 × 온도, r </a:t>
             </a:r>
             <a:pPr algn="l" indent="0" marL="0">
               <a:lnSpc>
@@ -37913,7 +38211,7 @@
                 <a:ea typeface="Malgun Gothic" pitchFamily="34" charset="-122"/>
                 <a:cs typeface="Malgun Gothic" pitchFamily="34" charset="-120"/>
               </a:rPr>
-              <a:t>+0.947</a:t>
+              <a:t>+0.952</a:t>
             </a:r>
             <a:pPr algn="l" indent="0" marL="0">
               <a:lnSpc>
@@ -37930,7 +38228,7 @@
                 <a:ea typeface="Malgun Gothic" pitchFamily="34" charset="-122"/>
                 <a:cs typeface="Malgun Gothic" pitchFamily="34" charset="-120"/>
               </a:rPr>
-              <a:t>. 온도 하나로 설명됩니다.</a:t>
+              <a:t>. 40건, 분산의 91%.</a:t>
             </a:r>
             <a:endParaRPr lang="en-US" sz="1125" dirty="0"/>
           </a:p>
@@ -37938,14 +38236,14 @@
       </p:sp>
       <p:sp>
         <p:nvSpPr>
-          <p:cNvPr id="37" name="Shape 35"/>
+          <p:cNvPr id="43" name="Shape 41"/>
           <p:cNvSpPr/>
           <p:nvPr/>
         </p:nvSpPr>
         <p:spPr>
           <a:xfrm>
             <a:off x="685800" y="5505450"/>
-            <a:ext cx="10820400" cy="400050"/>
+            <a:ext cx="10820400" cy="457200"/>
           </a:xfrm>
           <a:prstGeom prst="rect">
             <a:avLst/>
@@ -37963,49 +38261,151 @@
       </p:sp>
       <p:sp>
         <p:nvSpPr>
-          <p:cNvPr id="38" name="Text 36"/>
+          <p:cNvPr id="44" name="Text 42"/>
           <p:cNvSpPr txBox="1"/>
           <p:nvPr/>
         </p:nvSpPr>
         <p:spPr>
           <a:xfrm>
             <a:off x="914400" y="5619750"/>
-            <a:ext cx="10363200" cy="173355"/>
-          </a:xfrm>
-          <a:prstGeom prst="rect">
-            <a:avLst/>
-          </a:prstGeom>
-          <a:noFill/>
-          <a:ln/>
-        </p:spPr>
-        <p:txBody>
-          <a:bodyPr wrap="square" lIns="0" tIns="0" rIns="0" bIns="0" rtlCol="0" anchor="t"/>
-          <a:lstStyle/>
-          <a:p>
-            <a:pPr algn="ctr" indent="0" marL="0">
-              <a:lnSpc>
-                <a:spcPts val="1365"/>
-              </a:lnSpc>
-              <a:buNone/>
-            </a:pPr>
-            <a:r>
-              <a:rPr lang="en-US" sz="975" dirty="0">
-                <a:solidFill>
-                  <a:srgbClr val="A9A79F"/>
-                </a:solidFill>
-                <a:latin typeface="Malgun Gothic" pitchFamily="34" charset="0"/>
-                <a:ea typeface="Malgun Gothic" pitchFamily="34" charset="-122"/>
-                <a:cs typeface="Malgun Gothic" pitchFamily="34" charset="-120"/>
-              </a:rPr>
-              <a:t>표본 5개로 보였던 관련성 −0.85 는 36개에서 +0.09 로 사라졌습니다  ·  적은 데이터로 결론을 내리지 않는 것이 이 과제의 규칙입니다</a:t>
-            </a:r>
-            <a:endParaRPr lang="en-US" sz="975" dirty="0"/>
-          </a:p>
-        </p:txBody>
-      </p:sp>
-      <p:sp>
-        <p:nvSpPr>
-          <p:cNvPr id="39" name="Shape 37"/>
+            <a:ext cx="10363200" cy="385763"/>
+          </a:xfrm>
+          <a:prstGeom prst="rect">
+            <a:avLst/>
+          </a:prstGeom>
+          <a:noFill/>
+          <a:ln/>
+        </p:spPr>
+        <p:txBody>
+          <a:bodyPr wrap="square" lIns="0" tIns="0" rIns="0" bIns="0" rtlCol="0" anchor="t"/>
+          <a:lstStyle/>
+          <a:p>
+            <a:pPr algn="l" indent="0" marL="0">
+              <a:lnSpc>
+                <a:spcPts val="1519"/>
+              </a:lnSpc>
+              <a:buNone/>
+            </a:pPr>
+            <a:r>
+              <a:rPr lang="en-US" sz="1013" dirty="0">
+                <a:solidFill>
+                  <a:srgbClr val="CFCBC2"/>
+                </a:solidFill>
+                <a:latin typeface="Malgun Gothic" pitchFamily="34" charset="0"/>
+                <a:ea typeface="Malgun Gothic" pitchFamily="34" charset="-122"/>
+                <a:cs typeface="Malgun Gothic" pitchFamily="34" charset="-120"/>
+              </a:rPr>
+              <a:t>같은 변수(진공도)에서 </a:t>
+            </a:r>
+            <a:pPr algn="l" indent="0" marL="0">
+              <a:lnSpc>
+                <a:spcPts val="1519"/>
+              </a:lnSpc>
+              <a:buNone/>
+            </a:pPr>
+            <a:r>
+              <a:rPr lang="en-US" sz="1013" b="1" dirty="0">
+                <a:solidFill>
+                  <a:srgbClr val="EFB13C"/>
+                </a:solidFill>
+                <a:latin typeface="Malgun Gothic" pitchFamily="34" charset="0"/>
+                <a:ea typeface="Malgun Gothic" pitchFamily="34" charset="-122"/>
+                <a:cs typeface="Malgun Gothic" pitchFamily="34" charset="-120"/>
+              </a:rPr>
+              <a:t>세 번</a:t>
+            </a:r>
+            <a:pPr algn="l" indent="0" marL="0">
+              <a:lnSpc>
+                <a:spcPts val="1519"/>
+              </a:lnSpc>
+              <a:buNone/>
+            </a:pPr>
+            <a:r>
+              <a:rPr lang="en-US" sz="1013" dirty="0">
+                <a:solidFill>
+                  <a:srgbClr val="CFCBC2"/>
+                </a:solidFill>
+                <a:latin typeface="Malgun Gothic" pitchFamily="34" charset="0"/>
+                <a:ea typeface="Malgun Gothic" pitchFamily="34" charset="-122"/>
+                <a:cs typeface="Malgun Gothic" pitchFamily="34" charset="-120"/>
+              </a:rPr>
+              <a:t> 걸렸습니다 — 전부 </a:t>
+            </a:r>
+            <a:pPr algn="l" indent="0" marL="0">
+              <a:lnSpc>
+                <a:spcPts val="1519"/>
+              </a:lnSpc>
+              <a:buNone/>
+            </a:pPr>
+            <a:r>
+              <a:rPr lang="en-US" sz="1013" b="1" dirty="0">
+                <a:solidFill>
+                  <a:srgbClr val="EAE7E0"/>
+                </a:solidFill>
+                <a:latin typeface="Malgun Gothic" pitchFamily="34" charset="0"/>
+                <a:ea typeface="Malgun Gothic" pitchFamily="34" charset="-122"/>
+                <a:cs typeface="Malgun Gothic" pitchFamily="34" charset="-120"/>
+              </a:rPr>
+              <a:t>부분집합을 잘라 만든 상관</a:t>
+            </a:r>
+            <a:pPr algn="l" indent="0" marL="0">
+              <a:lnSpc>
+                <a:spcPts val="1519"/>
+              </a:lnSpc>
+              <a:buNone/>
+            </a:pPr>
+            <a:r>
+              <a:rPr lang="en-US" sz="1013" dirty="0">
+                <a:solidFill>
+                  <a:srgbClr val="CFCBC2"/>
+                </a:solidFill>
+                <a:latin typeface="Malgun Gothic" pitchFamily="34" charset="0"/>
+                <a:ea typeface="Malgun Gothic" pitchFamily="34" charset="-122"/>
+                <a:cs typeface="Malgun Gothic" pitchFamily="34" charset="-120"/>
+              </a:rPr>
+              <a:t> 이었습니다.   그래서 판정을 사람 눈에서 코드로 옮겼습니다: 부분집합 결과는 </a:t>
+            </a:r>
+            <a:pPr algn="l" indent="0" marL="0">
+              <a:lnSpc>
+                <a:spcPts val="1519"/>
+              </a:lnSpc>
+              <a:buNone/>
+            </a:pPr>
+            <a:r>
+              <a:rPr lang="en-US" sz="1013" b="1" dirty="0">
+                <a:solidFill>
+                  <a:srgbClr val="EFB13C"/>
+                </a:solidFill>
+                <a:latin typeface="Malgun Gothic" pitchFamily="34" charset="0"/>
+                <a:ea typeface="Malgun Gothic" pitchFamily="34" charset="-122"/>
+                <a:cs typeface="Malgun Gothic" pitchFamily="34" charset="-120"/>
+              </a:rPr>
+              <a:t>임계값·안정성과 함께만</a:t>
+            </a:r>
+            <a:pPr algn="l" indent="0" marL="0">
+              <a:lnSpc>
+                <a:spcPts val="1519"/>
+              </a:lnSpc>
+              <a:buNone/>
+            </a:pPr>
+            <a:r>
+              <a:rPr lang="en-US" sz="1013" dirty="0">
+                <a:solidFill>
+                  <a:srgbClr val="CFCBC2"/>
+                </a:solidFill>
+                <a:latin typeface="Malgun Gothic" pitchFamily="34" charset="0"/>
+                <a:ea typeface="Malgun Gothic" pitchFamily="34" charset="-122"/>
+                <a:cs typeface="Malgun Gothic" pitchFamily="34" charset="-120"/>
+              </a:rPr>
+              <a:t> 찍히고, 안정성 80% 미달이면 자동으로 기각입니다.</a:t>
+            </a:r>
+            <a:endParaRPr lang="en-US" sz="1013" dirty="0"/>
+          </a:p>
+        </p:txBody>
+      </p:sp>
+      <p:sp>
+        <p:nvSpPr>
+          <p:cNvPr id="45" name="Shape 43"/>
           <p:cNvSpPr/>
           <p:nvPr/>
         </p:nvSpPr>
@@ -38028,7 +38428,7 @@
       </p:sp>
       <p:sp>
         <p:nvSpPr>
-          <p:cNvPr id="40" name="Text 38"/>
+          <p:cNvPr id="46" name="Text 44"/>
           <p:cNvSpPr txBox="1"/>
           <p:nvPr/>
         </p:nvSpPr>
@@ -38070,7 +38470,7 @@
       </p:sp>
       <p:sp>
         <p:nvSpPr>
-          <p:cNvPr id="41" name="Text 39"/>
+          <p:cNvPr id="47" name="Text 45"/>
           <p:cNvSpPr txBox="1"/>
           <p:nvPr/>
         </p:nvSpPr>
@@ -38104,7 +38504,7 @@
                 <a:ea typeface="Malgun Gothic" pitchFamily="34" charset="-122"/>
                 <a:cs typeface="Malgun Gothic" pitchFamily="34" charset="-120"/>
               </a:rPr>
-              <a:t>남은 설명은 하나였습니다 — </a:t>
+              <a:t>남은 설명은 </a:t>
             </a:r>
             <a:pPr algn="l" indent="0" marL="0">
               <a:lnSpc>
@@ -38138,7 +38538,7 @@
                 <a:ea typeface="Malgun Gothic" pitchFamily="34" charset="-122"/>
                 <a:cs typeface="Malgun Gothic" pitchFamily="34" charset="-120"/>
               </a:rPr>
-              <a:t>. 그래서 온도로 나눠 학습합니다.</a:t>
+              <a:t> 하나였습니다 — 그리고 틀린 가설을 스스로 걸러내는 절차가 남았습니다.</a:t>
             </a:r>
             <a:endParaRPr lang="en-US" sz="1238" dirty="0"/>
           </a:p>

--- a/docs/ppt/위례_공급가능용량_최종발표.pptx
+++ b/docs/ppt/위례_공급가능용량_최종발표.pptx
@@ -4783,14 +4783,14 @@
         </p:nvSpPr>
         <p:spPr>
           <a:xfrm>
-            <a:off x="10677525" y="504825"/>
-            <a:ext cx="28575" cy="47625"/>
+            <a:off x="10668000" y="485775"/>
+            <a:ext cx="38100" cy="76200"/>
           </a:xfrm>
           <a:prstGeom prst="rect">
             <a:avLst/>
           </a:prstGeom>
           <a:solidFill>
-            <a:srgbClr val="22354A"/>
+            <a:srgbClr val="8A8880"/>
           </a:solidFill>
           <a:ln/>
         </p:spPr>
@@ -4803,14 +4803,14 @@
         </p:nvSpPr>
         <p:spPr>
           <a:xfrm>
-            <a:off x="10810875" y="504825"/>
-            <a:ext cx="28575" cy="47625"/>
+            <a:off x="10801350" y="485775"/>
+            <a:ext cx="38100" cy="76200"/>
           </a:xfrm>
           <a:prstGeom prst="rect">
             <a:avLst/>
           </a:prstGeom>
           <a:solidFill>
-            <a:srgbClr val="22354A"/>
+            <a:srgbClr val="8A8880"/>
           </a:solidFill>
           <a:ln/>
         </p:spPr>
@@ -4823,14 +4823,14 @@
         </p:nvSpPr>
         <p:spPr>
           <a:xfrm>
-            <a:off x="10944225" y="504825"/>
-            <a:ext cx="28575" cy="47625"/>
+            <a:off x="10934700" y="485775"/>
+            <a:ext cx="38100" cy="76200"/>
           </a:xfrm>
           <a:prstGeom prst="rect">
             <a:avLst/>
           </a:prstGeom>
           <a:solidFill>
-            <a:srgbClr val="22354A"/>
+            <a:srgbClr val="8A8880"/>
           </a:solidFill>
           <a:ln/>
         </p:spPr>
@@ -4843,8 +4843,8 @@
         </p:nvSpPr>
         <p:spPr>
           <a:xfrm>
-            <a:off x="11077575" y="428625"/>
-            <a:ext cx="28575" cy="123825"/>
+            <a:off x="11068050" y="419100"/>
+            <a:ext cx="38100" cy="142875"/>
           </a:xfrm>
           <a:prstGeom prst="rect">
             <a:avLst/>
@@ -4863,14 +4863,14 @@
         </p:nvSpPr>
         <p:spPr>
           <a:xfrm>
-            <a:off x="11210925" y="504825"/>
-            <a:ext cx="28575" cy="47625"/>
+            <a:off x="11201400" y="485775"/>
+            <a:ext cx="38100" cy="76200"/>
           </a:xfrm>
           <a:prstGeom prst="rect">
             <a:avLst/>
           </a:prstGeom>
           <a:solidFill>
-            <a:srgbClr val="22354A"/>
+            <a:srgbClr val="8A8880"/>
           </a:solidFill>
           <a:ln/>
         </p:spPr>
@@ -4883,14 +4883,14 @@
         </p:nvSpPr>
         <p:spPr>
           <a:xfrm>
-            <a:off x="11344275" y="504825"/>
-            <a:ext cx="28575" cy="47625"/>
+            <a:off x="11334750" y="485775"/>
+            <a:ext cx="38100" cy="76200"/>
           </a:xfrm>
           <a:prstGeom prst="rect">
             <a:avLst/>
           </a:prstGeom>
           <a:solidFill>
-            <a:srgbClr val="22354A"/>
+            <a:srgbClr val="8A8880"/>
           </a:solidFill>
           <a:ln/>
         </p:spPr>
@@ -4903,14 +4903,14 @@
         </p:nvSpPr>
         <p:spPr>
           <a:xfrm>
-            <a:off x="11477625" y="504825"/>
-            <a:ext cx="28575" cy="47625"/>
+            <a:off x="11468100" y="485775"/>
+            <a:ext cx="38100" cy="76200"/>
           </a:xfrm>
           <a:prstGeom prst="rect">
             <a:avLst/>
           </a:prstGeom>
           <a:solidFill>
-            <a:srgbClr val="22354A"/>
+            <a:srgbClr val="8A8880"/>
           </a:solidFill>
           <a:ln/>
         </p:spPr>
@@ -6739,14 +6739,14 @@
         </p:nvSpPr>
         <p:spPr>
           <a:xfrm>
-            <a:off x="10677525" y="504825"/>
-            <a:ext cx="28575" cy="47625"/>
+            <a:off x="10668000" y="485775"/>
+            <a:ext cx="38100" cy="76200"/>
           </a:xfrm>
           <a:prstGeom prst="rect">
             <a:avLst/>
           </a:prstGeom>
           <a:solidFill>
-            <a:srgbClr val="22354A"/>
+            <a:srgbClr val="8A8880"/>
           </a:solidFill>
           <a:ln/>
         </p:spPr>
@@ -6759,14 +6759,14 @@
         </p:nvSpPr>
         <p:spPr>
           <a:xfrm>
-            <a:off x="10810875" y="504825"/>
-            <a:ext cx="28575" cy="47625"/>
+            <a:off x="10801350" y="485775"/>
+            <a:ext cx="38100" cy="76200"/>
           </a:xfrm>
           <a:prstGeom prst="rect">
             <a:avLst/>
           </a:prstGeom>
           <a:solidFill>
-            <a:srgbClr val="22354A"/>
+            <a:srgbClr val="8A8880"/>
           </a:solidFill>
           <a:ln/>
         </p:spPr>
@@ -6779,14 +6779,14 @@
         </p:nvSpPr>
         <p:spPr>
           <a:xfrm>
-            <a:off x="10944225" y="504825"/>
-            <a:ext cx="28575" cy="47625"/>
+            <a:off x="10934700" y="485775"/>
+            <a:ext cx="38100" cy="76200"/>
           </a:xfrm>
           <a:prstGeom prst="rect">
             <a:avLst/>
           </a:prstGeom>
           <a:solidFill>
-            <a:srgbClr val="22354A"/>
+            <a:srgbClr val="8A8880"/>
           </a:solidFill>
           <a:ln/>
         </p:spPr>
@@ -6799,8 +6799,8 @@
         </p:nvSpPr>
         <p:spPr>
           <a:xfrm>
-            <a:off x="11077575" y="428625"/>
-            <a:ext cx="28575" cy="123825"/>
+            <a:off x="11068050" y="419100"/>
+            <a:ext cx="38100" cy="142875"/>
           </a:xfrm>
           <a:prstGeom prst="rect">
             <a:avLst/>
@@ -6819,14 +6819,14 @@
         </p:nvSpPr>
         <p:spPr>
           <a:xfrm>
-            <a:off x="11210925" y="504825"/>
-            <a:ext cx="28575" cy="47625"/>
+            <a:off x="11201400" y="485775"/>
+            <a:ext cx="38100" cy="76200"/>
           </a:xfrm>
           <a:prstGeom prst="rect">
             <a:avLst/>
           </a:prstGeom>
           <a:solidFill>
-            <a:srgbClr val="22354A"/>
+            <a:srgbClr val="8A8880"/>
           </a:solidFill>
           <a:ln/>
         </p:spPr>
@@ -6839,14 +6839,14 @@
         </p:nvSpPr>
         <p:spPr>
           <a:xfrm>
-            <a:off x="11344275" y="504825"/>
-            <a:ext cx="28575" cy="47625"/>
+            <a:off x="11334750" y="485775"/>
+            <a:ext cx="38100" cy="76200"/>
           </a:xfrm>
           <a:prstGeom prst="rect">
             <a:avLst/>
           </a:prstGeom>
           <a:solidFill>
-            <a:srgbClr val="22354A"/>
+            <a:srgbClr val="8A8880"/>
           </a:solidFill>
           <a:ln/>
         </p:spPr>
@@ -6859,14 +6859,14 @@
         </p:nvSpPr>
         <p:spPr>
           <a:xfrm>
-            <a:off x="11477625" y="504825"/>
-            <a:ext cx="28575" cy="47625"/>
+            <a:off x="11468100" y="485775"/>
+            <a:ext cx="38100" cy="76200"/>
           </a:xfrm>
           <a:prstGeom prst="rect">
             <a:avLst/>
           </a:prstGeom>
           <a:solidFill>
-            <a:srgbClr val="22354A"/>
+            <a:srgbClr val="8A8880"/>
           </a:solidFill>
           <a:ln/>
         </p:spPr>
@@ -9714,14 +9714,14 @@
         </p:nvSpPr>
         <p:spPr>
           <a:xfrm>
-            <a:off x="10677525" y="504825"/>
-            <a:ext cx="28575" cy="47625"/>
+            <a:off x="10668000" y="485775"/>
+            <a:ext cx="38100" cy="76200"/>
           </a:xfrm>
           <a:prstGeom prst="rect">
             <a:avLst/>
           </a:prstGeom>
           <a:solidFill>
-            <a:srgbClr val="22354A"/>
+            <a:srgbClr val="8A8880"/>
           </a:solidFill>
           <a:ln/>
         </p:spPr>
@@ -9734,14 +9734,14 @@
         </p:nvSpPr>
         <p:spPr>
           <a:xfrm>
-            <a:off x="10810875" y="504825"/>
-            <a:ext cx="28575" cy="47625"/>
+            <a:off x="10801350" y="485775"/>
+            <a:ext cx="38100" cy="76200"/>
           </a:xfrm>
           <a:prstGeom prst="rect">
             <a:avLst/>
           </a:prstGeom>
           <a:solidFill>
-            <a:srgbClr val="22354A"/>
+            <a:srgbClr val="8A8880"/>
           </a:solidFill>
           <a:ln/>
         </p:spPr>
@@ -9754,14 +9754,14 @@
         </p:nvSpPr>
         <p:spPr>
           <a:xfrm>
-            <a:off x="10944225" y="504825"/>
-            <a:ext cx="28575" cy="47625"/>
+            <a:off x="10934700" y="485775"/>
+            <a:ext cx="38100" cy="76200"/>
           </a:xfrm>
           <a:prstGeom prst="rect">
             <a:avLst/>
           </a:prstGeom>
           <a:solidFill>
-            <a:srgbClr val="22354A"/>
+            <a:srgbClr val="8A8880"/>
           </a:solidFill>
           <a:ln/>
         </p:spPr>
@@ -9774,14 +9774,14 @@
         </p:nvSpPr>
         <p:spPr>
           <a:xfrm>
-            <a:off x="11077575" y="504825"/>
-            <a:ext cx="28575" cy="47625"/>
+            <a:off x="11068050" y="485775"/>
+            <a:ext cx="38100" cy="76200"/>
           </a:xfrm>
           <a:prstGeom prst="rect">
             <a:avLst/>
           </a:prstGeom>
           <a:solidFill>
-            <a:srgbClr val="22354A"/>
+            <a:srgbClr val="8A8880"/>
           </a:solidFill>
           <a:ln/>
         </p:spPr>
@@ -9794,8 +9794,8 @@
         </p:nvSpPr>
         <p:spPr>
           <a:xfrm>
-            <a:off x="11210925" y="428625"/>
-            <a:ext cx="28575" cy="123825"/>
+            <a:off x="11201400" y="419100"/>
+            <a:ext cx="38100" cy="142875"/>
           </a:xfrm>
           <a:prstGeom prst="rect">
             <a:avLst/>
@@ -9814,14 +9814,14 @@
         </p:nvSpPr>
         <p:spPr>
           <a:xfrm>
-            <a:off x="11344275" y="504825"/>
-            <a:ext cx="28575" cy="47625"/>
+            <a:off x="11334750" y="485775"/>
+            <a:ext cx="38100" cy="76200"/>
           </a:xfrm>
           <a:prstGeom prst="rect">
             <a:avLst/>
           </a:prstGeom>
           <a:solidFill>
-            <a:srgbClr val="22354A"/>
+            <a:srgbClr val="8A8880"/>
           </a:solidFill>
           <a:ln/>
         </p:spPr>
@@ -9834,14 +9834,14 @@
         </p:nvSpPr>
         <p:spPr>
           <a:xfrm>
-            <a:off x="11477625" y="504825"/>
-            <a:ext cx="28575" cy="47625"/>
+            <a:off x="11468100" y="485775"/>
+            <a:ext cx="38100" cy="76200"/>
           </a:xfrm>
           <a:prstGeom prst="rect">
             <a:avLst/>
           </a:prstGeom>
           <a:solidFill>
-            <a:srgbClr val="22354A"/>
+            <a:srgbClr val="8A8880"/>
           </a:solidFill>
           <a:ln/>
         </p:spPr>
@@ -12599,14 +12599,14 @@
         </p:nvSpPr>
         <p:spPr>
           <a:xfrm>
-            <a:off x="10677525" y="504825"/>
-            <a:ext cx="28575" cy="47625"/>
+            <a:off x="10668000" y="485775"/>
+            <a:ext cx="38100" cy="76200"/>
           </a:xfrm>
           <a:prstGeom prst="rect">
             <a:avLst/>
           </a:prstGeom>
           <a:solidFill>
-            <a:srgbClr val="22354A"/>
+            <a:srgbClr val="8A8880"/>
           </a:solidFill>
           <a:ln/>
         </p:spPr>
@@ -12619,14 +12619,14 @@
         </p:nvSpPr>
         <p:spPr>
           <a:xfrm>
-            <a:off x="10810875" y="504825"/>
-            <a:ext cx="28575" cy="47625"/>
+            <a:off x="10801350" y="485775"/>
+            <a:ext cx="38100" cy="76200"/>
           </a:xfrm>
           <a:prstGeom prst="rect">
             <a:avLst/>
           </a:prstGeom>
           <a:solidFill>
-            <a:srgbClr val="22354A"/>
+            <a:srgbClr val="8A8880"/>
           </a:solidFill>
           <a:ln/>
         </p:spPr>
@@ -12639,14 +12639,14 @@
         </p:nvSpPr>
         <p:spPr>
           <a:xfrm>
-            <a:off x="10944225" y="504825"/>
-            <a:ext cx="28575" cy="47625"/>
+            <a:off x="10934700" y="485775"/>
+            <a:ext cx="38100" cy="76200"/>
           </a:xfrm>
           <a:prstGeom prst="rect">
             <a:avLst/>
           </a:prstGeom>
           <a:solidFill>
-            <a:srgbClr val="22354A"/>
+            <a:srgbClr val="8A8880"/>
           </a:solidFill>
           <a:ln/>
         </p:spPr>
@@ -12659,14 +12659,14 @@
         </p:nvSpPr>
         <p:spPr>
           <a:xfrm>
-            <a:off x="11077575" y="504825"/>
-            <a:ext cx="28575" cy="47625"/>
+            <a:off x="11068050" y="485775"/>
+            <a:ext cx="38100" cy="76200"/>
           </a:xfrm>
           <a:prstGeom prst="rect">
             <a:avLst/>
           </a:prstGeom>
           <a:solidFill>
-            <a:srgbClr val="22354A"/>
+            <a:srgbClr val="8A8880"/>
           </a:solidFill>
           <a:ln/>
         </p:spPr>
@@ -12679,8 +12679,8 @@
         </p:nvSpPr>
         <p:spPr>
           <a:xfrm>
-            <a:off x="11210925" y="428625"/>
-            <a:ext cx="28575" cy="123825"/>
+            <a:off x="11201400" y="419100"/>
+            <a:ext cx="38100" cy="142875"/>
           </a:xfrm>
           <a:prstGeom prst="rect">
             <a:avLst/>
@@ -12699,14 +12699,14 @@
         </p:nvSpPr>
         <p:spPr>
           <a:xfrm>
-            <a:off x="11344275" y="504825"/>
-            <a:ext cx="28575" cy="47625"/>
+            <a:off x="11334750" y="485775"/>
+            <a:ext cx="38100" cy="76200"/>
           </a:xfrm>
           <a:prstGeom prst="rect">
             <a:avLst/>
           </a:prstGeom>
           <a:solidFill>
-            <a:srgbClr val="22354A"/>
+            <a:srgbClr val="8A8880"/>
           </a:solidFill>
           <a:ln/>
         </p:spPr>
@@ -12719,14 +12719,14 @@
         </p:nvSpPr>
         <p:spPr>
           <a:xfrm>
-            <a:off x="11477625" y="504825"/>
-            <a:ext cx="28575" cy="47625"/>
+            <a:off x="11468100" y="485775"/>
+            <a:ext cx="38100" cy="76200"/>
           </a:xfrm>
           <a:prstGeom prst="rect">
             <a:avLst/>
           </a:prstGeom>
           <a:solidFill>
-            <a:srgbClr val="22354A"/>
+            <a:srgbClr val="8A8880"/>
           </a:solidFill>
           <a:ln/>
         </p:spPr>
@@ -14471,14 +14471,14 @@
         </p:nvSpPr>
         <p:spPr>
           <a:xfrm>
-            <a:off x="10677525" y="504825"/>
-            <a:ext cx="28575" cy="47625"/>
+            <a:off x="10668000" y="485775"/>
+            <a:ext cx="38100" cy="76200"/>
           </a:xfrm>
           <a:prstGeom prst="rect">
             <a:avLst/>
           </a:prstGeom>
           <a:solidFill>
-            <a:srgbClr val="22354A"/>
+            <a:srgbClr val="8A8880"/>
           </a:solidFill>
           <a:ln/>
         </p:spPr>
@@ -14491,14 +14491,14 @@
         </p:nvSpPr>
         <p:spPr>
           <a:xfrm>
-            <a:off x="10810875" y="504825"/>
-            <a:ext cx="28575" cy="47625"/>
+            <a:off x="10801350" y="485775"/>
+            <a:ext cx="38100" cy="76200"/>
           </a:xfrm>
           <a:prstGeom prst="rect">
             <a:avLst/>
           </a:prstGeom>
           <a:solidFill>
-            <a:srgbClr val="22354A"/>
+            <a:srgbClr val="8A8880"/>
           </a:solidFill>
           <a:ln/>
         </p:spPr>
@@ -14511,14 +14511,14 @@
         </p:nvSpPr>
         <p:spPr>
           <a:xfrm>
-            <a:off x="10944225" y="504825"/>
-            <a:ext cx="28575" cy="47625"/>
+            <a:off x="10934700" y="485775"/>
+            <a:ext cx="38100" cy="76200"/>
           </a:xfrm>
           <a:prstGeom prst="rect">
             <a:avLst/>
           </a:prstGeom>
           <a:solidFill>
-            <a:srgbClr val="22354A"/>
+            <a:srgbClr val="8A8880"/>
           </a:solidFill>
           <a:ln/>
         </p:spPr>
@@ -14531,14 +14531,14 @@
         </p:nvSpPr>
         <p:spPr>
           <a:xfrm>
-            <a:off x="11077575" y="504825"/>
-            <a:ext cx="28575" cy="47625"/>
+            <a:off x="11068050" y="485775"/>
+            <a:ext cx="38100" cy="76200"/>
           </a:xfrm>
           <a:prstGeom prst="rect">
             <a:avLst/>
           </a:prstGeom>
           <a:solidFill>
-            <a:srgbClr val="22354A"/>
+            <a:srgbClr val="8A8880"/>
           </a:solidFill>
           <a:ln/>
         </p:spPr>
@@ -14551,14 +14551,14 @@
         </p:nvSpPr>
         <p:spPr>
           <a:xfrm>
-            <a:off x="11210925" y="504825"/>
-            <a:ext cx="28575" cy="47625"/>
+            <a:off x="11201400" y="485775"/>
+            <a:ext cx="38100" cy="76200"/>
           </a:xfrm>
           <a:prstGeom prst="rect">
             <a:avLst/>
           </a:prstGeom>
           <a:solidFill>
-            <a:srgbClr val="22354A"/>
+            <a:srgbClr val="8A8880"/>
           </a:solidFill>
           <a:ln/>
         </p:spPr>
@@ -14571,8 +14571,8 @@
         </p:nvSpPr>
         <p:spPr>
           <a:xfrm>
-            <a:off x="11344275" y="428625"/>
-            <a:ext cx="28575" cy="123825"/>
+            <a:off x="11334750" y="419100"/>
+            <a:ext cx="38100" cy="142875"/>
           </a:xfrm>
           <a:prstGeom prst="rect">
             <a:avLst/>
@@ -14591,14 +14591,14 @@
         </p:nvSpPr>
         <p:spPr>
           <a:xfrm>
-            <a:off x="11477625" y="504825"/>
-            <a:ext cx="28575" cy="47625"/>
+            <a:off x="11468100" y="485775"/>
+            <a:ext cx="38100" cy="76200"/>
           </a:xfrm>
           <a:prstGeom prst="rect">
             <a:avLst/>
           </a:prstGeom>
           <a:solidFill>
-            <a:srgbClr val="22354A"/>
+            <a:srgbClr val="8A8880"/>
           </a:solidFill>
           <a:ln/>
         </p:spPr>
@@ -17226,14 +17226,14 @@
         </p:nvSpPr>
         <p:spPr>
           <a:xfrm>
-            <a:off x="10677525" y="504825"/>
-            <a:ext cx="28575" cy="47625"/>
+            <a:off x="10668000" y="485775"/>
+            <a:ext cx="38100" cy="76200"/>
           </a:xfrm>
           <a:prstGeom prst="rect">
             <a:avLst/>
           </a:prstGeom>
           <a:solidFill>
-            <a:srgbClr val="22354A"/>
+            <a:srgbClr val="8A8880"/>
           </a:solidFill>
           <a:ln/>
         </p:spPr>
@@ -17246,14 +17246,14 @@
         </p:nvSpPr>
         <p:spPr>
           <a:xfrm>
-            <a:off x="10810875" y="504825"/>
-            <a:ext cx="28575" cy="47625"/>
+            <a:off x="10801350" y="485775"/>
+            <a:ext cx="38100" cy="76200"/>
           </a:xfrm>
           <a:prstGeom prst="rect">
             <a:avLst/>
           </a:prstGeom>
           <a:solidFill>
-            <a:srgbClr val="22354A"/>
+            <a:srgbClr val="8A8880"/>
           </a:solidFill>
           <a:ln/>
         </p:spPr>
@@ -17266,14 +17266,14 @@
         </p:nvSpPr>
         <p:spPr>
           <a:xfrm>
-            <a:off x="10944225" y="504825"/>
-            <a:ext cx="28575" cy="47625"/>
+            <a:off x="10934700" y="485775"/>
+            <a:ext cx="38100" cy="76200"/>
           </a:xfrm>
           <a:prstGeom prst="rect">
             <a:avLst/>
           </a:prstGeom>
           <a:solidFill>
-            <a:srgbClr val="22354A"/>
+            <a:srgbClr val="8A8880"/>
           </a:solidFill>
           <a:ln/>
         </p:spPr>
@@ -17286,14 +17286,14 @@
         </p:nvSpPr>
         <p:spPr>
           <a:xfrm>
-            <a:off x="11077575" y="504825"/>
-            <a:ext cx="28575" cy="47625"/>
+            <a:off x="11068050" y="485775"/>
+            <a:ext cx="38100" cy="76200"/>
           </a:xfrm>
           <a:prstGeom prst="rect">
             <a:avLst/>
           </a:prstGeom>
           <a:solidFill>
-            <a:srgbClr val="22354A"/>
+            <a:srgbClr val="8A8880"/>
           </a:solidFill>
           <a:ln/>
         </p:spPr>
@@ -17306,14 +17306,14 @@
         </p:nvSpPr>
         <p:spPr>
           <a:xfrm>
-            <a:off x="11210925" y="504825"/>
-            <a:ext cx="28575" cy="47625"/>
+            <a:off x="11201400" y="485775"/>
+            <a:ext cx="38100" cy="76200"/>
           </a:xfrm>
           <a:prstGeom prst="rect">
             <a:avLst/>
           </a:prstGeom>
           <a:solidFill>
-            <a:srgbClr val="22354A"/>
+            <a:srgbClr val="8A8880"/>
           </a:solidFill>
           <a:ln/>
         </p:spPr>
@@ -17326,8 +17326,8 @@
         </p:nvSpPr>
         <p:spPr>
           <a:xfrm>
-            <a:off x="11344275" y="428625"/>
-            <a:ext cx="28575" cy="123825"/>
+            <a:off x="11334750" y="419100"/>
+            <a:ext cx="38100" cy="142875"/>
           </a:xfrm>
           <a:prstGeom prst="rect">
             <a:avLst/>
@@ -17346,14 +17346,14 @@
         </p:nvSpPr>
         <p:spPr>
           <a:xfrm>
-            <a:off x="11477625" y="504825"/>
-            <a:ext cx="28575" cy="47625"/>
+            <a:off x="11468100" y="485775"/>
+            <a:ext cx="38100" cy="76200"/>
           </a:xfrm>
           <a:prstGeom prst="rect">
             <a:avLst/>
           </a:prstGeom>
           <a:solidFill>
-            <a:srgbClr val="22354A"/>
+            <a:srgbClr val="8A8880"/>
           </a:solidFill>
           <a:ln/>
         </p:spPr>
@@ -18462,14 +18462,14 @@
         </p:nvSpPr>
         <p:spPr>
           <a:xfrm>
-            <a:off x="10677525" y="504825"/>
-            <a:ext cx="28575" cy="47625"/>
+            <a:off x="10668000" y="485775"/>
+            <a:ext cx="38100" cy="76200"/>
           </a:xfrm>
           <a:prstGeom prst="rect">
             <a:avLst/>
           </a:prstGeom>
           <a:solidFill>
-            <a:srgbClr val="22354A"/>
+            <a:srgbClr val="8A8880"/>
           </a:solidFill>
           <a:ln/>
         </p:spPr>
@@ -18482,14 +18482,14 @@
         </p:nvSpPr>
         <p:spPr>
           <a:xfrm>
-            <a:off x="10810875" y="504825"/>
-            <a:ext cx="28575" cy="47625"/>
+            <a:off x="10801350" y="485775"/>
+            <a:ext cx="38100" cy="76200"/>
           </a:xfrm>
           <a:prstGeom prst="rect">
             <a:avLst/>
           </a:prstGeom>
           <a:solidFill>
-            <a:srgbClr val="22354A"/>
+            <a:srgbClr val="8A8880"/>
           </a:solidFill>
           <a:ln/>
         </p:spPr>
@@ -18502,14 +18502,14 @@
         </p:nvSpPr>
         <p:spPr>
           <a:xfrm>
-            <a:off x="10944225" y="504825"/>
-            <a:ext cx="28575" cy="47625"/>
+            <a:off x="10934700" y="485775"/>
+            <a:ext cx="38100" cy="76200"/>
           </a:xfrm>
           <a:prstGeom prst="rect">
             <a:avLst/>
           </a:prstGeom>
           <a:solidFill>
-            <a:srgbClr val="22354A"/>
+            <a:srgbClr val="8A8880"/>
           </a:solidFill>
           <a:ln/>
         </p:spPr>
@@ -18522,14 +18522,14 @@
         </p:nvSpPr>
         <p:spPr>
           <a:xfrm>
-            <a:off x="11077575" y="504825"/>
-            <a:ext cx="28575" cy="47625"/>
+            <a:off x="11068050" y="485775"/>
+            <a:ext cx="38100" cy="76200"/>
           </a:xfrm>
           <a:prstGeom prst="rect">
             <a:avLst/>
           </a:prstGeom>
           <a:solidFill>
-            <a:srgbClr val="22354A"/>
+            <a:srgbClr val="8A8880"/>
           </a:solidFill>
           <a:ln/>
         </p:spPr>
@@ -18542,14 +18542,14 @@
         </p:nvSpPr>
         <p:spPr>
           <a:xfrm>
-            <a:off x="11210925" y="504825"/>
-            <a:ext cx="28575" cy="47625"/>
+            <a:off x="11201400" y="485775"/>
+            <a:ext cx="38100" cy="76200"/>
           </a:xfrm>
           <a:prstGeom prst="rect">
             <a:avLst/>
           </a:prstGeom>
           <a:solidFill>
-            <a:srgbClr val="22354A"/>
+            <a:srgbClr val="8A8880"/>
           </a:solidFill>
           <a:ln/>
         </p:spPr>
@@ -18562,14 +18562,14 @@
         </p:nvSpPr>
         <p:spPr>
           <a:xfrm>
-            <a:off x="11344275" y="504825"/>
-            <a:ext cx="28575" cy="47625"/>
+            <a:off x="11334750" y="485775"/>
+            <a:ext cx="38100" cy="76200"/>
           </a:xfrm>
           <a:prstGeom prst="rect">
             <a:avLst/>
           </a:prstGeom>
           <a:solidFill>
-            <a:srgbClr val="22354A"/>
+            <a:srgbClr val="8A8880"/>
           </a:solidFill>
           <a:ln/>
         </p:spPr>
@@ -18582,8 +18582,8 @@
         </p:nvSpPr>
         <p:spPr>
           <a:xfrm>
-            <a:off x="11477625" y="428625"/>
-            <a:ext cx="28575" cy="123825"/>
+            <a:off x="11468100" y="419100"/>
+            <a:ext cx="38100" cy="142875"/>
           </a:xfrm>
           <a:prstGeom prst="rect">
             <a:avLst/>
@@ -26846,8 +26846,8 @@
         </p:nvSpPr>
         <p:spPr>
           <a:xfrm>
-            <a:off x="10677525" y="428625"/>
-            <a:ext cx="28575" cy="123825"/>
+            <a:off x="10668000" y="419100"/>
+            <a:ext cx="38100" cy="142875"/>
           </a:xfrm>
           <a:prstGeom prst="rect">
             <a:avLst/>
@@ -26866,14 +26866,14 @@
         </p:nvSpPr>
         <p:spPr>
           <a:xfrm>
-            <a:off x="10810875" y="504825"/>
-            <a:ext cx="28575" cy="47625"/>
+            <a:off x="10801350" y="485775"/>
+            <a:ext cx="38100" cy="76200"/>
           </a:xfrm>
           <a:prstGeom prst="rect">
             <a:avLst/>
           </a:prstGeom>
           <a:solidFill>
-            <a:srgbClr val="22354A"/>
+            <a:srgbClr val="8A8880"/>
           </a:solidFill>
           <a:ln/>
         </p:spPr>
@@ -26886,14 +26886,14 @@
         </p:nvSpPr>
         <p:spPr>
           <a:xfrm>
-            <a:off x="10944225" y="504825"/>
-            <a:ext cx="28575" cy="47625"/>
+            <a:off x="10934700" y="485775"/>
+            <a:ext cx="38100" cy="76200"/>
           </a:xfrm>
           <a:prstGeom prst="rect">
             <a:avLst/>
           </a:prstGeom>
           <a:solidFill>
-            <a:srgbClr val="22354A"/>
+            <a:srgbClr val="8A8880"/>
           </a:solidFill>
           <a:ln/>
         </p:spPr>
@@ -26906,14 +26906,14 @@
         </p:nvSpPr>
         <p:spPr>
           <a:xfrm>
-            <a:off x="11077575" y="504825"/>
-            <a:ext cx="28575" cy="47625"/>
+            <a:off x="11068050" y="485775"/>
+            <a:ext cx="38100" cy="76200"/>
           </a:xfrm>
           <a:prstGeom prst="rect">
             <a:avLst/>
           </a:prstGeom>
           <a:solidFill>
-            <a:srgbClr val="22354A"/>
+            <a:srgbClr val="8A8880"/>
           </a:solidFill>
           <a:ln/>
         </p:spPr>
@@ -26926,14 +26926,14 @@
         </p:nvSpPr>
         <p:spPr>
           <a:xfrm>
-            <a:off x="11210925" y="504825"/>
-            <a:ext cx="28575" cy="47625"/>
+            <a:off x="11201400" y="485775"/>
+            <a:ext cx="38100" cy="76200"/>
           </a:xfrm>
           <a:prstGeom prst="rect">
             <a:avLst/>
           </a:prstGeom>
           <a:solidFill>
-            <a:srgbClr val="22354A"/>
+            <a:srgbClr val="8A8880"/>
           </a:solidFill>
           <a:ln/>
         </p:spPr>
@@ -26946,14 +26946,14 @@
         </p:nvSpPr>
         <p:spPr>
           <a:xfrm>
-            <a:off x="11344275" y="504825"/>
-            <a:ext cx="28575" cy="47625"/>
+            <a:off x="11334750" y="485775"/>
+            <a:ext cx="38100" cy="76200"/>
           </a:xfrm>
           <a:prstGeom prst="rect">
             <a:avLst/>
           </a:prstGeom>
           <a:solidFill>
-            <a:srgbClr val="22354A"/>
+            <a:srgbClr val="8A8880"/>
           </a:solidFill>
           <a:ln/>
         </p:spPr>
@@ -26966,14 +26966,14 @@
         </p:nvSpPr>
         <p:spPr>
           <a:xfrm>
-            <a:off x="11477625" y="504825"/>
-            <a:ext cx="28575" cy="47625"/>
+            <a:off x="11468100" y="485775"/>
+            <a:ext cx="38100" cy="76200"/>
           </a:xfrm>
           <a:prstGeom prst="rect">
             <a:avLst/>
           </a:prstGeom>
           <a:solidFill>
-            <a:srgbClr val="22354A"/>
+            <a:srgbClr val="8A8880"/>
           </a:solidFill>
           <a:ln/>
         </p:spPr>
@@ -28615,14 +28615,14 @@
         </p:nvSpPr>
         <p:spPr>
           <a:xfrm>
-            <a:off x="10677525" y="504825"/>
-            <a:ext cx="28575" cy="47625"/>
+            <a:off x="10668000" y="485775"/>
+            <a:ext cx="38100" cy="76200"/>
           </a:xfrm>
           <a:prstGeom prst="rect">
             <a:avLst/>
           </a:prstGeom>
           <a:solidFill>
-            <a:srgbClr val="22354A"/>
+            <a:srgbClr val="8A8880"/>
           </a:solidFill>
           <a:ln/>
         </p:spPr>
@@ -28635,8 +28635,8 @@
         </p:nvSpPr>
         <p:spPr>
           <a:xfrm>
-            <a:off x="10810875" y="428625"/>
-            <a:ext cx="28575" cy="123825"/>
+            <a:off x="10801350" y="419100"/>
+            <a:ext cx="38100" cy="142875"/>
           </a:xfrm>
           <a:prstGeom prst="rect">
             <a:avLst/>
@@ -28655,14 +28655,14 @@
         </p:nvSpPr>
         <p:spPr>
           <a:xfrm>
-            <a:off x="10944225" y="504825"/>
-            <a:ext cx="28575" cy="47625"/>
+            <a:off x="10934700" y="485775"/>
+            <a:ext cx="38100" cy="76200"/>
           </a:xfrm>
           <a:prstGeom prst="rect">
             <a:avLst/>
           </a:prstGeom>
           <a:solidFill>
-            <a:srgbClr val="22354A"/>
+            <a:srgbClr val="8A8880"/>
           </a:solidFill>
           <a:ln/>
         </p:spPr>
@@ -28675,14 +28675,14 @@
         </p:nvSpPr>
         <p:spPr>
           <a:xfrm>
-            <a:off x="11077575" y="504825"/>
-            <a:ext cx="28575" cy="47625"/>
+            <a:off x="11068050" y="485775"/>
+            <a:ext cx="38100" cy="76200"/>
           </a:xfrm>
           <a:prstGeom prst="rect">
             <a:avLst/>
           </a:prstGeom>
           <a:solidFill>
-            <a:srgbClr val="22354A"/>
+            <a:srgbClr val="8A8880"/>
           </a:solidFill>
           <a:ln/>
         </p:spPr>
@@ -28695,14 +28695,14 @@
         </p:nvSpPr>
         <p:spPr>
           <a:xfrm>
-            <a:off x="11210925" y="504825"/>
-            <a:ext cx="28575" cy="47625"/>
+            <a:off x="11201400" y="485775"/>
+            <a:ext cx="38100" cy="76200"/>
           </a:xfrm>
           <a:prstGeom prst="rect">
             <a:avLst/>
           </a:prstGeom>
           <a:solidFill>
-            <a:srgbClr val="22354A"/>
+            <a:srgbClr val="8A8880"/>
           </a:solidFill>
           <a:ln/>
         </p:spPr>
@@ -28715,14 +28715,14 @@
         </p:nvSpPr>
         <p:spPr>
           <a:xfrm>
-            <a:off x="11344275" y="504825"/>
-            <a:ext cx="28575" cy="47625"/>
+            <a:off x="11334750" y="485775"/>
+            <a:ext cx="38100" cy="76200"/>
           </a:xfrm>
           <a:prstGeom prst="rect">
             <a:avLst/>
           </a:prstGeom>
           <a:solidFill>
-            <a:srgbClr val="22354A"/>
+            <a:srgbClr val="8A8880"/>
           </a:solidFill>
           <a:ln/>
         </p:spPr>
@@ -28735,14 +28735,14 @@
         </p:nvSpPr>
         <p:spPr>
           <a:xfrm>
-            <a:off x="11477625" y="504825"/>
-            <a:ext cx="28575" cy="47625"/>
+            <a:off x="11468100" y="485775"/>
+            <a:ext cx="38100" cy="76200"/>
           </a:xfrm>
           <a:prstGeom prst="rect">
             <a:avLst/>
           </a:prstGeom>
           <a:solidFill>
-            <a:srgbClr val="22354A"/>
+            <a:srgbClr val="8A8880"/>
           </a:solidFill>
           <a:ln/>
         </p:spPr>
@@ -31554,14 +31554,14 @@
         </p:nvSpPr>
         <p:spPr>
           <a:xfrm>
-            <a:off x="10677525" y="504825"/>
-            <a:ext cx="28575" cy="47625"/>
+            <a:off x="10668000" y="485775"/>
+            <a:ext cx="38100" cy="76200"/>
           </a:xfrm>
           <a:prstGeom prst="rect">
             <a:avLst/>
           </a:prstGeom>
           <a:solidFill>
-            <a:srgbClr val="22354A"/>
+            <a:srgbClr val="8A8880"/>
           </a:solidFill>
           <a:ln/>
         </p:spPr>
@@ -31574,8 +31574,8 @@
         </p:nvSpPr>
         <p:spPr>
           <a:xfrm>
-            <a:off x="10810875" y="428625"/>
-            <a:ext cx="28575" cy="123825"/>
+            <a:off x="10801350" y="419100"/>
+            <a:ext cx="38100" cy="142875"/>
           </a:xfrm>
           <a:prstGeom prst="rect">
             <a:avLst/>
@@ -31594,14 +31594,14 @@
         </p:nvSpPr>
         <p:spPr>
           <a:xfrm>
-            <a:off x="10944225" y="504825"/>
-            <a:ext cx="28575" cy="47625"/>
+            <a:off x="10934700" y="485775"/>
+            <a:ext cx="38100" cy="76200"/>
           </a:xfrm>
           <a:prstGeom prst="rect">
             <a:avLst/>
           </a:prstGeom>
           <a:solidFill>
-            <a:srgbClr val="22354A"/>
+            <a:srgbClr val="8A8880"/>
           </a:solidFill>
           <a:ln/>
         </p:spPr>
@@ -31614,14 +31614,14 @@
         </p:nvSpPr>
         <p:spPr>
           <a:xfrm>
-            <a:off x="11077575" y="504825"/>
-            <a:ext cx="28575" cy="47625"/>
+            <a:off x="11068050" y="485775"/>
+            <a:ext cx="38100" cy="76200"/>
           </a:xfrm>
           <a:prstGeom prst="rect">
             <a:avLst/>
           </a:prstGeom>
           <a:solidFill>
-            <a:srgbClr val="22354A"/>
+            <a:srgbClr val="8A8880"/>
           </a:solidFill>
           <a:ln/>
         </p:spPr>
@@ -31634,14 +31634,14 @@
         </p:nvSpPr>
         <p:spPr>
           <a:xfrm>
-            <a:off x="11210925" y="504825"/>
-            <a:ext cx="28575" cy="47625"/>
+            <a:off x="11201400" y="485775"/>
+            <a:ext cx="38100" cy="76200"/>
           </a:xfrm>
           <a:prstGeom prst="rect">
             <a:avLst/>
           </a:prstGeom>
           <a:solidFill>
-            <a:srgbClr val="22354A"/>
+            <a:srgbClr val="8A8880"/>
           </a:solidFill>
           <a:ln/>
         </p:spPr>
@@ -31654,14 +31654,14 @@
         </p:nvSpPr>
         <p:spPr>
           <a:xfrm>
-            <a:off x="11344275" y="504825"/>
-            <a:ext cx="28575" cy="47625"/>
+            <a:off x="11334750" y="485775"/>
+            <a:ext cx="38100" cy="76200"/>
           </a:xfrm>
           <a:prstGeom prst="rect">
             <a:avLst/>
           </a:prstGeom>
           <a:solidFill>
-            <a:srgbClr val="22354A"/>
+            <a:srgbClr val="8A8880"/>
           </a:solidFill>
           <a:ln/>
         </p:spPr>
@@ -31674,14 +31674,14 @@
         </p:nvSpPr>
         <p:spPr>
           <a:xfrm>
-            <a:off x="11477625" y="504825"/>
-            <a:ext cx="28575" cy="47625"/>
+            <a:off x="11468100" y="485775"/>
+            <a:ext cx="38100" cy="76200"/>
           </a:xfrm>
           <a:prstGeom prst="rect">
             <a:avLst/>
           </a:prstGeom>
           <a:solidFill>
-            <a:srgbClr val="22354A"/>
+            <a:srgbClr val="8A8880"/>
           </a:solidFill>
           <a:ln/>
         </p:spPr>
@@ -34593,14 +34593,14 @@
         </p:nvSpPr>
         <p:spPr>
           <a:xfrm>
-            <a:off x="10677525" y="504825"/>
-            <a:ext cx="28575" cy="47625"/>
+            <a:off x="10668000" y="485775"/>
+            <a:ext cx="38100" cy="76200"/>
           </a:xfrm>
           <a:prstGeom prst="rect">
             <a:avLst/>
           </a:prstGeom>
           <a:solidFill>
-            <a:srgbClr val="22354A"/>
+            <a:srgbClr val="8A8880"/>
           </a:solidFill>
           <a:ln/>
         </p:spPr>
@@ -34613,14 +34613,14 @@
         </p:nvSpPr>
         <p:spPr>
           <a:xfrm>
-            <a:off x="10810875" y="504825"/>
-            <a:ext cx="28575" cy="47625"/>
+            <a:off x="10801350" y="485775"/>
+            <a:ext cx="38100" cy="76200"/>
           </a:xfrm>
           <a:prstGeom prst="rect">
             <a:avLst/>
           </a:prstGeom>
           <a:solidFill>
-            <a:srgbClr val="22354A"/>
+            <a:srgbClr val="8A8880"/>
           </a:solidFill>
           <a:ln/>
         </p:spPr>
@@ -34633,8 +34633,8 @@
         </p:nvSpPr>
         <p:spPr>
           <a:xfrm>
-            <a:off x="10944225" y="428625"/>
-            <a:ext cx="28575" cy="123825"/>
+            <a:off x="10934700" y="419100"/>
+            <a:ext cx="38100" cy="142875"/>
           </a:xfrm>
           <a:prstGeom prst="rect">
             <a:avLst/>
@@ -34653,14 +34653,14 @@
         </p:nvSpPr>
         <p:spPr>
           <a:xfrm>
-            <a:off x="11077575" y="504825"/>
-            <a:ext cx="28575" cy="47625"/>
+            <a:off x="11068050" y="485775"/>
+            <a:ext cx="38100" cy="76200"/>
           </a:xfrm>
           <a:prstGeom prst="rect">
             <a:avLst/>
           </a:prstGeom>
           <a:solidFill>
-            <a:srgbClr val="22354A"/>
+            <a:srgbClr val="8A8880"/>
           </a:solidFill>
           <a:ln/>
         </p:spPr>
@@ -34673,14 +34673,14 @@
         </p:nvSpPr>
         <p:spPr>
           <a:xfrm>
-            <a:off x="11210925" y="504825"/>
-            <a:ext cx="28575" cy="47625"/>
+            <a:off x="11201400" y="485775"/>
+            <a:ext cx="38100" cy="76200"/>
           </a:xfrm>
           <a:prstGeom prst="rect">
             <a:avLst/>
           </a:prstGeom>
           <a:solidFill>
-            <a:srgbClr val="22354A"/>
+            <a:srgbClr val="8A8880"/>
           </a:solidFill>
           <a:ln/>
         </p:spPr>
@@ -34693,14 +34693,14 @@
         </p:nvSpPr>
         <p:spPr>
           <a:xfrm>
-            <a:off x="11344275" y="504825"/>
-            <a:ext cx="28575" cy="47625"/>
+            <a:off x="11334750" y="485775"/>
+            <a:ext cx="38100" cy="76200"/>
           </a:xfrm>
           <a:prstGeom prst="rect">
             <a:avLst/>
           </a:prstGeom>
           <a:solidFill>
-            <a:srgbClr val="22354A"/>
+            <a:srgbClr val="8A8880"/>
           </a:solidFill>
           <a:ln/>
         </p:spPr>
@@ -34713,14 +34713,14 @@
         </p:nvSpPr>
         <p:spPr>
           <a:xfrm>
-            <a:off x="11477625" y="504825"/>
-            <a:ext cx="28575" cy="47625"/>
+            <a:off x="11468100" y="485775"/>
+            <a:ext cx="38100" cy="76200"/>
           </a:xfrm>
           <a:prstGeom prst="rect">
             <a:avLst/>
           </a:prstGeom>
           <a:solidFill>
-            <a:srgbClr val="22354A"/>
+            <a:srgbClr val="8A8880"/>
           </a:solidFill>
           <a:ln/>
         </p:spPr>
@@ -36587,14 +36587,14 @@
         </p:nvSpPr>
         <p:spPr>
           <a:xfrm>
-            <a:off x="10677525" y="504825"/>
-            <a:ext cx="28575" cy="47625"/>
+            <a:off x="10668000" y="485775"/>
+            <a:ext cx="38100" cy="76200"/>
           </a:xfrm>
           <a:prstGeom prst="rect">
             <a:avLst/>
           </a:prstGeom>
           <a:solidFill>
-            <a:srgbClr val="22354A"/>
+            <a:srgbClr val="8A8880"/>
           </a:solidFill>
           <a:ln/>
         </p:spPr>
@@ -36607,14 +36607,14 @@
         </p:nvSpPr>
         <p:spPr>
           <a:xfrm>
-            <a:off x="10810875" y="504825"/>
-            <a:ext cx="28575" cy="47625"/>
+            <a:off x="10801350" y="485775"/>
+            <a:ext cx="38100" cy="76200"/>
           </a:xfrm>
           <a:prstGeom prst="rect">
             <a:avLst/>
           </a:prstGeom>
           <a:solidFill>
-            <a:srgbClr val="22354A"/>
+            <a:srgbClr val="8A8880"/>
           </a:solidFill>
           <a:ln/>
         </p:spPr>
@@ -36627,8 +36627,8 @@
         </p:nvSpPr>
         <p:spPr>
           <a:xfrm>
-            <a:off x="10944225" y="428625"/>
-            <a:ext cx="28575" cy="123825"/>
+            <a:off x="10934700" y="419100"/>
+            <a:ext cx="38100" cy="142875"/>
           </a:xfrm>
           <a:prstGeom prst="rect">
             <a:avLst/>
@@ -36647,14 +36647,14 @@
         </p:nvSpPr>
         <p:spPr>
           <a:xfrm>
-            <a:off x="11077575" y="504825"/>
-            <a:ext cx="28575" cy="47625"/>
+            <a:off x="11068050" y="485775"/>
+            <a:ext cx="38100" cy="76200"/>
           </a:xfrm>
           <a:prstGeom prst="rect">
             <a:avLst/>
           </a:prstGeom>
           <a:solidFill>
-            <a:srgbClr val="22354A"/>
+            <a:srgbClr val="8A8880"/>
           </a:solidFill>
           <a:ln/>
         </p:spPr>
@@ -36667,14 +36667,14 @@
         </p:nvSpPr>
         <p:spPr>
           <a:xfrm>
-            <a:off x="11210925" y="504825"/>
-            <a:ext cx="28575" cy="47625"/>
+            <a:off x="11201400" y="485775"/>
+            <a:ext cx="38100" cy="76200"/>
           </a:xfrm>
           <a:prstGeom prst="rect">
             <a:avLst/>
           </a:prstGeom>
           <a:solidFill>
-            <a:srgbClr val="22354A"/>
+            <a:srgbClr val="8A8880"/>
           </a:solidFill>
           <a:ln/>
         </p:spPr>
@@ -36687,14 +36687,14 @@
         </p:nvSpPr>
         <p:spPr>
           <a:xfrm>
-            <a:off x="11344275" y="504825"/>
-            <a:ext cx="28575" cy="47625"/>
+            <a:off x="11334750" y="485775"/>
+            <a:ext cx="38100" cy="76200"/>
           </a:xfrm>
           <a:prstGeom prst="rect">
             <a:avLst/>
           </a:prstGeom>
           <a:solidFill>
-            <a:srgbClr val="22354A"/>
+            <a:srgbClr val="8A8880"/>
           </a:solidFill>
           <a:ln/>
         </p:spPr>
@@ -36707,14 +36707,14 @@
         </p:nvSpPr>
         <p:spPr>
           <a:xfrm>
-            <a:off x="11477625" y="504825"/>
-            <a:ext cx="28575" cy="47625"/>
+            <a:off x="11468100" y="485775"/>
+            <a:ext cx="38100" cy="76200"/>
           </a:xfrm>
           <a:prstGeom prst="rect">
             <a:avLst/>
           </a:prstGeom>
           <a:solidFill>
-            <a:srgbClr val="22354A"/>
+            <a:srgbClr val="8A8880"/>
           </a:solidFill>
           <a:ln/>
         </p:spPr>
@@ -38660,14 +38660,14 @@
         </p:nvSpPr>
         <p:spPr>
           <a:xfrm>
-            <a:off x="10677525" y="504825"/>
-            <a:ext cx="28575" cy="47625"/>
+            <a:off x="10668000" y="485775"/>
+            <a:ext cx="38100" cy="76200"/>
           </a:xfrm>
           <a:prstGeom prst="rect">
             <a:avLst/>
           </a:prstGeom>
           <a:solidFill>
-            <a:srgbClr val="22354A"/>
+            <a:srgbClr val="8A8880"/>
           </a:solidFill>
           <a:ln/>
         </p:spPr>
@@ -38680,14 +38680,14 @@
         </p:nvSpPr>
         <p:spPr>
           <a:xfrm>
-            <a:off x="10810875" y="504825"/>
-            <a:ext cx="28575" cy="47625"/>
+            <a:off x="10801350" y="485775"/>
+            <a:ext cx="38100" cy="76200"/>
           </a:xfrm>
           <a:prstGeom prst="rect">
             <a:avLst/>
           </a:prstGeom>
           <a:solidFill>
-            <a:srgbClr val="22354A"/>
+            <a:srgbClr val="8A8880"/>
           </a:solidFill>
           <a:ln/>
         </p:spPr>
@@ -38700,14 +38700,14 @@
         </p:nvSpPr>
         <p:spPr>
           <a:xfrm>
-            <a:off x="10944225" y="504825"/>
-            <a:ext cx="28575" cy="47625"/>
+            <a:off x="10934700" y="485775"/>
+            <a:ext cx="38100" cy="76200"/>
           </a:xfrm>
           <a:prstGeom prst="rect">
             <a:avLst/>
           </a:prstGeom>
           <a:solidFill>
-            <a:srgbClr val="22354A"/>
+            <a:srgbClr val="8A8880"/>
           </a:solidFill>
           <a:ln/>
         </p:spPr>
@@ -38720,8 +38720,8 @@
         </p:nvSpPr>
         <p:spPr>
           <a:xfrm>
-            <a:off x="11077575" y="428625"/>
-            <a:ext cx="28575" cy="123825"/>
+            <a:off x="11068050" y="419100"/>
+            <a:ext cx="38100" cy="142875"/>
           </a:xfrm>
           <a:prstGeom prst="rect">
             <a:avLst/>
@@ -38740,14 +38740,14 @@
         </p:nvSpPr>
         <p:spPr>
           <a:xfrm>
-            <a:off x="11210925" y="504825"/>
-            <a:ext cx="28575" cy="47625"/>
+            <a:off x="11201400" y="485775"/>
+            <a:ext cx="38100" cy="76200"/>
           </a:xfrm>
           <a:prstGeom prst="rect">
             <a:avLst/>
           </a:prstGeom>
           <a:solidFill>
-            <a:srgbClr val="22354A"/>
+            <a:srgbClr val="8A8880"/>
           </a:solidFill>
           <a:ln/>
         </p:spPr>
@@ -38760,14 +38760,14 @@
         </p:nvSpPr>
         <p:spPr>
           <a:xfrm>
-            <a:off x="11344275" y="504825"/>
-            <a:ext cx="28575" cy="47625"/>
+            <a:off x="11334750" y="485775"/>
+            <a:ext cx="38100" cy="76200"/>
           </a:xfrm>
           <a:prstGeom prst="rect">
             <a:avLst/>
           </a:prstGeom>
           <a:solidFill>
-            <a:srgbClr val="22354A"/>
+            <a:srgbClr val="8A8880"/>
           </a:solidFill>
           <a:ln/>
         </p:spPr>
@@ -38780,14 +38780,14 @@
         </p:nvSpPr>
         <p:spPr>
           <a:xfrm>
-            <a:off x="11477625" y="504825"/>
-            <a:ext cx="28575" cy="47625"/>
+            <a:off x="11468100" y="485775"/>
+            <a:ext cx="38100" cy="76200"/>
           </a:xfrm>
           <a:prstGeom prst="rect">
             <a:avLst/>
           </a:prstGeom>
           <a:solidFill>
-            <a:srgbClr val="22354A"/>
+            <a:srgbClr val="8A8880"/>
           </a:solidFill>
           <a:ln/>
         </p:spPr>

--- a/docs/ppt/위례_공급가능용량_최종발표.pptx
+++ b/docs/ppt/위례_공급가능용량_최종발표.pptx
@@ -4090,7 +4090,7 @@
                 <a:ea typeface="Consolas" pitchFamily="34" charset="-122"/>
                 <a:cs typeface="Consolas" pitchFamily="34" charset="-120"/>
               </a:rPr>
-              <a:t>66%↓</a:t>
+              <a:t>67%↓</a:t>
             </a:r>
             <a:endParaRPr lang="en-US" sz="3600" dirty="0"/>
           </a:p>
@@ -4132,7 +4132,7 @@
                 <a:ea typeface="Consolas" pitchFamily="34" charset="-122"/>
                 <a:cs typeface="Consolas" pitchFamily="34" charset="-120"/>
               </a:rPr>
-              <a:t>3.80 → 1.29 MW</a:t>
+              <a:t>3.90 → 1.30 MW</a:t>
             </a:r>
             <a:endParaRPr lang="en-US" sz="1125" dirty="0"/>
           </a:p>
@@ -7268,7 +7268,7 @@
                 <a:ea typeface="Consolas" pitchFamily="34" charset="-122"/>
                 <a:cs typeface="Consolas" pitchFamily="34" charset="-120"/>
               </a:rPr>
-              <a:t>3.80</a:t>
+              <a:t>3.90</a:t>
             </a:r>
             <a:endParaRPr lang="en-US" sz="1350" dirty="0"/>
           </a:p>
@@ -7325,7 +7325,7 @@
         <p:spPr>
           <a:xfrm>
             <a:off x="838200" y="3790950"/>
-            <a:ext cx="1825233" cy="142875"/>
+            <a:ext cx="1781652" cy="142875"/>
           </a:xfrm>
           <a:prstGeom prst="rect">
             <a:avLst/>
@@ -7344,7 +7344,7 @@
         </p:nvSpPr>
         <p:spPr>
           <a:xfrm>
-            <a:off x="2777733" y="3743325"/>
+            <a:off x="2734152" y="3743325"/>
             <a:ext cx="857250" cy="285750"/>
           </a:xfrm>
           <a:prstGeom prst="rect">
@@ -15137,7 +15137,7 @@
                 <a:ea typeface="Consolas" pitchFamily="34" charset="-122"/>
                 <a:cs typeface="Consolas" pitchFamily="34" charset="-120"/>
               </a:rPr>
-              <a:t>3.80</a:t>
+              <a:t>3.90</a:t>
             </a:r>
             <a:endParaRPr lang="en-US" sz="1125" dirty="0"/>
           </a:p>
@@ -15221,7 +15221,7 @@
                 <a:ea typeface="Consolas" pitchFamily="34" charset="-122"/>
                 <a:cs typeface="Consolas" pitchFamily="34" charset="-120"/>
               </a:rPr>
-              <a:t>1.29</a:t>
+              <a:t>1.30</a:t>
             </a:r>
             <a:endParaRPr lang="en-US" sz="1275" dirty="0"/>
           </a:p>
@@ -15263,7 +15263,7 @@
                 <a:ea typeface="Consolas" pitchFamily="34" charset="-122"/>
                 <a:cs typeface="Consolas" pitchFamily="34" charset="-120"/>
               </a:rPr>
-              <a:t>66% ↓</a:t>
+              <a:t>67% ↓</a:t>
             </a:r>
             <a:endParaRPr lang="en-US" sz="1013" dirty="0"/>
           </a:p>
@@ -15370,7 +15370,7 @@
                 <a:ea typeface="Consolas" pitchFamily="34" charset="-122"/>
                 <a:cs typeface="Consolas" pitchFamily="34" charset="-120"/>
               </a:rPr>
-              <a:t>4.44</a:t>
+              <a:t>4.50</a:t>
             </a:r>
             <a:endParaRPr lang="en-US" sz="1125" dirty="0"/>
           </a:p>
@@ -15496,7 +15496,7 @@
                 <a:ea typeface="Consolas" pitchFamily="34" charset="-122"/>
                 <a:cs typeface="Consolas" pitchFamily="34" charset="-120"/>
               </a:rPr>
-              <a:t>62% ↓</a:t>
+              <a:t>63% ↓</a:t>
             </a:r>
             <a:endParaRPr lang="en-US" sz="1013" dirty="0"/>
           </a:p>
@@ -22008,7 +22008,7 @@
                 <a:ea typeface="Consolas" pitchFamily="34" charset="-122"/>
                 <a:cs typeface="Consolas" pitchFamily="34" charset="-120"/>
               </a:rPr>
-              <a:t>66%↓</a:t>
+              <a:t>67%↓</a:t>
             </a:r>
             <a:endParaRPr lang="en-US" sz="3300" dirty="0"/>
           </a:p>
@@ -22050,7 +22050,7 @@
                 <a:ea typeface="Consolas" pitchFamily="34" charset="-122"/>
                 <a:cs typeface="Consolas" pitchFamily="34" charset="-120"/>
               </a:rPr>
-              <a:t>3.80 → 1.29 MW</a:t>
+              <a:t>3.90 → 1.30 MW</a:t>
             </a:r>
             <a:endParaRPr lang="en-US" sz="1125" dirty="0"/>
           </a:p>
@@ -24648,7 +24648,7 @@
                 <a:ea typeface="Consolas" pitchFamily="34" charset="-122"/>
                 <a:cs typeface="Consolas" pitchFamily="34" charset="-120"/>
               </a:rPr>
-              <a:t>1.29</a:t>
+              <a:t>1.30</a:t>
             </a:r>
             <a:endParaRPr lang="en-US" sz="3150" dirty="0"/>
           </a:p>
@@ -24690,7 +24690,7 @@
                 <a:ea typeface="Consolas" pitchFamily="34" charset="-122"/>
                 <a:cs typeface="Consolas" pitchFamily="34" charset="-120"/>
               </a:rPr>
-              <a:t>← 3.80</a:t>
+              <a:t>← 3.90</a:t>
             </a:r>
             <a:endParaRPr lang="en-US" sz="1425" dirty="0"/>
           </a:p>
@@ -24771,7 +24771,7 @@
         </p:nvSpPr>
         <p:spPr>
           <a:xfrm>
-            <a:off x="1895475" y="4010025"/>
+            <a:off x="1885950" y="4010025"/>
             <a:ext cx="571500" cy="125016"/>
           </a:xfrm>
           <a:prstGeom prst="rect">
@@ -24879,7 +24879,7 @@
         <p:spPr>
           <a:xfrm>
             <a:off x="800100" y="4162425"/>
-            <a:ext cx="1038225" cy="76200"/>
+            <a:ext cx="1028700" cy="76200"/>
           </a:xfrm>
           <a:prstGeom prst="rect">
             <a:avLst/>
